--- a/slides.pptx
+++ b/slides.pptx
@@ -3252,6 +3252,52 @@
         </p:nvSpPr>
         <p:spPr>
           <a:xfrm>
+            <a:off x="146304" y="146304"/>
+            <a:ext cx="11899087" cy="6565392"/>
+          </a:xfrm>
+          <a:prstGeom prst="roundRect">
+            <a:avLst>
+              <a:gd name="adj" fmla="val 2000"/>
+            </a:avLst>
+          </a:prstGeom>
+          <a:noFill/>
+          <a:ln w="9525">
+            <a:solidFill>
+              <a:srgbClr val="6B5E3F"/>
+            </a:solidFill>
+          </a:ln>
+          <a:effectLst/>
+        </p:spPr>
+        <p:style>
+          <a:lnRef idx="1">
+            <a:schemeClr val="accent1"/>
+          </a:lnRef>
+          <a:fillRef idx="3">
+            <a:schemeClr val="accent1"/>
+          </a:fillRef>
+          <a:effectRef idx="2">
+            <a:schemeClr val="accent1"/>
+          </a:effectRef>
+          <a:fontRef idx="minor">
+            <a:schemeClr val="lt1"/>
+          </a:fontRef>
+        </p:style>
+        <p:txBody>
+          <a:bodyPr rtlCol="0" anchor="ctr"/>
+          <a:lstStyle/>
+          <a:p>
+            <a:pPr algn="ctr"/>
+          </a:p>
+        </p:txBody>
+      </p:sp>
+      <p:sp>
+        <p:nvSpPr>
+          <p:cNvPr id="6" name="Rounded Rectangle 5"/>
+          <p:cNvSpPr/>
+          <p:nvPr/>
+        </p:nvSpPr>
+        <p:spPr>
+          <a:xfrm>
             <a:off x="822960" y="621792"/>
             <a:ext cx="384048" cy="384048"/>
           </a:xfrm>
@@ -3314,7 +3360,7 @@
       </p:sp>
       <p:sp>
         <p:nvSpPr>
-          <p:cNvPr id="6" name="TextBox 5"/>
+          <p:cNvPr id="7" name="TextBox 6"/>
           <p:cNvSpPr txBox="1"/>
           <p:nvPr/>
         </p:nvSpPr>
@@ -3374,7 +3420,7 @@
       </p:sp>
       <p:sp>
         <p:nvSpPr>
-          <p:cNvPr id="7" name="Rectangle 6"/>
+          <p:cNvPr id="8" name="Rectangle 7"/>
           <p:cNvSpPr/>
           <p:nvPr/>
         </p:nvSpPr>
@@ -3418,7 +3464,7 @@
       </p:sp>
       <p:sp>
         <p:nvSpPr>
-          <p:cNvPr id="8" name="TextBox 7"/>
+          <p:cNvPr id="9" name="TextBox 8"/>
           <p:cNvSpPr txBox="1"/>
           <p:nvPr/>
         </p:nvSpPr>
@@ -3458,14 +3504,14 @@
       </p:sp>
       <p:sp>
         <p:nvSpPr>
-          <p:cNvPr id="9" name="TextBox 8"/>
+          <p:cNvPr id="10" name="TextBox 9"/>
           <p:cNvSpPr txBox="1"/>
           <p:nvPr/>
         </p:nvSpPr>
         <p:spPr>
           <a:xfrm>
-            <a:off x="822960" y="2011680"/>
-            <a:ext cx="5577840" cy="2194560"/>
+            <a:off x="822960" y="2148840"/>
+            <a:ext cx="5577840" cy="1737360"/>
           </a:xfrm>
           <a:prstGeom prst="rect">
             <a:avLst/>
@@ -3480,85 +3526,88 @@
           <a:p>
             <a:pPr algn="l">
               <a:lnSpc>
-                <a:spcPct val="126000"/>
-              </a:lnSpc>
-            </a:pPr>
-            <a:r>
-              <a:rPr sz="3300" b="1" i="0">
+                <a:spcPct val="130000"/>
+              </a:lnSpc>
+            </a:pPr>
+            <a:r>
+              <a:rPr sz="3200" b="1" i="0">
                 <a:solidFill>
                   <a:srgbClr val="FBF8EE"/>
                 </a:solidFill>
                 <a:latin typeface="Noto Serif KR"/>
                 <a:ea typeface="Noto Serif KR"/>
               </a:rPr>
-              <a:t>검색에 걸리고,</a:t>
-            </a:r>
-          </a:p>
-          <a:p>
-            <a:pPr algn="l">
-              <a:lnSpc>
-                <a:spcPct val="126000"/>
-              </a:lnSpc>
-            </a:pPr>
-            <a:r>
-              <a:rPr sz="3300" b="1" i="0">
-                <a:solidFill>
-                  <a:srgbClr val="FBF8EE"/>
+              <a:t>검색에 걸리는 </a:t>
+            </a:r>
+            <a:r>
+              <a:rPr sz="3200" b="1" i="0">
+                <a:solidFill>
+                  <a:srgbClr val="CDB98A"/>
                 </a:solidFill>
                 <a:latin typeface="Noto Serif KR"/>
                 <a:ea typeface="Noto Serif KR"/>
               </a:rPr>
-              <a:t>클릭이 </a:t>
-            </a:r>
-            <a:r>
-              <a:rPr sz="3300" b="1" i="0">
-                <a:solidFill>
-                  <a:srgbClr val="CDB98A"/>
+              <a:t>이름</a:t>
+            </a:r>
+            <a:r>
+              <a:rPr sz="3200" b="1" i="0">
+                <a:solidFill>
+                  <a:srgbClr val="FBF8EE"/>
                 </a:solidFill>
                 <a:latin typeface="Noto Serif KR"/>
                 <a:ea typeface="Noto Serif KR"/>
               </a:rPr>
-              <a:t>구매</a:t>
-            </a:r>
-            <a:r>
-              <a:rPr sz="3300" b="1" i="0">
+              <a:t>,</a:t>
+            </a:r>
+          </a:p>
+          <a:p>
+            <a:pPr algn="l">
+              <a:lnSpc>
+                <a:spcPct val="130000"/>
+              </a:lnSpc>
+            </a:pPr>
+            <a:r>
+              <a:rPr sz="3200" b="1" i="0">
                 <a:solidFill>
                   <a:srgbClr val="FBF8EE"/>
                 </a:solidFill>
                 <a:latin typeface="Noto Serif KR"/>
                 <a:ea typeface="Noto Serif KR"/>
               </a:rPr>
-              <a:t>가</a:t>
-            </a:r>
-          </a:p>
-          <a:p>
-            <a:pPr algn="l">
-              <a:lnSpc>
-                <a:spcPct val="126000"/>
-              </a:lnSpc>
-            </a:pPr>
-            <a:r>
-              <a:rPr sz="3300" b="1" i="0">
-                <a:solidFill>
-                  <a:srgbClr val="FBF8EE"/>
+              <a:t>구매로 이어지는 </a:t>
+            </a:r>
+            <a:r>
+              <a:rPr sz="3200" b="1" i="0">
+                <a:solidFill>
+                  <a:srgbClr val="CDB98A"/>
                 </a:solidFill>
                 <a:latin typeface="Noto Serif KR"/>
                 <a:ea typeface="Noto Serif KR"/>
               </a:rPr>
-              <a:t>되는 곳까지.</a:t>
-            </a:r>
-          </a:p>
-        </p:txBody>
-      </p:sp>
-      <p:sp>
-        <p:nvSpPr>
-          <p:cNvPr id="10" name="TextBox 9"/>
+              <a:t>화면</a:t>
+            </a:r>
+            <a:r>
+              <a:rPr sz="3200" b="1" i="0">
+                <a:solidFill>
+                  <a:srgbClr val="FBF8EE"/>
+                </a:solidFill>
+                <a:latin typeface="Noto Serif KR"/>
+                <a:ea typeface="Noto Serif KR"/>
+              </a:rPr>
+              <a:t>.</a:t>
+            </a:r>
+          </a:p>
+        </p:txBody>
+      </p:sp>
+      <p:sp>
+        <p:nvSpPr>
+          <p:cNvPr id="11" name="TextBox 10"/>
           <p:cNvSpPr txBox="1"/>
           <p:nvPr/>
         </p:nvSpPr>
         <p:spPr>
           <a:xfrm>
-            <a:off x="822960" y="4434840"/>
+            <a:off x="822960" y="4206240"/>
             <a:ext cx="5394960" cy="868680"/>
           </a:xfrm>
           <a:prstGeom prst="rect">
@@ -3585,7 +3634,7 @@
                 <a:latin typeface="Pretendard"/>
                 <a:ea typeface="Pretendard"/>
               </a:rPr>
-              <a:t>상품명부터 상세페이지·영상·카드뉴스까지 —</a:t>
+              <a:t>상품명부터 상세페이지·영상·카드뉴스까지,</a:t>
             </a:r>
           </a:p>
           <a:p>
@@ -3602,21 +3651,21 @@
                 <a:latin typeface="Pretendard"/>
                 <a:ea typeface="Pretendard"/>
               </a:rPr>
-              <a:t>여름 업데이트로 한층 깊어진 두 서비스를 소개합니다.</a:t>
-            </a:r>
-          </a:p>
-        </p:txBody>
-      </p:sp>
-      <p:sp>
-        <p:nvSpPr>
-          <p:cNvPr id="11" name="Rounded Rectangle 10"/>
+              <a:t>이번 여름 한층 깊어진 두 서비스를 소개합니다.</a:t>
+            </a:r>
+          </a:p>
+        </p:txBody>
+      </p:sp>
+      <p:sp>
+        <p:nvSpPr>
+          <p:cNvPr id="12" name="Rounded Rectangle 11"/>
           <p:cNvSpPr/>
           <p:nvPr/>
         </p:nvSpPr>
         <p:spPr>
           <a:xfrm>
-            <a:off x="822960" y="5532120"/>
-            <a:ext cx="1920240" cy="384048"/>
+            <a:off x="822960" y="5349240"/>
+            <a:ext cx="1691640" cy="384048"/>
           </a:xfrm>
           <a:prstGeom prst="roundRect">
             <a:avLst>
@@ -3662,21 +3711,21 @@
                 <a:latin typeface="Pretendard SemiBold"/>
                 <a:ea typeface="Pretendard SemiBold"/>
               </a:rPr>
-              <a:t>유월 스무날 이후 새 기능</a:t>
-            </a:r>
-          </a:p>
-        </p:txBody>
-      </p:sp>
-      <p:sp>
-        <p:nvSpPr>
-          <p:cNvPr id="12" name="Rounded Rectangle 11"/>
+              <a:t>2026 여름 업데이트</a:t>
+            </a:r>
+          </a:p>
+        </p:txBody>
+      </p:sp>
+      <p:sp>
+        <p:nvSpPr>
+          <p:cNvPr id="13" name="Rounded Rectangle 12"/>
           <p:cNvSpPr/>
           <p:nvPr/>
         </p:nvSpPr>
         <p:spPr>
           <a:xfrm>
-            <a:off x="2880360" y="5532120"/>
-            <a:ext cx="1508760" cy="384048"/>
+            <a:off x="2651760" y="5349240"/>
+            <a:ext cx="1325880" cy="384048"/>
           </a:xfrm>
           <a:prstGeom prst="roundRect">
             <a:avLst>
@@ -3722,14 +3771,14 @@
                 <a:latin typeface="Pretendard SemiBold"/>
                 <a:ea typeface="Pretendard SemiBold"/>
               </a:rPr>
-              <a:t>실제 화면으로 보기</a:t>
-            </a:r>
-          </a:p>
-        </p:txBody>
-      </p:sp>
-      <p:sp>
-        <p:nvSpPr>
-          <p:cNvPr id="13" name="Rounded Rectangle 12"/>
+              <a:t>실제 화면 수록</a:t>
+            </a:r>
+          </a:p>
+        </p:txBody>
+      </p:sp>
+      <p:sp>
+        <p:nvSpPr>
+          <p:cNvPr id="14" name="Rounded Rectangle 13"/>
           <p:cNvSpPr/>
           <p:nvPr/>
         </p:nvSpPr>
@@ -3784,7 +3833,7 @@
       </p:sp>
       <p:sp>
         <p:nvSpPr>
-          <p:cNvPr id="14" name="Oval 13"/>
+          <p:cNvPr id="15" name="Oval 14"/>
           <p:cNvSpPr/>
           <p:nvPr/>
         </p:nvSpPr>
@@ -3828,7 +3877,7 @@
       </p:sp>
       <p:sp>
         <p:nvSpPr>
-          <p:cNvPr id="15" name="Oval 14"/>
+          <p:cNvPr id="16" name="Oval 15"/>
           <p:cNvSpPr/>
           <p:nvPr/>
         </p:nvSpPr>
@@ -3872,7 +3921,7 @@
       </p:sp>
       <p:sp>
         <p:nvSpPr>
-          <p:cNvPr id="16" name="Oval 15"/>
+          <p:cNvPr id="17" name="Oval 16"/>
           <p:cNvSpPr/>
           <p:nvPr/>
         </p:nvSpPr>
@@ -3916,7 +3965,7 @@
       </p:sp>
       <p:sp>
         <p:nvSpPr>
-          <p:cNvPr id="17" name="Rounded Rectangle 16"/>
+          <p:cNvPr id="18" name="Rounded Rectangle 17"/>
           <p:cNvSpPr/>
           <p:nvPr/>
         </p:nvSpPr>
@@ -3978,7 +4027,7 @@
       </p:sp>
       <p:pic>
         <p:nvPicPr>
-          <p:cNvPr id="18" name="Picture 17" descr="fc_form.jpg"/>
+          <p:cNvPr id="19" name="Picture 18" descr="fc_form.jpg"/>
           <p:cNvPicPr>
             <a:picLocks noChangeAspect="1"/>
           </p:cNvPicPr>
@@ -4003,7 +4052,7 @@
       </p:pic>
       <p:sp>
         <p:nvSpPr>
-          <p:cNvPr id="19" name="Rounded Rectangle 18"/>
+          <p:cNvPr id="20" name="Rounded Rectangle 19"/>
           <p:cNvSpPr/>
           <p:nvPr/>
         </p:nvSpPr>
@@ -4058,7 +4107,7 @@
       </p:sp>
       <p:sp>
         <p:nvSpPr>
-          <p:cNvPr id="20" name="Oval 19"/>
+          <p:cNvPr id="21" name="Oval 20"/>
           <p:cNvSpPr/>
           <p:nvPr/>
         </p:nvSpPr>
@@ -4102,7 +4151,7 @@
       </p:sp>
       <p:sp>
         <p:nvSpPr>
-          <p:cNvPr id="21" name="Oval 20"/>
+          <p:cNvPr id="22" name="Oval 21"/>
           <p:cNvSpPr/>
           <p:nvPr/>
         </p:nvSpPr>
@@ -4146,7 +4195,7 @@
       </p:sp>
       <p:sp>
         <p:nvSpPr>
-          <p:cNvPr id="22" name="Oval 21"/>
+          <p:cNvPr id="23" name="Oval 22"/>
           <p:cNvSpPr/>
           <p:nvPr/>
         </p:nvSpPr>
@@ -4190,7 +4239,7 @@
       </p:sp>
       <p:sp>
         <p:nvSpPr>
-          <p:cNvPr id="23" name="Rounded Rectangle 22"/>
+          <p:cNvPr id="24" name="Rounded Rectangle 23"/>
           <p:cNvSpPr/>
           <p:nvPr/>
         </p:nvSpPr>
@@ -4252,7 +4301,7 @@
       </p:sp>
       <p:pic>
         <p:nvPicPr>
-          <p:cNvPr id="24" name="Picture 23" descr="sm_app.jpg"/>
+          <p:cNvPr id="25" name="Picture 24" descr="sm_app.jpg"/>
           <p:cNvPicPr>
             <a:picLocks noChangeAspect="1"/>
           </p:cNvPicPr>
@@ -4345,6 +4394,50 @@
         </p:nvSpPr>
         <p:spPr>
           <a:xfrm>
+            <a:off x="2011680" y="0"/>
+            <a:ext cx="8165592" cy="21945"/>
+          </a:xfrm>
+          <a:prstGeom prst="rect">
+            <a:avLst/>
+          </a:prstGeom>
+          <a:solidFill>
+            <a:srgbClr val="C9B287"/>
+          </a:solidFill>
+          <a:ln>
+            <a:noFill/>
+          </a:ln>
+          <a:effectLst/>
+        </p:spPr>
+        <p:style>
+          <a:lnRef idx="1">
+            <a:schemeClr val="accent1"/>
+          </a:lnRef>
+          <a:fillRef idx="3">
+            <a:schemeClr val="accent1"/>
+          </a:fillRef>
+          <a:effectRef idx="2">
+            <a:schemeClr val="accent1"/>
+          </a:effectRef>
+          <a:fontRef idx="minor">
+            <a:schemeClr val="lt1"/>
+          </a:fontRef>
+        </p:style>
+        <p:txBody>
+          <a:bodyPr rtlCol="0" anchor="ctr"/>
+          <a:lstStyle/>
+          <a:p>
+            <a:pPr algn="ctr"/>
+          </a:p>
+        </p:txBody>
+      </p:sp>
+      <p:sp>
+        <p:nvSpPr>
+          <p:cNvPr id="4" name="Rectangle 3"/>
+          <p:cNvSpPr/>
+          <p:nvPr/>
+        </p:nvSpPr>
+        <p:spPr>
+          <a:xfrm>
             <a:off x="822960" y="644652"/>
             <a:ext cx="384048" cy="16459"/>
           </a:xfrm>
@@ -4383,7 +4476,7 @@
       </p:sp>
       <p:sp>
         <p:nvSpPr>
-          <p:cNvPr id="4" name="TextBox 3"/>
+          <p:cNvPr id="5" name="TextBox 4"/>
           <p:cNvSpPr txBox="1"/>
           <p:nvPr/>
         </p:nvSpPr>
@@ -4423,7 +4516,7 @@
       </p:sp>
       <p:sp>
         <p:nvSpPr>
-          <p:cNvPr id="5" name="TextBox 4"/>
+          <p:cNvPr id="6" name="TextBox 5"/>
           <p:cNvSpPr txBox="1"/>
           <p:nvPr/>
         </p:nvSpPr>
@@ -4490,7 +4583,7 @@
       </p:sp>
       <p:sp>
         <p:nvSpPr>
-          <p:cNvPr id="6" name="TextBox 5"/>
+          <p:cNvPr id="7" name="TextBox 6"/>
           <p:cNvSpPr txBox="1"/>
           <p:nvPr/>
         </p:nvSpPr>
@@ -4530,7 +4623,7 @@
       </p:sp>
       <p:sp>
         <p:nvSpPr>
-          <p:cNvPr id="7" name="TextBox 6"/>
+          <p:cNvPr id="8" name="TextBox 7"/>
           <p:cNvSpPr txBox="1"/>
           <p:nvPr/>
         </p:nvSpPr>
@@ -4590,7 +4683,7 @@
       </p:sp>
       <p:sp>
         <p:nvSpPr>
-          <p:cNvPr id="8" name="Rectangle 7"/>
+          <p:cNvPr id="9" name="Rectangle 8"/>
           <p:cNvSpPr/>
           <p:nvPr/>
         </p:nvSpPr>
@@ -4634,7 +4727,7 @@
       </p:sp>
       <p:sp>
         <p:nvSpPr>
-          <p:cNvPr id="9" name="TextBox 8"/>
+          <p:cNvPr id="10" name="TextBox 9"/>
           <p:cNvSpPr txBox="1"/>
           <p:nvPr/>
         </p:nvSpPr>
@@ -4674,7 +4767,7 @@
       </p:sp>
       <p:sp>
         <p:nvSpPr>
-          <p:cNvPr id="10" name="TextBox 9"/>
+          <p:cNvPr id="11" name="TextBox 10"/>
           <p:cNvSpPr txBox="1"/>
           <p:nvPr/>
         </p:nvSpPr>
@@ -4734,7 +4827,7 @@
       </p:sp>
       <p:sp>
         <p:nvSpPr>
-          <p:cNvPr id="11" name="Rectangle 10"/>
+          <p:cNvPr id="12" name="Rectangle 11"/>
           <p:cNvSpPr/>
           <p:nvPr/>
         </p:nvSpPr>
@@ -4778,7 +4871,7 @@
       </p:sp>
       <p:sp>
         <p:nvSpPr>
-          <p:cNvPr id="12" name="TextBox 11"/>
+          <p:cNvPr id="13" name="TextBox 12"/>
           <p:cNvSpPr txBox="1"/>
           <p:nvPr/>
         </p:nvSpPr>
@@ -4818,7 +4911,7 @@
       </p:sp>
       <p:sp>
         <p:nvSpPr>
-          <p:cNvPr id="13" name="TextBox 12"/>
+          <p:cNvPr id="14" name="TextBox 13"/>
           <p:cNvSpPr txBox="1"/>
           <p:nvPr/>
         </p:nvSpPr>
@@ -4871,14 +4964,14 @@
                 <a:latin typeface="Pretendard"/>
                 <a:ea typeface="Pretendard"/>
               </a:rPr>
-              <a:t>이미지 안 문구를 골라 내용을 바꾸고 글꼴을 고르면, 고른 글꼴 그대로 다시 그려냅니다.</a:t>
-            </a:r>
-          </a:p>
-        </p:txBody>
-      </p:sp>
-      <p:sp>
-        <p:nvSpPr>
-          <p:cNvPr id="14" name="Rounded Rectangle 13"/>
+              <a:t>이미지 속 문구를 골라 내용을 고치고 글꼴을 정하면, 그 모습 그대로 다시 그려냅니다.</a:t>
+            </a:r>
+          </a:p>
+        </p:txBody>
+      </p:sp>
+      <p:sp>
+        <p:nvSpPr>
+          <p:cNvPr id="15" name="Rounded Rectangle 14"/>
           <p:cNvSpPr/>
           <p:nvPr/>
         </p:nvSpPr>
@@ -4933,7 +5026,7 @@
       </p:sp>
       <p:sp>
         <p:nvSpPr>
-          <p:cNvPr id="15" name="Oval 14"/>
+          <p:cNvPr id="16" name="Oval 15"/>
           <p:cNvSpPr/>
           <p:nvPr/>
         </p:nvSpPr>
@@ -4977,7 +5070,7 @@
       </p:sp>
       <p:sp>
         <p:nvSpPr>
-          <p:cNvPr id="16" name="Oval 15"/>
+          <p:cNvPr id="17" name="Oval 16"/>
           <p:cNvSpPr/>
           <p:nvPr/>
         </p:nvSpPr>
@@ -5021,7 +5114,7 @@
       </p:sp>
       <p:sp>
         <p:nvSpPr>
-          <p:cNvPr id="17" name="Oval 16"/>
+          <p:cNvPr id="18" name="Oval 17"/>
           <p:cNvSpPr/>
           <p:nvPr/>
         </p:nvSpPr>
@@ -5065,7 +5158,7 @@
       </p:sp>
       <p:sp>
         <p:nvSpPr>
-          <p:cNvPr id="18" name="Rounded Rectangle 17"/>
+          <p:cNvPr id="19" name="Rounded Rectangle 18"/>
           <p:cNvSpPr/>
           <p:nvPr/>
         </p:nvSpPr>
@@ -5127,7 +5220,7 @@
       </p:sp>
       <p:pic>
         <p:nvPicPr>
-          <p:cNvPr id="19" name="Picture 18" descr="fc_edit.jpg"/>
+          <p:cNvPr id="20" name="Picture 19" descr="fc_edit.jpg"/>
           <p:cNvPicPr>
             <a:picLocks noChangeAspect="1"/>
           </p:cNvPicPr>
@@ -5152,7 +5245,7 @@
       </p:pic>
       <p:sp>
         <p:nvSpPr>
-          <p:cNvPr id="20" name="Rounded Rectangle 19"/>
+          <p:cNvPr id="21" name="Rounded Rectangle 20"/>
           <p:cNvSpPr/>
           <p:nvPr/>
         </p:nvSpPr>
@@ -5212,7 +5305,7 @@
       </p:sp>
       <p:sp>
         <p:nvSpPr>
-          <p:cNvPr id="21" name="TextBox 20"/>
+          <p:cNvPr id="22" name="TextBox 21"/>
           <p:cNvSpPr txBox="1"/>
           <p:nvPr/>
         </p:nvSpPr>
@@ -5252,7 +5345,7 @@
       </p:sp>
       <p:sp>
         <p:nvSpPr>
-          <p:cNvPr id="22" name="TextBox 21"/>
+          <p:cNvPr id="23" name="TextBox 22"/>
           <p:cNvSpPr txBox="1"/>
           <p:nvPr/>
         </p:nvSpPr>
@@ -5302,7 +5395,7 @@
       </p:sp>
       <p:sp>
         <p:nvSpPr>
-          <p:cNvPr id="23" name="TextBox 22"/>
+          <p:cNvPr id="24" name="TextBox 23"/>
           <p:cNvSpPr txBox="1"/>
           <p:nvPr/>
         </p:nvSpPr>
@@ -5410,6 +5503,50 @@
         </p:nvSpPr>
         <p:spPr>
           <a:xfrm>
+            <a:off x="2011680" y="0"/>
+            <a:ext cx="8165592" cy="21945"/>
+          </a:xfrm>
+          <a:prstGeom prst="rect">
+            <a:avLst/>
+          </a:prstGeom>
+          <a:solidFill>
+            <a:srgbClr val="C9B287"/>
+          </a:solidFill>
+          <a:ln>
+            <a:noFill/>
+          </a:ln>
+          <a:effectLst/>
+        </p:spPr>
+        <p:style>
+          <a:lnRef idx="1">
+            <a:schemeClr val="accent1"/>
+          </a:lnRef>
+          <a:fillRef idx="3">
+            <a:schemeClr val="accent1"/>
+          </a:fillRef>
+          <a:effectRef idx="2">
+            <a:schemeClr val="accent1"/>
+          </a:effectRef>
+          <a:fontRef idx="minor">
+            <a:schemeClr val="lt1"/>
+          </a:fontRef>
+        </p:style>
+        <p:txBody>
+          <a:bodyPr rtlCol="0" anchor="ctr"/>
+          <a:lstStyle/>
+          <a:p>
+            <a:pPr algn="ctr"/>
+          </a:p>
+        </p:txBody>
+      </p:sp>
+      <p:sp>
+        <p:nvSpPr>
+          <p:cNvPr id="4" name="Rectangle 3"/>
+          <p:cNvSpPr/>
+          <p:nvPr/>
+        </p:nvSpPr>
+        <p:spPr>
+          <a:xfrm>
             <a:off x="822960" y="644652"/>
             <a:ext cx="384048" cy="16459"/>
           </a:xfrm>
@@ -5448,7 +5585,7 @@
       </p:sp>
       <p:sp>
         <p:nvSpPr>
-          <p:cNvPr id="4" name="TextBox 3"/>
+          <p:cNvPr id="5" name="TextBox 4"/>
           <p:cNvSpPr txBox="1"/>
           <p:nvPr/>
         </p:nvSpPr>
@@ -5488,7 +5625,7 @@
       </p:sp>
       <p:sp>
         <p:nvSpPr>
-          <p:cNvPr id="5" name="TextBox 4"/>
+          <p:cNvPr id="6" name="TextBox 5"/>
           <p:cNvSpPr txBox="1"/>
           <p:nvPr/>
         </p:nvSpPr>
@@ -5558,14 +5695,14 @@
                 <a:latin typeface="Noto Serif KR"/>
                 <a:ea typeface="Noto Serif KR"/>
               </a:rPr>
-              <a:t>사진이 없어도 나옵니다.</a:t>
-            </a:r>
-          </a:p>
-        </p:txBody>
-      </p:sp>
-      <p:sp>
-        <p:nvSpPr>
-          <p:cNvPr id="6" name="TextBox 5"/>
+              <a:t>사진이 없어도 완성됩니다.</a:t>
+            </a:r>
+          </a:p>
+        </p:txBody>
+      </p:sp>
+      <p:sp>
+        <p:nvSpPr>
+          <p:cNvPr id="7" name="TextBox 6"/>
           <p:cNvSpPr txBox="1"/>
           <p:nvPr/>
         </p:nvSpPr>
@@ -5605,7 +5742,7 @@
       </p:sp>
       <p:sp>
         <p:nvSpPr>
-          <p:cNvPr id="7" name="TextBox 6"/>
+          <p:cNvPr id="8" name="TextBox 7"/>
           <p:cNvSpPr txBox="1"/>
           <p:nvPr/>
         </p:nvSpPr>
@@ -5665,7 +5802,7 @@
       </p:sp>
       <p:sp>
         <p:nvSpPr>
-          <p:cNvPr id="8" name="Rectangle 7"/>
+          <p:cNvPr id="9" name="Rectangle 8"/>
           <p:cNvSpPr/>
           <p:nvPr/>
         </p:nvSpPr>
@@ -5709,7 +5846,7 @@
       </p:sp>
       <p:sp>
         <p:nvSpPr>
-          <p:cNvPr id="9" name="TextBox 8"/>
+          <p:cNvPr id="10" name="TextBox 9"/>
           <p:cNvSpPr txBox="1"/>
           <p:nvPr/>
         </p:nvSpPr>
@@ -5749,7 +5886,7 @@
       </p:sp>
       <p:sp>
         <p:nvSpPr>
-          <p:cNvPr id="10" name="TextBox 9"/>
+          <p:cNvPr id="11" name="TextBox 10"/>
           <p:cNvSpPr txBox="1"/>
           <p:nvPr/>
         </p:nvSpPr>
@@ -5802,14 +5939,14 @@
                 <a:latin typeface="Pretendard"/>
                 <a:ea typeface="Pretendard"/>
               </a:rPr>
-              <a:t>색·글꼴·판짜임을 먼저 정해두고 그리기 때문에, 장마다 따로 노는 일이 없습니다.</a:t>
-            </a:r>
-          </a:p>
-        </p:txBody>
-      </p:sp>
-      <p:sp>
-        <p:nvSpPr>
-          <p:cNvPr id="11" name="Rectangle 10"/>
+              <a:t>색·글꼴·판짜임을 먼저 정해 두고 그리기 때문에, 장마다 분위기가 어긋나는 일이 없습니다.</a:t>
+            </a:r>
+          </a:p>
+        </p:txBody>
+      </p:sp>
+      <p:sp>
+        <p:nvSpPr>
+          <p:cNvPr id="12" name="Rectangle 11"/>
           <p:cNvSpPr/>
           <p:nvPr/>
         </p:nvSpPr>
@@ -5853,7 +5990,7 @@
       </p:sp>
       <p:sp>
         <p:nvSpPr>
-          <p:cNvPr id="12" name="TextBox 11"/>
+          <p:cNvPr id="13" name="TextBox 12"/>
           <p:cNvSpPr txBox="1"/>
           <p:nvPr/>
         </p:nvSpPr>
@@ -5893,7 +6030,7 @@
       </p:sp>
       <p:sp>
         <p:nvSpPr>
-          <p:cNvPr id="13" name="TextBox 12"/>
+          <p:cNvPr id="14" name="TextBox 13"/>
           <p:cNvSpPr txBox="1"/>
           <p:nvPr/>
         </p:nvSpPr>
@@ -5929,7 +6066,7 @@
                 <a:latin typeface="Pretendard ExtraBold"/>
                 <a:ea typeface="Pretendard ExtraBold"/>
               </a:rPr>
-              <a:t>사진 없이도, 참고만 시켜도</a:t>
+              <a:t>사진 없이도, 분위기만 빌려도</a:t>
             </a:r>
           </a:p>
           <a:p>
@@ -5946,14 +6083,14 @@
                 <a:latin typeface="Pretendard"/>
                 <a:ea typeface="Pretendard"/>
               </a:rPr>
-              <a:t>상품 사진이 아직 없으면 글만으로, 분위기만 빌리고 싶으면 참고용으로만 — 쓰임에 맞춥니다.</a:t>
-            </a:r>
-          </a:p>
-        </p:txBody>
-      </p:sp>
-      <p:sp>
-        <p:nvSpPr>
-          <p:cNvPr id="14" name="Rounded Rectangle 13"/>
+              <a:t>사진이 없으면 글만으로 만들고, 있다면 분위기를 참고하는 정도로만 쓸 수도 있습니다.</a:t>
+            </a:r>
+          </a:p>
+        </p:txBody>
+      </p:sp>
+      <p:sp>
+        <p:nvSpPr>
+          <p:cNvPr id="15" name="Rounded Rectangle 14"/>
           <p:cNvSpPr/>
           <p:nvPr/>
         </p:nvSpPr>
@@ -6008,7 +6145,7 @@
       </p:sp>
       <p:sp>
         <p:nvSpPr>
-          <p:cNvPr id="15" name="Oval 14"/>
+          <p:cNvPr id="16" name="Oval 15"/>
           <p:cNvSpPr/>
           <p:nvPr/>
         </p:nvSpPr>
@@ -6052,7 +6189,7 @@
       </p:sp>
       <p:sp>
         <p:nvSpPr>
-          <p:cNvPr id="16" name="Oval 15"/>
+          <p:cNvPr id="17" name="Oval 16"/>
           <p:cNvSpPr/>
           <p:nvPr/>
         </p:nvSpPr>
@@ -6096,7 +6233,7 @@
       </p:sp>
       <p:sp>
         <p:nvSpPr>
-          <p:cNvPr id="17" name="Oval 16"/>
+          <p:cNvPr id="18" name="Oval 17"/>
           <p:cNvSpPr/>
           <p:nvPr/>
         </p:nvSpPr>
@@ -6140,7 +6277,7 @@
       </p:sp>
       <p:sp>
         <p:nvSpPr>
-          <p:cNvPr id="18" name="Rounded Rectangle 17"/>
+          <p:cNvPr id="19" name="Rounded Rectangle 18"/>
           <p:cNvSpPr/>
           <p:nvPr/>
         </p:nvSpPr>
@@ -6202,7 +6339,7 @@
       </p:sp>
       <p:pic>
         <p:nvPicPr>
-          <p:cNvPr id="19" name="Picture 18" descr="fc_cardnews.jpg"/>
+          <p:cNvPr id="20" name="Picture 19" descr="fc_cardnews.jpg"/>
           <p:cNvPicPr>
             <a:picLocks noChangeAspect="1"/>
           </p:cNvPicPr>
@@ -6227,7 +6364,7 @@
       </p:pic>
       <p:sp>
         <p:nvSpPr>
-          <p:cNvPr id="20" name="Rounded Rectangle 19"/>
+          <p:cNvPr id="21" name="Rounded Rectangle 20"/>
           <p:cNvSpPr/>
           <p:nvPr/>
         </p:nvSpPr>
@@ -6287,7 +6424,7 @@
       </p:sp>
       <p:sp>
         <p:nvSpPr>
-          <p:cNvPr id="21" name="TextBox 20"/>
+          <p:cNvPr id="22" name="TextBox 21"/>
           <p:cNvSpPr txBox="1"/>
           <p:nvPr/>
         </p:nvSpPr>
@@ -6327,7 +6464,7 @@
       </p:sp>
       <p:sp>
         <p:nvSpPr>
-          <p:cNvPr id="22" name="TextBox 21"/>
+          <p:cNvPr id="23" name="TextBox 22"/>
           <p:cNvSpPr txBox="1"/>
           <p:nvPr/>
         </p:nvSpPr>
@@ -6377,7 +6514,7 @@
       </p:sp>
       <p:sp>
         <p:nvSpPr>
-          <p:cNvPr id="23" name="TextBox 22"/>
+          <p:cNvPr id="24" name="TextBox 23"/>
           <p:cNvSpPr txBox="1"/>
           <p:nvPr/>
         </p:nvSpPr>
@@ -6485,6 +6622,50 @@
         </p:nvSpPr>
         <p:spPr>
           <a:xfrm>
+            <a:off x="2011680" y="0"/>
+            <a:ext cx="8165592" cy="21945"/>
+          </a:xfrm>
+          <a:prstGeom prst="rect">
+            <a:avLst/>
+          </a:prstGeom>
+          <a:solidFill>
+            <a:srgbClr val="C9B287"/>
+          </a:solidFill>
+          <a:ln>
+            <a:noFill/>
+          </a:ln>
+          <a:effectLst/>
+        </p:spPr>
+        <p:style>
+          <a:lnRef idx="1">
+            <a:schemeClr val="accent1"/>
+          </a:lnRef>
+          <a:fillRef idx="3">
+            <a:schemeClr val="accent1"/>
+          </a:fillRef>
+          <a:effectRef idx="2">
+            <a:schemeClr val="accent1"/>
+          </a:effectRef>
+          <a:fontRef idx="minor">
+            <a:schemeClr val="lt1"/>
+          </a:fontRef>
+        </p:style>
+        <p:txBody>
+          <a:bodyPr rtlCol="0" anchor="ctr"/>
+          <a:lstStyle/>
+          <a:p>
+            <a:pPr algn="ctr"/>
+          </a:p>
+        </p:txBody>
+      </p:sp>
+      <p:sp>
+        <p:nvSpPr>
+          <p:cNvPr id="4" name="Rectangle 3"/>
+          <p:cNvSpPr/>
+          <p:nvPr/>
+        </p:nvSpPr>
+        <p:spPr>
+          <a:xfrm>
             <a:off x="822960" y="644652"/>
             <a:ext cx="384048" cy="16459"/>
           </a:xfrm>
@@ -6523,7 +6704,7 @@
       </p:sp>
       <p:sp>
         <p:nvSpPr>
-          <p:cNvPr id="4" name="TextBox 3"/>
+          <p:cNvPr id="5" name="TextBox 4"/>
           <p:cNvSpPr txBox="1"/>
           <p:nvPr/>
         </p:nvSpPr>
@@ -6563,7 +6744,7 @@
       </p:sp>
       <p:sp>
         <p:nvSpPr>
-          <p:cNvPr id="5" name="TextBox 4"/>
+          <p:cNvPr id="6" name="TextBox 5"/>
           <p:cNvSpPr txBox="1"/>
           <p:nvPr/>
         </p:nvSpPr>
@@ -6620,7 +6801,7 @@
       </p:sp>
       <p:sp>
         <p:nvSpPr>
-          <p:cNvPr id="6" name="TextBox 5"/>
+          <p:cNvPr id="7" name="TextBox 6"/>
           <p:cNvSpPr txBox="1"/>
           <p:nvPr/>
         </p:nvSpPr>
@@ -6660,7 +6841,7 @@
       </p:sp>
       <p:sp>
         <p:nvSpPr>
-          <p:cNvPr id="7" name="TextBox 6"/>
+          <p:cNvPr id="8" name="TextBox 7"/>
           <p:cNvSpPr txBox="1"/>
           <p:nvPr/>
         </p:nvSpPr>
@@ -6720,7 +6901,7 @@
       </p:sp>
       <p:sp>
         <p:nvSpPr>
-          <p:cNvPr id="8" name="Rectangle 7"/>
+          <p:cNvPr id="9" name="Rectangle 8"/>
           <p:cNvSpPr/>
           <p:nvPr/>
         </p:nvSpPr>
@@ -6764,7 +6945,7 @@
       </p:sp>
       <p:sp>
         <p:nvSpPr>
-          <p:cNvPr id="9" name="TextBox 8"/>
+          <p:cNvPr id="10" name="TextBox 9"/>
           <p:cNvSpPr txBox="1"/>
           <p:nvPr/>
         </p:nvSpPr>
@@ -6804,7 +6985,7 @@
       </p:sp>
       <p:sp>
         <p:nvSpPr>
-          <p:cNvPr id="10" name="TextBox 9"/>
+          <p:cNvPr id="11" name="TextBox 10"/>
           <p:cNvSpPr txBox="1"/>
           <p:nvPr/>
         </p:nvSpPr>
@@ -6864,7 +7045,7 @@
       </p:sp>
       <p:sp>
         <p:nvSpPr>
-          <p:cNvPr id="11" name="Rectangle 10"/>
+          <p:cNvPr id="12" name="Rectangle 11"/>
           <p:cNvSpPr/>
           <p:nvPr/>
         </p:nvSpPr>
@@ -6908,7 +7089,7 @@
       </p:sp>
       <p:sp>
         <p:nvSpPr>
-          <p:cNvPr id="12" name="TextBox 11"/>
+          <p:cNvPr id="13" name="TextBox 12"/>
           <p:cNvSpPr txBox="1"/>
           <p:nvPr/>
         </p:nvSpPr>
@@ -6948,7 +7129,7 @@
       </p:sp>
       <p:sp>
         <p:nvSpPr>
-          <p:cNvPr id="13" name="TextBox 12"/>
+          <p:cNvPr id="14" name="TextBox 13"/>
           <p:cNvSpPr txBox="1"/>
           <p:nvPr/>
         </p:nvSpPr>
@@ -7008,7 +7189,7 @@
       </p:sp>
       <p:sp>
         <p:nvSpPr>
-          <p:cNvPr id="14" name="Rounded Rectangle 13"/>
+          <p:cNvPr id="15" name="Rounded Rectangle 14"/>
           <p:cNvSpPr/>
           <p:nvPr/>
         </p:nvSpPr>
@@ -7069,7 +7250,7 @@
       </p:sp>
       <p:sp>
         <p:nvSpPr>
-          <p:cNvPr id="15" name="TextBox 14"/>
+          <p:cNvPr id="16" name="TextBox 15"/>
           <p:cNvSpPr txBox="1"/>
           <p:nvPr/>
         </p:nvSpPr>
@@ -7109,7 +7290,7 @@
       </p:sp>
       <p:sp>
         <p:nvSpPr>
-          <p:cNvPr id="16" name="Rounded Rectangle 15"/>
+          <p:cNvPr id="17" name="Rounded Rectangle 16"/>
           <p:cNvSpPr/>
           <p:nvPr/>
         </p:nvSpPr>
@@ -7156,7 +7337,7 @@
       </p:sp>
       <p:sp>
         <p:nvSpPr>
-          <p:cNvPr id="17" name="Rounded Rectangle 16"/>
+          <p:cNvPr id="18" name="Rounded Rectangle 17"/>
           <p:cNvSpPr/>
           <p:nvPr/>
         </p:nvSpPr>
@@ -7216,7 +7397,7 @@
       </p:sp>
       <p:sp>
         <p:nvSpPr>
-          <p:cNvPr id="18" name="Rounded Rectangle 17"/>
+          <p:cNvPr id="19" name="Rounded Rectangle 18"/>
           <p:cNvSpPr/>
           <p:nvPr/>
         </p:nvSpPr>
@@ -7277,7 +7458,7 @@
       </p:sp>
       <p:sp>
         <p:nvSpPr>
-          <p:cNvPr id="19" name="TextBox 18"/>
+          <p:cNvPr id="20" name="TextBox 19"/>
           <p:cNvSpPr txBox="1"/>
           <p:nvPr/>
         </p:nvSpPr>
@@ -7317,7 +7498,7 @@
       </p:sp>
       <p:sp>
         <p:nvSpPr>
-          <p:cNvPr id="20" name="Rounded Rectangle 19"/>
+          <p:cNvPr id="21" name="Rounded Rectangle 20"/>
           <p:cNvSpPr/>
           <p:nvPr/>
         </p:nvSpPr>
@@ -7377,7 +7558,7 @@
       </p:sp>
       <p:sp>
         <p:nvSpPr>
-          <p:cNvPr id="21" name="TextBox 20"/>
+          <p:cNvPr id="22" name="TextBox 21"/>
           <p:cNvSpPr txBox="1"/>
           <p:nvPr/>
         </p:nvSpPr>
@@ -7417,7 +7598,7 @@
       </p:sp>
       <p:sp>
         <p:nvSpPr>
-          <p:cNvPr id="22" name="TextBox 21"/>
+          <p:cNvPr id="23" name="TextBox 22"/>
           <p:cNvSpPr txBox="1"/>
           <p:nvPr/>
         </p:nvSpPr>
@@ -7467,7 +7648,7 @@
       </p:sp>
       <p:sp>
         <p:nvSpPr>
-          <p:cNvPr id="23" name="TextBox 22"/>
+          <p:cNvPr id="24" name="TextBox 23"/>
           <p:cNvSpPr txBox="1"/>
           <p:nvPr/>
         </p:nvSpPr>
@@ -7575,6 +7756,50 @@
         </p:nvSpPr>
         <p:spPr>
           <a:xfrm>
+            <a:off x="2011680" y="0"/>
+            <a:ext cx="8165592" cy="21945"/>
+          </a:xfrm>
+          <a:prstGeom prst="rect">
+            <a:avLst/>
+          </a:prstGeom>
+          <a:solidFill>
+            <a:srgbClr val="C9B287"/>
+          </a:solidFill>
+          <a:ln>
+            <a:noFill/>
+          </a:ln>
+          <a:effectLst/>
+        </p:spPr>
+        <p:style>
+          <a:lnRef idx="1">
+            <a:schemeClr val="accent1"/>
+          </a:lnRef>
+          <a:fillRef idx="3">
+            <a:schemeClr val="accent1"/>
+          </a:fillRef>
+          <a:effectRef idx="2">
+            <a:schemeClr val="accent1"/>
+          </a:effectRef>
+          <a:fontRef idx="minor">
+            <a:schemeClr val="lt1"/>
+          </a:fontRef>
+        </p:style>
+        <p:txBody>
+          <a:bodyPr rtlCol="0" anchor="ctr"/>
+          <a:lstStyle/>
+          <a:p>
+            <a:pPr algn="ctr"/>
+          </a:p>
+        </p:txBody>
+      </p:sp>
+      <p:sp>
+        <p:nvSpPr>
+          <p:cNvPr id="4" name="Rectangle 3"/>
+          <p:cNvSpPr/>
+          <p:nvPr/>
+        </p:nvSpPr>
+        <p:spPr>
+          <a:xfrm>
             <a:off x="822960" y="644652"/>
             <a:ext cx="384048" cy="16459"/>
           </a:xfrm>
@@ -7613,7 +7838,7 @@
       </p:sp>
       <p:sp>
         <p:nvSpPr>
-          <p:cNvPr id="4" name="TextBox 3"/>
+          <p:cNvPr id="5" name="TextBox 4"/>
           <p:cNvSpPr txBox="1"/>
           <p:nvPr/>
         </p:nvSpPr>
@@ -7653,7 +7878,7 @@
       </p:sp>
       <p:sp>
         <p:nvSpPr>
-          <p:cNvPr id="5" name="TextBox 4"/>
+          <p:cNvPr id="6" name="TextBox 5"/>
           <p:cNvSpPr txBox="1"/>
           <p:nvPr/>
         </p:nvSpPr>
@@ -7720,7 +7945,7 @@
       </p:sp>
       <p:sp>
         <p:nvSpPr>
-          <p:cNvPr id="6" name="TextBox 5"/>
+          <p:cNvPr id="7" name="TextBox 6"/>
           <p:cNvSpPr txBox="1"/>
           <p:nvPr/>
         </p:nvSpPr>
@@ -7760,7 +7985,7 @@
       </p:sp>
       <p:sp>
         <p:nvSpPr>
-          <p:cNvPr id="7" name="TextBox 6"/>
+          <p:cNvPr id="8" name="TextBox 7"/>
           <p:cNvSpPr txBox="1"/>
           <p:nvPr/>
         </p:nvSpPr>
@@ -7820,7 +8045,7 @@
       </p:sp>
       <p:sp>
         <p:nvSpPr>
-          <p:cNvPr id="8" name="Rectangle 7"/>
+          <p:cNvPr id="9" name="Rectangle 8"/>
           <p:cNvSpPr/>
           <p:nvPr/>
         </p:nvSpPr>
@@ -7864,7 +8089,7 @@
       </p:sp>
       <p:sp>
         <p:nvSpPr>
-          <p:cNvPr id="9" name="TextBox 8"/>
+          <p:cNvPr id="10" name="TextBox 9"/>
           <p:cNvSpPr txBox="1"/>
           <p:nvPr/>
         </p:nvSpPr>
@@ -7904,7 +8129,7 @@
       </p:sp>
       <p:sp>
         <p:nvSpPr>
-          <p:cNvPr id="10" name="TextBox 9"/>
+          <p:cNvPr id="11" name="TextBox 10"/>
           <p:cNvSpPr txBox="1"/>
           <p:nvPr/>
         </p:nvSpPr>
@@ -7940,7 +8165,7 @@
                 <a:latin typeface="Pretendard ExtraBold"/>
                 <a:ea typeface="Pretendard ExtraBold"/>
               </a:rPr>
-              <a:t>열 걸음짜리 친절</a:t>
+              <a:t>열 걸음의 안내</a:t>
             </a:r>
           </a:p>
           <a:p>
@@ -7957,14 +8182,14 @@
                 <a:latin typeface="Pretendard"/>
                 <a:ea typeface="Pretendard"/>
               </a:rPr>
-              <a:t>사진 올리기부터 저장까지, 화면 위에서 한 걸음씩 짚어 주니 헤맬 틈이 없습니다.</a:t>
-            </a:r>
-          </a:p>
-        </p:txBody>
-      </p:sp>
-      <p:sp>
-        <p:nvSpPr>
-          <p:cNvPr id="11" name="Rectangle 10"/>
+              <a:t>사진 올리기부터 저장까지, 화면 위에서 한 걸음씩 짚어 주어 헤맬 틈이 없습니다.</a:t>
+            </a:r>
+          </a:p>
+        </p:txBody>
+      </p:sp>
+      <p:sp>
+        <p:nvSpPr>
+          <p:cNvPr id="12" name="Rectangle 11"/>
           <p:cNvSpPr/>
           <p:nvPr/>
         </p:nvSpPr>
@@ -8008,7 +8233,7 @@
       </p:sp>
       <p:sp>
         <p:nvSpPr>
-          <p:cNvPr id="12" name="TextBox 11"/>
+          <p:cNvPr id="13" name="TextBox 12"/>
           <p:cNvSpPr txBox="1"/>
           <p:nvPr/>
         </p:nvSpPr>
@@ -8048,7 +8273,7 @@
       </p:sp>
       <p:sp>
         <p:nvSpPr>
-          <p:cNvPr id="13" name="TextBox 12"/>
+          <p:cNvPr id="14" name="TextBox 13"/>
           <p:cNvSpPr txBox="1"/>
           <p:nvPr/>
         </p:nvSpPr>
@@ -8108,7 +8333,7 @@
       </p:sp>
       <p:sp>
         <p:nvSpPr>
-          <p:cNvPr id="14" name="Rounded Rectangle 13"/>
+          <p:cNvPr id="15" name="Rounded Rectangle 14"/>
           <p:cNvSpPr/>
           <p:nvPr/>
         </p:nvSpPr>
@@ -8163,7 +8388,7 @@
       </p:sp>
       <p:sp>
         <p:nvSpPr>
-          <p:cNvPr id="15" name="Oval 14"/>
+          <p:cNvPr id="16" name="Oval 15"/>
           <p:cNvSpPr/>
           <p:nvPr/>
         </p:nvSpPr>
@@ -8207,7 +8432,7 @@
       </p:sp>
       <p:sp>
         <p:nvSpPr>
-          <p:cNvPr id="16" name="Oval 15"/>
+          <p:cNvPr id="17" name="Oval 16"/>
           <p:cNvSpPr/>
           <p:nvPr/>
         </p:nvSpPr>
@@ -8251,7 +8476,7 @@
       </p:sp>
       <p:sp>
         <p:nvSpPr>
-          <p:cNvPr id="17" name="Oval 16"/>
+          <p:cNvPr id="18" name="Oval 17"/>
           <p:cNvSpPr/>
           <p:nvPr/>
         </p:nvSpPr>
@@ -8295,7 +8520,7 @@
       </p:sp>
       <p:sp>
         <p:nvSpPr>
-          <p:cNvPr id="18" name="Rounded Rectangle 17"/>
+          <p:cNvPr id="19" name="Rounded Rectangle 18"/>
           <p:cNvSpPr/>
           <p:nvPr/>
         </p:nvSpPr>
@@ -8357,7 +8582,7 @@
       </p:sp>
       <p:pic>
         <p:nvPicPr>
-          <p:cNvPr id="19" name="Picture 18" descr="fc_guide.jpg"/>
+          <p:cNvPr id="20" name="Picture 19" descr="fc_guide.jpg"/>
           <p:cNvPicPr>
             <a:picLocks noChangeAspect="1"/>
           </p:cNvPicPr>
@@ -8382,7 +8607,7 @@
       </p:pic>
       <p:sp>
         <p:nvSpPr>
-          <p:cNvPr id="20" name="Rounded Rectangle 19"/>
+          <p:cNvPr id="21" name="Rounded Rectangle 20"/>
           <p:cNvSpPr/>
           <p:nvPr/>
         </p:nvSpPr>
@@ -8442,7 +8667,7 @@
       </p:sp>
       <p:sp>
         <p:nvSpPr>
-          <p:cNvPr id="21" name="TextBox 20"/>
+          <p:cNvPr id="22" name="TextBox 21"/>
           <p:cNvSpPr txBox="1"/>
           <p:nvPr/>
         </p:nvSpPr>
@@ -8482,7 +8707,7 @@
       </p:sp>
       <p:sp>
         <p:nvSpPr>
-          <p:cNvPr id="22" name="TextBox 21"/>
+          <p:cNvPr id="23" name="TextBox 22"/>
           <p:cNvSpPr txBox="1"/>
           <p:nvPr/>
         </p:nvSpPr>
@@ -8532,7 +8757,7 @@
       </p:sp>
       <p:sp>
         <p:nvSpPr>
-          <p:cNvPr id="23" name="TextBox 22"/>
+          <p:cNvPr id="24" name="TextBox 23"/>
           <p:cNvSpPr txBox="1"/>
           <p:nvPr/>
         </p:nvSpPr>
@@ -8642,7 +8867,53 @@
       </p:sp>
       <p:sp>
         <p:nvSpPr>
-          <p:cNvPr id="3" name="TextBox 2"/>
+          <p:cNvPr id="3" name="Rounded Rectangle 2"/>
+          <p:cNvSpPr/>
+          <p:nvPr/>
+        </p:nvSpPr>
+        <p:spPr>
+          <a:xfrm>
+            <a:off x="146304" y="146304"/>
+            <a:ext cx="11899087" cy="6565392"/>
+          </a:xfrm>
+          <a:prstGeom prst="roundRect">
+            <a:avLst>
+              <a:gd name="adj" fmla="val 2000"/>
+            </a:avLst>
+          </a:prstGeom>
+          <a:noFill/>
+          <a:ln w="9525">
+            <a:solidFill>
+              <a:srgbClr val="D9C9A6"/>
+            </a:solidFill>
+          </a:ln>
+          <a:effectLst/>
+        </p:spPr>
+        <p:style>
+          <a:lnRef idx="1">
+            <a:schemeClr val="accent1"/>
+          </a:lnRef>
+          <a:fillRef idx="3">
+            <a:schemeClr val="accent1"/>
+          </a:fillRef>
+          <a:effectRef idx="2">
+            <a:schemeClr val="accent1"/>
+          </a:effectRef>
+          <a:fontRef idx="minor">
+            <a:schemeClr val="lt1"/>
+          </a:fontRef>
+        </p:style>
+        <p:txBody>
+          <a:bodyPr rtlCol="0" anchor="ctr"/>
+          <a:lstStyle/>
+          <a:p>
+            <a:pPr algn="ctr"/>
+          </a:p>
+        </p:txBody>
+      </p:sp>
+      <p:sp>
+        <p:nvSpPr>
+          <p:cNvPr id="4" name="TextBox 3"/>
           <p:cNvSpPr txBox="1"/>
           <p:nvPr/>
         </p:nvSpPr>
@@ -8682,7 +8953,7 @@
       </p:sp>
       <p:sp>
         <p:nvSpPr>
-          <p:cNvPr id="4" name="TextBox 3"/>
+          <p:cNvPr id="5" name="TextBox 4"/>
           <p:cNvSpPr txBox="1"/>
           <p:nvPr/>
         </p:nvSpPr>
@@ -8847,6 +9118,50 @@
         </p:nvSpPr>
         <p:spPr>
           <a:xfrm>
+            <a:off x="2011680" y="0"/>
+            <a:ext cx="8165592" cy="21945"/>
+          </a:xfrm>
+          <a:prstGeom prst="rect">
+            <a:avLst/>
+          </a:prstGeom>
+          <a:solidFill>
+            <a:srgbClr val="C9B287"/>
+          </a:solidFill>
+          <a:ln>
+            <a:noFill/>
+          </a:ln>
+          <a:effectLst/>
+        </p:spPr>
+        <p:style>
+          <a:lnRef idx="1">
+            <a:schemeClr val="accent1"/>
+          </a:lnRef>
+          <a:fillRef idx="3">
+            <a:schemeClr val="accent1"/>
+          </a:fillRef>
+          <a:effectRef idx="2">
+            <a:schemeClr val="accent1"/>
+          </a:effectRef>
+          <a:fontRef idx="minor">
+            <a:schemeClr val="lt1"/>
+          </a:fontRef>
+        </p:style>
+        <p:txBody>
+          <a:bodyPr rtlCol="0" anchor="ctr"/>
+          <a:lstStyle/>
+          <a:p>
+            <a:pPr algn="ctr"/>
+          </a:p>
+        </p:txBody>
+      </p:sp>
+      <p:sp>
+        <p:nvSpPr>
+          <p:cNvPr id="4" name="Rectangle 3"/>
+          <p:cNvSpPr/>
+          <p:nvPr/>
+        </p:nvSpPr>
+        <p:spPr>
+          <a:xfrm>
             <a:off x="822960" y="644652"/>
             <a:ext cx="384048" cy="16459"/>
           </a:xfrm>
@@ -8885,7 +9200,7 @@
       </p:sp>
       <p:sp>
         <p:nvSpPr>
-          <p:cNvPr id="4" name="TextBox 3"/>
+          <p:cNvPr id="5" name="TextBox 4"/>
           <p:cNvSpPr txBox="1"/>
           <p:nvPr/>
         </p:nvSpPr>
@@ -8925,7 +9240,7 @@
       </p:sp>
       <p:sp>
         <p:nvSpPr>
-          <p:cNvPr id="5" name="TextBox 4"/>
+          <p:cNvPr id="6" name="TextBox 5"/>
           <p:cNvSpPr txBox="1"/>
           <p:nvPr/>
         </p:nvSpPr>
@@ -8985,7 +9300,7 @@
       </p:sp>
       <p:pic>
         <p:nvPicPr>
-          <p:cNvPr id="6" name="Picture 5" descr="fc_nav.jpg"/>
+          <p:cNvPr id="7" name="Picture 6" descr="fc_nav.jpg"/>
           <p:cNvPicPr>
             <a:picLocks noChangeAspect="1"/>
           </p:cNvPicPr>
@@ -9022,7 +9337,7 @@
       </p:pic>
       <p:sp>
         <p:nvSpPr>
-          <p:cNvPr id="7" name="Oval 6"/>
+          <p:cNvPr id="8" name="Oval 7"/>
           <p:cNvSpPr/>
           <p:nvPr/>
         </p:nvSpPr>
@@ -9066,7 +9381,7 @@
       </p:sp>
       <p:sp>
         <p:nvSpPr>
-          <p:cNvPr id="8" name="TextBox 7"/>
+          <p:cNvPr id="9" name="TextBox 8"/>
           <p:cNvSpPr txBox="1"/>
           <p:nvPr/>
         </p:nvSpPr>
@@ -9106,7 +9421,7 @@
       </p:sp>
       <p:sp>
         <p:nvSpPr>
-          <p:cNvPr id="9" name="Rounded Rectangle 8"/>
+          <p:cNvPr id="10" name="Rounded Rectangle 9"/>
           <p:cNvSpPr/>
           <p:nvPr/>
         </p:nvSpPr>
@@ -9161,7 +9476,7 @@
       </p:sp>
       <p:sp>
         <p:nvSpPr>
-          <p:cNvPr id="10" name="TextBox 9"/>
+          <p:cNvPr id="11" name="TextBox 10"/>
           <p:cNvSpPr txBox="1"/>
           <p:nvPr/>
         </p:nvSpPr>
@@ -9221,7 +9536,7 @@
       </p:sp>
       <p:sp>
         <p:nvSpPr>
-          <p:cNvPr id="11" name="TextBox 10"/>
+          <p:cNvPr id="12" name="TextBox 11"/>
           <p:cNvSpPr txBox="1"/>
           <p:nvPr/>
         </p:nvSpPr>
@@ -9281,7 +9596,7 @@
       </p:sp>
       <p:sp>
         <p:nvSpPr>
-          <p:cNvPr id="12" name="Rounded Rectangle 11"/>
+          <p:cNvPr id="13" name="Rounded Rectangle 12"/>
           <p:cNvSpPr/>
           <p:nvPr/>
         </p:nvSpPr>
@@ -9336,7 +9651,7 @@
       </p:sp>
       <p:sp>
         <p:nvSpPr>
-          <p:cNvPr id="13" name="TextBox 12"/>
+          <p:cNvPr id="14" name="TextBox 13"/>
           <p:cNvSpPr txBox="1"/>
           <p:nvPr/>
         </p:nvSpPr>
@@ -9396,7 +9711,7 @@
       </p:sp>
       <p:sp>
         <p:nvSpPr>
-          <p:cNvPr id="14" name="Rounded Rectangle 13"/>
+          <p:cNvPr id="15" name="Rounded Rectangle 14"/>
           <p:cNvSpPr/>
           <p:nvPr/>
         </p:nvSpPr>
@@ -9458,7 +9773,7 @@
       </p:sp>
       <p:sp>
         <p:nvSpPr>
-          <p:cNvPr id="15" name="TextBox 14"/>
+          <p:cNvPr id="16" name="TextBox 15"/>
           <p:cNvSpPr txBox="1"/>
           <p:nvPr/>
         </p:nvSpPr>
@@ -9498,7 +9813,7 @@
       </p:sp>
       <p:sp>
         <p:nvSpPr>
-          <p:cNvPr id="16" name="TextBox 15"/>
+          <p:cNvPr id="17" name="TextBox 16"/>
           <p:cNvSpPr txBox="1"/>
           <p:nvPr/>
         </p:nvSpPr>
@@ -9548,7 +9863,7 @@
       </p:sp>
       <p:sp>
         <p:nvSpPr>
-          <p:cNvPr id="17" name="TextBox 16"/>
+          <p:cNvPr id="18" name="TextBox 17"/>
           <p:cNvSpPr txBox="1"/>
           <p:nvPr/>
         </p:nvSpPr>
@@ -9656,6 +9971,50 @@
         </p:nvSpPr>
         <p:spPr>
           <a:xfrm>
+            <a:off x="2011680" y="0"/>
+            <a:ext cx="8165592" cy="21945"/>
+          </a:xfrm>
+          <a:prstGeom prst="rect">
+            <a:avLst/>
+          </a:prstGeom>
+          <a:solidFill>
+            <a:srgbClr val="C9B287"/>
+          </a:solidFill>
+          <a:ln>
+            <a:noFill/>
+          </a:ln>
+          <a:effectLst/>
+        </p:spPr>
+        <p:style>
+          <a:lnRef idx="1">
+            <a:schemeClr val="accent1"/>
+          </a:lnRef>
+          <a:fillRef idx="3">
+            <a:schemeClr val="accent1"/>
+          </a:fillRef>
+          <a:effectRef idx="2">
+            <a:schemeClr val="accent1"/>
+          </a:effectRef>
+          <a:fontRef idx="minor">
+            <a:schemeClr val="lt1"/>
+          </a:fontRef>
+        </p:style>
+        <p:txBody>
+          <a:bodyPr rtlCol="0" anchor="ctr"/>
+          <a:lstStyle/>
+          <a:p>
+            <a:pPr algn="ctr"/>
+          </a:p>
+        </p:txBody>
+      </p:sp>
+      <p:sp>
+        <p:nvSpPr>
+          <p:cNvPr id="4" name="Rectangle 3"/>
+          <p:cNvSpPr/>
+          <p:nvPr/>
+        </p:nvSpPr>
+        <p:spPr>
+          <a:xfrm>
             <a:off x="822960" y="644652"/>
             <a:ext cx="384048" cy="16459"/>
           </a:xfrm>
@@ -9694,7 +10053,7 @@
       </p:sp>
       <p:sp>
         <p:nvSpPr>
-          <p:cNvPr id="4" name="TextBox 3"/>
+          <p:cNvPr id="5" name="TextBox 4"/>
           <p:cNvSpPr txBox="1"/>
           <p:nvPr/>
         </p:nvSpPr>
@@ -9734,7 +10093,7 @@
       </p:sp>
       <p:sp>
         <p:nvSpPr>
-          <p:cNvPr id="5" name="TextBox 4"/>
+          <p:cNvPr id="6" name="TextBox 5"/>
           <p:cNvSpPr txBox="1"/>
           <p:nvPr/>
         </p:nvSpPr>
@@ -9784,7 +10143,7 @@
       </p:sp>
       <p:sp>
         <p:nvSpPr>
-          <p:cNvPr id="6" name="Rectangle 5"/>
+          <p:cNvPr id="7" name="Rectangle 6"/>
           <p:cNvSpPr/>
           <p:nvPr/>
         </p:nvSpPr>
@@ -9828,7 +10187,7 @@
       </p:sp>
       <p:sp>
         <p:nvSpPr>
-          <p:cNvPr id="7" name="TextBox 6"/>
+          <p:cNvPr id="8" name="TextBox 7"/>
           <p:cNvSpPr txBox="1"/>
           <p:nvPr/>
         </p:nvSpPr>
@@ -9868,7 +10227,7 @@
       </p:sp>
       <p:sp>
         <p:nvSpPr>
-          <p:cNvPr id="8" name="Oval 7"/>
+          <p:cNvPr id="9" name="Oval 8"/>
           <p:cNvSpPr/>
           <p:nvPr/>
         </p:nvSpPr>
@@ -9914,7 +10273,7 @@
       </p:sp>
       <p:sp>
         <p:nvSpPr>
-          <p:cNvPr id="9" name="Rounded Rectangle 8"/>
+          <p:cNvPr id="10" name="Rounded Rectangle 9"/>
           <p:cNvSpPr/>
           <p:nvPr/>
         </p:nvSpPr>
@@ -9974,7 +10333,7 @@
       </p:sp>
       <p:sp>
         <p:nvSpPr>
-          <p:cNvPr id="10" name="TextBox 9"/>
+          <p:cNvPr id="11" name="TextBox 10"/>
           <p:cNvSpPr txBox="1"/>
           <p:nvPr/>
         </p:nvSpPr>
@@ -10034,7 +10393,7 @@
       </p:sp>
       <p:sp>
         <p:nvSpPr>
-          <p:cNvPr id="11" name="Rectangle 10"/>
+          <p:cNvPr id="12" name="Rectangle 11"/>
           <p:cNvSpPr/>
           <p:nvPr/>
         </p:nvSpPr>
@@ -10078,7 +10437,7 @@
       </p:sp>
       <p:sp>
         <p:nvSpPr>
-          <p:cNvPr id="12" name="TextBox 11"/>
+          <p:cNvPr id="13" name="TextBox 12"/>
           <p:cNvSpPr txBox="1"/>
           <p:nvPr/>
         </p:nvSpPr>
@@ -10118,7 +10477,7 @@
       </p:sp>
       <p:sp>
         <p:nvSpPr>
-          <p:cNvPr id="13" name="Oval 12"/>
+          <p:cNvPr id="14" name="Oval 13"/>
           <p:cNvSpPr/>
           <p:nvPr/>
         </p:nvSpPr>
@@ -10164,7 +10523,7 @@
       </p:sp>
       <p:sp>
         <p:nvSpPr>
-          <p:cNvPr id="14" name="Rounded Rectangle 13"/>
+          <p:cNvPr id="15" name="Rounded Rectangle 14"/>
           <p:cNvSpPr/>
           <p:nvPr/>
         </p:nvSpPr>
@@ -10224,7 +10583,7 @@
       </p:sp>
       <p:sp>
         <p:nvSpPr>
-          <p:cNvPr id="15" name="TextBox 14"/>
+          <p:cNvPr id="16" name="TextBox 15"/>
           <p:cNvSpPr txBox="1"/>
           <p:nvPr/>
         </p:nvSpPr>
@@ -10284,7 +10643,7 @@
       </p:sp>
       <p:sp>
         <p:nvSpPr>
-          <p:cNvPr id="16" name="Rectangle 15"/>
+          <p:cNvPr id="17" name="Rectangle 16"/>
           <p:cNvSpPr/>
           <p:nvPr/>
         </p:nvSpPr>
@@ -10328,7 +10687,7 @@
       </p:sp>
       <p:sp>
         <p:nvSpPr>
-          <p:cNvPr id="17" name="TextBox 16"/>
+          <p:cNvPr id="18" name="TextBox 17"/>
           <p:cNvSpPr txBox="1"/>
           <p:nvPr/>
         </p:nvSpPr>
@@ -10368,7 +10727,7 @@
       </p:sp>
       <p:sp>
         <p:nvSpPr>
-          <p:cNvPr id="18" name="Oval 17"/>
+          <p:cNvPr id="19" name="Oval 18"/>
           <p:cNvSpPr/>
           <p:nvPr/>
         </p:nvSpPr>
@@ -10414,7 +10773,7 @@
       </p:sp>
       <p:sp>
         <p:nvSpPr>
-          <p:cNvPr id="19" name="Rounded Rectangle 18"/>
+          <p:cNvPr id="20" name="Rounded Rectangle 19"/>
           <p:cNvSpPr/>
           <p:nvPr/>
         </p:nvSpPr>
@@ -10474,7 +10833,7 @@
       </p:sp>
       <p:sp>
         <p:nvSpPr>
-          <p:cNvPr id="20" name="TextBox 19"/>
+          <p:cNvPr id="21" name="TextBox 20"/>
           <p:cNvSpPr txBox="1"/>
           <p:nvPr/>
         </p:nvSpPr>
@@ -10534,7 +10893,7 @@
       </p:sp>
       <p:sp>
         <p:nvSpPr>
-          <p:cNvPr id="21" name="TextBox 20"/>
+          <p:cNvPr id="22" name="TextBox 21"/>
           <p:cNvSpPr txBox="1"/>
           <p:nvPr/>
         </p:nvSpPr>
@@ -10574,7 +10933,7 @@
       </p:sp>
       <p:sp>
         <p:nvSpPr>
-          <p:cNvPr id="22" name="Oval 21"/>
+          <p:cNvPr id="23" name="Oval 22"/>
           <p:cNvSpPr/>
           <p:nvPr/>
         </p:nvSpPr>
@@ -10620,7 +10979,7 @@
       </p:sp>
       <p:sp>
         <p:nvSpPr>
-          <p:cNvPr id="23" name="Rounded Rectangle 22"/>
+          <p:cNvPr id="24" name="Rounded Rectangle 23"/>
           <p:cNvSpPr/>
           <p:nvPr/>
         </p:nvSpPr>
@@ -10680,7 +11039,7 @@
       </p:sp>
       <p:sp>
         <p:nvSpPr>
-          <p:cNvPr id="24" name="TextBox 23"/>
+          <p:cNvPr id="25" name="TextBox 24"/>
           <p:cNvSpPr txBox="1"/>
           <p:nvPr/>
         </p:nvSpPr>
@@ -10733,14 +11092,14 @@
                 <a:latin typeface="Pretendard"/>
                 <a:ea typeface="Pretendard"/>
               </a:rPr>
-              <a:t>완성본을 내려받아 그대로 등록 — 외주 없이 하루 안에 상품 하나가 끝납니다.</a:t>
-            </a:r>
-          </a:p>
-        </p:txBody>
-      </p:sp>
-      <p:sp>
-        <p:nvSpPr>
-          <p:cNvPr id="25" name="TextBox 24"/>
+              <a:t>완성본을 내려받아 그대로 등록합니다. 외주 없이, 하루 안에 끝나는 흐름입니다.</a:t>
+            </a:r>
+          </a:p>
+        </p:txBody>
+      </p:sp>
+      <p:sp>
+        <p:nvSpPr>
+          <p:cNvPr id="26" name="TextBox 25"/>
           <p:cNvSpPr txBox="1"/>
           <p:nvPr/>
         </p:nvSpPr>
@@ -10780,7 +11139,7 @@
       </p:sp>
       <p:sp>
         <p:nvSpPr>
-          <p:cNvPr id="26" name="TextBox 25"/>
+          <p:cNvPr id="27" name="TextBox 26"/>
           <p:cNvSpPr txBox="1"/>
           <p:nvPr/>
         </p:nvSpPr>
@@ -10934,7 +11293,53 @@
       </p:sp>
       <p:sp>
         <p:nvSpPr>
-          <p:cNvPr id="4" name="Rectangle 3"/>
+          <p:cNvPr id="4" name="Rounded Rectangle 3"/>
+          <p:cNvSpPr/>
+          <p:nvPr/>
+        </p:nvSpPr>
+        <p:spPr>
+          <a:xfrm>
+            <a:off x="146304" y="146304"/>
+            <a:ext cx="11899087" cy="6565392"/>
+          </a:xfrm>
+          <a:prstGeom prst="roundRect">
+            <a:avLst>
+              <a:gd name="adj" fmla="val 2000"/>
+            </a:avLst>
+          </a:prstGeom>
+          <a:noFill/>
+          <a:ln w="9525">
+            <a:solidFill>
+              <a:srgbClr val="6B5E3F"/>
+            </a:solidFill>
+          </a:ln>
+          <a:effectLst/>
+        </p:spPr>
+        <p:style>
+          <a:lnRef idx="1">
+            <a:schemeClr val="accent1"/>
+          </a:lnRef>
+          <a:fillRef idx="3">
+            <a:schemeClr val="accent1"/>
+          </a:fillRef>
+          <a:effectRef idx="2">
+            <a:schemeClr val="accent1"/>
+          </a:effectRef>
+          <a:fontRef idx="minor">
+            <a:schemeClr val="lt1"/>
+          </a:fontRef>
+        </p:style>
+        <p:txBody>
+          <a:bodyPr rtlCol="0" anchor="ctr"/>
+          <a:lstStyle/>
+          <a:p>
+            <a:pPr algn="ctr"/>
+          </a:p>
+        </p:txBody>
+      </p:sp>
+      <p:sp>
+        <p:nvSpPr>
+          <p:cNvPr id="5" name="Rectangle 4"/>
           <p:cNvSpPr/>
           <p:nvPr/>
         </p:nvSpPr>
@@ -10978,7 +11383,7 @@
       </p:sp>
       <p:sp>
         <p:nvSpPr>
-          <p:cNvPr id="5" name="TextBox 4"/>
+          <p:cNvPr id="6" name="TextBox 5"/>
           <p:cNvSpPr txBox="1"/>
           <p:nvPr/>
         </p:nvSpPr>
@@ -11018,7 +11423,7 @@
       </p:sp>
       <p:sp>
         <p:nvSpPr>
-          <p:cNvPr id="6" name="TextBox 5"/>
+          <p:cNvPr id="7" name="TextBox 6"/>
           <p:cNvSpPr txBox="1"/>
           <p:nvPr/>
         </p:nvSpPr>
@@ -11075,7 +11480,7 @@
       </p:sp>
       <p:sp>
         <p:nvSpPr>
-          <p:cNvPr id="7" name="Rounded Rectangle 6"/>
+          <p:cNvPr id="8" name="Rounded Rectangle 7"/>
           <p:cNvSpPr/>
           <p:nvPr/>
         </p:nvSpPr>
@@ -11123,7 +11528,7 @@
       </p:sp>
       <p:sp>
         <p:nvSpPr>
-          <p:cNvPr id="8" name="TextBox 7"/>
+          <p:cNvPr id="9" name="TextBox 8"/>
           <p:cNvSpPr txBox="1"/>
           <p:nvPr/>
         </p:nvSpPr>
@@ -11206,14 +11611,14 @@
                 <a:latin typeface="Pretendard"/>
                 <a:ea typeface="Pretendard"/>
               </a:rPr>
-              <a:t>구글 계정 하나로 두 서비스를 오가며 씁니다.</a:t>
-            </a:r>
-          </a:p>
-        </p:txBody>
-      </p:sp>
-      <p:sp>
-        <p:nvSpPr>
-          <p:cNvPr id="9" name="Rounded Rectangle 8"/>
+              <a:t>구글 계정 하나로 두 서비스를 자유롭게 오갑니다.</a:t>
+            </a:r>
+          </a:p>
+        </p:txBody>
+      </p:sp>
+      <p:sp>
+        <p:nvSpPr>
+          <p:cNvPr id="10" name="Rounded Rectangle 9"/>
           <p:cNvSpPr/>
           <p:nvPr/>
         </p:nvSpPr>
@@ -11261,7 +11666,7 @@
       </p:sp>
       <p:sp>
         <p:nvSpPr>
-          <p:cNvPr id="10" name="TextBox 9"/>
+          <p:cNvPr id="11" name="TextBox 10"/>
           <p:cNvSpPr txBox="1"/>
           <p:nvPr/>
         </p:nvSpPr>
@@ -11344,14 +11749,14 @@
                 <a:latin typeface="Pretendard"/>
                 <a:ea typeface="Pretendard"/>
               </a:rPr>
-              <a:t>걸리는 이름은 검색마스터, 사고 싶은 모습은 프리캔버스.</a:t>
-            </a:r>
-          </a:p>
-        </p:txBody>
-      </p:sp>
-      <p:sp>
-        <p:nvSpPr>
-          <p:cNvPr id="11" name="Rounded Rectangle 10"/>
+              <a:t>검색에 걸리는 이름은 검색마스터가, 사고 싶어지는 모습은 프리캔버스가.</a:t>
+            </a:r>
+          </a:p>
+        </p:txBody>
+      </p:sp>
+      <p:sp>
+        <p:nvSpPr>
+          <p:cNvPr id="12" name="Rounded Rectangle 11"/>
           <p:cNvSpPr/>
           <p:nvPr/>
         </p:nvSpPr>
@@ -11399,7 +11804,7 @@
       </p:sp>
       <p:sp>
         <p:nvSpPr>
-          <p:cNvPr id="12" name="TextBox 11"/>
+          <p:cNvPr id="13" name="TextBox 12"/>
           <p:cNvSpPr txBox="1"/>
           <p:nvPr/>
         </p:nvSpPr>
@@ -11445,7 +11850,7 @@
                 <a:latin typeface="Pretendard"/>
                 <a:ea typeface="Pretendard"/>
               </a:rPr>
-              <a:t> 의 새것</a:t>
+              <a:t>  가지 기능</a:t>
             </a:r>
           </a:p>
           <a:p>
@@ -11465,7 +11870,7 @@
                 <a:latin typeface="Pretendard ExtraBold"/>
                 <a:ea typeface="Pretendard ExtraBold"/>
               </a:rPr>
-              <a:t>여름 새 기능</a:t>
+              <a:t>이번 여름의 새것</a:t>
             </a:r>
           </a:p>
           <a:p>
@@ -11482,14 +11887,14 @@
                 <a:latin typeface="Pretendard"/>
                 <a:ea typeface="Pretendard"/>
               </a:rPr>
-              <a:t>설명 입력·링크 소싱·영상 한국어화·상세 편집·카드뉴스·지우개.</a:t>
-            </a:r>
-          </a:p>
-        </p:txBody>
-      </p:sp>
-      <p:sp>
-        <p:nvSpPr>
-          <p:cNvPr id="13" name="Rounded Rectangle 12">
+              <a:t>설명 입력 · 링크 소싱 · 영상 한국어화 · 상세 편집 · 카드뉴스 · 지우개.</a:t>
+            </a:r>
+          </a:p>
+        </p:txBody>
+      </p:sp>
+      <p:sp>
+        <p:nvSpPr>
+          <p:cNvPr id="14" name="Rounded Rectangle 13">
             <a:hlinkClick r:id="rId2"/>
           </p:cNvPr>
           <p:cNvSpPr/>
@@ -11539,7 +11944,7 @@
       </p:sp>
       <p:sp>
         <p:nvSpPr>
-          <p:cNvPr id="14" name="TextBox 13"/>
+          <p:cNvPr id="15" name="TextBox 14"/>
           <p:cNvSpPr txBox="1"/>
           <p:nvPr/>
         </p:nvSpPr>
@@ -11599,7 +12004,7 @@
       </p:sp>
       <p:sp>
         <p:nvSpPr>
-          <p:cNvPr id="15" name="Rounded Rectangle 14">
+          <p:cNvPr id="16" name="Rounded Rectangle 15">
             <a:hlinkClick r:id="rId3"/>
           </p:cNvPr>
           <p:cNvSpPr/>
@@ -11649,7 +12054,7 @@
       </p:sp>
       <p:sp>
         <p:nvSpPr>
-          <p:cNvPr id="16" name="TextBox 15"/>
+          <p:cNvPr id="17" name="TextBox 16"/>
           <p:cNvSpPr txBox="1"/>
           <p:nvPr/>
         </p:nvSpPr>
@@ -11709,7 +12114,7 @@
       </p:sp>
       <p:sp>
         <p:nvSpPr>
-          <p:cNvPr id="17" name="TextBox 16"/>
+          <p:cNvPr id="18" name="TextBox 17"/>
           <p:cNvSpPr txBox="1"/>
           <p:nvPr/>
         </p:nvSpPr>
@@ -11742,7 +12147,7 @@
                 <a:latin typeface="Noto Serif KR"/>
                 <a:ea typeface="Noto Serif KR"/>
               </a:rPr>
-              <a:t>고맙습니다.</a:t>
+              <a:t>감사합니다.</a:t>
             </a:r>
           </a:p>
         </p:txBody>
@@ -11817,6 +12222,50 @@
         </p:nvSpPr>
         <p:spPr>
           <a:xfrm>
+            <a:off x="2011680" y="0"/>
+            <a:ext cx="8165592" cy="21945"/>
+          </a:xfrm>
+          <a:prstGeom prst="rect">
+            <a:avLst/>
+          </a:prstGeom>
+          <a:solidFill>
+            <a:srgbClr val="C9B287"/>
+          </a:solidFill>
+          <a:ln>
+            <a:noFill/>
+          </a:ln>
+          <a:effectLst/>
+        </p:spPr>
+        <p:style>
+          <a:lnRef idx="1">
+            <a:schemeClr val="accent1"/>
+          </a:lnRef>
+          <a:fillRef idx="3">
+            <a:schemeClr val="accent1"/>
+          </a:fillRef>
+          <a:effectRef idx="2">
+            <a:schemeClr val="accent1"/>
+          </a:effectRef>
+          <a:fontRef idx="minor">
+            <a:schemeClr val="lt1"/>
+          </a:fontRef>
+        </p:style>
+        <p:txBody>
+          <a:bodyPr rtlCol="0" anchor="ctr"/>
+          <a:lstStyle/>
+          <a:p>
+            <a:pPr algn="ctr"/>
+          </a:p>
+        </p:txBody>
+      </p:sp>
+      <p:sp>
+        <p:nvSpPr>
+          <p:cNvPr id="4" name="Rectangle 3"/>
+          <p:cNvSpPr/>
+          <p:nvPr/>
+        </p:nvSpPr>
+        <p:spPr>
+          <a:xfrm>
             <a:off x="822960" y="644652"/>
             <a:ext cx="384048" cy="16459"/>
           </a:xfrm>
@@ -11855,7 +12304,7 @@
       </p:sp>
       <p:sp>
         <p:nvSpPr>
-          <p:cNvPr id="4" name="TextBox 3"/>
+          <p:cNvPr id="5" name="TextBox 4"/>
           <p:cNvSpPr txBox="1"/>
           <p:nvPr/>
         </p:nvSpPr>
@@ -11895,7 +12344,7 @@
       </p:sp>
       <p:sp>
         <p:nvSpPr>
-          <p:cNvPr id="5" name="TextBox 4"/>
+          <p:cNvPr id="6" name="TextBox 5"/>
           <p:cNvSpPr txBox="1"/>
           <p:nvPr/>
         </p:nvSpPr>
@@ -11972,7 +12421,7 @@
       </p:sp>
       <p:sp>
         <p:nvSpPr>
-          <p:cNvPr id="6" name="Rounded Rectangle 5"/>
+          <p:cNvPr id="7" name="Rounded Rectangle 6"/>
           <p:cNvSpPr/>
           <p:nvPr/>
         </p:nvSpPr>
@@ -12027,7 +12476,7 @@
       </p:sp>
       <p:sp>
         <p:nvSpPr>
-          <p:cNvPr id="7" name="TextBox 6"/>
+          <p:cNvPr id="8" name="TextBox 7"/>
           <p:cNvSpPr txBox="1"/>
           <p:nvPr/>
         </p:nvSpPr>
@@ -12067,7 +12516,7 @@
       </p:sp>
       <p:sp>
         <p:nvSpPr>
-          <p:cNvPr id="8" name="TextBox 7"/>
+          <p:cNvPr id="9" name="TextBox 8"/>
           <p:cNvSpPr txBox="1"/>
           <p:nvPr/>
         </p:nvSpPr>
@@ -12184,7 +12633,7 @@
       </p:sp>
       <p:sp>
         <p:nvSpPr>
-          <p:cNvPr id="9" name="Rounded Rectangle 8"/>
+          <p:cNvPr id="10" name="Rounded Rectangle 9"/>
           <p:cNvSpPr/>
           <p:nvPr/>
         </p:nvSpPr>
@@ -12239,7 +12688,7 @@
       </p:sp>
       <p:sp>
         <p:nvSpPr>
-          <p:cNvPr id="10" name="TextBox 9"/>
+          <p:cNvPr id="11" name="TextBox 10"/>
           <p:cNvSpPr txBox="1"/>
           <p:nvPr/>
         </p:nvSpPr>
@@ -12279,7 +12728,7 @@
       </p:sp>
       <p:sp>
         <p:nvSpPr>
-          <p:cNvPr id="11" name="TextBox 10"/>
+          <p:cNvPr id="12" name="TextBox 11"/>
           <p:cNvSpPr txBox="1"/>
           <p:nvPr/>
         </p:nvSpPr>
@@ -12396,7 +12845,7 @@
       </p:sp>
       <p:sp>
         <p:nvSpPr>
-          <p:cNvPr id="12" name="TextBox 11"/>
+          <p:cNvPr id="13" name="TextBox 12"/>
           <p:cNvSpPr txBox="1"/>
           <p:nvPr/>
         </p:nvSpPr>
@@ -12439,7 +12888,7 @@
                 <a:latin typeface="Pretendard ExtraBold"/>
                 <a:ea typeface="Pretendard ExtraBold"/>
               </a:rPr>
-              <a:t>안 보이면</a:t>
+              <a:t>보이지 않으면</a:t>
             </a:r>
             <a:r>
               <a:rPr sz="1250" b="0" i="0">
@@ -12459,7 +12908,7 @@
                 <a:latin typeface="Pretendard ExtraBold"/>
                 <a:ea typeface="Pretendard ExtraBold"/>
               </a:rPr>
-              <a:t>안 사고 싶으면</a:t>
+              <a:t>마음을 움직이지 못하면</a:t>
             </a:r>
             <a:r>
               <a:rPr sz="1250" b="0" i="0">
@@ -12476,7 +12925,7 @@
       </p:sp>
       <p:sp>
         <p:nvSpPr>
-          <p:cNvPr id="13" name="TextBox 12"/>
+          <p:cNvPr id="14" name="TextBox 13"/>
           <p:cNvSpPr txBox="1"/>
           <p:nvPr/>
         </p:nvSpPr>
@@ -12526,7 +12975,7 @@
       </p:sp>
       <p:sp>
         <p:nvSpPr>
-          <p:cNvPr id="14" name="TextBox 13"/>
+          <p:cNvPr id="15" name="TextBox 14"/>
           <p:cNvSpPr txBox="1"/>
           <p:nvPr/>
         </p:nvSpPr>
@@ -12634,6 +13083,50 @@
         </p:nvSpPr>
         <p:spPr>
           <a:xfrm>
+            <a:off x="2011680" y="0"/>
+            <a:ext cx="8165592" cy="21945"/>
+          </a:xfrm>
+          <a:prstGeom prst="rect">
+            <a:avLst/>
+          </a:prstGeom>
+          <a:solidFill>
+            <a:srgbClr val="C9B287"/>
+          </a:solidFill>
+          <a:ln>
+            <a:noFill/>
+          </a:ln>
+          <a:effectLst/>
+        </p:spPr>
+        <p:style>
+          <a:lnRef idx="1">
+            <a:schemeClr val="accent1"/>
+          </a:lnRef>
+          <a:fillRef idx="3">
+            <a:schemeClr val="accent1"/>
+          </a:fillRef>
+          <a:effectRef idx="2">
+            <a:schemeClr val="accent1"/>
+          </a:effectRef>
+          <a:fontRef idx="minor">
+            <a:schemeClr val="lt1"/>
+          </a:fontRef>
+        </p:style>
+        <p:txBody>
+          <a:bodyPr rtlCol="0" anchor="ctr"/>
+          <a:lstStyle/>
+          <a:p>
+            <a:pPr algn="ctr"/>
+          </a:p>
+        </p:txBody>
+      </p:sp>
+      <p:sp>
+        <p:nvSpPr>
+          <p:cNvPr id="4" name="Rectangle 3"/>
+          <p:cNvSpPr/>
+          <p:nvPr/>
+        </p:nvSpPr>
+        <p:spPr>
+          <a:xfrm>
             <a:off x="822960" y="644652"/>
             <a:ext cx="384048" cy="16459"/>
           </a:xfrm>
@@ -12672,7 +13165,7 @@
       </p:sp>
       <p:sp>
         <p:nvSpPr>
-          <p:cNvPr id="4" name="TextBox 3"/>
+          <p:cNvPr id="5" name="TextBox 4"/>
           <p:cNvSpPr txBox="1"/>
           <p:nvPr/>
         </p:nvSpPr>
@@ -12712,7 +13205,7 @@
       </p:sp>
       <p:sp>
         <p:nvSpPr>
-          <p:cNvPr id="5" name="TextBox 4"/>
+          <p:cNvPr id="6" name="TextBox 5"/>
           <p:cNvSpPr txBox="1"/>
           <p:nvPr/>
         </p:nvSpPr>
@@ -12745,7 +13238,7 @@
                 <a:latin typeface="Noto Serif KR"/>
                 <a:ea typeface="Noto Serif KR"/>
               </a:rPr>
-              <a:t>따로 노는 두 앱이 아니라,</a:t>
+              <a:t>따로 쓰는 두 개의 앱이 아니라,</a:t>
             </a:r>
           </a:p>
           <a:p>
@@ -12757,21 +13250,31 @@
             <a:r>
               <a:rPr sz="2700" b="1" i="0">
                 <a:solidFill>
-                  <a:srgbClr val="0E5C4A"/>
+                  <a:srgbClr val="1A2721"/>
                 </a:solidFill>
                 <a:latin typeface="Noto Serif KR"/>
                 <a:ea typeface="Noto Serif KR"/>
               </a:rPr>
-              <a:t>이어지는 한 벌</a:t>
+              <a:t>하나로 </a:t>
             </a:r>
             <a:r>
               <a:rPr sz="2700" b="1" i="0">
                 <a:solidFill>
-                  <a:srgbClr val="1A2721"/>
+                  <a:srgbClr val="0E5C4A"/>
                 </a:solidFill>
                 <a:latin typeface="Noto Serif KR"/>
                 <a:ea typeface="Noto Serif KR"/>
               </a:rPr>
+              <a:t>이어지는 한 벌</a:t>
+            </a:r>
+            <a:r>
+              <a:rPr sz="2700" b="1" i="0">
+                <a:solidFill>
+                  <a:srgbClr val="1A2721"/>
+                </a:solidFill>
+                <a:latin typeface="Noto Serif KR"/>
+                <a:ea typeface="Noto Serif KR"/>
+              </a:rPr>
               <a:t>의 도구입니다.</a:t>
             </a:r>
           </a:p>
@@ -12779,7 +13282,7 @@
       </p:sp>
       <p:sp>
         <p:nvSpPr>
-          <p:cNvPr id="6" name="Rounded Rectangle 5"/>
+          <p:cNvPr id="7" name="Rounded Rectangle 6"/>
           <p:cNvSpPr/>
           <p:nvPr/>
         </p:nvSpPr>
@@ -12834,7 +13337,7 @@
       </p:sp>
       <p:sp>
         <p:nvSpPr>
-          <p:cNvPr id="7" name="Oval 6"/>
+          <p:cNvPr id="8" name="Oval 7"/>
           <p:cNvSpPr/>
           <p:nvPr/>
         </p:nvSpPr>
@@ -12878,7 +13381,7 @@
       </p:sp>
       <p:sp>
         <p:nvSpPr>
-          <p:cNvPr id="8" name="Oval 7"/>
+          <p:cNvPr id="9" name="Oval 8"/>
           <p:cNvSpPr/>
           <p:nvPr/>
         </p:nvSpPr>
@@ -12922,7 +13425,7 @@
       </p:sp>
       <p:sp>
         <p:nvSpPr>
-          <p:cNvPr id="9" name="Oval 8"/>
+          <p:cNvPr id="10" name="Oval 9"/>
           <p:cNvSpPr/>
           <p:nvPr/>
         </p:nvSpPr>
@@ -12966,7 +13469,7 @@
       </p:sp>
       <p:sp>
         <p:nvSpPr>
-          <p:cNvPr id="10" name="Rounded Rectangle 9"/>
+          <p:cNvPr id="11" name="Rounded Rectangle 10"/>
           <p:cNvSpPr/>
           <p:nvPr/>
         </p:nvSpPr>
@@ -13028,7 +13531,7 @@
       </p:sp>
       <p:pic>
         <p:nvPicPr>
-          <p:cNvPr id="11" name="Picture 10" descr="sm_head.jpg"/>
+          <p:cNvPr id="12" name="Picture 11" descr="sm_head.jpg"/>
           <p:cNvPicPr>
             <a:picLocks noChangeAspect="1"/>
           </p:cNvPicPr>
@@ -13053,7 +13556,7 @@
       </p:pic>
       <p:sp>
         <p:nvSpPr>
-          <p:cNvPr id="12" name="Rounded Rectangle 11"/>
+          <p:cNvPr id="13" name="Rounded Rectangle 12"/>
           <p:cNvSpPr/>
           <p:nvPr/>
         </p:nvSpPr>
@@ -13113,7 +13616,7 @@
       </p:sp>
       <p:sp>
         <p:nvSpPr>
-          <p:cNvPr id="13" name="TextBox 12"/>
+          <p:cNvPr id="14" name="TextBox 13"/>
           <p:cNvSpPr txBox="1"/>
           <p:nvPr/>
         </p:nvSpPr>
@@ -13190,7 +13693,7 @@
       </p:sp>
       <p:sp>
         <p:nvSpPr>
-          <p:cNvPr id="14" name="Rounded Rectangle 13"/>
+          <p:cNvPr id="15" name="Rounded Rectangle 14"/>
           <p:cNvSpPr/>
           <p:nvPr/>
         </p:nvSpPr>
@@ -13245,7 +13748,7 @@
       </p:sp>
       <p:sp>
         <p:nvSpPr>
-          <p:cNvPr id="15" name="Oval 14"/>
+          <p:cNvPr id="16" name="Oval 15"/>
           <p:cNvSpPr/>
           <p:nvPr/>
         </p:nvSpPr>
@@ -13289,7 +13792,7 @@
       </p:sp>
       <p:sp>
         <p:nvSpPr>
-          <p:cNvPr id="16" name="Oval 15"/>
+          <p:cNvPr id="17" name="Oval 16"/>
           <p:cNvSpPr/>
           <p:nvPr/>
         </p:nvSpPr>
@@ -13333,7 +13836,7 @@
       </p:sp>
       <p:sp>
         <p:nvSpPr>
-          <p:cNvPr id="17" name="Oval 16"/>
+          <p:cNvPr id="18" name="Oval 17"/>
           <p:cNvSpPr/>
           <p:nvPr/>
         </p:nvSpPr>
@@ -13377,7 +13880,7 @@
       </p:sp>
       <p:sp>
         <p:nvSpPr>
-          <p:cNvPr id="18" name="Rounded Rectangle 17"/>
+          <p:cNvPr id="19" name="Rounded Rectangle 18"/>
           <p:cNvSpPr/>
           <p:nvPr/>
         </p:nvSpPr>
@@ -13439,7 +13942,7 @@
       </p:sp>
       <p:pic>
         <p:nvPicPr>
-          <p:cNvPr id="19" name="Picture 18" descr="fc_hero.jpg"/>
+          <p:cNvPr id="20" name="Picture 19" descr="fc_hero.jpg"/>
           <p:cNvPicPr>
             <a:picLocks noChangeAspect="1"/>
           </p:cNvPicPr>
@@ -13464,7 +13967,7 @@
       </p:pic>
       <p:sp>
         <p:nvSpPr>
-          <p:cNvPr id="20" name="Rounded Rectangle 19"/>
+          <p:cNvPr id="21" name="Rounded Rectangle 20"/>
           <p:cNvSpPr/>
           <p:nvPr/>
         </p:nvSpPr>
@@ -13524,7 +14027,7 @@
       </p:sp>
       <p:sp>
         <p:nvSpPr>
-          <p:cNvPr id="21" name="TextBox 20"/>
+          <p:cNvPr id="22" name="TextBox 21"/>
           <p:cNvSpPr txBox="1"/>
           <p:nvPr/>
         </p:nvSpPr>
@@ -13654,7 +14157,7 @@
                 <a:latin typeface="Pretendard ExtraBold"/>
                 <a:ea typeface="Pretendard ExtraBold"/>
               </a:rPr>
-              <a:t>유월 스무날 이후 새로 생긴 것들</a:t>
+              <a:t>이번 여름 새로 더해진 기능들</a:t>
             </a:r>
             <a:r>
               <a:rPr sz="1250" b="0" i="0">
@@ -13671,7 +14174,7 @@
       </p:sp>
       <p:sp>
         <p:nvSpPr>
-          <p:cNvPr id="22" name="TextBox 21"/>
+          <p:cNvPr id="23" name="TextBox 22"/>
           <p:cNvSpPr txBox="1"/>
           <p:nvPr/>
         </p:nvSpPr>
@@ -13721,7 +14224,7 @@
       </p:sp>
       <p:sp>
         <p:nvSpPr>
-          <p:cNvPr id="23" name="TextBox 22"/>
+          <p:cNvPr id="24" name="TextBox 23"/>
           <p:cNvSpPr txBox="1"/>
           <p:nvPr/>
         </p:nvSpPr>
@@ -13831,7 +14334,53 @@
       </p:sp>
       <p:sp>
         <p:nvSpPr>
-          <p:cNvPr id="3" name="TextBox 2"/>
+          <p:cNvPr id="3" name="Rounded Rectangle 2"/>
+          <p:cNvSpPr/>
+          <p:nvPr/>
+        </p:nvSpPr>
+        <p:spPr>
+          <a:xfrm>
+            <a:off x="146304" y="146304"/>
+            <a:ext cx="11899087" cy="6565392"/>
+          </a:xfrm>
+          <a:prstGeom prst="roundRect">
+            <a:avLst>
+              <a:gd name="adj" fmla="val 2000"/>
+            </a:avLst>
+          </a:prstGeom>
+          <a:noFill/>
+          <a:ln w="9525">
+            <a:solidFill>
+              <a:srgbClr val="D9C9A6"/>
+            </a:solidFill>
+          </a:ln>
+          <a:effectLst/>
+        </p:spPr>
+        <p:style>
+          <a:lnRef idx="1">
+            <a:schemeClr val="accent1"/>
+          </a:lnRef>
+          <a:fillRef idx="3">
+            <a:schemeClr val="accent1"/>
+          </a:fillRef>
+          <a:effectRef idx="2">
+            <a:schemeClr val="accent1"/>
+          </a:effectRef>
+          <a:fontRef idx="minor">
+            <a:schemeClr val="lt1"/>
+          </a:fontRef>
+        </p:style>
+        <p:txBody>
+          <a:bodyPr rtlCol="0" anchor="ctr"/>
+          <a:lstStyle/>
+          <a:p>
+            <a:pPr algn="ctr"/>
+          </a:p>
+        </p:txBody>
+      </p:sp>
+      <p:sp>
+        <p:nvSpPr>
+          <p:cNvPr id="4" name="TextBox 3"/>
           <p:cNvSpPr txBox="1"/>
           <p:nvPr/>
         </p:nvSpPr>
@@ -13871,7 +14420,7 @@
       </p:sp>
       <p:sp>
         <p:nvSpPr>
-          <p:cNvPr id="4" name="TextBox 3"/>
+          <p:cNvPr id="5" name="TextBox 4"/>
           <p:cNvSpPr txBox="1"/>
           <p:nvPr/>
         </p:nvSpPr>
@@ -13961,7 +14510,7 @@
                 <a:latin typeface="Pretendard"/>
                 <a:ea typeface="Pretendard"/>
               </a:rPr>
-              <a:t>검색마스터 — 사진 한 장과 설명 몇 줄로, 노출되는 상품명을 완성합니다.</a:t>
+              <a:t>검색마스터 — 사진 한 장과 설명 한 줄로, 검색에 닿는 상품명을 완성합니다.</a:t>
             </a:r>
           </a:p>
         </p:txBody>
@@ -14036,6 +14585,50 @@
         </p:nvSpPr>
         <p:spPr>
           <a:xfrm>
+            <a:off x="2011680" y="0"/>
+            <a:ext cx="8165592" cy="21945"/>
+          </a:xfrm>
+          <a:prstGeom prst="rect">
+            <a:avLst/>
+          </a:prstGeom>
+          <a:solidFill>
+            <a:srgbClr val="C9B287"/>
+          </a:solidFill>
+          <a:ln>
+            <a:noFill/>
+          </a:ln>
+          <a:effectLst/>
+        </p:spPr>
+        <p:style>
+          <a:lnRef idx="1">
+            <a:schemeClr val="accent1"/>
+          </a:lnRef>
+          <a:fillRef idx="3">
+            <a:schemeClr val="accent1"/>
+          </a:fillRef>
+          <a:effectRef idx="2">
+            <a:schemeClr val="accent1"/>
+          </a:effectRef>
+          <a:fontRef idx="minor">
+            <a:schemeClr val="lt1"/>
+          </a:fontRef>
+        </p:style>
+        <p:txBody>
+          <a:bodyPr rtlCol="0" anchor="ctr"/>
+          <a:lstStyle/>
+          <a:p>
+            <a:pPr algn="ctr"/>
+          </a:p>
+        </p:txBody>
+      </p:sp>
+      <p:sp>
+        <p:nvSpPr>
+          <p:cNvPr id="4" name="Rectangle 3"/>
+          <p:cNvSpPr/>
+          <p:nvPr/>
+        </p:nvSpPr>
+        <p:spPr>
+          <a:xfrm>
             <a:off x="822960" y="644652"/>
             <a:ext cx="384048" cy="16459"/>
           </a:xfrm>
@@ -14074,7 +14667,7 @@
       </p:sp>
       <p:sp>
         <p:nvSpPr>
-          <p:cNvPr id="4" name="TextBox 3"/>
+          <p:cNvPr id="5" name="TextBox 4"/>
           <p:cNvSpPr txBox="1"/>
           <p:nvPr/>
         </p:nvSpPr>
@@ -14114,7 +14707,7 @@
       </p:sp>
       <p:sp>
         <p:nvSpPr>
-          <p:cNvPr id="5" name="TextBox 4"/>
+          <p:cNvPr id="6" name="TextBox 5"/>
           <p:cNvSpPr txBox="1"/>
           <p:nvPr/>
         </p:nvSpPr>
@@ -14191,7 +14784,7 @@
       </p:sp>
       <p:sp>
         <p:nvSpPr>
-          <p:cNvPr id="6" name="TextBox 5"/>
+          <p:cNvPr id="7" name="TextBox 6"/>
           <p:cNvSpPr txBox="1"/>
           <p:nvPr/>
         </p:nvSpPr>
@@ -14231,7 +14824,7 @@
       </p:sp>
       <p:sp>
         <p:nvSpPr>
-          <p:cNvPr id="7" name="TextBox 6"/>
+          <p:cNvPr id="8" name="TextBox 7"/>
           <p:cNvSpPr txBox="1"/>
           <p:nvPr/>
         </p:nvSpPr>
@@ -14284,14 +14877,14 @@
                 <a:latin typeface="Pretendard"/>
                 <a:ea typeface="Pretendard"/>
               </a:rPr>
-              <a:t>“책상 위에 놓는 무선 충전 겸용 스탠드”처럼 한 줄만 보태면, 사진만으로 놓치던 재질·용도까지 상품명에 정확히 담깁니다.</a:t>
-            </a:r>
-          </a:p>
-        </p:txBody>
-      </p:sp>
-      <p:sp>
-        <p:nvSpPr>
-          <p:cNvPr id="8" name="Rectangle 7"/>
+              <a:t>“책상 위에 놓는 무선 충전 겸용 스탠드”처럼 한 줄만 보태면, 사진만으로는 놓치기 쉬운 재질과 용도까지 상품명에 정확히 담깁니다.</a:t>
+            </a:r>
+          </a:p>
+        </p:txBody>
+      </p:sp>
+      <p:sp>
+        <p:nvSpPr>
+          <p:cNvPr id="9" name="Rectangle 8"/>
           <p:cNvSpPr/>
           <p:nvPr/>
         </p:nvSpPr>
@@ -14335,7 +14928,7 @@
       </p:sp>
       <p:sp>
         <p:nvSpPr>
-          <p:cNvPr id="9" name="TextBox 8"/>
+          <p:cNvPr id="10" name="TextBox 9"/>
           <p:cNvSpPr txBox="1"/>
           <p:nvPr/>
         </p:nvSpPr>
@@ -14375,7 +14968,7 @@
       </p:sp>
       <p:sp>
         <p:nvSpPr>
-          <p:cNvPr id="10" name="TextBox 9"/>
+          <p:cNvPr id="11" name="TextBox 10"/>
           <p:cNvSpPr txBox="1"/>
           <p:nvPr/>
         </p:nvSpPr>
@@ -14435,7 +15028,7 @@
       </p:sp>
       <p:sp>
         <p:nvSpPr>
-          <p:cNvPr id="11" name="Rectangle 10"/>
+          <p:cNvPr id="12" name="Rectangle 11"/>
           <p:cNvSpPr/>
           <p:nvPr/>
         </p:nvSpPr>
@@ -14479,7 +15072,7 @@
       </p:sp>
       <p:sp>
         <p:nvSpPr>
-          <p:cNvPr id="12" name="TextBox 11"/>
+          <p:cNvPr id="13" name="TextBox 12"/>
           <p:cNvSpPr txBox="1"/>
           <p:nvPr/>
         </p:nvSpPr>
@@ -14519,7 +15112,7 @@
       </p:sp>
       <p:sp>
         <p:nvSpPr>
-          <p:cNvPr id="13" name="TextBox 12"/>
+          <p:cNvPr id="14" name="TextBox 13"/>
           <p:cNvSpPr txBox="1"/>
           <p:nvPr/>
         </p:nvSpPr>
@@ -14572,14 +15165,14 @@
                 <a:latin typeface="Pretendard"/>
                 <a:ea typeface="Pretendard"/>
               </a:rPr>
-              <a:t>사진을 올리면 바로 보이고, 만드는 동안 진행 상태가 또렷하게 표시됩니다.</a:t>
-            </a:r>
-          </a:p>
-        </p:txBody>
-      </p:sp>
-      <p:sp>
-        <p:nvSpPr>
-          <p:cNvPr id="14" name="Rounded Rectangle 13"/>
+              <a:t>사진을 올리면 바로 보이고, 생성 과정이 화면에 그대로 표시되어 기다림이 지루하지 않습니다.</a:t>
+            </a:r>
+          </a:p>
+        </p:txBody>
+      </p:sp>
+      <p:sp>
+        <p:nvSpPr>
+          <p:cNvPr id="15" name="Rounded Rectangle 14"/>
           <p:cNvSpPr/>
           <p:nvPr/>
         </p:nvSpPr>
@@ -14634,7 +15227,7 @@
       </p:sp>
       <p:sp>
         <p:nvSpPr>
-          <p:cNvPr id="15" name="Oval 14"/>
+          <p:cNvPr id="16" name="Oval 15"/>
           <p:cNvSpPr/>
           <p:nvPr/>
         </p:nvSpPr>
@@ -14678,7 +15271,7 @@
       </p:sp>
       <p:sp>
         <p:nvSpPr>
-          <p:cNvPr id="16" name="Oval 15"/>
+          <p:cNvPr id="17" name="Oval 16"/>
           <p:cNvSpPr/>
           <p:nvPr/>
         </p:nvSpPr>
@@ -14722,7 +15315,7 @@
       </p:sp>
       <p:sp>
         <p:nvSpPr>
-          <p:cNvPr id="17" name="Oval 16"/>
+          <p:cNvPr id="18" name="Oval 17"/>
           <p:cNvSpPr/>
           <p:nvPr/>
         </p:nvSpPr>
@@ -14766,7 +15359,7 @@
       </p:sp>
       <p:sp>
         <p:nvSpPr>
-          <p:cNvPr id="18" name="Rounded Rectangle 17"/>
+          <p:cNvPr id="19" name="Rounded Rectangle 18"/>
           <p:cNvSpPr/>
           <p:nvPr/>
         </p:nvSpPr>
@@ -14828,7 +15421,7 @@
       </p:sp>
       <p:pic>
         <p:nvPicPr>
-          <p:cNvPr id="19" name="Picture 18" descr="sm_app.jpg"/>
+          <p:cNvPr id="20" name="Picture 19" descr="sm_app.jpg"/>
           <p:cNvPicPr>
             <a:picLocks noChangeAspect="1"/>
           </p:cNvPicPr>
@@ -14853,7 +15446,7 @@
       </p:pic>
       <p:sp>
         <p:nvSpPr>
-          <p:cNvPr id="20" name="Rounded Rectangle 19"/>
+          <p:cNvPr id="21" name="Rounded Rectangle 20"/>
           <p:cNvSpPr/>
           <p:nvPr/>
         </p:nvSpPr>
@@ -14913,7 +15506,7 @@
       </p:sp>
       <p:sp>
         <p:nvSpPr>
-          <p:cNvPr id="21" name="TextBox 20"/>
+          <p:cNvPr id="22" name="TextBox 21"/>
           <p:cNvSpPr txBox="1"/>
           <p:nvPr/>
         </p:nvSpPr>
@@ -14953,7 +15546,7 @@
       </p:sp>
       <p:sp>
         <p:nvSpPr>
-          <p:cNvPr id="22" name="TextBox 21"/>
+          <p:cNvPr id="23" name="TextBox 22"/>
           <p:cNvSpPr txBox="1"/>
           <p:nvPr/>
         </p:nvSpPr>
@@ -15003,7 +15596,7 @@
       </p:sp>
       <p:sp>
         <p:nvSpPr>
-          <p:cNvPr id="23" name="TextBox 22"/>
+          <p:cNvPr id="24" name="TextBox 23"/>
           <p:cNvSpPr txBox="1"/>
           <p:nvPr/>
         </p:nvSpPr>
@@ -15113,7 +15706,53 @@
       </p:sp>
       <p:sp>
         <p:nvSpPr>
-          <p:cNvPr id="3" name="TextBox 2"/>
+          <p:cNvPr id="3" name="Rounded Rectangle 2"/>
+          <p:cNvSpPr/>
+          <p:nvPr/>
+        </p:nvSpPr>
+        <p:spPr>
+          <a:xfrm>
+            <a:off x="146304" y="146304"/>
+            <a:ext cx="11899087" cy="6565392"/>
+          </a:xfrm>
+          <a:prstGeom prst="roundRect">
+            <a:avLst>
+              <a:gd name="adj" fmla="val 2000"/>
+            </a:avLst>
+          </a:prstGeom>
+          <a:noFill/>
+          <a:ln w="9525">
+            <a:solidFill>
+              <a:srgbClr val="D9C9A6"/>
+            </a:solidFill>
+          </a:ln>
+          <a:effectLst/>
+        </p:spPr>
+        <p:style>
+          <a:lnRef idx="1">
+            <a:schemeClr val="accent1"/>
+          </a:lnRef>
+          <a:fillRef idx="3">
+            <a:schemeClr val="accent1"/>
+          </a:fillRef>
+          <a:effectRef idx="2">
+            <a:schemeClr val="accent1"/>
+          </a:effectRef>
+          <a:fontRef idx="minor">
+            <a:schemeClr val="lt1"/>
+          </a:fontRef>
+        </p:style>
+        <p:txBody>
+          <a:bodyPr rtlCol="0" anchor="ctr"/>
+          <a:lstStyle/>
+          <a:p>
+            <a:pPr algn="ctr"/>
+          </a:p>
+        </p:txBody>
+      </p:sp>
+      <p:sp>
+        <p:nvSpPr>
+          <p:cNvPr id="4" name="TextBox 3"/>
           <p:cNvSpPr txBox="1"/>
           <p:nvPr/>
         </p:nvSpPr>
@@ -15153,7 +15792,7 @@
       </p:sp>
       <p:sp>
         <p:nvSpPr>
-          <p:cNvPr id="4" name="TextBox 3"/>
+          <p:cNvPr id="5" name="TextBox 4"/>
           <p:cNvSpPr txBox="1"/>
           <p:nvPr/>
         </p:nvSpPr>
@@ -15243,7 +15882,7 @@
                 <a:latin typeface="Pretendard"/>
                 <a:ea typeface="Pretendard"/>
               </a:rPr>
-              <a:t>프리캔버스 — 소싱한 재료가 상세페이지·영상·카드뉴스가 되기까지, 손이 갈 일을 줄였습니다.</a:t>
+              <a:t>프리캔버스 — 소싱한 재료가 상세페이지·영상·카드뉴스가 되기까지, 손길이 가던 일들을 덜어냈습니다.</a:t>
             </a:r>
           </a:p>
         </p:txBody>
@@ -15318,6 +15957,50 @@
         </p:nvSpPr>
         <p:spPr>
           <a:xfrm>
+            <a:off x="2011680" y="0"/>
+            <a:ext cx="8165592" cy="21945"/>
+          </a:xfrm>
+          <a:prstGeom prst="rect">
+            <a:avLst/>
+          </a:prstGeom>
+          <a:solidFill>
+            <a:srgbClr val="C9B287"/>
+          </a:solidFill>
+          <a:ln>
+            <a:noFill/>
+          </a:ln>
+          <a:effectLst/>
+        </p:spPr>
+        <p:style>
+          <a:lnRef idx="1">
+            <a:schemeClr val="accent1"/>
+          </a:lnRef>
+          <a:fillRef idx="3">
+            <a:schemeClr val="accent1"/>
+          </a:fillRef>
+          <a:effectRef idx="2">
+            <a:schemeClr val="accent1"/>
+          </a:effectRef>
+          <a:fontRef idx="minor">
+            <a:schemeClr val="lt1"/>
+          </a:fontRef>
+        </p:style>
+        <p:txBody>
+          <a:bodyPr rtlCol="0" anchor="ctr"/>
+          <a:lstStyle/>
+          <a:p>
+            <a:pPr algn="ctr"/>
+          </a:p>
+        </p:txBody>
+      </p:sp>
+      <p:sp>
+        <p:nvSpPr>
+          <p:cNvPr id="4" name="Rectangle 3"/>
+          <p:cNvSpPr/>
+          <p:nvPr/>
+        </p:nvSpPr>
+        <p:spPr>
+          <a:xfrm>
             <a:off x="822960" y="644652"/>
             <a:ext cx="384048" cy="16459"/>
           </a:xfrm>
@@ -15356,7 +16039,7 @@
       </p:sp>
       <p:sp>
         <p:nvSpPr>
-          <p:cNvPr id="4" name="TextBox 3"/>
+          <p:cNvPr id="5" name="TextBox 4"/>
           <p:cNvSpPr txBox="1"/>
           <p:nvPr/>
         </p:nvSpPr>
@@ -15396,7 +16079,7 @@
       </p:sp>
       <p:sp>
         <p:nvSpPr>
-          <p:cNvPr id="5" name="TextBox 4"/>
+          <p:cNvPr id="6" name="TextBox 5"/>
           <p:cNvSpPr txBox="1"/>
           <p:nvPr/>
         </p:nvSpPr>
@@ -15456,7 +16139,7 @@
       </p:sp>
       <p:sp>
         <p:nvSpPr>
-          <p:cNvPr id="6" name="Rounded Rectangle 5"/>
+          <p:cNvPr id="7" name="Rounded Rectangle 6"/>
           <p:cNvSpPr/>
           <p:nvPr/>
         </p:nvSpPr>
@@ -15511,7 +16194,7 @@
       </p:sp>
       <p:sp>
         <p:nvSpPr>
-          <p:cNvPr id="7" name="Oval 6"/>
+          <p:cNvPr id="8" name="Oval 7"/>
           <p:cNvSpPr/>
           <p:nvPr/>
         </p:nvSpPr>
@@ -15555,7 +16238,7 @@
       </p:sp>
       <p:sp>
         <p:nvSpPr>
-          <p:cNvPr id="8" name="Oval 7"/>
+          <p:cNvPr id="9" name="Oval 8"/>
           <p:cNvSpPr/>
           <p:nvPr/>
         </p:nvSpPr>
@@ -15599,7 +16282,7 @@
       </p:sp>
       <p:sp>
         <p:nvSpPr>
-          <p:cNvPr id="9" name="Oval 8"/>
+          <p:cNvPr id="10" name="Oval 9"/>
           <p:cNvSpPr/>
           <p:nvPr/>
         </p:nvSpPr>
@@ -15643,7 +16326,7 @@
       </p:sp>
       <p:sp>
         <p:nvSpPr>
-          <p:cNvPr id="10" name="Rounded Rectangle 9"/>
+          <p:cNvPr id="11" name="Rounded Rectangle 10"/>
           <p:cNvSpPr/>
           <p:nvPr/>
         </p:nvSpPr>
@@ -15705,7 +16388,7 @@
       </p:sp>
       <p:pic>
         <p:nvPicPr>
-          <p:cNvPr id="11" name="Picture 10" descr="fc_modes.jpg"/>
+          <p:cNvPr id="12" name="Picture 11" descr="fc_modes.jpg"/>
           <p:cNvPicPr>
             <a:picLocks noChangeAspect="1"/>
           </p:cNvPicPr>
@@ -15730,7 +16413,7 @@
       </p:pic>
       <p:sp>
         <p:nvSpPr>
-          <p:cNvPr id="12" name="Rounded Rectangle 11"/>
+          <p:cNvPr id="13" name="Rounded Rectangle 12"/>
           <p:cNvSpPr/>
           <p:nvPr/>
         </p:nvSpPr>
@@ -15790,7 +16473,7 @@
       </p:sp>
       <p:sp>
         <p:nvSpPr>
-          <p:cNvPr id="13" name="Rectangle 12"/>
+          <p:cNvPr id="14" name="Rectangle 13"/>
           <p:cNvSpPr/>
           <p:nvPr/>
         </p:nvSpPr>
@@ -15834,7 +16517,7 @@
       </p:sp>
       <p:sp>
         <p:nvSpPr>
-          <p:cNvPr id="14" name="TextBox 13"/>
+          <p:cNvPr id="15" name="TextBox 14"/>
           <p:cNvSpPr txBox="1"/>
           <p:nvPr/>
         </p:nvSpPr>
@@ -15894,7 +16577,7 @@
       </p:sp>
       <p:sp>
         <p:nvSpPr>
-          <p:cNvPr id="15" name="Rectangle 14"/>
+          <p:cNvPr id="16" name="Rectangle 15"/>
           <p:cNvSpPr/>
           <p:nvPr/>
         </p:nvSpPr>
@@ -15938,7 +16621,7 @@
       </p:sp>
       <p:sp>
         <p:nvSpPr>
-          <p:cNvPr id="16" name="TextBox 15"/>
+          <p:cNvPr id="17" name="TextBox 16"/>
           <p:cNvSpPr txBox="1"/>
           <p:nvPr/>
         </p:nvSpPr>
@@ -15998,7 +16681,7 @@
       </p:sp>
       <p:sp>
         <p:nvSpPr>
-          <p:cNvPr id="17" name="Rectangle 16"/>
+          <p:cNvPr id="18" name="Rectangle 17"/>
           <p:cNvSpPr/>
           <p:nvPr/>
         </p:nvSpPr>
@@ -16042,7 +16725,7 @@
       </p:sp>
       <p:sp>
         <p:nvSpPr>
-          <p:cNvPr id="18" name="TextBox 17"/>
+          <p:cNvPr id="19" name="TextBox 18"/>
           <p:cNvSpPr txBox="1"/>
           <p:nvPr/>
         </p:nvSpPr>
@@ -16102,7 +16785,7 @@
       </p:sp>
       <p:sp>
         <p:nvSpPr>
-          <p:cNvPr id="19" name="TextBox 18"/>
+          <p:cNvPr id="20" name="TextBox 19"/>
           <p:cNvSpPr txBox="1"/>
           <p:nvPr/>
         </p:nvSpPr>
@@ -16135,7 +16818,7 @@
                 <a:latin typeface="Pretendard"/>
                 <a:ea typeface="Pretendard"/>
               </a:rPr>
-              <a:t>결과물도 다섯 갈래 — 일반·의류·과일채소 상세페이지에 </a:t>
+              <a:t>일반·의류·과일채소 상세페이지에 </a:t>
             </a:r>
             <a:r>
               <a:rPr sz="1100" b="0" i="0">
@@ -16175,14 +16858,14 @@
                 <a:latin typeface="Pretendard"/>
                 <a:ea typeface="Pretendard"/>
               </a:rPr>
-              <a:t>까지 한 곳에서 나옵니다. →</a:t>
-            </a:r>
-          </a:p>
-        </p:txBody>
-      </p:sp>
-      <p:sp>
-        <p:nvSpPr>
-          <p:cNvPr id="20" name="Rounded Rectangle 19"/>
+              <a:t>까지 — 다섯 갈래 결과물이 한 곳에서 나옵니다.</a:t>
+            </a:r>
+          </a:p>
+        </p:txBody>
+      </p:sp>
+      <p:sp>
+        <p:nvSpPr>
+          <p:cNvPr id="21" name="Rounded Rectangle 20"/>
           <p:cNvSpPr/>
           <p:nvPr/>
         </p:nvSpPr>
@@ -16237,7 +16920,7 @@
       </p:sp>
       <p:sp>
         <p:nvSpPr>
-          <p:cNvPr id="21" name="Oval 20"/>
+          <p:cNvPr id="22" name="Oval 21"/>
           <p:cNvSpPr/>
           <p:nvPr/>
         </p:nvSpPr>
@@ -16281,7 +16964,7 @@
       </p:sp>
       <p:sp>
         <p:nvSpPr>
-          <p:cNvPr id="22" name="Oval 21"/>
+          <p:cNvPr id="23" name="Oval 22"/>
           <p:cNvSpPr/>
           <p:nvPr/>
         </p:nvSpPr>
@@ -16325,7 +17008,7 @@
       </p:sp>
       <p:sp>
         <p:nvSpPr>
-          <p:cNvPr id="23" name="Oval 22"/>
+          <p:cNvPr id="24" name="Oval 23"/>
           <p:cNvSpPr/>
           <p:nvPr/>
         </p:nvSpPr>
@@ -16369,7 +17052,7 @@
       </p:sp>
       <p:sp>
         <p:nvSpPr>
-          <p:cNvPr id="24" name="Rounded Rectangle 23"/>
+          <p:cNvPr id="25" name="Rounded Rectangle 24"/>
           <p:cNvSpPr/>
           <p:nvPr/>
         </p:nvSpPr>
@@ -16431,7 +17114,7 @@
       </p:sp>
       <p:pic>
         <p:nvPicPr>
-          <p:cNvPr id="25" name="Picture 24" descr="fc_types.jpg"/>
+          <p:cNvPr id="26" name="Picture 25" descr="fc_types.jpg"/>
           <p:cNvPicPr>
             <a:picLocks noChangeAspect="1"/>
           </p:cNvPicPr>
@@ -16456,7 +17139,7 @@
       </p:pic>
       <p:sp>
         <p:nvSpPr>
-          <p:cNvPr id="26" name="TextBox 25"/>
+          <p:cNvPr id="27" name="TextBox 26"/>
           <p:cNvSpPr txBox="1"/>
           <p:nvPr/>
         </p:nvSpPr>
@@ -16506,7 +17189,7 @@
       </p:sp>
       <p:sp>
         <p:nvSpPr>
-          <p:cNvPr id="27" name="TextBox 26"/>
+          <p:cNvPr id="28" name="TextBox 27"/>
           <p:cNvSpPr txBox="1"/>
           <p:nvPr/>
         </p:nvSpPr>
@@ -16614,6 +17297,50 @@
         </p:nvSpPr>
         <p:spPr>
           <a:xfrm>
+            <a:off x="2011680" y="0"/>
+            <a:ext cx="8165592" cy="21945"/>
+          </a:xfrm>
+          <a:prstGeom prst="rect">
+            <a:avLst/>
+          </a:prstGeom>
+          <a:solidFill>
+            <a:srgbClr val="C9B287"/>
+          </a:solidFill>
+          <a:ln>
+            <a:noFill/>
+          </a:ln>
+          <a:effectLst/>
+        </p:spPr>
+        <p:style>
+          <a:lnRef idx="1">
+            <a:schemeClr val="accent1"/>
+          </a:lnRef>
+          <a:fillRef idx="3">
+            <a:schemeClr val="accent1"/>
+          </a:fillRef>
+          <a:effectRef idx="2">
+            <a:schemeClr val="accent1"/>
+          </a:effectRef>
+          <a:fontRef idx="minor">
+            <a:schemeClr val="lt1"/>
+          </a:fontRef>
+        </p:style>
+        <p:txBody>
+          <a:bodyPr rtlCol="0" anchor="ctr"/>
+          <a:lstStyle/>
+          <a:p>
+            <a:pPr algn="ctr"/>
+          </a:p>
+        </p:txBody>
+      </p:sp>
+      <p:sp>
+        <p:nvSpPr>
+          <p:cNvPr id="4" name="Rectangle 3"/>
+          <p:cNvSpPr/>
+          <p:nvPr/>
+        </p:nvSpPr>
+        <p:spPr>
+          <a:xfrm>
             <a:off x="822960" y="644652"/>
             <a:ext cx="384048" cy="16459"/>
           </a:xfrm>
@@ -16652,7 +17379,7 @@
       </p:sp>
       <p:sp>
         <p:nvSpPr>
-          <p:cNvPr id="4" name="TextBox 3"/>
+          <p:cNvPr id="5" name="TextBox 4"/>
           <p:cNvSpPr txBox="1"/>
           <p:nvPr/>
         </p:nvSpPr>
@@ -16692,7 +17419,7 @@
       </p:sp>
       <p:sp>
         <p:nvSpPr>
-          <p:cNvPr id="5" name="TextBox 4"/>
+          <p:cNvPr id="6" name="TextBox 5"/>
           <p:cNvSpPr txBox="1"/>
           <p:nvPr/>
         </p:nvSpPr>
@@ -16759,7 +17486,7 @@
       </p:sp>
       <p:sp>
         <p:nvSpPr>
-          <p:cNvPr id="6" name="TextBox 5"/>
+          <p:cNvPr id="7" name="TextBox 6"/>
           <p:cNvSpPr txBox="1"/>
           <p:nvPr/>
         </p:nvSpPr>
@@ -16799,7 +17526,7 @@
       </p:sp>
       <p:sp>
         <p:nvSpPr>
-          <p:cNvPr id="7" name="TextBox 6"/>
+          <p:cNvPr id="8" name="TextBox 7"/>
           <p:cNvSpPr txBox="1"/>
           <p:nvPr/>
         </p:nvSpPr>
@@ -16852,14 +17579,14 @@
                 <a:latin typeface="Pretendard"/>
                 <a:ea typeface="Pretendard"/>
               </a:rPr>
-              <a:t>상품 주소만 붙여넣으면 작은 새 창이 열려 상세 내용과 상품 이미지를 통째로 가져옵니다. 가격 정보는 알아서 뺍니다.</a:t>
-            </a:r>
-          </a:p>
-        </p:txBody>
-      </p:sp>
-      <p:sp>
-        <p:nvSpPr>
-          <p:cNvPr id="8" name="Rectangle 7"/>
+              <a:t>상품 주소만 붙여넣으면 작은 새 창이 열려 상세 내용과 상품 이미지를 통째로 가져옵니다. 가격 정보는 자동으로 걸러냅니다.</a:t>
+            </a:r>
+          </a:p>
+        </p:txBody>
+      </p:sp>
+      <p:sp>
+        <p:nvSpPr>
+          <p:cNvPr id="9" name="Rectangle 8"/>
           <p:cNvSpPr/>
           <p:nvPr/>
         </p:nvSpPr>
@@ -16903,7 +17630,7 @@
       </p:sp>
       <p:sp>
         <p:nvSpPr>
-          <p:cNvPr id="9" name="TextBox 8"/>
+          <p:cNvPr id="10" name="TextBox 9"/>
           <p:cNvSpPr txBox="1"/>
           <p:nvPr/>
         </p:nvSpPr>
@@ -16943,7 +17670,7 @@
       </p:sp>
       <p:sp>
         <p:nvSpPr>
-          <p:cNvPr id="10" name="TextBox 9"/>
+          <p:cNvPr id="11" name="TextBox 10"/>
           <p:cNvSpPr txBox="1"/>
           <p:nvPr/>
         </p:nvSpPr>
@@ -16996,14 +17723,14 @@
                 <a:latin typeface="Pretendard"/>
                 <a:ea typeface="Pretendard"/>
               </a:rPr>
-              <a:t>웹스토어 단추와 설치법 안내가 화면 안에 있어, 처음 한 번만 따라 하면 다음부터는 붙여넣기만 하면 됩니다.</a:t>
-            </a:r>
-          </a:p>
-        </p:txBody>
-      </p:sp>
-      <p:sp>
-        <p:nvSpPr>
-          <p:cNvPr id="11" name="Rectangle 10"/>
+              <a:t>웹스토어 단추와 설치 안내가 화면 안에 있어, 처음 한 번만 설치해 두면 다음부터는 붙여넣기만으로 충분합니다.</a:t>
+            </a:r>
+          </a:p>
+        </p:txBody>
+      </p:sp>
+      <p:sp>
+        <p:nvSpPr>
+          <p:cNvPr id="12" name="Rectangle 11"/>
           <p:cNvSpPr/>
           <p:nvPr/>
         </p:nvSpPr>
@@ -17047,7 +17774,7 @@
       </p:sp>
       <p:sp>
         <p:nvSpPr>
-          <p:cNvPr id="12" name="TextBox 11"/>
+          <p:cNvPr id="13" name="TextBox 12"/>
           <p:cNvSpPr txBox="1"/>
           <p:nvPr/>
         </p:nvSpPr>
@@ -17087,7 +17814,7 @@
       </p:sp>
       <p:sp>
         <p:nvSpPr>
-          <p:cNvPr id="13" name="TextBox 12"/>
+          <p:cNvPr id="14" name="TextBox 13"/>
           <p:cNvSpPr txBox="1"/>
           <p:nvPr/>
         </p:nvSpPr>
@@ -17140,14 +17867,14 @@
                 <a:latin typeface="Pretendard"/>
                 <a:ea typeface="Pretendard"/>
               </a:rPr>
-              <a:t>1688에서 가져온 문구의 중국어와 군더더기 값을 한국어 기준으로 다듬어 줍니다.</a:t>
-            </a:r>
-          </a:p>
-        </p:txBody>
-      </p:sp>
-      <p:sp>
-        <p:nvSpPr>
-          <p:cNvPr id="14" name="Rounded Rectangle 13"/>
+              <a:t>1688에서 가져온 문구 속 중국어와 불필요한 표기를 한국어 기준으로 매만져 줍니다.</a:t>
+            </a:r>
+          </a:p>
+        </p:txBody>
+      </p:sp>
+      <p:sp>
+        <p:nvSpPr>
+          <p:cNvPr id="15" name="Rounded Rectangle 14"/>
           <p:cNvSpPr/>
           <p:nvPr/>
         </p:nvSpPr>
@@ -17202,7 +17929,7 @@
       </p:sp>
       <p:sp>
         <p:nvSpPr>
-          <p:cNvPr id="15" name="Oval 14"/>
+          <p:cNvPr id="16" name="Oval 15"/>
           <p:cNvSpPr/>
           <p:nvPr/>
         </p:nvSpPr>
@@ -17246,7 +17973,7 @@
       </p:sp>
       <p:sp>
         <p:nvSpPr>
-          <p:cNvPr id="16" name="Oval 15"/>
+          <p:cNvPr id="17" name="Oval 16"/>
           <p:cNvSpPr/>
           <p:nvPr/>
         </p:nvSpPr>
@@ -17290,7 +18017,7 @@
       </p:sp>
       <p:sp>
         <p:nvSpPr>
-          <p:cNvPr id="17" name="Oval 16"/>
+          <p:cNvPr id="18" name="Oval 17"/>
           <p:cNvSpPr/>
           <p:nvPr/>
         </p:nvSpPr>
@@ -17334,7 +18061,7 @@
       </p:sp>
       <p:sp>
         <p:nvSpPr>
-          <p:cNvPr id="18" name="Rounded Rectangle 17"/>
+          <p:cNvPr id="19" name="Rounded Rectangle 18"/>
           <p:cNvSpPr/>
           <p:nvPr/>
         </p:nvSpPr>
@@ -17396,7 +18123,7 @@
       </p:sp>
       <p:pic>
         <p:nvPicPr>
-          <p:cNvPr id="19" name="Picture 18" descr="fc_link.jpg"/>
+          <p:cNvPr id="20" name="Picture 19" descr="fc_link.jpg"/>
           <p:cNvPicPr>
             <a:picLocks noChangeAspect="1"/>
           </p:cNvPicPr>
@@ -17421,7 +18148,7 @@
       </p:pic>
       <p:sp>
         <p:nvSpPr>
-          <p:cNvPr id="20" name="Rounded Rectangle 19"/>
+          <p:cNvPr id="21" name="Rounded Rectangle 20"/>
           <p:cNvSpPr/>
           <p:nvPr/>
         </p:nvSpPr>
@@ -17481,7 +18208,7 @@
       </p:sp>
       <p:sp>
         <p:nvSpPr>
-          <p:cNvPr id="21" name="TextBox 20"/>
+          <p:cNvPr id="22" name="TextBox 21"/>
           <p:cNvSpPr txBox="1"/>
           <p:nvPr/>
         </p:nvSpPr>
@@ -17521,7 +18248,7 @@
       </p:sp>
       <p:sp>
         <p:nvSpPr>
-          <p:cNvPr id="22" name="TextBox 21"/>
+          <p:cNvPr id="23" name="TextBox 22"/>
           <p:cNvSpPr txBox="1"/>
           <p:nvPr/>
         </p:nvSpPr>
@@ -17571,7 +18298,7 @@
       </p:sp>
       <p:sp>
         <p:nvSpPr>
-          <p:cNvPr id="23" name="TextBox 22"/>
+          <p:cNvPr id="24" name="TextBox 23"/>
           <p:cNvSpPr txBox="1"/>
           <p:nvPr/>
         </p:nvSpPr>
@@ -17679,6 +18406,50 @@
         </p:nvSpPr>
         <p:spPr>
           <a:xfrm>
+            <a:off x="2011680" y="0"/>
+            <a:ext cx="8165592" cy="21945"/>
+          </a:xfrm>
+          <a:prstGeom prst="rect">
+            <a:avLst/>
+          </a:prstGeom>
+          <a:solidFill>
+            <a:srgbClr val="C9B287"/>
+          </a:solidFill>
+          <a:ln>
+            <a:noFill/>
+          </a:ln>
+          <a:effectLst/>
+        </p:spPr>
+        <p:style>
+          <a:lnRef idx="1">
+            <a:schemeClr val="accent1"/>
+          </a:lnRef>
+          <a:fillRef idx="3">
+            <a:schemeClr val="accent1"/>
+          </a:fillRef>
+          <a:effectRef idx="2">
+            <a:schemeClr val="accent1"/>
+          </a:effectRef>
+          <a:fontRef idx="minor">
+            <a:schemeClr val="lt1"/>
+          </a:fontRef>
+        </p:style>
+        <p:txBody>
+          <a:bodyPr rtlCol="0" anchor="ctr"/>
+          <a:lstStyle/>
+          <a:p>
+            <a:pPr algn="ctr"/>
+          </a:p>
+        </p:txBody>
+      </p:sp>
+      <p:sp>
+        <p:nvSpPr>
+          <p:cNvPr id="4" name="Rectangle 3"/>
+          <p:cNvSpPr/>
+          <p:nvPr/>
+        </p:nvSpPr>
+        <p:spPr>
+          <a:xfrm>
             <a:off x="822960" y="644652"/>
             <a:ext cx="384048" cy="16459"/>
           </a:xfrm>
@@ -17717,7 +18488,7 @@
       </p:sp>
       <p:sp>
         <p:nvSpPr>
-          <p:cNvPr id="4" name="TextBox 3"/>
+          <p:cNvPr id="5" name="TextBox 4"/>
           <p:cNvSpPr txBox="1"/>
           <p:nvPr/>
         </p:nvSpPr>
@@ -17757,7 +18528,7 @@
       </p:sp>
       <p:sp>
         <p:nvSpPr>
-          <p:cNvPr id="5" name="TextBox 4"/>
+          <p:cNvPr id="6" name="TextBox 5"/>
           <p:cNvSpPr txBox="1"/>
           <p:nvPr/>
         </p:nvSpPr>
@@ -17824,7 +18595,7 @@
       </p:sp>
       <p:sp>
         <p:nvSpPr>
-          <p:cNvPr id="6" name="TextBox 5"/>
+          <p:cNvPr id="7" name="TextBox 6"/>
           <p:cNvSpPr txBox="1"/>
           <p:nvPr/>
         </p:nvSpPr>
@@ -17864,7 +18635,7 @@
       </p:sp>
       <p:sp>
         <p:nvSpPr>
-          <p:cNvPr id="7" name="TextBox 6"/>
+          <p:cNvPr id="8" name="TextBox 7"/>
           <p:cNvSpPr txBox="1"/>
           <p:nvPr/>
         </p:nvSpPr>
@@ -17924,7 +18695,7 @@
       </p:sp>
       <p:sp>
         <p:nvSpPr>
-          <p:cNvPr id="8" name="Rectangle 7"/>
+          <p:cNvPr id="9" name="Rectangle 8"/>
           <p:cNvSpPr/>
           <p:nvPr/>
         </p:nvSpPr>
@@ -17968,7 +18739,7 @@
       </p:sp>
       <p:sp>
         <p:nvSpPr>
-          <p:cNvPr id="9" name="TextBox 8"/>
+          <p:cNvPr id="10" name="TextBox 9"/>
           <p:cNvSpPr txBox="1"/>
           <p:nvPr/>
         </p:nvSpPr>
@@ -18008,7 +18779,7 @@
       </p:sp>
       <p:sp>
         <p:nvSpPr>
-          <p:cNvPr id="10" name="TextBox 9"/>
+          <p:cNvPr id="11" name="TextBox 10"/>
           <p:cNvSpPr txBox="1"/>
           <p:nvPr/>
         </p:nvSpPr>
@@ -18061,14 +18832,14 @@
                 <a:latin typeface="Pretendard"/>
                 <a:ea typeface="Pretendard"/>
               </a:rPr>
-              <a:t>자막에 맞춰 우리말 음성까지 입혀, 소리 켜고 보는 영상으로 완성합니다.</a:t>
-            </a:r>
-          </a:p>
-        </p:txBody>
-      </p:sp>
-      <p:sp>
-        <p:nvSpPr>
-          <p:cNvPr id="11" name="Rectangle 10"/>
+              <a:t>자막에 맞춰 우리말 음성을 입혀, 소리까지 완전한 한국어 영상으로 만듭니다.</a:t>
+            </a:r>
+          </a:p>
+        </p:txBody>
+      </p:sp>
+      <p:sp>
+        <p:nvSpPr>
+          <p:cNvPr id="12" name="Rectangle 11"/>
           <p:cNvSpPr/>
           <p:nvPr/>
         </p:nvSpPr>
@@ -18112,7 +18883,7 @@
       </p:sp>
       <p:sp>
         <p:nvSpPr>
-          <p:cNvPr id="12" name="TextBox 11"/>
+          <p:cNvPr id="13" name="TextBox 12"/>
           <p:cNvSpPr txBox="1"/>
           <p:nvPr/>
         </p:nvSpPr>
@@ -18152,7 +18923,7 @@
       </p:sp>
       <p:sp>
         <p:nvSpPr>
-          <p:cNvPr id="13" name="TextBox 12"/>
+          <p:cNvPr id="14" name="TextBox 13"/>
           <p:cNvSpPr txBox="1"/>
           <p:nvPr/>
         </p:nvSpPr>
@@ -18205,14 +18976,14 @@
                 <a:latin typeface="Pretendard"/>
                 <a:ea typeface="Pretendard"/>
               </a:rPr>
-              <a:t>쇼츠·릴스에 바로 올리는 세로 화면 비율로 저장하고, 자막 파일도 함께 나옵니다.</a:t>
-            </a:r>
-          </a:p>
-        </p:txBody>
-      </p:sp>
-      <p:sp>
-        <p:nvSpPr>
-          <p:cNvPr id="14" name="Rounded Rectangle 13"/>
+              <a:t>쇼츠·릴스에 바로 올릴 수 있는 세로 비율로 저장되며, 자막 파일도 함께 제공됩니다.</a:t>
+            </a:r>
+          </a:p>
+        </p:txBody>
+      </p:sp>
+      <p:sp>
+        <p:nvSpPr>
+          <p:cNvPr id="15" name="Rounded Rectangle 14"/>
           <p:cNvSpPr/>
           <p:nvPr/>
         </p:nvSpPr>
@@ -18267,7 +19038,7 @@
       </p:sp>
       <p:sp>
         <p:nvSpPr>
-          <p:cNvPr id="15" name="Oval 14"/>
+          <p:cNvPr id="16" name="Oval 15"/>
           <p:cNvSpPr/>
           <p:nvPr/>
         </p:nvSpPr>
@@ -18311,7 +19082,7 @@
       </p:sp>
       <p:sp>
         <p:nvSpPr>
-          <p:cNvPr id="16" name="Oval 15"/>
+          <p:cNvPr id="17" name="Oval 16"/>
           <p:cNvSpPr/>
           <p:nvPr/>
         </p:nvSpPr>
@@ -18355,7 +19126,7 @@
       </p:sp>
       <p:sp>
         <p:nvSpPr>
-          <p:cNvPr id="17" name="Oval 16"/>
+          <p:cNvPr id="18" name="Oval 17"/>
           <p:cNvSpPr/>
           <p:nvPr/>
         </p:nvSpPr>
@@ -18399,7 +19170,7 @@
       </p:sp>
       <p:sp>
         <p:nvSpPr>
-          <p:cNvPr id="18" name="Rounded Rectangle 17"/>
+          <p:cNvPr id="19" name="Rounded Rectangle 18"/>
           <p:cNvSpPr/>
           <p:nvPr/>
         </p:nvSpPr>
@@ -18461,7 +19232,7 @@
       </p:sp>
       <p:pic>
         <p:nvPicPr>
-          <p:cNvPr id="19" name="Picture 18" descr="fc_1688.jpg"/>
+          <p:cNvPr id="20" name="Picture 19" descr="fc_1688.jpg"/>
           <p:cNvPicPr>
             <a:picLocks noChangeAspect="1"/>
           </p:cNvPicPr>
@@ -18486,7 +19257,7 @@
       </p:pic>
       <p:sp>
         <p:nvSpPr>
-          <p:cNvPr id="20" name="Rounded Rectangle 19"/>
+          <p:cNvPr id="21" name="Rounded Rectangle 20"/>
           <p:cNvSpPr/>
           <p:nvPr/>
         </p:nvSpPr>
@@ -18546,7 +19317,7 @@
       </p:sp>
       <p:sp>
         <p:nvSpPr>
-          <p:cNvPr id="21" name="TextBox 20"/>
+          <p:cNvPr id="22" name="TextBox 21"/>
           <p:cNvSpPr txBox="1"/>
           <p:nvPr/>
         </p:nvSpPr>
@@ -18586,7 +19357,7 @@
       </p:sp>
       <p:sp>
         <p:nvSpPr>
-          <p:cNvPr id="22" name="TextBox 21"/>
+          <p:cNvPr id="23" name="TextBox 22"/>
           <p:cNvSpPr txBox="1"/>
           <p:nvPr/>
         </p:nvSpPr>
@@ -18636,7 +19407,7 @@
       </p:sp>
       <p:sp>
         <p:nvSpPr>
-          <p:cNvPr id="23" name="TextBox 22"/>
+          <p:cNvPr id="24" name="TextBox 23"/>
           <p:cNvSpPr txBox="1"/>
           <p:nvPr/>
         </p:nvSpPr>

--- a/slides.pptx
+++ b/slides.pptx
@@ -3651,7 +3651,7 @@
                 <a:latin typeface="Pretendard"/>
                 <a:ea typeface="Pretendard"/>
               </a:rPr>
-              <a:t>이번 여름 한층 깊어진 두 서비스를 소개합니다.</a:t>
+              <a:t>최근 업데이트로 한층 깊어진 두 서비스를 소개합니다.</a:t>
             </a:r>
           </a:p>
         </p:txBody>
@@ -3665,7 +3665,7 @@
         <p:spPr>
           <a:xfrm>
             <a:off x="822960" y="5349240"/>
-            <a:ext cx="1691640" cy="384048"/>
+            <a:ext cx="1371600" cy="384048"/>
           </a:xfrm>
           <a:prstGeom prst="roundRect">
             <a:avLst>
@@ -3711,7 +3711,7 @@
                 <a:latin typeface="Pretendard SemiBold"/>
                 <a:ea typeface="Pretendard SemiBold"/>
               </a:rPr>
-              <a:t>2026 여름 업데이트</a:t>
+              <a:t>새 기능 소개</a:t>
             </a:r>
           </a:p>
         </p:txBody>
@@ -3724,8 +3724,8 @@
         </p:nvSpPr>
         <p:spPr>
           <a:xfrm>
-            <a:off x="2651760" y="5349240"/>
-            <a:ext cx="1325880" cy="384048"/>
+            <a:off x="2331720" y="5349240"/>
+            <a:ext cx="1554480" cy="384048"/>
           </a:xfrm>
           <a:prstGeom prst="roundRect">
             <a:avLst>
@@ -3771,7 +3771,7 @@
                 <a:latin typeface="Pretendard SemiBold"/>
                 <a:ea typeface="Pretendard SemiBold"/>
               </a:rPr>
-              <a:t>실제 화면 수록</a:t>
+              <a:t>실제 화면 그대로</a:t>
             </a:r>
           </a:p>
         </p:txBody>
@@ -8165,7 +8165,7 @@
                 <a:latin typeface="Pretendard ExtraBold"/>
                 <a:ea typeface="Pretendard ExtraBold"/>
               </a:rPr>
-              <a:t>열 걸음의 안내</a:t>
+              <a:t>단계별 안내</a:t>
             </a:r>
           </a:p>
           <a:p>
@@ -8182,7 +8182,7 @@
                 <a:latin typeface="Pretendard"/>
                 <a:ea typeface="Pretendard"/>
               </a:rPr>
-              <a:t>사진 올리기부터 저장까지, 화면 위에서 한 걸음씩 짚어 주어 헤맬 틈이 없습니다.</a:t>
+              <a:t>사진 올리기부터 저장까지, 화면 위에서 하나씩 짚어 주어 헤맬 틈이 없습니다.</a:t>
             </a:r>
           </a:p>
         </p:txBody>
@@ -8575,7 +8575,7 @@
                 <a:latin typeface="Pretendard"/>
                 <a:ea typeface="Pretendard"/>
               </a:rPr>
-              <a:t>사용법 안내 — 첫 걸음</a:t>
+              <a:t>사용법 안내</a:t>
             </a:r>
           </a:p>
         </p:txBody>
@@ -8700,7 +8700,7 @@
                 <a:latin typeface="Pretendard"/>
                 <a:ea typeface="Pretendard"/>
               </a:rPr>
-              <a:t>제품 사진 올리기부터 열 단계 — 안내 그대로 따라가면 됩니다</a:t>
+              <a:t>사진 올리기부터 저장까지, 화면 안내를 그대로 따라가면 됩니다</a:t>
             </a:r>
           </a:p>
         </p:txBody>
@@ -8989,7 +8989,7 @@
                 <a:latin typeface="Pretendard ExtraBold"/>
                 <a:ea typeface="Pretendard ExtraBold"/>
               </a:rPr>
-              <a:t>제 삼 장</a:t>
+              <a:t>제3장</a:t>
             </a:r>
           </a:p>
           <a:p>
@@ -9233,7 +9233,7 @@
                 <a:latin typeface="Pretendard ExtraBold"/>
                 <a:ea typeface="Pretendard ExtraBold"/>
               </a:rPr>
-              <a:t>이번 여름의 연결</a:t>
+              <a:t>새로 생긴 연결</a:t>
             </a:r>
           </a:p>
         </p:txBody>
@@ -9273,7 +9273,7 @@
                 <a:latin typeface="Noto Serif KR"/>
                 <a:ea typeface="Noto Serif KR"/>
               </a:rPr>
-              <a:t>프리캔버스 첫 줄에 </a:t>
+              <a:t>프리캔버스 상단 메뉴에 </a:t>
             </a:r>
             <a:r>
               <a:rPr sz="2300" b="1" i="0">
@@ -10220,7 +10220,7 @@
                 <a:latin typeface="Noto Serif KR"/>
                 <a:ea typeface="Noto Serif KR"/>
               </a:rPr>
-              <a:t>첫걸음</a:t>
+              <a:t>1단계</a:t>
             </a:r>
           </a:p>
         </p:txBody>
@@ -10470,7 +10470,7 @@
                 <a:latin typeface="Noto Serif KR"/>
                 <a:ea typeface="Noto Serif KR"/>
               </a:rPr>
-              <a:t>두걸음</a:t>
+              <a:t>2단계</a:t>
             </a:r>
           </a:p>
         </p:txBody>
@@ -10720,7 +10720,7 @@
                 <a:latin typeface="Noto Serif KR"/>
                 <a:ea typeface="Noto Serif KR"/>
               </a:rPr>
-              <a:t>세걸음</a:t>
+              <a:t>3단계</a:t>
             </a:r>
           </a:p>
         </p:txBody>
@@ -10926,7 +10926,7 @@
                 <a:latin typeface="Noto Serif KR"/>
                 <a:ea typeface="Noto Serif KR"/>
               </a:rPr>
-              <a:t>네걸음</a:t>
+              <a:t>4단계</a:t>
             </a:r>
           </a:p>
         </p:txBody>
@@ -11870,7 +11870,7 @@
                 <a:latin typeface="Pretendard ExtraBold"/>
                 <a:ea typeface="Pretendard ExtraBold"/>
               </a:rPr>
-              <a:t>이번 여름의 새것</a:t>
+              <a:t>새로 추가된 기능</a:t>
             </a:r>
           </a:p>
           <a:p>
@@ -14157,7 +14157,7 @@
                 <a:latin typeface="Pretendard ExtraBold"/>
                 <a:ea typeface="Pretendard ExtraBold"/>
               </a:rPr>
-              <a:t>이번 여름 새로 더해진 기능들</a:t>
+              <a:t>최근 새로 추가된 기능들</a:t>
             </a:r>
             <a:r>
               <a:rPr sz="1250" b="0" i="0">
@@ -14456,7 +14456,7 @@
                 <a:latin typeface="Pretendard ExtraBold"/>
                 <a:ea typeface="Pretendard ExtraBold"/>
               </a:rPr>
-              <a:t>제 일 장</a:t>
+              <a:t>제1장</a:t>
             </a:r>
           </a:p>
           <a:p>
@@ -15828,7 +15828,7 @@
                 <a:latin typeface="Pretendard ExtraBold"/>
                 <a:ea typeface="Pretendard ExtraBold"/>
               </a:rPr>
-              <a:t>제 이 장</a:t>
+              <a:t>제2장</a:t>
             </a:r>
           </a:p>
           <a:p>

--- a/slides.pptx
+++ b/slides.pptx
@@ -9567,7 +9567,7 @@
         <p:spPr>
           <a:xfrm>
             <a:off x="1234440" y="3063240"/>
-            <a:ext cx="3154680" cy="1481328"/>
+            <a:ext cx="3154680" cy="1371600"/>
           </a:xfrm>
           <a:prstGeom prst="roundRect">
             <a:avLst>
@@ -9621,8 +9621,8 @@
         </p:nvSpPr>
         <p:spPr>
           <a:xfrm>
-            <a:off x="1472184" y="3255264"/>
-            <a:ext cx="2697480" cy="1143000"/>
+            <a:off x="1472184" y="3291840"/>
+            <a:ext cx="2697480" cy="1005840"/>
           </a:xfrm>
           <a:prstGeom prst="rect">
             <a:avLst/>
@@ -9644,60 +9644,30 @@
               </a:spcAft>
             </a:pPr>
             <a:r>
-              <a:rPr sz="2000" b="1" i="0">
-                <a:solidFill>
-                  <a:srgbClr val="1F5068"/>
-                </a:solidFill>
-                <a:latin typeface="Noto Serif KR"/>
-                <a:ea typeface="Noto Serif KR"/>
-              </a:rPr>
-              <a:t>하나</a:t>
-            </a:r>
-            <a:r>
-              <a:rPr sz="1100" b="0" i="0">
-                <a:solidFill>
-                  <a:srgbClr val="9A7440"/>
+              <a:rPr sz="1200" b="0" i="0">
+                <a:solidFill>
+                  <a:srgbClr val="28364A"/>
+                </a:solidFill>
+                <a:latin typeface="Pretendard ExtraBold"/>
+                <a:ea typeface="Pretendard ExtraBold"/>
+              </a:rPr>
+              <a:t>🔑 로그인은 한 번</a:t>
+            </a:r>
+          </a:p>
+          <a:p>
+            <a:pPr algn="l">
+              <a:lnSpc>
+                <a:spcPct val="135000"/>
+              </a:lnSpc>
+            </a:pPr>
+            <a:r>
+              <a:rPr sz="1000" b="0" i="0">
+                <a:solidFill>
+                  <a:srgbClr val="455569"/>
                 </a:solidFill>
                 <a:latin typeface="Pretendard"/>
                 <a:ea typeface="Pretendard"/>
               </a:rPr>
-              <a:t> 의 계정</a:t>
-            </a:r>
-          </a:p>
-          <a:p>
-            <a:pPr algn="l">
-              <a:lnSpc>
-                <a:spcPct val="100000"/>
-              </a:lnSpc>
-              <a:spcAft>
-                <a:spcPts val="300"/>
-              </a:spcAft>
-            </a:pPr>
-            <a:r>
-              <a:rPr sz="1150" b="0" i="0">
-                <a:solidFill>
-                  <a:srgbClr val="28364A"/>
-                </a:solidFill>
-                <a:latin typeface="Pretendard ExtraBold"/>
-                <a:ea typeface="Pretendard ExtraBold"/>
-              </a:rPr>
-              <a:t>로그인은 한 번</a:t>
-            </a:r>
-          </a:p>
-          <a:p>
-            <a:pPr algn="l">
-              <a:lnSpc>
-                <a:spcPct val="130000"/>
-              </a:lnSpc>
-            </a:pPr>
-            <a:r>
-              <a:rPr sz="950" b="0" i="0">
-                <a:solidFill>
-                  <a:srgbClr val="455569"/>
-                </a:solidFill>
-                <a:latin typeface="Pretendard"/>
-                <a:ea typeface="Pretendard"/>
-              </a:rPr>
               <a:t>구글 계정 하나로 두 서비스를 자유롭게 오갑니다.</a:t>
             </a:r>
           </a:p>
@@ -9712,7 +9682,7 @@
         <p:spPr>
           <a:xfrm>
             <a:off x="4517136" y="3063240"/>
-            <a:ext cx="3154680" cy="1481328"/>
+            <a:ext cx="3154680" cy="1371600"/>
           </a:xfrm>
           <a:prstGeom prst="roundRect">
             <a:avLst>
@@ -9766,8 +9736,8 @@
         </p:nvSpPr>
         <p:spPr>
           <a:xfrm>
-            <a:off x="4754880" y="3255264"/>
-            <a:ext cx="2697480" cy="1143000"/>
+            <a:off x="4754880" y="3291840"/>
+            <a:ext cx="2697480" cy="1005840"/>
           </a:xfrm>
           <a:prstGeom prst="rect">
             <a:avLst/>
@@ -9789,60 +9759,30 @@
               </a:spcAft>
             </a:pPr>
             <a:r>
-              <a:rPr sz="2000" b="1" i="0">
-                <a:solidFill>
-                  <a:srgbClr val="1F5068"/>
-                </a:solidFill>
-                <a:latin typeface="Noto Serif KR"/>
-                <a:ea typeface="Noto Serif KR"/>
-              </a:rPr>
-              <a:t>둘</a:t>
-            </a:r>
-            <a:r>
-              <a:rPr sz="1100" b="0" i="0">
-                <a:solidFill>
-                  <a:srgbClr val="9A7440"/>
+              <a:rPr sz="1200" b="0" i="0">
+                <a:solidFill>
+                  <a:srgbClr val="28364A"/>
+                </a:solidFill>
+                <a:latin typeface="Pretendard ExtraBold"/>
+                <a:ea typeface="Pretendard ExtraBold"/>
+              </a:rPr>
+              <a:t>🎯 발견과 설득, 두 번의 승부</a:t>
+            </a:r>
+          </a:p>
+          <a:p>
+            <a:pPr algn="l">
+              <a:lnSpc>
+                <a:spcPct val="135000"/>
+              </a:lnSpc>
+            </a:pPr>
+            <a:r>
+              <a:rPr sz="1000" b="0" i="0">
+                <a:solidFill>
+                  <a:srgbClr val="455569"/>
                 </a:solidFill>
                 <a:latin typeface="Pretendard"/>
                 <a:ea typeface="Pretendard"/>
               </a:rPr>
-              <a:t> 의 승부</a:t>
-            </a:r>
-          </a:p>
-          <a:p>
-            <a:pPr algn="l">
-              <a:lnSpc>
-                <a:spcPct val="100000"/>
-              </a:lnSpc>
-              <a:spcAft>
-                <a:spcPts val="300"/>
-              </a:spcAft>
-            </a:pPr>
-            <a:r>
-              <a:rPr sz="1150" b="0" i="0">
-                <a:solidFill>
-                  <a:srgbClr val="28364A"/>
-                </a:solidFill>
-                <a:latin typeface="Pretendard ExtraBold"/>
-                <a:ea typeface="Pretendard ExtraBold"/>
-              </a:rPr>
-              <a:t>발견과 설득</a:t>
-            </a:r>
-          </a:p>
-          <a:p>
-            <a:pPr algn="l">
-              <a:lnSpc>
-                <a:spcPct val="130000"/>
-              </a:lnSpc>
-            </a:pPr>
-            <a:r>
-              <a:rPr sz="950" b="0" i="0">
-                <a:solidFill>
-                  <a:srgbClr val="455569"/>
-                </a:solidFill>
-                <a:latin typeface="Pretendard"/>
-                <a:ea typeface="Pretendard"/>
-              </a:rPr>
               <a:t>검색에 걸리는 이름은 검색마스터가, 사고 싶어지는 모습은 프리캔버스가.</a:t>
             </a:r>
           </a:p>
@@ -9857,7 +9797,7 @@
         <p:spPr>
           <a:xfrm>
             <a:off x="7799832" y="3063240"/>
-            <a:ext cx="3154680" cy="1481328"/>
+            <a:ext cx="3154680" cy="1371600"/>
           </a:xfrm>
           <a:prstGeom prst="roundRect">
             <a:avLst>
@@ -9911,8 +9851,8 @@
         </p:nvSpPr>
         <p:spPr>
           <a:xfrm>
-            <a:off x="8037576" y="3255264"/>
-            <a:ext cx="2697480" cy="1143000"/>
+            <a:off x="8037576" y="3291840"/>
+            <a:ext cx="2697480" cy="1005840"/>
           </a:xfrm>
           <a:prstGeom prst="rect">
             <a:avLst/>
@@ -9934,54 +9874,24 @@
               </a:spcAft>
             </a:pPr>
             <a:r>
-              <a:rPr sz="2000" b="1" i="0">
-                <a:solidFill>
-                  <a:srgbClr val="1F5068"/>
-                </a:solidFill>
-                <a:latin typeface="Noto Serif KR"/>
-                <a:ea typeface="Noto Serif KR"/>
-              </a:rPr>
-              <a:t>여섯</a:t>
-            </a:r>
-            <a:r>
-              <a:rPr sz="1100" b="0" i="0">
-                <a:solidFill>
-                  <a:srgbClr val="9A7440"/>
-                </a:solidFill>
-                <a:latin typeface="Pretendard"/>
-                <a:ea typeface="Pretendard"/>
-              </a:rPr>
-              <a:t>  가지 기능</a:t>
-            </a:r>
-          </a:p>
-          <a:p>
-            <a:pPr algn="l">
-              <a:lnSpc>
-                <a:spcPct val="100000"/>
-              </a:lnSpc>
-              <a:spcAft>
-                <a:spcPts val="300"/>
-              </a:spcAft>
-            </a:pPr>
-            <a:r>
-              <a:rPr sz="1150" b="0" i="0">
+              <a:rPr sz="1200" b="0" i="0">
                 <a:solidFill>
                   <a:srgbClr val="28364A"/>
                 </a:solidFill>
                 <a:latin typeface="Pretendard ExtraBold"/>
                 <a:ea typeface="Pretendard ExtraBold"/>
               </a:rPr>
-              <a:t>새로 추가된 기능</a:t>
+              <a:t>✨ 새로 추가된 여섯 가지 기능</a:t>
             </a:r>
           </a:p>
           <a:p>
             <a:pPr algn="l">
               <a:lnSpc>
-                <a:spcPct val="130000"/>
-              </a:lnSpc>
-            </a:pPr>
-            <a:r>
-              <a:rPr sz="950" b="0" i="0">
+                <a:spcPct val="135000"/>
+              </a:lnSpc>
+            </a:pPr>
+            <a:r>
+              <a:rPr sz="1000" b="0" i="0">
                 <a:solidFill>
                   <a:srgbClr val="455569"/>
                 </a:solidFill>
@@ -10603,14 +10513,14 @@
               </a:lnSpc>
             </a:pPr>
             <a:r>
-              <a:rPr sz="3600" b="1" i="0">
-                <a:solidFill>
-                  <a:srgbClr val="1F5068"/>
-                </a:solidFill>
-                <a:latin typeface="Noto Serif KR"/>
-                <a:ea typeface="Noto Serif KR"/>
-              </a:rPr>
-              <a:t>찾</a:t>
+              <a:rPr sz="2600" b="0" i="0">
+                <a:solidFill>
+                  <a:srgbClr val="1D2735"/>
+                </a:solidFill>
+                <a:latin typeface="Pretendard"/>
+                <a:ea typeface="Pretendard"/>
+              </a:rPr>
+              <a:t>🔍</a:t>
             </a:r>
           </a:p>
         </p:txBody>
@@ -10815,14 +10725,14 @@
               </a:lnSpc>
             </a:pPr>
             <a:r>
-              <a:rPr sz="3600" b="1" i="0">
-                <a:solidFill>
-                  <a:srgbClr val="7D5E33"/>
-                </a:solidFill>
-                <a:latin typeface="Noto Serif KR"/>
-                <a:ea typeface="Noto Serif KR"/>
-              </a:rPr>
-              <a:t>사</a:t>
+              <a:rPr sz="2600" b="0" i="0">
+                <a:solidFill>
+                  <a:srgbClr val="1D2735"/>
+                </a:solidFill>
+                <a:latin typeface="Pretendard"/>
+                <a:ea typeface="Pretendard"/>
+              </a:rPr>
+              <a:t>🛒</a:t>
             </a:r>
           </a:p>
         </p:txBody>

--- a/slides.pptx
+++ b/slides.pptx
@@ -3227,7 +3227,7 @@
                 <a:latin typeface="Pretendard ExtraBold"/>
                 <a:ea typeface="Pretendard ExtraBold"/>
               </a:rPr>
-              <a:t>온라인셀러를 위한 두 개의 AI</a:t>
+              <a:t>온라인셀러를 위한 도구 소개</a:t>
             </a:r>
           </a:p>
         </p:txBody>
@@ -3327,7 +3327,7 @@
                 <a:latin typeface="Pretendard SemiBold"/>
                 <a:ea typeface="Pretendard SemiBold"/>
               </a:rPr>
-              <a:t>검색에 걸리는 이름, 구매로 이어지는 화면 — 새 기능 소개</a:t>
+              <a:t>상품명 생성기 · 상세페이지 생성기 — 새 기능 소개</a:t>
             </a:r>
           </a:p>
         </p:txBody>
@@ -3718,7 +3718,7 @@
                 <a:latin typeface="Pretendard ExtraBold"/>
                 <a:ea typeface="Pretendard ExtraBold"/>
               </a:rPr>
-              <a:t>프리캔버스 — 새 기능 ③</a:t>
+              <a:t>프리캔버스 새 기능 ③</a:t>
             </a:r>
           </a:p>
         </p:txBody>
@@ -3731,8 +3731,8 @@
         </p:nvSpPr>
         <p:spPr>
           <a:xfrm>
-            <a:off x="822960" y="1207008"/>
-            <a:ext cx="4937760" cy="1508760"/>
+            <a:off x="822960" y="1234440"/>
+            <a:ext cx="4937760" cy="1280160"/>
           </a:xfrm>
           <a:prstGeom prst="rect">
             <a:avLst/>
@@ -3747,45 +3747,38 @@
           <a:p>
             <a:pPr algn="l">
               <a:lnSpc>
-                <a:spcPct val="132000"/>
-              </a:lnSpc>
-            </a:pPr>
-            <a:r>
-              <a:rPr sz="2200" b="1" i="0">
+                <a:spcPct val="130000"/>
+              </a:lnSpc>
+            </a:pPr>
+            <a:r>
+              <a:rPr sz="2400" b="1" i="0">
                 <a:solidFill>
                   <a:srgbClr val="1D2735"/>
                 </a:solidFill>
                 <a:latin typeface="Noto Serif KR"/>
                 <a:ea typeface="Noto Serif KR"/>
               </a:rPr>
-              <a:t>긴 상세페이지도</a:t>
+              <a:t>기존 상세페이지 편집</a:t>
             </a:r>
           </a:p>
           <a:p>
             <a:pPr algn="l">
               <a:lnSpc>
-                <a:spcPct val="132000"/>
-              </a:lnSpc>
-            </a:pPr>
-            <a:r>
-              <a:rPr sz="2200" b="1" i="0">
-                <a:solidFill>
-                  <a:srgbClr val="1F5068"/>
-                </a:solidFill>
-                <a:latin typeface="Noto Serif KR"/>
-                <a:ea typeface="Noto Serif KR"/>
-              </a:rPr>
-              <a:t>블록으로 풀어</a:t>
-            </a:r>
-            <a:r>
-              <a:rPr sz="2200" b="1" i="0">
-                <a:solidFill>
-                  <a:srgbClr val="1D2735"/>
-                </a:solidFill>
-                <a:latin typeface="Noto Serif KR"/>
-                <a:ea typeface="Noto Serif KR"/>
-              </a:rPr>
-              <a:t> 고칩니다.</a:t>
+                <a:spcPct val="140000"/>
+              </a:lnSpc>
+              <a:spcBef>
+                <a:spcPts val="800"/>
+              </a:spcBef>
+            </a:pPr>
+            <a:r>
+              <a:rPr sz="1200" b="0" i="0">
+                <a:solidFill>
+                  <a:srgbClr val="455569"/>
+                </a:solidFill>
+                <a:latin typeface="Pretendard"/>
+                <a:ea typeface="Pretendard"/>
+              </a:rPr>
+              <a:t>긴 상세 캡처를 올리면 블록 단위로 나뉘어, 원하는 부분만 고칠 수 있습니다.</a:t>
             </a:r>
           </a:p>
         </p:txBody>
@@ -3798,7 +3791,7 @@
         </p:nvSpPr>
         <p:spPr>
           <a:xfrm>
-            <a:off x="822960" y="2880360"/>
+            <a:off x="822960" y="2743200"/>
             <a:ext cx="502920" cy="457200"/>
           </a:xfrm>
           <a:prstGeom prst="rect">
@@ -3838,7 +3831,7 @@
         </p:nvSpPr>
         <p:spPr>
           <a:xfrm>
-            <a:off x="1389888" y="2871216"/>
+            <a:off x="1389888" y="2734056"/>
             <a:ext cx="4297680" cy="960120"/>
           </a:xfrm>
           <a:prstGeom prst="rect">
@@ -3868,7 +3861,7 @@
                 <a:latin typeface="Pretendard ExtraBold"/>
                 <a:ea typeface="Pretendard ExtraBold"/>
               </a:rPr>
-              <a:t>캡처 한 장이 편집 블록으로</a:t>
+              <a:t>캡처가 편집 블록으로 나뉩니다</a:t>
             </a:r>
           </a:p>
           <a:p>
@@ -3885,7 +3878,7 @@
                 <a:latin typeface="Pretendard"/>
                 <a:ea typeface="Pretendard"/>
               </a:rPr>
-              <a:t>길게 이어진 상세 이미지를 내용 경계에 맞춰 이미지 블록과 글 블록으로 자동 분해합니다.</a:t>
+              <a:t>길게 이어진 상세 이미지를 내용 경계에 맞춰 이미지 블록과 글 블록으로 자동 분리합니다.</a:t>
             </a:r>
           </a:p>
         </p:txBody>
@@ -3898,7 +3891,7 @@
         </p:nvSpPr>
         <p:spPr>
           <a:xfrm>
-            <a:off x="822960" y="3877056"/>
+            <a:off x="822960" y="3739896"/>
             <a:ext cx="4846320" cy="10972"/>
           </a:xfrm>
           <a:prstGeom prst="rect">
@@ -3942,7 +3935,7 @@
         </p:nvSpPr>
         <p:spPr>
           <a:xfrm>
-            <a:off x="822960" y="3959352"/>
+            <a:off x="822960" y="3822191"/>
             <a:ext cx="502920" cy="457200"/>
           </a:xfrm>
           <a:prstGeom prst="rect">
@@ -3982,7 +3975,7 @@
         </p:nvSpPr>
         <p:spPr>
           <a:xfrm>
-            <a:off x="1389888" y="3950208"/>
+            <a:off x="1389888" y="3813048"/>
             <a:ext cx="4297680" cy="960120"/>
           </a:xfrm>
           <a:prstGeom prst="rect">
@@ -4012,7 +4005,7 @@
                 <a:latin typeface="Pretendard ExtraBold"/>
                 <a:ea typeface="Pretendard ExtraBold"/>
               </a:rPr>
-              <a:t>자른 경계는 끌어서 조정</a:t>
+              <a:t>나뉜 경계는 드래그로 조정</a:t>
             </a:r>
           </a:p>
           <a:p>
@@ -4029,7 +4022,7 @@
                 <a:latin typeface="Pretendard"/>
                 <a:ea typeface="Pretendard"/>
               </a:rPr>
-              <a:t>나뉜 위치가 아쉬우면 경계선을 마우스로 끌어 원하는 지점에서 다시 자릅니다.</a:t>
+              <a:t>잘린 위치가 아쉬우면 경계선을 마우스로 끌어 원하는 지점에서 다시 자릅니다.</a:t>
             </a:r>
           </a:p>
         </p:txBody>
@@ -4042,7 +4035,7 @@
         </p:nvSpPr>
         <p:spPr>
           <a:xfrm>
-            <a:off x="822960" y="4956048"/>
+            <a:off x="822960" y="4818888"/>
             <a:ext cx="4846320" cy="10972"/>
           </a:xfrm>
           <a:prstGeom prst="rect">
@@ -4086,7 +4079,7 @@
         </p:nvSpPr>
         <p:spPr>
           <a:xfrm>
-            <a:off x="822960" y="5038344"/>
+            <a:off x="822960" y="4901183"/>
             <a:ext cx="502920" cy="457200"/>
           </a:xfrm>
           <a:prstGeom prst="rect">
@@ -4126,7 +4119,7 @@
         </p:nvSpPr>
         <p:spPr>
           <a:xfrm>
-            <a:off x="1389888" y="5029200"/>
+            <a:off x="1389888" y="4892040"/>
             <a:ext cx="4297680" cy="960120"/>
           </a:xfrm>
           <a:prstGeom prst="rect">
@@ -4156,7 +4149,7 @@
                 <a:latin typeface="Pretendard ExtraBold"/>
                 <a:ea typeface="Pretendard ExtraBold"/>
               </a:rPr>
-              <a:t>그림 속 글자도 고쳐 쓰기</a:t>
+              <a:t>이미지 속 글자 수정</a:t>
             </a:r>
           </a:p>
           <a:p>
@@ -4173,7 +4166,7 @@
                 <a:latin typeface="Pretendard"/>
                 <a:ea typeface="Pretendard"/>
               </a:rPr>
-              <a:t>이미지 속 문구를 골라 내용을 고치고 글꼴을 정하면, 그 모습 그대로 다시 그려냅니다.</a:t>
+              <a:t>이미지 안 문구를 골라 내용을 고치고 글꼴을 정하면, 그대로 다시 그려 줍니다.</a:t>
             </a:r>
           </a:p>
         </p:txBody>
@@ -4250,7 +4243,7 @@
                 <a:latin typeface="Pretendard"/>
                 <a:ea typeface="Pretendard"/>
               </a:rPr>
-              <a:t>캡처를 올리면 이미지·텍스트 블록으로 정리되어 바로 수정합니다</a:t>
+              <a:t>캡처를 올리면 이미지·텍스트 블록으로 정리됩니다</a:t>
             </a:r>
           </a:p>
         </p:txBody>
@@ -4502,7 +4495,7 @@
                 <a:latin typeface="Pretendard ExtraBold"/>
                 <a:ea typeface="Pretendard ExtraBold"/>
               </a:rPr>
-              <a:t>프리캔버스 — 새 기능 ④</a:t>
+              <a:t>프리캔버스 새 기능 ④</a:t>
             </a:r>
           </a:p>
         </p:txBody>
@@ -4515,8 +4508,8 @@
         </p:nvSpPr>
         <p:spPr>
           <a:xfrm>
-            <a:off x="822960" y="1207008"/>
-            <a:ext cx="4937760" cy="1508760"/>
+            <a:off x="822960" y="1234440"/>
+            <a:ext cx="4937760" cy="1280160"/>
           </a:xfrm>
           <a:prstGeom prst="rect">
             <a:avLst/>
@@ -4531,55 +4524,38 @@
           <a:p>
             <a:pPr algn="l">
               <a:lnSpc>
-                <a:spcPct val="132000"/>
-              </a:lnSpc>
-            </a:pPr>
-            <a:r>
-              <a:rPr sz="2200" b="1" i="0">
+                <a:spcPct val="130000"/>
+              </a:lnSpc>
+            </a:pPr>
+            <a:r>
+              <a:rPr sz="2400" b="1" i="0">
                 <a:solidFill>
                   <a:srgbClr val="1D2735"/>
                 </a:solidFill>
                 <a:latin typeface="Noto Serif KR"/>
                 <a:ea typeface="Noto Serif KR"/>
               </a:rPr>
-              <a:t>홍보용 </a:t>
-            </a:r>
-            <a:r>
-              <a:rPr sz="2200" b="1" i="0">
-                <a:solidFill>
-                  <a:srgbClr val="1F5068"/>
-                </a:solidFill>
-                <a:latin typeface="Noto Serif KR"/>
-                <a:ea typeface="Noto Serif KR"/>
-              </a:rPr>
-              <a:t>카드뉴스</a:t>
-            </a:r>
-            <a:r>
-              <a:rPr sz="2200" b="1" i="0">
-                <a:solidFill>
-                  <a:srgbClr val="1D2735"/>
-                </a:solidFill>
-                <a:latin typeface="Noto Serif KR"/>
-                <a:ea typeface="Noto Serif KR"/>
-              </a:rPr>
-              <a:t>는</a:t>
+              <a:t>카드뉴스 만들기</a:t>
             </a:r>
           </a:p>
           <a:p>
             <a:pPr algn="l">
               <a:lnSpc>
-                <a:spcPct val="132000"/>
-              </a:lnSpc>
-            </a:pPr>
-            <a:r>
-              <a:rPr sz="2200" b="1" i="0">
-                <a:solidFill>
-                  <a:srgbClr val="1D2735"/>
-                </a:solidFill>
-                <a:latin typeface="Noto Serif KR"/>
-                <a:ea typeface="Noto Serif KR"/>
-              </a:rPr>
-              <a:t>사진이 없어도 완성됩니다.</a:t>
+                <a:spcPct val="140000"/>
+              </a:lnSpc>
+              <a:spcBef>
+                <a:spcPts val="800"/>
+              </a:spcBef>
+            </a:pPr>
+            <a:r>
+              <a:rPr sz="1200" b="0" i="0">
+                <a:solidFill>
+                  <a:srgbClr val="455569"/>
+                </a:solidFill>
+                <a:latin typeface="Pretendard"/>
+                <a:ea typeface="Pretendard"/>
+              </a:rPr>
+              <a:t>홍보용 카드뉴스 여러 장을 한 번에 만듭니다. 사진이 없어도 됩니다.</a:t>
             </a:r>
           </a:p>
         </p:txBody>
@@ -4592,7 +4568,7 @@
         </p:nvSpPr>
         <p:spPr>
           <a:xfrm>
-            <a:off x="822960" y="2880360"/>
+            <a:off x="822960" y="2743200"/>
             <a:ext cx="502920" cy="457200"/>
           </a:xfrm>
           <a:prstGeom prst="rect">
@@ -4632,7 +4608,7 @@
         </p:nvSpPr>
         <p:spPr>
           <a:xfrm>
-            <a:off x="1389888" y="2871216"/>
+            <a:off x="1389888" y="2734056"/>
             <a:ext cx="4297680" cy="960120"/>
           </a:xfrm>
           <a:prstGeom prst="rect">
@@ -4662,7 +4638,7 @@
                 <a:latin typeface="Pretendard ExtraBold"/>
                 <a:ea typeface="Pretendard ExtraBold"/>
               </a:rPr>
-              <a:t>줄거리만 적으면 여러 장이 한 번에</a:t>
+              <a:t>내용만 적으면 여러 장이 한 번에</a:t>
             </a:r>
           </a:p>
           <a:p>
@@ -4679,7 +4655,7 @@
                 <a:latin typeface="Pretendard"/>
                 <a:ea typeface="Pretendard"/>
               </a:rPr>
-              <a:t>주제와 하고 싶은 말을 적으면, 넘겨보는 카드 여러 장이 처음부터 끝까지 한 호흡으로 만들어집니다.</a:t>
+              <a:t>주제와 하고 싶은 말을 적으면, 넘겨보는 카드 여러 장이 순서대로 만들어집니다.</a:t>
             </a:r>
           </a:p>
         </p:txBody>
@@ -4692,7 +4668,7 @@
         </p:nvSpPr>
         <p:spPr>
           <a:xfrm>
-            <a:off x="822960" y="3877056"/>
+            <a:off x="822960" y="3739896"/>
             <a:ext cx="4846320" cy="10972"/>
           </a:xfrm>
           <a:prstGeom prst="rect">
@@ -4736,7 +4712,7 @@
         </p:nvSpPr>
         <p:spPr>
           <a:xfrm>
-            <a:off x="822960" y="3959352"/>
+            <a:off x="822960" y="3822191"/>
             <a:ext cx="502920" cy="457200"/>
           </a:xfrm>
           <a:prstGeom prst="rect">
@@ -4776,7 +4752,7 @@
         </p:nvSpPr>
         <p:spPr>
           <a:xfrm>
-            <a:off x="1389888" y="3950208"/>
+            <a:off x="1389888" y="3813048"/>
             <a:ext cx="4297680" cy="960120"/>
           </a:xfrm>
           <a:prstGeom prst="rect">
@@ -4806,7 +4782,7 @@
                 <a:latin typeface="Pretendard ExtraBold"/>
                 <a:ea typeface="Pretendard ExtraBold"/>
               </a:rPr>
-              <a:t>모든 장의 결이 같게</a:t>
+              <a:t>모든 장의 디자인 통일</a:t>
             </a:r>
           </a:p>
           <a:p>
@@ -4823,7 +4799,7 @@
                 <a:latin typeface="Pretendard"/>
                 <a:ea typeface="Pretendard"/>
               </a:rPr>
-              <a:t>색·글꼴·판짜임을 먼저 정해 두고 그리기 때문에, 장마다 분위기가 어긋나는 일이 없습니다.</a:t>
+              <a:t>색·글꼴·구성을 먼저 정하고 그리기 때문에, 장마다 분위기가 달라지지 않습니다.</a:t>
             </a:r>
           </a:p>
         </p:txBody>
@@ -4836,7 +4812,7 @@
         </p:nvSpPr>
         <p:spPr>
           <a:xfrm>
-            <a:off x="822960" y="4956048"/>
+            <a:off x="822960" y="4818888"/>
             <a:ext cx="4846320" cy="10972"/>
           </a:xfrm>
           <a:prstGeom prst="rect">
@@ -4880,7 +4856,7 @@
         </p:nvSpPr>
         <p:spPr>
           <a:xfrm>
-            <a:off x="822960" y="5038344"/>
+            <a:off x="822960" y="4901183"/>
             <a:ext cx="502920" cy="457200"/>
           </a:xfrm>
           <a:prstGeom prst="rect">
@@ -4920,7 +4896,7 @@
         </p:nvSpPr>
         <p:spPr>
           <a:xfrm>
-            <a:off x="1389888" y="5029200"/>
+            <a:off x="1389888" y="4892040"/>
             <a:ext cx="4297680" cy="960120"/>
           </a:xfrm>
           <a:prstGeom prst="rect">
@@ -4950,7 +4926,7 @@
                 <a:latin typeface="Pretendard ExtraBold"/>
                 <a:ea typeface="Pretendard ExtraBold"/>
               </a:rPr>
-              <a:t>사진 없이도, 분위기만 빌려도</a:t>
+              <a:t>사진은 선택 사항</a:t>
             </a:r>
           </a:p>
           <a:p>
@@ -4967,7 +4943,7 @@
                 <a:latin typeface="Pretendard"/>
                 <a:ea typeface="Pretendard"/>
               </a:rPr>
-              <a:t>사진이 없으면 글만으로 만들고, 있다면 분위기를 참고하는 정도로만 쓸 수도 있습니다.</a:t>
+              <a:t>사진이 없으면 글만으로 만들고, 있으면 분위기 참고용으로만 쓸 수도 있습니다.</a:t>
             </a:r>
           </a:p>
         </p:txBody>
@@ -5296,7 +5272,7 @@
                 <a:latin typeface="Pretendard ExtraBold"/>
                 <a:ea typeface="Pretendard ExtraBold"/>
               </a:rPr>
-              <a:t>프리캔버스 — 새 기능 ⑤</a:t>
+              <a:t>프리캔버스 새 기능 ⑤</a:t>
             </a:r>
           </a:p>
         </p:txBody>
@@ -5309,8 +5285,8 @@
         </p:nvSpPr>
         <p:spPr>
           <a:xfrm>
-            <a:off x="822960" y="1207008"/>
-            <a:ext cx="4937760" cy="1508760"/>
+            <a:off x="822960" y="1234440"/>
+            <a:ext cx="4937760" cy="1280160"/>
           </a:xfrm>
           <a:prstGeom prst="rect">
             <a:avLst/>
@@ -5325,35 +5301,38 @@
           <a:p>
             <a:pPr algn="l">
               <a:lnSpc>
-                <a:spcPct val="132000"/>
-              </a:lnSpc>
-            </a:pPr>
-            <a:r>
-              <a:rPr sz="2200" b="1" i="0">
+                <a:spcPct val="130000"/>
+              </a:lnSpc>
+            </a:pPr>
+            <a:r>
+              <a:rPr sz="2400" b="1" i="0">
                 <a:solidFill>
                   <a:srgbClr val="1D2735"/>
                 </a:solidFill>
                 <a:latin typeface="Noto Serif KR"/>
                 <a:ea typeface="Noto Serif KR"/>
               </a:rPr>
-              <a:t>지우고 싶은 곳만</a:t>
+              <a:t>AI 지우개</a:t>
             </a:r>
           </a:p>
           <a:p>
             <a:pPr algn="l">
               <a:lnSpc>
-                <a:spcPct val="132000"/>
-              </a:lnSpc>
-            </a:pPr>
-            <a:r>
-              <a:rPr sz="2200" b="1" i="0">
-                <a:solidFill>
-                  <a:srgbClr val="1F5068"/>
-                </a:solidFill>
-                <a:latin typeface="Noto Serif KR"/>
-                <a:ea typeface="Noto Serif KR"/>
-              </a:rPr>
-              <a:t>칠하면 사라집니다.</a:t>
+                <a:spcPct val="140000"/>
+              </a:lnSpc>
+              <a:spcBef>
+                <a:spcPts val="800"/>
+              </a:spcBef>
+            </a:pPr>
+            <a:r>
+              <a:rPr sz="1200" b="0" i="0">
+                <a:solidFill>
+                  <a:srgbClr val="455569"/>
+                </a:solidFill>
+                <a:latin typeface="Pretendard"/>
+                <a:ea typeface="Pretendard"/>
+              </a:rPr>
+              <a:t>이미지에서 지우고 싶은 부분만 칠하면 지워집니다.</a:t>
             </a:r>
           </a:p>
         </p:txBody>
@@ -5366,7 +5345,7 @@
         </p:nvSpPr>
         <p:spPr>
           <a:xfrm>
-            <a:off x="822960" y="2880360"/>
+            <a:off x="822960" y="2743200"/>
             <a:ext cx="502920" cy="457200"/>
           </a:xfrm>
           <a:prstGeom prst="rect">
@@ -5406,7 +5385,7 @@
         </p:nvSpPr>
         <p:spPr>
           <a:xfrm>
-            <a:off x="1389888" y="2871216"/>
+            <a:off x="1389888" y="2734056"/>
             <a:ext cx="4297680" cy="960120"/>
           </a:xfrm>
           <a:prstGeom prst="rect">
@@ -5436,7 +5415,7 @@
                 <a:latin typeface="Pretendard ExtraBold"/>
                 <a:ea typeface="Pretendard ExtraBold"/>
               </a:rPr>
-              <a:t>소싱 이미지의 티끌 정리</a:t>
+              <a:t>워터마크·글자 지우기</a:t>
             </a:r>
           </a:p>
           <a:p>
@@ -5453,7 +5432,7 @@
                 <a:latin typeface="Pretendard"/>
                 <a:ea typeface="Pretendard"/>
               </a:rPr>
-              <a:t>박혀 있는 워터마크, 중국어 글자, 거슬리는 배경 — 붓으로 칠한 자리만 감쪽같이 지워집니다.</a:t>
+              <a:t>소싱 이미지에 박힌 워터마크, 중국어 글자, 거슬리는 배경을 칠한 자리만 지웁니다.</a:t>
             </a:r>
           </a:p>
         </p:txBody>
@@ -5466,7 +5445,7 @@
         </p:nvSpPr>
         <p:spPr>
           <a:xfrm>
-            <a:off x="822960" y="3877056"/>
+            <a:off x="822960" y="3739896"/>
             <a:ext cx="4846320" cy="10972"/>
           </a:xfrm>
           <a:prstGeom prst="rect">
@@ -5510,7 +5489,7 @@
         </p:nvSpPr>
         <p:spPr>
           <a:xfrm>
-            <a:off x="822960" y="3959352"/>
+            <a:off x="822960" y="3822191"/>
             <a:ext cx="502920" cy="457200"/>
           </a:xfrm>
           <a:prstGeom prst="rect">
@@ -5550,7 +5529,7 @@
         </p:nvSpPr>
         <p:spPr>
           <a:xfrm>
-            <a:off x="1389888" y="3950208"/>
+            <a:off x="1389888" y="3813048"/>
             <a:ext cx="4297680" cy="960120"/>
           </a:xfrm>
           <a:prstGeom prst="rect">
@@ -5580,7 +5559,7 @@
                 <a:latin typeface="Pretendard ExtraBold"/>
                 <a:ea typeface="Pretendard ExtraBold"/>
               </a:rPr>
-              <a:t>내 컴퓨터 안에서 즉시</a:t>
+              <a:t>기다림 없이 바로</a:t>
             </a:r>
           </a:p>
           <a:p>
@@ -5597,7 +5576,7 @@
                 <a:latin typeface="Pretendard"/>
                 <a:ea typeface="Pretendard"/>
               </a:rPr>
-              <a:t>편집 화면 안에서 곧바로 지워져, 기다리거나 다른 도구로 오갈 필요가 없습니다.</a:t>
+              <a:t>편집 화면 안에서 곧바로 지워져, 다른 프로그램을 오갈 필요가 없습니다.</a:t>
             </a:r>
           </a:p>
         </p:txBody>
@@ -5610,7 +5589,7 @@
         </p:nvSpPr>
         <p:spPr>
           <a:xfrm>
-            <a:off x="822960" y="4956048"/>
+            <a:off x="822960" y="4818888"/>
             <a:ext cx="4846320" cy="10972"/>
           </a:xfrm>
           <a:prstGeom prst="rect">
@@ -5654,7 +5633,7 @@
         </p:nvSpPr>
         <p:spPr>
           <a:xfrm>
-            <a:off x="822960" y="5038344"/>
+            <a:off x="822960" y="4901183"/>
             <a:ext cx="502920" cy="457200"/>
           </a:xfrm>
           <a:prstGeom prst="rect">
@@ -5694,7 +5673,7 @@
         </p:nvSpPr>
         <p:spPr>
           <a:xfrm>
-            <a:off x="1389888" y="5029200"/>
+            <a:off x="1389888" y="4892040"/>
             <a:ext cx="4297680" cy="960120"/>
           </a:xfrm>
           <a:prstGeom prst="rect">
@@ -5724,7 +5703,7 @@
                 <a:latin typeface="Pretendard ExtraBold"/>
                 <a:ea typeface="Pretendard ExtraBold"/>
               </a:rPr>
-              <a:t>붓 하나로 끝나는 조작</a:t>
+              <a:t>간단한 조작</a:t>
             </a:r>
           </a:p>
           <a:p>
@@ -5741,7 +5720,7 @@
                 <a:latin typeface="Pretendard"/>
                 <a:ea typeface="Pretendard"/>
               </a:rPr>
-              <a:t>복잡한 설정을 들어냈습니다. 문지르면 지워진다 — 그게 전부입니다.</a:t>
+              <a:t>복잡한 설정 없이, 문지르면 지워집니다.</a:t>
             </a:r>
           </a:p>
         </p:txBody>
@@ -6390,7 +6369,7 @@
                 <a:latin typeface="Pretendard ExtraBold"/>
                 <a:ea typeface="Pretendard ExtraBold"/>
               </a:rPr>
-              <a:t>프리캔버스 — 처음이어도</a:t>
+              <a:t>처음 쓰는 분이라면</a:t>
             </a:r>
           </a:p>
         </p:txBody>
@@ -6403,8 +6382,8 @@
         </p:nvSpPr>
         <p:spPr>
           <a:xfrm>
-            <a:off x="822960" y="1207008"/>
-            <a:ext cx="4937760" cy="1508760"/>
+            <a:off x="822960" y="1234440"/>
+            <a:ext cx="4937760" cy="1280160"/>
           </a:xfrm>
           <a:prstGeom prst="rect">
             <a:avLst/>
@@ -6419,45 +6398,38 @@
           <a:p>
             <a:pPr algn="l">
               <a:lnSpc>
-                <a:spcPct val="132000"/>
-              </a:lnSpc>
-            </a:pPr>
-            <a:r>
-              <a:rPr sz="2200" b="1" i="0">
+                <a:spcPct val="130000"/>
+              </a:lnSpc>
+            </a:pPr>
+            <a:r>
+              <a:rPr sz="2400" b="1" i="0">
                 <a:solidFill>
                   <a:srgbClr val="1D2735"/>
                 </a:solidFill>
                 <a:latin typeface="Noto Serif KR"/>
                 <a:ea typeface="Noto Serif KR"/>
               </a:rPr>
-              <a:t>화면이 </a:t>
-            </a:r>
-            <a:r>
-              <a:rPr sz="2200" b="1" i="0">
-                <a:solidFill>
-                  <a:srgbClr val="1F5068"/>
-                </a:solidFill>
-                <a:latin typeface="Noto Serif KR"/>
-                <a:ea typeface="Noto Serif KR"/>
-              </a:rPr>
-              <a:t>손을 잡고</a:t>
+              <a:t>단계별 사용법 안내</a:t>
             </a:r>
           </a:p>
           <a:p>
             <a:pPr algn="l">
               <a:lnSpc>
-                <a:spcPct val="132000"/>
-              </a:lnSpc>
-            </a:pPr>
-            <a:r>
-              <a:rPr sz="2200" b="1" i="0">
-                <a:solidFill>
-                  <a:srgbClr val="1D2735"/>
-                </a:solidFill>
-                <a:latin typeface="Noto Serif KR"/>
-                <a:ea typeface="Noto Serif KR"/>
-              </a:rPr>
-              <a:t>차례로 안내합니다.</a:t>
+                <a:spcPct val="140000"/>
+              </a:lnSpc>
+              <a:spcBef>
+                <a:spcPts val="800"/>
+              </a:spcBef>
+            </a:pPr>
+            <a:r>
+              <a:rPr sz="1200" b="0" i="0">
+                <a:solidFill>
+                  <a:srgbClr val="455569"/>
+                </a:solidFill>
+                <a:latin typeface="Pretendard"/>
+                <a:ea typeface="Pretendard"/>
+              </a:rPr>
+              <a:t>화면 위에 순서대로 안내가 떠서, 처음이어도 따라 하기만 하면 됩니다.</a:t>
             </a:r>
           </a:p>
         </p:txBody>
@@ -6470,7 +6442,7 @@
         </p:nvSpPr>
         <p:spPr>
           <a:xfrm>
-            <a:off x="822960" y="2880360"/>
+            <a:off x="822960" y="2743200"/>
             <a:ext cx="502920" cy="457200"/>
           </a:xfrm>
           <a:prstGeom prst="rect">
@@ -6510,7 +6482,7 @@
         </p:nvSpPr>
         <p:spPr>
           <a:xfrm>
-            <a:off x="1389888" y="2871216"/>
+            <a:off x="1389888" y="2734056"/>
             <a:ext cx="4297680" cy="960120"/>
           </a:xfrm>
           <a:prstGeom prst="rect">
@@ -6540,7 +6512,7 @@
                 <a:latin typeface="Pretendard ExtraBold"/>
                 <a:ea typeface="Pretendard ExtraBold"/>
               </a:rPr>
-              <a:t>결과물마다 다른 안내 순서</a:t>
+              <a:t>결과물마다 다른 안내</a:t>
             </a:r>
           </a:p>
           <a:p>
@@ -6570,7 +6542,7 @@
         </p:nvSpPr>
         <p:spPr>
           <a:xfrm>
-            <a:off x="822960" y="3877056"/>
+            <a:off x="822960" y="3739896"/>
             <a:ext cx="4846320" cy="10972"/>
           </a:xfrm>
           <a:prstGeom prst="rect">
@@ -6614,7 +6586,7 @@
         </p:nvSpPr>
         <p:spPr>
           <a:xfrm>
-            <a:off x="822960" y="3959352"/>
+            <a:off x="822960" y="3822191"/>
             <a:ext cx="502920" cy="457200"/>
           </a:xfrm>
           <a:prstGeom prst="rect">
@@ -6654,7 +6626,7 @@
         </p:nvSpPr>
         <p:spPr>
           <a:xfrm>
-            <a:off x="1389888" y="3950208"/>
+            <a:off x="1389888" y="3813048"/>
             <a:ext cx="4297680" cy="960120"/>
           </a:xfrm>
           <a:prstGeom prst="rect">
@@ -6684,7 +6656,7 @@
                 <a:latin typeface="Pretendard ExtraBold"/>
                 <a:ea typeface="Pretendard ExtraBold"/>
               </a:rPr>
-              <a:t>단계별 안내</a:t>
+              <a:t>사진 올리기부터 저장까지</a:t>
             </a:r>
           </a:p>
           <a:p>
@@ -6701,7 +6673,7 @@
                 <a:latin typeface="Pretendard"/>
                 <a:ea typeface="Pretendard"/>
               </a:rPr>
-              <a:t>사진 올리기부터 저장까지, 화면 위에서 하나씩 짚어 주어 헤맬 틈이 없습니다.</a:t>
+              <a:t>각 단계에서 무엇을 누르고 무엇을 입력하는지 화면 위에서 하나씩 짚어 줍니다.</a:t>
             </a:r>
           </a:p>
         </p:txBody>
@@ -6714,7 +6686,7 @@
         </p:nvSpPr>
         <p:spPr>
           <a:xfrm>
-            <a:off x="822960" y="4956048"/>
+            <a:off x="822960" y="4818888"/>
             <a:ext cx="4846320" cy="10972"/>
           </a:xfrm>
           <a:prstGeom prst="rect">
@@ -6758,7 +6730,7 @@
         </p:nvSpPr>
         <p:spPr>
           <a:xfrm>
-            <a:off x="822960" y="5038344"/>
+            <a:off x="822960" y="4901183"/>
             <a:ext cx="502920" cy="457200"/>
           </a:xfrm>
           <a:prstGeom prst="rect">
@@ -6798,7 +6770,7 @@
         </p:nvSpPr>
         <p:spPr>
           <a:xfrm>
-            <a:off x="1389888" y="5029200"/>
+            <a:off x="1389888" y="4892040"/>
             <a:ext cx="4297680" cy="960120"/>
           </a:xfrm>
           <a:prstGeom prst="rect">
@@ -6828,7 +6800,7 @@
                 <a:latin typeface="Pretendard ExtraBold"/>
                 <a:ea typeface="Pretendard ExtraBold"/>
               </a:rPr>
-              <a:t>언제든 다시 열어보기</a:t>
+              <a:t>언제든 다시 보기</a:t>
             </a:r>
           </a:p>
           <a:p>
@@ -6845,7 +6817,7 @@
                 <a:latin typeface="Pretendard"/>
                 <a:ea typeface="Pretendard"/>
               </a:rPr>
-              <a:t>첫 화면의 “사용법 보기” 하나면 언제든 처음부터 다시 안내를 받을 수 있습니다.</a:t>
+              <a:t>첫 화면의 “사용법 보기”를 누르면 언제든 처음부터 다시 볼 수 있습니다.</a:t>
             </a:r>
           </a:p>
         </p:txBody>
@@ -6922,7 +6894,7 @@
                 <a:latin typeface="Pretendard"/>
                 <a:ea typeface="Pretendard"/>
               </a:rPr>
-              <a:t>사진 올리기부터 저장까지, 화면 안내를 그대로 따라가면 됩니다</a:t>
+              <a:t>사용법 안내 실제 화면</a:t>
             </a:r>
           </a:p>
         </p:txBody>
@@ -7190,7 +7162,7 @@
                 <a:latin typeface="Pretendard SemiBold"/>
                 <a:ea typeface="Pretendard SemiBold"/>
               </a:rPr>
-              <a:t>제3장</a:t>
+              <a:t>3부</a:t>
             </a:r>
           </a:p>
         </p:txBody>
@@ -7230,7 +7202,7 @@
                 <a:latin typeface="Noto Serif KR"/>
                 <a:ea typeface="Noto Serif KR"/>
               </a:rPr>
-              <a:t>둘이 하나로</a:t>
+              <a:t>두 서비스</a:t>
             </a:r>
           </a:p>
           <a:p>
@@ -7247,7 +7219,7 @@
                 <a:latin typeface="Noto Serif KR"/>
                 <a:ea typeface="Noto Serif KR"/>
               </a:rPr>
-              <a:t>이어지는 순간</a:t>
+              <a:t>연결</a:t>
             </a:r>
           </a:p>
           <a:p>
@@ -7267,7 +7239,7 @@
                 <a:latin typeface="Pretendard"/>
                 <a:ea typeface="Pretendard"/>
               </a:rPr>
-              <a:t>같은 구글 계정, 같은 상품 — 화면 안 단추 하나로 두 서비스가 맞물립니다.</a:t>
+              <a:t>프리캔버스와 검색마스터를 오가며 쓰는 방법입니다.</a:t>
             </a:r>
           </a:p>
         </p:txBody>
@@ -7457,7 +7429,7 @@
                 <a:latin typeface="Pretendard ExtraBold"/>
                 <a:ea typeface="Pretendard ExtraBold"/>
               </a:rPr>
-              <a:t>새로 생긴 연결</a:t>
+              <a:t>두 서비스 연결</a:t>
             </a:r>
           </a:p>
         </p:txBody>
@@ -7490,17 +7462,17 @@
               </a:lnSpc>
             </a:pPr>
             <a:r>
-              <a:rPr sz="2300" b="1" i="0">
+              <a:rPr sz="2200" b="1" i="0">
                 <a:solidFill>
                   <a:srgbClr val="1D2735"/>
                 </a:solidFill>
                 <a:latin typeface="Noto Serif KR"/>
                 <a:ea typeface="Noto Serif KR"/>
               </a:rPr>
-              <a:t>프리캔버스 상단 메뉴에 </a:t>
-            </a:r>
-            <a:r>
-              <a:rPr sz="2300" b="1" i="0">
+              <a:t>프리캔버스 상단 메뉴에서 </a:t>
+            </a:r>
+            <a:r>
+              <a:rPr sz="2200" b="1" i="0">
                 <a:solidFill>
                   <a:srgbClr val="1F5068"/>
                 </a:solidFill>
@@ -7510,14 +7482,14 @@
               <a:t>검색마스터</a:t>
             </a:r>
             <a:r>
-              <a:rPr sz="2300" b="1" i="0">
+              <a:rPr sz="2200" b="1" i="0">
                 <a:solidFill>
                   <a:srgbClr val="1D2735"/>
                 </a:solidFill>
                 <a:latin typeface="Noto Serif KR"/>
                 <a:ea typeface="Noto Serif KR"/>
               </a:rPr>
-              <a:t>가 들어왔습니다.</a:t>
+              <a:t>로 바로 이동합니다.</a:t>
             </a:r>
           </a:p>
         </p:txBody>
@@ -7736,7 +7708,7 @@
                 <a:latin typeface="Noto Serif KR"/>
                 <a:ea typeface="Noto Serif KR"/>
               </a:rPr>
-              <a:t>프리캔버스에서 만들다가</a:t>
+              <a:t>프리캔버스에서 작업하다가</a:t>
             </a:r>
           </a:p>
           <a:p>
@@ -7753,7 +7725,7 @@
                 <a:latin typeface="Pretendard"/>
                 <a:ea typeface="Pretendard"/>
               </a:rPr>
-              <a:t>상세페이지 작업 중 상품명·키워드가 필요해지는 순간이 옵니다.</a:t>
+              <a:t>상세페이지를 만들다 상품명이나 키워드가 필요해지면,</a:t>
             </a:r>
           </a:p>
         </p:txBody>
@@ -7813,7 +7785,7 @@
                 <a:latin typeface="Pretendard ExtraBold"/>
                 <a:ea typeface="Pretendard ExtraBold"/>
               </a:rPr>
-              <a:t>단추 한 번</a:t>
+              <a:t>버튼 한 번</a:t>
             </a:r>
           </a:p>
         </p:txBody>
@@ -7928,7 +7900,7 @@
                 <a:latin typeface="Pretendard"/>
                 <a:ea typeface="Pretendard"/>
               </a:rPr>
-              <a:t>쓰던 구글 계정 그대로 열려, 다시 로그인할 필요가 없습니다.</a:t>
+              <a:t>쓰던 구글 계정 그대로 열립니다. 다시 로그인할 필요가 없습니다.</a:t>
             </a:r>
           </a:p>
         </p:txBody>
@@ -8030,7 +8002,7 @@
                 <a:latin typeface="Pretendard"/>
                 <a:ea typeface="Pretendard"/>
               </a:rPr>
-              <a:t>으로 두 서비스를 오갑니다 — 구독은 서비스별로 따로, 계정은 하나로.</a:t>
+              <a:t>으로 두 서비스를 오갑니다. 구독은 서비스별로 따로 적용됩니다.</a:t>
             </a:r>
           </a:p>
         </p:txBody>
@@ -8282,7 +8254,7 @@
                 <a:latin typeface="Pretendard ExtraBold"/>
                 <a:ea typeface="Pretendard ExtraBold"/>
               </a:rPr>
-              <a:t>셀러의 하루 — 실전 순서</a:t>
+              <a:t>실제 작업 순서</a:t>
             </a:r>
           </a:p>
         </p:txBody>
@@ -8322,17 +8294,7 @@
                 <a:latin typeface="Noto Serif KR"/>
                 <a:ea typeface="Noto Serif KR"/>
               </a:rPr>
-              <a:t>상품 하나가 </a:t>
-            </a:r>
-            <a:r>
-              <a:rPr sz="2300" b="1" i="0">
-                <a:solidFill>
-                  <a:srgbClr val="1F5068"/>
-                </a:solidFill>
-                <a:latin typeface="Noto Serif KR"/>
-                <a:ea typeface="Noto Serif KR"/>
-              </a:rPr>
-              <a:t>등록까지 가는 길</a:t>
+              <a:t>상품 등록, 이 순서로 하면 됩니다.</a:t>
             </a:r>
           </a:p>
         </p:txBody>
@@ -8582,7 +8544,7 @@
                 <a:latin typeface="Pretendard"/>
                 <a:ea typeface="Pretendard"/>
               </a:rPr>
-              <a:t>스마트스토어·1688 상품 주소로 이미지와 상품 정보를 한 번에 담아옵니다.</a:t>
+              <a:t>스마트스토어·1688 상품 주소로 이미지와 상품 정보를 가져옵니다.</a:t>
             </a:r>
           </a:p>
         </p:txBody>
@@ -8815,7 +8777,7 @@
                 <a:latin typeface="Pretendard ExtraBold"/>
                 <a:ea typeface="Pretendard ExtraBold"/>
               </a:rPr>
-              <a:t>상품명·키워드 짓기</a:t>
+              <a:t>상품명·키워드 만들기</a:t>
             </a:r>
           </a:p>
           <a:p>
@@ -8832,7 +8794,7 @@
                 <a:latin typeface="Pretendard"/>
                 <a:ea typeface="Pretendard"/>
               </a:rPr>
-              <a:t>상단 단추로 넘어가 사진과 설명을 넣고, 판매 채널에 맞는 상품명을 완성합니다.</a:t>
+              <a:t>상단 메뉴로 이동해 사진과 설명을 넣고, 판매 채널에 맞는 상품명을 만듭니다.</a:t>
             </a:r>
           </a:p>
         </p:txBody>
@@ -9082,7 +9044,7 @@
                 <a:latin typeface="Pretendard"/>
                 <a:ea typeface="Pretendard"/>
               </a:rPr>
-              <a:t>같은 재료로 상세페이지를 짓고, 1688 영상은 한국어로, 홍보는 카드뉴스로 뽑습니다.</a:t>
+              <a:t>같은 재료로 상세페이지를 만들고, 필요하면 영상 번역과 카드뉴스까지 뽑습니다.</a:t>
             </a:r>
           </a:p>
         </p:txBody>
@@ -9271,7 +9233,7 @@
                 <a:latin typeface="Pretendard ExtraBold"/>
                 <a:ea typeface="Pretendard ExtraBold"/>
               </a:rPr>
-              <a:t>플랫폼에 올리기</a:t>
+              <a:t>플랫폼에 등록</a:t>
             </a:r>
           </a:p>
           <a:p>
@@ -9288,7 +9250,7 @@
                 <a:latin typeface="Pretendard"/>
                 <a:ea typeface="Pretendard"/>
               </a:rPr>
-              <a:t>완성본을 내려받아 그대로 등록합니다. 외주 없이, 하루 안에 끝나는 흐름입니다.</a:t>
+              <a:t>완성본을 내려받아 판매 플랫폼에 그대로 올립니다.</a:t>
             </a:r>
           </a:p>
         </p:txBody>
@@ -9496,7 +9458,7 @@
                 <a:latin typeface="Pretendard ExtraBold"/>
                 <a:ea typeface="Pretendard ExtraBold"/>
               </a:rPr>
-              <a:t>오늘부터</a:t>
+              <a:t>정리</a:t>
             </a:r>
           </a:p>
         </p:txBody>
@@ -9536,7 +9498,7 @@
                 <a:latin typeface="Noto Serif KR"/>
                 <a:ea typeface="Noto Serif KR"/>
               </a:rPr>
-              <a:t>다음에 올릴 그 상품부터,</a:t>
+              <a:t>다음 상품부터</a:t>
             </a:r>
           </a:p>
           <a:p>
@@ -9553,7 +9515,7 @@
                 <a:latin typeface="Noto Serif KR"/>
                 <a:ea typeface="Noto Serif KR"/>
               </a:rPr>
-              <a:t>두 AI에게 맡겨 보세요.</a:t>
+              <a:t>바로 써 보세요.</a:t>
             </a:r>
           </a:p>
         </p:txBody>
@@ -9766,7 +9728,7 @@
                 <a:latin typeface="Pretendard ExtraBold"/>
                 <a:ea typeface="Pretendard ExtraBold"/>
               </a:rPr>
-              <a:t>🎯 발견과 설득, 두 번의 승부</a:t>
+              <a:t>🧭 역할 분담</a:t>
             </a:r>
           </a:p>
           <a:p>
@@ -9783,7 +9745,7 @@
                 <a:latin typeface="Pretendard"/>
                 <a:ea typeface="Pretendard"/>
               </a:rPr>
-              <a:t>검색에 걸리는 이름은 검색마스터가, 사고 싶어지는 모습은 프리캔버스가.</a:t>
+              <a:t>상품명·키워드는 검색마스터, 상세페이지·영상·카드뉴스는 프리캔버스.</a:t>
             </a:r>
           </a:p>
         </p:txBody>
@@ -9881,7 +9843,7 @@
                 <a:latin typeface="Pretendard ExtraBold"/>
                 <a:ea typeface="Pretendard ExtraBold"/>
               </a:rPr>
-              <a:t>✨ 새로 추가된 여섯 가지 기능</a:t>
+              <a:t>✨ 새로 추가된 기능</a:t>
             </a:r>
           </a:p>
           <a:p>
@@ -9898,7 +9860,7 @@
                 <a:latin typeface="Pretendard"/>
                 <a:ea typeface="Pretendard"/>
               </a:rPr>
-              <a:t>설명 입력 · 링크 소싱 · 영상 한국어화 · 상세 편집 · 카드뉴스 · 지우개.</a:t>
+              <a:t>설명 입력 · 링크 불러오기 · 영상 번역 · 상세 편집 · 카드뉴스 · 지우개.</a:t>
             </a:r>
           </a:p>
         </p:txBody>
@@ -10101,7 +10063,7 @@
                 <a:latin typeface="Pretendard ExtraBold"/>
                 <a:ea typeface="Pretendard ExtraBold"/>
               </a:rPr>
-              <a:t>프리캔버스 — 콘텐츠 제작</a:t>
+              <a:t>프리캔버스 — 상세페이지 생성기</a:t>
             </a:r>
           </a:p>
           <a:p>
@@ -10277,7 +10239,7 @@
         </p:nvSpPr>
         <p:spPr>
           <a:xfrm>
-            <a:off x="822960" y="644652"/>
+            <a:off x="822960" y="992124"/>
             <a:ext cx="384048" cy="16459"/>
           </a:xfrm>
           <a:prstGeom prst="rect">
@@ -10321,7 +10283,7 @@
         </p:nvSpPr>
         <p:spPr>
           <a:xfrm>
-            <a:off x="1325880" y="566928"/>
+            <a:off x="1325880" y="914400"/>
             <a:ext cx="8686800" cy="274320"/>
           </a:xfrm>
           <a:prstGeom prst="rect">
@@ -10348,7 +10310,7 @@
                 <a:latin typeface="Pretendard ExtraBold"/>
                 <a:ea typeface="Pretendard ExtraBold"/>
               </a:rPr>
-              <a:t>왜 두 개의 AI인가</a:t>
+              <a:t>먼저, 두 서비스 소개</a:t>
             </a:r>
           </a:p>
         </p:txBody>
@@ -10361,8 +10323,8 @@
         </p:nvSpPr>
         <p:spPr>
           <a:xfrm>
-            <a:off x="822960" y="1005840"/>
-            <a:ext cx="10515600" cy="1463040"/>
+            <a:off x="822960" y="1325880"/>
+            <a:ext cx="10515600" cy="594360"/>
           </a:xfrm>
           <a:prstGeom prst="rect">
             <a:avLst/>
@@ -10377,55 +10339,18 @@
           <a:p>
             <a:pPr algn="l">
               <a:lnSpc>
-                <a:spcPct val="130000"/>
-              </a:lnSpc>
-            </a:pPr>
-            <a:r>
-              <a:rPr sz="2700" b="1" i="0">
+                <a:spcPct val="100000"/>
+              </a:lnSpc>
+            </a:pPr>
+            <a:r>
+              <a:rPr sz="2600" b="1" i="0">
                 <a:solidFill>
                   <a:srgbClr val="1D2735"/>
                 </a:solidFill>
                 <a:latin typeface="Noto Serif KR"/>
                 <a:ea typeface="Noto Serif KR"/>
               </a:rPr>
-              <a:t>상품 하나를 팔려면,</a:t>
-            </a:r>
-          </a:p>
-          <a:p>
-            <a:pPr algn="l">
-              <a:lnSpc>
-                <a:spcPct val="130000"/>
-              </a:lnSpc>
-            </a:pPr>
-            <a:r>
-              <a:rPr sz="2700" b="1" i="0">
-                <a:solidFill>
-                  <a:srgbClr val="1D2735"/>
-                </a:solidFill>
-                <a:latin typeface="Noto Serif KR"/>
-                <a:ea typeface="Noto Serif KR"/>
-              </a:rPr>
-              <a:t>셀러는 </a:t>
-            </a:r>
-            <a:r>
-              <a:rPr sz="2700" b="1" i="0">
-                <a:solidFill>
-                  <a:srgbClr val="1F5068"/>
-                </a:solidFill>
-                <a:latin typeface="Noto Serif KR"/>
-                <a:ea typeface="Noto Serif KR"/>
-              </a:rPr>
-              <a:t>두 번</a:t>
-            </a:r>
-            <a:r>
-              <a:rPr sz="2700" b="1" i="0">
-                <a:solidFill>
-                  <a:srgbClr val="1D2735"/>
-                </a:solidFill>
-                <a:latin typeface="Noto Serif KR"/>
-                <a:ea typeface="Noto Serif KR"/>
-              </a:rPr>
-              <a:t> 이겨야 합니다.</a:t>
+              <a:t>역할이 다른 두 가지 도구입니다.</a:t>
             </a:r>
           </a:p>
         </p:txBody>
@@ -10438,8 +10363,8 @@
         </p:nvSpPr>
         <p:spPr>
           <a:xfrm>
-            <a:off x="822960" y="3063240"/>
-            <a:ext cx="5074920" cy="2377440"/>
+            <a:off x="822960" y="2286000"/>
+            <a:ext cx="5074920" cy="2331720"/>
           </a:xfrm>
           <a:prstGeom prst="roundRect">
             <a:avLst>
@@ -10493,8 +10418,8 @@
         </p:nvSpPr>
         <p:spPr>
           <a:xfrm>
-            <a:off x="1143000" y="3310128"/>
-            <a:ext cx="4480560" cy="685800"/>
+            <a:off x="1143000" y="2560320"/>
+            <a:ext cx="2743200" cy="411480"/>
           </a:xfrm>
           <a:prstGeom prst="rect">
             <a:avLst/>
@@ -10513,28 +10438,88 @@
               </a:lnSpc>
             </a:pPr>
             <a:r>
-              <a:rPr sz="2600" b="0" i="0">
+              <a:rPr sz="1700" b="1" i="0">
                 <a:solidFill>
                   <a:srgbClr val="1D2735"/>
                 </a:solidFill>
-                <a:latin typeface="Pretendard"/>
-                <a:ea typeface="Pretendard"/>
-              </a:rPr>
-              <a:t>🔍</a:t>
-            </a:r>
-          </a:p>
-        </p:txBody>
-      </p:sp>
-      <p:sp>
-        <p:nvSpPr>
-          <p:cNvPr id="9" name="TextBox 8"/>
+                <a:latin typeface="Noto Serif KR"/>
+                <a:ea typeface="Noto Serif KR"/>
+              </a:rPr>
+              <a:t>검색마스터</a:t>
+            </a:r>
+          </a:p>
+        </p:txBody>
+      </p:sp>
+      <p:sp>
+        <p:nvSpPr>
+          <p:cNvPr id="9" name="Rounded Rectangle 8"/>
+          <p:cNvSpPr/>
+          <p:nvPr/>
+        </p:nvSpPr>
+        <p:spPr>
+          <a:xfrm>
+            <a:off x="2834640" y="2578608"/>
+            <a:ext cx="1371600" cy="274320"/>
+          </a:xfrm>
+          <a:prstGeom prst="roundRect">
+            <a:avLst>
+              <a:gd name="adj" fmla="val 50000"/>
+            </a:avLst>
+          </a:prstGeom>
+          <a:solidFill>
+            <a:srgbClr val="EAF1F5"/>
+          </a:solidFill>
+          <a:ln>
+            <a:noFill/>
+          </a:ln>
+          <a:effectLst/>
+        </p:spPr>
+        <p:style>
+          <a:lnRef idx="1">
+            <a:schemeClr val="accent1"/>
+          </a:lnRef>
+          <a:fillRef idx="3">
+            <a:schemeClr val="accent1"/>
+          </a:fillRef>
+          <a:effectRef idx="2">
+            <a:schemeClr val="accent1"/>
+          </a:effectRef>
+          <a:fontRef idx="minor">
+            <a:schemeClr val="lt1"/>
+          </a:fontRef>
+        </p:style>
+        <p:txBody>
+          <a:bodyPr rtlCol="0" anchor="ctr" wrap="none" lIns="0" rIns="0" tIns="0" bIns="0"/>
+          <a:lstStyle/>
+          <a:p>
+            <a:pPr algn="ctr">
+              <a:lnSpc>
+                <a:spcPct val="100000"/>
+              </a:lnSpc>
+            </a:pPr>
+            <a:r>
+              <a:rPr sz="900" b="0" i="0">
+                <a:solidFill>
+                  <a:srgbClr val="1F5068"/>
+                </a:solidFill>
+                <a:latin typeface="Pretendard SemiBold"/>
+                <a:ea typeface="Pretendard SemiBold"/>
+              </a:rPr>
+              <a:t>상품명 생성기</a:t>
+            </a:r>
+          </a:p>
+        </p:txBody>
+      </p:sp>
+      <p:sp>
+        <p:nvSpPr>
+          <p:cNvPr id="10" name="TextBox 9"/>
           <p:cNvSpPr txBox="1"/>
           <p:nvPr/>
         </p:nvSpPr>
         <p:spPr>
           <a:xfrm>
-            <a:off x="1143000" y="4041648"/>
-            <a:ext cx="4480560" cy="1280160"/>
+            <a:off x="1143000" y="3127248"/>
+            <a:ext cx="4434840" cy="1188720"/>
           </a:xfrm>
           <a:prstGeom prst="rect">
             <a:avLst/>
@@ -10549,50 +10534,13 @@
           <a:p>
             <a:pPr algn="l">
               <a:lnSpc>
-                <a:spcPct val="100000"/>
-              </a:lnSpc>
-              <a:spcAft>
-                <a:spcPts val="200"/>
-              </a:spcAft>
-            </a:pPr>
-            <a:r>
-              <a:rPr sz="1700" b="1" i="0">
-                <a:solidFill>
-                  <a:srgbClr val="1D2735"/>
-                </a:solidFill>
-                <a:latin typeface="Noto Serif KR"/>
-                <a:ea typeface="Noto Serif KR"/>
-              </a:rPr>
-              <a:t>발견의 승부</a:t>
-            </a:r>
-          </a:p>
-          <a:p>
-            <a:pPr algn="l">
-              <a:lnSpc>
-                <a:spcPct val="100000"/>
+                <a:spcPct val="145000"/>
               </a:lnSpc>
               <a:spcAft>
                 <a:spcPts val="800"/>
               </a:spcAft>
             </a:pPr>
             <a:r>
-              <a:rPr sz="1000" b="0" i="0">
-                <a:solidFill>
-                  <a:srgbClr val="455569"/>
-                </a:solidFill>
-                <a:latin typeface="Pretendard SemiBold"/>
-                <a:ea typeface="Pretendard SemiBold"/>
-              </a:rPr>
-              <a:t>검색 결과에 노출되기</a:t>
-            </a:r>
-          </a:p>
-          <a:p>
-            <a:pPr algn="l">
-              <a:lnSpc>
-                <a:spcPct val="135000"/>
-              </a:lnSpc>
-            </a:pPr>
-            <a:r>
               <a:rPr sz="1150" b="0" i="0">
                 <a:solidFill>
                   <a:srgbClr val="28364A"/>
@@ -10600,58 +10548,38 @@
                 <a:latin typeface="Pretendard"/>
                 <a:ea typeface="Pretendard"/>
               </a:rPr>
-              <a:t>고객이 검색창에 친 바로 그 말에 내 상품이 걸려야 합니다.</a:t>
+              <a:t>상품 사진과 설명을 읽고, 검색 노출에 맞춘 상품명과 키워드를 만들어 줍니다. 판매 채널에 따라 이름 짓는 기준이 달라집니다.</a:t>
             </a:r>
           </a:p>
           <a:p>
             <a:pPr algn="l">
               <a:lnSpc>
-                <a:spcPct val="135000"/>
-              </a:lnSpc>
-            </a:pPr>
-            <a:r>
-              <a:rPr sz="1150" b="0" i="0">
-                <a:solidFill>
-                  <a:srgbClr val="28364A"/>
+                <a:spcPct val="100000"/>
+              </a:lnSpc>
+            </a:pPr>
+            <a:r>
+              <a:rPr sz="1000" b="0" i="0">
+                <a:solidFill>
+                  <a:srgbClr val="6B7A8D"/>
                 </a:solidFill>
                 <a:latin typeface="Pretendard"/>
                 <a:ea typeface="Pretendard"/>
               </a:rPr>
-              <a:t>이 싸움은 </a:t>
-            </a:r>
-            <a:r>
-              <a:rPr sz="1150" b="0" i="0">
-                <a:solidFill>
-                  <a:srgbClr val="28364A"/>
-                </a:solidFill>
-                <a:latin typeface="Pretendard ExtraBold"/>
-                <a:ea typeface="Pretendard ExtraBold"/>
-              </a:rPr>
-              <a:t>검색마스터</a:t>
-            </a:r>
-            <a:r>
-              <a:rPr sz="1150" b="0" i="0">
-                <a:solidFill>
-                  <a:srgbClr val="28364A"/>
-                </a:solidFill>
-                <a:latin typeface="Pretendard"/>
-                <a:ea typeface="Pretendard"/>
-              </a:rPr>
-              <a:t>가 맡습니다.</a:t>
-            </a:r>
-          </a:p>
-        </p:txBody>
-      </p:sp>
-      <p:sp>
-        <p:nvSpPr>
-          <p:cNvPr id="10" name="Rounded Rectangle 9"/>
+              <a:t>네이버쇼핑 · 쿠팡 · 일반몰</a:t>
+            </a:r>
+          </a:p>
+        </p:txBody>
+      </p:sp>
+      <p:sp>
+        <p:nvSpPr>
+          <p:cNvPr id="11" name="Rounded Rectangle 10"/>
           <p:cNvSpPr/>
           <p:nvPr/>
         </p:nvSpPr>
         <p:spPr>
           <a:xfrm>
-            <a:off x="6291072" y="3063240"/>
-            <a:ext cx="5074920" cy="2377440"/>
+            <a:off x="6291072" y="2286000"/>
+            <a:ext cx="5074920" cy="2331720"/>
           </a:xfrm>
           <a:prstGeom prst="roundRect">
             <a:avLst>
@@ -10659,11 +10587,11 @@
             </a:avLst>
           </a:prstGeom>
           <a:solidFill>
-            <a:srgbClr val="FFFDF7"/>
+            <a:srgbClr val="FFFFFF"/>
           </a:solidFill>
           <a:ln w="9525">
             <a:solidFill>
-              <a:srgbClr val="DAD2C6"/>
+              <a:srgbClr val="EBE5DB"/>
             </a:solidFill>
           </a:ln>
           <a:effectLst/>
@@ -10699,14 +10627,14 @@
       </p:sp>
       <p:sp>
         <p:nvSpPr>
-          <p:cNvPr id="11" name="TextBox 10"/>
+          <p:cNvPr id="12" name="TextBox 11"/>
           <p:cNvSpPr txBox="1"/>
           <p:nvPr/>
         </p:nvSpPr>
         <p:spPr>
           <a:xfrm>
-            <a:off x="6611112" y="3310128"/>
-            <a:ext cx="4480560" cy="685800"/>
+            <a:off x="6611112" y="2560320"/>
+            <a:ext cx="2743200" cy="411480"/>
           </a:xfrm>
           <a:prstGeom prst="rect">
             <a:avLst/>
@@ -10725,28 +10653,88 @@
               </a:lnSpc>
             </a:pPr>
             <a:r>
-              <a:rPr sz="2600" b="0" i="0">
+              <a:rPr sz="1700" b="1" i="0">
                 <a:solidFill>
                   <a:srgbClr val="1D2735"/>
                 </a:solidFill>
-                <a:latin typeface="Pretendard"/>
-                <a:ea typeface="Pretendard"/>
-              </a:rPr>
-              <a:t>🛒</a:t>
-            </a:r>
-          </a:p>
-        </p:txBody>
-      </p:sp>
-      <p:sp>
-        <p:nvSpPr>
-          <p:cNvPr id="12" name="TextBox 11"/>
+                <a:latin typeface="Noto Serif KR"/>
+                <a:ea typeface="Noto Serif KR"/>
+              </a:rPr>
+              <a:t>프리캔버스 AI</a:t>
+            </a:r>
+          </a:p>
+        </p:txBody>
+      </p:sp>
+      <p:sp>
+        <p:nvSpPr>
+          <p:cNvPr id="13" name="Rounded Rectangle 12"/>
+          <p:cNvSpPr/>
+          <p:nvPr/>
+        </p:nvSpPr>
+        <p:spPr>
+          <a:xfrm>
+            <a:off x="8577072" y="2578608"/>
+            <a:ext cx="1371600" cy="274320"/>
+          </a:xfrm>
+          <a:prstGeom prst="roundRect">
+            <a:avLst>
+              <a:gd name="adj" fmla="val 50000"/>
+            </a:avLst>
+          </a:prstGeom>
+          <a:solidFill>
+            <a:srgbClr val="F6EFE5"/>
+          </a:solidFill>
+          <a:ln>
+            <a:noFill/>
+          </a:ln>
+          <a:effectLst/>
+        </p:spPr>
+        <p:style>
+          <a:lnRef idx="1">
+            <a:schemeClr val="accent1"/>
+          </a:lnRef>
+          <a:fillRef idx="3">
+            <a:schemeClr val="accent1"/>
+          </a:fillRef>
+          <a:effectRef idx="2">
+            <a:schemeClr val="accent1"/>
+          </a:effectRef>
+          <a:fontRef idx="minor">
+            <a:schemeClr val="lt1"/>
+          </a:fontRef>
+        </p:style>
+        <p:txBody>
+          <a:bodyPr rtlCol="0" anchor="ctr" wrap="none" lIns="0" rIns="0" tIns="0" bIns="0"/>
+          <a:lstStyle/>
+          <a:p>
+            <a:pPr algn="ctr">
+              <a:lnSpc>
+                <a:spcPct val="100000"/>
+              </a:lnSpc>
+            </a:pPr>
+            <a:r>
+              <a:rPr sz="900" b="0" i="0">
+                <a:solidFill>
+                  <a:srgbClr val="9A7440"/>
+                </a:solidFill>
+                <a:latin typeface="Pretendard SemiBold"/>
+                <a:ea typeface="Pretendard SemiBold"/>
+              </a:rPr>
+              <a:t>상세페이지 생성기</a:t>
+            </a:r>
+          </a:p>
+        </p:txBody>
+      </p:sp>
+      <p:sp>
+        <p:nvSpPr>
+          <p:cNvPr id="14" name="TextBox 13"/>
           <p:cNvSpPr txBox="1"/>
           <p:nvPr/>
         </p:nvSpPr>
         <p:spPr>
           <a:xfrm>
-            <a:off x="6611112" y="4041648"/>
-            <a:ext cx="4480560" cy="1280160"/>
+            <a:off x="6611112" y="3127248"/>
+            <a:ext cx="4434840" cy="1188720"/>
           </a:xfrm>
           <a:prstGeom prst="rect">
             <a:avLst/>
@@ -10761,50 +10749,13 @@
           <a:p>
             <a:pPr algn="l">
               <a:lnSpc>
-                <a:spcPct val="100000"/>
-              </a:lnSpc>
-              <a:spcAft>
-                <a:spcPts val="200"/>
-              </a:spcAft>
-            </a:pPr>
-            <a:r>
-              <a:rPr sz="1700" b="1" i="0">
-                <a:solidFill>
-                  <a:srgbClr val="1D2735"/>
-                </a:solidFill>
-                <a:latin typeface="Noto Serif KR"/>
-                <a:ea typeface="Noto Serif KR"/>
-              </a:rPr>
-              <a:t>설득의 승부</a:t>
-            </a:r>
-          </a:p>
-          <a:p>
-            <a:pPr algn="l">
-              <a:lnSpc>
-                <a:spcPct val="100000"/>
+                <a:spcPct val="145000"/>
               </a:lnSpc>
               <a:spcAft>
                 <a:spcPts val="800"/>
               </a:spcAft>
             </a:pPr>
             <a:r>
-              <a:rPr sz="1000" b="0" i="0">
-                <a:solidFill>
-                  <a:srgbClr val="455569"/>
-                </a:solidFill>
-                <a:latin typeface="Pretendard SemiBold"/>
-                <a:ea typeface="Pretendard SemiBold"/>
-              </a:rPr>
-              <a:t>클릭을 구매로 바꾸기</a:t>
-            </a:r>
-          </a:p>
-          <a:p>
-            <a:pPr algn="l">
-              <a:lnSpc>
-                <a:spcPct val="135000"/>
-              </a:lnSpc>
-            </a:pPr>
-            <a:r>
               <a:rPr sz="1150" b="0" i="0">
                 <a:solidFill>
                   <a:srgbClr val="28364A"/>
@@ -10812,58 +10763,38 @@
                 <a:latin typeface="Pretendard"/>
                 <a:ea typeface="Pretendard"/>
               </a:rPr>
-              <a:t>들어온 고객이 스크롤을 내리다 결제 버튼을 누르게 해야 합니다.</a:t>
+              <a:t>제품 사진으로 상세페이지를 만들고, 1688 영상 번역·카드뉴스·상품 썸네일까지 한 곳에서 처리합니다.</a:t>
             </a:r>
           </a:p>
           <a:p>
             <a:pPr algn="l">
               <a:lnSpc>
-                <a:spcPct val="135000"/>
-              </a:lnSpc>
-            </a:pPr>
-            <a:r>
-              <a:rPr sz="1150" b="0" i="0">
-                <a:solidFill>
-                  <a:srgbClr val="28364A"/>
+                <a:spcPct val="100000"/>
+              </a:lnSpc>
+            </a:pPr>
+            <a:r>
+              <a:rPr sz="1000" b="0" i="0">
+                <a:solidFill>
+                  <a:srgbClr val="6B7A8D"/>
                 </a:solidFill>
                 <a:latin typeface="Pretendard"/>
                 <a:ea typeface="Pretendard"/>
               </a:rPr>
-              <a:t>이 싸움은 </a:t>
-            </a:r>
-            <a:r>
-              <a:rPr sz="1150" b="0" i="0">
-                <a:solidFill>
-                  <a:srgbClr val="28364A"/>
-                </a:solidFill>
-                <a:latin typeface="Pretendard ExtraBold"/>
-                <a:ea typeface="Pretendard ExtraBold"/>
-              </a:rPr>
-              <a:t>프리캔버스</a:t>
-            </a:r>
-            <a:r>
-              <a:rPr sz="1150" b="0" i="0">
-                <a:solidFill>
-                  <a:srgbClr val="28364A"/>
-                </a:solidFill>
-                <a:latin typeface="Pretendard"/>
-                <a:ea typeface="Pretendard"/>
-              </a:rPr>
-              <a:t>가 맡습니다.</a:t>
-            </a:r>
-          </a:p>
-        </p:txBody>
-      </p:sp>
-      <p:sp>
-        <p:nvSpPr>
-          <p:cNvPr id="13" name="TextBox 12"/>
+              <a:t>상세페이지 · 영상 번역 · 카드뉴스 · 썸네일</a:t>
+            </a:r>
+          </a:p>
+        </p:txBody>
+      </p:sp>
+      <p:sp>
+        <p:nvSpPr>
+          <p:cNvPr id="15" name="TextBox 14"/>
           <p:cNvSpPr txBox="1"/>
           <p:nvPr/>
         </p:nvSpPr>
         <p:spPr>
           <a:xfrm>
-            <a:off x="1463040" y="5760720"/>
-            <a:ext cx="9235440" cy="365760"/>
+            <a:off x="1463040" y="5074920"/>
+            <a:ext cx="9235440" cy="685800"/>
           </a:xfrm>
           <a:prstGeom prst="rect">
             <a:avLst/>
@@ -10878,7 +10809,7 @@
           <a:p>
             <a:pPr algn="ctr">
               <a:lnSpc>
-                <a:spcPct val="100000"/>
+                <a:spcPct val="150000"/>
               </a:lnSpc>
             </a:pPr>
             <a:r>
@@ -10889,7 +10820,7 @@
                 <a:latin typeface="Pretendard"/>
                 <a:ea typeface="Pretendard"/>
               </a:rPr>
-              <a:t>아무리 좋은 물건도 </a:t>
+              <a:t>상품명은 </a:t>
             </a:r>
             <a:r>
               <a:rPr sz="1250" b="0" i="0">
@@ -10899,7 +10830,7 @@
                 <a:latin typeface="Pretendard ExtraBold"/>
                 <a:ea typeface="Pretendard ExtraBold"/>
               </a:rPr>
-              <a:t>보이지 않으면</a:t>
+              <a:t>검색 노출</a:t>
             </a:r>
             <a:r>
               <a:rPr sz="1250" b="0" i="0">
@@ -10909,7 +10840,7 @@
                 <a:latin typeface="Pretendard"/>
                 <a:ea typeface="Pretendard"/>
               </a:rPr>
-              <a:t> 없는 상품이고, </a:t>
+              <a:t>을, 상세페이지는 </a:t>
             </a:r>
             <a:r>
               <a:rPr sz="1250" b="0" i="0">
@@ -10919,7 +10850,7 @@
                 <a:latin typeface="Pretendard ExtraBold"/>
                 <a:ea typeface="Pretendard ExtraBold"/>
               </a:rPr>
-              <a:t>마음을 움직이지 못하면</a:t>
+              <a:t>구매 전환</a:t>
             </a:r>
             <a:r>
               <a:rPr sz="1250" b="0" i="0">
@@ -10929,14 +10860,31 @@
                 <a:latin typeface="Pretendard"/>
                 <a:ea typeface="Pretendard"/>
               </a:rPr>
-              <a:t> 스쳐 가는 상품입니다.</a:t>
-            </a:r>
-          </a:p>
-        </p:txBody>
-      </p:sp>
-      <p:sp>
-        <p:nvSpPr>
-          <p:cNvPr id="14" name="Rounded Rectangle 13"/>
+              <a:t>을 좌우합니다.</a:t>
+            </a:r>
+          </a:p>
+          <a:p>
+            <a:pPr algn="ctr">
+              <a:lnSpc>
+                <a:spcPct val="150000"/>
+              </a:lnSpc>
+            </a:pPr>
+            <a:r>
+              <a:rPr sz="1250" b="0" i="0">
+                <a:solidFill>
+                  <a:srgbClr val="28364A"/>
+                </a:solidFill>
+                <a:latin typeface="Pretendard"/>
+                <a:ea typeface="Pretendard"/>
+              </a:rPr>
+              <a:t>두 도구는 같은 구글 계정으로 이어져 있습니다.</a:t>
+            </a:r>
+          </a:p>
+        </p:txBody>
+      </p:sp>
+      <p:sp>
+        <p:nvSpPr>
+          <p:cNvPr id="16" name="Rounded Rectangle 15"/>
           <p:cNvSpPr/>
           <p:nvPr/>
         </p:nvSpPr>
@@ -11181,7 +11129,7 @@
                 <a:latin typeface="Pretendard ExtraBold"/>
                 <a:ea typeface="Pretendard ExtraBold"/>
               </a:rPr>
-              <a:t>한눈에 보기</a:t>
+              <a:t>함께 쓰면</a:t>
             </a:r>
           </a:p>
         </p:txBody>
@@ -11214,14 +11162,14 @@
               </a:lnSpc>
             </a:pPr>
             <a:r>
-              <a:rPr sz="2700" b="1" i="0">
+              <a:rPr sz="2600" b="1" i="0">
                 <a:solidFill>
                   <a:srgbClr val="1D2735"/>
                 </a:solidFill>
                 <a:latin typeface="Noto Serif KR"/>
                 <a:ea typeface="Noto Serif KR"/>
               </a:rPr>
-              <a:t>따로 쓰는 두 개의 앱이 아니라,</a:t>
+              <a:t>검색마스터로 이름을 만들고,</a:t>
             </a:r>
           </a:p>
           <a:p>
@@ -11231,34 +11179,24 @@
               </a:lnSpc>
             </a:pPr>
             <a:r>
-              <a:rPr sz="2700" b="1" i="0">
+              <a:rPr sz="2600" b="1" i="0">
                 <a:solidFill>
                   <a:srgbClr val="1D2735"/>
                 </a:solidFill>
                 <a:latin typeface="Noto Serif KR"/>
                 <a:ea typeface="Noto Serif KR"/>
               </a:rPr>
-              <a:t>하나로 </a:t>
-            </a:r>
-            <a:r>
-              <a:rPr sz="2700" b="1" i="0">
+              <a:t>프리캔버스로 </a:t>
+            </a:r>
+            <a:r>
+              <a:rPr sz="2600" b="1" i="0">
                 <a:solidFill>
                   <a:srgbClr val="1F5068"/>
                 </a:solidFill>
                 <a:latin typeface="Noto Serif KR"/>
                 <a:ea typeface="Noto Serif KR"/>
               </a:rPr>
-              <a:t>이어지는 한 벌</a:t>
-            </a:r>
-            <a:r>
-              <a:rPr sz="2700" b="1" i="0">
-                <a:solidFill>
-                  <a:srgbClr val="1D2735"/>
-                </a:solidFill>
-                <a:latin typeface="Noto Serif KR"/>
-                <a:ea typeface="Noto Serif KR"/>
-              </a:rPr>
-              <a:t>의 도구입니다.</a:t>
+              <a:t>페이지를 만듭니다.</a:t>
             </a:r>
           </a:p>
         </p:txBody>
@@ -11446,10 +11384,20 @@
                 <a:solidFill>
                   <a:srgbClr val="28364A"/>
                 </a:solidFill>
+                <a:latin typeface="Pretendard"/>
+                <a:ea typeface="Pretendard"/>
+              </a:rPr>
+              <a:t>오늘 소개할 내용은 </a:t>
+            </a:r>
+            <a:r>
+              <a:rPr sz="1250" b="0" i="0">
+                <a:solidFill>
+                  <a:srgbClr val="28364A"/>
+                </a:solidFill>
                 <a:latin typeface="Pretendard ExtraBold"/>
                 <a:ea typeface="Pretendard ExtraBold"/>
               </a:rPr>
-              <a:t>검색마스터</a:t>
+              <a:t>최근 새로 추가된 기능들</a:t>
             </a:r>
             <a:r>
               <a:rPr sz="1250" b="0" i="0">
@@ -11459,104 +11407,7 @@
                 <a:latin typeface="Pretendard"/>
                 <a:ea typeface="Pretendard"/>
               </a:rPr>
-              <a:t>가 </a:t>
-            </a:r>
-            <a:r>
-              <a:rPr sz="1250" b="0" i="0">
-                <a:solidFill>
-                  <a:srgbClr val="28364A"/>
-                </a:solidFill>
-                <a:latin typeface="Pretendard ExtraBold"/>
-                <a:ea typeface="Pretendard ExtraBold"/>
-              </a:rPr>
-              <a:t>이름</a:t>
-            </a:r>
-            <a:r>
-              <a:rPr sz="1250" b="0" i="0">
-                <a:solidFill>
-                  <a:srgbClr val="28364A"/>
-                </a:solidFill>
-                <a:latin typeface="Pretendard"/>
-                <a:ea typeface="Pretendard"/>
-              </a:rPr>
-              <a:t>을 짓고, </a:t>
-            </a:r>
-            <a:r>
-              <a:rPr sz="1250" b="0" i="0">
-                <a:solidFill>
-                  <a:srgbClr val="28364A"/>
-                </a:solidFill>
-                <a:latin typeface="Pretendard ExtraBold"/>
-                <a:ea typeface="Pretendard ExtraBold"/>
-              </a:rPr>
-              <a:t>프리캔버스</a:t>
-            </a:r>
-            <a:r>
-              <a:rPr sz="1250" b="0" i="0">
-                <a:solidFill>
-                  <a:srgbClr val="28364A"/>
-                </a:solidFill>
-                <a:latin typeface="Pretendard"/>
-                <a:ea typeface="Pretendard"/>
-              </a:rPr>
-              <a:t>가 </a:t>
-            </a:r>
-            <a:r>
-              <a:rPr sz="1250" b="0" i="0">
-                <a:solidFill>
-                  <a:srgbClr val="28364A"/>
-                </a:solidFill>
-                <a:latin typeface="Pretendard ExtraBold"/>
-                <a:ea typeface="Pretendard ExtraBold"/>
-              </a:rPr>
-              <a:t>모습</a:t>
-            </a:r>
-            <a:r>
-              <a:rPr sz="1250" b="0" i="0">
-                <a:solidFill>
-                  <a:srgbClr val="28364A"/>
-                </a:solidFill>
-                <a:latin typeface="Pretendard"/>
-                <a:ea typeface="Pretendard"/>
-              </a:rPr>
-              <a:t>을 만듭니다.</a:t>
-            </a:r>
-          </a:p>
-          <a:p>
-            <a:pPr algn="ctr">
-              <a:lnSpc>
-                <a:spcPct val="150000"/>
-              </a:lnSpc>
-            </a:pPr>
-            <a:r>
-              <a:rPr sz="1250" b="0" i="0">
-                <a:solidFill>
-                  <a:srgbClr val="28364A"/>
-                </a:solidFill>
-                <a:latin typeface="Pretendard"/>
-                <a:ea typeface="Pretendard"/>
-              </a:rPr>
-              <a:t>오늘은 </a:t>
-            </a:r>
-            <a:r>
-              <a:rPr sz="1250" b="0" i="0">
-                <a:solidFill>
-                  <a:srgbClr val="7D5E33"/>
-                </a:solidFill>
-                <a:latin typeface="Pretendard ExtraBold"/>
-                <a:ea typeface="Pretendard ExtraBold"/>
-              </a:rPr>
-              <a:t>최근 새로 추가된 기능들</a:t>
-            </a:r>
-            <a:r>
-              <a:rPr sz="1250" b="0" i="0">
-                <a:solidFill>
-                  <a:srgbClr val="28364A"/>
-                </a:solidFill>
-                <a:latin typeface="Pretendard"/>
-                <a:ea typeface="Pretendard"/>
-              </a:rPr>
-              <a:t>을 실제 화면으로 보여드립니다.</a:t>
+              <a:t>입니다. 전부 실제 화면으로 보여드립니다.</a:t>
             </a:r>
           </a:p>
         </p:txBody>
@@ -11824,7 +11675,7 @@
                 <a:latin typeface="Pretendard SemiBold"/>
                 <a:ea typeface="Pretendard SemiBold"/>
               </a:rPr>
-              <a:t>제1장</a:t>
+              <a:t>1부</a:t>
             </a:r>
           </a:p>
         </p:txBody>
@@ -11864,7 +11715,7 @@
                 <a:latin typeface="Noto Serif KR"/>
                 <a:ea typeface="Noto Serif KR"/>
               </a:rPr>
-              <a:t>검색에 걸리는</a:t>
+              <a:t>검색마스터</a:t>
             </a:r>
           </a:p>
           <a:p>
@@ -11881,7 +11732,7 @@
                 <a:latin typeface="Noto Serif KR"/>
                 <a:ea typeface="Noto Serif KR"/>
               </a:rPr>
-              <a:t>이름 짓기</a:t>
+              <a:t>새 기능</a:t>
             </a:r>
           </a:p>
           <a:p>
@@ -11901,7 +11752,7 @@
                 <a:latin typeface="Pretendard"/>
                 <a:ea typeface="Pretendard"/>
               </a:rPr>
-              <a:t>검색마스터 — 사진 한 장과 설명 한 줄로, 검색에 닿는 상품명을 완성합니다.</a:t>
+              <a:t>상품명 생성기에 추가된 기능을 소개합니다.</a:t>
             </a:r>
           </a:p>
         </p:txBody>
@@ -12091,7 +11942,7 @@
                 <a:latin typeface="Pretendard ExtraBold"/>
                 <a:ea typeface="Pretendard ExtraBold"/>
               </a:rPr>
-              <a:t>검색마스터 — 새로워진 것</a:t>
+              <a:t>검색마스터 새 기능</a:t>
             </a:r>
           </a:p>
         </p:txBody>
@@ -12104,8 +11955,8 @@
         </p:nvSpPr>
         <p:spPr>
           <a:xfrm>
-            <a:off x="822960" y="1207008"/>
-            <a:ext cx="4937760" cy="1508760"/>
+            <a:off x="822960" y="1234440"/>
+            <a:ext cx="4937760" cy="1280160"/>
           </a:xfrm>
           <a:prstGeom prst="rect">
             <a:avLst/>
@@ -12120,55 +11971,38 @@
           <a:p>
             <a:pPr algn="l">
               <a:lnSpc>
-                <a:spcPct val="132000"/>
-              </a:lnSpc>
-            </a:pPr>
-            <a:r>
-              <a:rPr sz="2200" b="1" i="0">
+                <a:spcPct val="130000"/>
+              </a:lnSpc>
+            </a:pPr>
+            <a:r>
+              <a:rPr sz="2400" b="1" i="0">
                 <a:solidFill>
                   <a:srgbClr val="1D2735"/>
                 </a:solidFill>
                 <a:latin typeface="Noto Serif KR"/>
                 <a:ea typeface="Noto Serif KR"/>
               </a:rPr>
-              <a:t>이제 </a:t>
-            </a:r>
-            <a:r>
-              <a:rPr sz="2200" b="1" i="0">
-                <a:solidFill>
-                  <a:srgbClr val="1F5068"/>
-                </a:solidFill>
-                <a:latin typeface="Noto Serif KR"/>
-                <a:ea typeface="Noto Serif KR"/>
-              </a:rPr>
-              <a:t>사진과 설명을</a:t>
+              <a:t>상품 설명 입력</a:t>
             </a:r>
           </a:p>
           <a:p>
             <a:pPr algn="l">
               <a:lnSpc>
-                <a:spcPct val="132000"/>
-              </a:lnSpc>
-            </a:pPr>
-            <a:r>
-              <a:rPr sz="2200" b="1" i="0">
-                <a:solidFill>
-                  <a:srgbClr val="1F5068"/>
-                </a:solidFill>
-                <a:latin typeface="Noto Serif KR"/>
-                <a:ea typeface="Noto Serif KR"/>
-              </a:rPr>
-              <a:t>함께</a:t>
-            </a:r>
-            <a:r>
-              <a:rPr sz="2200" b="1" i="0">
-                <a:solidFill>
-                  <a:srgbClr val="1D2735"/>
-                </a:solidFill>
-                <a:latin typeface="Noto Serif KR"/>
-                <a:ea typeface="Noto Serif KR"/>
-              </a:rPr>
-              <a:t> 읽습니다.</a:t>
+                <a:spcPct val="140000"/>
+              </a:lnSpc>
+              <a:spcBef>
+                <a:spcPts val="800"/>
+              </a:spcBef>
+            </a:pPr>
+            <a:r>
+              <a:rPr sz="1200" b="0" i="0">
+                <a:solidFill>
+                  <a:srgbClr val="455569"/>
+                </a:solidFill>
+                <a:latin typeface="Pretendard"/>
+                <a:ea typeface="Pretendard"/>
+              </a:rPr>
+              <a:t>사진과 함께 상품 설명을 입력하면, 상품명이 눈에 띄게 정확해집니다.</a:t>
             </a:r>
           </a:p>
         </p:txBody>
@@ -12181,7 +12015,7 @@
         </p:nvSpPr>
         <p:spPr>
           <a:xfrm>
-            <a:off x="822960" y="2880360"/>
+            <a:off x="822960" y="2743200"/>
             <a:ext cx="502920" cy="457200"/>
           </a:xfrm>
           <a:prstGeom prst="rect">
@@ -12221,7 +12055,7 @@
         </p:nvSpPr>
         <p:spPr>
           <a:xfrm>
-            <a:off x="1389888" y="2871216"/>
+            <a:off x="1389888" y="2734056"/>
             <a:ext cx="4297680" cy="960120"/>
           </a:xfrm>
           <a:prstGeom prst="rect">
@@ -12268,7 +12102,7 @@
                 <a:latin typeface="Pretendard"/>
                 <a:ea typeface="Pretendard"/>
               </a:rPr>
-              <a:t>“책상 위에 놓는 무선 충전 겸용 스탠드”처럼 한 줄만 보태면, 사진만으로는 놓치기 쉬운 재질과 용도까지 상품명에 정확히 담깁니다.</a:t>
+              <a:t>“책상 위에 놓는 무선 충전 겸용 스탠드”처럼 한 줄만 적으면, 사진만으로는 놓치기 쉬운 재질과 용도까지 상품명에 담깁니다.</a:t>
             </a:r>
           </a:p>
         </p:txBody>
@@ -12281,7 +12115,7 @@
         </p:nvSpPr>
         <p:spPr>
           <a:xfrm>
-            <a:off x="822960" y="3877056"/>
+            <a:off x="822960" y="3739896"/>
             <a:ext cx="4846320" cy="10972"/>
           </a:xfrm>
           <a:prstGeom prst="rect">
@@ -12325,7 +12159,7 @@
         </p:nvSpPr>
         <p:spPr>
           <a:xfrm>
-            <a:off x="822960" y="3959352"/>
+            <a:off x="822960" y="3822191"/>
             <a:ext cx="502920" cy="457200"/>
           </a:xfrm>
           <a:prstGeom prst="rect">
@@ -12365,7 +12199,7 @@
         </p:nvSpPr>
         <p:spPr>
           <a:xfrm>
-            <a:off x="1389888" y="3950208"/>
+            <a:off x="1389888" y="3813048"/>
             <a:ext cx="4297680" cy="960120"/>
           </a:xfrm>
           <a:prstGeom prst="rect">
@@ -12395,7 +12229,7 @@
                 <a:latin typeface="Pretendard ExtraBold"/>
                 <a:ea typeface="Pretendard ExtraBold"/>
               </a:rPr>
-              <a:t>판매 채널별 이름 전략</a:t>
+              <a:t>판매 채널별 상품명</a:t>
             </a:r>
           </a:p>
           <a:p>
@@ -12412,7 +12246,7 @@
                 <a:latin typeface="Pretendard"/>
                 <a:ea typeface="Pretendard"/>
               </a:rPr>
-              <a:t>네이버쇼핑은 검색 노출 폭, 쿠팡은 구매 판단 키워드, 일반몰은 가독성 — 채널을 고르면 그 문법대로 짓습니다.</a:t>
+              <a:t>네이버쇼핑은 검색 노출 폭, 쿠팡은 구매 판단 키워드, 일반몰은 가독성 — 채널을 고르면 그에 맞춰 짓습니다.</a:t>
             </a:r>
           </a:p>
         </p:txBody>
@@ -12425,7 +12259,7 @@
         </p:nvSpPr>
         <p:spPr>
           <a:xfrm>
-            <a:off x="822960" y="4956048"/>
+            <a:off x="822960" y="4818888"/>
             <a:ext cx="4846320" cy="10972"/>
           </a:xfrm>
           <a:prstGeom prst="rect">
@@ -12469,7 +12303,7 @@
         </p:nvSpPr>
         <p:spPr>
           <a:xfrm>
-            <a:off x="822960" y="5038344"/>
+            <a:off x="822960" y="4901183"/>
             <a:ext cx="502920" cy="457200"/>
           </a:xfrm>
           <a:prstGeom prst="rect">
@@ -12509,7 +12343,7 @@
         </p:nvSpPr>
         <p:spPr>
           <a:xfrm>
-            <a:off x="1389888" y="5029200"/>
+            <a:off x="1389888" y="4892040"/>
             <a:ext cx="4297680" cy="960120"/>
           </a:xfrm>
           <a:prstGeom prst="rect">
@@ -12539,7 +12373,7 @@
                 <a:latin typeface="Pretendard ExtraBold"/>
                 <a:ea typeface="Pretendard ExtraBold"/>
               </a:rPr>
-              <a:t>기다림 없는 화면</a:t>
+              <a:t>업로드·생성 화면 개선</a:t>
             </a:r>
           </a:p>
           <a:p>
@@ -12556,7 +12390,7 @@
                 <a:latin typeface="Pretendard"/>
                 <a:ea typeface="Pretendard"/>
               </a:rPr>
-              <a:t>사진을 올리면 바로 보이고, 생성 과정이 화면에 그대로 표시되어 기다림이 지루하지 않습니다.</a:t>
+              <a:t>사진을 올리면 바로 보이고, 생성 진행 상태도 화면에 그대로 표시됩니다.</a:t>
             </a:r>
           </a:p>
         </p:txBody>
@@ -12633,7 +12467,7 @@
                 <a:latin typeface="Pretendard"/>
                 <a:ea typeface="Pretendard"/>
               </a:rPr>
-              <a:t>사진 · 판매 채널 · 상품 설명 · 보강 키워드 — 한 화면에서 끝납니다</a:t>
+              <a:t>사진 · 판매 채널 · 상품 설명 · 추가 키워드 — 한 화면에서 입력합니다</a:t>
             </a:r>
           </a:p>
         </p:txBody>
@@ -12901,7 +12735,7 @@
                 <a:latin typeface="Pretendard SemiBold"/>
                 <a:ea typeface="Pretendard SemiBold"/>
               </a:rPr>
-              <a:t>제2장</a:t>
+              <a:t>2부</a:t>
             </a:r>
           </a:p>
         </p:txBody>
@@ -12941,7 +12775,7 @@
                 <a:latin typeface="Noto Serif KR"/>
                 <a:ea typeface="Noto Serif KR"/>
               </a:rPr>
-              <a:t>사고 싶게 만드는</a:t>
+              <a:t>프리캔버스</a:t>
             </a:r>
           </a:p>
           <a:p>
@@ -12958,7 +12792,7 @@
                 <a:latin typeface="Noto Serif KR"/>
                 <a:ea typeface="Noto Serif KR"/>
               </a:rPr>
-              <a:t>콘텐츠 공방</a:t>
+              <a:t>새 기능</a:t>
             </a:r>
           </a:p>
           <a:p>
@@ -12978,7 +12812,7 @@
                 <a:latin typeface="Pretendard"/>
                 <a:ea typeface="Pretendard"/>
               </a:rPr>
-              <a:t>프리캔버스 — 소싱한 재료가 상세페이지·영상·카드뉴스가 되기까지, 손길이 가던 일들을 덜어냈습니다.</a:t>
+              <a:t>상세페이지·영상·카드뉴스 제작에 추가된 기능을 소개합니다.</a:t>
             </a:r>
           </a:p>
         </p:txBody>
@@ -13168,7 +13002,7 @@
                 <a:latin typeface="Pretendard ExtraBold"/>
                 <a:ea typeface="Pretendard ExtraBold"/>
               </a:rPr>
-              <a:t>프리캔버스 — 첫 화면부터</a:t>
+              <a:t>프리캔버스 첫 화면</a:t>
             </a:r>
           </a:p>
         </p:txBody>
@@ -13208,27 +13042,7 @@
                 <a:latin typeface="Noto Serif KR"/>
                 <a:ea typeface="Noto Serif KR"/>
               </a:rPr>
-              <a:t>들어서면 </a:t>
-            </a:r>
-            <a:r>
-              <a:rPr sz="2300" b="1" i="0">
-                <a:solidFill>
-                  <a:srgbClr val="1F5068"/>
-                </a:solidFill>
-                <a:latin typeface="Noto Serif KR"/>
-                <a:ea typeface="Noto Serif KR"/>
-              </a:rPr>
-              <a:t>세 개의 작업실</a:t>
-            </a:r>
-            <a:r>
-              <a:rPr sz="2300" b="1" i="0">
-                <a:solidFill>
-                  <a:srgbClr val="1D2735"/>
-                </a:solidFill>
-                <a:latin typeface="Noto Serif KR"/>
-                <a:ea typeface="Noto Serif KR"/>
-              </a:rPr>
-              <a:t>이 기다립니다.</a:t>
+              <a:t>세 가지 작업 중에 골라 시작합니다.</a:t>
             </a:r>
           </a:p>
         </p:txBody>
@@ -13369,7 +13183,7 @@
                 <a:latin typeface="Pretendard"/>
                 <a:ea typeface="Pretendard"/>
               </a:rPr>
-              <a:t>제품 사진과 정보만 넣으면 상세페이지를 처음부터 지어줍니다.</a:t>
+              <a:t>제품 사진과 정보를 넣으면 상세페이지를 처음부터 만들어 줍니다.</a:t>
             </a:r>
           </a:p>
         </p:txBody>
@@ -13473,7 +13287,7 @@
                 <a:latin typeface="Pretendard"/>
                 <a:ea typeface="Pretendard"/>
               </a:rPr>
-              <a:t>이미 있는 상세 캡처를 블록으로 풀어 바로 손질합니다.</a:t>
+              <a:t>이미 있는 상세 캡처를 올려 블록 단위로 수정합니다.</a:t>
             </a:r>
           </a:p>
         </p:txBody>
@@ -13617,7 +13431,7 @@
                 <a:latin typeface="Pretendard"/>
                 <a:ea typeface="Pretendard"/>
               </a:rPr>
-              <a:t>일반·의류·과일채소 상세페이지에 </a:t>
+              <a:t>결과물 종류는 일반·의류·과일채소 상세페이지에 </a:t>
             </a:r>
             <a:r>
               <a:rPr sz="1100" b="0" i="0">
@@ -13637,7 +13451,7 @@
                 <a:latin typeface="Pretendard"/>
                 <a:ea typeface="Pretendard"/>
               </a:rPr>
-              <a:t>와 </a:t>
+              <a:t>, </a:t>
             </a:r>
             <a:r>
               <a:rPr sz="1100" b="0" i="0">
@@ -13657,7 +13471,7 @@
                 <a:latin typeface="Pretendard"/>
                 <a:ea typeface="Pretendard"/>
               </a:rPr>
-              <a:t>까지 — 다섯 갈래 결과물이 한 곳에서 나옵니다.</a:t>
+              <a:t>까지 다섯 가지입니다.</a:t>
             </a:r>
           </a:p>
         </p:txBody>
@@ -13946,7 +13760,7 @@
                 <a:latin typeface="Pretendard ExtraBold"/>
                 <a:ea typeface="Pretendard ExtraBold"/>
               </a:rPr>
-              <a:t>프리캔버스 — 새 기능 ①</a:t>
+              <a:t>프리캔버스 새 기능 ①</a:t>
             </a:r>
           </a:p>
         </p:txBody>
@@ -13959,8 +13773,8 @@
         </p:nvSpPr>
         <p:spPr>
           <a:xfrm>
-            <a:off x="822960" y="1207008"/>
-            <a:ext cx="4937760" cy="1508760"/>
+            <a:off x="822960" y="1234440"/>
+            <a:ext cx="4937760" cy="1280160"/>
           </a:xfrm>
           <a:prstGeom prst="rect">
             <a:avLst/>
@@ -13975,45 +13789,38 @@
           <a:p>
             <a:pPr algn="l">
               <a:lnSpc>
-                <a:spcPct val="132000"/>
-              </a:lnSpc>
-            </a:pPr>
-            <a:r>
-              <a:rPr sz="2200" b="1" i="0">
+                <a:spcPct val="130000"/>
+              </a:lnSpc>
+            </a:pPr>
+            <a:r>
+              <a:rPr sz="2400" b="1" i="0">
                 <a:solidFill>
                   <a:srgbClr val="1D2735"/>
                 </a:solidFill>
                 <a:latin typeface="Noto Serif KR"/>
                 <a:ea typeface="Noto Serif KR"/>
               </a:rPr>
-              <a:t>소싱 링크를 붙여넣으면</a:t>
+              <a:t>상품 링크로 빠른 시작</a:t>
             </a:r>
           </a:p>
           <a:p>
             <a:pPr algn="l">
               <a:lnSpc>
-                <a:spcPct val="132000"/>
-              </a:lnSpc>
-            </a:pPr>
-            <a:r>
-              <a:rPr sz="2200" b="1" i="0">
-                <a:solidFill>
-                  <a:srgbClr val="1F5068"/>
-                </a:solidFill>
-                <a:latin typeface="Noto Serif KR"/>
-                <a:ea typeface="Noto Serif KR"/>
-              </a:rPr>
-              <a:t>재료가 알아서</a:t>
-            </a:r>
-            <a:r>
-              <a:rPr sz="2200" b="1" i="0">
-                <a:solidFill>
-                  <a:srgbClr val="1D2735"/>
-                </a:solidFill>
-                <a:latin typeface="Noto Serif KR"/>
-                <a:ea typeface="Noto Serif KR"/>
-              </a:rPr>
-              <a:t> 담깁니다.</a:t>
+                <a:spcPct val="140000"/>
+              </a:lnSpc>
+              <a:spcBef>
+                <a:spcPts val="800"/>
+              </a:spcBef>
+            </a:pPr>
+            <a:r>
+              <a:rPr sz="1200" b="0" i="0">
+                <a:solidFill>
+                  <a:srgbClr val="455569"/>
+                </a:solidFill>
+                <a:latin typeface="Pretendard"/>
+                <a:ea typeface="Pretendard"/>
+              </a:rPr>
+              <a:t>소싱한 상품의 주소만 붙여넣으면, 이미지와 상품 정보가 자동으로 담깁니다.</a:t>
             </a:r>
           </a:p>
         </p:txBody>
@@ -14026,7 +13833,7 @@
         </p:nvSpPr>
         <p:spPr>
           <a:xfrm>
-            <a:off x="822960" y="2880360"/>
+            <a:off x="822960" y="2743200"/>
             <a:ext cx="502920" cy="457200"/>
           </a:xfrm>
           <a:prstGeom prst="rect">
@@ -14066,7 +13873,7 @@
         </p:nvSpPr>
         <p:spPr>
           <a:xfrm>
-            <a:off x="1389888" y="2871216"/>
+            <a:off x="1389888" y="2734056"/>
             <a:ext cx="4297680" cy="960120"/>
           </a:xfrm>
           <a:prstGeom prst="rect">
@@ -14113,7 +13920,7 @@
                 <a:latin typeface="Pretendard"/>
                 <a:ea typeface="Pretendard"/>
               </a:rPr>
-              <a:t>상품 주소만 붙여넣으면 작은 새 창이 열려 상세 내용과 상품 이미지를 통째로 가져옵니다. 가격 정보는 자동으로 걸러냅니다.</a:t>
+              <a:t>상품 주소를 붙여넣으면 작은 새 창이 열려 상세 내용과 상품 이미지를 가져옵니다. 가격 정보는 자동으로 걸러냅니다.</a:t>
             </a:r>
           </a:p>
         </p:txBody>
@@ -14126,7 +13933,7 @@
         </p:nvSpPr>
         <p:spPr>
           <a:xfrm>
-            <a:off x="822960" y="3877056"/>
+            <a:off x="822960" y="3739896"/>
             <a:ext cx="4846320" cy="10972"/>
           </a:xfrm>
           <a:prstGeom prst="rect">
@@ -14170,7 +13977,7 @@
         </p:nvSpPr>
         <p:spPr>
           <a:xfrm>
-            <a:off x="822960" y="3959352"/>
+            <a:off x="822960" y="3822191"/>
             <a:ext cx="502920" cy="457200"/>
           </a:xfrm>
           <a:prstGeom prst="rect">
@@ -14210,7 +14017,7 @@
         </p:nvSpPr>
         <p:spPr>
           <a:xfrm>
-            <a:off x="1389888" y="3950208"/>
+            <a:off x="1389888" y="3813048"/>
             <a:ext cx="4297680" cy="960120"/>
           </a:xfrm>
           <a:prstGeom prst="rect">
@@ -14240,7 +14047,7 @@
                 <a:latin typeface="Pretendard ExtraBold"/>
                 <a:ea typeface="Pretendard ExtraBold"/>
               </a:rPr>
-              <a:t>확장 프로그램 한 번 설치로 끝</a:t>
+              <a:t>확장 프로그램은 한 번만 설치</a:t>
             </a:r>
           </a:p>
           <a:p>
@@ -14257,7 +14064,7 @@
                 <a:latin typeface="Pretendard"/>
                 <a:ea typeface="Pretendard"/>
               </a:rPr>
-              <a:t>웹스토어 단추와 설치 안내가 화면 안에 있어, 처음 한 번만 설치해 두면 다음부터는 붙여넣기만으로 충분합니다.</a:t>
+              <a:t>웹스토어 버튼과 설치 안내가 화면 안에 있습니다. 처음 한 번만 설치하면 다음부터는 붙여넣기만 하면 됩니다.</a:t>
             </a:r>
           </a:p>
         </p:txBody>
@@ -14270,7 +14077,7 @@
         </p:nvSpPr>
         <p:spPr>
           <a:xfrm>
-            <a:off x="822960" y="4956048"/>
+            <a:off x="822960" y="4818888"/>
             <a:ext cx="4846320" cy="10972"/>
           </a:xfrm>
           <a:prstGeom prst="rect">
@@ -14314,7 +14121,7 @@
         </p:nvSpPr>
         <p:spPr>
           <a:xfrm>
-            <a:off x="822960" y="5038344"/>
+            <a:off x="822960" y="4901183"/>
             <a:ext cx="502920" cy="457200"/>
           </a:xfrm>
           <a:prstGeom prst="rect">
@@ -14354,7 +14161,7 @@
         </p:nvSpPr>
         <p:spPr>
           <a:xfrm>
-            <a:off x="1389888" y="5029200"/>
+            <a:off x="1389888" y="4892040"/>
             <a:ext cx="4297680" cy="960120"/>
           </a:xfrm>
           <a:prstGeom prst="rect">
@@ -14384,7 +14191,7 @@
                 <a:latin typeface="Pretendard ExtraBold"/>
                 <a:ea typeface="Pretendard ExtraBold"/>
               </a:rPr>
-              <a:t>중국어 정리까지 자동</a:t>
+              <a:t>중국어 자동 정리</a:t>
             </a:r>
           </a:p>
           <a:p>
@@ -14401,7 +14208,7 @@
                 <a:latin typeface="Pretendard"/>
                 <a:ea typeface="Pretendard"/>
               </a:rPr>
-              <a:t>1688에서 가져온 문구 속 중국어와 불필요한 표기를 한국어 기준으로 매만져 줍니다.</a:t>
+              <a:t>1688에서 가져온 문구 속 중국어와 불필요한 표기를 한국어 기준으로 정리해 줍니다.</a:t>
             </a:r>
           </a:p>
         </p:txBody>
@@ -14478,7 +14285,7 @@
                 <a:latin typeface="Pretendard"/>
                 <a:ea typeface="Pretendard"/>
               </a:rPr>
-              <a:t>스마트스토어 링크와 1688 링크, 각각 “불러오기” 한 번이면 됩니다</a:t>
+              <a:t>스마트스토어 링크와 1688 링크, 각각 “불러오기” 버튼 하나로 끝납니다</a:t>
             </a:r>
           </a:p>
         </p:txBody>
@@ -14730,7 +14537,7 @@
                 <a:latin typeface="Pretendard ExtraBold"/>
                 <a:ea typeface="Pretendard ExtraBold"/>
               </a:rPr>
-              <a:t>프리캔버스 — 새 기능 ②</a:t>
+              <a:t>프리캔버스 새 기능 ②</a:t>
             </a:r>
           </a:p>
         </p:txBody>
@@ -14743,8 +14550,8 @@
         </p:nvSpPr>
         <p:spPr>
           <a:xfrm>
-            <a:off x="822960" y="1207008"/>
-            <a:ext cx="4937760" cy="1508760"/>
+            <a:off x="822960" y="1234440"/>
+            <a:ext cx="4937760" cy="1280160"/>
           </a:xfrm>
           <a:prstGeom prst="rect">
             <a:avLst/>
@@ -14759,45 +14566,38 @@
           <a:p>
             <a:pPr algn="l">
               <a:lnSpc>
-                <a:spcPct val="132000"/>
-              </a:lnSpc>
-            </a:pPr>
-            <a:r>
-              <a:rPr sz="2200" b="1" i="0">
+                <a:spcPct val="130000"/>
+              </a:lnSpc>
+            </a:pPr>
+            <a:r>
+              <a:rPr sz="2400" b="1" i="0">
                 <a:solidFill>
                   <a:srgbClr val="1D2735"/>
                 </a:solidFill>
                 <a:latin typeface="Noto Serif KR"/>
                 <a:ea typeface="Noto Serif KR"/>
               </a:rPr>
-              <a:t>중국어 상품 영상이</a:t>
+              <a:t>1688 영상 번역</a:t>
             </a:r>
           </a:p>
           <a:p>
             <a:pPr algn="l">
               <a:lnSpc>
-                <a:spcPct val="132000"/>
-              </a:lnSpc>
-            </a:pPr>
-            <a:r>
-              <a:rPr sz="2200" b="1" i="0">
-                <a:solidFill>
-                  <a:srgbClr val="1F5068"/>
-                </a:solidFill>
-                <a:latin typeface="Noto Serif KR"/>
-                <a:ea typeface="Noto Serif KR"/>
-              </a:rPr>
-              <a:t>한국어 콘텐츠</a:t>
-            </a:r>
-            <a:r>
-              <a:rPr sz="2200" b="1" i="0">
-                <a:solidFill>
-                  <a:srgbClr val="1D2735"/>
-                </a:solidFill>
-                <a:latin typeface="Noto Serif KR"/>
-                <a:ea typeface="Noto Serif KR"/>
-              </a:rPr>
-              <a:t>가 됩니다.</a:t>
+                <a:spcPct val="140000"/>
+              </a:lnSpc>
+              <a:spcBef>
+                <a:spcPts val="800"/>
+              </a:spcBef>
+            </a:pPr>
+            <a:r>
+              <a:rPr sz="1200" b="0" i="0">
+                <a:solidFill>
+                  <a:srgbClr val="455569"/>
+                </a:solidFill>
+                <a:latin typeface="Pretendard"/>
+                <a:ea typeface="Pretendard"/>
+              </a:rPr>
+              <a:t>중국어 상품 영상을 한국어 자막·더빙 영상으로 바꿔 줍니다.</a:t>
             </a:r>
           </a:p>
         </p:txBody>
@@ -14810,7 +14610,7 @@
         </p:nvSpPr>
         <p:spPr>
           <a:xfrm>
-            <a:off x="822960" y="2880360"/>
+            <a:off x="822960" y="2743200"/>
             <a:ext cx="502920" cy="457200"/>
           </a:xfrm>
           <a:prstGeom prst="rect">
@@ -14850,7 +14650,7 @@
         </p:nvSpPr>
         <p:spPr>
           <a:xfrm>
-            <a:off x="1389888" y="2871216"/>
+            <a:off x="1389888" y="2734056"/>
             <a:ext cx="4297680" cy="960120"/>
           </a:xfrm>
           <a:prstGeom prst="rect">
@@ -14880,7 +14680,7 @@
                 <a:latin typeface="Pretendard ExtraBold"/>
                 <a:ea typeface="Pretendard ExtraBold"/>
               </a:rPr>
-              <a:t>중국어 자막 지우고, 한국어 자막 입히기</a:t>
+              <a:t>중국어 자막을 한국어 자막으로</a:t>
             </a:r>
           </a:p>
           <a:p>
@@ -14897,7 +14697,7 @@
                 <a:latin typeface="Pretendard"/>
                 <a:ea typeface="Pretendard"/>
               </a:rPr>
-              <a:t>영상 속 중국어 문구 자리를 찾아 지우고 그 자리에 자연스러운 한국어 자막을 얹습니다.</a:t>
+              <a:t>영상 속 중국어 문구 자리를 찾아 지우고, 그 자리에 한국어 자막을 입힙니다.</a:t>
             </a:r>
           </a:p>
         </p:txBody>
@@ -14910,7 +14710,7 @@
         </p:nvSpPr>
         <p:spPr>
           <a:xfrm>
-            <a:off x="822960" y="3877056"/>
+            <a:off x="822960" y="3739896"/>
             <a:ext cx="4846320" cy="10972"/>
           </a:xfrm>
           <a:prstGeom prst="rect">
@@ -14954,7 +14754,7 @@
         </p:nvSpPr>
         <p:spPr>
           <a:xfrm>
-            <a:off x="822960" y="3959352"/>
+            <a:off x="822960" y="3822191"/>
             <a:ext cx="502920" cy="457200"/>
           </a:xfrm>
           <a:prstGeom prst="rect">
@@ -14994,7 +14794,7 @@
         </p:nvSpPr>
         <p:spPr>
           <a:xfrm>
-            <a:off x="1389888" y="3950208"/>
+            <a:off x="1389888" y="3813048"/>
             <a:ext cx="4297680" cy="960120"/>
           </a:xfrm>
           <a:prstGeom prst="rect">
@@ -15041,7 +14841,7 @@
                 <a:latin typeface="Pretendard"/>
                 <a:ea typeface="Pretendard"/>
               </a:rPr>
-              <a:t>자막에 맞춰 우리말 음성을 입혀, 소리까지 완전한 한국어 영상으로 만듭니다.</a:t>
+              <a:t>자막에 맞춰 한국어 음성을 입혀, 소리까지 한국어인 영상으로 만듭니다.</a:t>
             </a:r>
           </a:p>
         </p:txBody>
@@ -15054,7 +14854,7 @@
         </p:nvSpPr>
         <p:spPr>
           <a:xfrm>
-            <a:off x="822960" y="4956048"/>
+            <a:off x="822960" y="4818888"/>
             <a:ext cx="4846320" cy="10972"/>
           </a:xfrm>
           <a:prstGeom prst="rect">
@@ -15098,7 +14898,7 @@
         </p:nvSpPr>
         <p:spPr>
           <a:xfrm>
-            <a:off x="822960" y="5038344"/>
+            <a:off x="822960" y="4901183"/>
             <a:ext cx="502920" cy="457200"/>
           </a:xfrm>
           <a:prstGeom prst="rect">
@@ -15138,7 +14938,7 @@
         </p:nvSpPr>
         <p:spPr>
           <a:xfrm>
-            <a:off x="1389888" y="5029200"/>
+            <a:off x="1389888" y="4892040"/>
             <a:ext cx="4297680" cy="960120"/>
           </a:xfrm>
           <a:prstGeom prst="rect">
@@ -15185,7 +14985,7 @@
                 <a:latin typeface="Pretendard"/>
                 <a:ea typeface="Pretendard"/>
               </a:rPr>
-              <a:t>쇼츠·릴스에 바로 올릴 수 있는 세로 비율로 저장되며, 자막 파일도 함께 제공됩니다.</a:t>
+              <a:t>쇼츠·릴스에 바로 올릴 수 있는 세로 비율로 저장되고, 자막 파일도 함께 나옵니다.</a:t>
             </a:r>
           </a:p>
         </p:txBody>
@@ -15262,7 +15062,7 @@
                 <a:latin typeface="Pretendard"/>
                 <a:ea typeface="Pretendard"/>
               </a:rPr>
-              <a:t>영상 후보 탐색부터 한국어 자막 생성·저장까지 한 작업실에서</a:t>
+              <a:t>영상 찾기부터 한국어 자막 생성·저장까지 이 화면에서 진행합니다</a:t>
             </a:r>
           </a:p>
         </p:txBody>

--- a/slides.pptx
+++ b/slides.pptx
@@ -22,6 +22,8 @@
     <p:sldId id="270" r:id="rId21"/>
     <p:sldId id="271" r:id="rId22"/>
     <p:sldId id="272" r:id="rId23"/>
+    <p:sldId id="273" r:id="rId24"/>
+    <p:sldId id="274" r:id="rId25"/>
   </p:sldIdLst>
   <p:sldSz cx="12191695" cy="6858000" type="screen4x3"/>
   <p:notesSz cx="6858000" cy="9144000"/>
@@ -4305,7 +4307,7 @@
                 <a:latin typeface="Pretendard SemiBold"/>
                 <a:ea typeface="Pretendard SemiBold"/>
               </a:rPr>
-              <a:t>10 / 17</a:t>
+              <a:t>10 / 19</a:t>
             </a:r>
           </a:p>
         </p:txBody>
@@ -4883,7 +4885,7 @@
                 <a:latin typeface="Pretendard"/>
                 <a:ea typeface="Pretendard"/>
               </a:rPr>
-              <a:t>🖼️</a:t>
+              <a:t>🛠️</a:t>
             </a:r>
           </a:p>
         </p:txBody>
@@ -4926,7 +4928,7 @@
                 <a:latin typeface="Pretendard ExtraBold"/>
                 <a:ea typeface="Pretendard ExtraBold"/>
               </a:rPr>
-              <a:t>사진은 선택 사항</a:t>
+              <a:t>장마다 버튼 하나로 수정</a:t>
             </a:r>
           </a:p>
           <a:p>
@@ -4943,14 +4945,14 @@
                 <a:latin typeface="Pretendard"/>
                 <a:ea typeface="Pretendard"/>
               </a:rPr>
-              <a:t>사진이 없으면 글만으로 만들고, 있으면 분위기 참고용으로만 쓸 수도 있습니다.</a:t>
+              <a:t>상품 크게 · 여백 정리 · 고급스럽게 · 문구 짧게 · 배경만 변경 · 글자 없는 버전 — 버튼으로 바로 고칩니다.</a:t>
             </a:r>
           </a:p>
         </p:txBody>
       </p:sp>
       <p:pic>
         <p:nvPicPr>
-          <p:cNvPr id="15" name="Picture 14" descr="fc_cardnews.jpg"/>
+          <p:cNvPr id="15" name="Picture 14" descr="cn_grid.jpg"/>
           <p:cNvPicPr>
             <a:picLocks noChangeAspect="1"/>
           </p:cNvPicPr>
@@ -4964,8 +4966,8 @@
         </p:blipFill>
         <p:spPr>
           <a:xfrm>
-            <a:off x="6263640" y="1691640"/>
-            <a:ext cx="4206240" cy="2818614"/>
+            <a:off x="6263640" y="2011680"/>
+            <a:ext cx="5074920" cy="2385212"/>
           </a:xfrm>
           <a:prstGeom prst="rect">
             <a:avLst/>
@@ -4993,8 +4995,8 @@
         </p:nvSpPr>
         <p:spPr>
           <a:xfrm>
-            <a:off x="5989320" y="4619982"/>
-            <a:ext cx="4754879" cy="256032"/>
+            <a:off x="5989320" y="4506620"/>
+            <a:ext cx="5623559" cy="256032"/>
           </a:xfrm>
           <a:prstGeom prst="rect">
             <a:avLst/>
@@ -5020,7 +5022,7 @@
                 <a:latin typeface="Pretendard"/>
                 <a:ea typeface="Pretendard"/>
               </a:rPr>
-              <a:t>“카드뉴스는 사진 없이도 생성할 수 있습니다” — 화면 속 안내 그대로</a:t>
+              <a:t>실제 생성 결과 — 카드마다 템플릿과 빠른 수정 버튼이 붙습니다</a:t>
             </a:r>
           </a:p>
         </p:txBody>
@@ -5082,7 +5084,7 @@
                 <a:latin typeface="Pretendard SemiBold"/>
                 <a:ea typeface="Pretendard SemiBold"/>
               </a:rPr>
-              <a:t>11 / 17</a:t>
+              <a:t>11 / 19</a:t>
             </a:r>
           </a:p>
         </p:txBody>
@@ -5312,7 +5314,7 @@
                 <a:latin typeface="Noto Serif KR"/>
                 <a:ea typeface="Noto Serif KR"/>
               </a:rPr>
-              <a:t>AI 지우개</a:t>
+              <a:t>GIF 만들기</a:t>
             </a:r>
           </a:p>
           <a:p>
@@ -5332,7 +5334,7 @@
                 <a:latin typeface="Pretendard"/>
                 <a:ea typeface="Pretendard"/>
               </a:rPr>
-              <a:t>이미지에서 지우고 싶은 부분만 칠하면 지워집니다.</a:t>
+              <a:t>완성된 상세 이미지를 움직이는 GIF로 만들어, 상세페이지에서 시선을 잡습니다.</a:t>
             </a:r>
           </a:p>
         </p:txBody>
@@ -5372,7 +5374,7 @@
                 <a:latin typeface="Pretendard"/>
                 <a:ea typeface="Pretendard"/>
               </a:rPr>
-              <a:t>🖌️</a:t>
+              <a:t>🎞️</a:t>
             </a:r>
           </a:p>
         </p:txBody>
@@ -5415,7 +5417,7 @@
                 <a:latin typeface="Pretendard ExtraBold"/>
                 <a:ea typeface="Pretendard ExtraBold"/>
               </a:rPr>
-              <a:t>워터마크·글자 지우기</a:t>
+              <a:t>텍스트 없음 · 텍스트 유지, 두 가지</a:t>
             </a:r>
           </a:p>
           <a:p>
@@ -5432,7 +5434,7 @@
                 <a:latin typeface="Pretendard"/>
                 <a:ea typeface="Pretendard"/>
               </a:rPr>
-              <a:t>소싱 이미지에 박힌 워터마크, 중국어 글자, 거슬리는 배경을 칠한 자리만 지웁니다.</a:t>
+              <a:t>문구 없이 장면만 움직이는 GIF와 문구가 함께 든 GIF 중 골라 만듭니다.</a:t>
             </a:r>
           </a:p>
         </p:txBody>
@@ -5516,7 +5518,7 @@
                 <a:latin typeface="Pretendard"/>
                 <a:ea typeface="Pretendard"/>
               </a:rPr>
-              <a:t>⚡</a:t>
+              <a:t>🛒</a:t>
             </a:r>
           </a:p>
         </p:txBody>
@@ -5559,7 +5561,7 @@
                 <a:latin typeface="Pretendard ExtraBold"/>
                 <a:ea typeface="Pretendard ExtraBold"/>
               </a:rPr>
-              <a:t>기다림 없이 바로</a:t>
+              <a:t>상세페이지에 그대로 사용</a:t>
             </a:r>
           </a:p>
           <a:p>
@@ -5576,7 +5578,7 @@
                 <a:latin typeface="Pretendard"/>
                 <a:ea typeface="Pretendard"/>
               </a:rPr>
-              <a:t>편집 화면 안에서 곧바로 지워져, 다른 프로그램을 오갈 필요가 없습니다.</a:t>
+              <a:t>움직이는 이미지가 한두 장 들어가면 스크롤이 멈춥니다. 스마트스토어 상세에 바로 올릴 수 있습니다.</a:t>
             </a:r>
           </a:p>
         </p:txBody>
@@ -5660,7 +5662,7 @@
                 <a:latin typeface="Pretendard"/>
                 <a:ea typeface="Pretendard"/>
               </a:rPr>
-              <a:t>👆</a:t>
+              <a:t>📦</a:t>
             </a:r>
           </a:p>
         </p:txBody>
@@ -5703,7 +5705,7 @@
                 <a:latin typeface="Pretendard ExtraBold"/>
                 <a:ea typeface="Pretendard ExtraBold"/>
               </a:rPr>
-              <a:t>간단한 조작</a:t>
+              <a:t>저장할 때 함께 담김</a:t>
             </a:r>
           </a:p>
           <a:p>
@@ -5720,31 +5722,34 @@
                 <a:latin typeface="Pretendard"/>
                 <a:ea typeface="Pretendard"/>
               </a:rPr>
-              <a:t>복잡한 설정 없이, 문지르면 지워집니다.</a:t>
-            </a:r>
-          </a:p>
-        </p:txBody>
-      </p:sp>
-      <p:sp>
-        <p:nvSpPr>
-          <p:cNvPr id="15" name="Rounded Rectangle 14"/>
-          <p:cNvSpPr/>
-          <p:nvPr/>
-        </p:nvSpPr>
-        <p:spPr>
-          <a:xfrm>
-            <a:off x="6400800" y="2468880"/>
-            <a:ext cx="2377440" cy="1783080"/>
-          </a:xfrm>
-          <a:prstGeom prst="roundRect">
-            <a:avLst>
-              <a:gd name="adj" fmla="val 10000"/>
-            </a:avLst>
-          </a:prstGeom>
-          <a:solidFill>
-            <a:srgbClr val="28364A"/>
-          </a:solidFill>
-          <a:ln w="9525">
+              <a:t>전체저장 ZIP 안 gifs 폴더에 따로 정리되어, 상세 이미지와 같이 받습니다.</a:t>
+            </a:r>
+          </a:p>
+        </p:txBody>
+      </p:sp>
+      <p:pic>
+        <p:nvPicPr>
+          <p:cNvPr id="15" name="Picture 14" descr="gif_top.jpg"/>
+          <p:cNvPicPr>
+            <a:picLocks noChangeAspect="1"/>
+          </p:cNvPicPr>
+          <p:nvPr/>
+        </p:nvPicPr>
+        <p:blipFill>
+          <a:blip r:embed="rId2"/>
+          <a:stretch>
+            <a:fillRect/>
+          </a:stretch>
+        </p:blipFill>
+        <p:spPr>
+          <a:xfrm>
+            <a:off x="6263640" y="1965960"/>
+            <a:ext cx="5029200" cy="2625242"/>
+          </a:xfrm>
+          <a:prstGeom prst="rect">
+            <a:avLst/>
+          </a:prstGeom>
+          <a:ln w="12700">
             <a:solidFill>
               <a:srgbClr val="EBE5DB"/>
             </a:solidFill>
@@ -5758,28 +5763,7 @@
             </a:outerShdw>
           </a:effectLst>
         </p:spPr>
-        <p:style>
-          <a:lnRef idx="1">
-            <a:schemeClr val="accent1"/>
-          </a:lnRef>
-          <a:fillRef idx="3">
-            <a:schemeClr val="accent1"/>
-          </a:fillRef>
-          <a:effectRef idx="2">
-            <a:schemeClr val="accent1"/>
-          </a:effectRef>
-          <a:fontRef idx="minor">
-            <a:schemeClr val="lt1"/>
-          </a:fontRef>
-        </p:style>
-        <p:txBody>
-          <a:bodyPr rtlCol="0" anchor="ctr"/>
-          <a:lstStyle/>
-          <a:p>
-            <a:pPr algn="ctr"/>
-          </a:p>
-        </p:txBody>
-      </p:sp>
+      </p:pic>
       <p:sp>
         <p:nvSpPr>
           <p:cNvPr id="16" name="TextBox 15"/>
@@ -5787,9 +5771,9 @@
           <p:nvPr/>
         </p:nvSpPr>
         <p:spPr>
-          <a:xfrm rot="20760000">
-            <a:off x="6629400" y="3063240"/>
-            <a:ext cx="1920240" cy="457200"/>
+          <a:xfrm>
+            <a:off x="5989320" y="4700930"/>
+            <a:ext cx="5577840" cy="256032"/>
           </a:xfrm>
           <a:prstGeom prst="rect">
             <a:avLst/>
@@ -5808,323 +5792,21 @@
               </a:lnSpc>
             </a:pPr>
             <a:r>
-              <a:rPr sz="1500" b="0" i="0" spc="280">
-                <a:solidFill>
-                  <a:srgbClr val="9AA7B8"/>
-                </a:solidFill>
-                <a:latin typeface="Pretendard ExtraBold"/>
-                <a:ea typeface="Pretendard ExtraBold"/>
-              </a:rPr>
-              <a:t>워터마크</a:t>
-            </a:r>
-          </a:p>
-        </p:txBody>
-      </p:sp>
-      <p:sp>
-        <p:nvSpPr>
-          <p:cNvPr id="17" name="Rounded Rectangle 16"/>
-          <p:cNvSpPr/>
-          <p:nvPr/>
-        </p:nvSpPr>
-        <p:spPr>
-          <a:xfrm>
-            <a:off x="6766560" y="2926080"/>
-            <a:ext cx="1645920" cy="685800"/>
-          </a:xfrm>
-          <a:prstGeom prst="roundRect">
-            <a:avLst>
-              <a:gd name="adj" fmla="val 50000"/>
-            </a:avLst>
-          </a:prstGeom>
-          <a:noFill/>
-          <a:ln w="22225">
-            <a:solidFill>
-              <a:srgbClr val="D5DDE6"/>
-            </a:solidFill>
-            <a:prstDash val="dash"/>
-          </a:ln>
-          <a:effectLst/>
-        </p:spPr>
-        <p:style>
-          <a:lnRef idx="1">
-            <a:schemeClr val="accent1"/>
-          </a:lnRef>
-          <a:fillRef idx="3">
-            <a:schemeClr val="accent1"/>
-          </a:fillRef>
-          <a:effectRef idx="2">
-            <a:schemeClr val="accent1"/>
-          </a:effectRef>
-          <a:fontRef idx="minor">
-            <a:schemeClr val="lt1"/>
-          </a:fontRef>
-        </p:style>
-        <p:txBody>
-          <a:bodyPr rtlCol="0" anchor="ctr"/>
-          <a:lstStyle/>
-          <a:p>
-            <a:pPr algn="ctr"/>
-          </a:p>
-        </p:txBody>
-      </p:sp>
-      <p:sp>
-        <p:nvSpPr>
-          <p:cNvPr id="18" name="Rounded Rectangle 17"/>
-          <p:cNvSpPr/>
-          <p:nvPr/>
-        </p:nvSpPr>
-        <p:spPr>
-          <a:xfrm>
-            <a:off x="6565392" y="3913632"/>
-            <a:ext cx="868680" cy="274320"/>
-          </a:xfrm>
-          <a:prstGeom prst="roundRect">
-            <a:avLst>
-              <a:gd name="adj" fmla="val 50000"/>
-            </a:avLst>
-          </a:prstGeom>
-          <a:solidFill>
-            <a:srgbClr val="FFFFFF"/>
-          </a:solidFill>
-          <a:ln>
-            <a:noFill/>
-          </a:ln>
-          <a:effectLst/>
-        </p:spPr>
-        <p:style>
-          <a:lnRef idx="1">
-            <a:schemeClr val="accent1"/>
-          </a:lnRef>
-          <a:fillRef idx="3">
-            <a:schemeClr val="accent1"/>
-          </a:fillRef>
-          <a:effectRef idx="2">
-            <a:schemeClr val="accent1"/>
-          </a:effectRef>
-          <a:fontRef idx="minor">
-            <a:schemeClr val="lt1"/>
-          </a:fontRef>
-        </p:style>
-        <p:txBody>
-          <a:bodyPr rtlCol="0" anchor="ctr" wrap="none" lIns="0" rIns="0" tIns="0" bIns="0"/>
-          <a:lstStyle/>
-          <a:p>
-            <a:pPr algn="ctr">
-              <a:lnSpc>
-                <a:spcPct val="100000"/>
-              </a:lnSpc>
-            </a:pPr>
-            <a:r>
-              <a:rPr sz="850" b="0" i="0">
-                <a:solidFill>
-                  <a:srgbClr val="28364A"/>
-                </a:solidFill>
-                <a:latin typeface="Pretendard SemiBold"/>
-                <a:ea typeface="Pretendard SemiBold"/>
-              </a:rPr>
-              <a:t>지우기 전</a:t>
-            </a:r>
-          </a:p>
-        </p:txBody>
-      </p:sp>
-      <p:sp>
-        <p:nvSpPr>
-          <p:cNvPr id="19" name="Rounded Rectangle 18"/>
-          <p:cNvSpPr/>
-          <p:nvPr/>
-        </p:nvSpPr>
-        <p:spPr>
-          <a:xfrm>
-            <a:off x="9006840" y="2468880"/>
-            <a:ext cx="2377440" cy="1783080"/>
-          </a:xfrm>
-          <a:prstGeom prst="roundRect">
-            <a:avLst>
-              <a:gd name="adj" fmla="val 10000"/>
-            </a:avLst>
-          </a:prstGeom>
-          <a:solidFill>
-            <a:srgbClr val="F4F8FA"/>
-          </a:solidFill>
-          <a:ln w="9525">
-            <a:solidFill>
-              <a:srgbClr val="D8E3EA"/>
-            </a:solidFill>
-          </a:ln>
-          <a:effectLst/>
-          <a:effectLst>
-            <a:outerShdw blurRad="170000" dist="50000" dir="5400000" rotWithShape="0">
-              <a:srgbClr val="16241C">
-                <a:alpha val="30000"/>
-              </a:srgbClr>
-            </a:outerShdw>
-          </a:effectLst>
-        </p:spPr>
-        <p:style>
-          <a:lnRef idx="1">
-            <a:schemeClr val="accent1"/>
-          </a:lnRef>
-          <a:fillRef idx="3">
-            <a:schemeClr val="accent1"/>
-          </a:fillRef>
-          <a:effectRef idx="2">
-            <a:schemeClr val="accent1"/>
-          </a:effectRef>
-          <a:fontRef idx="minor">
-            <a:schemeClr val="lt1"/>
-          </a:fontRef>
-        </p:style>
-        <p:txBody>
-          <a:bodyPr rtlCol="0" anchor="ctr"/>
-          <a:lstStyle/>
-          <a:p>
-            <a:pPr algn="ctr"/>
-          </a:p>
-        </p:txBody>
-      </p:sp>
-      <p:sp>
-        <p:nvSpPr>
-          <p:cNvPr id="20" name="TextBox 19"/>
-          <p:cNvSpPr txBox="1"/>
-          <p:nvPr/>
-        </p:nvSpPr>
-        <p:spPr>
-          <a:xfrm>
-            <a:off x="10607040" y="2743200"/>
-            <a:ext cx="548640" cy="411480"/>
-          </a:xfrm>
-          <a:prstGeom prst="rect">
-            <a:avLst/>
-          </a:prstGeom>
-          <a:noFill/>
-        </p:spPr>
-        <p:txBody>
-          <a:bodyPr wrap="square" lIns="0" rIns="0" tIns="0" bIns="0">
-            <a:spAutoFit/>
-          </a:bodyPr>
-          <a:lstStyle/>
-          <a:p>
-            <a:pPr algn="l">
-              <a:lnSpc>
-                <a:spcPct val="100000"/>
-              </a:lnSpc>
-            </a:pPr>
-            <a:r>
-              <a:rPr sz="2000" b="0" i="0">
-                <a:solidFill>
-                  <a:srgbClr val="1F5068"/>
+              <a:rPr sz="900" b="0" i="0">
+                <a:solidFill>
+                  <a:srgbClr val="455569"/>
                 </a:solidFill>
                 <a:latin typeface="Pretendard"/>
                 <a:ea typeface="Pretendard"/>
               </a:rPr>
-              <a:t>✦</a:t>
-            </a:r>
-          </a:p>
-        </p:txBody>
-      </p:sp>
-      <p:sp>
-        <p:nvSpPr>
-          <p:cNvPr id="21" name="Rounded Rectangle 20"/>
-          <p:cNvSpPr/>
-          <p:nvPr/>
-        </p:nvSpPr>
-        <p:spPr>
-          <a:xfrm>
-            <a:off x="9171432" y="3913632"/>
-            <a:ext cx="822960" cy="274320"/>
-          </a:xfrm>
-          <a:prstGeom prst="roundRect">
-            <a:avLst>
-              <a:gd name="adj" fmla="val 50000"/>
-            </a:avLst>
-          </a:prstGeom>
-          <a:solidFill>
-            <a:srgbClr val="1F5068"/>
-          </a:solidFill>
-          <a:ln>
-            <a:noFill/>
-          </a:ln>
-          <a:effectLst/>
-        </p:spPr>
-        <p:style>
-          <a:lnRef idx="1">
-            <a:schemeClr val="accent1"/>
-          </a:lnRef>
-          <a:fillRef idx="3">
-            <a:schemeClr val="accent1"/>
-          </a:fillRef>
-          <a:effectRef idx="2">
-            <a:schemeClr val="accent1"/>
-          </a:effectRef>
-          <a:fontRef idx="minor">
-            <a:schemeClr val="lt1"/>
-          </a:fontRef>
-        </p:style>
-        <p:txBody>
-          <a:bodyPr rtlCol="0" anchor="ctr" wrap="none" lIns="0" rIns="0" tIns="0" bIns="0"/>
-          <a:lstStyle/>
-          <a:p>
-            <a:pPr algn="ctr">
-              <a:lnSpc>
-                <a:spcPct val="100000"/>
-              </a:lnSpc>
-            </a:pPr>
-            <a:r>
-              <a:rPr sz="850" b="0" i="0">
-                <a:solidFill>
-                  <a:srgbClr val="FFFFFF"/>
-                </a:solidFill>
-                <a:latin typeface="Pretendard SemiBold"/>
-                <a:ea typeface="Pretendard SemiBold"/>
-              </a:rPr>
-              <a:t>지운 후</a:t>
-            </a:r>
-          </a:p>
-        </p:txBody>
-      </p:sp>
-      <p:sp>
-        <p:nvSpPr>
-          <p:cNvPr id="22" name="TextBox 21"/>
-          <p:cNvSpPr txBox="1"/>
-          <p:nvPr/>
-        </p:nvSpPr>
-        <p:spPr>
-          <a:xfrm>
-            <a:off x="6400800" y="4526280"/>
-            <a:ext cx="4983480" cy="256032"/>
-          </a:xfrm>
-          <a:prstGeom prst="rect">
-            <a:avLst/>
-          </a:prstGeom>
-          <a:noFill/>
-        </p:spPr>
-        <p:txBody>
-          <a:bodyPr wrap="square" lIns="0" rIns="0" tIns="0" bIns="0">
-            <a:spAutoFit/>
-          </a:bodyPr>
-          <a:lstStyle/>
-          <a:p>
-            <a:pPr algn="ctr">
-              <a:lnSpc>
-                <a:spcPct val="100000"/>
-              </a:lnSpc>
-            </a:pPr>
-            <a:r>
-              <a:rPr sz="900" b="0" i="0">
-                <a:solidFill>
-                  <a:srgbClr val="455569"/>
-                </a:solidFill>
-                <a:latin typeface="Pretendard"/>
-                <a:ea typeface="Pretendard"/>
-              </a:rPr>
-              <a:t>칠한 자리만 지워지고, 상품은 그대로 남습니다</a:t>
-            </a:r>
-          </a:p>
-        </p:txBody>
-      </p:sp>
-      <p:sp>
-        <p:nvSpPr>
-          <p:cNvPr id="23" name="Rounded Rectangle 22"/>
+              <a:t>결과 화면의 GIF 생성 버튼 — 실제 화면</a:t>
+            </a:r>
+          </a:p>
+        </p:txBody>
+      </p:sp>
+      <p:sp>
+        <p:nvSpPr>
+          <p:cNvPr id="17" name="Rounded Rectangle 16"/>
           <p:cNvSpPr/>
           <p:nvPr/>
         </p:nvSpPr>
@@ -6179,7 +5861,7 @@
                 <a:latin typeface="Pretendard SemiBold"/>
                 <a:ea typeface="Pretendard SemiBold"/>
               </a:rPr>
-              <a:t>12 / 17</a:t>
+              <a:t>12 / 19</a:t>
             </a:r>
           </a:p>
         </p:txBody>
@@ -6369,7 +6051,7 @@
                 <a:latin typeface="Pretendard ExtraBold"/>
                 <a:ea typeface="Pretendard ExtraBold"/>
               </a:rPr>
-              <a:t>처음 쓰는 분이라면</a:t>
+              <a:t>프리캔버스 새 기능 ⑥</a:t>
             </a:r>
           </a:p>
         </p:txBody>
@@ -6409,7 +6091,7 @@
                 <a:latin typeface="Noto Serif KR"/>
                 <a:ea typeface="Noto Serif KR"/>
               </a:rPr>
-              <a:t>단계별 사용법 안내</a:t>
+              <a:t>AI 지우개</a:t>
             </a:r>
           </a:p>
           <a:p>
@@ -6429,7 +6111,7 @@
                 <a:latin typeface="Pretendard"/>
                 <a:ea typeface="Pretendard"/>
               </a:rPr>
-              <a:t>화면 위에 순서대로 안내가 떠서, 처음이어도 따라 하기만 하면 됩니다.</a:t>
+              <a:t>이미지에서 지우고 싶은 부분만 칠하면 지워집니다.</a:t>
             </a:r>
           </a:p>
         </p:txBody>
@@ -6469,7 +6151,7 @@
                 <a:latin typeface="Pretendard"/>
                 <a:ea typeface="Pretendard"/>
               </a:rPr>
-              <a:t>🗂️</a:t>
+              <a:t>🖌️</a:t>
             </a:r>
           </a:p>
         </p:txBody>
@@ -6512,7 +6194,7 @@
                 <a:latin typeface="Pretendard ExtraBold"/>
                 <a:ea typeface="Pretendard ExtraBold"/>
               </a:rPr>
-              <a:t>결과물마다 다른 안내</a:t>
+              <a:t>워터마크·글자 지우기</a:t>
             </a:r>
           </a:p>
           <a:p>
@@ -6529,7 +6211,7 @@
                 <a:latin typeface="Pretendard"/>
                 <a:ea typeface="Pretendard"/>
               </a:rPr>
-              <a:t>일반·의류·과일채소·카드뉴스·썸네일 — 만들려는 것에 맞는 안내가 따로 준비되어 있습니다.</a:t>
+              <a:t>소싱 이미지에 박힌 워터마크, 중국어 글자, 거슬리는 배경을 칠한 자리만 지웁니다.</a:t>
             </a:r>
           </a:p>
         </p:txBody>
@@ -6613,7 +6295,7 @@
                 <a:latin typeface="Pretendard"/>
                 <a:ea typeface="Pretendard"/>
               </a:rPr>
-              <a:t>📋</a:t>
+              <a:t>⚡</a:t>
             </a:r>
           </a:p>
         </p:txBody>
@@ -6656,7 +6338,7 @@
                 <a:latin typeface="Pretendard ExtraBold"/>
                 <a:ea typeface="Pretendard ExtraBold"/>
               </a:rPr>
-              <a:t>사진 올리기부터 저장까지</a:t>
+              <a:t>기다림 없이 바로</a:t>
             </a:r>
           </a:p>
           <a:p>
@@ -6673,7 +6355,7 @@
                 <a:latin typeface="Pretendard"/>
                 <a:ea typeface="Pretendard"/>
               </a:rPr>
-              <a:t>각 단계에서 무엇을 누르고 무엇을 입력하는지 화면 위에서 하나씩 짚어 줍니다.</a:t>
+              <a:t>편집 화면 안에서 곧바로 지워져, 다른 프로그램을 오갈 필요가 없습니다.</a:t>
             </a:r>
           </a:p>
         </p:txBody>
@@ -6757,7 +6439,7 @@
                 <a:latin typeface="Pretendard"/>
                 <a:ea typeface="Pretendard"/>
               </a:rPr>
-              <a:t>🔁</a:t>
+              <a:t>👆</a:t>
             </a:r>
           </a:p>
         </p:txBody>
@@ -6800,7 +6482,7 @@
                 <a:latin typeface="Pretendard ExtraBold"/>
                 <a:ea typeface="Pretendard ExtraBold"/>
               </a:rPr>
-              <a:t>언제든 다시 보기</a:t>
+              <a:t>간단한 조작</a:t>
             </a:r>
           </a:p>
           <a:p>
@@ -6817,34 +6499,31 @@
                 <a:latin typeface="Pretendard"/>
                 <a:ea typeface="Pretendard"/>
               </a:rPr>
-              <a:t>첫 화면의 “사용법 보기”를 누르면 언제든 처음부터 다시 볼 수 있습니다.</a:t>
-            </a:r>
-          </a:p>
-        </p:txBody>
-      </p:sp>
-      <p:pic>
-        <p:nvPicPr>
-          <p:cNvPr id="15" name="Picture 14" descr="fc_guide.jpg"/>
-          <p:cNvPicPr>
-            <a:picLocks noChangeAspect="1"/>
-          </p:cNvPicPr>
-          <p:nvPr/>
-        </p:nvPicPr>
-        <p:blipFill>
-          <a:blip r:embed="rId2"/>
-          <a:stretch>
-            <a:fillRect/>
-          </a:stretch>
-        </p:blipFill>
-        <p:spPr>
-          <a:xfrm>
-            <a:off x="6263640" y="1371600"/>
-            <a:ext cx="3657600" cy="3237186"/>
-          </a:xfrm>
-          <a:prstGeom prst="rect">
-            <a:avLst/>
-          </a:prstGeom>
-          <a:ln w="12700">
+              <a:t>복잡한 설정 없이, 문지르면 지워집니다.</a:t>
+            </a:r>
+          </a:p>
+        </p:txBody>
+      </p:sp>
+      <p:sp>
+        <p:nvSpPr>
+          <p:cNvPr id="15" name="Rounded Rectangle 14"/>
+          <p:cNvSpPr/>
+          <p:nvPr/>
+        </p:nvSpPr>
+        <p:spPr>
+          <a:xfrm>
+            <a:off x="6400800" y="2468880"/>
+            <a:ext cx="2377440" cy="1783080"/>
+          </a:xfrm>
+          <a:prstGeom prst="roundRect">
+            <a:avLst>
+              <a:gd name="adj" fmla="val 10000"/>
+            </a:avLst>
+          </a:prstGeom>
+          <a:solidFill>
+            <a:srgbClr val="28364A"/>
+          </a:solidFill>
+          <a:ln w="9525">
             <a:solidFill>
               <a:srgbClr val="EBE5DB"/>
             </a:solidFill>
@@ -6858,7 +6537,28 @@
             </a:outerShdw>
           </a:effectLst>
         </p:spPr>
-      </p:pic>
+        <p:style>
+          <a:lnRef idx="1">
+            <a:schemeClr val="accent1"/>
+          </a:lnRef>
+          <a:fillRef idx="3">
+            <a:schemeClr val="accent1"/>
+          </a:fillRef>
+          <a:effectRef idx="2">
+            <a:schemeClr val="accent1"/>
+          </a:effectRef>
+          <a:fontRef idx="minor">
+            <a:schemeClr val="lt1"/>
+          </a:fontRef>
+        </p:style>
+        <p:txBody>
+          <a:bodyPr rtlCol="0" anchor="ctr"/>
+          <a:lstStyle/>
+          <a:p>
+            <a:pPr algn="ctr"/>
+          </a:p>
+        </p:txBody>
+      </p:sp>
       <p:sp>
         <p:nvSpPr>
           <p:cNvPr id="16" name="TextBox 15"/>
@@ -6866,9 +6566,9 @@
           <p:nvPr/>
         </p:nvSpPr>
         <p:spPr>
-          <a:xfrm>
-            <a:off x="5989320" y="4718514"/>
-            <a:ext cx="4206240" cy="256032"/>
+          <a:xfrm rot="20760000">
+            <a:off x="6629400" y="3063240"/>
+            <a:ext cx="1920240" cy="457200"/>
           </a:xfrm>
           <a:prstGeom prst="rect">
             <a:avLst/>
@@ -6887,21 +6587,323 @@
               </a:lnSpc>
             </a:pPr>
             <a:r>
-              <a:rPr sz="900" b="0" i="0">
-                <a:solidFill>
-                  <a:srgbClr val="455569"/>
+              <a:rPr sz="1500" b="0" i="0" spc="280">
+                <a:solidFill>
+                  <a:srgbClr val="9AA7B8"/>
+                </a:solidFill>
+                <a:latin typeface="Pretendard ExtraBold"/>
+                <a:ea typeface="Pretendard ExtraBold"/>
+              </a:rPr>
+              <a:t>워터마크</a:t>
+            </a:r>
+          </a:p>
+        </p:txBody>
+      </p:sp>
+      <p:sp>
+        <p:nvSpPr>
+          <p:cNvPr id="17" name="Rounded Rectangle 16"/>
+          <p:cNvSpPr/>
+          <p:nvPr/>
+        </p:nvSpPr>
+        <p:spPr>
+          <a:xfrm>
+            <a:off x="6766560" y="2926080"/>
+            <a:ext cx="1645920" cy="685800"/>
+          </a:xfrm>
+          <a:prstGeom prst="roundRect">
+            <a:avLst>
+              <a:gd name="adj" fmla="val 50000"/>
+            </a:avLst>
+          </a:prstGeom>
+          <a:noFill/>
+          <a:ln w="22225">
+            <a:solidFill>
+              <a:srgbClr val="D5DDE6"/>
+            </a:solidFill>
+            <a:prstDash val="dash"/>
+          </a:ln>
+          <a:effectLst/>
+        </p:spPr>
+        <p:style>
+          <a:lnRef idx="1">
+            <a:schemeClr val="accent1"/>
+          </a:lnRef>
+          <a:fillRef idx="3">
+            <a:schemeClr val="accent1"/>
+          </a:fillRef>
+          <a:effectRef idx="2">
+            <a:schemeClr val="accent1"/>
+          </a:effectRef>
+          <a:fontRef idx="minor">
+            <a:schemeClr val="lt1"/>
+          </a:fontRef>
+        </p:style>
+        <p:txBody>
+          <a:bodyPr rtlCol="0" anchor="ctr"/>
+          <a:lstStyle/>
+          <a:p>
+            <a:pPr algn="ctr"/>
+          </a:p>
+        </p:txBody>
+      </p:sp>
+      <p:sp>
+        <p:nvSpPr>
+          <p:cNvPr id="18" name="Rounded Rectangle 17"/>
+          <p:cNvSpPr/>
+          <p:nvPr/>
+        </p:nvSpPr>
+        <p:spPr>
+          <a:xfrm>
+            <a:off x="6565392" y="3913632"/>
+            <a:ext cx="868680" cy="274320"/>
+          </a:xfrm>
+          <a:prstGeom prst="roundRect">
+            <a:avLst>
+              <a:gd name="adj" fmla="val 50000"/>
+            </a:avLst>
+          </a:prstGeom>
+          <a:solidFill>
+            <a:srgbClr val="FFFFFF"/>
+          </a:solidFill>
+          <a:ln>
+            <a:noFill/>
+          </a:ln>
+          <a:effectLst/>
+        </p:spPr>
+        <p:style>
+          <a:lnRef idx="1">
+            <a:schemeClr val="accent1"/>
+          </a:lnRef>
+          <a:fillRef idx="3">
+            <a:schemeClr val="accent1"/>
+          </a:fillRef>
+          <a:effectRef idx="2">
+            <a:schemeClr val="accent1"/>
+          </a:effectRef>
+          <a:fontRef idx="minor">
+            <a:schemeClr val="lt1"/>
+          </a:fontRef>
+        </p:style>
+        <p:txBody>
+          <a:bodyPr rtlCol="0" anchor="ctr" wrap="none" lIns="0" rIns="0" tIns="0" bIns="0"/>
+          <a:lstStyle/>
+          <a:p>
+            <a:pPr algn="ctr">
+              <a:lnSpc>
+                <a:spcPct val="100000"/>
+              </a:lnSpc>
+            </a:pPr>
+            <a:r>
+              <a:rPr sz="850" b="0" i="0">
+                <a:solidFill>
+                  <a:srgbClr val="28364A"/>
+                </a:solidFill>
+                <a:latin typeface="Pretendard SemiBold"/>
+                <a:ea typeface="Pretendard SemiBold"/>
+              </a:rPr>
+              <a:t>지우기 전</a:t>
+            </a:r>
+          </a:p>
+        </p:txBody>
+      </p:sp>
+      <p:sp>
+        <p:nvSpPr>
+          <p:cNvPr id="19" name="Rounded Rectangle 18"/>
+          <p:cNvSpPr/>
+          <p:nvPr/>
+        </p:nvSpPr>
+        <p:spPr>
+          <a:xfrm>
+            <a:off x="9006840" y="2468880"/>
+            <a:ext cx="2377440" cy="1783080"/>
+          </a:xfrm>
+          <a:prstGeom prst="roundRect">
+            <a:avLst>
+              <a:gd name="adj" fmla="val 10000"/>
+            </a:avLst>
+          </a:prstGeom>
+          <a:solidFill>
+            <a:srgbClr val="F4F8FA"/>
+          </a:solidFill>
+          <a:ln w="9525">
+            <a:solidFill>
+              <a:srgbClr val="D8E3EA"/>
+            </a:solidFill>
+          </a:ln>
+          <a:effectLst/>
+          <a:effectLst>
+            <a:outerShdw blurRad="170000" dist="50000" dir="5400000" rotWithShape="0">
+              <a:srgbClr val="16241C">
+                <a:alpha val="30000"/>
+              </a:srgbClr>
+            </a:outerShdw>
+          </a:effectLst>
+        </p:spPr>
+        <p:style>
+          <a:lnRef idx="1">
+            <a:schemeClr val="accent1"/>
+          </a:lnRef>
+          <a:fillRef idx="3">
+            <a:schemeClr val="accent1"/>
+          </a:fillRef>
+          <a:effectRef idx="2">
+            <a:schemeClr val="accent1"/>
+          </a:effectRef>
+          <a:fontRef idx="minor">
+            <a:schemeClr val="lt1"/>
+          </a:fontRef>
+        </p:style>
+        <p:txBody>
+          <a:bodyPr rtlCol="0" anchor="ctr"/>
+          <a:lstStyle/>
+          <a:p>
+            <a:pPr algn="ctr"/>
+          </a:p>
+        </p:txBody>
+      </p:sp>
+      <p:sp>
+        <p:nvSpPr>
+          <p:cNvPr id="20" name="TextBox 19"/>
+          <p:cNvSpPr txBox="1"/>
+          <p:nvPr/>
+        </p:nvSpPr>
+        <p:spPr>
+          <a:xfrm>
+            <a:off x="10607040" y="2743200"/>
+            <a:ext cx="548640" cy="411480"/>
+          </a:xfrm>
+          <a:prstGeom prst="rect">
+            <a:avLst/>
+          </a:prstGeom>
+          <a:noFill/>
+        </p:spPr>
+        <p:txBody>
+          <a:bodyPr wrap="square" lIns="0" rIns="0" tIns="0" bIns="0">
+            <a:spAutoFit/>
+          </a:bodyPr>
+          <a:lstStyle/>
+          <a:p>
+            <a:pPr algn="l">
+              <a:lnSpc>
+                <a:spcPct val="100000"/>
+              </a:lnSpc>
+            </a:pPr>
+            <a:r>
+              <a:rPr sz="2000" b="0" i="0">
+                <a:solidFill>
+                  <a:srgbClr val="1F5068"/>
                 </a:solidFill>
                 <a:latin typeface="Pretendard"/>
                 <a:ea typeface="Pretendard"/>
               </a:rPr>
-              <a:t>사용법 안내 실제 화면</a:t>
-            </a:r>
-          </a:p>
-        </p:txBody>
-      </p:sp>
-      <p:sp>
-        <p:nvSpPr>
-          <p:cNvPr id="17" name="Rounded Rectangle 16"/>
+              <a:t>✦</a:t>
+            </a:r>
+          </a:p>
+        </p:txBody>
+      </p:sp>
+      <p:sp>
+        <p:nvSpPr>
+          <p:cNvPr id="21" name="Rounded Rectangle 20"/>
+          <p:cNvSpPr/>
+          <p:nvPr/>
+        </p:nvSpPr>
+        <p:spPr>
+          <a:xfrm>
+            <a:off x="9171432" y="3913632"/>
+            <a:ext cx="822960" cy="274320"/>
+          </a:xfrm>
+          <a:prstGeom prst="roundRect">
+            <a:avLst>
+              <a:gd name="adj" fmla="val 50000"/>
+            </a:avLst>
+          </a:prstGeom>
+          <a:solidFill>
+            <a:srgbClr val="1F5068"/>
+          </a:solidFill>
+          <a:ln>
+            <a:noFill/>
+          </a:ln>
+          <a:effectLst/>
+        </p:spPr>
+        <p:style>
+          <a:lnRef idx="1">
+            <a:schemeClr val="accent1"/>
+          </a:lnRef>
+          <a:fillRef idx="3">
+            <a:schemeClr val="accent1"/>
+          </a:fillRef>
+          <a:effectRef idx="2">
+            <a:schemeClr val="accent1"/>
+          </a:effectRef>
+          <a:fontRef idx="minor">
+            <a:schemeClr val="lt1"/>
+          </a:fontRef>
+        </p:style>
+        <p:txBody>
+          <a:bodyPr rtlCol="0" anchor="ctr" wrap="none" lIns="0" rIns="0" tIns="0" bIns="0"/>
+          <a:lstStyle/>
+          <a:p>
+            <a:pPr algn="ctr">
+              <a:lnSpc>
+                <a:spcPct val="100000"/>
+              </a:lnSpc>
+            </a:pPr>
+            <a:r>
+              <a:rPr sz="850" b="0" i="0">
+                <a:solidFill>
+                  <a:srgbClr val="FFFFFF"/>
+                </a:solidFill>
+                <a:latin typeface="Pretendard SemiBold"/>
+                <a:ea typeface="Pretendard SemiBold"/>
+              </a:rPr>
+              <a:t>지운 후</a:t>
+            </a:r>
+          </a:p>
+        </p:txBody>
+      </p:sp>
+      <p:sp>
+        <p:nvSpPr>
+          <p:cNvPr id="22" name="TextBox 21"/>
+          <p:cNvSpPr txBox="1"/>
+          <p:nvPr/>
+        </p:nvSpPr>
+        <p:spPr>
+          <a:xfrm>
+            <a:off x="6400800" y="4526280"/>
+            <a:ext cx="4983480" cy="256032"/>
+          </a:xfrm>
+          <a:prstGeom prst="rect">
+            <a:avLst/>
+          </a:prstGeom>
+          <a:noFill/>
+        </p:spPr>
+        <p:txBody>
+          <a:bodyPr wrap="square" lIns="0" rIns="0" tIns="0" bIns="0">
+            <a:spAutoFit/>
+          </a:bodyPr>
+          <a:lstStyle/>
+          <a:p>
+            <a:pPr algn="ctr">
+              <a:lnSpc>
+                <a:spcPct val="100000"/>
+              </a:lnSpc>
+            </a:pPr>
+            <a:r>
+              <a:rPr sz="900" b="0" i="0">
+                <a:solidFill>
+                  <a:srgbClr val="455569"/>
+                </a:solidFill>
+                <a:latin typeface="Pretendard"/>
+                <a:ea typeface="Pretendard"/>
+              </a:rPr>
+              <a:t>칠한 자리만 지워지고, 상품은 그대로 남습니다</a:t>
+            </a:r>
+          </a:p>
+        </p:txBody>
+      </p:sp>
+      <p:sp>
+        <p:nvSpPr>
+          <p:cNvPr id="23" name="Rounded Rectangle 22"/>
           <p:cNvSpPr/>
           <p:nvPr/>
         </p:nvSpPr>
@@ -6956,7 +6958,7 @@
                 <a:latin typeface="Pretendard SemiBold"/>
                 <a:ea typeface="Pretendard SemiBold"/>
               </a:rPr>
-              <a:t>13 / 17</a:t>
+              <a:t>13 / 19</a:t>
             </a:r>
           </a:p>
         </p:txBody>
@@ -7069,62 +7071,20 @@
       </p:sp>
       <p:sp>
         <p:nvSpPr>
-          <p:cNvPr id="4" name="TextBox 3"/>
-          <p:cNvSpPr txBox="1"/>
-          <p:nvPr/>
-        </p:nvSpPr>
-        <p:spPr>
-          <a:xfrm>
-            <a:off x="8503920" y="1645920"/>
-            <a:ext cx="3017520" cy="3474720"/>
-          </a:xfrm>
-          <a:prstGeom prst="rect">
-            <a:avLst/>
-          </a:prstGeom>
-          <a:noFill/>
-        </p:spPr>
-        <p:txBody>
-          <a:bodyPr wrap="square" lIns="0" rIns="0" tIns="0" bIns="0">
-            <a:spAutoFit/>
-          </a:bodyPr>
-          <a:lstStyle/>
-          <a:p>
-            <a:pPr algn="r">
-              <a:lnSpc>
-                <a:spcPct val="100000"/>
-              </a:lnSpc>
-            </a:pPr>
-            <a:r>
-              <a:rPr sz="19000" b="1" i="0">
-                <a:solidFill>
-                  <a:srgbClr val="ECE4D4"/>
-                </a:solidFill>
-                <a:latin typeface="Noto Serif KR"/>
-                <a:ea typeface="Noto Serif KR"/>
-              </a:rPr>
-              <a:t>3</a:t>
-            </a:r>
-          </a:p>
-        </p:txBody>
-      </p:sp>
-      <p:sp>
-        <p:nvSpPr>
-          <p:cNvPr id="5" name="Rounded Rectangle 4"/>
+          <p:cNvPr id="4" name="Rectangle 3"/>
           <p:cNvSpPr/>
           <p:nvPr/>
         </p:nvSpPr>
         <p:spPr>
           <a:xfrm>
-            <a:off x="822960" y="2148840"/>
-            <a:ext cx="868680" cy="384048"/>
-          </a:xfrm>
-          <a:prstGeom prst="roundRect">
-            <a:avLst>
-              <a:gd name="adj" fmla="val 50000"/>
-            </a:avLst>
+            <a:off x="822960" y="644652"/>
+            <a:ext cx="384048" cy="16459"/>
+          </a:xfrm>
+          <a:prstGeom prst="rect">
+            <a:avLst/>
           </a:prstGeom>
           <a:solidFill>
-            <a:srgbClr val="F6EFE5"/>
+            <a:srgbClr val="9A7440"/>
           </a:solidFill>
           <a:ln>
             <a:noFill/>
@@ -7146,37 +7106,23 @@
           </a:fontRef>
         </p:style>
         <p:txBody>
-          <a:bodyPr rtlCol="0" anchor="ctr" wrap="none" lIns="0" rIns="0" tIns="0" bIns="0"/>
-          <a:lstStyle/>
-          <a:p>
-            <a:pPr algn="ctr">
-              <a:lnSpc>
-                <a:spcPct val="100000"/>
-              </a:lnSpc>
-            </a:pPr>
-            <a:r>
-              <a:rPr sz="1150" b="0" i="0">
-                <a:solidFill>
-                  <a:srgbClr val="9A7440"/>
-                </a:solidFill>
-                <a:latin typeface="Pretendard SemiBold"/>
-                <a:ea typeface="Pretendard SemiBold"/>
-              </a:rPr>
-              <a:t>3부</a:t>
-            </a:r>
-          </a:p>
-        </p:txBody>
-      </p:sp>
-      <p:sp>
-        <p:nvSpPr>
-          <p:cNvPr id="6" name="TextBox 5"/>
+          <a:bodyPr rtlCol="0" anchor="ctr"/>
+          <a:lstStyle/>
+          <a:p>
+            <a:pPr algn="ctr"/>
+          </a:p>
+        </p:txBody>
+      </p:sp>
+      <p:sp>
+        <p:nvSpPr>
+          <p:cNvPr id="5" name="TextBox 4"/>
           <p:cNvSpPr txBox="1"/>
           <p:nvPr/>
         </p:nvSpPr>
         <p:spPr>
           <a:xfrm>
-            <a:off x="822960" y="2743200"/>
-            <a:ext cx="6949440" cy="2468880"/>
+            <a:off x="1325880" y="566928"/>
+            <a:ext cx="8686800" cy="274320"/>
           </a:xfrm>
           <a:prstGeom prst="rect">
             <a:avLst/>
@@ -7191,55 +7137,605 @@
           <a:p>
             <a:pPr algn="l">
               <a:lnSpc>
-                <a:spcPct val="132000"/>
-              </a:lnSpc>
-            </a:pPr>
-            <a:r>
-              <a:rPr sz="3200" b="1" i="0">
+                <a:spcPct val="100000"/>
+              </a:lnSpc>
+            </a:pPr>
+            <a:r>
+              <a:rPr sz="1050" b="0" i="0" spc="190">
+                <a:solidFill>
+                  <a:srgbClr val="1F5068"/>
+                </a:solidFill>
+                <a:latin typeface="Pretendard ExtraBold"/>
+                <a:ea typeface="Pretendard ExtraBold"/>
+              </a:rPr>
+              <a:t>저장할 때</a:t>
+            </a:r>
+          </a:p>
+        </p:txBody>
+      </p:sp>
+      <p:sp>
+        <p:nvSpPr>
+          <p:cNvPr id="6" name="TextBox 5"/>
+          <p:cNvSpPr txBox="1"/>
+          <p:nvPr/>
+        </p:nvSpPr>
+        <p:spPr>
+          <a:xfrm>
+            <a:off x="822960" y="1234440"/>
+            <a:ext cx="4937760" cy="1280160"/>
+          </a:xfrm>
+          <a:prstGeom prst="rect">
+            <a:avLst/>
+          </a:prstGeom>
+          <a:noFill/>
+        </p:spPr>
+        <p:txBody>
+          <a:bodyPr wrap="square" lIns="0" rIns="0" tIns="0" bIns="0">
+            <a:spAutoFit/>
+          </a:bodyPr>
+          <a:lstStyle/>
+          <a:p>
+            <a:pPr algn="l">
+              <a:lnSpc>
+                <a:spcPct val="130000"/>
+              </a:lnSpc>
+            </a:pPr>
+            <a:r>
+              <a:rPr sz="2400" b="1" i="0">
                 <a:solidFill>
                   <a:srgbClr val="1D2735"/>
                 </a:solidFill>
                 <a:latin typeface="Noto Serif KR"/>
                 <a:ea typeface="Noto Serif KR"/>
               </a:rPr>
-              <a:t>두 서비스</a:t>
+              <a:t>플랫폼별 사이즈로 전체저장</a:t>
             </a:r>
           </a:p>
           <a:p>
             <a:pPr algn="l">
               <a:lnSpc>
-                <a:spcPct val="132000"/>
-              </a:lnSpc>
-            </a:pPr>
-            <a:r>
-              <a:rPr sz="3200" b="1" i="0">
-                <a:solidFill>
-                  <a:srgbClr val="1D2735"/>
-                </a:solidFill>
-                <a:latin typeface="Noto Serif KR"/>
-                <a:ea typeface="Noto Serif KR"/>
-              </a:rPr>
-              <a:t>연결</a:t>
-            </a:r>
-          </a:p>
-          <a:p>
-            <a:pPr algn="l">
-              <a:lnSpc>
-                <a:spcPct val="145000"/>
+                <a:spcPct val="140000"/>
               </a:lnSpc>
               <a:spcBef>
-                <a:spcPts val="1400"/>
+                <a:spcPts val="800"/>
               </a:spcBef>
             </a:pPr>
             <a:r>
-              <a:rPr sz="1300" b="0" i="0">
+              <a:rPr sz="1200" b="0" i="0">
                 <a:solidFill>
                   <a:srgbClr val="455569"/>
                 </a:solidFill>
                 <a:latin typeface="Pretendard"/>
                 <a:ea typeface="Pretendard"/>
               </a:rPr>
-              <a:t>프리캔버스와 검색마스터를 오가며 쓰는 방법입니다.</a:t>
+              <a:t>저장할 때 판매 플랫폼을 고르면, 그 플랫폼 규격에 맞는 폭으로 저장됩니다.</a:t>
+            </a:r>
+          </a:p>
+        </p:txBody>
+      </p:sp>
+      <p:sp>
+        <p:nvSpPr>
+          <p:cNvPr id="7" name="TextBox 6"/>
+          <p:cNvSpPr txBox="1"/>
+          <p:nvPr/>
+        </p:nvSpPr>
+        <p:spPr>
+          <a:xfrm>
+            <a:off x="822960" y="2743200"/>
+            <a:ext cx="502920" cy="457200"/>
+          </a:xfrm>
+          <a:prstGeom prst="rect">
+            <a:avLst/>
+          </a:prstGeom>
+          <a:noFill/>
+        </p:spPr>
+        <p:txBody>
+          <a:bodyPr wrap="square" lIns="0" rIns="0" tIns="0" bIns="0">
+            <a:spAutoFit/>
+          </a:bodyPr>
+          <a:lstStyle/>
+          <a:p>
+            <a:pPr algn="ctr">
+              <a:lnSpc>
+                <a:spcPct val="100000"/>
+              </a:lnSpc>
+            </a:pPr>
+            <a:r>
+              <a:rPr sz="1600" b="0" i="0">
+                <a:solidFill>
+                  <a:srgbClr val="1D2735"/>
+                </a:solidFill>
+                <a:latin typeface="Pretendard"/>
+                <a:ea typeface="Pretendard"/>
+              </a:rPr>
+              <a:t>📐</a:t>
+            </a:r>
+          </a:p>
+        </p:txBody>
+      </p:sp>
+      <p:sp>
+        <p:nvSpPr>
+          <p:cNvPr id="8" name="TextBox 7"/>
+          <p:cNvSpPr txBox="1"/>
+          <p:nvPr/>
+        </p:nvSpPr>
+        <p:spPr>
+          <a:xfrm>
+            <a:off x="1389888" y="2734056"/>
+            <a:ext cx="4297680" cy="960120"/>
+          </a:xfrm>
+          <a:prstGeom prst="rect">
+            <a:avLst/>
+          </a:prstGeom>
+          <a:noFill/>
+        </p:spPr>
+        <p:txBody>
+          <a:bodyPr wrap="square" lIns="0" rIns="0" tIns="0" bIns="0">
+            <a:spAutoFit/>
+          </a:bodyPr>
+          <a:lstStyle/>
+          <a:p>
+            <a:pPr algn="l">
+              <a:lnSpc>
+                <a:spcPct val="100000"/>
+              </a:lnSpc>
+              <a:spcAft>
+                <a:spcPts val="300"/>
+              </a:spcAft>
+            </a:pPr>
+            <a:r>
+              <a:rPr sz="1200" b="0" i="0">
+                <a:solidFill>
+                  <a:srgbClr val="1D2735"/>
+                </a:solidFill>
+                <a:latin typeface="Pretendard ExtraBold"/>
+                <a:ea typeface="Pretendard ExtraBold"/>
+              </a:rPr>
+              <a:t>플랫폼 규격 자동 맞춤</a:t>
+            </a:r>
+          </a:p>
+          <a:p>
+            <a:pPr algn="l">
+              <a:lnSpc>
+                <a:spcPct val="128000"/>
+              </a:lnSpc>
+            </a:pPr>
+            <a:r>
+              <a:rPr sz="1050" b="0" i="0">
+                <a:solidFill>
+                  <a:srgbClr val="455569"/>
+                </a:solidFill>
+                <a:latin typeface="Pretendard"/>
+                <a:ea typeface="Pretendard"/>
+              </a:rPr>
+              <a:t>스마트스토어 860px · 쿠팡 780px · 11번가 831px · 카페24 1000px · 자사몰 1080px.</a:t>
+            </a:r>
+          </a:p>
+        </p:txBody>
+      </p:sp>
+      <p:sp>
+        <p:nvSpPr>
+          <p:cNvPr id="9" name="Rectangle 8"/>
+          <p:cNvSpPr/>
+          <p:nvPr/>
+        </p:nvSpPr>
+        <p:spPr>
+          <a:xfrm>
+            <a:off x="822960" y="3739896"/>
+            <a:ext cx="4846320" cy="10972"/>
+          </a:xfrm>
+          <a:prstGeom prst="rect">
+            <a:avLst/>
+          </a:prstGeom>
+          <a:solidFill>
+            <a:srgbClr val="EBE5DB"/>
+          </a:solidFill>
+          <a:ln>
+            <a:noFill/>
+          </a:ln>
+          <a:effectLst/>
+        </p:spPr>
+        <p:style>
+          <a:lnRef idx="1">
+            <a:schemeClr val="accent1"/>
+          </a:lnRef>
+          <a:fillRef idx="3">
+            <a:schemeClr val="accent1"/>
+          </a:fillRef>
+          <a:effectRef idx="2">
+            <a:schemeClr val="accent1"/>
+          </a:effectRef>
+          <a:fontRef idx="minor">
+            <a:schemeClr val="lt1"/>
+          </a:fontRef>
+        </p:style>
+        <p:txBody>
+          <a:bodyPr rtlCol="0" anchor="ctr"/>
+          <a:lstStyle/>
+          <a:p>
+            <a:pPr algn="ctr"/>
+          </a:p>
+        </p:txBody>
+      </p:sp>
+      <p:sp>
+        <p:nvSpPr>
+          <p:cNvPr id="10" name="TextBox 9"/>
+          <p:cNvSpPr txBox="1"/>
+          <p:nvPr/>
+        </p:nvSpPr>
+        <p:spPr>
+          <a:xfrm>
+            <a:off x="822960" y="3822191"/>
+            <a:ext cx="502920" cy="457200"/>
+          </a:xfrm>
+          <a:prstGeom prst="rect">
+            <a:avLst/>
+          </a:prstGeom>
+          <a:noFill/>
+        </p:spPr>
+        <p:txBody>
+          <a:bodyPr wrap="square" lIns="0" rIns="0" tIns="0" bIns="0">
+            <a:spAutoFit/>
+          </a:bodyPr>
+          <a:lstStyle/>
+          <a:p>
+            <a:pPr algn="ctr">
+              <a:lnSpc>
+                <a:spcPct val="100000"/>
+              </a:lnSpc>
+            </a:pPr>
+            <a:r>
+              <a:rPr sz="1600" b="0" i="0">
+                <a:solidFill>
+                  <a:srgbClr val="1D2735"/>
+                </a:solidFill>
+                <a:latin typeface="Pretendard"/>
+                <a:ea typeface="Pretendard"/>
+              </a:rPr>
+              <a:t>📄</a:t>
+            </a:r>
+          </a:p>
+        </p:txBody>
+      </p:sp>
+      <p:sp>
+        <p:nvSpPr>
+          <p:cNvPr id="11" name="TextBox 10"/>
+          <p:cNvSpPr txBox="1"/>
+          <p:nvPr/>
+        </p:nvSpPr>
+        <p:spPr>
+          <a:xfrm>
+            <a:off x="1389888" y="3813048"/>
+            <a:ext cx="4297680" cy="960120"/>
+          </a:xfrm>
+          <a:prstGeom prst="rect">
+            <a:avLst/>
+          </a:prstGeom>
+          <a:noFill/>
+        </p:spPr>
+        <p:txBody>
+          <a:bodyPr wrap="square" lIns="0" rIns="0" tIns="0" bIns="0">
+            <a:spAutoFit/>
+          </a:bodyPr>
+          <a:lstStyle/>
+          <a:p>
+            <a:pPr algn="l">
+              <a:lnSpc>
+                <a:spcPct val="100000"/>
+              </a:lnSpc>
+              <a:spcAft>
+                <a:spcPts val="300"/>
+              </a:spcAft>
+            </a:pPr>
+            <a:r>
+              <a:rPr sz="1200" b="0" i="0">
+                <a:solidFill>
+                  <a:srgbClr val="1D2735"/>
+                </a:solidFill>
+                <a:latin typeface="Pretendard ExtraBold"/>
+                <a:ea typeface="Pretendard ExtraBold"/>
+              </a:rPr>
+              <a:t>HTML 초안 포함</a:t>
+            </a:r>
+          </a:p>
+          <a:p>
+            <a:pPr algn="l">
+              <a:lnSpc>
+                <a:spcPct val="128000"/>
+              </a:lnSpc>
+            </a:pPr>
+            <a:r>
+              <a:rPr sz="1050" b="0" i="0">
+                <a:solidFill>
+                  <a:srgbClr val="455569"/>
+                </a:solidFill>
+                <a:latin typeface="Pretendard"/>
+                <a:ea typeface="Pretendard"/>
+              </a:rPr>
+              <a:t>이미지와 함께 상세페이지 HTML 초안이 저장되어, 플랫폼 에디터에 붙여넣기만 하면 됩니다.</a:t>
+            </a:r>
+          </a:p>
+        </p:txBody>
+      </p:sp>
+      <p:sp>
+        <p:nvSpPr>
+          <p:cNvPr id="12" name="Rectangle 11"/>
+          <p:cNvSpPr/>
+          <p:nvPr/>
+        </p:nvSpPr>
+        <p:spPr>
+          <a:xfrm>
+            <a:off x="822960" y="4818888"/>
+            <a:ext cx="4846320" cy="10972"/>
+          </a:xfrm>
+          <a:prstGeom prst="rect">
+            <a:avLst/>
+          </a:prstGeom>
+          <a:solidFill>
+            <a:srgbClr val="EBE5DB"/>
+          </a:solidFill>
+          <a:ln>
+            <a:noFill/>
+          </a:ln>
+          <a:effectLst/>
+        </p:spPr>
+        <p:style>
+          <a:lnRef idx="1">
+            <a:schemeClr val="accent1"/>
+          </a:lnRef>
+          <a:fillRef idx="3">
+            <a:schemeClr val="accent1"/>
+          </a:fillRef>
+          <a:effectRef idx="2">
+            <a:schemeClr val="accent1"/>
+          </a:effectRef>
+          <a:fontRef idx="minor">
+            <a:schemeClr val="lt1"/>
+          </a:fontRef>
+        </p:style>
+        <p:txBody>
+          <a:bodyPr rtlCol="0" anchor="ctr"/>
+          <a:lstStyle/>
+          <a:p>
+            <a:pPr algn="ctr"/>
+          </a:p>
+        </p:txBody>
+      </p:sp>
+      <p:sp>
+        <p:nvSpPr>
+          <p:cNvPr id="13" name="TextBox 12"/>
+          <p:cNvSpPr txBox="1"/>
+          <p:nvPr/>
+        </p:nvSpPr>
+        <p:spPr>
+          <a:xfrm>
+            <a:off x="822960" y="4901183"/>
+            <a:ext cx="502920" cy="457200"/>
+          </a:xfrm>
+          <a:prstGeom prst="rect">
+            <a:avLst/>
+          </a:prstGeom>
+          <a:noFill/>
+        </p:spPr>
+        <p:txBody>
+          <a:bodyPr wrap="square" lIns="0" rIns="0" tIns="0" bIns="0">
+            <a:spAutoFit/>
+          </a:bodyPr>
+          <a:lstStyle/>
+          <a:p>
+            <a:pPr algn="ctr">
+              <a:lnSpc>
+                <a:spcPct val="100000"/>
+              </a:lnSpc>
+            </a:pPr>
+            <a:r>
+              <a:rPr sz="1600" b="0" i="0">
+                <a:solidFill>
+                  <a:srgbClr val="1D2735"/>
+                </a:solidFill>
+                <a:latin typeface="Pretendard"/>
+                <a:ea typeface="Pretendard"/>
+              </a:rPr>
+              <a:t>✅</a:t>
+            </a:r>
+          </a:p>
+        </p:txBody>
+      </p:sp>
+      <p:sp>
+        <p:nvSpPr>
+          <p:cNvPr id="14" name="TextBox 13"/>
+          <p:cNvSpPr txBox="1"/>
+          <p:nvPr/>
+        </p:nvSpPr>
+        <p:spPr>
+          <a:xfrm>
+            <a:off x="1389888" y="4892040"/>
+            <a:ext cx="4297680" cy="960120"/>
+          </a:xfrm>
+          <a:prstGeom prst="rect">
+            <a:avLst/>
+          </a:prstGeom>
+          <a:noFill/>
+        </p:spPr>
+        <p:txBody>
+          <a:bodyPr wrap="square" lIns="0" rIns="0" tIns="0" bIns="0">
+            <a:spAutoFit/>
+          </a:bodyPr>
+          <a:lstStyle/>
+          <a:p>
+            <a:pPr algn="l">
+              <a:lnSpc>
+                <a:spcPct val="100000"/>
+              </a:lnSpc>
+              <a:spcAft>
+                <a:spcPts val="300"/>
+              </a:spcAft>
+            </a:pPr>
+            <a:r>
+              <a:rPr sz="1200" b="0" i="0">
+                <a:solidFill>
+                  <a:srgbClr val="1D2735"/>
+                </a:solidFill>
+                <a:latin typeface="Pretendard ExtraBold"/>
+                <a:ea typeface="Pretendard ExtraBold"/>
+              </a:rPr>
+              <a:t>저장 전 자동 점검</a:t>
+            </a:r>
+          </a:p>
+          <a:p>
+            <a:pPr algn="l">
+              <a:lnSpc>
+                <a:spcPct val="128000"/>
+              </a:lnSpc>
+            </a:pPr>
+            <a:r>
+              <a:rPr sz="1050" b="0" i="0">
+                <a:solidFill>
+                  <a:srgbClr val="455569"/>
+                </a:solidFill>
+                <a:latin typeface="Pretendard"/>
+                <a:ea typeface="Pretendard"/>
+              </a:rPr>
+              <a:t>옵션 이미지·상품정보제공고시·GIF·누락 이미지를 저장 전에 한 번에 확인해 줍니다.</a:t>
+            </a:r>
+          </a:p>
+        </p:txBody>
+      </p:sp>
+      <p:pic>
+        <p:nvPicPr>
+          <p:cNvPr id="15" name="Picture 14" descr="save_modal.jpg"/>
+          <p:cNvPicPr>
+            <a:picLocks noChangeAspect="1"/>
+          </p:cNvPicPr>
+          <p:nvPr/>
+        </p:nvPicPr>
+        <p:blipFill>
+          <a:blip r:embed="rId2"/>
+          <a:stretch>
+            <a:fillRect/>
+          </a:stretch>
+        </p:blipFill>
+        <p:spPr>
+          <a:xfrm>
+            <a:off x="6263640" y="1234440"/>
+            <a:ext cx="2651760" cy="4476117"/>
+          </a:xfrm>
+          <a:prstGeom prst="rect">
+            <a:avLst/>
+          </a:prstGeom>
+          <a:ln w="12700">
+            <a:solidFill>
+              <a:srgbClr val="EBE5DB"/>
+            </a:solidFill>
+          </a:ln>
+          <a:effectLst/>
+          <a:effectLst>
+            <a:outerShdw blurRad="170000" dist="50000" dir="5400000" rotWithShape="0">
+              <a:srgbClr val="16241C">
+                <a:alpha val="30000"/>
+              </a:srgbClr>
+            </a:outerShdw>
+          </a:effectLst>
+        </p:spPr>
+      </p:pic>
+      <p:sp>
+        <p:nvSpPr>
+          <p:cNvPr id="16" name="TextBox 15"/>
+          <p:cNvSpPr txBox="1"/>
+          <p:nvPr/>
+        </p:nvSpPr>
+        <p:spPr>
+          <a:xfrm>
+            <a:off x="5989320" y="5820284"/>
+            <a:ext cx="3200400" cy="256032"/>
+          </a:xfrm>
+          <a:prstGeom prst="rect">
+            <a:avLst/>
+          </a:prstGeom>
+          <a:noFill/>
+        </p:spPr>
+        <p:txBody>
+          <a:bodyPr wrap="square" lIns="0" rIns="0" tIns="0" bIns="0">
+            <a:spAutoFit/>
+          </a:bodyPr>
+          <a:lstStyle/>
+          <a:p>
+            <a:pPr algn="ctr">
+              <a:lnSpc>
+                <a:spcPct val="100000"/>
+              </a:lnSpc>
+            </a:pPr>
+            <a:r>
+              <a:rPr sz="900" b="0" i="0">
+                <a:solidFill>
+                  <a:srgbClr val="455569"/>
+                </a:solidFill>
+                <a:latin typeface="Pretendard"/>
+                <a:ea typeface="Pretendard"/>
+              </a:rPr>
+              <a:t>저장 방식 선택 — 실제 화면</a:t>
+            </a:r>
+          </a:p>
+        </p:txBody>
+      </p:sp>
+      <p:sp>
+        <p:nvSpPr>
+          <p:cNvPr id="17" name="Rounded Rectangle 16"/>
+          <p:cNvSpPr/>
+          <p:nvPr/>
+        </p:nvSpPr>
+        <p:spPr>
+          <a:xfrm>
+            <a:off x="502920" y="6355080"/>
+            <a:ext cx="868680" cy="329184"/>
+          </a:xfrm>
+          <a:prstGeom prst="roundRect">
+            <a:avLst>
+              <a:gd name="adj" fmla="val 50000"/>
+            </a:avLst>
+          </a:prstGeom>
+          <a:solidFill>
+            <a:srgbClr val="FFFFFF"/>
+          </a:solidFill>
+          <a:ln w="9525">
+            <a:solidFill>
+              <a:srgbClr val="EBE5DB"/>
+            </a:solidFill>
+          </a:ln>
+          <a:effectLst/>
+        </p:spPr>
+        <p:style>
+          <a:lnRef idx="1">
+            <a:schemeClr val="accent1"/>
+          </a:lnRef>
+          <a:fillRef idx="3">
+            <a:schemeClr val="accent1"/>
+          </a:fillRef>
+          <a:effectRef idx="2">
+            <a:schemeClr val="accent1"/>
+          </a:effectRef>
+          <a:fontRef idx="minor">
+            <a:schemeClr val="lt1"/>
+          </a:fontRef>
+        </p:style>
+        <p:txBody>
+          <a:bodyPr rtlCol="0" anchor="ctr" wrap="none" lIns="0" rIns="0" tIns="0" bIns="0"/>
+          <a:lstStyle/>
+          <a:p>
+            <a:pPr algn="ctr">
+              <a:lnSpc>
+                <a:spcPct val="100000"/>
+              </a:lnSpc>
+            </a:pPr>
+            <a:r>
+              <a:rPr sz="1050" b="0" i="0">
+                <a:solidFill>
+                  <a:srgbClr val="455569"/>
+                </a:solidFill>
+                <a:latin typeface="Pretendard SemiBold"/>
+                <a:ea typeface="Pretendard SemiBold"/>
+              </a:rPr>
+              <a:t>14 / 19</a:t>
             </a:r>
           </a:p>
         </p:txBody>
@@ -7429,7 +7925,7 @@
                 <a:latin typeface="Pretendard ExtraBold"/>
                 <a:ea typeface="Pretendard ExtraBold"/>
               </a:rPr>
-              <a:t>두 서비스 연결</a:t>
+              <a:t>처음 쓰는 분이라면</a:t>
             </a:r>
           </a:p>
         </p:txBody>
@@ -7442,8 +7938,8 @@
         </p:nvSpPr>
         <p:spPr>
           <a:xfrm>
-            <a:off x="822960" y="960120"/>
-            <a:ext cx="10515600" cy="566928"/>
+            <a:off x="822960" y="1234440"/>
+            <a:ext cx="4937760" cy="1280160"/>
           </a:xfrm>
           <a:prstGeom prst="rect">
             <a:avLst/>
@@ -7456,47 +7952,435 @@
           </a:bodyPr>
           <a:lstStyle/>
           <a:p>
-            <a:pPr algn="ctr">
-              <a:lnSpc>
-                <a:spcPct val="100000"/>
-              </a:lnSpc>
-            </a:pPr>
-            <a:r>
-              <a:rPr sz="2200" b="1" i="0">
+            <a:pPr algn="l">
+              <a:lnSpc>
+                <a:spcPct val="130000"/>
+              </a:lnSpc>
+            </a:pPr>
+            <a:r>
+              <a:rPr sz="2400" b="1" i="0">
                 <a:solidFill>
                   <a:srgbClr val="1D2735"/>
                 </a:solidFill>
                 <a:latin typeface="Noto Serif KR"/>
                 <a:ea typeface="Noto Serif KR"/>
               </a:rPr>
-              <a:t>프리캔버스 상단 메뉴에서 </a:t>
-            </a:r>
-            <a:r>
-              <a:rPr sz="2200" b="1" i="0">
-                <a:solidFill>
-                  <a:srgbClr val="1F5068"/>
-                </a:solidFill>
-                <a:latin typeface="Noto Serif KR"/>
-                <a:ea typeface="Noto Serif KR"/>
-              </a:rPr>
-              <a:t>검색마스터</a:t>
-            </a:r>
-            <a:r>
-              <a:rPr sz="2200" b="1" i="0">
+              <a:t>단계별 사용법 안내</a:t>
+            </a:r>
+          </a:p>
+          <a:p>
+            <a:pPr algn="l">
+              <a:lnSpc>
+                <a:spcPct val="140000"/>
+              </a:lnSpc>
+              <a:spcBef>
+                <a:spcPts val="800"/>
+              </a:spcBef>
+            </a:pPr>
+            <a:r>
+              <a:rPr sz="1200" b="0" i="0">
+                <a:solidFill>
+                  <a:srgbClr val="455569"/>
+                </a:solidFill>
+                <a:latin typeface="Pretendard"/>
+                <a:ea typeface="Pretendard"/>
+              </a:rPr>
+              <a:t>화면 위에 순서대로 안내가 떠서, 처음이어도 따라 하기만 하면 됩니다.</a:t>
+            </a:r>
+          </a:p>
+        </p:txBody>
+      </p:sp>
+      <p:sp>
+        <p:nvSpPr>
+          <p:cNvPr id="7" name="TextBox 6"/>
+          <p:cNvSpPr txBox="1"/>
+          <p:nvPr/>
+        </p:nvSpPr>
+        <p:spPr>
+          <a:xfrm>
+            <a:off x="822960" y="2743200"/>
+            <a:ext cx="502920" cy="457200"/>
+          </a:xfrm>
+          <a:prstGeom prst="rect">
+            <a:avLst/>
+          </a:prstGeom>
+          <a:noFill/>
+        </p:spPr>
+        <p:txBody>
+          <a:bodyPr wrap="square" lIns="0" rIns="0" tIns="0" bIns="0">
+            <a:spAutoFit/>
+          </a:bodyPr>
+          <a:lstStyle/>
+          <a:p>
+            <a:pPr algn="ctr">
+              <a:lnSpc>
+                <a:spcPct val="100000"/>
+              </a:lnSpc>
+            </a:pPr>
+            <a:r>
+              <a:rPr sz="1600" b="0" i="0">
                 <a:solidFill>
                   <a:srgbClr val="1D2735"/>
                 </a:solidFill>
-                <a:latin typeface="Noto Serif KR"/>
-                <a:ea typeface="Noto Serif KR"/>
-              </a:rPr>
-              <a:t>로 바로 이동합니다.</a:t>
+                <a:latin typeface="Pretendard"/>
+                <a:ea typeface="Pretendard"/>
+              </a:rPr>
+              <a:t>🗂️</a:t>
+            </a:r>
+          </a:p>
+        </p:txBody>
+      </p:sp>
+      <p:sp>
+        <p:nvSpPr>
+          <p:cNvPr id="8" name="TextBox 7"/>
+          <p:cNvSpPr txBox="1"/>
+          <p:nvPr/>
+        </p:nvSpPr>
+        <p:spPr>
+          <a:xfrm>
+            <a:off x="1389888" y="2734056"/>
+            <a:ext cx="4297680" cy="960120"/>
+          </a:xfrm>
+          <a:prstGeom prst="rect">
+            <a:avLst/>
+          </a:prstGeom>
+          <a:noFill/>
+        </p:spPr>
+        <p:txBody>
+          <a:bodyPr wrap="square" lIns="0" rIns="0" tIns="0" bIns="0">
+            <a:spAutoFit/>
+          </a:bodyPr>
+          <a:lstStyle/>
+          <a:p>
+            <a:pPr algn="l">
+              <a:lnSpc>
+                <a:spcPct val="100000"/>
+              </a:lnSpc>
+              <a:spcAft>
+                <a:spcPts val="300"/>
+              </a:spcAft>
+            </a:pPr>
+            <a:r>
+              <a:rPr sz="1200" b="0" i="0">
+                <a:solidFill>
+                  <a:srgbClr val="1D2735"/>
+                </a:solidFill>
+                <a:latin typeface="Pretendard ExtraBold"/>
+                <a:ea typeface="Pretendard ExtraBold"/>
+              </a:rPr>
+              <a:t>결과물마다 다른 안내</a:t>
+            </a:r>
+          </a:p>
+          <a:p>
+            <a:pPr algn="l">
+              <a:lnSpc>
+                <a:spcPct val="128000"/>
+              </a:lnSpc>
+            </a:pPr>
+            <a:r>
+              <a:rPr sz="1050" b="0" i="0">
+                <a:solidFill>
+                  <a:srgbClr val="455569"/>
+                </a:solidFill>
+                <a:latin typeface="Pretendard"/>
+                <a:ea typeface="Pretendard"/>
+              </a:rPr>
+              <a:t>일반·의류·과일채소·카드뉴스·썸네일 — 만들려는 것에 맞는 안내가 따로 준비되어 있습니다.</a:t>
+            </a:r>
+          </a:p>
+        </p:txBody>
+      </p:sp>
+      <p:sp>
+        <p:nvSpPr>
+          <p:cNvPr id="9" name="Rectangle 8"/>
+          <p:cNvSpPr/>
+          <p:nvPr/>
+        </p:nvSpPr>
+        <p:spPr>
+          <a:xfrm>
+            <a:off x="822960" y="3739896"/>
+            <a:ext cx="4846320" cy="10972"/>
+          </a:xfrm>
+          <a:prstGeom prst="rect">
+            <a:avLst/>
+          </a:prstGeom>
+          <a:solidFill>
+            <a:srgbClr val="EBE5DB"/>
+          </a:solidFill>
+          <a:ln>
+            <a:noFill/>
+          </a:ln>
+          <a:effectLst/>
+        </p:spPr>
+        <p:style>
+          <a:lnRef idx="1">
+            <a:schemeClr val="accent1"/>
+          </a:lnRef>
+          <a:fillRef idx="3">
+            <a:schemeClr val="accent1"/>
+          </a:fillRef>
+          <a:effectRef idx="2">
+            <a:schemeClr val="accent1"/>
+          </a:effectRef>
+          <a:fontRef idx="minor">
+            <a:schemeClr val="lt1"/>
+          </a:fontRef>
+        </p:style>
+        <p:txBody>
+          <a:bodyPr rtlCol="0" anchor="ctr"/>
+          <a:lstStyle/>
+          <a:p>
+            <a:pPr algn="ctr"/>
+          </a:p>
+        </p:txBody>
+      </p:sp>
+      <p:sp>
+        <p:nvSpPr>
+          <p:cNvPr id="10" name="TextBox 9"/>
+          <p:cNvSpPr txBox="1"/>
+          <p:nvPr/>
+        </p:nvSpPr>
+        <p:spPr>
+          <a:xfrm>
+            <a:off x="822960" y="3822191"/>
+            <a:ext cx="502920" cy="457200"/>
+          </a:xfrm>
+          <a:prstGeom prst="rect">
+            <a:avLst/>
+          </a:prstGeom>
+          <a:noFill/>
+        </p:spPr>
+        <p:txBody>
+          <a:bodyPr wrap="square" lIns="0" rIns="0" tIns="0" bIns="0">
+            <a:spAutoFit/>
+          </a:bodyPr>
+          <a:lstStyle/>
+          <a:p>
+            <a:pPr algn="ctr">
+              <a:lnSpc>
+                <a:spcPct val="100000"/>
+              </a:lnSpc>
+            </a:pPr>
+            <a:r>
+              <a:rPr sz="1600" b="0" i="0">
+                <a:solidFill>
+                  <a:srgbClr val="1D2735"/>
+                </a:solidFill>
+                <a:latin typeface="Pretendard"/>
+                <a:ea typeface="Pretendard"/>
+              </a:rPr>
+              <a:t>📋</a:t>
+            </a:r>
+          </a:p>
+        </p:txBody>
+      </p:sp>
+      <p:sp>
+        <p:nvSpPr>
+          <p:cNvPr id="11" name="TextBox 10"/>
+          <p:cNvSpPr txBox="1"/>
+          <p:nvPr/>
+        </p:nvSpPr>
+        <p:spPr>
+          <a:xfrm>
+            <a:off x="1389888" y="3813048"/>
+            <a:ext cx="4297680" cy="960120"/>
+          </a:xfrm>
+          <a:prstGeom prst="rect">
+            <a:avLst/>
+          </a:prstGeom>
+          <a:noFill/>
+        </p:spPr>
+        <p:txBody>
+          <a:bodyPr wrap="square" lIns="0" rIns="0" tIns="0" bIns="0">
+            <a:spAutoFit/>
+          </a:bodyPr>
+          <a:lstStyle/>
+          <a:p>
+            <a:pPr algn="l">
+              <a:lnSpc>
+                <a:spcPct val="100000"/>
+              </a:lnSpc>
+              <a:spcAft>
+                <a:spcPts val="300"/>
+              </a:spcAft>
+            </a:pPr>
+            <a:r>
+              <a:rPr sz="1200" b="0" i="0">
+                <a:solidFill>
+                  <a:srgbClr val="1D2735"/>
+                </a:solidFill>
+                <a:latin typeface="Pretendard ExtraBold"/>
+                <a:ea typeface="Pretendard ExtraBold"/>
+              </a:rPr>
+              <a:t>사진 올리기부터 저장까지</a:t>
+            </a:r>
+          </a:p>
+          <a:p>
+            <a:pPr algn="l">
+              <a:lnSpc>
+                <a:spcPct val="128000"/>
+              </a:lnSpc>
+            </a:pPr>
+            <a:r>
+              <a:rPr sz="1050" b="0" i="0">
+                <a:solidFill>
+                  <a:srgbClr val="455569"/>
+                </a:solidFill>
+                <a:latin typeface="Pretendard"/>
+                <a:ea typeface="Pretendard"/>
+              </a:rPr>
+              <a:t>각 단계에서 무엇을 누르고 무엇을 입력하는지 화면 위에서 하나씩 짚어 줍니다.</a:t>
+            </a:r>
+          </a:p>
+        </p:txBody>
+      </p:sp>
+      <p:sp>
+        <p:nvSpPr>
+          <p:cNvPr id="12" name="Rectangle 11"/>
+          <p:cNvSpPr/>
+          <p:nvPr/>
+        </p:nvSpPr>
+        <p:spPr>
+          <a:xfrm>
+            <a:off x="822960" y="4818888"/>
+            <a:ext cx="4846320" cy="10972"/>
+          </a:xfrm>
+          <a:prstGeom prst="rect">
+            <a:avLst/>
+          </a:prstGeom>
+          <a:solidFill>
+            <a:srgbClr val="EBE5DB"/>
+          </a:solidFill>
+          <a:ln>
+            <a:noFill/>
+          </a:ln>
+          <a:effectLst/>
+        </p:spPr>
+        <p:style>
+          <a:lnRef idx="1">
+            <a:schemeClr val="accent1"/>
+          </a:lnRef>
+          <a:fillRef idx="3">
+            <a:schemeClr val="accent1"/>
+          </a:fillRef>
+          <a:effectRef idx="2">
+            <a:schemeClr val="accent1"/>
+          </a:effectRef>
+          <a:fontRef idx="minor">
+            <a:schemeClr val="lt1"/>
+          </a:fontRef>
+        </p:style>
+        <p:txBody>
+          <a:bodyPr rtlCol="0" anchor="ctr"/>
+          <a:lstStyle/>
+          <a:p>
+            <a:pPr algn="ctr"/>
+          </a:p>
+        </p:txBody>
+      </p:sp>
+      <p:sp>
+        <p:nvSpPr>
+          <p:cNvPr id="13" name="TextBox 12"/>
+          <p:cNvSpPr txBox="1"/>
+          <p:nvPr/>
+        </p:nvSpPr>
+        <p:spPr>
+          <a:xfrm>
+            <a:off x="822960" y="4901183"/>
+            <a:ext cx="502920" cy="457200"/>
+          </a:xfrm>
+          <a:prstGeom prst="rect">
+            <a:avLst/>
+          </a:prstGeom>
+          <a:noFill/>
+        </p:spPr>
+        <p:txBody>
+          <a:bodyPr wrap="square" lIns="0" rIns="0" tIns="0" bIns="0">
+            <a:spAutoFit/>
+          </a:bodyPr>
+          <a:lstStyle/>
+          <a:p>
+            <a:pPr algn="ctr">
+              <a:lnSpc>
+                <a:spcPct val="100000"/>
+              </a:lnSpc>
+            </a:pPr>
+            <a:r>
+              <a:rPr sz="1600" b="0" i="0">
+                <a:solidFill>
+                  <a:srgbClr val="1D2735"/>
+                </a:solidFill>
+                <a:latin typeface="Pretendard"/>
+                <a:ea typeface="Pretendard"/>
+              </a:rPr>
+              <a:t>🔁</a:t>
+            </a:r>
+          </a:p>
+        </p:txBody>
+      </p:sp>
+      <p:sp>
+        <p:nvSpPr>
+          <p:cNvPr id="14" name="TextBox 13"/>
+          <p:cNvSpPr txBox="1"/>
+          <p:nvPr/>
+        </p:nvSpPr>
+        <p:spPr>
+          <a:xfrm>
+            <a:off x="1389888" y="4892040"/>
+            <a:ext cx="4297680" cy="960120"/>
+          </a:xfrm>
+          <a:prstGeom prst="rect">
+            <a:avLst/>
+          </a:prstGeom>
+          <a:noFill/>
+        </p:spPr>
+        <p:txBody>
+          <a:bodyPr wrap="square" lIns="0" rIns="0" tIns="0" bIns="0">
+            <a:spAutoFit/>
+          </a:bodyPr>
+          <a:lstStyle/>
+          <a:p>
+            <a:pPr algn="l">
+              <a:lnSpc>
+                <a:spcPct val="100000"/>
+              </a:lnSpc>
+              <a:spcAft>
+                <a:spcPts val="300"/>
+              </a:spcAft>
+            </a:pPr>
+            <a:r>
+              <a:rPr sz="1200" b="0" i="0">
+                <a:solidFill>
+                  <a:srgbClr val="1D2735"/>
+                </a:solidFill>
+                <a:latin typeface="Pretendard ExtraBold"/>
+                <a:ea typeface="Pretendard ExtraBold"/>
+              </a:rPr>
+              <a:t>언제든 다시 보기</a:t>
+            </a:r>
+          </a:p>
+          <a:p>
+            <a:pPr algn="l">
+              <a:lnSpc>
+                <a:spcPct val="128000"/>
+              </a:lnSpc>
+            </a:pPr>
+            <a:r>
+              <a:rPr sz="1050" b="0" i="0">
+                <a:solidFill>
+                  <a:srgbClr val="455569"/>
+                </a:solidFill>
+                <a:latin typeface="Pretendard"/>
+                <a:ea typeface="Pretendard"/>
+              </a:rPr>
+              <a:t>첫 화면의 “사용법 보기”를 누르면 언제든 처음부터 다시 볼 수 있습니다.</a:t>
             </a:r>
           </a:p>
         </p:txBody>
       </p:sp>
       <p:pic>
         <p:nvPicPr>
-          <p:cNvPr id="7" name="Picture 6" descr="fc_nav.jpg"/>
+          <p:cNvPr id="15" name="Picture 14" descr="fc_guide.jpg"/>
           <p:cNvPicPr>
             <a:picLocks noChangeAspect="1"/>
           </p:cNvPicPr>
@@ -7510,15 +8394,15 @@
         </p:blipFill>
         <p:spPr>
           <a:xfrm>
-            <a:off x="1097280" y="1783080"/>
-            <a:ext cx="9994392" cy="616321"/>
+            <a:off x="6263640" y="1371600"/>
+            <a:ext cx="3657600" cy="3237186"/>
           </a:xfrm>
           <a:prstGeom prst="rect">
             <a:avLst/>
           </a:prstGeom>
           <a:ln w="12700">
             <a:solidFill>
-              <a:srgbClr val="DAD2C6"/>
+              <a:srgbClr val="EBE5DB"/>
             </a:solidFill>
           </a:ln>
           <a:effectLst/>
@@ -7533,58 +8417,14 @@
       </p:pic>
       <p:sp>
         <p:nvSpPr>
-          <p:cNvPr id="8" name="Oval 7"/>
-          <p:cNvSpPr/>
-          <p:nvPr/>
-        </p:nvSpPr>
-        <p:spPr>
-          <a:xfrm>
-            <a:off x="6014520" y="1732788"/>
-            <a:ext cx="929478" cy="716904"/>
-          </a:xfrm>
-          <a:prstGeom prst="ellipse">
-            <a:avLst/>
-          </a:prstGeom>
-          <a:noFill/>
-          <a:ln w="28575">
-            <a:solidFill>
-              <a:srgbClr val="1F5068"/>
-            </a:solidFill>
-          </a:ln>
-          <a:effectLst/>
-        </p:spPr>
-        <p:style>
-          <a:lnRef idx="1">
-            <a:schemeClr val="accent1"/>
-          </a:lnRef>
-          <a:fillRef idx="3">
-            <a:schemeClr val="accent1"/>
-          </a:fillRef>
-          <a:effectRef idx="2">
-            <a:schemeClr val="accent1"/>
-          </a:effectRef>
-          <a:fontRef idx="minor">
-            <a:schemeClr val="lt1"/>
-          </a:fontRef>
-        </p:style>
-        <p:txBody>
-          <a:bodyPr rtlCol="0" anchor="ctr"/>
-          <a:lstStyle/>
-          <a:p>
-            <a:pPr algn="ctr"/>
-          </a:p>
-        </p:txBody>
-      </p:sp>
-      <p:sp>
-        <p:nvSpPr>
-          <p:cNvPr id="9" name="TextBox 8"/>
+          <p:cNvPr id="16" name="TextBox 15"/>
           <p:cNvSpPr txBox="1"/>
           <p:nvPr/>
         </p:nvSpPr>
         <p:spPr>
           <a:xfrm>
-            <a:off x="822960" y="2527416"/>
-            <a:ext cx="10543032" cy="256032"/>
+            <a:off x="5989320" y="4718514"/>
+            <a:ext cx="4206240" cy="256032"/>
           </a:xfrm>
           <a:prstGeom prst="rect">
             <a:avLst/>
@@ -7603,406 +8443,14 @@
               </a:lnSpc>
             </a:pPr>
             <a:r>
-              <a:rPr sz="950" b="0" i="0">
-                <a:solidFill>
-                  <a:srgbClr val="1F5068"/>
-                </a:solidFill>
-                <a:latin typeface="Pretendard ExtraBold"/>
-                <a:ea typeface="Pretendard ExtraBold"/>
-              </a:rPr>
-              <a:t>프리캔버스 상단 메뉴 속 「검색마스터」 — 실제 화면</a:t>
-            </a:r>
-          </a:p>
-        </p:txBody>
-      </p:sp>
-      <p:sp>
-        <p:nvSpPr>
-          <p:cNvPr id="10" name="Rounded Rectangle 9"/>
-          <p:cNvSpPr/>
-          <p:nvPr/>
-        </p:nvSpPr>
-        <p:spPr>
-          <a:xfrm>
-            <a:off x="1188720" y="3291840"/>
-            <a:ext cx="4206240" cy="1371600"/>
-          </a:xfrm>
-          <a:prstGeom prst="roundRect">
-            <a:avLst>
-              <a:gd name="adj" fmla="val 10000"/>
-            </a:avLst>
-          </a:prstGeom>
-          <a:solidFill>
-            <a:srgbClr val="FFFDF7"/>
-          </a:solidFill>
-          <a:ln w="9525">
-            <a:solidFill>
-              <a:srgbClr val="DAD2C6"/>
-            </a:solidFill>
-          </a:ln>
-          <a:effectLst/>
-          <a:effectLst>
-            <a:outerShdw blurRad="170000" dist="50000" dir="5400000" rotWithShape="0">
-              <a:srgbClr val="16241C">
-                <a:alpha val="30000"/>
-              </a:srgbClr>
-            </a:outerShdw>
-          </a:effectLst>
-        </p:spPr>
-        <p:style>
-          <a:lnRef idx="1">
-            <a:schemeClr val="accent1"/>
-          </a:lnRef>
-          <a:fillRef idx="3">
-            <a:schemeClr val="accent1"/>
-          </a:fillRef>
-          <a:effectRef idx="2">
-            <a:schemeClr val="accent1"/>
-          </a:effectRef>
-          <a:fontRef idx="minor">
-            <a:schemeClr val="lt1"/>
-          </a:fontRef>
-        </p:style>
-        <p:txBody>
-          <a:bodyPr rtlCol="0" anchor="ctr"/>
-          <a:lstStyle/>
-          <a:p>
-            <a:pPr algn="ctr"/>
-          </a:p>
-        </p:txBody>
-      </p:sp>
-      <p:sp>
-        <p:nvSpPr>
-          <p:cNvPr id="11" name="TextBox 10"/>
-          <p:cNvSpPr txBox="1"/>
-          <p:nvPr/>
-        </p:nvSpPr>
-        <p:spPr>
-          <a:xfrm>
-            <a:off x="1481328" y="3529584"/>
-            <a:ext cx="3611880" cy="960120"/>
-          </a:xfrm>
-          <a:prstGeom prst="rect">
-            <a:avLst/>
-          </a:prstGeom>
-          <a:noFill/>
-        </p:spPr>
-        <p:txBody>
-          <a:bodyPr wrap="square" lIns="0" rIns="0" tIns="0" bIns="0">
-            <a:spAutoFit/>
-          </a:bodyPr>
-          <a:lstStyle/>
-          <a:p>
-            <a:pPr algn="l">
-              <a:lnSpc>
-                <a:spcPct val="100000"/>
-              </a:lnSpc>
-              <a:spcAft>
-                <a:spcPts val="500"/>
-              </a:spcAft>
-            </a:pPr>
-            <a:r>
-              <a:rPr sz="1450" b="1" i="0">
-                <a:solidFill>
-                  <a:srgbClr val="1D2735"/>
-                </a:solidFill>
-                <a:latin typeface="Noto Serif KR"/>
-                <a:ea typeface="Noto Serif KR"/>
-              </a:rPr>
-              <a:t>프리캔버스에서 작업하다가</a:t>
-            </a:r>
-          </a:p>
-          <a:p>
-            <a:pPr algn="l">
-              <a:lnSpc>
-                <a:spcPct val="130000"/>
-              </a:lnSpc>
-            </a:pPr>
-            <a:r>
-              <a:rPr sz="1100" b="0" i="0">
-                <a:solidFill>
-                  <a:srgbClr val="28364A"/>
+              <a:rPr sz="900" b="0" i="0">
+                <a:solidFill>
+                  <a:srgbClr val="455569"/>
                 </a:solidFill>
                 <a:latin typeface="Pretendard"/>
                 <a:ea typeface="Pretendard"/>
               </a:rPr>
-              <a:t>상세페이지를 만들다 상품명이나 키워드가 필요해지면,</a:t>
-            </a:r>
-          </a:p>
-        </p:txBody>
-      </p:sp>
-      <p:sp>
-        <p:nvSpPr>
-          <p:cNvPr id="12" name="TextBox 11"/>
-          <p:cNvSpPr txBox="1"/>
-          <p:nvPr/>
-        </p:nvSpPr>
-        <p:spPr>
-          <a:xfrm>
-            <a:off x="5577840" y="3566160"/>
-            <a:ext cx="1051560" cy="868680"/>
-          </a:xfrm>
-          <a:prstGeom prst="rect">
-            <a:avLst/>
-          </a:prstGeom>
-          <a:noFill/>
-        </p:spPr>
-        <p:txBody>
-          <a:bodyPr wrap="square" lIns="0" rIns="0" tIns="0" bIns="0">
-            <a:spAutoFit/>
-          </a:bodyPr>
-          <a:lstStyle/>
-          <a:p>
-            <a:pPr algn="ctr">
-              <a:lnSpc>
-                <a:spcPct val="100000"/>
-              </a:lnSpc>
-              <a:spcAft>
-                <a:spcPts val="300"/>
-              </a:spcAft>
-            </a:pPr>
-            <a:r>
-              <a:rPr sz="2400" b="1" i="0">
-                <a:solidFill>
-                  <a:srgbClr val="9A7440"/>
-                </a:solidFill>
-                <a:latin typeface="Pretendard"/>
-                <a:ea typeface="Pretendard"/>
-              </a:rPr>
-              <a:t>→</a:t>
-            </a:r>
-          </a:p>
-          <a:p>
-            <a:pPr algn="ctr">
-              <a:lnSpc>
-                <a:spcPct val="100000"/>
-              </a:lnSpc>
-            </a:pPr>
-            <a:r>
-              <a:rPr sz="950" b="0" i="0">
-                <a:solidFill>
-                  <a:srgbClr val="7D5E33"/>
-                </a:solidFill>
-                <a:latin typeface="Pretendard ExtraBold"/>
-                <a:ea typeface="Pretendard ExtraBold"/>
-              </a:rPr>
-              <a:t>버튼 한 번</a:t>
-            </a:r>
-          </a:p>
-        </p:txBody>
-      </p:sp>
-      <p:sp>
-        <p:nvSpPr>
-          <p:cNvPr id="13" name="Rounded Rectangle 12"/>
-          <p:cNvSpPr/>
-          <p:nvPr/>
-        </p:nvSpPr>
-        <p:spPr>
-          <a:xfrm>
-            <a:off x="6812280" y="3291840"/>
-            <a:ext cx="4206240" cy="1371600"/>
-          </a:xfrm>
-          <a:prstGeom prst="roundRect">
-            <a:avLst>
-              <a:gd name="adj" fmla="val 10000"/>
-            </a:avLst>
-          </a:prstGeom>
-          <a:solidFill>
-            <a:srgbClr val="F4F8FA"/>
-          </a:solidFill>
-          <a:ln w="9525">
-            <a:solidFill>
-              <a:srgbClr val="D8E3EA"/>
-            </a:solidFill>
-          </a:ln>
-          <a:effectLst/>
-          <a:effectLst>
-            <a:outerShdw blurRad="170000" dist="50000" dir="5400000" rotWithShape="0">
-              <a:srgbClr val="16241C">
-                <a:alpha val="30000"/>
-              </a:srgbClr>
-            </a:outerShdw>
-          </a:effectLst>
-        </p:spPr>
-        <p:style>
-          <a:lnRef idx="1">
-            <a:schemeClr val="accent1"/>
-          </a:lnRef>
-          <a:fillRef idx="3">
-            <a:schemeClr val="accent1"/>
-          </a:fillRef>
-          <a:effectRef idx="2">
-            <a:schemeClr val="accent1"/>
-          </a:effectRef>
-          <a:fontRef idx="minor">
-            <a:schemeClr val="lt1"/>
-          </a:fontRef>
-        </p:style>
-        <p:txBody>
-          <a:bodyPr rtlCol="0" anchor="ctr"/>
-          <a:lstStyle/>
-          <a:p>
-            <a:pPr algn="ctr"/>
-          </a:p>
-        </p:txBody>
-      </p:sp>
-      <p:sp>
-        <p:nvSpPr>
-          <p:cNvPr id="14" name="TextBox 13"/>
-          <p:cNvSpPr txBox="1"/>
-          <p:nvPr/>
-        </p:nvSpPr>
-        <p:spPr>
-          <a:xfrm>
-            <a:off x="7104888" y="3529584"/>
-            <a:ext cx="3611880" cy="960120"/>
-          </a:xfrm>
-          <a:prstGeom prst="rect">
-            <a:avLst/>
-          </a:prstGeom>
-          <a:noFill/>
-        </p:spPr>
-        <p:txBody>
-          <a:bodyPr wrap="square" lIns="0" rIns="0" tIns="0" bIns="0">
-            <a:spAutoFit/>
-          </a:bodyPr>
-          <a:lstStyle/>
-          <a:p>
-            <a:pPr algn="l">
-              <a:lnSpc>
-                <a:spcPct val="100000"/>
-              </a:lnSpc>
-              <a:spcAft>
-                <a:spcPts val="500"/>
-              </a:spcAft>
-            </a:pPr>
-            <a:r>
-              <a:rPr sz="1450" b="1" i="0">
-                <a:solidFill>
-                  <a:srgbClr val="1D2735"/>
-                </a:solidFill>
-                <a:latin typeface="Noto Serif KR"/>
-                <a:ea typeface="Noto Serif KR"/>
-              </a:rPr>
-              <a:t>검색마스터가 새 탭으로</a:t>
-            </a:r>
-          </a:p>
-          <a:p>
-            <a:pPr algn="l">
-              <a:lnSpc>
-                <a:spcPct val="130000"/>
-              </a:lnSpc>
-            </a:pPr>
-            <a:r>
-              <a:rPr sz="1100" b="0" i="0">
-                <a:solidFill>
-                  <a:srgbClr val="28364A"/>
-                </a:solidFill>
-                <a:latin typeface="Pretendard"/>
-                <a:ea typeface="Pretendard"/>
-              </a:rPr>
-              <a:t>쓰던 구글 계정 그대로 열립니다. 다시 로그인할 필요가 없습니다.</a:t>
-            </a:r>
-          </a:p>
-        </p:txBody>
-      </p:sp>
-      <p:sp>
-        <p:nvSpPr>
-          <p:cNvPr id="15" name="Rounded Rectangle 14"/>
-          <p:cNvSpPr/>
-          <p:nvPr/>
-        </p:nvSpPr>
-        <p:spPr>
-          <a:xfrm>
-            <a:off x="3063240" y="5230368"/>
-            <a:ext cx="1691640" cy="384048"/>
-          </a:xfrm>
-          <a:prstGeom prst="roundRect">
-            <a:avLst>
-              <a:gd name="adj" fmla="val 50000"/>
-            </a:avLst>
-          </a:prstGeom>
-          <a:solidFill>
-            <a:srgbClr val="FFFFFF"/>
-          </a:solidFill>
-          <a:ln w="9525">
-            <a:solidFill>
-              <a:srgbClr val="DAD2C6"/>
-            </a:solidFill>
-          </a:ln>
-          <a:effectLst/>
-        </p:spPr>
-        <p:style>
-          <a:lnRef idx="1">
-            <a:schemeClr val="accent1"/>
-          </a:lnRef>
-          <a:fillRef idx="3">
-            <a:schemeClr val="accent1"/>
-          </a:fillRef>
-          <a:effectRef idx="2">
-            <a:schemeClr val="accent1"/>
-          </a:effectRef>
-          <a:fontRef idx="minor">
-            <a:schemeClr val="lt1"/>
-          </a:fontRef>
-        </p:style>
-        <p:txBody>
-          <a:bodyPr rtlCol="0" anchor="ctr" wrap="none" lIns="0" rIns="0" tIns="0" bIns="0"/>
-          <a:lstStyle/>
-          <a:p>
-            <a:pPr algn="ctr">
-              <a:lnSpc>
-                <a:spcPct val="100000"/>
-              </a:lnSpc>
-            </a:pPr>
-            <a:r>
-              <a:rPr sz="1050" b="0" i="0">
-                <a:solidFill>
-                  <a:srgbClr val="1D2735"/>
-                </a:solidFill>
-                <a:latin typeface="Pretendard SemiBold"/>
-                <a:ea typeface="Pretendard SemiBold"/>
-              </a:rPr>
-              <a:t>● 하나의 구글 계정</a:t>
-            </a:r>
-          </a:p>
-        </p:txBody>
-      </p:sp>
-      <p:sp>
-        <p:nvSpPr>
-          <p:cNvPr id="16" name="TextBox 15"/>
-          <p:cNvSpPr txBox="1"/>
-          <p:nvPr/>
-        </p:nvSpPr>
-        <p:spPr>
-          <a:xfrm>
-            <a:off x="4864608" y="5330952"/>
-            <a:ext cx="5120640" cy="274320"/>
-          </a:xfrm>
-          <a:prstGeom prst="rect">
-            <a:avLst/>
-          </a:prstGeom>
-          <a:noFill/>
-        </p:spPr>
-        <p:txBody>
-          <a:bodyPr wrap="square" lIns="0" rIns="0" tIns="0" bIns="0">
-            <a:spAutoFit/>
-          </a:bodyPr>
-          <a:lstStyle/>
-          <a:p>
-            <a:pPr algn="l">
-              <a:lnSpc>
-                <a:spcPct val="100000"/>
-              </a:lnSpc>
-            </a:pPr>
-            <a:r>
-              <a:rPr sz="1050" b="0" i="0">
-                <a:solidFill>
-                  <a:srgbClr val="455569"/>
-                </a:solidFill>
-                <a:latin typeface="Pretendard"/>
-                <a:ea typeface="Pretendard"/>
-              </a:rPr>
-              <a:t>으로 두 서비스를 오갑니다. 구독은 서비스별로 따로 적용됩니다.</a:t>
+              <a:t>사용법 안내 실제 화면</a:t>
             </a:r>
           </a:p>
         </p:txBody>
@@ -8064,7 +8512,7 @@
                 <a:latin typeface="Pretendard SemiBold"/>
                 <a:ea typeface="Pretendard SemiBold"/>
               </a:rPr>
-              <a:t>15 / 17</a:t>
+              <a:t>15 / 19</a:t>
             </a:r>
           </a:p>
         </p:txBody>
@@ -8177,58 +8625,14 @@
       </p:sp>
       <p:sp>
         <p:nvSpPr>
-          <p:cNvPr id="4" name="Rectangle 3"/>
-          <p:cNvSpPr/>
-          <p:nvPr/>
-        </p:nvSpPr>
-        <p:spPr>
-          <a:xfrm>
-            <a:off x="822960" y="644652"/>
-            <a:ext cx="384048" cy="16459"/>
-          </a:xfrm>
-          <a:prstGeom prst="rect">
-            <a:avLst/>
-          </a:prstGeom>
-          <a:solidFill>
-            <a:srgbClr val="9A7440"/>
-          </a:solidFill>
-          <a:ln>
-            <a:noFill/>
-          </a:ln>
-          <a:effectLst/>
-        </p:spPr>
-        <p:style>
-          <a:lnRef idx="1">
-            <a:schemeClr val="accent1"/>
-          </a:lnRef>
-          <a:fillRef idx="3">
-            <a:schemeClr val="accent1"/>
-          </a:fillRef>
-          <a:effectRef idx="2">
-            <a:schemeClr val="accent1"/>
-          </a:effectRef>
-          <a:fontRef idx="minor">
-            <a:schemeClr val="lt1"/>
-          </a:fontRef>
-        </p:style>
-        <p:txBody>
-          <a:bodyPr rtlCol="0" anchor="ctr"/>
-          <a:lstStyle/>
-          <a:p>
-            <a:pPr algn="ctr"/>
-          </a:p>
-        </p:txBody>
-      </p:sp>
-      <p:sp>
-        <p:nvSpPr>
-          <p:cNvPr id="5" name="TextBox 4"/>
+          <p:cNvPr id="4" name="TextBox 3"/>
           <p:cNvSpPr txBox="1"/>
           <p:nvPr/>
         </p:nvSpPr>
         <p:spPr>
           <a:xfrm>
-            <a:off x="1325880" y="566928"/>
-            <a:ext cx="8686800" cy="274320"/>
+            <a:off x="8503920" y="1645920"/>
+            <a:ext cx="3017520" cy="3474720"/>
           </a:xfrm>
           <a:prstGeom prst="rect">
             <a:avLst/>
@@ -8241,204 +8645,34 @@
           </a:bodyPr>
           <a:lstStyle/>
           <a:p>
-            <a:pPr algn="l">
+            <a:pPr algn="r">
               <a:lnSpc>
                 <a:spcPct val="100000"/>
               </a:lnSpc>
             </a:pPr>
             <a:r>
-              <a:rPr sz="1050" b="0" i="0" spc="190">
-                <a:solidFill>
-                  <a:srgbClr val="1F5068"/>
-                </a:solidFill>
-                <a:latin typeface="Pretendard ExtraBold"/>
-                <a:ea typeface="Pretendard ExtraBold"/>
-              </a:rPr>
-              <a:t>실제 작업 순서</a:t>
-            </a:r>
-          </a:p>
-        </p:txBody>
-      </p:sp>
-      <p:sp>
-        <p:nvSpPr>
-          <p:cNvPr id="6" name="TextBox 5"/>
-          <p:cNvSpPr txBox="1"/>
-          <p:nvPr/>
-        </p:nvSpPr>
-        <p:spPr>
-          <a:xfrm>
-            <a:off x="822960" y="960120"/>
-            <a:ext cx="10515600" cy="566928"/>
-          </a:xfrm>
-          <a:prstGeom prst="rect">
-            <a:avLst/>
-          </a:prstGeom>
-          <a:noFill/>
-        </p:spPr>
-        <p:txBody>
-          <a:bodyPr wrap="square" lIns="0" rIns="0" tIns="0" bIns="0">
-            <a:spAutoFit/>
-          </a:bodyPr>
-          <a:lstStyle/>
-          <a:p>
-            <a:pPr algn="l">
-              <a:lnSpc>
-                <a:spcPct val="100000"/>
-              </a:lnSpc>
-            </a:pPr>
-            <a:r>
-              <a:rPr sz="2300" b="1" i="0">
-                <a:solidFill>
-                  <a:srgbClr val="1D2735"/>
+              <a:rPr sz="19000" b="1" i="0">
+                <a:solidFill>
+                  <a:srgbClr val="ECE4D4"/>
                 </a:solidFill>
                 <a:latin typeface="Noto Serif KR"/>
                 <a:ea typeface="Noto Serif KR"/>
               </a:rPr>
-              <a:t>상품 등록, 이 순서로 하면 됩니다.</a:t>
-            </a:r>
-          </a:p>
-        </p:txBody>
-      </p:sp>
-      <p:sp>
-        <p:nvSpPr>
-          <p:cNvPr id="7" name="Rectangle 6"/>
+              <a:t>3</a:t>
+            </a:r>
+          </a:p>
+        </p:txBody>
+      </p:sp>
+      <p:sp>
+        <p:nvSpPr>
+          <p:cNvPr id="5" name="Rounded Rectangle 4"/>
           <p:cNvSpPr/>
           <p:nvPr/>
         </p:nvSpPr>
         <p:spPr>
           <a:xfrm>
-            <a:off x="2269540" y="2194560"/>
-            <a:ext cx="18288" cy="969264"/>
-          </a:xfrm>
-          <a:prstGeom prst="rect">
-            <a:avLst/>
-          </a:prstGeom>
-          <a:solidFill>
-            <a:srgbClr val="DAD2C6"/>
-          </a:solidFill>
-          <a:ln>
-            <a:noFill/>
-          </a:ln>
-          <a:effectLst/>
-        </p:spPr>
-        <p:style>
-          <a:lnRef idx="1">
-            <a:schemeClr val="accent1"/>
-          </a:lnRef>
-          <a:fillRef idx="3">
-            <a:schemeClr val="accent1"/>
-          </a:fillRef>
-          <a:effectRef idx="2">
-            <a:schemeClr val="accent1"/>
-          </a:effectRef>
-          <a:fontRef idx="minor">
-            <a:schemeClr val="lt1"/>
-          </a:fontRef>
-        </p:style>
-        <p:txBody>
-          <a:bodyPr rtlCol="0" anchor="ctr"/>
-          <a:lstStyle/>
-          <a:p>
-            <a:pPr algn="ctr"/>
-          </a:p>
-        </p:txBody>
-      </p:sp>
-      <p:sp>
-        <p:nvSpPr>
-          <p:cNvPr id="8" name="TextBox 7"/>
-          <p:cNvSpPr txBox="1"/>
-          <p:nvPr/>
-        </p:nvSpPr>
-        <p:spPr>
-          <a:xfrm>
-            <a:off x="822960" y="1965960"/>
-            <a:ext cx="1188720" cy="274320"/>
-          </a:xfrm>
-          <a:prstGeom prst="rect">
-            <a:avLst/>
-          </a:prstGeom>
-          <a:noFill/>
-        </p:spPr>
-        <p:txBody>
-          <a:bodyPr wrap="square" lIns="0" rIns="0" tIns="0" bIns="0">
-            <a:spAutoFit/>
-          </a:bodyPr>
-          <a:lstStyle/>
-          <a:p>
-            <a:pPr algn="r">
-              <a:lnSpc>
-                <a:spcPct val="100000"/>
-              </a:lnSpc>
-            </a:pPr>
-            <a:r>
-              <a:rPr sz="1250" b="1" i="0">
-                <a:solidFill>
-                  <a:srgbClr val="7D5E33"/>
-                </a:solidFill>
-                <a:latin typeface="Noto Serif KR"/>
-                <a:ea typeface="Noto Serif KR"/>
-              </a:rPr>
-              <a:t>1단계</a:t>
-            </a:r>
-          </a:p>
-        </p:txBody>
-      </p:sp>
-      <p:sp>
-        <p:nvSpPr>
-          <p:cNvPr id="9" name="Oval 8"/>
-          <p:cNvSpPr/>
-          <p:nvPr/>
-        </p:nvSpPr>
-        <p:spPr>
-          <a:xfrm>
-            <a:off x="2212848" y="1993392"/>
-            <a:ext cx="132588" cy="132588"/>
-          </a:xfrm>
-          <a:prstGeom prst="ellipse">
-            <a:avLst/>
-          </a:prstGeom>
-          <a:solidFill>
-            <a:srgbClr val="9A7440"/>
-          </a:solidFill>
-          <a:ln w="19050">
-            <a:solidFill>
-              <a:srgbClr val="FFFFFF"/>
-            </a:solidFill>
-          </a:ln>
-          <a:effectLst/>
-        </p:spPr>
-        <p:style>
-          <a:lnRef idx="1">
-            <a:schemeClr val="accent1"/>
-          </a:lnRef>
-          <a:fillRef idx="3">
-            <a:schemeClr val="accent1"/>
-          </a:fillRef>
-          <a:effectRef idx="2">
-            <a:schemeClr val="accent1"/>
-          </a:effectRef>
-          <a:fontRef idx="minor">
-            <a:schemeClr val="lt1"/>
-          </a:fontRef>
-        </p:style>
-        <p:txBody>
-          <a:bodyPr rtlCol="0" anchor="ctr"/>
-          <a:lstStyle/>
-          <a:p>
-            <a:pPr algn="ctr"/>
-          </a:p>
-        </p:txBody>
-      </p:sp>
-      <p:sp>
-        <p:nvSpPr>
-          <p:cNvPr id="10" name="Rounded Rectangle 9"/>
-          <p:cNvSpPr/>
-          <p:nvPr/>
-        </p:nvSpPr>
-        <p:spPr>
-          <a:xfrm>
-            <a:off x="2606040" y="1920240"/>
-            <a:ext cx="1024128" cy="256032"/>
+            <a:off x="822960" y="2148840"/>
+            <a:ext cx="868680" cy="384048"/>
           </a:xfrm>
           <a:prstGeom prst="roundRect">
             <a:avLst>
@@ -8477,28 +8711,28 @@
               </a:lnSpc>
             </a:pPr>
             <a:r>
-              <a:rPr sz="900" b="0" i="0">
-                <a:solidFill>
-                  <a:srgbClr val="7D5E33"/>
+              <a:rPr sz="1150" b="0" i="0">
+                <a:solidFill>
+                  <a:srgbClr val="9A7440"/>
                 </a:solidFill>
                 <a:latin typeface="Pretendard SemiBold"/>
                 <a:ea typeface="Pretendard SemiBold"/>
               </a:rPr>
-              <a:t>프리캔버스</a:t>
-            </a:r>
-          </a:p>
-        </p:txBody>
-      </p:sp>
-      <p:sp>
-        <p:nvSpPr>
-          <p:cNvPr id="11" name="TextBox 10"/>
+              <a:t>3부</a:t>
+            </a:r>
+          </a:p>
+        </p:txBody>
+      </p:sp>
+      <p:sp>
+        <p:nvSpPr>
+          <p:cNvPr id="6" name="TextBox 5"/>
           <p:cNvSpPr txBox="1"/>
           <p:nvPr/>
         </p:nvSpPr>
         <p:spPr>
           <a:xfrm>
-            <a:off x="2606040" y="2258568"/>
-            <a:ext cx="8595360" cy="658368"/>
+            <a:off x="822960" y="2743200"/>
+            <a:ext cx="6949440" cy="2468880"/>
           </a:xfrm>
           <a:prstGeom prst="rect">
             <a:avLst/>
@@ -8513,806 +8747,55 @@
           <a:p>
             <a:pPr algn="l">
               <a:lnSpc>
-                <a:spcPct val="100000"/>
-              </a:lnSpc>
-              <a:spcAft>
-                <a:spcPts val="200"/>
-              </a:spcAft>
-            </a:pPr>
-            <a:r>
-              <a:rPr sz="1350" b="0" i="0">
+                <a:spcPct val="132000"/>
+              </a:lnSpc>
+            </a:pPr>
+            <a:r>
+              <a:rPr sz="3200" b="1" i="0">
                 <a:solidFill>
                   <a:srgbClr val="1D2735"/>
                 </a:solidFill>
-                <a:latin typeface="Pretendard ExtraBold"/>
-                <a:ea typeface="Pretendard ExtraBold"/>
-              </a:rPr>
-              <a:t>소싱 링크 붙여넣기</a:t>
+                <a:latin typeface="Noto Serif KR"/>
+                <a:ea typeface="Noto Serif KR"/>
+              </a:rPr>
+              <a:t>두 서비스</a:t>
             </a:r>
           </a:p>
           <a:p>
             <a:pPr algn="l">
               <a:lnSpc>
-                <a:spcPct val="125000"/>
-              </a:lnSpc>
-            </a:pPr>
-            <a:r>
-              <a:rPr sz="1050" b="0" i="0">
+                <a:spcPct val="132000"/>
+              </a:lnSpc>
+            </a:pPr>
+            <a:r>
+              <a:rPr sz="3200" b="1" i="0">
+                <a:solidFill>
+                  <a:srgbClr val="1D2735"/>
+                </a:solidFill>
+                <a:latin typeface="Noto Serif KR"/>
+                <a:ea typeface="Noto Serif KR"/>
+              </a:rPr>
+              <a:t>연결</a:t>
+            </a:r>
+          </a:p>
+          <a:p>
+            <a:pPr algn="l">
+              <a:lnSpc>
+                <a:spcPct val="145000"/>
+              </a:lnSpc>
+              <a:spcBef>
+                <a:spcPts val="1400"/>
+              </a:spcBef>
+            </a:pPr>
+            <a:r>
+              <a:rPr sz="1300" b="0" i="0">
                 <a:solidFill>
                   <a:srgbClr val="455569"/>
                 </a:solidFill>
                 <a:latin typeface="Pretendard"/>
                 <a:ea typeface="Pretendard"/>
               </a:rPr>
-              <a:t>스마트스토어·1688 상품 주소로 이미지와 상품 정보를 가져옵니다.</a:t>
-            </a:r>
-          </a:p>
-        </p:txBody>
-      </p:sp>
-      <p:sp>
-        <p:nvSpPr>
-          <p:cNvPr id="12" name="Rectangle 11"/>
-          <p:cNvSpPr/>
-          <p:nvPr/>
-        </p:nvSpPr>
-        <p:spPr>
-          <a:xfrm>
-            <a:off x="2269540" y="3273552"/>
-            <a:ext cx="18288" cy="969264"/>
-          </a:xfrm>
-          <a:prstGeom prst="rect">
-            <a:avLst/>
-          </a:prstGeom>
-          <a:solidFill>
-            <a:srgbClr val="DAD2C6"/>
-          </a:solidFill>
-          <a:ln>
-            <a:noFill/>
-          </a:ln>
-          <a:effectLst/>
-        </p:spPr>
-        <p:style>
-          <a:lnRef idx="1">
-            <a:schemeClr val="accent1"/>
-          </a:lnRef>
-          <a:fillRef idx="3">
-            <a:schemeClr val="accent1"/>
-          </a:fillRef>
-          <a:effectRef idx="2">
-            <a:schemeClr val="accent1"/>
-          </a:effectRef>
-          <a:fontRef idx="minor">
-            <a:schemeClr val="lt1"/>
-          </a:fontRef>
-        </p:style>
-        <p:txBody>
-          <a:bodyPr rtlCol="0" anchor="ctr"/>
-          <a:lstStyle/>
-          <a:p>
-            <a:pPr algn="ctr"/>
-          </a:p>
-        </p:txBody>
-      </p:sp>
-      <p:sp>
-        <p:nvSpPr>
-          <p:cNvPr id="13" name="TextBox 12"/>
-          <p:cNvSpPr txBox="1"/>
-          <p:nvPr/>
-        </p:nvSpPr>
-        <p:spPr>
-          <a:xfrm>
-            <a:off x="822960" y="3044952"/>
-            <a:ext cx="1188720" cy="274320"/>
-          </a:xfrm>
-          <a:prstGeom prst="rect">
-            <a:avLst/>
-          </a:prstGeom>
-          <a:noFill/>
-        </p:spPr>
-        <p:txBody>
-          <a:bodyPr wrap="square" lIns="0" rIns="0" tIns="0" bIns="0">
-            <a:spAutoFit/>
-          </a:bodyPr>
-          <a:lstStyle/>
-          <a:p>
-            <a:pPr algn="r">
-              <a:lnSpc>
-                <a:spcPct val="100000"/>
-              </a:lnSpc>
-            </a:pPr>
-            <a:r>
-              <a:rPr sz="1250" b="1" i="0">
-                <a:solidFill>
-                  <a:srgbClr val="7D5E33"/>
-                </a:solidFill>
-                <a:latin typeface="Noto Serif KR"/>
-                <a:ea typeface="Noto Serif KR"/>
-              </a:rPr>
-              <a:t>2단계</a:t>
-            </a:r>
-          </a:p>
-        </p:txBody>
-      </p:sp>
-      <p:sp>
-        <p:nvSpPr>
-          <p:cNvPr id="14" name="Oval 13"/>
-          <p:cNvSpPr/>
-          <p:nvPr/>
-        </p:nvSpPr>
-        <p:spPr>
-          <a:xfrm>
-            <a:off x="2212848" y="3072384"/>
-            <a:ext cx="132588" cy="132588"/>
-          </a:xfrm>
-          <a:prstGeom prst="ellipse">
-            <a:avLst/>
-          </a:prstGeom>
-          <a:solidFill>
-            <a:srgbClr val="1F5068"/>
-          </a:solidFill>
-          <a:ln w="19050">
-            <a:solidFill>
-              <a:srgbClr val="FFFFFF"/>
-            </a:solidFill>
-          </a:ln>
-          <a:effectLst/>
-        </p:spPr>
-        <p:style>
-          <a:lnRef idx="1">
-            <a:schemeClr val="accent1"/>
-          </a:lnRef>
-          <a:fillRef idx="3">
-            <a:schemeClr val="accent1"/>
-          </a:fillRef>
-          <a:effectRef idx="2">
-            <a:schemeClr val="accent1"/>
-          </a:effectRef>
-          <a:fontRef idx="minor">
-            <a:schemeClr val="lt1"/>
-          </a:fontRef>
-        </p:style>
-        <p:txBody>
-          <a:bodyPr rtlCol="0" anchor="ctr"/>
-          <a:lstStyle/>
-          <a:p>
-            <a:pPr algn="ctr"/>
-          </a:p>
-        </p:txBody>
-      </p:sp>
-      <p:sp>
-        <p:nvSpPr>
-          <p:cNvPr id="15" name="Rounded Rectangle 14"/>
-          <p:cNvSpPr/>
-          <p:nvPr/>
-        </p:nvSpPr>
-        <p:spPr>
-          <a:xfrm>
-            <a:off x="2606040" y="2999232"/>
-            <a:ext cx="1024128" cy="256032"/>
-          </a:xfrm>
-          <a:prstGeom prst="roundRect">
-            <a:avLst>
-              <a:gd name="adj" fmla="val 50000"/>
-            </a:avLst>
-          </a:prstGeom>
-          <a:solidFill>
-            <a:srgbClr val="EAF1F5"/>
-          </a:solidFill>
-          <a:ln>
-            <a:noFill/>
-          </a:ln>
-          <a:effectLst/>
-        </p:spPr>
-        <p:style>
-          <a:lnRef idx="1">
-            <a:schemeClr val="accent1"/>
-          </a:lnRef>
-          <a:fillRef idx="3">
-            <a:schemeClr val="accent1"/>
-          </a:fillRef>
-          <a:effectRef idx="2">
-            <a:schemeClr val="accent1"/>
-          </a:effectRef>
-          <a:fontRef idx="minor">
-            <a:schemeClr val="lt1"/>
-          </a:fontRef>
-        </p:style>
-        <p:txBody>
-          <a:bodyPr rtlCol="0" anchor="ctr" wrap="none" lIns="0" rIns="0" tIns="0" bIns="0"/>
-          <a:lstStyle/>
-          <a:p>
-            <a:pPr algn="ctr">
-              <a:lnSpc>
-                <a:spcPct val="100000"/>
-              </a:lnSpc>
-            </a:pPr>
-            <a:r>
-              <a:rPr sz="900" b="0" i="0">
-                <a:solidFill>
-                  <a:srgbClr val="1F5068"/>
-                </a:solidFill>
-                <a:latin typeface="Pretendard SemiBold"/>
-                <a:ea typeface="Pretendard SemiBold"/>
-              </a:rPr>
-              <a:t>검색마스터</a:t>
-            </a:r>
-          </a:p>
-        </p:txBody>
-      </p:sp>
-      <p:sp>
-        <p:nvSpPr>
-          <p:cNvPr id="16" name="TextBox 15"/>
-          <p:cNvSpPr txBox="1"/>
-          <p:nvPr/>
-        </p:nvSpPr>
-        <p:spPr>
-          <a:xfrm>
-            <a:off x="2606040" y="3337560"/>
-            <a:ext cx="8595360" cy="658368"/>
-          </a:xfrm>
-          <a:prstGeom prst="rect">
-            <a:avLst/>
-          </a:prstGeom>
-          <a:noFill/>
-        </p:spPr>
-        <p:txBody>
-          <a:bodyPr wrap="square" lIns="0" rIns="0" tIns="0" bIns="0">
-            <a:spAutoFit/>
-          </a:bodyPr>
-          <a:lstStyle/>
-          <a:p>
-            <a:pPr algn="l">
-              <a:lnSpc>
-                <a:spcPct val="100000"/>
-              </a:lnSpc>
-              <a:spcAft>
-                <a:spcPts val="200"/>
-              </a:spcAft>
-            </a:pPr>
-            <a:r>
-              <a:rPr sz="1350" b="0" i="0">
-                <a:solidFill>
-                  <a:srgbClr val="1D2735"/>
-                </a:solidFill>
-                <a:latin typeface="Pretendard ExtraBold"/>
-                <a:ea typeface="Pretendard ExtraBold"/>
-              </a:rPr>
-              <a:t>상품명·키워드 만들기</a:t>
-            </a:r>
-          </a:p>
-          <a:p>
-            <a:pPr algn="l">
-              <a:lnSpc>
-                <a:spcPct val="125000"/>
-              </a:lnSpc>
-            </a:pPr>
-            <a:r>
-              <a:rPr sz="1050" b="0" i="0">
-                <a:solidFill>
-                  <a:srgbClr val="455569"/>
-                </a:solidFill>
-                <a:latin typeface="Pretendard"/>
-                <a:ea typeface="Pretendard"/>
-              </a:rPr>
-              <a:t>상단 메뉴로 이동해 사진과 설명을 넣고, 판매 채널에 맞는 상품명을 만듭니다.</a:t>
-            </a:r>
-          </a:p>
-        </p:txBody>
-      </p:sp>
-      <p:sp>
-        <p:nvSpPr>
-          <p:cNvPr id="17" name="Rectangle 16"/>
-          <p:cNvSpPr/>
-          <p:nvPr/>
-        </p:nvSpPr>
-        <p:spPr>
-          <a:xfrm>
-            <a:off x="2269540" y="4352544"/>
-            <a:ext cx="18288" cy="969264"/>
-          </a:xfrm>
-          <a:prstGeom prst="rect">
-            <a:avLst/>
-          </a:prstGeom>
-          <a:solidFill>
-            <a:srgbClr val="DAD2C6"/>
-          </a:solidFill>
-          <a:ln>
-            <a:noFill/>
-          </a:ln>
-          <a:effectLst/>
-        </p:spPr>
-        <p:style>
-          <a:lnRef idx="1">
-            <a:schemeClr val="accent1"/>
-          </a:lnRef>
-          <a:fillRef idx="3">
-            <a:schemeClr val="accent1"/>
-          </a:fillRef>
-          <a:effectRef idx="2">
-            <a:schemeClr val="accent1"/>
-          </a:effectRef>
-          <a:fontRef idx="minor">
-            <a:schemeClr val="lt1"/>
-          </a:fontRef>
-        </p:style>
-        <p:txBody>
-          <a:bodyPr rtlCol="0" anchor="ctr"/>
-          <a:lstStyle/>
-          <a:p>
-            <a:pPr algn="ctr"/>
-          </a:p>
-        </p:txBody>
-      </p:sp>
-      <p:sp>
-        <p:nvSpPr>
-          <p:cNvPr id="18" name="TextBox 17"/>
-          <p:cNvSpPr txBox="1"/>
-          <p:nvPr/>
-        </p:nvSpPr>
-        <p:spPr>
-          <a:xfrm>
-            <a:off x="822960" y="4123944"/>
-            <a:ext cx="1188720" cy="274320"/>
-          </a:xfrm>
-          <a:prstGeom prst="rect">
-            <a:avLst/>
-          </a:prstGeom>
-          <a:noFill/>
-        </p:spPr>
-        <p:txBody>
-          <a:bodyPr wrap="square" lIns="0" rIns="0" tIns="0" bIns="0">
-            <a:spAutoFit/>
-          </a:bodyPr>
-          <a:lstStyle/>
-          <a:p>
-            <a:pPr algn="r">
-              <a:lnSpc>
-                <a:spcPct val="100000"/>
-              </a:lnSpc>
-            </a:pPr>
-            <a:r>
-              <a:rPr sz="1250" b="1" i="0">
-                <a:solidFill>
-                  <a:srgbClr val="7D5E33"/>
-                </a:solidFill>
-                <a:latin typeface="Noto Serif KR"/>
-                <a:ea typeface="Noto Serif KR"/>
-              </a:rPr>
-              <a:t>3단계</a:t>
-            </a:r>
-          </a:p>
-        </p:txBody>
-      </p:sp>
-      <p:sp>
-        <p:nvSpPr>
-          <p:cNvPr id="19" name="Oval 18"/>
-          <p:cNvSpPr/>
-          <p:nvPr/>
-        </p:nvSpPr>
-        <p:spPr>
-          <a:xfrm>
-            <a:off x="2212848" y="4151376"/>
-            <a:ext cx="132588" cy="132588"/>
-          </a:xfrm>
-          <a:prstGeom prst="ellipse">
-            <a:avLst/>
-          </a:prstGeom>
-          <a:solidFill>
-            <a:srgbClr val="9A7440"/>
-          </a:solidFill>
-          <a:ln w="19050">
-            <a:solidFill>
-              <a:srgbClr val="FFFFFF"/>
-            </a:solidFill>
-          </a:ln>
-          <a:effectLst/>
-        </p:spPr>
-        <p:style>
-          <a:lnRef idx="1">
-            <a:schemeClr val="accent1"/>
-          </a:lnRef>
-          <a:fillRef idx="3">
-            <a:schemeClr val="accent1"/>
-          </a:fillRef>
-          <a:effectRef idx="2">
-            <a:schemeClr val="accent1"/>
-          </a:effectRef>
-          <a:fontRef idx="minor">
-            <a:schemeClr val="lt1"/>
-          </a:fontRef>
-        </p:style>
-        <p:txBody>
-          <a:bodyPr rtlCol="0" anchor="ctr"/>
-          <a:lstStyle/>
-          <a:p>
-            <a:pPr algn="ctr"/>
-          </a:p>
-        </p:txBody>
-      </p:sp>
-      <p:sp>
-        <p:nvSpPr>
-          <p:cNvPr id="20" name="Rounded Rectangle 19"/>
-          <p:cNvSpPr/>
-          <p:nvPr/>
-        </p:nvSpPr>
-        <p:spPr>
-          <a:xfrm>
-            <a:off x="2606040" y="4078224"/>
-            <a:ext cx="1024128" cy="256032"/>
-          </a:xfrm>
-          <a:prstGeom prst="roundRect">
-            <a:avLst>
-              <a:gd name="adj" fmla="val 50000"/>
-            </a:avLst>
-          </a:prstGeom>
-          <a:solidFill>
-            <a:srgbClr val="F6EFE5"/>
-          </a:solidFill>
-          <a:ln>
-            <a:noFill/>
-          </a:ln>
-          <a:effectLst/>
-        </p:spPr>
-        <p:style>
-          <a:lnRef idx="1">
-            <a:schemeClr val="accent1"/>
-          </a:lnRef>
-          <a:fillRef idx="3">
-            <a:schemeClr val="accent1"/>
-          </a:fillRef>
-          <a:effectRef idx="2">
-            <a:schemeClr val="accent1"/>
-          </a:effectRef>
-          <a:fontRef idx="minor">
-            <a:schemeClr val="lt1"/>
-          </a:fontRef>
-        </p:style>
-        <p:txBody>
-          <a:bodyPr rtlCol="0" anchor="ctr" wrap="none" lIns="0" rIns="0" tIns="0" bIns="0"/>
-          <a:lstStyle/>
-          <a:p>
-            <a:pPr algn="ctr">
-              <a:lnSpc>
-                <a:spcPct val="100000"/>
-              </a:lnSpc>
-            </a:pPr>
-            <a:r>
-              <a:rPr sz="900" b="0" i="0">
-                <a:solidFill>
-                  <a:srgbClr val="7D5E33"/>
-                </a:solidFill>
-                <a:latin typeface="Pretendard SemiBold"/>
-                <a:ea typeface="Pretendard SemiBold"/>
-              </a:rPr>
-              <a:t>프리캔버스</a:t>
-            </a:r>
-          </a:p>
-        </p:txBody>
-      </p:sp>
-      <p:sp>
-        <p:nvSpPr>
-          <p:cNvPr id="21" name="TextBox 20"/>
-          <p:cNvSpPr txBox="1"/>
-          <p:nvPr/>
-        </p:nvSpPr>
-        <p:spPr>
-          <a:xfrm>
-            <a:off x="2606040" y="4416552"/>
-            <a:ext cx="8595360" cy="658368"/>
-          </a:xfrm>
-          <a:prstGeom prst="rect">
-            <a:avLst/>
-          </a:prstGeom>
-          <a:noFill/>
-        </p:spPr>
-        <p:txBody>
-          <a:bodyPr wrap="square" lIns="0" rIns="0" tIns="0" bIns="0">
-            <a:spAutoFit/>
-          </a:bodyPr>
-          <a:lstStyle/>
-          <a:p>
-            <a:pPr algn="l">
-              <a:lnSpc>
-                <a:spcPct val="100000"/>
-              </a:lnSpc>
-              <a:spcAft>
-                <a:spcPts val="200"/>
-              </a:spcAft>
-            </a:pPr>
-            <a:r>
-              <a:rPr sz="1350" b="0" i="0">
-                <a:solidFill>
-                  <a:srgbClr val="1D2735"/>
-                </a:solidFill>
-                <a:latin typeface="Pretendard ExtraBold"/>
-                <a:ea typeface="Pretendard ExtraBold"/>
-              </a:rPr>
-              <a:t>상세·영상·카드뉴스 만들기</a:t>
-            </a:r>
-          </a:p>
-          <a:p>
-            <a:pPr algn="l">
-              <a:lnSpc>
-                <a:spcPct val="125000"/>
-              </a:lnSpc>
-            </a:pPr>
-            <a:r>
-              <a:rPr sz="1050" b="0" i="0">
-                <a:solidFill>
-                  <a:srgbClr val="455569"/>
-                </a:solidFill>
-                <a:latin typeface="Pretendard"/>
-                <a:ea typeface="Pretendard"/>
-              </a:rPr>
-              <a:t>같은 재료로 상세페이지를 만들고, 필요하면 영상 번역과 카드뉴스까지 뽑습니다.</a:t>
-            </a:r>
-          </a:p>
-        </p:txBody>
-      </p:sp>
-      <p:sp>
-        <p:nvSpPr>
-          <p:cNvPr id="22" name="TextBox 21"/>
-          <p:cNvSpPr txBox="1"/>
-          <p:nvPr/>
-        </p:nvSpPr>
-        <p:spPr>
-          <a:xfrm>
-            <a:off x="822960" y="5202936"/>
-            <a:ext cx="1188720" cy="274320"/>
-          </a:xfrm>
-          <a:prstGeom prst="rect">
-            <a:avLst/>
-          </a:prstGeom>
-          <a:noFill/>
-        </p:spPr>
-        <p:txBody>
-          <a:bodyPr wrap="square" lIns="0" rIns="0" tIns="0" bIns="0">
-            <a:spAutoFit/>
-          </a:bodyPr>
-          <a:lstStyle/>
-          <a:p>
-            <a:pPr algn="r">
-              <a:lnSpc>
-                <a:spcPct val="100000"/>
-              </a:lnSpc>
-            </a:pPr>
-            <a:r>
-              <a:rPr sz="1250" b="1" i="0">
-                <a:solidFill>
-                  <a:srgbClr val="7D5E33"/>
-                </a:solidFill>
-                <a:latin typeface="Noto Serif KR"/>
-                <a:ea typeface="Noto Serif KR"/>
-              </a:rPr>
-              <a:t>4단계</a:t>
-            </a:r>
-          </a:p>
-        </p:txBody>
-      </p:sp>
-      <p:sp>
-        <p:nvSpPr>
-          <p:cNvPr id="23" name="Oval 22"/>
-          <p:cNvSpPr/>
-          <p:nvPr/>
-        </p:nvSpPr>
-        <p:spPr>
-          <a:xfrm>
-            <a:off x="2212848" y="5230368"/>
-            <a:ext cx="132588" cy="132588"/>
-          </a:xfrm>
-          <a:prstGeom prst="ellipse">
-            <a:avLst/>
-          </a:prstGeom>
-          <a:solidFill>
-            <a:srgbClr val="1D2735"/>
-          </a:solidFill>
-          <a:ln w="19050">
-            <a:solidFill>
-              <a:srgbClr val="FFFFFF"/>
-            </a:solidFill>
-          </a:ln>
-          <a:effectLst/>
-        </p:spPr>
-        <p:style>
-          <a:lnRef idx="1">
-            <a:schemeClr val="accent1"/>
-          </a:lnRef>
-          <a:fillRef idx="3">
-            <a:schemeClr val="accent1"/>
-          </a:fillRef>
-          <a:effectRef idx="2">
-            <a:schemeClr val="accent1"/>
-          </a:effectRef>
-          <a:fontRef idx="minor">
-            <a:schemeClr val="lt1"/>
-          </a:fontRef>
-        </p:style>
-        <p:txBody>
-          <a:bodyPr rtlCol="0" anchor="ctr"/>
-          <a:lstStyle/>
-          <a:p>
-            <a:pPr algn="ctr"/>
-          </a:p>
-        </p:txBody>
-      </p:sp>
-      <p:sp>
-        <p:nvSpPr>
-          <p:cNvPr id="24" name="Rounded Rectangle 23"/>
-          <p:cNvSpPr/>
-          <p:nvPr/>
-        </p:nvSpPr>
-        <p:spPr>
-          <a:xfrm>
-            <a:off x="2606040" y="5157216"/>
-            <a:ext cx="640080" cy="256032"/>
-          </a:xfrm>
-          <a:prstGeom prst="roundRect">
-            <a:avLst>
-              <a:gd name="adj" fmla="val 50000"/>
-            </a:avLst>
-          </a:prstGeom>
-          <a:solidFill>
-            <a:srgbClr val="EDF0EC"/>
-          </a:solidFill>
-          <a:ln>
-            <a:noFill/>
-          </a:ln>
-          <a:effectLst/>
-        </p:spPr>
-        <p:style>
-          <a:lnRef idx="1">
-            <a:schemeClr val="accent1"/>
-          </a:lnRef>
-          <a:fillRef idx="3">
-            <a:schemeClr val="accent1"/>
-          </a:fillRef>
-          <a:effectRef idx="2">
-            <a:schemeClr val="accent1"/>
-          </a:effectRef>
-          <a:fontRef idx="minor">
-            <a:schemeClr val="lt1"/>
-          </a:fontRef>
-        </p:style>
-        <p:txBody>
-          <a:bodyPr rtlCol="0" anchor="ctr" wrap="none" lIns="0" rIns="0" tIns="0" bIns="0"/>
-          <a:lstStyle/>
-          <a:p>
-            <a:pPr algn="ctr">
-              <a:lnSpc>
-                <a:spcPct val="100000"/>
-              </a:lnSpc>
-            </a:pPr>
-            <a:r>
-              <a:rPr sz="900" b="0" i="0">
-                <a:solidFill>
-                  <a:srgbClr val="455569"/>
-                </a:solidFill>
-                <a:latin typeface="Pretendard SemiBold"/>
-                <a:ea typeface="Pretendard SemiBold"/>
-              </a:rPr>
-              <a:t>셀러</a:t>
-            </a:r>
-          </a:p>
-        </p:txBody>
-      </p:sp>
-      <p:sp>
-        <p:nvSpPr>
-          <p:cNvPr id="25" name="TextBox 24"/>
-          <p:cNvSpPr txBox="1"/>
-          <p:nvPr/>
-        </p:nvSpPr>
-        <p:spPr>
-          <a:xfrm>
-            <a:off x="2606040" y="5495544"/>
-            <a:ext cx="8595360" cy="658368"/>
-          </a:xfrm>
-          <a:prstGeom prst="rect">
-            <a:avLst/>
-          </a:prstGeom>
-          <a:noFill/>
-        </p:spPr>
-        <p:txBody>
-          <a:bodyPr wrap="square" lIns="0" rIns="0" tIns="0" bIns="0">
-            <a:spAutoFit/>
-          </a:bodyPr>
-          <a:lstStyle/>
-          <a:p>
-            <a:pPr algn="l">
-              <a:lnSpc>
-                <a:spcPct val="100000"/>
-              </a:lnSpc>
-              <a:spcAft>
-                <a:spcPts val="200"/>
-              </a:spcAft>
-            </a:pPr>
-            <a:r>
-              <a:rPr sz="1350" b="0" i="0">
-                <a:solidFill>
-                  <a:srgbClr val="1D2735"/>
-                </a:solidFill>
-                <a:latin typeface="Pretendard ExtraBold"/>
-                <a:ea typeface="Pretendard ExtraBold"/>
-              </a:rPr>
-              <a:t>플랫폼에 등록</a:t>
-            </a:r>
-          </a:p>
-          <a:p>
-            <a:pPr algn="l">
-              <a:lnSpc>
-                <a:spcPct val="125000"/>
-              </a:lnSpc>
-            </a:pPr>
-            <a:r>
-              <a:rPr sz="1050" b="0" i="0">
-                <a:solidFill>
-                  <a:srgbClr val="455569"/>
-                </a:solidFill>
-                <a:latin typeface="Pretendard"/>
-                <a:ea typeface="Pretendard"/>
-              </a:rPr>
-              <a:t>완성본을 내려받아 판매 플랫폼에 그대로 올립니다.</a:t>
-            </a:r>
-          </a:p>
-        </p:txBody>
-      </p:sp>
-      <p:sp>
-        <p:nvSpPr>
-          <p:cNvPr id="26" name="Rounded Rectangle 25"/>
-          <p:cNvSpPr/>
-          <p:nvPr/>
-        </p:nvSpPr>
-        <p:spPr>
-          <a:xfrm>
-            <a:off x="502920" y="6355080"/>
-            <a:ext cx="868680" cy="329184"/>
-          </a:xfrm>
-          <a:prstGeom prst="roundRect">
-            <a:avLst>
-              <a:gd name="adj" fmla="val 50000"/>
-            </a:avLst>
-          </a:prstGeom>
-          <a:solidFill>
-            <a:srgbClr val="FFFFFF"/>
-          </a:solidFill>
-          <a:ln w="9525">
-            <a:solidFill>
-              <a:srgbClr val="EBE5DB"/>
-            </a:solidFill>
-          </a:ln>
-          <a:effectLst/>
-        </p:spPr>
-        <p:style>
-          <a:lnRef idx="1">
-            <a:schemeClr val="accent1"/>
-          </a:lnRef>
-          <a:fillRef idx="3">
-            <a:schemeClr val="accent1"/>
-          </a:fillRef>
-          <a:effectRef idx="2">
-            <a:schemeClr val="accent1"/>
-          </a:effectRef>
-          <a:fontRef idx="minor">
-            <a:schemeClr val="lt1"/>
-          </a:fontRef>
-        </p:style>
-        <p:txBody>
-          <a:bodyPr rtlCol="0" anchor="ctr" wrap="none" lIns="0" rIns="0" tIns="0" bIns="0"/>
-          <a:lstStyle/>
-          <a:p>
-            <a:pPr algn="ctr">
-              <a:lnSpc>
-                <a:spcPct val="100000"/>
-              </a:lnSpc>
-            </a:pPr>
-            <a:r>
-              <a:rPr sz="1050" b="0" i="0">
-                <a:solidFill>
-                  <a:srgbClr val="455569"/>
-                </a:solidFill>
-                <a:latin typeface="Pretendard SemiBold"/>
-                <a:ea typeface="Pretendard SemiBold"/>
-              </a:rPr>
-              <a:t>16 / 17</a:t>
+              <a:t>프리캔버스와 검색마스터를 오가며 쓰는 방법입니다.</a:t>
             </a:r>
           </a:p>
         </p:txBody>
@@ -9425,6 +8908,2079 @@
       </p:sp>
       <p:sp>
         <p:nvSpPr>
+          <p:cNvPr id="4" name="Rectangle 3"/>
+          <p:cNvSpPr/>
+          <p:nvPr/>
+        </p:nvSpPr>
+        <p:spPr>
+          <a:xfrm>
+            <a:off x="822960" y="644652"/>
+            <a:ext cx="384048" cy="16459"/>
+          </a:xfrm>
+          <a:prstGeom prst="rect">
+            <a:avLst/>
+          </a:prstGeom>
+          <a:solidFill>
+            <a:srgbClr val="9A7440"/>
+          </a:solidFill>
+          <a:ln>
+            <a:noFill/>
+          </a:ln>
+          <a:effectLst/>
+        </p:spPr>
+        <p:style>
+          <a:lnRef idx="1">
+            <a:schemeClr val="accent1"/>
+          </a:lnRef>
+          <a:fillRef idx="3">
+            <a:schemeClr val="accent1"/>
+          </a:fillRef>
+          <a:effectRef idx="2">
+            <a:schemeClr val="accent1"/>
+          </a:effectRef>
+          <a:fontRef idx="minor">
+            <a:schemeClr val="lt1"/>
+          </a:fontRef>
+        </p:style>
+        <p:txBody>
+          <a:bodyPr rtlCol="0" anchor="ctr"/>
+          <a:lstStyle/>
+          <a:p>
+            <a:pPr algn="ctr"/>
+          </a:p>
+        </p:txBody>
+      </p:sp>
+      <p:sp>
+        <p:nvSpPr>
+          <p:cNvPr id="5" name="TextBox 4"/>
+          <p:cNvSpPr txBox="1"/>
+          <p:nvPr/>
+        </p:nvSpPr>
+        <p:spPr>
+          <a:xfrm>
+            <a:off x="1325880" y="566928"/>
+            <a:ext cx="8686800" cy="274320"/>
+          </a:xfrm>
+          <a:prstGeom prst="rect">
+            <a:avLst/>
+          </a:prstGeom>
+          <a:noFill/>
+        </p:spPr>
+        <p:txBody>
+          <a:bodyPr wrap="square" lIns="0" rIns="0" tIns="0" bIns="0">
+            <a:spAutoFit/>
+          </a:bodyPr>
+          <a:lstStyle/>
+          <a:p>
+            <a:pPr algn="l">
+              <a:lnSpc>
+                <a:spcPct val="100000"/>
+              </a:lnSpc>
+            </a:pPr>
+            <a:r>
+              <a:rPr sz="1050" b="0" i="0" spc="190">
+                <a:solidFill>
+                  <a:srgbClr val="1F5068"/>
+                </a:solidFill>
+                <a:latin typeface="Pretendard ExtraBold"/>
+                <a:ea typeface="Pretendard ExtraBold"/>
+              </a:rPr>
+              <a:t>두 서비스 연결</a:t>
+            </a:r>
+          </a:p>
+        </p:txBody>
+      </p:sp>
+      <p:sp>
+        <p:nvSpPr>
+          <p:cNvPr id="6" name="TextBox 5"/>
+          <p:cNvSpPr txBox="1"/>
+          <p:nvPr/>
+        </p:nvSpPr>
+        <p:spPr>
+          <a:xfrm>
+            <a:off x="822960" y="960120"/>
+            <a:ext cx="10515600" cy="566928"/>
+          </a:xfrm>
+          <a:prstGeom prst="rect">
+            <a:avLst/>
+          </a:prstGeom>
+          <a:noFill/>
+        </p:spPr>
+        <p:txBody>
+          <a:bodyPr wrap="square" lIns="0" rIns="0" tIns="0" bIns="0">
+            <a:spAutoFit/>
+          </a:bodyPr>
+          <a:lstStyle/>
+          <a:p>
+            <a:pPr algn="ctr">
+              <a:lnSpc>
+                <a:spcPct val="100000"/>
+              </a:lnSpc>
+            </a:pPr>
+            <a:r>
+              <a:rPr sz="2200" b="1" i="0">
+                <a:solidFill>
+                  <a:srgbClr val="1D2735"/>
+                </a:solidFill>
+                <a:latin typeface="Noto Serif KR"/>
+                <a:ea typeface="Noto Serif KR"/>
+              </a:rPr>
+              <a:t>프리캔버스 상단 메뉴에서 </a:t>
+            </a:r>
+            <a:r>
+              <a:rPr sz="2200" b="1" i="0">
+                <a:solidFill>
+                  <a:srgbClr val="1F5068"/>
+                </a:solidFill>
+                <a:latin typeface="Noto Serif KR"/>
+                <a:ea typeface="Noto Serif KR"/>
+              </a:rPr>
+              <a:t>검색마스터</a:t>
+            </a:r>
+            <a:r>
+              <a:rPr sz="2200" b="1" i="0">
+                <a:solidFill>
+                  <a:srgbClr val="1D2735"/>
+                </a:solidFill>
+                <a:latin typeface="Noto Serif KR"/>
+                <a:ea typeface="Noto Serif KR"/>
+              </a:rPr>
+              <a:t>로 바로 이동합니다.</a:t>
+            </a:r>
+          </a:p>
+        </p:txBody>
+      </p:sp>
+      <p:pic>
+        <p:nvPicPr>
+          <p:cNvPr id="7" name="Picture 6" descr="fc_nav.jpg"/>
+          <p:cNvPicPr>
+            <a:picLocks noChangeAspect="1"/>
+          </p:cNvPicPr>
+          <p:nvPr/>
+        </p:nvPicPr>
+        <p:blipFill>
+          <a:blip r:embed="rId2"/>
+          <a:stretch>
+            <a:fillRect/>
+          </a:stretch>
+        </p:blipFill>
+        <p:spPr>
+          <a:xfrm>
+            <a:off x="1097280" y="1783080"/>
+            <a:ext cx="9994392" cy="616321"/>
+          </a:xfrm>
+          <a:prstGeom prst="rect">
+            <a:avLst/>
+          </a:prstGeom>
+          <a:ln w="12700">
+            <a:solidFill>
+              <a:srgbClr val="DAD2C6"/>
+            </a:solidFill>
+          </a:ln>
+          <a:effectLst/>
+          <a:effectLst>
+            <a:outerShdw blurRad="170000" dist="50000" dir="5400000" rotWithShape="0">
+              <a:srgbClr val="16241C">
+                <a:alpha val="30000"/>
+              </a:srgbClr>
+            </a:outerShdw>
+          </a:effectLst>
+        </p:spPr>
+      </p:pic>
+      <p:sp>
+        <p:nvSpPr>
+          <p:cNvPr id="8" name="Oval 7"/>
+          <p:cNvSpPr/>
+          <p:nvPr/>
+        </p:nvSpPr>
+        <p:spPr>
+          <a:xfrm>
+            <a:off x="6014520" y="1732788"/>
+            <a:ext cx="929478" cy="716904"/>
+          </a:xfrm>
+          <a:prstGeom prst="ellipse">
+            <a:avLst/>
+          </a:prstGeom>
+          <a:noFill/>
+          <a:ln w="28575">
+            <a:solidFill>
+              <a:srgbClr val="1F5068"/>
+            </a:solidFill>
+          </a:ln>
+          <a:effectLst/>
+        </p:spPr>
+        <p:style>
+          <a:lnRef idx="1">
+            <a:schemeClr val="accent1"/>
+          </a:lnRef>
+          <a:fillRef idx="3">
+            <a:schemeClr val="accent1"/>
+          </a:fillRef>
+          <a:effectRef idx="2">
+            <a:schemeClr val="accent1"/>
+          </a:effectRef>
+          <a:fontRef idx="minor">
+            <a:schemeClr val="lt1"/>
+          </a:fontRef>
+        </p:style>
+        <p:txBody>
+          <a:bodyPr rtlCol="0" anchor="ctr"/>
+          <a:lstStyle/>
+          <a:p>
+            <a:pPr algn="ctr"/>
+          </a:p>
+        </p:txBody>
+      </p:sp>
+      <p:sp>
+        <p:nvSpPr>
+          <p:cNvPr id="9" name="TextBox 8"/>
+          <p:cNvSpPr txBox="1"/>
+          <p:nvPr/>
+        </p:nvSpPr>
+        <p:spPr>
+          <a:xfrm>
+            <a:off x="822960" y="2527416"/>
+            <a:ext cx="10543032" cy="256032"/>
+          </a:xfrm>
+          <a:prstGeom prst="rect">
+            <a:avLst/>
+          </a:prstGeom>
+          <a:noFill/>
+        </p:spPr>
+        <p:txBody>
+          <a:bodyPr wrap="square" lIns="0" rIns="0" tIns="0" bIns="0">
+            <a:spAutoFit/>
+          </a:bodyPr>
+          <a:lstStyle/>
+          <a:p>
+            <a:pPr algn="ctr">
+              <a:lnSpc>
+                <a:spcPct val="100000"/>
+              </a:lnSpc>
+            </a:pPr>
+            <a:r>
+              <a:rPr sz="950" b="0" i="0">
+                <a:solidFill>
+                  <a:srgbClr val="1F5068"/>
+                </a:solidFill>
+                <a:latin typeface="Pretendard ExtraBold"/>
+                <a:ea typeface="Pretendard ExtraBold"/>
+              </a:rPr>
+              <a:t>프리캔버스 상단 메뉴 속 「검색마스터」 — 실제 화면</a:t>
+            </a:r>
+          </a:p>
+        </p:txBody>
+      </p:sp>
+      <p:sp>
+        <p:nvSpPr>
+          <p:cNvPr id="10" name="Rounded Rectangle 9"/>
+          <p:cNvSpPr/>
+          <p:nvPr/>
+        </p:nvSpPr>
+        <p:spPr>
+          <a:xfrm>
+            <a:off x="1188720" y="3291840"/>
+            <a:ext cx="4206240" cy="1371600"/>
+          </a:xfrm>
+          <a:prstGeom prst="roundRect">
+            <a:avLst>
+              <a:gd name="adj" fmla="val 10000"/>
+            </a:avLst>
+          </a:prstGeom>
+          <a:solidFill>
+            <a:srgbClr val="FFFDF7"/>
+          </a:solidFill>
+          <a:ln w="9525">
+            <a:solidFill>
+              <a:srgbClr val="DAD2C6"/>
+            </a:solidFill>
+          </a:ln>
+          <a:effectLst/>
+          <a:effectLst>
+            <a:outerShdw blurRad="170000" dist="50000" dir="5400000" rotWithShape="0">
+              <a:srgbClr val="16241C">
+                <a:alpha val="30000"/>
+              </a:srgbClr>
+            </a:outerShdw>
+          </a:effectLst>
+        </p:spPr>
+        <p:style>
+          <a:lnRef idx="1">
+            <a:schemeClr val="accent1"/>
+          </a:lnRef>
+          <a:fillRef idx="3">
+            <a:schemeClr val="accent1"/>
+          </a:fillRef>
+          <a:effectRef idx="2">
+            <a:schemeClr val="accent1"/>
+          </a:effectRef>
+          <a:fontRef idx="minor">
+            <a:schemeClr val="lt1"/>
+          </a:fontRef>
+        </p:style>
+        <p:txBody>
+          <a:bodyPr rtlCol="0" anchor="ctr"/>
+          <a:lstStyle/>
+          <a:p>
+            <a:pPr algn="ctr"/>
+          </a:p>
+        </p:txBody>
+      </p:sp>
+      <p:sp>
+        <p:nvSpPr>
+          <p:cNvPr id="11" name="TextBox 10"/>
+          <p:cNvSpPr txBox="1"/>
+          <p:nvPr/>
+        </p:nvSpPr>
+        <p:spPr>
+          <a:xfrm>
+            <a:off x="1481328" y="3529584"/>
+            <a:ext cx="3611880" cy="960120"/>
+          </a:xfrm>
+          <a:prstGeom prst="rect">
+            <a:avLst/>
+          </a:prstGeom>
+          <a:noFill/>
+        </p:spPr>
+        <p:txBody>
+          <a:bodyPr wrap="square" lIns="0" rIns="0" tIns="0" bIns="0">
+            <a:spAutoFit/>
+          </a:bodyPr>
+          <a:lstStyle/>
+          <a:p>
+            <a:pPr algn="l">
+              <a:lnSpc>
+                <a:spcPct val="100000"/>
+              </a:lnSpc>
+              <a:spcAft>
+                <a:spcPts val="500"/>
+              </a:spcAft>
+            </a:pPr>
+            <a:r>
+              <a:rPr sz="1450" b="1" i="0">
+                <a:solidFill>
+                  <a:srgbClr val="1D2735"/>
+                </a:solidFill>
+                <a:latin typeface="Noto Serif KR"/>
+                <a:ea typeface="Noto Serif KR"/>
+              </a:rPr>
+              <a:t>프리캔버스에서 작업하다가</a:t>
+            </a:r>
+          </a:p>
+          <a:p>
+            <a:pPr algn="l">
+              <a:lnSpc>
+                <a:spcPct val="130000"/>
+              </a:lnSpc>
+            </a:pPr>
+            <a:r>
+              <a:rPr sz="1100" b="0" i="0">
+                <a:solidFill>
+                  <a:srgbClr val="28364A"/>
+                </a:solidFill>
+                <a:latin typeface="Pretendard"/>
+                <a:ea typeface="Pretendard"/>
+              </a:rPr>
+              <a:t>상세페이지를 만들다 상품명이나 키워드가 필요해지면,</a:t>
+            </a:r>
+          </a:p>
+        </p:txBody>
+      </p:sp>
+      <p:sp>
+        <p:nvSpPr>
+          <p:cNvPr id="12" name="TextBox 11"/>
+          <p:cNvSpPr txBox="1"/>
+          <p:nvPr/>
+        </p:nvSpPr>
+        <p:spPr>
+          <a:xfrm>
+            <a:off x="5577840" y="3566160"/>
+            <a:ext cx="1051560" cy="868680"/>
+          </a:xfrm>
+          <a:prstGeom prst="rect">
+            <a:avLst/>
+          </a:prstGeom>
+          <a:noFill/>
+        </p:spPr>
+        <p:txBody>
+          <a:bodyPr wrap="square" lIns="0" rIns="0" tIns="0" bIns="0">
+            <a:spAutoFit/>
+          </a:bodyPr>
+          <a:lstStyle/>
+          <a:p>
+            <a:pPr algn="ctr">
+              <a:lnSpc>
+                <a:spcPct val="100000"/>
+              </a:lnSpc>
+              <a:spcAft>
+                <a:spcPts val="300"/>
+              </a:spcAft>
+            </a:pPr>
+            <a:r>
+              <a:rPr sz="2400" b="1" i="0">
+                <a:solidFill>
+                  <a:srgbClr val="9A7440"/>
+                </a:solidFill>
+                <a:latin typeface="Pretendard"/>
+                <a:ea typeface="Pretendard"/>
+              </a:rPr>
+              <a:t>→</a:t>
+            </a:r>
+          </a:p>
+          <a:p>
+            <a:pPr algn="ctr">
+              <a:lnSpc>
+                <a:spcPct val="100000"/>
+              </a:lnSpc>
+            </a:pPr>
+            <a:r>
+              <a:rPr sz="950" b="0" i="0">
+                <a:solidFill>
+                  <a:srgbClr val="7D5E33"/>
+                </a:solidFill>
+                <a:latin typeface="Pretendard ExtraBold"/>
+                <a:ea typeface="Pretendard ExtraBold"/>
+              </a:rPr>
+              <a:t>버튼 한 번</a:t>
+            </a:r>
+          </a:p>
+        </p:txBody>
+      </p:sp>
+      <p:sp>
+        <p:nvSpPr>
+          <p:cNvPr id="13" name="Rounded Rectangle 12"/>
+          <p:cNvSpPr/>
+          <p:nvPr/>
+        </p:nvSpPr>
+        <p:spPr>
+          <a:xfrm>
+            <a:off x="6812280" y="3291840"/>
+            <a:ext cx="4206240" cy="1371600"/>
+          </a:xfrm>
+          <a:prstGeom prst="roundRect">
+            <a:avLst>
+              <a:gd name="adj" fmla="val 10000"/>
+            </a:avLst>
+          </a:prstGeom>
+          <a:solidFill>
+            <a:srgbClr val="F4F8FA"/>
+          </a:solidFill>
+          <a:ln w="9525">
+            <a:solidFill>
+              <a:srgbClr val="D8E3EA"/>
+            </a:solidFill>
+          </a:ln>
+          <a:effectLst/>
+          <a:effectLst>
+            <a:outerShdw blurRad="170000" dist="50000" dir="5400000" rotWithShape="0">
+              <a:srgbClr val="16241C">
+                <a:alpha val="30000"/>
+              </a:srgbClr>
+            </a:outerShdw>
+          </a:effectLst>
+        </p:spPr>
+        <p:style>
+          <a:lnRef idx="1">
+            <a:schemeClr val="accent1"/>
+          </a:lnRef>
+          <a:fillRef idx="3">
+            <a:schemeClr val="accent1"/>
+          </a:fillRef>
+          <a:effectRef idx="2">
+            <a:schemeClr val="accent1"/>
+          </a:effectRef>
+          <a:fontRef idx="minor">
+            <a:schemeClr val="lt1"/>
+          </a:fontRef>
+        </p:style>
+        <p:txBody>
+          <a:bodyPr rtlCol="0" anchor="ctr"/>
+          <a:lstStyle/>
+          <a:p>
+            <a:pPr algn="ctr"/>
+          </a:p>
+        </p:txBody>
+      </p:sp>
+      <p:sp>
+        <p:nvSpPr>
+          <p:cNvPr id="14" name="TextBox 13"/>
+          <p:cNvSpPr txBox="1"/>
+          <p:nvPr/>
+        </p:nvSpPr>
+        <p:spPr>
+          <a:xfrm>
+            <a:off x="7104888" y="3529584"/>
+            <a:ext cx="3611880" cy="960120"/>
+          </a:xfrm>
+          <a:prstGeom prst="rect">
+            <a:avLst/>
+          </a:prstGeom>
+          <a:noFill/>
+        </p:spPr>
+        <p:txBody>
+          <a:bodyPr wrap="square" lIns="0" rIns="0" tIns="0" bIns="0">
+            <a:spAutoFit/>
+          </a:bodyPr>
+          <a:lstStyle/>
+          <a:p>
+            <a:pPr algn="l">
+              <a:lnSpc>
+                <a:spcPct val="100000"/>
+              </a:lnSpc>
+              <a:spcAft>
+                <a:spcPts val="500"/>
+              </a:spcAft>
+            </a:pPr>
+            <a:r>
+              <a:rPr sz="1450" b="1" i="0">
+                <a:solidFill>
+                  <a:srgbClr val="1D2735"/>
+                </a:solidFill>
+                <a:latin typeface="Noto Serif KR"/>
+                <a:ea typeface="Noto Serif KR"/>
+              </a:rPr>
+              <a:t>검색마스터가 새 탭으로</a:t>
+            </a:r>
+          </a:p>
+          <a:p>
+            <a:pPr algn="l">
+              <a:lnSpc>
+                <a:spcPct val="130000"/>
+              </a:lnSpc>
+            </a:pPr>
+            <a:r>
+              <a:rPr sz="1100" b="0" i="0">
+                <a:solidFill>
+                  <a:srgbClr val="28364A"/>
+                </a:solidFill>
+                <a:latin typeface="Pretendard"/>
+                <a:ea typeface="Pretendard"/>
+              </a:rPr>
+              <a:t>쓰던 구글 계정 그대로 열립니다. 다시 로그인할 필요가 없습니다.</a:t>
+            </a:r>
+          </a:p>
+        </p:txBody>
+      </p:sp>
+      <p:sp>
+        <p:nvSpPr>
+          <p:cNvPr id="15" name="Rounded Rectangle 14"/>
+          <p:cNvSpPr/>
+          <p:nvPr/>
+        </p:nvSpPr>
+        <p:spPr>
+          <a:xfrm>
+            <a:off x="3063240" y="5230368"/>
+            <a:ext cx="1691640" cy="384048"/>
+          </a:xfrm>
+          <a:prstGeom prst="roundRect">
+            <a:avLst>
+              <a:gd name="adj" fmla="val 50000"/>
+            </a:avLst>
+          </a:prstGeom>
+          <a:solidFill>
+            <a:srgbClr val="FFFFFF"/>
+          </a:solidFill>
+          <a:ln w="9525">
+            <a:solidFill>
+              <a:srgbClr val="DAD2C6"/>
+            </a:solidFill>
+          </a:ln>
+          <a:effectLst/>
+        </p:spPr>
+        <p:style>
+          <a:lnRef idx="1">
+            <a:schemeClr val="accent1"/>
+          </a:lnRef>
+          <a:fillRef idx="3">
+            <a:schemeClr val="accent1"/>
+          </a:fillRef>
+          <a:effectRef idx="2">
+            <a:schemeClr val="accent1"/>
+          </a:effectRef>
+          <a:fontRef idx="minor">
+            <a:schemeClr val="lt1"/>
+          </a:fontRef>
+        </p:style>
+        <p:txBody>
+          <a:bodyPr rtlCol="0" anchor="ctr" wrap="none" lIns="0" rIns="0" tIns="0" bIns="0"/>
+          <a:lstStyle/>
+          <a:p>
+            <a:pPr algn="ctr">
+              <a:lnSpc>
+                <a:spcPct val="100000"/>
+              </a:lnSpc>
+            </a:pPr>
+            <a:r>
+              <a:rPr sz="1050" b="0" i="0">
+                <a:solidFill>
+                  <a:srgbClr val="1D2735"/>
+                </a:solidFill>
+                <a:latin typeface="Pretendard SemiBold"/>
+                <a:ea typeface="Pretendard SemiBold"/>
+              </a:rPr>
+              <a:t>● 하나의 구글 계정</a:t>
+            </a:r>
+          </a:p>
+        </p:txBody>
+      </p:sp>
+      <p:sp>
+        <p:nvSpPr>
+          <p:cNvPr id="16" name="TextBox 15"/>
+          <p:cNvSpPr txBox="1"/>
+          <p:nvPr/>
+        </p:nvSpPr>
+        <p:spPr>
+          <a:xfrm>
+            <a:off x="4864608" y="5330952"/>
+            <a:ext cx="5120640" cy="274320"/>
+          </a:xfrm>
+          <a:prstGeom prst="rect">
+            <a:avLst/>
+          </a:prstGeom>
+          <a:noFill/>
+        </p:spPr>
+        <p:txBody>
+          <a:bodyPr wrap="square" lIns="0" rIns="0" tIns="0" bIns="0">
+            <a:spAutoFit/>
+          </a:bodyPr>
+          <a:lstStyle/>
+          <a:p>
+            <a:pPr algn="l">
+              <a:lnSpc>
+                <a:spcPct val="100000"/>
+              </a:lnSpc>
+            </a:pPr>
+            <a:r>
+              <a:rPr sz="1050" b="0" i="0">
+                <a:solidFill>
+                  <a:srgbClr val="455569"/>
+                </a:solidFill>
+                <a:latin typeface="Pretendard"/>
+                <a:ea typeface="Pretendard"/>
+              </a:rPr>
+              <a:t>으로 두 서비스를 오갑니다. 구독은 서비스별로 따로 적용됩니다.</a:t>
+            </a:r>
+          </a:p>
+        </p:txBody>
+      </p:sp>
+      <p:sp>
+        <p:nvSpPr>
+          <p:cNvPr id="17" name="Rounded Rectangle 16"/>
+          <p:cNvSpPr/>
+          <p:nvPr/>
+        </p:nvSpPr>
+        <p:spPr>
+          <a:xfrm>
+            <a:off x="502920" y="6355080"/>
+            <a:ext cx="868680" cy="329184"/>
+          </a:xfrm>
+          <a:prstGeom prst="roundRect">
+            <a:avLst>
+              <a:gd name="adj" fmla="val 50000"/>
+            </a:avLst>
+          </a:prstGeom>
+          <a:solidFill>
+            <a:srgbClr val="FFFFFF"/>
+          </a:solidFill>
+          <a:ln w="9525">
+            <a:solidFill>
+              <a:srgbClr val="EBE5DB"/>
+            </a:solidFill>
+          </a:ln>
+          <a:effectLst/>
+        </p:spPr>
+        <p:style>
+          <a:lnRef idx="1">
+            <a:schemeClr val="accent1"/>
+          </a:lnRef>
+          <a:fillRef idx="3">
+            <a:schemeClr val="accent1"/>
+          </a:fillRef>
+          <a:effectRef idx="2">
+            <a:schemeClr val="accent1"/>
+          </a:effectRef>
+          <a:fontRef idx="minor">
+            <a:schemeClr val="lt1"/>
+          </a:fontRef>
+        </p:style>
+        <p:txBody>
+          <a:bodyPr rtlCol="0" anchor="ctr" wrap="none" lIns="0" rIns="0" tIns="0" bIns="0"/>
+          <a:lstStyle/>
+          <a:p>
+            <a:pPr algn="ctr">
+              <a:lnSpc>
+                <a:spcPct val="100000"/>
+              </a:lnSpc>
+            </a:pPr>
+            <a:r>
+              <a:rPr sz="1050" b="0" i="0">
+                <a:solidFill>
+                  <a:srgbClr val="455569"/>
+                </a:solidFill>
+                <a:latin typeface="Pretendard SemiBold"/>
+                <a:ea typeface="Pretendard SemiBold"/>
+              </a:rPr>
+              <a:t>17 / 19</a:t>
+            </a:r>
+          </a:p>
+        </p:txBody>
+      </p:sp>
+    </p:spTree>
+  </p:cSld>
+  <p:clrMapOvr>
+    <a:masterClrMapping/>
+  </p:clrMapOvr>
+</p:sld>
+</file>
+
+<file path=ppt/slides/slide18.xml><?xml version="1.0" encoding="utf-8"?>
+<p:sld xmlns:a="http://schemas.openxmlformats.org/drawingml/2006/main" xmlns:p="http://schemas.openxmlformats.org/presentationml/2006/main" xmlns:r="http://schemas.openxmlformats.org/officeDocument/2006/relationships">
+  <p:cSld>
+    <p:spTree>
+      <p:nvGrpSpPr>
+        <p:cNvPr id="1" name=""/>
+        <p:cNvGrpSpPr/>
+        <p:nvPr/>
+      </p:nvGrpSpPr>
+      <p:grpSpPr/>
+      <p:sp>
+        <p:nvSpPr>
+          <p:cNvPr id="2" name="Rectangle 1"/>
+          <p:cNvSpPr/>
+          <p:nvPr/>
+        </p:nvSpPr>
+        <p:spPr>
+          <a:xfrm>
+            <a:off x="0" y="0"/>
+            <a:ext cx="12191695" cy="6858000"/>
+          </a:xfrm>
+          <a:prstGeom prst="rect">
+            <a:avLst/>
+          </a:prstGeom>
+          <a:solidFill>
+            <a:srgbClr val="FFFDF9"/>
+          </a:solidFill>
+          <a:ln>
+            <a:noFill/>
+          </a:ln>
+          <a:effectLst/>
+        </p:spPr>
+        <p:style>
+          <a:lnRef idx="1">
+            <a:schemeClr val="accent1"/>
+          </a:lnRef>
+          <a:fillRef idx="3">
+            <a:schemeClr val="accent1"/>
+          </a:fillRef>
+          <a:effectRef idx="2">
+            <a:schemeClr val="accent1"/>
+          </a:effectRef>
+          <a:fontRef idx="minor">
+            <a:schemeClr val="lt1"/>
+          </a:fontRef>
+        </p:style>
+        <p:txBody>
+          <a:bodyPr rtlCol="0" anchor="ctr"/>
+          <a:lstStyle/>
+          <a:p>
+            <a:pPr algn="ctr"/>
+          </a:p>
+        </p:txBody>
+      </p:sp>
+      <p:sp>
+        <p:nvSpPr>
+          <p:cNvPr id="3" name="Rectangle 2"/>
+          <p:cNvSpPr/>
+          <p:nvPr/>
+        </p:nvSpPr>
+        <p:spPr>
+          <a:xfrm>
+            <a:off x="0" y="0"/>
+            <a:ext cx="12191695" cy="45720"/>
+          </a:xfrm>
+          <a:prstGeom prst="rect">
+            <a:avLst/>
+          </a:prstGeom>
+          <a:solidFill>
+            <a:srgbClr val="173F54"/>
+          </a:solidFill>
+          <a:ln>
+            <a:noFill/>
+          </a:ln>
+          <a:effectLst/>
+        </p:spPr>
+        <p:style>
+          <a:lnRef idx="1">
+            <a:schemeClr val="accent1"/>
+          </a:lnRef>
+          <a:fillRef idx="3">
+            <a:schemeClr val="accent1"/>
+          </a:fillRef>
+          <a:effectRef idx="2">
+            <a:schemeClr val="accent1"/>
+          </a:effectRef>
+          <a:fontRef idx="minor">
+            <a:schemeClr val="lt1"/>
+          </a:fontRef>
+        </p:style>
+        <p:txBody>
+          <a:bodyPr rtlCol="0" anchor="ctr"/>
+          <a:lstStyle/>
+          <a:p>
+            <a:pPr algn="ctr"/>
+          </a:p>
+        </p:txBody>
+      </p:sp>
+      <p:sp>
+        <p:nvSpPr>
+          <p:cNvPr id="4" name="Rectangle 3"/>
+          <p:cNvSpPr/>
+          <p:nvPr/>
+        </p:nvSpPr>
+        <p:spPr>
+          <a:xfrm>
+            <a:off x="822960" y="644652"/>
+            <a:ext cx="384048" cy="16459"/>
+          </a:xfrm>
+          <a:prstGeom prst="rect">
+            <a:avLst/>
+          </a:prstGeom>
+          <a:solidFill>
+            <a:srgbClr val="9A7440"/>
+          </a:solidFill>
+          <a:ln>
+            <a:noFill/>
+          </a:ln>
+          <a:effectLst/>
+        </p:spPr>
+        <p:style>
+          <a:lnRef idx="1">
+            <a:schemeClr val="accent1"/>
+          </a:lnRef>
+          <a:fillRef idx="3">
+            <a:schemeClr val="accent1"/>
+          </a:fillRef>
+          <a:effectRef idx="2">
+            <a:schemeClr val="accent1"/>
+          </a:effectRef>
+          <a:fontRef idx="minor">
+            <a:schemeClr val="lt1"/>
+          </a:fontRef>
+        </p:style>
+        <p:txBody>
+          <a:bodyPr rtlCol="0" anchor="ctr"/>
+          <a:lstStyle/>
+          <a:p>
+            <a:pPr algn="ctr"/>
+          </a:p>
+        </p:txBody>
+      </p:sp>
+      <p:sp>
+        <p:nvSpPr>
+          <p:cNvPr id="5" name="TextBox 4"/>
+          <p:cNvSpPr txBox="1"/>
+          <p:nvPr/>
+        </p:nvSpPr>
+        <p:spPr>
+          <a:xfrm>
+            <a:off x="1325880" y="566928"/>
+            <a:ext cx="8686800" cy="274320"/>
+          </a:xfrm>
+          <a:prstGeom prst="rect">
+            <a:avLst/>
+          </a:prstGeom>
+          <a:noFill/>
+        </p:spPr>
+        <p:txBody>
+          <a:bodyPr wrap="square" lIns="0" rIns="0" tIns="0" bIns="0">
+            <a:spAutoFit/>
+          </a:bodyPr>
+          <a:lstStyle/>
+          <a:p>
+            <a:pPr algn="l">
+              <a:lnSpc>
+                <a:spcPct val="100000"/>
+              </a:lnSpc>
+            </a:pPr>
+            <a:r>
+              <a:rPr sz="1050" b="0" i="0" spc="190">
+                <a:solidFill>
+                  <a:srgbClr val="1F5068"/>
+                </a:solidFill>
+                <a:latin typeface="Pretendard ExtraBold"/>
+                <a:ea typeface="Pretendard ExtraBold"/>
+              </a:rPr>
+              <a:t>실제 작업 순서</a:t>
+            </a:r>
+          </a:p>
+        </p:txBody>
+      </p:sp>
+      <p:sp>
+        <p:nvSpPr>
+          <p:cNvPr id="6" name="TextBox 5"/>
+          <p:cNvSpPr txBox="1"/>
+          <p:nvPr/>
+        </p:nvSpPr>
+        <p:spPr>
+          <a:xfrm>
+            <a:off x="822960" y="960120"/>
+            <a:ext cx="10515600" cy="566928"/>
+          </a:xfrm>
+          <a:prstGeom prst="rect">
+            <a:avLst/>
+          </a:prstGeom>
+          <a:noFill/>
+        </p:spPr>
+        <p:txBody>
+          <a:bodyPr wrap="square" lIns="0" rIns="0" tIns="0" bIns="0">
+            <a:spAutoFit/>
+          </a:bodyPr>
+          <a:lstStyle/>
+          <a:p>
+            <a:pPr algn="l">
+              <a:lnSpc>
+                <a:spcPct val="100000"/>
+              </a:lnSpc>
+            </a:pPr>
+            <a:r>
+              <a:rPr sz="2300" b="1" i="0">
+                <a:solidFill>
+                  <a:srgbClr val="1D2735"/>
+                </a:solidFill>
+                <a:latin typeface="Noto Serif KR"/>
+                <a:ea typeface="Noto Serif KR"/>
+              </a:rPr>
+              <a:t>상품 등록, 이 순서로 하면 됩니다.</a:t>
+            </a:r>
+          </a:p>
+        </p:txBody>
+      </p:sp>
+      <p:sp>
+        <p:nvSpPr>
+          <p:cNvPr id="7" name="Rectangle 6"/>
+          <p:cNvSpPr/>
+          <p:nvPr/>
+        </p:nvSpPr>
+        <p:spPr>
+          <a:xfrm>
+            <a:off x="2269540" y="2194560"/>
+            <a:ext cx="18288" cy="969264"/>
+          </a:xfrm>
+          <a:prstGeom prst="rect">
+            <a:avLst/>
+          </a:prstGeom>
+          <a:solidFill>
+            <a:srgbClr val="DAD2C6"/>
+          </a:solidFill>
+          <a:ln>
+            <a:noFill/>
+          </a:ln>
+          <a:effectLst/>
+        </p:spPr>
+        <p:style>
+          <a:lnRef idx="1">
+            <a:schemeClr val="accent1"/>
+          </a:lnRef>
+          <a:fillRef idx="3">
+            <a:schemeClr val="accent1"/>
+          </a:fillRef>
+          <a:effectRef idx="2">
+            <a:schemeClr val="accent1"/>
+          </a:effectRef>
+          <a:fontRef idx="minor">
+            <a:schemeClr val="lt1"/>
+          </a:fontRef>
+        </p:style>
+        <p:txBody>
+          <a:bodyPr rtlCol="0" anchor="ctr"/>
+          <a:lstStyle/>
+          <a:p>
+            <a:pPr algn="ctr"/>
+          </a:p>
+        </p:txBody>
+      </p:sp>
+      <p:sp>
+        <p:nvSpPr>
+          <p:cNvPr id="8" name="TextBox 7"/>
+          <p:cNvSpPr txBox="1"/>
+          <p:nvPr/>
+        </p:nvSpPr>
+        <p:spPr>
+          <a:xfrm>
+            <a:off x="822960" y="1965960"/>
+            <a:ext cx="1188720" cy="274320"/>
+          </a:xfrm>
+          <a:prstGeom prst="rect">
+            <a:avLst/>
+          </a:prstGeom>
+          <a:noFill/>
+        </p:spPr>
+        <p:txBody>
+          <a:bodyPr wrap="square" lIns="0" rIns="0" tIns="0" bIns="0">
+            <a:spAutoFit/>
+          </a:bodyPr>
+          <a:lstStyle/>
+          <a:p>
+            <a:pPr algn="r">
+              <a:lnSpc>
+                <a:spcPct val="100000"/>
+              </a:lnSpc>
+            </a:pPr>
+            <a:r>
+              <a:rPr sz="1250" b="1" i="0">
+                <a:solidFill>
+                  <a:srgbClr val="7D5E33"/>
+                </a:solidFill>
+                <a:latin typeface="Noto Serif KR"/>
+                <a:ea typeface="Noto Serif KR"/>
+              </a:rPr>
+              <a:t>1단계</a:t>
+            </a:r>
+          </a:p>
+        </p:txBody>
+      </p:sp>
+      <p:sp>
+        <p:nvSpPr>
+          <p:cNvPr id="9" name="Oval 8"/>
+          <p:cNvSpPr/>
+          <p:nvPr/>
+        </p:nvSpPr>
+        <p:spPr>
+          <a:xfrm>
+            <a:off x="2212848" y="1993392"/>
+            <a:ext cx="132588" cy="132588"/>
+          </a:xfrm>
+          <a:prstGeom prst="ellipse">
+            <a:avLst/>
+          </a:prstGeom>
+          <a:solidFill>
+            <a:srgbClr val="9A7440"/>
+          </a:solidFill>
+          <a:ln w="19050">
+            <a:solidFill>
+              <a:srgbClr val="FFFFFF"/>
+            </a:solidFill>
+          </a:ln>
+          <a:effectLst/>
+        </p:spPr>
+        <p:style>
+          <a:lnRef idx="1">
+            <a:schemeClr val="accent1"/>
+          </a:lnRef>
+          <a:fillRef idx="3">
+            <a:schemeClr val="accent1"/>
+          </a:fillRef>
+          <a:effectRef idx="2">
+            <a:schemeClr val="accent1"/>
+          </a:effectRef>
+          <a:fontRef idx="minor">
+            <a:schemeClr val="lt1"/>
+          </a:fontRef>
+        </p:style>
+        <p:txBody>
+          <a:bodyPr rtlCol="0" anchor="ctr"/>
+          <a:lstStyle/>
+          <a:p>
+            <a:pPr algn="ctr"/>
+          </a:p>
+        </p:txBody>
+      </p:sp>
+      <p:sp>
+        <p:nvSpPr>
+          <p:cNvPr id="10" name="Rounded Rectangle 9"/>
+          <p:cNvSpPr/>
+          <p:nvPr/>
+        </p:nvSpPr>
+        <p:spPr>
+          <a:xfrm>
+            <a:off x="2606040" y="1920240"/>
+            <a:ext cx="1024128" cy="256032"/>
+          </a:xfrm>
+          <a:prstGeom prst="roundRect">
+            <a:avLst>
+              <a:gd name="adj" fmla="val 50000"/>
+            </a:avLst>
+          </a:prstGeom>
+          <a:solidFill>
+            <a:srgbClr val="F6EFE5"/>
+          </a:solidFill>
+          <a:ln>
+            <a:noFill/>
+          </a:ln>
+          <a:effectLst/>
+        </p:spPr>
+        <p:style>
+          <a:lnRef idx="1">
+            <a:schemeClr val="accent1"/>
+          </a:lnRef>
+          <a:fillRef idx="3">
+            <a:schemeClr val="accent1"/>
+          </a:fillRef>
+          <a:effectRef idx="2">
+            <a:schemeClr val="accent1"/>
+          </a:effectRef>
+          <a:fontRef idx="minor">
+            <a:schemeClr val="lt1"/>
+          </a:fontRef>
+        </p:style>
+        <p:txBody>
+          <a:bodyPr rtlCol="0" anchor="ctr" wrap="none" lIns="0" rIns="0" tIns="0" bIns="0"/>
+          <a:lstStyle/>
+          <a:p>
+            <a:pPr algn="ctr">
+              <a:lnSpc>
+                <a:spcPct val="100000"/>
+              </a:lnSpc>
+            </a:pPr>
+            <a:r>
+              <a:rPr sz="900" b="0" i="0">
+                <a:solidFill>
+                  <a:srgbClr val="7D5E33"/>
+                </a:solidFill>
+                <a:latin typeface="Pretendard SemiBold"/>
+                <a:ea typeface="Pretendard SemiBold"/>
+              </a:rPr>
+              <a:t>프리캔버스</a:t>
+            </a:r>
+          </a:p>
+        </p:txBody>
+      </p:sp>
+      <p:sp>
+        <p:nvSpPr>
+          <p:cNvPr id="11" name="TextBox 10"/>
+          <p:cNvSpPr txBox="1"/>
+          <p:nvPr/>
+        </p:nvSpPr>
+        <p:spPr>
+          <a:xfrm>
+            <a:off x="2606040" y="2258568"/>
+            <a:ext cx="8595360" cy="658368"/>
+          </a:xfrm>
+          <a:prstGeom prst="rect">
+            <a:avLst/>
+          </a:prstGeom>
+          <a:noFill/>
+        </p:spPr>
+        <p:txBody>
+          <a:bodyPr wrap="square" lIns="0" rIns="0" tIns="0" bIns="0">
+            <a:spAutoFit/>
+          </a:bodyPr>
+          <a:lstStyle/>
+          <a:p>
+            <a:pPr algn="l">
+              <a:lnSpc>
+                <a:spcPct val="100000"/>
+              </a:lnSpc>
+              <a:spcAft>
+                <a:spcPts val="200"/>
+              </a:spcAft>
+            </a:pPr>
+            <a:r>
+              <a:rPr sz="1350" b="0" i="0">
+                <a:solidFill>
+                  <a:srgbClr val="1D2735"/>
+                </a:solidFill>
+                <a:latin typeface="Pretendard ExtraBold"/>
+                <a:ea typeface="Pretendard ExtraBold"/>
+              </a:rPr>
+              <a:t>소싱 링크 붙여넣기</a:t>
+            </a:r>
+          </a:p>
+          <a:p>
+            <a:pPr algn="l">
+              <a:lnSpc>
+                <a:spcPct val="125000"/>
+              </a:lnSpc>
+            </a:pPr>
+            <a:r>
+              <a:rPr sz="1050" b="0" i="0">
+                <a:solidFill>
+                  <a:srgbClr val="455569"/>
+                </a:solidFill>
+                <a:latin typeface="Pretendard"/>
+                <a:ea typeface="Pretendard"/>
+              </a:rPr>
+              <a:t>스마트스토어·1688 상품 주소로 이미지와 상품 정보를 가져옵니다.</a:t>
+            </a:r>
+          </a:p>
+        </p:txBody>
+      </p:sp>
+      <p:sp>
+        <p:nvSpPr>
+          <p:cNvPr id="12" name="Rectangle 11"/>
+          <p:cNvSpPr/>
+          <p:nvPr/>
+        </p:nvSpPr>
+        <p:spPr>
+          <a:xfrm>
+            <a:off x="2269540" y="3273552"/>
+            <a:ext cx="18288" cy="969264"/>
+          </a:xfrm>
+          <a:prstGeom prst="rect">
+            <a:avLst/>
+          </a:prstGeom>
+          <a:solidFill>
+            <a:srgbClr val="DAD2C6"/>
+          </a:solidFill>
+          <a:ln>
+            <a:noFill/>
+          </a:ln>
+          <a:effectLst/>
+        </p:spPr>
+        <p:style>
+          <a:lnRef idx="1">
+            <a:schemeClr val="accent1"/>
+          </a:lnRef>
+          <a:fillRef idx="3">
+            <a:schemeClr val="accent1"/>
+          </a:fillRef>
+          <a:effectRef idx="2">
+            <a:schemeClr val="accent1"/>
+          </a:effectRef>
+          <a:fontRef idx="minor">
+            <a:schemeClr val="lt1"/>
+          </a:fontRef>
+        </p:style>
+        <p:txBody>
+          <a:bodyPr rtlCol="0" anchor="ctr"/>
+          <a:lstStyle/>
+          <a:p>
+            <a:pPr algn="ctr"/>
+          </a:p>
+        </p:txBody>
+      </p:sp>
+      <p:sp>
+        <p:nvSpPr>
+          <p:cNvPr id="13" name="TextBox 12"/>
+          <p:cNvSpPr txBox="1"/>
+          <p:nvPr/>
+        </p:nvSpPr>
+        <p:spPr>
+          <a:xfrm>
+            <a:off x="822960" y="3044952"/>
+            <a:ext cx="1188720" cy="274320"/>
+          </a:xfrm>
+          <a:prstGeom prst="rect">
+            <a:avLst/>
+          </a:prstGeom>
+          <a:noFill/>
+        </p:spPr>
+        <p:txBody>
+          <a:bodyPr wrap="square" lIns="0" rIns="0" tIns="0" bIns="0">
+            <a:spAutoFit/>
+          </a:bodyPr>
+          <a:lstStyle/>
+          <a:p>
+            <a:pPr algn="r">
+              <a:lnSpc>
+                <a:spcPct val="100000"/>
+              </a:lnSpc>
+            </a:pPr>
+            <a:r>
+              <a:rPr sz="1250" b="1" i="0">
+                <a:solidFill>
+                  <a:srgbClr val="7D5E33"/>
+                </a:solidFill>
+                <a:latin typeface="Noto Serif KR"/>
+                <a:ea typeface="Noto Serif KR"/>
+              </a:rPr>
+              <a:t>2단계</a:t>
+            </a:r>
+          </a:p>
+        </p:txBody>
+      </p:sp>
+      <p:sp>
+        <p:nvSpPr>
+          <p:cNvPr id="14" name="Oval 13"/>
+          <p:cNvSpPr/>
+          <p:nvPr/>
+        </p:nvSpPr>
+        <p:spPr>
+          <a:xfrm>
+            <a:off x="2212848" y="3072384"/>
+            <a:ext cx="132588" cy="132588"/>
+          </a:xfrm>
+          <a:prstGeom prst="ellipse">
+            <a:avLst/>
+          </a:prstGeom>
+          <a:solidFill>
+            <a:srgbClr val="1F5068"/>
+          </a:solidFill>
+          <a:ln w="19050">
+            <a:solidFill>
+              <a:srgbClr val="FFFFFF"/>
+            </a:solidFill>
+          </a:ln>
+          <a:effectLst/>
+        </p:spPr>
+        <p:style>
+          <a:lnRef idx="1">
+            <a:schemeClr val="accent1"/>
+          </a:lnRef>
+          <a:fillRef idx="3">
+            <a:schemeClr val="accent1"/>
+          </a:fillRef>
+          <a:effectRef idx="2">
+            <a:schemeClr val="accent1"/>
+          </a:effectRef>
+          <a:fontRef idx="minor">
+            <a:schemeClr val="lt1"/>
+          </a:fontRef>
+        </p:style>
+        <p:txBody>
+          <a:bodyPr rtlCol="0" anchor="ctr"/>
+          <a:lstStyle/>
+          <a:p>
+            <a:pPr algn="ctr"/>
+          </a:p>
+        </p:txBody>
+      </p:sp>
+      <p:sp>
+        <p:nvSpPr>
+          <p:cNvPr id="15" name="Rounded Rectangle 14"/>
+          <p:cNvSpPr/>
+          <p:nvPr/>
+        </p:nvSpPr>
+        <p:spPr>
+          <a:xfrm>
+            <a:off x="2606040" y="2999232"/>
+            <a:ext cx="1024128" cy="256032"/>
+          </a:xfrm>
+          <a:prstGeom prst="roundRect">
+            <a:avLst>
+              <a:gd name="adj" fmla="val 50000"/>
+            </a:avLst>
+          </a:prstGeom>
+          <a:solidFill>
+            <a:srgbClr val="EAF1F5"/>
+          </a:solidFill>
+          <a:ln>
+            <a:noFill/>
+          </a:ln>
+          <a:effectLst/>
+        </p:spPr>
+        <p:style>
+          <a:lnRef idx="1">
+            <a:schemeClr val="accent1"/>
+          </a:lnRef>
+          <a:fillRef idx="3">
+            <a:schemeClr val="accent1"/>
+          </a:fillRef>
+          <a:effectRef idx="2">
+            <a:schemeClr val="accent1"/>
+          </a:effectRef>
+          <a:fontRef idx="minor">
+            <a:schemeClr val="lt1"/>
+          </a:fontRef>
+        </p:style>
+        <p:txBody>
+          <a:bodyPr rtlCol="0" anchor="ctr" wrap="none" lIns="0" rIns="0" tIns="0" bIns="0"/>
+          <a:lstStyle/>
+          <a:p>
+            <a:pPr algn="ctr">
+              <a:lnSpc>
+                <a:spcPct val="100000"/>
+              </a:lnSpc>
+            </a:pPr>
+            <a:r>
+              <a:rPr sz="900" b="0" i="0">
+                <a:solidFill>
+                  <a:srgbClr val="1F5068"/>
+                </a:solidFill>
+                <a:latin typeface="Pretendard SemiBold"/>
+                <a:ea typeface="Pretendard SemiBold"/>
+              </a:rPr>
+              <a:t>검색마스터</a:t>
+            </a:r>
+          </a:p>
+        </p:txBody>
+      </p:sp>
+      <p:sp>
+        <p:nvSpPr>
+          <p:cNvPr id="16" name="TextBox 15"/>
+          <p:cNvSpPr txBox="1"/>
+          <p:nvPr/>
+        </p:nvSpPr>
+        <p:spPr>
+          <a:xfrm>
+            <a:off x="2606040" y="3337560"/>
+            <a:ext cx="8595360" cy="658368"/>
+          </a:xfrm>
+          <a:prstGeom prst="rect">
+            <a:avLst/>
+          </a:prstGeom>
+          <a:noFill/>
+        </p:spPr>
+        <p:txBody>
+          <a:bodyPr wrap="square" lIns="0" rIns="0" tIns="0" bIns="0">
+            <a:spAutoFit/>
+          </a:bodyPr>
+          <a:lstStyle/>
+          <a:p>
+            <a:pPr algn="l">
+              <a:lnSpc>
+                <a:spcPct val="100000"/>
+              </a:lnSpc>
+              <a:spcAft>
+                <a:spcPts val="200"/>
+              </a:spcAft>
+            </a:pPr>
+            <a:r>
+              <a:rPr sz="1350" b="0" i="0">
+                <a:solidFill>
+                  <a:srgbClr val="1D2735"/>
+                </a:solidFill>
+                <a:latin typeface="Pretendard ExtraBold"/>
+                <a:ea typeface="Pretendard ExtraBold"/>
+              </a:rPr>
+              <a:t>상품명·키워드 만들기</a:t>
+            </a:r>
+          </a:p>
+          <a:p>
+            <a:pPr algn="l">
+              <a:lnSpc>
+                <a:spcPct val="125000"/>
+              </a:lnSpc>
+            </a:pPr>
+            <a:r>
+              <a:rPr sz="1050" b="0" i="0">
+                <a:solidFill>
+                  <a:srgbClr val="455569"/>
+                </a:solidFill>
+                <a:latin typeface="Pretendard"/>
+                <a:ea typeface="Pretendard"/>
+              </a:rPr>
+              <a:t>상단 메뉴로 이동해 사진과 설명을 넣고, 판매 채널에 맞는 상품명을 만듭니다.</a:t>
+            </a:r>
+          </a:p>
+        </p:txBody>
+      </p:sp>
+      <p:sp>
+        <p:nvSpPr>
+          <p:cNvPr id="17" name="Rectangle 16"/>
+          <p:cNvSpPr/>
+          <p:nvPr/>
+        </p:nvSpPr>
+        <p:spPr>
+          <a:xfrm>
+            <a:off x="2269540" y="4352544"/>
+            <a:ext cx="18288" cy="969264"/>
+          </a:xfrm>
+          <a:prstGeom prst="rect">
+            <a:avLst/>
+          </a:prstGeom>
+          <a:solidFill>
+            <a:srgbClr val="DAD2C6"/>
+          </a:solidFill>
+          <a:ln>
+            <a:noFill/>
+          </a:ln>
+          <a:effectLst/>
+        </p:spPr>
+        <p:style>
+          <a:lnRef idx="1">
+            <a:schemeClr val="accent1"/>
+          </a:lnRef>
+          <a:fillRef idx="3">
+            <a:schemeClr val="accent1"/>
+          </a:fillRef>
+          <a:effectRef idx="2">
+            <a:schemeClr val="accent1"/>
+          </a:effectRef>
+          <a:fontRef idx="minor">
+            <a:schemeClr val="lt1"/>
+          </a:fontRef>
+        </p:style>
+        <p:txBody>
+          <a:bodyPr rtlCol="0" anchor="ctr"/>
+          <a:lstStyle/>
+          <a:p>
+            <a:pPr algn="ctr"/>
+          </a:p>
+        </p:txBody>
+      </p:sp>
+      <p:sp>
+        <p:nvSpPr>
+          <p:cNvPr id="18" name="TextBox 17"/>
+          <p:cNvSpPr txBox="1"/>
+          <p:nvPr/>
+        </p:nvSpPr>
+        <p:spPr>
+          <a:xfrm>
+            <a:off x="822960" y="4123944"/>
+            <a:ext cx="1188720" cy="274320"/>
+          </a:xfrm>
+          <a:prstGeom prst="rect">
+            <a:avLst/>
+          </a:prstGeom>
+          <a:noFill/>
+        </p:spPr>
+        <p:txBody>
+          <a:bodyPr wrap="square" lIns="0" rIns="0" tIns="0" bIns="0">
+            <a:spAutoFit/>
+          </a:bodyPr>
+          <a:lstStyle/>
+          <a:p>
+            <a:pPr algn="r">
+              <a:lnSpc>
+                <a:spcPct val="100000"/>
+              </a:lnSpc>
+            </a:pPr>
+            <a:r>
+              <a:rPr sz="1250" b="1" i="0">
+                <a:solidFill>
+                  <a:srgbClr val="7D5E33"/>
+                </a:solidFill>
+                <a:latin typeface="Noto Serif KR"/>
+                <a:ea typeface="Noto Serif KR"/>
+              </a:rPr>
+              <a:t>3단계</a:t>
+            </a:r>
+          </a:p>
+        </p:txBody>
+      </p:sp>
+      <p:sp>
+        <p:nvSpPr>
+          <p:cNvPr id="19" name="Oval 18"/>
+          <p:cNvSpPr/>
+          <p:nvPr/>
+        </p:nvSpPr>
+        <p:spPr>
+          <a:xfrm>
+            <a:off x="2212848" y="4151376"/>
+            <a:ext cx="132588" cy="132588"/>
+          </a:xfrm>
+          <a:prstGeom prst="ellipse">
+            <a:avLst/>
+          </a:prstGeom>
+          <a:solidFill>
+            <a:srgbClr val="9A7440"/>
+          </a:solidFill>
+          <a:ln w="19050">
+            <a:solidFill>
+              <a:srgbClr val="FFFFFF"/>
+            </a:solidFill>
+          </a:ln>
+          <a:effectLst/>
+        </p:spPr>
+        <p:style>
+          <a:lnRef idx="1">
+            <a:schemeClr val="accent1"/>
+          </a:lnRef>
+          <a:fillRef idx="3">
+            <a:schemeClr val="accent1"/>
+          </a:fillRef>
+          <a:effectRef idx="2">
+            <a:schemeClr val="accent1"/>
+          </a:effectRef>
+          <a:fontRef idx="minor">
+            <a:schemeClr val="lt1"/>
+          </a:fontRef>
+        </p:style>
+        <p:txBody>
+          <a:bodyPr rtlCol="0" anchor="ctr"/>
+          <a:lstStyle/>
+          <a:p>
+            <a:pPr algn="ctr"/>
+          </a:p>
+        </p:txBody>
+      </p:sp>
+      <p:sp>
+        <p:nvSpPr>
+          <p:cNvPr id="20" name="Rounded Rectangle 19"/>
+          <p:cNvSpPr/>
+          <p:nvPr/>
+        </p:nvSpPr>
+        <p:spPr>
+          <a:xfrm>
+            <a:off x="2606040" y="4078224"/>
+            <a:ext cx="1024128" cy="256032"/>
+          </a:xfrm>
+          <a:prstGeom prst="roundRect">
+            <a:avLst>
+              <a:gd name="adj" fmla="val 50000"/>
+            </a:avLst>
+          </a:prstGeom>
+          <a:solidFill>
+            <a:srgbClr val="F6EFE5"/>
+          </a:solidFill>
+          <a:ln>
+            <a:noFill/>
+          </a:ln>
+          <a:effectLst/>
+        </p:spPr>
+        <p:style>
+          <a:lnRef idx="1">
+            <a:schemeClr val="accent1"/>
+          </a:lnRef>
+          <a:fillRef idx="3">
+            <a:schemeClr val="accent1"/>
+          </a:fillRef>
+          <a:effectRef idx="2">
+            <a:schemeClr val="accent1"/>
+          </a:effectRef>
+          <a:fontRef idx="minor">
+            <a:schemeClr val="lt1"/>
+          </a:fontRef>
+        </p:style>
+        <p:txBody>
+          <a:bodyPr rtlCol="0" anchor="ctr" wrap="none" lIns="0" rIns="0" tIns="0" bIns="0"/>
+          <a:lstStyle/>
+          <a:p>
+            <a:pPr algn="ctr">
+              <a:lnSpc>
+                <a:spcPct val="100000"/>
+              </a:lnSpc>
+            </a:pPr>
+            <a:r>
+              <a:rPr sz="900" b="0" i="0">
+                <a:solidFill>
+                  <a:srgbClr val="7D5E33"/>
+                </a:solidFill>
+                <a:latin typeface="Pretendard SemiBold"/>
+                <a:ea typeface="Pretendard SemiBold"/>
+              </a:rPr>
+              <a:t>프리캔버스</a:t>
+            </a:r>
+          </a:p>
+        </p:txBody>
+      </p:sp>
+      <p:sp>
+        <p:nvSpPr>
+          <p:cNvPr id="21" name="TextBox 20"/>
+          <p:cNvSpPr txBox="1"/>
+          <p:nvPr/>
+        </p:nvSpPr>
+        <p:spPr>
+          <a:xfrm>
+            <a:off x="2606040" y="4416552"/>
+            <a:ext cx="8595360" cy="658368"/>
+          </a:xfrm>
+          <a:prstGeom prst="rect">
+            <a:avLst/>
+          </a:prstGeom>
+          <a:noFill/>
+        </p:spPr>
+        <p:txBody>
+          <a:bodyPr wrap="square" lIns="0" rIns="0" tIns="0" bIns="0">
+            <a:spAutoFit/>
+          </a:bodyPr>
+          <a:lstStyle/>
+          <a:p>
+            <a:pPr algn="l">
+              <a:lnSpc>
+                <a:spcPct val="100000"/>
+              </a:lnSpc>
+              <a:spcAft>
+                <a:spcPts val="200"/>
+              </a:spcAft>
+            </a:pPr>
+            <a:r>
+              <a:rPr sz="1350" b="0" i="0">
+                <a:solidFill>
+                  <a:srgbClr val="1D2735"/>
+                </a:solidFill>
+                <a:latin typeface="Pretendard ExtraBold"/>
+                <a:ea typeface="Pretendard ExtraBold"/>
+              </a:rPr>
+              <a:t>상세·영상·카드뉴스 만들기</a:t>
+            </a:r>
+          </a:p>
+          <a:p>
+            <a:pPr algn="l">
+              <a:lnSpc>
+                <a:spcPct val="125000"/>
+              </a:lnSpc>
+            </a:pPr>
+            <a:r>
+              <a:rPr sz="1050" b="0" i="0">
+                <a:solidFill>
+                  <a:srgbClr val="455569"/>
+                </a:solidFill>
+                <a:latin typeface="Pretendard"/>
+                <a:ea typeface="Pretendard"/>
+              </a:rPr>
+              <a:t>같은 재료로 상세페이지를 만들고, 필요하면 영상 번역과 카드뉴스까지 뽑습니다.</a:t>
+            </a:r>
+          </a:p>
+        </p:txBody>
+      </p:sp>
+      <p:sp>
+        <p:nvSpPr>
+          <p:cNvPr id="22" name="TextBox 21"/>
+          <p:cNvSpPr txBox="1"/>
+          <p:nvPr/>
+        </p:nvSpPr>
+        <p:spPr>
+          <a:xfrm>
+            <a:off x="822960" y="5202936"/>
+            <a:ext cx="1188720" cy="274320"/>
+          </a:xfrm>
+          <a:prstGeom prst="rect">
+            <a:avLst/>
+          </a:prstGeom>
+          <a:noFill/>
+        </p:spPr>
+        <p:txBody>
+          <a:bodyPr wrap="square" lIns="0" rIns="0" tIns="0" bIns="0">
+            <a:spAutoFit/>
+          </a:bodyPr>
+          <a:lstStyle/>
+          <a:p>
+            <a:pPr algn="r">
+              <a:lnSpc>
+                <a:spcPct val="100000"/>
+              </a:lnSpc>
+            </a:pPr>
+            <a:r>
+              <a:rPr sz="1250" b="1" i="0">
+                <a:solidFill>
+                  <a:srgbClr val="7D5E33"/>
+                </a:solidFill>
+                <a:latin typeface="Noto Serif KR"/>
+                <a:ea typeface="Noto Serif KR"/>
+              </a:rPr>
+              <a:t>4단계</a:t>
+            </a:r>
+          </a:p>
+        </p:txBody>
+      </p:sp>
+      <p:sp>
+        <p:nvSpPr>
+          <p:cNvPr id="23" name="Oval 22"/>
+          <p:cNvSpPr/>
+          <p:nvPr/>
+        </p:nvSpPr>
+        <p:spPr>
+          <a:xfrm>
+            <a:off x="2212848" y="5230368"/>
+            <a:ext cx="132588" cy="132588"/>
+          </a:xfrm>
+          <a:prstGeom prst="ellipse">
+            <a:avLst/>
+          </a:prstGeom>
+          <a:solidFill>
+            <a:srgbClr val="1D2735"/>
+          </a:solidFill>
+          <a:ln w="19050">
+            <a:solidFill>
+              <a:srgbClr val="FFFFFF"/>
+            </a:solidFill>
+          </a:ln>
+          <a:effectLst/>
+        </p:spPr>
+        <p:style>
+          <a:lnRef idx="1">
+            <a:schemeClr val="accent1"/>
+          </a:lnRef>
+          <a:fillRef idx="3">
+            <a:schemeClr val="accent1"/>
+          </a:fillRef>
+          <a:effectRef idx="2">
+            <a:schemeClr val="accent1"/>
+          </a:effectRef>
+          <a:fontRef idx="minor">
+            <a:schemeClr val="lt1"/>
+          </a:fontRef>
+        </p:style>
+        <p:txBody>
+          <a:bodyPr rtlCol="0" anchor="ctr"/>
+          <a:lstStyle/>
+          <a:p>
+            <a:pPr algn="ctr"/>
+          </a:p>
+        </p:txBody>
+      </p:sp>
+      <p:sp>
+        <p:nvSpPr>
+          <p:cNvPr id="24" name="Rounded Rectangle 23"/>
+          <p:cNvSpPr/>
+          <p:nvPr/>
+        </p:nvSpPr>
+        <p:spPr>
+          <a:xfrm>
+            <a:off x="2606040" y="5157216"/>
+            <a:ext cx="640080" cy="256032"/>
+          </a:xfrm>
+          <a:prstGeom prst="roundRect">
+            <a:avLst>
+              <a:gd name="adj" fmla="val 50000"/>
+            </a:avLst>
+          </a:prstGeom>
+          <a:solidFill>
+            <a:srgbClr val="EDF0EC"/>
+          </a:solidFill>
+          <a:ln>
+            <a:noFill/>
+          </a:ln>
+          <a:effectLst/>
+        </p:spPr>
+        <p:style>
+          <a:lnRef idx="1">
+            <a:schemeClr val="accent1"/>
+          </a:lnRef>
+          <a:fillRef idx="3">
+            <a:schemeClr val="accent1"/>
+          </a:fillRef>
+          <a:effectRef idx="2">
+            <a:schemeClr val="accent1"/>
+          </a:effectRef>
+          <a:fontRef idx="minor">
+            <a:schemeClr val="lt1"/>
+          </a:fontRef>
+        </p:style>
+        <p:txBody>
+          <a:bodyPr rtlCol="0" anchor="ctr" wrap="none" lIns="0" rIns="0" tIns="0" bIns="0"/>
+          <a:lstStyle/>
+          <a:p>
+            <a:pPr algn="ctr">
+              <a:lnSpc>
+                <a:spcPct val="100000"/>
+              </a:lnSpc>
+            </a:pPr>
+            <a:r>
+              <a:rPr sz="900" b="0" i="0">
+                <a:solidFill>
+                  <a:srgbClr val="455569"/>
+                </a:solidFill>
+                <a:latin typeface="Pretendard SemiBold"/>
+                <a:ea typeface="Pretendard SemiBold"/>
+              </a:rPr>
+              <a:t>셀러</a:t>
+            </a:r>
+          </a:p>
+        </p:txBody>
+      </p:sp>
+      <p:sp>
+        <p:nvSpPr>
+          <p:cNvPr id="25" name="TextBox 24"/>
+          <p:cNvSpPr txBox="1"/>
+          <p:nvPr/>
+        </p:nvSpPr>
+        <p:spPr>
+          <a:xfrm>
+            <a:off x="2606040" y="5495544"/>
+            <a:ext cx="8595360" cy="658368"/>
+          </a:xfrm>
+          <a:prstGeom prst="rect">
+            <a:avLst/>
+          </a:prstGeom>
+          <a:noFill/>
+        </p:spPr>
+        <p:txBody>
+          <a:bodyPr wrap="square" lIns="0" rIns="0" tIns="0" bIns="0">
+            <a:spAutoFit/>
+          </a:bodyPr>
+          <a:lstStyle/>
+          <a:p>
+            <a:pPr algn="l">
+              <a:lnSpc>
+                <a:spcPct val="100000"/>
+              </a:lnSpc>
+              <a:spcAft>
+                <a:spcPts val="200"/>
+              </a:spcAft>
+            </a:pPr>
+            <a:r>
+              <a:rPr sz="1350" b="0" i="0">
+                <a:solidFill>
+                  <a:srgbClr val="1D2735"/>
+                </a:solidFill>
+                <a:latin typeface="Pretendard ExtraBold"/>
+                <a:ea typeface="Pretendard ExtraBold"/>
+              </a:rPr>
+              <a:t>플랫폼에 등록</a:t>
+            </a:r>
+          </a:p>
+          <a:p>
+            <a:pPr algn="l">
+              <a:lnSpc>
+                <a:spcPct val="125000"/>
+              </a:lnSpc>
+            </a:pPr>
+            <a:r>
+              <a:rPr sz="1050" b="0" i="0">
+                <a:solidFill>
+                  <a:srgbClr val="455569"/>
+                </a:solidFill>
+                <a:latin typeface="Pretendard"/>
+                <a:ea typeface="Pretendard"/>
+              </a:rPr>
+              <a:t>완성본을 내려받아 판매 플랫폼에 그대로 올립니다.</a:t>
+            </a:r>
+          </a:p>
+        </p:txBody>
+      </p:sp>
+      <p:sp>
+        <p:nvSpPr>
+          <p:cNvPr id="26" name="Rounded Rectangle 25"/>
+          <p:cNvSpPr/>
+          <p:nvPr/>
+        </p:nvSpPr>
+        <p:spPr>
+          <a:xfrm>
+            <a:off x="502920" y="6355080"/>
+            <a:ext cx="868680" cy="329184"/>
+          </a:xfrm>
+          <a:prstGeom prst="roundRect">
+            <a:avLst>
+              <a:gd name="adj" fmla="val 50000"/>
+            </a:avLst>
+          </a:prstGeom>
+          <a:solidFill>
+            <a:srgbClr val="FFFFFF"/>
+          </a:solidFill>
+          <a:ln w="9525">
+            <a:solidFill>
+              <a:srgbClr val="EBE5DB"/>
+            </a:solidFill>
+          </a:ln>
+          <a:effectLst/>
+        </p:spPr>
+        <p:style>
+          <a:lnRef idx="1">
+            <a:schemeClr val="accent1"/>
+          </a:lnRef>
+          <a:fillRef idx="3">
+            <a:schemeClr val="accent1"/>
+          </a:fillRef>
+          <a:effectRef idx="2">
+            <a:schemeClr val="accent1"/>
+          </a:effectRef>
+          <a:fontRef idx="minor">
+            <a:schemeClr val="lt1"/>
+          </a:fontRef>
+        </p:style>
+        <p:txBody>
+          <a:bodyPr rtlCol="0" anchor="ctr" wrap="none" lIns="0" rIns="0" tIns="0" bIns="0"/>
+          <a:lstStyle/>
+          <a:p>
+            <a:pPr algn="ctr">
+              <a:lnSpc>
+                <a:spcPct val="100000"/>
+              </a:lnSpc>
+            </a:pPr>
+            <a:r>
+              <a:rPr sz="1050" b="0" i="0">
+                <a:solidFill>
+                  <a:srgbClr val="455569"/>
+                </a:solidFill>
+                <a:latin typeface="Pretendard SemiBold"/>
+                <a:ea typeface="Pretendard SemiBold"/>
+              </a:rPr>
+              <a:t>18 / 19</a:t>
+            </a:r>
+          </a:p>
+        </p:txBody>
+      </p:sp>
+    </p:spTree>
+  </p:cSld>
+  <p:clrMapOvr>
+    <a:masterClrMapping/>
+  </p:clrMapOvr>
+</p:sld>
+</file>
+
+<file path=ppt/slides/slide19.xml><?xml version="1.0" encoding="utf-8"?>
+<p:sld xmlns:a="http://schemas.openxmlformats.org/drawingml/2006/main" xmlns:p="http://schemas.openxmlformats.org/presentationml/2006/main" xmlns:r="http://schemas.openxmlformats.org/officeDocument/2006/relationships">
+  <p:cSld>
+    <p:spTree>
+      <p:nvGrpSpPr>
+        <p:cNvPr id="1" name=""/>
+        <p:cNvGrpSpPr/>
+        <p:nvPr/>
+      </p:nvGrpSpPr>
+      <p:grpSpPr/>
+      <p:sp>
+        <p:nvSpPr>
+          <p:cNvPr id="2" name="Rectangle 1"/>
+          <p:cNvSpPr/>
+          <p:nvPr/>
+        </p:nvSpPr>
+        <p:spPr>
+          <a:xfrm>
+            <a:off x="0" y="0"/>
+            <a:ext cx="12191695" cy="6858000"/>
+          </a:xfrm>
+          <a:prstGeom prst="rect">
+            <a:avLst/>
+          </a:prstGeom>
+          <a:solidFill>
+            <a:srgbClr val="FFFDF9"/>
+          </a:solidFill>
+          <a:ln>
+            <a:noFill/>
+          </a:ln>
+          <a:effectLst/>
+        </p:spPr>
+        <p:style>
+          <a:lnRef idx="1">
+            <a:schemeClr val="accent1"/>
+          </a:lnRef>
+          <a:fillRef idx="3">
+            <a:schemeClr val="accent1"/>
+          </a:fillRef>
+          <a:effectRef idx="2">
+            <a:schemeClr val="accent1"/>
+          </a:effectRef>
+          <a:fontRef idx="minor">
+            <a:schemeClr val="lt1"/>
+          </a:fontRef>
+        </p:style>
+        <p:txBody>
+          <a:bodyPr rtlCol="0" anchor="ctr"/>
+          <a:lstStyle/>
+          <a:p>
+            <a:pPr algn="ctr"/>
+          </a:p>
+        </p:txBody>
+      </p:sp>
+      <p:sp>
+        <p:nvSpPr>
+          <p:cNvPr id="3" name="Rectangle 2"/>
+          <p:cNvSpPr/>
+          <p:nvPr/>
+        </p:nvSpPr>
+        <p:spPr>
+          <a:xfrm>
+            <a:off x="0" y="0"/>
+            <a:ext cx="12191695" cy="45720"/>
+          </a:xfrm>
+          <a:prstGeom prst="rect">
+            <a:avLst/>
+          </a:prstGeom>
+          <a:solidFill>
+            <a:srgbClr val="173F54"/>
+          </a:solidFill>
+          <a:ln>
+            <a:noFill/>
+          </a:ln>
+          <a:effectLst/>
+        </p:spPr>
+        <p:style>
+          <a:lnRef idx="1">
+            <a:schemeClr val="accent1"/>
+          </a:lnRef>
+          <a:fillRef idx="3">
+            <a:schemeClr val="accent1"/>
+          </a:fillRef>
+          <a:effectRef idx="2">
+            <a:schemeClr val="accent1"/>
+          </a:effectRef>
+          <a:fontRef idx="minor">
+            <a:schemeClr val="lt1"/>
+          </a:fontRef>
+        </p:style>
+        <p:txBody>
+          <a:bodyPr rtlCol="0" anchor="ctr"/>
+          <a:lstStyle/>
+          <a:p>
+            <a:pPr algn="ctr"/>
+          </a:p>
+        </p:txBody>
+      </p:sp>
+      <p:sp>
+        <p:nvSpPr>
           <p:cNvPr id="4" name="TextBox 3"/>
           <p:cNvSpPr txBox="1"/>
           <p:nvPr/>
@@ -10939,7 +12495,7 @@
                 <a:latin typeface="Pretendard SemiBold"/>
                 <a:ea typeface="Pretendard SemiBold"/>
               </a:rPr>
-              <a:t>2 / 17</a:t>
+              <a:t>2 / 19</a:t>
             </a:r>
           </a:p>
         </p:txBody>
@@ -11469,7 +13025,7 @@
                 <a:latin typeface="Pretendard SemiBold"/>
                 <a:ea typeface="Pretendard SemiBold"/>
               </a:rPr>
-              <a:t>3 / 17</a:t>
+              <a:t>3 / 19</a:t>
             </a:r>
           </a:p>
         </p:txBody>
@@ -12529,7 +14085,7 @@
                 <a:latin typeface="Pretendard SemiBold"/>
                 <a:ea typeface="Pretendard SemiBold"/>
               </a:rPr>
-              <a:t>5 / 17</a:t>
+              <a:t>5 / 19</a:t>
             </a:r>
           </a:p>
         </p:txBody>
@@ -13570,7 +15126,7 @@
                 <a:latin typeface="Pretendard SemiBold"/>
                 <a:ea typeface="Pretendard SemiBold"/>
               </a:rPr>
-              <a:t>7 / 17</a:t>
+              <a:t>7 / 19</a:t>
             </a:r>
           </a:p>
         </p:txBody>
@@ -14347,7 +15903,7 @@
                 <a:latin typeface="Pretendard SemiBold"/>
                 <a:ea typeface="Pretendard SemiBold"/>
               </a:rPr>
-              <a:t>8 / 17</a:t>
+              <a:t>8 / 19</a:t>
             </a:r>
           </a:p>
         </p:txBody>
@@ -15124,7 +16680,7 @@
                 <a:latin typeface="Pretendard SemiBold"/>
                 <a:ea typeface="Pretendard SemiBold"/>
               </a:rPr>
-              <a:t>9 / 17</a:t>
+              <a:t>9 / 19</a:t>
             </a:r>
           </a:p>
         </p:txBody>

--- a/slides.pptx
+++ b/slides.pptx
@@ -5705,7 +5705,7 @@
                 <a:latin typeface="Pretendard ExtraBold"/>
                 <a:ea typeface="Pretendard ExtraBold"/>
               </a:rPr>
-              <a:t>저장할 때 함께 담김</a:t>
+              <a:t>MP4 저장·전체저장 포함</a:t>
             </a:r>
           </a:p>
           <a:p>
@@ -5722,7 +5722,7 @@
                 <a:latin typeface="Pretendard"/>
                 <a:ea typeface="Pretendard"/>
               </a:rPr>
-              <a:t>전체저장 ZIP 안 gifs 폴더에 따로 정리되어, 상세 이미지와 같이 받습니다.</a:t>
+              <a:t>만들어진 GIF 카드를 누르면 MP4 영상으로도 저장되고, 전체저장 ZIP 안 gifs 폴더에도 함께 담깁니다.</a:t>
             </a:r>
           </a:p>
         </p:txBody>

--- a/slides.pptx
+++ b/slides.pptx
@@ -20,10 +20,6 @@
     <p:sldId id="268" r:id="rId19"/>
     <p:sldId id="269" r:id="rId20"/>
     <p:sldId id="270" r:id="rId21"/>
-    <p:sldId id="271" r:id="rId22"/>
-    <p:sldId id="272" r:id="rId23"/>
-    <p:sldId id="273" r:id="rId24"/>
-    <p:sldId id="274" r:id="rId25"/>
   </p:sldIdLst>
   <p:sldSz cx="12191695" cy="6858000" type="screen4x3"/>
   <p:notesSz cx="6858000" cy="9144000"/>
@@ -3720,7 +3716,7 @@
                 <a:latin typeface="Pretendard ExtraBold"/>
                 <a:ea typeface="Pretendard ExtraBold"/>
               </a:rPr>
-              <a:t>프리캔버스 새 기능 ③</a:t>
+              <a:t>프리캔버스 새 기능 ⑥</a:t>
             </a:r>
           </a:p>
         </p:txBody>
@@ -3760,7 +3756,7 @@
                 <a:latin typeface="Noto Serif KR"/>
                 <a:ea typeface="Noto Serif KR"/>
               </a:rPr>
-              <a:t>기존 상세페이지 편집</a:t>
+              <a:t>AI 지우개</a:t>
             </a:r>
           </a:p>
           <a:p>
@@ -3780,7 +3776,7 @@
                 <a:latin typeface="Pretendard"/>
                 <a:ea typeface="Pretendard"/>
               </a:rPr>
-              <a:t>긴 상세 캡처를 올리면 블록 단위로 나뉘어, 원하는 부분만 고칠 수 있습니다.</a:t>
+              <a:t>이미지에서 지우고 싶은 부분만 칠하면 지워집니다.</a:t>
             </a:r>
           </a:p>
         </p:txBody>
@@ -3820,7 +3816,7 @@
                 <a:latin typeface="Pretendard"/>
                 <a:ea typeface="Pretendard"/>
               </a:rPr>
-              <a:t>🧱</a:t>
+              <a:t>🖌️</a:t>
             </a:r>
           </a:p>
         </p:txBody>
@@ -3863,7 +3859,7 @@
                 <a:latin typeface="Pretendard ExtraBold"/>
                 <a:ea typeface="Pretendard ExtraBold"/>
               </a:rPr>
-              <a:t>캡처가 편집 블록으로 나뉩니다</a:t>
+              <a:t>워터마크·글자 지우기</a:t>
             </a:r>
           </a:p>
           <a:p>
@@ -3880,7 +3876,7 @@
                 <a:latin typeface="Pretendard"/>
                 <a:ea typeface="Pretendard"/>
               </a:rPr>
-              <a:t>길게 이어진 상세 이미지를 내용 경계에 맞춰 이미지 블록과 글 블록으로 자동 분리합니다.</a:t>
+              <a:t>소싱 이미지에 박힌 워터마크, 중국어 글자, 거슬리는 배경을 칠한 자리만 지웁니다.</a:t>
             </a:r>
           </a:p>
         </p:txBody>
@@ -3964,7 +3960,7 @@
                 <a:latin typeface="Pretendard"/>
                 <a:ea typeface="Pretendard"/>
               </a:rPr>
-              <a:t>↔️</a:t>
+              <a:t>⚡</a:t>
             </a:r>
           </a:p>
         </p:txBody>
@@ -4007,7 +4003,7 @@
                 <a:latin typeface="Pretendard ExtraBold"/>
                 <a:ea typeface="Pretendard ExtraBold"/>
               </a:rPr>
-              <a:t>나뉜 경계는 드래그로 조정</a:t>
+              <a:t>기다림 없이 바로</a:t>
             </a:r>
           </a:p>
           <a:p>
@@ -4024,7 +4020,7 @@
                 <a:latin typeface="Pretendard"/>
                 <a:ea typeface="Pretendard"/>
               </a:rPr>
-              <a:t>잘린 위치가 아쉬우면 경계선을 마우스로 끌어 원하는 지점에서 다시 자릅니다.</a:t>
+              <a:t>편집 화면 안에서 곧바로 지워져, 다른 프로그램을 오갈 필요가 없습니다.</a:t>
             </a:r>
           </a:p>
         </p:txBody>
@@ -4108,7 +4104,7 @@
                 <a:latin typeface="Pretendard"/>
                 <a:ea typeface="Pretendard"/>
               </a:rPr>
-              <a:t>✏️</a:t>
+              <a:t>👆</a:t>
             </a:r>
           </a:p>
         </p:txBody>
@@ -4151,7 +4147,7 @@
                 <a:latin typeface="Pretendard ExtraBold"/>
                 <a:ea typeface="Pretendard ExtraBold"/>
               </a:rPr>
-              <a:t>이미지 속 글자 수정</a:t>
+              <a:t>간단한 조작</a:t>
             </a:r>
           </a:p>
           <a:p>
@@ -4168,34 +4164,31 @@
                 <a:latin typeface="Pretendard"/>
                 <a:ea typeface="Pretendard"/>
               </a:rPr>
-              <a:t>이미지 안 문구를 골라 내용을 고치고 글꼴을 정하면, 그대로 다시 그려 줍니다.</a:t>
-            </a:r>
-          </a:p>
-        </p:txBody>
-      </p:sp>
-      <p:pic>
-        <p:nvPicPr>
-          <p:cNvPr id="15" name="Picture 14" descr="fc_edit.jpg"/>
-          <p:cNvPicPr>
-            <a:picLocks noChangeAspect="1"/>
-          </p:cNvPicPr>
-          <p:nvPr/>
-        </p:nvPicPr>
-        <p:blipFill>
-          <a:blip r:embed="rId2"/>
-          <a:stretch>
-            <a:fillRect/>
-          </a:stretch>
-        </p:blipFill>
-        <p:spPr>
-          <a:xfrm>
-            <a:off x="6263640" y="1874519"/>
-            <a:ext cx="4983480" cy="2382103"/>
-          </a:xfrm>
-          <a:prstGeom prst="rect">
-            <a:avLst/>
-          </a:prstGeom>
-          <a:ln w="12700">
+              <a:t>복잡한 설정 없이, 문지르면 지워집니다.</a:t>
+            </a:r>
+          </a:p>
+        </p:txBody>
+      </p:sp>
+      <p:sp>
+        <p:nvSpPr>
+          <p:cNvPr id="15" name="Rounded Rectangle 14"/>
+          <p:cNvSpPr/>
+          <p:nvPr/>
+        </p:nvSpPr>
+        <p:spPr>
+          <a:xfrm>
+            <a:off x="6400800" y="2468880"/>
+            <a:ext cx="2377440" cy="1783080"/>
+          </a:xfrm>
+          <a:prstGeom prst="roundRect">
+            <a:avLst>
+              <a:gd name="adj" fmla="val 10000"/>
+            </a:avLst>
+          </a:prstGeom>
+          <a:solidFill>
+            <a:srgbClr val="28364A"/>
+          </a:solidFill>
+          <a:ln w="9525">
             <a:solidFill>
               <a:srgbClr val="EBE5DB"/>
             </a:solidFill>
@@ -4209,7 +4202,28 @@
             </a:outerShdw>
           </a:effectLst>
         </p:spPr>
-      </p:pic>
+        <p:style>
+          <a:lnRef idx="1">
+            <a:schemeClr val="accent1"/>
+          </a:lnRef>
+          <a:fillRef idx="3">
+            <a:schemeClr val="accent1"/>
+          </a:fillRef>
+          <a:effectRef idx="2">
+            <a:schemeClr val="accent1"/>
+          </a:effectRef>
+          <a:fontRef idx="minor">
+            <a:schemeClr val="lt1"/>
+          </a:fontRef>
+        </p:style>
+        <p:txBody>
+          <a:bodyPr rtlCol="0" anchor="ctr"/>
+          <a:lstStyle/>
+          <a:p>
+            <a:pPr algn="ctr"/>
+          </a:p>
+        </p:txBody>
+      </p:sp>
       <p:sp>
         <p:nvSpPr>
           <p:cNvPr id="16" name="TextBox 15"/>
@@ -4217,9 +4231,9 @@
           <p:nvPr/>
         </p:nvSpPr>
         <p:spPr>
-          <a:xfrm>
-            <a:off x="5989320" y="4366351"/>
-            <a:ext cx="5532120" cy="256032"/>
+          <a:xfrm rot="20760000">
+            <a:off x="6629400" y="3063240"/>
+            <a:ext cx="1920240" cy="457200"/>
           </a:xfrm>
           <a:prstGeom prst="rect">
             <a:avLst/>
@@ -4238,21 +4252,323 @@
               </a:lnSpc>
             </a:pPr>
             <a:r>
-              <a:rPr sz="900" b="0" i="0">
-                <a:solidFill>
-                  <a:srgbClr val="455569"/>
+              <a:rPr sz="1500" b="0" i="0" spc="280">
+                <a:solidFill>
+                  <a:srgbClr val="9AA7B8"/>
+                </a:solidFill>
+                <a:latin typeface="Pretendard ExtraBold"/>
+                <a:ea typeface="Pretendard ExtraBold"/>
+              </a:rPr>
+              <a:t>워터마크</a:t>
+            </a:r>
+          </a:p>
+        </p:txBody>
+      </p:sp>
+      <p:sp>
+        <p:nvSpPr>
+          <p:cNvPr id="17" name="Rounded Rectangle 16"/>
+          <p:cNvSpPr/>
+          <p:nvPr/>
+        </p:nvSpPr>
+        <p:spPr>
+          <a:xfrm>
+            <a:off x="6766560" y="2926080"/>
+            <a:ext cx="1645920" cy="685800"/>
+          </a:xfrm>
+          <a:prstGeom prst="roundRect">
+            <a:avLst>
+              <a:gd name="adj" fmla="val 50000"/>
+            </a:avLst>
+          </a:prstGeom>
+          <a:noFill/>
+          <a:ln w="22225">
+            <a:solidFill>
+              <a:srgbClr val="D5DDE6"/>
+            </a:solidFill>
+            <a:prstDash val="dash"/>
+          </a:ln>
+          <a:effectLst/>
+        </p:spPr>
+        <p:style>
+          <a:lnRef idx="1">
+            <a:schemeClr val="accent1"/>
+          </a:lnRef>
+          <a:fillRef idx="3">
+            <a:schemeClr val="accent1"/>
+          </a:fillRef>
+          <a:effectRef idx="2">
+            <a:schemeClr val="accent1"/>
+          </a:effectRef>
+          <a:fontRef idx="minor">
+            <a:schemeClr val="lt1"/>
+          </a:fontRef>
+        </p:style>
+        <p:txBody>
+          <a:bodyPr rtlCol="0" anchor="ctr"/>
+          <a:lstStyle/>
+          <a:p>
+            <a:pPr algn="ctr"/>
+          </a:p>
+        </p:txBody>
+      </p:sp>
+      <p:sp>
+        <p:nvSpPr>
+          <p:cNvPr id="18" name="Rounded Rectangle 17"/>
+          <p:cNvSpPr/>
+          <p:nvPr/>
+        </p:nvSpPr>
+        <p:spPr>
+          <a:xfrm>
+            <a:off x="6565392" y="3913632"/>
+            <a:ext cx="868680" cy="274320"/>
+          </a:xfrm>
+          <a:prstGeom prst="roundRect">
+            <a:avLst>
+              <a:gd name="adj" fmla="val 50000"/>
+            </a:avLst>
+          </a:prstGeom>
+          <a:solidFill>
+            <a:srgbClr val="FFFFFF"/>
+          </a:solidFill>
+          <a:ln>
+            <a:noFill/>
+          </a:ln>
+          <a:effectLst/>
+        </p:spPr>
+        <p:style>
+          <a:lnRef idx="1">
+            <a:schemeClr val="accent1"/>
+          </a:lnRef>
+          <a:fillRef idx="3">
+            <a:schemeClr val="accent1"/>
+          </a:fillRef>
+          <a:effectRef idx="2">
+            <a:schemeClr val="accent1"/>
+          </a:effectRef>
+          <a:fontRef idx="minor">
+            <a:schemeClr val="lt1"/>
+          </a:fontRef>
+        </p:style>
+        <p:txBody>
+          <a:bodyPr rtlCol="0" anchor="ctr" wrap="none" lIns="0" rIns="0" tIns="0" bIns="0"/>
+          <a:lstStyle/>
+          <a:p>
+            <a:pPr algn="ctr">
+              <a:lnSpc>
+                <a:spcPct val="100000"/>
+              </a:lnSpc>
+            </a:pPr>
+            <a:r>
+              <a:rPr sz="850" b="0" i="0">
+                <a:solidFill>
+                  <a:srgbClr val="28364A"/>
+                </a:solidFill>
+                <a:latin typeface="Pretendard SemiBold"/>
+                <a:ea typeface="Pretendard SemiBold"/>
+              </a:rPr>
+              <a:t>지우기 전</a:t>
+            </a:r>
+          </a:p>
+        </p:txBody>
+      </p:sp>
+      <p:sp>
+        <p:nvSpPr>
+          <p:cNvPr id="19" name="Rounded Rectangle 18"/>
+          <p:cNvSpPr/>
+          <p:nvPr/>
+        </p:nvSpPr>
+        <p:spPr>
+          <a:xfrm>
+            <a:off x="9006840" y="2468880"/>
+            <a:ext cx="2377440" cy="1783080"/>
+          </a:xfrm>
+          <a:prstGeom prst="roundRect">
+            <a:avLst>
+              <a:gd name="adj" fmla="val 10000"/>
+            </a:avLst>
+          </a:prstGeom>
+          <a:solidFill>
+            <a:srgbClr val="F4F8FA"/>
+          </a:solidFill>
+          <a:ln w="9525">
+            <a:solidFill>
+              <a:srgbClr val="D8E3EA"/>
+            </a:solidFill>
+          </a:ln>
+          <a:effectLst/>
+          <a:effectLst>
+            <a:outerShdw blurRad="170000" dist="50000" dir="5400000" rotWithShape="0">
+              <a:srgbClr val="16241C">
+                <a:alpha val="30000"/>
+              </a:srgbClr>
+            </a:outerShdw>
+          </a:effectLst>
+        </p:spPr>
+        <p:style>
+          <a:lnRef idx="1">
+            <a:schemeClr val="accent1"/>
+          </a:lnRef>
+          <a:fillRef idx="3">
+            <a:schemeClr val="accent1"/>
+          </a:fillRef>
+          <a:effectRef idx="2">
+            <a:schemeClr val="accent1"/>
+          </a:effectRef>
+          <a:fontRef idx="minor">
+            <a:schemeClr val="lt1"/>
+          </a:fontRef>
+        </p:style>
+        <p:txBody>
+          <a:bodyPr rtlCol="0" anchor="ctr"/>
+          <a:lstStyle/>
+          <a:p>
+            <a:pPr algn="ctr"/>
+          </a:p>
+        </p:txBody>
+      </p:sp>
+      <p:sp>
+        <p:nvSpPr>
+          <p:cNvPr id="20" name="TextBox 19"/>
+          <p:cNvSpPr txBox="1"/>
+          <p:nvPr/>
+        </p:nvSpPr>
+        <p:spPr>
+          <a:xfrm>
+            <a:off x="10607040" y="2743200"/>
+            <a:ext cx="548640" cy="411480"/>
+          </a:xfrm>
+          <a:prstGeom prst="rect">
+            <a:avLst/>
+          </a:prstGeom>
+          <a:noFill/>
+        </p:spPr>
+        <p:txBody>
+          <a:bodyPr wrap="square" lIns="0" rIns="0" tIns="0" bIns="0">
+            <a:spAutoFit/>
+          </a:bodyPr>
+          <a:lstStyle/>
+          <a:p>
+            <a:pPr algn="l">
+              <a:lnSpc>
+                <a:spcPct val="100000"/>
+              </a:lnSpc>
+            </a:pPr>
+            <a:r>
+              <a:rPr sz="2000" b="0" i="0">
+                <a:solidFill>
+                  <a:srgbClr val="1F5068"/>
                 </a:solidFill>
                 <a:latin typeface="Pretendard"/>
                 <a:ea typeface="Pretendard"/>
               </a:rPr>
-              <a:t>캡처를 올리면 이미지·텍스트 블록으로 정리됩니다</a:t>
-            </a:r>
-          </a:p>
-        </p:txBody>
-      </p:sp>
-      <p:sp>
-        <p:nvSpPr>
-          <p:cNvPr id="17" name="Rounded Rectangle 16"/>
+              <a:t>✦</a:t>
+            </a:r>
+          </a:p>
+        </p:txBody>
+      </p:sp>
+      <p:sp>
+        <p:nvSpPr>
+          <p:cNvPr id="21" name="Rounded Rectangle 20"/>
+          <p:cNvSpPr/>
+          <p:nvPr/>
+        </p:nvSpPr>
+        <p:spPr>
+          <a:xfrm>
+            <a:off x="9171432" y="3913632"/>
+            <a:ext cx="822960" cy="274320"/>
+          </a:xfrm>
+          <a:prstGeom prst="roundRect">
+            <a:avLst>
+              <a:gd name="adj" fmla="val 50000"/>
+            </a:avLst>
+          </a:prstGeom>
+          <a:solidFill>
+            <a:srgbClr val="1F5068"/>
+          </a:solidFill>
+          <a:ln>
+            <a:noFill/>
+          </a:ln>
+          <a:effectLst/>
+        </p:spPr>
+        <p:style>
+          <a:lnRef idx="1">
+            <a:schemeClr val="accent1"/>
+          </a:lnRef>
+          <a:fillRef idx="3">
+            <a:schemeClr val="accent1"/>
+          </a:fillRef>
+          <a:effectRef idx="2">
+            <a:schemeClr val="accent1"/>
+          </a:effectRef>
+          <a:fontRef idx="minor">
+            <a:schemeClr val="lt1"/>
+          </a:fontRef>
+        </p:style>
+        <p:txBody>
+          <a:bodyPr rtlCol="0" anchor="ctr" wrap="none" lIns="0" rIns="0" tIns="0" bIns="0"/>
+          <a:lstStyle/>
+          <a:p>
+            <a:pPr algn="ctr">
+              <a:lnSpc>
+                <a:spcPct val="100000"/>
+              </a:lnSpc>
+            </a:pPr>
+            <a:r>
+              <a:rPr sz="850" b="0" i="0">
+                <a:solidFill>
+                  <a:srgbClr val="FFFFFF"/>
+                </a:solidFill>
+                <a:latin typeface="Pretendard SemiBold"/>
+                <a:ea typeface="Pretendard SemiBold"/>
+              </a:rPr>
+              <a:t>지운 후</a:t>
+            </a:r>
+          </a:p>
+        </p:txBody>
+      </p:sp>
+      <p:sp>
+        <p:nvSpPr>
+          <p:cNvPr id="22" name="TextBox 21"/>
+          <p:cNvSpPr txBox="1"/>
+          <p:nvPr/>
+        </p:nvSpPr>
+        <p:spPr>
+          <a:xfrm>
+            <a:off x="6400800" y="4526280"/>
+            <a:ext cx="4983480" cy="256032"/>
+          </a:xfrm>
+          <a:prstGeom prst="rect">
+            <a:avLst/>
+          </a:prstGeom>
+          <a:noFill/>
+        </p:spPr>
+        <p:txBody>
+          <a:bodyPr wrap="square" lIns="0" rIns="0" tIns="0" bIns="0">
+            <a:spAutoFit/>
+          </a:bodyPr>
+          <a:lstStyle/>
+          <a:p>
+            <a:pPr algn="ctr">
+              <a:lnSpc>
+                <a:spcPct val="100000"/>
+              </a:lnSpc>
+            </a:pPr>
+            <a:r>
+              <a:rPr sz="900" b="0" i="0">
+                <a:solidFill>
+                  <a:srgbClr val="455569"/>
+                </a:solidFill>
+                <a:latin typeface="Pretendard"/>
+                <a:ea typeface="Pretendard"/>
+              </a:rPr>
+              <a:t>칠한 자리만 지워지고, 상품은 그대로 남습니다</a:t>
+            </a:r>
+          </a:p>
+        </p:txBody>
+      </p:sp>
+      <p:sp>
+        <p:nvSpPr>
+          <p:cNvPr id="23" name="Rounded Rectangle 22"/>
           <p:cNvSpPr/>
           <p:nvPr/>
         </p:nvSpPr>
@@ -4307,7 +4623,7 @@
                 <a:latin typeface="Pretendard SemiBold"/>
                 <a:ea typeface="Pretendard SemiBold"/>
               </a:rPr>
-              <a:t>10 / 19</a:t>
+              <a:t>10 / 15</a:t>
             </a:r>
           </a:p>
         </p:txBody>
@@ -4497,7 +4813,7 @@
                 <a:latin typeface="Pretendard ExtraBold"/>
                 <a:ea typeface="Pretendard ExtraBold"/>
               </a:rPr>
-              <a:t>프리캔버스 새 기능 ④</a:t>
+              <a:t>저장할 때</a:t>
             </a:r>
           </a:p>
         </p:txBody>
@@ -4537,7 +4853,7 @@
                 <a:latin typeface="Noto Serif KR"/>
                 <a:ea typeface="Noto Serif KR"/>
               </a:rPr>
-              <a:t>카드뉴스 만들기</a:t>
+              <a:t>플랫폼별 사이즈로 전체저장</a:t>
             </a:r>
           </a:p>
           <a:p>
@@ -4557,7 +4873,7 @@
                 <a:latin typeface="Pretendard"/>
                 <a:ea typeface="Pretendard"/>
               </a:rPr>
-              <a:t>홍보용 카드뉴스 여러 장을 한 번에 만듭니다. 사진이 없어도 됩니다.</a:t>
+              <a:t>저장할 때 판매 플랫폼을 고르면, 그 플랫폼 규격에 맞는 폭으로 저장됩니다.</a:t>
             </a:r>
           </a:p>
         </p:txBody>
@@ -4597,7 +4913,7 @@
                 <a:latin typeface="Pretendard"/>
                 <a:ea typeface="Pretendard"/>
               </a:rPr>
-              <a:t>📰</a:t>
+              <a:t>📐</a:t>
             </a:r>
           </a:p>
         </p:txBody>
@@ -4640,7 +4956,7 @@
                 <a:latin typeface="Pretendard ExtraBold"/>
                 <a:ea typeface="Pretendard ExtraBold"/>
               </a:rPr>
-              <a:t>내용만 적으면 여러 장이 한 번에</a:t>
+              <a:t>플랫폼 규격 자동 맞춤</a:t>
             </a:r>
           </a:p>
           <a:p>
@@ -4657,7 +4973,7 @@
                 <a:latin typeface="Pretendard"/>
                 <a:ea typeface="Pretendard"/>
               </a:rPr>
-              <a:t>주제와 하고 싶은 말을 적으면, 넘겨보는 카드 여러 장이 순서대로 만들어집니다.</a:t>
+              <a:t>스마트스토어 860px · 쿠팡 780px · 11번가 831px · 카페24 1000px · 자사몰 1080px.</a:t>
             </a:r>
           </a:p>
         </p:txBody>
@@ -4741,7 +5057,7 @@
                 <a:latin typeface="Pretendard"/>
                 <a:ea typeface="Pretendard"/>
               </a:rPr>
-              <a:t>🎨</a:t>
+              <a:t>📄</a:t>
             </a:r>
           </a:p>
         </p:txBody>
@@ -4784,7 +5100,7 @@
                 <a:latin typeface="Pretendard ExtraBold"/>
                 <a:ea typeface="Pretendard ExtraBold"/>
               </a:rPr>
-              <a:t>모든 장의 디자인 통일</a:t>
+              <a:t>HTML 초안 포함</a:t>
             </a:r>
           </a:p>
           <a:p>
@@ -4801,7 +5117,7 @@
                 <a:latin typeface="Pretendard"/>
                 <a:ea typeface="Pretendard"/>
               </a:rPr>
-              <a:t>색·글꼴·구성을 먼저 정하고 그리기 때문에, 장마다 분위기가 달라지지 않습니다.</a:t>
+              <a:t>이미지와 함께 상세페이지 HTML 초안이 저장되어, 플랫폼 에디터에 붙여넣기만 하면 됩니다.</a:t>
             </a:r>
           </a:p>
         </p:txBody>
@@ -4885,7 +5201,7 @@
                 <a:latin typeface="Pretendard"/>
                 <a:ea typeface="Pretendard"/>
               </a:rPr>
-              <a:t>🛠️</a:t>
+              <a:t>✅</a:t>
             </a:r>
           </a:p>
         </p:txBody>
@@ -4928,7 +5244,7 @@
                 <a:latin typeface="Pretendard ExtraBold"/>
                 <a:ea typeface="Pretendard ExtraBold"/>
               </a:rPr>
-              <a:t>장마다 버튼 하나로 수정</a:t>
+              <a:t>저장 전 자동 점검</a:t>
             </a:r>
           </a:p>
           <a:p>
@@ -4945,14 +5261,14 @@
                 <a:latin typeface="Pretendard"/>
                 <a:ea typeface="Pretendard"/>
               </a:rPr>
-              <a:t>상품 크게 · 여백 정리 · 고급스럽게 · 문구 짧게 · 배경만 변경 · 글자 없는 버전 — 버튼으로 바로 고칩니다.</a:t>
+              <a:t>옵션 이미지·상품정보제공고시·GIF·누락 이미지를 저장 전에 한 번에 확인해 줍니다.</a:t>
             </a:r>
           </a:p>
         </p:txBody>
       </p:sp>
       <p:pic>
         <p:nvPicPr>
-          <p:cNvPr id="15" name="Picture 14" descr="cn_grid.jpg"/>
+          <p:cNvPr id="15" name="Picture 14" descr="save_modal.jpg"/>
           <p:cNvPicPr>
             <a:picLocks noChangeAspect="1"/>
           </p:cNvPicPr>
@@ -4966,8 +5282,8 @@
         </p:blipFill>
         <p:spPr>
           <a:xfrm>
-            <a:off x="6263640" y="2011680"/>
-            <a:ext cx="5074920" cy="2385212"/>
+            <a:off x="6263640" y="1234440"/>
+            <a:ext cx="2651760" cy="4476117"/>
           </a:xfrm>
           <a:prstGeom prst="rect">
             <a:avLst/>
@@ -4995,8 +5311,8 @@
         </p:nvSpPr>
         <p:spPr>
           <a:xfrm>
-            <a:off x="5989320" y="4506620"/>
-            <a:ext cx="5623559" cy="256032"/>
+            <a:off x="5989320" y="5820284"/>
+            <a:ext cx="3200400" cy="256032"/>
           </a:xfrm>
           <a:prstGeom prst="rect">
             <a:avLst/>
@@ -5022,7 +5338,7 @@
                 <a:latin typeface="Pretendard"/>
                 <a:ea typeface="Pretendard"/>
               </a:rPr>
-              <a:t>실제 생성 결과 — 카드마다 템플릿과 빠른 수정 버튼이 붙습니다</a:t>
+              <a:t>저장 방식 선택 — 실제 화면</a:t>
             </a:r>
           </a:p>
         </p:txBody>
@@ -5084,7 +5400,7 @@
                 <a:latin typeface="Pretendard SemiBold"/>
                 <a:ea typeface="Pretendard SemiBold"/>
               </a:rPr>
-              <a:t>11 / 19</a:t>
+              <a:t>11 / 15</a:t>
             </a:r>
           </a:p>
         </p:txBody>
@@ -5274,7 +5590,7 @@
                 <a:latin typeface="Pretendard ExtraBold"/>
                 <a:ea typeface="Pretendard ExtraBold"/>
               </a:rPr>
-              <a:t>프리캔버스 새 기능 ⑤</a:t>
+              <a:t>처음 쓰는 분이라면</a:t>
             </a:r>
           </a:p>
         </p:txBody>
@@ -5314,7 +5630,7 @@
                 <a:latin typeface="Noto Serif KR"/>
                 <a:ea typeface="Noto Serif KR"/>
               </a:rPr>
-              <a:t>GIF 만들기</a:t>
+              <a:t>단계별 사용법 안내</a:t>
             </a:r>
           </a:p>
           <a:p>
@@ -5334,7 +5650,7 @@
                 <a:latin typeface="Pretendard"/>
                 <a:ea typeface="Pretendard"/>
               </a:rPr>
-              <a:t>완성된 상세 이미지를 움직이는 GIF로 만들어, 상세페이지에서 시선을 잡습니다.</a:t>
+              <a:t>화면 위에 순서대로 안내가 떠서, 처음이어도 따라 하기만 하면 됩니다.</a:t>
             </a:r>
           </a:p>
         </p:txBody>
@@ -5374,7 +5690,7 @@
                 <a:latin typeface="Pretendard"/>
                 <a:ea typeface="Pretendard"/>
               </a:rPr>
-              <a:t>🎞️</a:t>
+              <a:t>🗂️</a:t>
             </a:r>
           </a:p>
         </p:txBody>
@@ -5417,7 +5733,7 @@
                 <a:latin typeface="Pretendard ExtraBold"/>
                 <a:ea typeface="Pretendard ExtraBold"/>
               </a:rPr>
-              <a:t>텍스트 없음 · 텍스트 유지, 두 가지</a:t>
+              <a:t>결과물마다 다른 안내</a:t>
             </a:r>
           </a:p>
           <a:p>
@@ -5434,7 +5750,7 @@
                 <a:latin typeface="Pretendard"/>
                 <a:ea typeface="Pretendard"/>
               </a:rPr>
-              <a:t>문구 없이 장면만 움직이는 GIF와 문구가 함께 든 GIF 중 골라 만듭니다.</a:t>
+              <a:t>일반·의류·과일채소·카드뉴스·썸네일 — 만들려는 것에 맞는 안내가 따로 준비되어 있습니다.</a:t>
             </a:r>
           </a:p>
         </p:txBody>
@@ -5518,7 +5834,7 @@
                 <a:latin typeface="Pretendard"/>
                 <a:ea typeface="Pretendard"/>
               </a:rPr>
-              <a:t>🛒</a:t>
+              <a:t>📋</a:t>
             </a:r>
           </a:p>
         </p:txBody>
@@ -5561,7 +5877,7 @@
                 <a:latin typeface="Pretendard ExtraBold"/>
                 <a:ea typeface="Pretendard ExtraBold"/>
               </a:rPr>
-              <a:t>상세페이지에 그대로 사용</a:t>
+              <a:t>사진 올리기부터 저장까지</a:t>
             </a:r>
           </a:p>
           <a:p>
@@ -5578,7 +5894,7 @@
                 <a:latin typeface="Pretendard"/>
                 <a:ea typeface="Pretendard"/>
               </a:rPr>
-              <a:t>움직이는 이미지가 한두 장 들어가면 스크롤이 멈춥니다. 스마트스토어 상세에 바로 올릴 수 있습니다.</a:t>
+              <a:t>각 단계에서 무엇을 누르고 무엇을 입력하는지 화면 위에서 하나씩 짚어 줍니다.</a:t>
             </a:r>
           </a:p>
         </p:txBody>
@@ -5662,7 +5978,7 @@
                 <a:latin typeface="Pretendard"/>
                 <a:ea typeface="Pretendard"/>
               </a:rPr>
-              <a:t>📦</a:t>
+              <a:t>🔁</a:t>
             </a:r>
           </a:p>
         </p:txBody>
@@ -5705,7 +6021,7 @@
                 <a:latin typeface="Pretendard ExtraBold"/>
                 <a:ea typeface="Pretendard ExtraBold"/>
               </a:rPr>
-              <a:t>MP4 저장·전체저장 포함</a:t>
+              <a:t>언제든 다시 보기</a:t>
             </a:r>
           </a:p>
           <a:p>
@@ -5722,14 +6038,14 @@
                 <a:latin typeface="Pretendard"/>
                 <a:ea typeface="Pretendard"/>
               </a:rPr>
-              <a:t>만들어진 GIF 카드를 누르면 MP4 영상으로도 저장되고, 전체저장 ZIP 안 gifs 폴더에도 함께 담깁니다.</a:t>
+              <a:t>첫 화면의 “사용법 보기”를 누르면 언제든 처음부터 다시 볼 수 있습니다.</a:t>
             </a:r>
           </a:p>
         </p:txBody>
       </p:sp>
       <p:pic>
         <p:nvPicPr>
-          <p:cNvPr id="15" name="Picture 14" descr="gif_top.jpg"/>
+          <p:cNvPr id="15" name="Picture 14" descr="fc_guide.jpg"/>
           <p:cNvPicPr>
             <a:picLocks noChangeAspect="1"/>
           </p:cNvPicPr>
@@ -5743,8 +6059,8 @@
         </p:blipFill>
         <p:spPr>
           <a:xfrm>
-            <a:off x="6263640" y="1965960"/>
-            <a:ext cx="5029200" cy="2625242"/>
+            <a:off x="6263640" y="1371600"/>
+            <a:ext cx="3657600" cy="3237186"/>
           </a:xfrm>
           <a:prstGeom prst="rect">
             <a:avLst/>
@@ -5772,8 +6088,8 @@
         </p:nvSpPr>
         <p:spPr>
           <a:xfrm>
-            <a:off x="5989320" y="4700930"/>
-            <a:ext cx="5577840" cy="256032"/>
+            <a:off x="5989320" y="4718514"/>
+            <a:ext cx="4206240" cy="256032"/>
           </a:xfrm>
           <a:prstGeom prst="rect">
             <a:avLst/>
@@ -5799,7 +6115,7 @@
                 <a:latin typeface="Pretendard"/>
                 <a:ea typeface="Pretendard"/>
               </a:rPr>
-              <a:t>결과 화면의 GIF 생성 버튼 — 실제 화면</a:t>
+              <a:t>사용법 안내 실제 화면</a:t>
             </a:r>
           </a:p>
         </p:txBody>
@@ -5861,7 +6177,7 @@
                 <a:latin typeface="Pretendard SemiBold"/>
                 <a:ea typeface="Pretendard SemiBold"/>
               </a:rPr>
-              <a:t>12 / 19</a:t>
+              <a:t>12 / 15</a:t>
             </a:r>
           </a:p>
         </p:txBody>
@@ -6051,7 +6367,7 @@
                 <a:latin typeface="Pretendard ExtraBold"/>
                 <a:ea typeface="Pretendard ExtraBold"/>
               </a:rPr>
-              <a:t>프리캔버스 새 기능 ⑥</a:t>
+              <a:t>두 서비스 연결</a:t>
             </a:r>
           </a:p>
         </p:txBody>
@@ -6064,8 +6380,8 @@
         </p:nvSpPr>
         <p:spPr>
           <a:xfrm>
-            <a:off x="822960" y="1234440"/>
-            <a:ext cx="4937760" cy="1280160"/>
+            <a:off x="822960" y="960120"/>
+            <a:ext cx="10515600" cy="566928"/>
           </a:xfrm>
           <a:prstGeom prst="rect">
             <a:avLst/>
@@ -6078,454 +6394,69 @@
           </a:bodyPr>
           <a:lstStyle/>
           <a:p>
-            <a:pPr algn="l">
-              <a:lnSpc>
-                <a:spcPct val="130000"/>
-              </a:lnSpc>
-            </a:pPr>
-            <a:r>
-              <a:rPr sz="2400" b="1" i="0">
+            <a:pPr algn="ctr">
+              <a:lnSpc>
+                <a:spcPct val="100000"/>
+              </a:lnSpc>
+            </a:pPr>
+            <a:r>
+              <a:rPr sz="2200" b="1" i="0">
                 <a:solidFill>
                   <a:srgbClr val="1D2735"/>
                 </a:solidFill>
                 <a:latin typeface="Noto Serif KR"/>
                 <a:ea typeface="Noto Serif KR"/>
               </a:rPr>
-              <a:t>AI 지우개</a:t>
-            </a:r>
-          </a:p>
-          <a:p>
-            <a:pPr algn="l">
-              <a:lnSpc>
-                <a:spcPct val="140000"/>
-              </a:lnSpc>
-              <a:spcBef>
-                <a:spcPts val="800"/>
-              </a:spcBef>
-            </a:pPr>
-            <a:r>
-              <a:rPr sz="1200" b="0" i="0">
-                <a:solidFill>
-                  <a:srgbClr val="455569"/>
-                </a:solidFill>
-                <a:latin typeface="Pretendard"/>
-                <a:ea typeface="Pretendard"/>
-              </a:rPr>
-              <a:t>이미지에서 지우고 싶은 부분만 칠하면 지워집니다.</a:t>
-            </a:r>
-          </a:p>
-        </p:txBody>
-      </p:sp>
-      <p:sp>
-        <p:nvSpPr>
-          <p:cNvPr id="7" name="TextBox 6"/>
-          <p:cNvSpPr txBox="1"/>
-          <p:nvPr/>
-        </p:nvSpPr>
-        <p:spPr>
-          <a:xfrm>
-            <a:off x="822960" y="2743200"/>
-            <a:ext cx="502920" cy="457200"/>
-          </a:xfrm>
-          <a:prstGeom prst="rect">
-            <a:avLst/>
-          </a:prstGeom>
-          <a:noFill/>
-        </p:spPr>
-        <p:txBody>
-          <a:bodyPr wrap="square" lIns="0" rIns="0" tIns="0" bIns="0">
-            <a:spAutoFit/>
-          </a:bodyPr>
-          <a:lstStyle/>
-          <a:p>
-            <a:pPr algn="ctr">
-              <a:lnSpc>
-                <a:spcPct val="100000"/>
-              </a:lnSpc>
-            </a:pPr>
-            <a:r>
-              <a:rPr sz="1600" b="0" i="0">
+              <a:t>프리캔버스 상단 메뉴에서 </a:t>
+            </a:r>
+            <a:r>
+              <a:rPr sz="2200" b="1" i="0">
+                <a:solidFill>
+                  <a:srgbClr val="1F5068"/>
+                </a:solidFill>
+                <a:latin typeface="Noto Serif KR"/>
+                <a:ea typeface="Noto Serif KR"/>
+              </a:rPr>
+              <a:t>검색마스터</a:t>
+            </a:r>
+            <a:r>
+              <a:rPr sz="2200" b="1" i="0">
                 <a:solidFill>
                   <a:srgbClr val="1D2735"/>
                 </a:solidFill>
-                <a:latin typeface="Pretendard"/>
-                <a:ea typeface="Pretendard"/>
-              </a:rPr>
-              <a:t>🖌️</a:t>
-            </a:r>
-          </a:p>
-        </p:txBody>
-      </p:sp>
-      <p:sp>
-        <p:nvSpPr>
-          <p:cNvPr id="8" name="TextBox 7"/>
-          <p:cNvSpPr txBox="1"/>
-          <p:nvPr/>
-        </p:nvSpPr>
-        <p:spPr>
-          <a:xfrm>
-            <a:off x="1389888" y="2734056"/>
-            <a:ext cx="4297680" cy="960120"/>
-          </a:xfrm>
-          <a:prstGeom prst="rect">
-            <a:avLst/>
-          </a:prstGeom>
-          <a:noFill/>
-        </p:spPr>
-        <p:txBody>
-          <a:bodyPr wrap="square" lIns="0" rIns="0" tIns="0" bIns="0">
-            <a:spAutoFit/>
-          </a:bodyPr>
-          <a:lstStyle/>
-          <a:p>
-            <a:pPr algn="l">
-              <a:lnSpc>
-                <a:spcPct val="100000"/>
-              </a:lnSpc>
-              <a:spcAft>
-                <a:spcPts val="300"/>
-              </a:spcAft>
-            </a:pPr>
-            <a:r>
-              <a:rPr sz="1200" b="0" i="0">
-                <a:solidFill>
-                  <a:srgbClr val="1D2735"/>
-                </a:solidFill>
-                <a:latin typeface="Pretendard ExtraBold"/>
-                <a:ea typeface="Pretendard ExtraBold"/>
-              </a:rPr>
-              <a:t>워터마크·글자 지우기</a:t>
-            </a:r>
-          </a:p>
-          <a:p>
-            <a:pPr algn="l">
-              <a:lnSpc>
-                <a:spcPct val="128000"/>
-              </a:lnSpc>
-            </a:pPr>
-            <a:r>
-              <a:rPr sz="1050" b="0" i="0">
-                <a:solidFill>
-                  <a:srgbClr val="455569"/>
-                </a:solidFill>
-                <a:latin typeface="Pretendard"/>
-                <a:ea typeface="Pretendard"/>
-              </a:rPr>
-              <a:t>소싱 이미지에 박힌 워터마크, 중국어 글자, 거슬리는 배경을 칠한 자리만 지웁니다.</a:t>
-            </a:r>
-          </a:p>
-        </p:txBody>
-      </p:sp>
-      <p:sp>
-        <p:nvSpPr>
-          <p:cNvPr id="9" name="Rectangle 8"/>
-          <p:cNvSpPr/>
-          <p:nvPr/>
-        </p:nvSpPr>
-        <p:spPr>
-          <a:xfrm>
-            <a:off x="822960" y="3739896"/>
-            <a:ext cx="4846320" cy="10972"/>
-          </a:xfrm>
-          <a:prstGeom prst="rect">
-            <a:avLst/>
-          </a:prstGeom>
-          <a:solidFill>
-            <a:srgbClr val="EBE5DB"/>
-          </a:solidFill>
-          <a:ln>
-            <a:noFill/>
-          </a:ln>
-          <a:effectLst/>
-        </p:spPr>
-        <p:style>
-          <a:lnRef idx="1">
-            <a:schemeClr val="accent1"/>
-          </a:lnRef>
-          <a:fillRef idx="3">
-            <a:schemeClr val="accent1"/>
-          </a:fillRef>
-          <a:effectRef idx="2">
-            <a:schemeClr val="accent1"/>
-          </a:effectRef>
-          <a:fontRef idx="minor">
-            <a:schemeClr val="lt1"/>
-          </a:fontRef>
-        </p:style>
-        <p:txBody>
-          <a:bodyPr rtlCol="0" anchor="ctr"/>
-          <a:lstStyle/>
-          <a:p>
-            <a:pPr algn="ctr"/>
-          </a:p>
-        </p:txBody>
-      </p:sp>
-      <p:sp>
-        <p:nvSpPr>
-          <p:cNvPr id="10" name="TextBox 9"/>
-          <p:cNvSpPr txBox="1"/>
-          <p:nvPr/>
-        </p:nvSpPr>
-        <p:spPr>
-          <a:xfrm>
-            <a:off x="822960" y="3822191"/>
-            <a:ext cx="502920" cy="457200"/>
-          </a:xfrm>
-          <a:prstGeom prst="rect">
-            <a:avLst/>
-          </a:prstGeom>
-          <a:noFill/>
-        </p:spPr>
-        <p:txBody>
-          <a:bodyPr wrap="square" lIns="0" rIns="0" tIns="0" bIns="0">
-            <a:spAutoFit/>
-          </a:bodyPr>
-          <a:lstStyle/>
-          <a:p>
-            <a:pPr algn="ctr">
-              <a:lnSpc>
-                <a:spcPct val="100000"/>
-              </a:lnSpc>
-            </a:pPr>
-            <a:r>
-              <a:rPr sz="1600" b="0" i="0">
-                <a:solidFill>
-                  <a:srgbClr val="1D2735"/>
-                </a:solidFill>
-                <a:latin typeface="Pretendard"/>
-                <a:ea typeface="Pretendard"/>
-              </a:rPr>
-              <a:t>⚡</a:t>
-            </a:r>
-          </a:p>
-        </p:txBody>
-      </p:sp>
-      <p:sp>
-        <p:nvSpPr>
-          <p:cNvPr id="11" name="TextBox 10"/>
-          <p:cNvSpPr txBox="1"/>
-          <p:nvPr/>
-        </p:nvSpPr>
-        <p:spPr>
-          <a:xfrm>
-            <a:off x="1389888" y="3813048"/>
-            <a:ext cx="4297680" cy="960120"/>
-          </a:xfrm>
-          <a:prstGeom prst="rect">
-            <a:avLst/>
-          </a:prstGeom>
-          <a:noFill/>
-        </p:spPr>
-        <p:txBody>
-          <a:bodyPr wrap="square" lIns="0" rIns="0" tIns="0" bIns="0">
-            <a:spAutoFit/>
-          </a:bodyPr>
-          <a:lstStyle/>
-          <a:p>
-            <a:pPr algn="l">
-              <a:lnSpc>
-                <a:spcPct val="100000"/>
-              </a:lnSpc>
-              <a:spcAft>
-                <a:spcPts val="300"/>
-              </a:spcAft>
-            </a:pPr>
-            <a:r>
-              <a:rPr sz="1200" b="0" i="0">
-                <a:solidFill>
-                  <a:srgbClr val="1D2735"/>
-                </a:solidFill>
-                <a:latin typeface="Pretendard ExtraBold"/>
-                <a:ea typeface="Pretendard ExtraBold"/>
-              </a:rPr>
-              <a:t>기다림 없이 바로</a:t>
-            </a:r>
-          </a:p>
-          <a:p>
-            <a:pPr algn="l">
-              <a:lnSpc>
-                <a:spcPct val="128000"/>
-              </a:lnSpc>
-            </a:pPr>
-            <a:r>
-              <a:rPr sz="1050" b="0" i="0">
-                <a:solidFill>
-                  <a:srgbClr val="455569"/>
-                </a:solidFill>
-                <a:latin typeface="Pretendard"/>
-                <a:ea typeface="Pretendard"/>
-              </a:rPr>
-              <a:t>편집 화면 안에서 곧바로 지워져, 다른 프로그램을 오갈 필요가 없습니다.</a:t>
-            </a:r>
-          </a:p>
-        </p:txBody>
-      </p:sp>
-      <p:sp>
-        <p:nvSpPr>
-          <p:cNvPr id="12" name="Rectangle 11"/>
-          <p:cNvSpPr/>
-          <p:nvPr/>
-        </p:nvSpPr>
-        <p:spPr>
-          <a:xfrm>
-            <a:off x="822960" y="4818888"/>
-            <a:ext cx="4846320" cy="10972"/>
-          </a:xfrm>
-          <a:prstGeom prst="rect">
-            <a:avLst/>
-          </a:prstGeom>
-          <a:solidFill>
-            <a:srgbClr val="EBE5DB"/>
-          </a:solidFill>
-          <a:ln>
-            <a:noFill/>
-          </a:ln>
-          <a:effectLst/>
-        </p:spPr>
-        <p:style>
-          <a:lnRef idx="1">
-            <a:schemeClr val="accent1"/>
-          </a:lnRef>
-          <a:fillRef idx="3">
-            <a:schemeClr val="accent1"/>
-          </a:fillRef>
-          <a:effectRef idx="2">
-            <a:schemeClr val="accent1"/>
-          </a:effectRef>
-          <a:fontRef idx="minor">
-            <a:schemeClr val="lt1"/>
-          </a:fontRef>
-        </p:style>
-        <p:txBody>
-          <a:bodyPr rtlCol="0" anchor="ctr"/>
-          <a:lstStyle/>
-          <a:p>
-            <a:pPr algn="ctr"/>
-          </a:p>
-        </p:txBody>
-      </p:sp>
-      <p:sp>
-        <p:nvSpPr>
-          <p:cNvPr id="13" name="TextBox 12"/>
-          <p:cNvSpPr txBox="1"/>
-          <p:nvPr/>
-        </p:nvSpPr>
-        <p:spPr>
-          <a:xfrm>
-            <a:off x="822960" y="4901183"/>
-            <a:ext cx="502920" cy="457200"/>
-          </a:xfrm>
-          <a:prstGeom prst="rect">
-            <a:avLst/>
-          </a:prstGeom>
-          <a:noFill/>
-        </p:spPr>
-        <p:txBody>
-          <a:bodyPr wrap="square" lIns="0" rIns="0" tIns="0" bIns="0">
-            <a:spAutoFit/>
-          </a:bodyPr>
-          <a:lstStyle/>
-          <a:p>
-            <a:pPr algn="ctr">
-              <a:lnSpc>
-                <a:spcPct val="100000"/>
-              </a:lnSpc>
-            </a:pPr>
-            <a:r>
-              <a:rPr sz="1600" b="0" i="0">
-                <a:solidFill>
-                  <a:srgbClr val="1D2735"/>
-                </a:solidFill>
-                <a:latin typeface="Pretendard"/>
-                <a:ea typeface="Pretendard"/>
-              </a:rPr>
-              <a:t>👆</a:t>
-            </a:r>
-          </a:p>
-        </p:txBody>
-      </p:sp>
-      <p:sp>
-        <p:nvSpPr>
-          <p:cNvPr id="14" name="TextBox 13"/>
-          <p:cNvSpPr txBox="1"/>
-          <p:nvPr/>
-        </p:nvSpPr>
-        <p:spPr>
-          <a:xfrm>
-            <a:off x="1389888" y="4892040"/>
-            <a:ext cx="4297680" cy="960120"/>
-          </a:xfrm>
-          <a:prstGeom prst="rect">
-            <a:avLst/>
-          </a:prstGeom>
-          <a:noFill/>
-        </p:spPr>
-        <p:txBody>
-          <a:bodyPr wrap="square" lIns="0" rIns="0" tIns="0" bIns="0">
-            <a:spAutoFit/>
-          </a:bodyPr>
-          <a:lstStyle/>
-          <a:p>
-            <a:pPr algn="l">
-              <a:lnSpc>
-                <a:spcPct val="100000"/>
-              </a:lnSpc>
-              <a:spcAft>
-                <a:spcPts val="300"/>
-              </a:spcAft>
-            </a:pPr>
-            <a:r>
-              <a:rPr sz="1200" b="0" i="0">
-                <a:solidFill>
-                  <a:srgbClr val="1D2735"/>
-                </a:solidFill>
-                <a:latin typeface="Pretendard ExtraBold"/>
-                <a:ea typeface="Pretendard ExtraBold"/>
-              </a:rPr>
-              <a:t>간단한 조작</a:t>
-            </a:r>
-          </a:p>
-          <a:p>
-            <a:pPr algn="l">
-              <a:lnSpc>
-                <a:spcPct val="128000"/>
-              </a:lnSpc>
-            </a:pPr>
-            <a:r>
-              <a:rPr sz="1050" b="0" i="0">
-                <a:solidFill>
-                  <a:srgbClr val="455569"/>
-                </a:solidFill>
-                <a:latin typeface="Pretendard"/>
-                <a:ea typeface="Pretendard"/>
-              </a:rPr>
-              <a:t>복잡한 설정 없이, 문지르면 지워집니다.</a:t>
-            </a:r>
-          </a:p>
-        </p:txBody>
-      </p:sp>
-      <p:sp>
-        <p:nvSpPr>
-          <p:cNvPr id="15" name="Rounded Rectangle 14"/>
-          <p:cNvSpPr/>
-          <p:nvPr/>
-        </p:nvSpPr>
-        <p:spPr>
-          <a:xfrm>
-            <a:off x="6400800" y="2468880"/>
-            <a:ext cx="2377440" cy="1783080"/>
-          </a:xfrm>
-          <a:prstGeom prst="roundRect">
-            <a:avLst>
-              <a:gd name="adj" fmla="val 10000"/>
-            </a:avLst>
-          </a:prstGeom>
-          <a:solidFill>
-            <a:srgbClr val="28364A"/>
-          </a:solidFill>
-          <a:ln w="9525">
+                <a:latin typeface="Noto Serif KR"/>
+                <a:ea typeface="Noto Serif KR"/>
+              </a:rPr>
+              <a:t>로 바로 이동합니다.</a:t>
+            </a:r>
+          </a:p>
+        </p:txBody>
+      </p:sp>
+      <p:pic>
+        <p:nvPicPr>
+          <p:cNvPr id="7" name="Picture 6" descr="fc_nav.jpg"/>
+          <p:cNvPicPr>
+            <a:picLocks noChangeAspect="1"/>
+          </p:cNvPicPr>
+          <p:nvPr/>
+        </p:nvPicPr>
+        <p:blipFill>
+          <a:blip r:embed="rId2"/>
+          <a:stretch>
+            <a:fillRect/>
+          </a:stretch>
+        </p:blipFill>
+        <p:spPr>
+          <a:xfrm>
+            <a:off x="1097280" y="1783080"/>
+            <a:ext cx="9994392" cy="616321"/>
+          </a:xfrm>
+          <a:prstGeom prst="rect">
+            <a:avLst/>
+          </a:prstGeom>
+          <a:ln w="12700">
             <a:solidFill>
-              <a:srgbClr val="EBE5DB"/>
+              <a:srgbClr val="DAD2C6"/>
             </a:solidFill>
           </a:ln>
           <a:effectLst/>
@@ -6537,6 +6468,29 @@
             </a:outerShdw>
           </a:effectLst>
         </p:spPr>
+      </p:pic>
+      <p:sp>
+        <p:nvSpPr>
+          <p:cNvPr id="8" name="Oval 7"/>
+          <p:cNvSpPr/>
+          <p:nvPr/>
+        </p:nvSpPr>
+        <p:spPr>
+          <a:xfrm>
+            <a:off x="6014520" y="1732788"/>
+            <a:ext cx="929478" cy="716904"/>
+          </a:xfrm>
+          <a:prstGeom prst="ellipse">
+            <a:avLst/>
+          </a:prstGeom>
+          <a:noFill/>
+          <a:ln w="28575">
+            <a:solidFill>
+              <a:srgbClr val="1F5068"/>
+            </a:solidFill>
+          </a:ln>
+          <a:effectLst/>
+        </p:spPr>
         <p:style>
           <a:lnRef idx="1">
             <a:schemeClr val="accent1"/>
@@ -6561,14 +6515,14 @@
       </p:sp>
       <p:sp>
         <p:nvSpPr>
-          <p:cNvPr id="16" name="TextBox 15"/>
+          <p:cNvPr id="9" name="TextBox 8"/>
           <p:cNvSpPr txBox="1"/>
           <p:nvPr/>
         </p:nvSpPr>
         <p:spPr>
-          <a:xfrm rot="20760000">
-            <a:off x="6629400" y="3063240"/>
-            <a:ext cx="1920240" cy="457200"/>
+          <a:xfrm>
+            <a:off x="822960" y="2527416"/>
+            <a:ext cx="10543032" cy="256032"/>
           </a:xfrm>
           <a:prstGeom prst="rect">
             <a:avLst/>
@@ -6587,42 +6541,50 @@
               </a:lnSpc>
             </a:pPr>
             <a:r>
-              <a:rPr sz="1500" b="0" i="0" spc="280">
-                <a:solidFill>
-                  <a:srgbClr val="9AA7B8"/>
+              <a:rPr sz="950" b="0" i="0">
+                <a:solidFill>
+                  <a:srgbClr val="1F5068"/>
                 </a:solidFill>
                 <a:latin typeface="Pretendard ExtraBold"/>
                 <a:ea typeface="Pretendard ExtraBold"/>
               </a:rPr>
-              <a:t>워터마크</a:t>
-            </a:r>
-          </a:p>
-        </p:txBody>
-      </p:sp>
-      <p:sp>
-        <p:nvSpPr>
-          <p:cNvPr id="17" name="Rounded Rectangle 16"/>
+              <a:t>프리캔버스 상단 메뉴 속 「검색마스터」 — 실제 화면</a:t>
+            </a:r>
+          </a:p>
+        </p:txBody>
+      </p:sp>
+      <p:sp>
+        <p:nvSpPr>
+          <p:cNvPr id="10" name="Rounded Rectangle 9"/>
           <p:cNvSpPr/>
           <p:nvPr/>
         </p:nvSpPr>
         <p:spPr>
           <a:xfrm>
-            <a:off x="6766560" y="2926080"/>
-            <a:ext cx="1645920" cy="685800"/>
+            <a:off x="1188720" y="3291840"/>
+            <a:ext cx="4206240" cy="1371600"/>
           </a:xfrm>
           <a:prstGeom prst="roundRect">
             <a:avLst>
-              <a:gd name="adj" fmla="val 50000"/>
+              <a:gd name="adj" fmla="val 10000"/>
             </a:avLst>
           </a:prstGeom>
-          <a:noFill/>
-          <a:ln w="22225">
+          <a:solidFill>
+            <a:srgbClr val="FFFDF7"/>
+          </a:solidFill>
+          <a:ln w="9525">
             <a:solidFill>
-              <a:srgbClr val="D5DDE6"/>
+              <a:srgbClr val="DAD2C6"/>
             </a:solidFill>
-            <a:prstDash val="dash"/>
           </a:ln>
           <a:effectLst/>
+          <a:effectLst>
+            <a:outerShdw blurRad="170000" dist="50000" dir="5400000" rotWithShape="0">
+              <a:srgbClr val="16241C">
+                <a:alpha val="30000"/>
+              </a:srgbClr>
+            </a:outerShdw>
+          </a:effectLst>
         </p:spPr>
         <p:style>
           <a:lnRef idx="1">
@@ -6648,74 +6610,134 @@
       </p:sp>
       <p:sp>
         <p:nvSpPr>
-          <p:cNvPr id="18" name="Rounded Rectangle 17"/>
+          <p:cNvPr id="11" name="TextBox 10"/>
+          <p:cNvSpPr txBox="1"/>
+          <p:nvPr/>
+        </p:nvSpPr>
+        <p:spPr>
+          <a:xfrm>
+            <a:off x="1481328" y="3529584"/>
+            <a:ext cx="3611880" cy="960120"/>
+          </a:xfrm>
+          <a:prstGeom prst="rect">
+            <a:avLst/>
+          </a:prstGeom>
+          <a:noFill/>
+        </p:spPr>
+        <p:txBody>
+          <a:bodyPr wrap="square" lIns="0" rIns="0" tIns="0" bIns="0">
+            <a:spAutoFit/>
+          </a:bodyPr>
+          <a:lstStyle/>
+          <a:p>
+            <a:pPr algn="l">
+              <a:lnSpc>
+                <a:spcPct val="100000"/>
+              </a:lnSpc>
+              <a:spcAft>
+                <a:spcPts val="500"/>
+              </a:spcAft>
+            </a:pPr>
+            <a:r>
+              <a:rPr sz="1450" b="1" i="0">
+                <a:solidFill>
+                  <a:srgbClr val="1D2735"/>
+                </a:solidFill>
+                <a:latin typeface="Noto Serif KR"/>
+                <a:ea typeface="Noto Serif KR"/>
+              </a:rPr>
+              <a:t>프리캔버스에서 작업하다가</a:t>
+            </a:r>
+          </a:p>
+          <a:p>
+            <a:pPr algn="l">
+              <a:lnSpc>
+                <a:spcPct val="130000"/>
+              </a:lnSpc>
+            </a:pPr>
+            <a:r>
+              <a:rPr sz="1100" b="0" i="0">
+                <a:solidFill>
+                  <a:srgbClr val="28364A"/>
+                </a:solidFill>
+                <a:latin typeface="Pretendard"/>
+                <a:ea typeface="Pretendard"/>
+              </a:rPr>
+              <a:t>상세페이지를 만들다 상품명이나 키워드가 필요해지면,</a:t>
+            </a:r>
+          </a:p>
+        </p:txBody>
+      </p:sp>
+      <p:sp>
+        <p:nvSpPr>
+          <p:cNvPr id="12" name="TextBox 11"/>
+          <p:cNvSpPr txBox="1"/>
+          <p:nvPr/>
+        </p:nvSpPr>
+        <p:spPr>
+          <a:xfrm>
+            <a:off x="5577840" y="3566160"/>
+            <a:ext cx="1051560" cy="868680"/>
+          </a:xfrm>
+          <a:prstGeom prst="rect">
+            <a:avLst/>
+          </a:prstGeom>
+          <a:noFill/>
+        </p:spPr>
+        <p:txBody>
+          <a:bodyPr wrap="square" lIns="0" rIns="0" tIns="0" bIns="0">
+            <a:spAutoFit/>
+          </a:bodyPr>
+          <a:lstStyle/>
+          <a:p>
+            <a:pPr algn="ctr">
+              <a:lnSpc>
+                <a:spcPct val="100000"/>
+              </a:lnSpc>
+              <a:spcAft>
+                <a:spcPts val="300"/>
+              </a:spcAft>
+            </a:pPr>
+            <a:r>
+              <a:rPr sz="2400" b="1" i="0">
+                <a:solidFill>
+                  <a:srgbClr val="9A7440"/>
+                </a:solidFill>
+                <a:latin typeface="Pretendard"/>
+                <a:ea typeface="Pretendard"/>
+              </a:rPr>
+              <a:t>→</a:t>
+            </a:r>
+          </a:p>
+          <a:p>
+            <a:pPr algn="ctr">
+              <a:lnSpc>
+                <a:spcPct val="100000"/>
+              </a:lnSpc>
+            </a:pPr>
+            <a:r>
+              <a:rPr sz="950" b="0" i="0">
+                <a:solidFill>
+                  <a:srgbClr val="7D5E33"/>
+                </a:solidFill>
+                <a:latin typeface="Pretendard ExtraBold"/>
+                <a:ea typeface="Pretendard ExtraBold"/>
+              </a:rPr>
+              <a:t>버튼 한 번</a:t>
+            </a:r>
+          </a:p>
+        </p:txBody>
+      </p:sp>
+      <p:sp>
+        <p:nvSpPr>
+          <p:cNvPr id="13" name="Rounded Rectangle 12"/>
           <p:cNvSpPr/>
           <p:nvPr/>
         </p:nvSpPr>
         <p:spPr>
           <a:xfrm>
-            <a:off x="6565392" y="3913632"/>
-            <a:ext cx="868680" cy="274320"/>
-          </a:xfrm>
-          <a:prstGeom prst="roundRect">
-            <a:avLst>
-              <a:gd name="adj" fmla="val 50000"/>
-            </a:avLst>
-          </a:prstGeom>
-          <a:solidFill>
-            <a:srgbClr val="FFFFFF"/>
-          </a:solidFill>
-          <a:ln>
-            <a:noFill/>
-          </a:ln>
-          <a:effectLst/>
-        </p:spPr>
-        <p:style>
-          <a:lnRef idx="1">
-            <a:schemeClr val="accent1"/>
-          </a:lnRef>
-          <a:fillRef idx="3">
-            <a:schemeClr val="accent1"/>
-          </a:fillRef>
-          <a:effectRef idx="2">
-            <a:schemeClr val="accent1"/>
-          </a:effectRef>
-          <a:fontRef idx="minor">
-            <a:schemeClr val="lt1"/>
-          </a:fontRef>
-        </p:style>
-        <p:txBody>
-          <a:bodyPr rtlCol="0" anchor="ctr" wrap="none" lIns="0" rIns="0" tIns="0" bIns="0"/>
-          <a:lstStyle/>
-          <a:p>
-            <a:pPr algn="ctr">
-              <a:lnSpc>
-                <a:spcPct val="100000"/>
-              </a:lnSpc>
-            </a:pPr>
-            <a:r>
-              <a:rPr sz="850" b="0" i="0">
-                <a:solidFill>
-                  <a:srgbClr val="28364A"/>
-                </a:solidFill>
-                <a:latin typeface="Pretendard SemiBold"/>
-                <a:ea typeface="Pretendard SemiBold"/>
-              </a:rPr>
-              <a:t>지우기 전</a:t>
-            </a:r>
-          </a:p>
-        </p:txBody>
-      </p:sp>
-      <p:sp>
-        <p:nvSpPr>
-          <p:cNvPr id="19" name="Rounded Rectangle 18"/>
-          <p:cNvSpPr/>
-          <p:nvPr/>
-        </p:nvSpPr>
-        <p:spPr>
-          <a:xfrm>
-            <a:off x="9006840" y="2468880"/>
-            <a:ext cx="2377440" cy="1783080"/>
+            <a:off x="6812280" y="3291840"/>
+            <a:ext cx="4206240" cy="1371600"/>
           </a:xfrm>
           <a:prstGeom prst="roundRect">
             <a:avLst>
@@ -6763,14 +6785,14 @@
       </p:sp>
       <p:sp>
         <p:nvSpPr>
-          <p:cNvPr id="20" name="TextBox 19"/>
+          <p:cNvPr id="14" name="TextBox 13"/>
           <p:cNvSpPr txBox="1"/>
           <p:nvPr/>
         </p:nvSpPr>
         <p:spPr>
           <a:xfrm>
-            <a:off x="10607040" y="2743200"/>
-            <a:ext cx="548640" cy="411480"/>
+            <a:off x="7104888" y="3529584"/>
+            <a:ext cx="3611880" cy="960120"/>
           </a:xfrm>
           <a:prstGeom prst="rect">
             <a:avLst/>
@@ -6787,30 +6809,50 @@
               <a:lnSpc>
                 <a:spcPct val="100000"/>
               </a:lnSpc>
-            </a:pPr>
-            <a:r>
-              <a:rPr sz="2000" b="0" i="0">
-                <a:solidFill>
-                  <a:srgbClr val="1F5068"/>
+              <a:spcAft>
+                <a:spcPts val="500"/>
+              </a:spcAft>
+            </a:pPr>
+            <a:r>
+              <a:rPr sz="1450" b="1" i="0">
+                <a:solidFill>
+                  <a:srgbClr val="1D2735"/>
+                </a:solidFill>
+                <a:latin typeface="Noto Serif KR"/>
+                <a:ea typeface="Noto Serif KR"/>
+              </a:rPr>
+              <a:t>검색마스터가 새 탭으로</a:t>
+            </a:r>
+          </a:p>
+          <a:p>
+            <a:pPr algn="l">
+              <a:lnSpc>
+                <a:spcPct val="130000"/>
+              </a:lnSpc>
+            </a:pPr>
+            <a:r>
+              <a:rPr sz="1100" b="0" i="0">
+                <a:solidFill>
+                  <a:srgbClr val="28364A"/>
                 </a:solidFill>
                 <a:latin typeface="Pretendard"/>
                 <a:ea typeface="Pretendard"/>
               </a:rPr>
-              <a:t>✦</a:t>
-            </a:r>
-          </a:p>
-        </p:txBody>
-      </p:sp>
-      <p:sp>
-        <p:nvSpPr>
-          <p:cNvPr id="21" name="Rounded Rectangle 20"/>
+              <a:t>쓰던 구글 계정 그대로 열립니다. 다시 로그인할 필요가 없습니다.</a:t>
+            </a:r>
+          </a:p>
+        </p:txBody>
+      </p:sp>
+      <p:sp>
+        <p:nvSpPr>
+          <p:cNvPr id="15" name="Rounded Rectangle 14"/>
           <p:cNvSpPr/>
           <p:nvPr/>
         </p:nvSpPr>
         <p:spPr>
           <a:xfrm>
-            <a:off x="9171432" y="3913632"/>
-            <a:ext cx="822960" cy="274320"/>
+            <a:off x="3063240" y="5230368"/>
+            <a:ext cx="1691640" cy="384048"/>
           </a:xfrm>
           <a:prstGeom prst="roundRect">
             <a:avLst>
@@ -6818,10 +6860,12 @@
             </a:avLst>
           </a:prstGeom>
           <a:solidFill>
-            <a:srgbClr val="1F5068"/>
+            <a:srgbClr val="FFFFFF"/>
           </a:solidFill>
-          <a:ln>
-            <a:noFill/>
+          <a:ln w="9525">
+            <a:solidFill>
+              <a:srgbClr val="DAD2C6"/>
+            </a:solidFill>
           </a:ln>
           <a:effectLst/>
         </p:spPr>
@@ -6849,28 +6893,28 @@
               </a:lnSpc>
             </a:pPr>
             <a:r>
-              <a:rPr sz="850" b="0" i="0">
-                <a:solidFill>
-                  <a:srgbClr val="FFFFFF"/>
+              <a:rPr sz="1050" b="0" i="0">
+                <a:solidFill>
+                  <a:srgbClr val="1D2735"/>
                 </a:solidFill>
                 <a:latin typeface="Pretendard SemiBold"/>
                 <a:ea typeface="Pretendard SemiBold"/>
               </a:rPr>
-              <a:t>지운 후</a:t>
-            </a:r>
-          </a:p>
-        </p:txBody>
-      </p:sp>
-      <p:sp>
-        <p:nvSpPr>
-          <p:cNvPr id="22" name="TextBox 21"/>
+              <a:t>● 하나의 구글 계정</a:t>
+            </a:r>
+          </a:p>
+        </p:txBody>
+      </p:sp>
+      <p:sp>
+        <p:nvSpPr>
+          <p:cNvPr id="16" name="TextBox 15"/>
           <p:cNvSpPr txBox="1"/>
           <p:nvPr/>
         </p:nvSpPr>
         <p:spPr>
           <a:xfrm>
-            <a:off x="6400800" y="4526280"/>
-            <a:ext cx="4983480" cy="256032"/>
+            <a:off x="4864608" y="5330952"/>
+            <a:ext cx="5120640" cy="274320"/>
           </a:xfrm>
           <a:prstGeom prst="rect">
             <a:avLst/>
@@ -6883,27 +6927,27 @@
           </a:bodyPr>
           <a:lstStyle/>
           <a:p>
-            <a:pPr algn="ctr">
+            <a:pPr algn="l">
               <a:lnSpc>
                 <a:spcPct val="100000"/>
               </a:lnSpc>
             </a:pPr>
             <a:r>
-              <a:rPr sz="900" b="0" i="0">
+              <a:rPr sz="1050" b="0" i="0">
                 <a:solidFill>
                   <a:srgbClr val="455569"/>
                 </a:solidFill>
                 <a:latin typeface="Pretendard"/>
                 <a:ea typeface="Pretendard"/>
               </a:rPr>
-              <a:t>칠한 자리만 지워지고, 상품은 그대로 남습니다</a:t>
-            </a:r>
-          </a:p>
-        </p:txBody>
-      </p:sp>
-      <p:sp>
-        <p:nvSpPr>
-          <p:cNvPr id="23" name="Rounded Rectangle 22"/>
+              <a:t>으로 두 서비스를 오갑니다. 구독은 서비스별로 따로 적용됩니다.</a:t>
+            </a:r>
+          </a:p>
+        </p:txBody>
+      </p:sp>
+      <p:sp>
+        <p:nvSpPr>
+          <p:cNvPr id="17" name="Rounded Rectangle 16"/>
           <p:cNvSpPr/>
           <p:nvPr/>
         </p:nvSpPr>
@@ -6958,7 +7002,7 @@
                 <a:latin typeface="Pretendard SemiBold"/>
                 <a:ea typeface="Pretendard SemiBold"/>
               </a:rPr>
-              <a:t>13 / 19</a:t>
+              <a:t>13 / 15</a:t>
             </a:r>
           </a:p>
         </p:txBody>
@@ -7148,7 +7192,7 @@
                 <a:latin typeface="Pretendard ExtraBold"/>
                 <a:ea typeface="Pretendard ExtraBold"/>
               </a:rPr>
-              <a:t>저장할 때</a:t>
+              <a:t>실제 작업 순서</a:t>
             </a:r>
           </a:p>
         </p:txBody>
@@ -7161,8 +7205,8 @@
         </p:nvSpPr>
         <p:spPr>
           <a:xfrm>
-            <a:off x="822960" y="1234440"/>
-            <a:ext cx="4937760" cy="1280160"/>
+            <a:off x="822960" y="960120"/>
+            <a:ext cx="10515600" cy="566928"/>
           </a:xfrm>
           <a:prstGeom prst="rect">
             <a:avLst/>
@@ -7177,158 +7221,38 @@
           <a:p>
             <a:pPr algn="l">
               <a:lnSpc>
-                <a:spcPct val="130000"/>
-              </a:lnSpc>
-            </a:pPr>
-            <a:r>
-              <a:rPr sz="2400" b="1" i="0">
+                <a:spcPct val="100000"/>
+              </a:lnSpc>
+            </a:pPr>
+            <a:r>
+              <a:rPr sz="2300" b="1" i="0">
                 <a:solidFill>
                   <a:srgbClr val="1D2735"/>
                 </a:solidFill>
                 <a:latin typeface="Noto Serif KR"/>
                 <a:ea typeface="Noto Serif KR"/>
               </a:rPr>
-              <a:t>플랫폼별 사이즈로 전체저장</a:t>
-            </a:r>
-          </a:p>
-          <a:p>
-            <a:pPr algn="l">
-              <a:lnSpc>
-                <a:spcPct val="140000"/>
-              </a:lnSpc>
-              <a:spcBef>
-                <a:spcPts val="800"/>
-              </a:spcBef>
-            </a:pPr>
-            <a:r>
-              <a:rPr sz="1200" b="0" i="0">
-                <a:solidFill>
-                  <a:srgbClr val="455569"/>
-                </a:solidFill>
-                <a:latin typeface="Pretendard"/>
-                <a:ea typeface="Pretendard"/>
-              </a:rPr>
-              <a:t>저장할 때 판매 플랫폼을 고르면, 그 플랫폼 규격에 맞는 폭으로 저장됩니다.</a:t>
-            </a:r>
-          </a:p>
-        </p:txBody>
-      </p:sp>
-      <p:sp>
-        <p:nvSpPr>
-          <p:cNvPr id="7" name="TextBox 6"/>
-          <p:cNvSpPr txBox="1"/>
-          <p:nvPr/>
-        </p:nvSpPr>
-        <p:spPr>
-          <a:xfrm>
-            <a:off x="822960" y="2743200"/>
-            <a:ext cx="502920" cy="457200"/>
-          </a:xfrm>
-          <a:prstGeom prst="rect">
-            <a:avLst/>
-          </a:prstGeom>
-          <a:noFill/>
-        </p:spPr>
-        <p:txBody>
-          <a:bodyPr wrap="square" lIns="0" rIns="0" tIns="0" bIns="0">
-            <a:spAutoFit/>
-          </a:bodyPr>
-          <a:lstStyle/>
-          <a:p>
-            <a:pPr algn="ctr">
-              <a:lnSpc>
-                <a:spcPct val="100000"/>
-              </a:lnSpc>
-            </a:pPr>
-            <a:r>
-              <a:rPr sz="1600" b="0" i="0">
-                <a:solidFill>
-                  <a:srgbClr val="1D2735"/>
-                </a:solidFill>
-                <a:latin typeface="Pretendard"/>
-                <a:ea typeface="Pretendard"/>
-              </a:rPr>
-              <a:t>📐</a:t>
-            </a:r>
-          </a:p>
-        </p:txBody>
-      </p:sp>
-      <p:sp>
-        <p:nvSpPr>
-          <p:cNvPr id="8" name="TextBox 7"/>
-          <p:cNvSpPr txBox="1"/>
-          <p:nvPr/>
-        </p:nvSpPr>
-        <p:spPr>
-          <a:xfrm>
-            <a:off x="1389888" y="2734056"/>
-            <a:ext cx="4297680" cy="960120"/>
-          </a:xfrm>
-          <a:prstGeom prst="rect">
-            <a:avLst/>
-          </a:prstGeom>
-          <a:noFill/>
-        </p:spPr>
-        <p:txBody>
-          <a:bodyPr wrap="square" lIns="0" rIns="0" tIns="0" bIns="0">
-            <a:spAutoFit/>
-          </a:bodyPr>
-          <a:lstStyle/>
-          <a:p>
-            <a:pPr algn="l">
-              <a:lnSpc>
-                <a:spcPct val="100000"/>
-              </a:lnSpc>
-              <a:spcAft>
-                <a:spcPts val="300"/>
-              </a:spcAft>
-            </a:pPr>
-            <a:r>
-              <a:rPr sz="1200" b="0" i="0">
-                <a:solidFill>
-                  <a:srgbClr val="1D2735"/>
-                </a:solidFill>
-                <a:latin typeface="Pretendard ExtraBold"/>
-                <a:ea typeface="Pretendard ExtraBold"/>
-              </a:rPr>
-              <a:t>플랫폼 규격 자동 맞춤</a:t>
-            </a:r>
-          </a:p>
-          <a:p>
-            <a:pPr algn="l">
-              <a:lnSpc>
-                <a:spcPct val="128000"/>
-              </a:lnSpc>
-            </a:pPr>
-            <a:r>
-              <a:rPr sz="1050" b="0" i="0">
-                <a:solidFill>
-                  <a:srgbClr val="455569"/>
-                </a:solidFill>
-                <a:latin typeface="Pretendard"/>
-                <a:ea typeface="Pretendard"/>
-              </a:rPr>
-              <a:t>스마트스토어 860px · 쿠팡 780px · 11번가 831px · 카페24 1000px · 자사몰 1080px.</a:t>
-            </a:r>
-          </a:p>
-        </p:txBody>
-      </p:sp>
-      <p:sp>
-        <p:nvSpPr>
-          <p:cNvPr id="9" name="Rectangle 8"/>
+              <a:t>상품 등록, 이 순서로 하면 됩니다.</a:t>
+            </a:r>
+          </a:p>
+        </p:txBody>
+      </p:sp>
+      <p:sp>
+        <p:nvSpPr>
+          <p:cNvPr id="7" name="Rectangle 6"/>
           <p:cNvSpPr/>
           <p:nvPr/>
         </p:nvSpPr>
         <p:spPr>
           <a:xfrm>
-            <a:off x="822960" y="3739896"/>
-            <a:ext cx="4846320" cy="10972"/>
+            <a:off x="2269540" y="2194560"/>
+            <a:ext cx="18288" cy="969264"/>
           </a:xfrm>
           <a:prstGeom prst="rect">
             <a:avLst/>
           </a:prstGeom>
           <a:solidFill>
-            <a:srgbClr val="EBE5DB"/>
+            <a:srgbClr val="DAD2C6"/>
           </a:solidFill>
           <a:ln>
             <a:noFill/>
@@ -7359,14 +7283,14 @@
       </p:sp>
       <p:sp>
         <p:nvSpPr>
-          <p:cNvPr id="10" name="TextBox 9"/>
+          <p:cNvPr id="8" name="TextBox 7"/>
           <p:cNvSpPr txBox="1"/>
           <p:nvPr/>
         </p:nvSpPr>
         <p:spPr>
           <a:xfrm>
-            <a:off x="822960" y="3822191"/>
-            <a:ext cx="502920" cy="457200"/>
+            <a:off x="822960" y="1965960"/>
+            <a:ext cx="1188720" cy="274320"/>
           </a:xfrm>
           <a:prstGeom prst="rect">
             <a:avLst/>
@@ -7379,100 +7303,88 @@
           </a:bodyPr>
           <a:lstStyle/>
           <a:p>
-            <a:pPr algn="ctr">
+            <a:pPr algn="r">
               <a:lnSpc>
                 <a:spcPct val="100000"/>
               </a:lnSpc>
             </a:pPr>
             <a:r>
-              <a:rPr sz="1600" b="0" i="0">
-                <a:solidFill>
-                  <a:srgbClr val="1D2735"/>
-                </a:solidFill>
-                <a:latin typeface="Pretendard"/>
-                <a:ea typeface="Pretendard"/>
-              </a:rPr>
-              <a:t>📄</a:t>
-            </a:r>
-          </a:p>
-        </p:txBody>
-      </p:sp>
-      <p:sp>
-        <p:nvSpPr>
-          <p:cNvPr id="11" name="TextBox 10"/>
-          <p:cNvSpPr txBox="1"/>
-          <p:nvPr/>
-        </p:nvSpPr>
-        <p:spPr>
-          <a:xfrm>
-            <a:off x="1389888" y="3813048"/>
-            <a:ext cx="4297680" cy="960120"/>
-          </a:xfrm>
-          <a:prstGeom prst="rect">
-            <a:avLst/>
-          </a:prstGeom>
-          <a:noFill/>
-        </p:spPr>
-        <p:txBody>
-          <a:bodyPr wrap="square" lIns="0" rIns="0" tIns="0" bIns="0">
-            <a:spAutoFit/>
-          </a:bodyPr>
-          <a:lstStyle/>
-          <a:p>
-            <a:pPr algn="l">
-              <a:lnSpc>
-                <a:spcPct val="100000"/>
-              </a:lnSpc>
-              <a:spcAft>
-                <a:spcPts val="300"/>
-              </a:spcAft>
-            </a:pPr>
-            <a:r>
-              <a:rPr sz="1200" b="0" i="0">
-                <a:solidFill>
-                  <a:srgbClr val="1D2735"/>
-                </a:solidFill>
-                <a:latin typeface="Pretendard ExtraBold"/>
-                <a:ea typeface="Pretendard ExtraBold"/>
-              </a:rPr>
-              <a:t>HTML 초안 포함</a:t>
-            </a:r>
-          </a:p>
-          <a:p>
-            <a:pPr algn="l">
-              <a:lnSpc>
-                <a:spcPct val="128000"/>
-              </a:lnSpc>
-            </a:pPr>
-            <a:r>
-              <a:rPr sz="1050" b="0" i="0">
-                <a:solidFill>
-                  <a:srgbClr val="455569"/>
-                </a:solidFill>
-                <a:latin typeface="Pretendard"/>
-                <a:ea typeface="Pretendard"/>
-              </a:rPr>
-              <a:t>이미지와 함께 상세페이지 HTML 초안이 저장되어, 플랫폼 에디터에 붙여넣기만 하면 됩니다.</a:t>
-            </a:r>
-          </a:p>
-        </p:txBody>
-      </p:sp>
-      <p:sp>
-        <p:nvSpPr>
-          <p:cNvPr id="12" name="Rectangle 11"/>
+              <a:rPr sz="1250" b="1" i="0">
+                <a:solidFill>
+                  <a:srgbClr val="7D5E33"/>
+                </a:solidFill>
+                <a:latin typeface="Noto Serif KR"/>
+                <a:ea typeface="Noto Serif KR"/>
+              </a:rPr>
+              <a:t>1단계</a:t>
+            </a:r>
+          </a:p>
+        </p:txBody>
+      </p:sp>
+      <p:sp>
+        <p:nvSpPr>
+          <p:cNvPr id="9" name="Oval 8"/>
           <p:cNvSpPr/>
           <p:nvPr/>
         </p:nvSpPr>
         <p:spPr>
           <a:xfrm>
-            <a:off x="822960" y="4818888"/>
-            <a:ext cx="4846320" cy="10972"/>
-          </a:xfrm>
-          <a:prstGeom prst="rect">
+            <a:off x="2212848" y="1993392"/>
+            <a:ext cx="132588" cy="132588"/>
+          </a:xfrm>
+          <a:prstGeom prst="ellipse">
             <a:avLst/>
           </a:prstGeom>
           <a:solidFill>
-            <a:srgbClr val="EBE5DB"/>
+            <a:srgbClr val="9A7440"/>
+          </a:solidFill>
+          <a:ln w="19050">
+            <a:solidFill>
+              <a:srgbClr val="FFFFFF"/>
+            </a:solidFill>
+          </a:ln>
+          <a:effectLst/>
+        </p:spPr>
+        <p:style>
+          <a:lnRef idx="1">
+            <a:schemeClr val="accent1"/>
+          </a:lnRef>
+          <a:fillRef idx="3">
+            <a:schemeClr val="accent1"/>
+          </a:fillRef>
+          <a:effectRef idx="2">
+            <a:schemeClr val="accent1"/>
+          </a:effectRef>
+          <a:fontRef idx="minor">
+            <a:schemeClr val="lt1"/>
+          </a:fontRef>
+        </p:style>
+        <p:txBody>
+          <a:bodyPr rtlCol="0" anchor="ctr"/>
+          <a:lstStyle/>
+          <a:p>
+            <a:pPr algn="ctr"/>
+          </a:p>
+        </p:txBody>
+      </p:sp>
+      <p:sp>
+        <p:nvSpPr>
+          <p:cNvPr id="10" name="Rounded Rectangle 9"/>
+          <p:cNvSpPr/>
+          <p:nvPr/>
+        </p:nvSpPr>
+        <p:spPr>
+          <a:xfrm>
+            <a:off x="2606040" y="1920240"/>
+            <a:ext cx="1024128" cy="256032"/>
+          </a:xfrm>
+          <a:prstGeom prst="roundRect">
+            <a:avLst>
+              <a:gd name="adj" fmla="val 50000"/>
+            </a:avLst>
+          </a:prstGeom>
+          <a:solidFill>
+            <a:srgbClr val="F6EFE5"/>
           </a:solidFill>
           <a:ln>
             <a:noFill/>
@@ -7494,23 +7406,37 @@
           </a:fontRef>
         </p:style>
         <p:txBody>
-          <a:bodyPr rtlCol="0" anchor="ctr"/>
-          <a:lstStyle/>
-          <a:p>
-            <a:pPr algn="ctr"/>
-          </a:p>
-        </p:txBody>
-      </p:sp>
-      <p:sp>
-        <p:nvSpPr>
-          <p:cNvPr id="13" name="TextBox 12"/>
+          <a:bodyPr rtlCol="0" anchor="ctr" wrap="none" lIns="0" rIns="0" tIns="0" bIns="0"/>
+          <a:lstStyle/>
+          <a:p>
+            <a:pPr algn="ctr">
+              <a:lnSpc>
+                <a:spcPct val="100000"/>
+              </a:lnSpc>
+            </a:pPr>
+            <a:r>
+              <a:rPr sz="900" b="0" i="0">
+                <a:solidFill>
+                  <a:srgbClr val="7D5E33"/>
+                </a:solidFill>
+                <a:latin typeface="Pretendard SemiBold"/>
+                <a:ea typeface="Pretendard SemiBold"/>
+              </a:rPr>
+              <a:t>프리캔버스</a:t>
+            </a:r>
+          </a:p>
+        </p:txBody>
+      </p:sp>
+      <p:sp>
+        <p:nvSpPr>
+          <p:cNvPr id="11" name="TextBox 10"/>
           <p:cNvSpPr txBox="1"/>
           <p:nvPr/>
         </p:nvSpPr>
         <p:spPr>
           <a:xfrm>
-            <a:off x="822960" y="4901183"/>
-            <a:ext cx="502920" cy="457200"/>
+            <a:off x="2606040" y="2258568"/>
+            <a:ext cx="8595360" cy="658368"/>
           </a:xfrm>
           <a:prstGeom prst="rect">
             <a:avLst/>
@@ -7523,34 +7449,98 @@
           </a:bodyPr>
           <a:lstStyle/>
           <a:p>
-            <a:pPr algn="ctr">
+            <a:pPr algn="l">
               <a:lnSpc>
                 <a:spcPct val="100000"/>
               </a:lnSpc>
-            </a:pPr>
-            <a:r>
-              <a:rPr sz="1600" b="0" i="0">
+              <a:spcAft>
+                <a:spcPts val="200"/>
+              </a:spcAft>
+            </a:pPr>
+            <a:r>
+              <a:rPr sz="1350" b="0" i="0">
                 <a:solidFill>
                   <a:srgbClr val="1D2735"/>
+                </a:solidFill>
+                <a:latin typeface="Pretendard ExtraBold"/>
+                <a:ea typeface="Pretendard ExtraBold"/>
+              </a:rPr>
+              <a:t>소싱 링크 붙여넣기</a:t>
+            </a:r>
+          </a:p>
+          <a:p>
+            <a:pPr algn="l">
+              <a:lnSpc>
+                <a:spcPct val="125000"/>
+              </a:lnSpc>
+            </a:pPr>
+            <a:r>
+              <a:rPr sz="1050" b="0" i="0">
+                <a:solidFill>
+                  <a:srgbClr val="455569"/>
                 </a:solidFill>
                 <a:latin typeface="Pretendard"/>
                 <a:ea typeface="Pretendard"/>
               </a:rPr>
-              <a:t>✅</a:t>
-            </a:r>
-          </a:p>
-        </p:txBody>
-      </p:sp>
-      <p:sp>
-        <p:nvSpPr>
-          <p:cNvPr id="14" name="TextBox 13"/>
+              <a:t>스마트스토어·1688 상품 주소로 이미지와 상품 정보를 가져옵니다.</a:t>
+            </a:r>
+          </a:p>
+        </p:txBody>
+      </p:sp>
+      <p:sp>
+        <p:nvSpPr>
+          <p:cNvPr id="12" name="Rectangle 11"/>
+          <p:cNvSpPr/>
+          <p:nvPr/>
+        </p:nvSpPr>
+        <p:spPr>
+          <a:xfrm>
+            <a:off x="2269540" y="3273552"/>
+            <a:ext cx="18288" cy="969264"/>
+          </a:xfrm>
+          <a:prstGeom prst="rect">
+            <a:avLst/>
+          </a:prstGeom>
+          <a:solidFill>
+            <a:srgbClr val="DAD2C6"/>
+          </a:solidFill>
+          <a:ln>
+            <a:noFill/>
+          </a:ln>
+          <a:effectLst/>
+        </p:spPr>
+        <p:style>
+          <a:lnRef idx="1">
+            <a:schemeClr val="accent1"/>
+          </a:lnRef>
+          <a:fillRef idx="3">
+            <a:schemeClr val="accent1"/>
+          </a:fillRef>
+          <a:effectRef idx="2">
+            <a:schemeClr val="accent1"/>
+          </a:effectRef>
+          <a:fontRef idx="minor">
+            <a:schemeClr val="lt1"/>
+          </a:fontRef>
+        </p:style>
+        <p:txBody>
+          <a:bodyPr rtlCol="0" anchor="ctr"/>
+          <a:lstStyle/>
+          <a:p>
+            <a:pPr algn="ctr"/>
+          </a:p>
+        </p:txBody>
+      </p:sp>
+      <p:sp>
+        <p:nvSpPr>
+          <p:cNvPr id="13" name="TextBox 12"/>
           <p:cNvSpPr txBox="1"/>
           <p:nvPr/>
         </p:nvSpPr>
         <p:spPr>
           <a:xfrm>
-            <a:off x="1389888" y="4892040"/>
-            <a:ext cx="4297680" cy="960120"/>
+            <a:off x="822960" y="3044952"/>
+            <a:ext cx="1188720" cy="274320"/>
           </a:xfrm>
           <a:prstGeom prst="rect">
             <a:avLst/>
@@ -7563,81 +7553,130 @@
           </a:bodyPr>
           <a:lstStyle/>
           <a:p>
-            <a:pPr algn="l">
+            <a:pPr algn="r">
               <a:lnSpc>
                 <a:spcPct val="100000"/>
               </a:lnSpc>
-              <a:spcAft>
-                <a:spcPts val="300"/>
-              </a:spcAft>
-            </a:pPr>
-            <a:r>
-              <a:rPr sz="1200" b="0" i="0">
-                <a:solidFill>
-                  <a:srgbClr val="1D2735"/>
-                </a:solidFill>
-                <a:latin typeface="Pretendard ExtraBold"/>
-                <a:ea typeface="Pretendard ExtraBold"/>
-              </a:rPr>
-              <a:t>저장 전 자동 점검</a:t>
-            </a:r>
-          </a:p>
-          <a:p>
-            <a:pPr algn="l">
-              <a:lnSpc>
-                <a:spcPct val="128000"/>
-              </a:lnSpc>
-            </a:pPr>
-            <a:r>
-              <a:rPr sz="1050" b="0" i="0">
-                <a:solidFill>
-                  <a:srgbClr val="455569"/>
-                </a:solidFill>
-                <a:latin typeface="Pretendard"/>
-                <a:ea typeface="Pretendard"/>
-              </a:rPr>
-              <a:t>옵션 이미지·상품정보제공고시·GIF·누락 이미지를 저장 전에 한 번에 확인해 줍니다.</a:t>
-            </a:r>
-          </a:p>
-        </p:txBody>
-      </p:sp>
-      <p:pic>
-        <p:nvPicPr>
-          <p:cNvPr id="15" name="Picture 14" descr="save_modal.jpg"/>
-          <p:cNvPicPr>
-            <a:picLocks noChangeAspect="1"/>
-          </p:cNvPicPr>
-          <p:nvPr/>
-        </p:nvPicPr>
-        <p:blipFill>
-          <a:blip r:embed="rId2"/>
-          <a:stretch>
-            <a:fillRect/>
-          </a:stretch>
-        </p:blipFill>
-        <p:spPr>
-          <a:xfrm>
-            <a:off x="6263640" y="1234440"/>
-            <a:ext cx="2651760" cy="4476117"/>
-          </a:xfrm>
-          <a:prstGeom prst="rect">
-            <a:avLst/>
-          </a:prstGeom>
-          <a:ln w="12700">
+            </a:pPr>
+            <a:r>
+              <a:rPr sz="1250" b="1" i="0">
+                <a:solidFill>
+                  <a:srgbClr val="7D5E33"/>
+                </a:solidFill>
+                <a:latin typeface="Noto Serif KR"/>
+                <a:ea typeface="Noto Serif KR"/>
+              </a:rPr>
+              <a:t>2단계</a:t>
+            </a:r>
+          </a:p>
+        </p:txBody>
+      </p:sp>
+      <p:sp>
+        <p:nvSpPr>
+          <p:cNvPr id="14" name="Oval 13"/>
+          <p:cNvSpPr/>
+          <p:nvPr/>
+        </p:nvSpPr>
+        <p:spPr>
+          <a:xfrm>
+            <a:off x="2212848" y="3072384"/>
+            <a:ext cx="132588" cy="132588"/>
+          </a:xfrm>
+          <a:prstGeom prst="ellipse">
+            <a:avLst/>
+          </a:prstGeom>
+          <a:solidFill>
+            <a:srgbClr val="1F5068"/>
+          </a:solidFill>
+          <a:ln w="19050">
             <a:solidFill>
-              <a:srgbClr val="EBE5DB"/>
+              <a:srgbClr val="FFFFFF"/>
             </a:solidFill>
           </a:ln>
           <a:effectLst/>
-          <a:effectLst>
-            <a:outerShdw blurRad="170000" dist="50000" dir="5400000" rotWithShape="0">
-              <a:srgbClr val="16241C">
-                <a:alpha val="30000"/>
-              </a:srgbClr>
-            </a:outerShdw>
-          </a:effectLst>
-        </p:spPr>
-      </p:pic>
+        </p:spPr>
+        <p:style>
+          <a:lnRef idx="1">
+            <a:schemeClr val="accent1"/>
+          </a:lnRef>
+          <a:fillRef idx="3">
+            <a:schemeClr val="accent1"/>
+          </a:fillRef>
+          <a:effectRef idx="2">
+            <a:schemeClr val="accent1"/>
+          </a:effectRef>
+          <a:fontRef idx="minor">
+            <a:schemeClr val="lt1"/>
+          </a:fontRef>
+        </p:style>
+        <p:txBody>
+          <a:bodyPr rtlCol="0" anchor="ctr"/>
+          <a:lstStyle/>
+          <a:p>
+            <a:pPr algn="ctr"/>
+          </a:p>
+        </p:txBody>
+      </p:sp>
+      <p:sp>
+        <p:nvSpPr>
+          <p:cNvPr id="15" name="Rounded Rectangle 14"/>
+          <p:cNvSpPr/>
+          <p:nvPr/>
+        </p:nvSpPr>
+        <p:spPr>
+          <a:xfrm>
+            <a:off x="2606040" y="2999232"/>
+            <a:ext cx="1024128" cy="256032"/>
+          </a:xfrm>
+          <a:prstGeom prst="roundRect">
+            <a:avLst>
+              <a:gd name="adj" fmla="val 50000"/>
+            </a:avLst>
+          </a:prstGeom>
+          <a:solidFill>
+            <a:srgbClr val="EAF1F5"/>
+          </a:solidFill>
+          <a:ln>
+            <a:noFill/>
+          </a:ln>
+          <a:effectLst/>
+        </p:spPr>
+        <p:style>
+          <a:lnRef idx="1">
+            <a:schemeClr val="accent1"/>
+          </a:lnRef>
+          <a:fillRef idx="3">
+            <a:schemeClr val="accent1"/>
+          </a:fillRef>
+          <a:effectRef idx="2">
+            <a:schemeClr val="accent1"/>
+          </a:effectRef>
+          <a:fontRef idx="minor">
+            <a:schemeClr val="lt1"/>
+          </a:fontRef>
+        </p:style>
+        <p:txBody>
+          <a:bodyPr rtlCol="0" anchor="ctr" wrap="none" lIns="0" rIns="0" tIns="0" bIns="0"/>
+          <a:lstStyle/>
+          <a:p>
+            <a:pPr algn="ctr">
+              <a:lnSpc>
+                <a:spcPct val="100000"/>
+              </a:lnSpc>
+            </a:pPr>
+            <a:r>
+              <a:rPr sz="900" b="0" i="0">
+                <a:solidFill>
+                  <a:srgbClr val="1F5068"/>
+                </a:solidFill>
+                <a:latin typeface="Pretendard SemiBold"/>
+                <a:ea typeface="Pretendard SemiBold"/>
+              </a:rPr>
+              <a:t>검색마스터</a:t>
+            </a:r>
+          </a:p>
+        </p:txBody>
+      </p:sp>
       <p:sp>
         <p:nvSpPr>
           <p:cNvPr id="16" name="TextBox 15"/>
@@ -7646,8 +7685,8 @@
         </p:nvSpPr>
         <p:spPr>
           <a:xfrm>
-            <a:off x="5989320" y="5820284"/>
-            <a:ext cx="3200400" cy="256032"/>
+            <a:off x="2606040" y="3337560"/>
+            <a:ext cx="8595360" cy="658368"/>
           </a:xfrm>
           <a:prstGeom prst="rect">
             <a:avLst/>
@@ -7660,27 +7699,503 @@
           </a:bodyPr>
           <a:lstStyle/>
           <a:p>
-            <a:pPr algn="ctr">
+            <a:pPr algn="l">
               <a:lnSpc>
                 <a:spcPct val="100000"/>
               </a:lnSpc>
-            </a:pPr>
-            <a:r>
-              <a:rPr sz="900" b="0" i="0">
+              <a:spcAft>
+                <a:spcPts val="200"/>
+              </a:spcAft>
+            </a:pPr>
+            <a:r>
+              <a:rPr sz="1350" b="0" i="0">
+                <a:solidFill>
+                  <a:srgbClr val="1D2735"/>
+                </a:solidFill>
+                <a:latin typeface="Pretendard ExtraBold"/>
+                <a:ea typeface="Pretendard ExtraBold"/>
+              </a:rPr>
+              <a:t>상품명·키워드 만들기</a:t>
+            </a:r>
+          </a:p>
+          <a:p>
+            <a:pPr algn="l">
+              <a:lnSpc>
+                <a:spcPct val="125000"/>
+              </a:lnSpc>
+            </a:pPr>
+            <a:r>
+              <a:rPr sz="1050" b="0" i="0">
                 <a:solidFill>
                   <a:srgbClr val="455569"/>
                 </a:solidFill>
                 <a:latin typeface="Pretendard"/>
                 <a:ea typeface="Pretendard"/>
               </a:rPr>
-              <a:t>저장 방식 선택 — 실제 화면</a:t>
-            </a:r>
-          </a:p>
-        </p:txBody>
-      </p:sp>
-      <p:sp>
-        <p:nvSpPr>
-          <p:cNvPr id="17" name="Rounded Rectangle 16"/>
+              <a:t>상단 메뉴로 이동해 사진과 설명을 넣고, 판매 채널에 맞는 상품명을 만듭니다.</a:t>
+            </a:r>
+          </a:p>
+        </p:txBody>
+      </p:sp>
+      <p:sp>
+        <p:nvSpPr>
+          <p:cNvPr id="17" name="Rectangle 16"/>
+          <p:cNvSpPr/>
+          <p:nvPr/>
+        </p:nvSpPr>
+        <p:spPr>
+          <a:xfrm>
+            <a:off x="2269540" y="4352544"/>
+            <a:ext cx="18288" cy="969264"/>
+          </a:xfrm>
+          <a:prstGeom prst="rect">
+            <a:avLst/>
+          </a:prstGeom>
+          <a:solidFill>
+            <a:srgbClr val="DAD2C6"/>
+          </a:solidFill>
+          <a:ln>
+            <a:noFill/>
+          </a:ln>
+          <a:effectLst/>
+        </p:spPr>
+        <p:style>
+          <a:lnRef idx="1">
+            <a:schemeClr val="accent1"/>
+          </a:lnRef>
+          <a:fillRef idx="3">
+            <a:schemeClr val="accent1"/>
+          </a:fillRef>
+          <a:effectRef idx="2">
+            <a:schemeClr val="accent1"/>
+          </a:effectRef>
+          <a:fontRef idx="minor">
+            <a:schemeClr val="lt1"/>
+          </a:fontRef>
+        </p:style>
+        <p:txBody>
+          <a:bodyPr rtlCol="0" anchor="ctr"/>
+          <a:lstStyle/>
+          <a:p>
+            <a:pPr algn="ctr"/>
+          </a:p>
+        </p:txBody>
+      </p:sp>
+      <p:sp>
+        <p:nvSpPr>
+          <p:cNvPr id="18" name="TextBox 17"/>
+          <p:cNvSpPr txBox="1"/>
+          <p:nvPr/>
+        </p:nvSpPr>
+        <p:spPr>
+          <a:xfrm>
+            <a:off x="822960" y="4123944"/>
+            <a:ext cx="1188720" cy="274320"/>
+          </a:xfrm>
+          <a:prstGeom prst="rect">
+            <a:avLst/>
+          </a:prstGeom>
+          <a:noFill/>
+        </p:spPr>
+        <p:txBody>
+          <a:bodyPr wrap="square" lIns="0" rIns="0" tIns="0" bIns="0">
+            <a:spAutoFit/>
+          </a:bodyPr>
+          <a:lstStyle/>
+          <a:p>
+            <a:pPr algn="r">
+              <a:lnSpc>
+                <a:spcPct val="100000"/>
+              </a:lnSpc>
+            </a:pPr>
+            <a:r>
+              <a:rPr sz="1250" b="1" i="0">
+                <a:solidFill>
+                  <a:srgbClr val="7D5E33"/>
+                </a:solidFill>
+                <a:latin typeface="Noto Serif KR"/>
+                <a:ea typeface="Noto Serif KR"/>
+              </a:rPr>
+              <a:t>3단계</a:t>
+            </a:r>
+          </a:p>
+        </p:txBody>
+      </p:sp>
+      <p:sp>
+        <p:nvSpPr>
+          <p:cNvPr id="19" name="Oval 18"/>
+          <p:cNvSpPr/>
+          <p:nvPr/>
+        </p:nvSpPr>
+        <p:spPr>
+          <a:xfrm>
+            <a:off x="2212848" y="4151376"/>
+            <a:ext cx="132588" cy="132588"/>
+          </a:xfrm>
+          <a:prstGeom prst="ellipse">
+            <a:avLst/>
+          </a:prstGeom>
+          <a:solidFill>
+            <a:srgbClr val="9A7440"/>
+          </a:solidFill>
+          <a:ln w="19050">
+            <a:solidFill>
+              <a:srgbClr val="FFFFFF"/>
+            </a:solidFill>
+          </a:ln>
+          <a:effectLst/>
+        </p:spPr>
+        <p:style>
+          <a:lnRef idx="1">
+            <a:schemeClr val="accent1"/>
+          </a:lnRef>
+          <a:fillRef idx="3">
+            <a:schemeClr val="accent1"/>
+          </a:fillRef>
+          <a:effectRef idx="2">
+            <a:schemeClr val="accent1"/>
+          </a:effectRef>
+          <a:fontRef idx="minor">
+            <a:schemeClr val="lt1"/>
+          </a:fontRef>
+        </p:style>
+        <p:txBody>
+          <a:bodyPr rtlCol="0" anchor="ctr"/>
+          <a:lstStyle/>
+          <a:p>
+            <a:pPr algn="ctr"/>
+          </a:p>
+        </p:txBody>
+      </p:sp>
+      <p:sp>
+        <p:nvSpPr>
+          <p:cNvPr id="20" name="Rounded Rectangle 19"/>
+          <p:cNvSpPr/>
+          <p:nvPr/>
+        </p:nvSpPr>
+        <p:spPr>
+          <a:xfrm>
+            <a:off x="2606040" y="4078224"/>
+            <a:ext cx="1024128" cy="256032"/>
+          </a:xfrm>
+          <a:prstGeom prst="roundRect">
+            <a:avLst>
+              <a:gd name="adj" fmla="val 50000"/>
+            </a:avLst>
+          </a:prstGeom>
+          <a:solidFill>
+            <a:srgbClr val="F6EFE5"/>
+          </a:solidFill>
+          <a:ln>
+            <a:noFill/>
+          </a:ln>
+          <a:effectLst/>
+        </p:spPr>
+        <p:style>
+          <a:lnRef idx="1">
+            <a:schemeClr val="accent1"/>
+          </a:lnRef>
+          <a:fillRef idx="3">
+            <a:schemeClr val="accent1"/>
+          </a:fillRef>
+          <a:effectRef idx="2">
+            <a:schemeClr val="accent1"/>
+          </a:effectRef>
+          <a:fontRef idx="minor">
+            <a:schemeClr val="lt1"/>
+          </a:fontRef>
+        </p:style>
+        <p:txBody>
+          <a:bodyPr rtlCol="0" anchor="ctr" wrap="none" lIns="0" rIns="0" tIns="0" bIns="0"/>
+          <a:lstStyle/>
+          <a:p>
+            <a:pPr algn="ctr">
+              <a:lnSpc>
+                <a:spcPct val="100000"/>
+              </a:lnSpc>
+            </a:pPr>
+            <a:r>
+              <a:rPr sz="900" b="0" i="0">
+                <a:solidFill>
+                  <a:srgbClr val="7D5E33"/>
+                </a:solidFill>
+                <a:latin typeface="Pretendard SemiBold"/>
+                <a:ea typeface="Pretendard SemiBold"/>
+              </a:rPr>
+              <a:t>프리캔버스</a:t>
+            </a:r>
+          </a:p>
+        </p:txBody>
+      </p:sp>
+      <p:sp>
+        <p:nvSpPr>
+          <p:cNvPr id="21" name="TextBox 20"/>
+          <p:cNvSpPr txBox="1"/>
+          <p:nvPr/>
+        </p:nvSpPr>
+        <p:spPr>
+          <a:xfrm>
+            <a:off x="2606040" y="4416552"/>
+            <a:ext cx="8595360" cy="658368"/>
+          </a:xfrm>
+          <a:prstGeom prst="rect">
+            <a:avLst/>
+          </a:prstGeom>
+          <a:noFill/>
+        </p:spPr>
+        <p:txBody>
+          <a:bodyPr wrap="square" lIns="0" rIns="0" tIns="0" bIns="0">
+            <a:spAutoFit/>
+          </a:bodyPr>
+          <a:lstStyle/>
+          <a:p>
+            <a:pPr algn="l">
+              <a:lnSpc>
+                <a:spcPct val="100000"/>
+              </a:lnSpc>
+              <a:spcAft>
+                <a:spcPts val="200"/>
+              </a:spcAft>
+            </a:pPr>
+            <a:r>
+              <a:rPr sz="1350" b="0" i="0">
+                <a:solidFill>
+                  <a:srgbClr val="1D2735"/>
+                </a:solidFill>
+                <a:latin typeface="Pretendard ExtraBold"/>
+                <a:ea typeface="Pretendard ExtraBold"/>
+              </a:rPr>
+              <a:t>상세·영상·카드뉴스 만들기</a:t>
+            </a:r>
+          </a:p>
+          <a:p>
+            <a:pPr algn="l">
+              <a:lnSpc>
+                <a:spcPct val="125000"/>
+              </a:lnSpc>
+            </a:pPr>
+            <a:r>
+              <a:rPr sz="1050" b="0" i="0">
+                <a:solidFill>
+                  <a:srgbClr val="455569"/>
+                </a:solidFill>
+                <a:latin typeface="Pretendard"/>
+                <a:ea typeface="Pretendard"/>
+              </a:rPr>
+              <a:t>같은 재료로 상세페이지를 만들고, 필요하면 영상 번역과 카드뉴스까지 뽑습니다.</a:t>
+            </a:r>
+          </a:p>
+        </p:txBody>
+      </p:sp>
+      <p:sp>
+        <p:nvSpPr>
+          <p:cNvPr id="22" name="TextBox 21"/>
+          <p:cNvSpPr txBox="1"/>
+          <p:nvPr/>
+        </p:nvSpPr>
+        <p:spPr>
+          <a:xfrm>
+            <a:off x="822960" y="5202936"/>
+            <a:ext cx="1188720" cy="274320"/>
+          </a:xfrm>
+          <a:prstGeom prst="rect">
+            <a:avLst/>
+          </a:prstGeom>
+          <a:noFill/>
+        </p:spPr>
+        <p:txBody>
+          <a:bodyPr wrap="square" lIns="0" rIns="0" tIns="0" bIns="0">
+            <a:spAutoFit/>
+          </a:bodyPr>
+          <a:lstStyle/>
+          <a:p>
+            <a:pPr algn="r">
+              <a:lnSpc>
+                <a:spcPct val="100000"/>
+              </a:lnSpc>
+            </a:pPr>
+            <a:r>
+              <a:rPr sz="1250" b="1" i="0">
+                <a:solidFill>
+                  <a:srgbClr val="7D5E33"/>
+                </a:solidFill>
+                <a:latin typeface="Noto Serif KR"/>
+                <a:ea typeface="Noto Serif KR"/>
+              </a:rPr>
+              <a:t>4단계</a:t>
+            </a:r>
+          </a:p>
+        </p:txBody>
+      </p:sp>
+      <p:sp>
+        <p:nvSpPr>
+          <p:cNvPr id="23" name="Oval 22"/>
+          <p:cNvSpPr/>
+          <p:nvPr/>
+        </p:nvSpPr>
+        <p:spPr>
+          <a:xfrm>
+            <a:off x="2212848" y="5230368"/>
+            <a:ext cx="132588" cy="132588"/>
+          </a:xfrm>
+          <a:prstGeom prst="ellipse">
+            <a:avLst/>
+          </a:prstGeom>
+          <a:solidFill>
+            <a:srgbClr val="1D2735"/>
+          </a:solidFill>
+          <a:ln w="19050">
+            <a:solidFill>
+              <a:srgbClr val="FFFFFF"/>
+            </a:solidFill>
+          </a:ln>
+          <a:effectLst/>
+        </p:spPr>
+        <p:style>
+          <a:lnRef idx="1">
+            <a:schemeClr val="accent1"/>
+          </a:lnRef>
+          <a:fillRef idx="3">
+            <a:schemeClr val="accent1"/>
+          </a:fillRef>
+          <a:effectRef idx="2">
+            <a:schemeClr val="accent1"/>
+          </a:effectRef>
+          <a:fontRef idx="minor">
+            <a:schemeClr val="lt1"/>
+          </a:fontRef>
+        </p:style>
+        <p:txBody>
+          <a:bodyPr rtlCol="0" anchor="ctr"/>
+          <a:lstStyle/>
+          <a:p>
+            <a:pPr algn="ctr"/>
+          </a:p>
+        </p:txBody>
+      </p:sp>
+      <p:sp>
+        <p:nvSpPr>
+          <p:cNvPr id="24" name="Rounded Rectangle 23"/>
+          <p:cNvSpPr/>
+          <p:nvPr/>
+        </p:nvSpPr>
+        <p:spPr>
+          <a:xfrm>
+            <a:off x="2606040" y="5157216"/>
+            <a:ext cx="640080" cy="256032"/>
+          </a:xfrm>
+          <a:prstGeom prst="roundRect">
+            <a:avLst>
+              <a:gd name="adj" fmla="val 50000"/>
+            </a:avLst>
+          </a:prstGeom>
+          <a:solidFill>
+            <a:srgbClr val="EDF0EC"/>
+          </a:solidFill>
+          <a:ln>
+            <a:noFill/>
+          </a:ln>
+          <a:effectLst/>
+        </p:spPr>
+        <p:style>
+          <a:lnRef idx="1">
+            <a:schemeClr val="accent1"/>
+          </a:lnRef>
+          <a:fillRef idx="3">
+            <a:schemeClr val="accent1"/>
+          </a:fillRef>
+          <a:effectRef idx="2">
+            <a:schemeClr val="accent1"/>
+          </a:effectRef>
+          <a:fontRef idx="minor">
+            <a:schemeClr val="lt1"/>
+          </a:fontRef>
+        </p:style>
+        <p:txBody>
+          <a:bodyPr rtlCol="0" anchor="ctr" wrap="none" lIns="0" rIns="0" tIns="0" bIns="0"/>
+          <a:lstStyle/>
+          <a:p>
+            <a:pPr algn="ctr">
+              <a:lnSpc>
+                <a:spcPct val="100000"/>
+              </a:lnSpc>
+            </a:pPr>
+            <a:r>
+              <a:rPr sz="900" b="0" i="0">
+                <a:solidFill>
+                  <a:srgbClr val="455569"/>
+                </a:solidFill>
+                <a:latin typeface="Pretendard SemiBold"/>
+                <a:ea typeface="Pretendard SemiBold"/>
+              </a:rPr>
+              <a:t>셀러</a:t>
+            </a:r>
+          </a:p>
+        </p:txBody>
+      </p:sp>
+      <p:sp>
+        <p:nvSpPr>
+          <p:cNvPr id="25" name="TextBox 24"/>
+          <p:cNvSpPr txBox="1"/>
+          <p:nvPr/>
+        </p:nvSpPr>
+        <p:spPr>
+          <a:xfrm>
+            <a:off x="2606040" y="5495544"/>
+            <a:ext cx="8595360" cy="658368"/>
+          </a:xfrm>
+          <a:prstGeom prst="rect">
+            <a:avLst/>
+          </a:prstGeom>
+          <a:noFill/>
+        </p:spPr>
+        <p:txBody>
+          <a:bodyPr wrap="square" lIns="0" rIns="0" tIns="0" bIns="0">
+            <a:spAutoFit/>
+          </a:bodyPr>
+          <a:lstStyle/>
+          <a:p>
+            <a:pPr algn="l">
+              <a:lnSpc>
+                <a:spcPct val="100000"/>
+              </a:lnSpc>
+              <a:spcAft>
+                <a:spcPts val="200"/>
+              </a:spcAft>
+            </a:pPr>
+            <a:r>
+              <a:rPr sz="1350" b="0" i="0">
+                <a:solidFill>
+                  <a:srgbClr val="1D2735"/>
+                </a:solidFill>
+                <a:latin typeface="Pretendard ExtraBold"/>
+                <a:ea typeface="Pretendard ExtraBold"/>
+              </a:rPr>
+              <a:t>플랫폼에 등록</a:t>
+            </a:r>
+          </a:p>
+          <a:p>
+            <a:pPr algn="l">
+              <a:lnSpc>
+                <a:spcPct val="125000"/>
+              </a:lnSpc>
+            </a:pPr>
+            <a:r>
+              <a:rPr sz="1050" b="0" i="0">
+                <a:solidFill>
+                  <a:srgbClr val="455569"/>
+                </a:solidFill>
+                <a:latin typeface="Pretendard"/>
+                <a:ea typeface="Pretendard"/>
+              </a:rPr>
+              <a:t>완성본을 내려받아 판매 플랫폼에 그대로 올립니다.</a:t>
+            </a:r>
+          </a:p>
+        </p:txBody>
+      </p:sp>
+      <p:sp>
+        <p:nvSpPr>
+          <p:cNvPr id="26" name="Rounded Rectangle 25"/>
           <p:cNvSpPr/>
           <p:nvPr/>
         </p:nvSpPr>
@@ -7735,7 +8250,7 @@
                 <a:latin typeface="Pretendard SemiBold"/>
                 <a:ea typeface="Pretendard SemiBold"/>
               </a:rPr>
-              <a:t>14 / 19</a:t>
+              <a:t>14 / 15</a:t>
             </a:r>
           </a:p>
         </p:txBody>
@@ -7848,3139 +8363,6 @@
       </p:sp>
       <p:sp>
         <p:nvSpPr>
-          <p:cNvPr id="4" name="Rectangle 3"/>
-          <p:cNvSpPr/>
-          <p:nvPr/>
-        </p:nvSpPr>
-        <p:spPr>
-          <a:xfrm>
-            <a:off x="822960" y="644652"/>
-            <a:ext cx="384048" cy="16459"/>
-          </a:xfrm>
-          <a:prstGeom prst="rect">
-            <a:avLst/>
-          </a:prstGeom>
-          <a:solidFill>
-            <a:srgbClr val="9A7440"/>
-          </a:solidFill>
-          <a:ln>
-            <a:noFill/>
-          </a:ln>
-          <a:effectLst/>
-        </p:spPr>
-        <p:style>
-          <a:lnRef idx="1">
-            <a:schemeClr val="accent1"/>
-          </a:lnRef>
-          <a:fillRef idx="3">
-            <a:schemeClr val="accent1"/>
-          </a:fillRef>
-          <a:effectRef idx="2">
-            <a:schemeClr val="accent1"/>
-          </a:effectRef>
-          <a:fontRef idx="minor">
-            <a:schemeClr val="lt1"/>
-          </a:fontRef>
-        </p:style>
-        <p:txBody>
-          <a:bodyPr rtlCol="0" anchor="ctr"/>
-          <a:lstStyle/>
-          <a:p>
-            <a:pPr algn="ctr"/>
-          </a:p>
-        </p:txBody>
-      </p:sp>
-      <p:sp>
-        <p:nvSpPr>
-          <p:cNvPr id="5" name="TextBox 4"/>
-          <p:cNvSpPr txBox="1"/>
-          <p:nvPr/>
-        </p:nvSpPr>
-        <p:spPr>
-          <a:xfrm>
-            <a:off x="1325880" y="566928"/>
-            <a:ext cx="8686800" cy="274320"/>
-          </a:xfrm>
-          <a:prstGeom prst="rect">
-            <a:avLst/>
-          </a:prstGeom>
-          <a:noFill/>
-        </p:spPr>
-        <p:txBody>
-          <a:bodyPr wrap="square" lIns="0" rIns="0" tIns="0" bIns="0">
-            <a:spAutoFit/>
-          </a:bodyPr>
-          <a:lstStyle/>
-          <a:p>
-            <a:pPr algn="l">
-              <a:lnSpc>
-                <a:spcPct val="100000"/>
-              </a:lnSpc>
-            </a:pPr>
-            <a:r>
-              <a:rPr sz="1050" b="0" i="0" spc="190">
-                <a:solidFill>
-                  <a:srgbClr val="1F5068"/>
-                </a:solidFill>
-                <a:latin typeface="Pretendard ExtraBold"/>
-                <a:ea typeface="Pretendard ExtraBold"/>
-              </a:rPr>
-              <a:t>처음 쓰는 분이라면</a:t>
-            </a:r>
-          </a:p>
-        </p:txBody>
-      </p:sp>
-      <p:sp>
-        <p:nvSpPr>
-          <p:cNvPr id="6" name="TextBox 5"/>
-          <p:cNvSpPr txBox="1"/>
-          <p:nvPr/>
-        </p:nvSpPr>
-        <p:spPr>
-          <a:xfrm>
-            <a:off x="822960" y="1234440"/>
-            <a:ext cx="4937760" cy="1280160"/>
-          </a:xfrm>
-          <a:prstGeom prst="rect">
-            <a:avLst/>
-          </a:prstGeom>
-          <a:noFill/>
-        </p:spPr>
-        <p:txBody>
-          <a:bodyPr wrap="square" lIns="0" rIns="0" tIns="0" bIns="0">
-            <a:spAutoFit/>
-          </a:bodyPr>
-          <a:lstStyle/>
-          <a:p>
-            <a:pPr algn="l">
-              <a:lnSpc>
-                <a:spcPct val="130000"/>
-              </a:lnSpc>
-            </a:pPr>
-            <a:r>
-              <a:rPr sz="2400" b="1" i="0">
-                <a:solidFill>
-                  <a:srgbClr val="1D2735"/>
-                </a:solidFill>
-                <a:latin typeface="Noto Serif KR"/>
-                <a:ea typeface="Noto Serif KR"/>
-              </a:rPr>
-              <a:t>단계별 사용법 안내</a:t>
-            </a:r>
-          </a:p>
-          <a:p>
-            <a:pPr algn="l">
-              <a:lnSpc>
-                <a:spcPct val="140000"/>
-              </a:lnSpc>
-              <a:spcBef>
-                <a:spcPts val="800"/>
-              </a:spcBef>
-            </a:pPr>
-            <a:r>
-              <a:rPr sz="1200" b="0" i="0">
-                <a:solidFill>
-                  <a:srgbClr val="455569"/>
-                </a:solidFill>
-                <a:latin typeface="Pretendard"/>
-                <a:ea typeface="Pretendard"/>
-              </a:rPr>
-              <a:t>화면 위에 순서대로 안내가 떠서, 처음이어도 따라 하기만 하면 됩니다.</a:t>
-            </a:r>
-          </a:p>
-        </p:txBody>
-      </p:sp>
-      <p:sp>
-        <p:nvSpPr>
-          <p:cNvPr id="7" name="TextBox 6"/>
-          <p:cNvSpPr txBox="1"/>
-          <p:nvPr/>
-        </p:nvSpPr>
-        <p:spPr>
-          <a:xfrm>
-            <a:off x="822960" y="2743200"/>
-            <a:ext cx="502920" cy="457200"/>
-          </a:xfrm>
-          <a:prstGeom prst="rect">
-            <a:avLst/>
-          </a:prstGeom>
-          <a:noFill/>
-        </p:spPr>
-        <p:txBody>
-          <a:bodyPr wrap="square" lIns="0" rIns="0" tIns="0" bIns="0">
-            <a:spAutoFit/>
-          </a:bodyPr>
-          <a:lstStyle/>
-          <a:p>
-            <a:pPr algn="ctr">
-              <a:lnSpc>
-                <a:spcPct val="100000"/>
-              </a:lnSpc>
-            </a:pPr>
-            <a:r>
-              <a:rPr sz="1600" b="0" i="0">
-                <a:solidFill>
-                  <a:srgbClr val="1D2735"/>
-                </a:solidFill>
-                <a:latin typeface="Pretendard"/>
-                <a:ea typeface="Pretendard"/>
-              </a:rPr>
-              <a:t>🗂️</a:t>
-            </a:r>
-          </a:p>
-        </p:txBody>
-      </p:sp>
-      <p:sp>
-        <p:nvSpPr>
-          <p:cNvPr id="8" name="TextBox 7"/>
-          <p:cNvSpPr txBox="1"/>
-          <p:nvPr/>
-        </p:nvSpPr>
-        <p:spPr>
-          <a:xfrm>
-            <a:off x="1389888" y="2734056"/>
-            <a:ext cx="4297680" cy="960120"/>
-          </a:xfrm>
-          <a:prstGeom prst="rect">
-            <a:avLst/>
-          </a:prstGeom>
-          <a:noFill/>
-        </p:spPr>
-        <p:txBody>
-          <a:bodyPr wrap="square" lIns="0" rIns="0" tIns="0" bIns="0">
-            <a:spAutoFit/>
-          </a:bodyPr>
-          <a:lstStyle/>
-          <a:p>
-            <a:pPr algn="l">
-              <a:lnSpc>
-                <a:spcPct val="100000"/>
-              </a:lnSpc>
-              <a:spcAft>
-                <a:spcPts val="300"/>
-              </a:spcAft>
-            </a:pPr>
-            <a:r>
-              <a:rPr sz="1200" b="0" i="0">
-                <a:solidFill>
-                  <a:srgbClr val="1D2735"/>
-                </a:solidFill>
-                <a:latin typeface="Pretendard ExtraBold"/>
-                <a:ea typeface="Pretendard ExtraBold"/>
-              </a:rPr>
-              <a:t>결과물마다 다른 안내</a:t>
-            </a:r>
-          </a:p>
-          <a:p>
-            <a:pPr algn="l">
-              <a:lnSpc>
-                <a:spcPct val="128000"/>
-              </a:lnSpc>
-            </a:pPr>
-            <a:r>
-              <a:rPr sz="1050" b="0" i="0">
-                <a:solidFill>
-                  <a:srgbClr val="455569"/>
-                </a:solidFill>
-                <a:latin typeface="Pretendard"/>
-                <a:ea typeface="Pretendard"/>
-              </a:rPr>
-              <a:t>일반·의류·과일채소·카드뉴스·썸네일 — 만들려는 것에 맞는 안내가 따로 준비되어 있습니다.</a:t>
-            </a:r>
-          </a:p>
-        </p:txBody>
-      </p:sp>
-      <p:sp>
-        <p:nvSpPr>
-          <p:cNvPr id="9" name="Rectangle 8"/>
-          <p:cNvSpPr/>
-          <p:nvPr/>
-        </p:nvSpPr>
-        <p:spPr>
-          <a:xfrm>
-            <a:off x="822960" y="3739896"/>
-            <a:ext cx="4846320" cy="10972"/>
-          </a:xfrm>
-          <a:prstGeom prst="rect">
-            <a:avLst/>
-          </a:prstGeom>
-          <a:solidFill>
-            <a:srgbClr val="EBE5DB"/>
-          </a:solidFill>
-          <a:ln>
-            <a:noFill/>
-          </a:ln>
-          <a:effectLst/>
-        </p:spPr>
-        <p:style>
-          <a:lnRef idx="1">
-            <a:schemeClr val="accent1"/>
-          </a:lnRef>
-          <a:fillRef idx="3">
-            <a:schemeClr val="accent1"/>
-          </a:fillRef>
-          <a:effectRef idx="2">
-            <a:schemeClr val="accent1"/>
-          </a:effectRef>
-          <a:fontRef idx="minor">
-            <a:schemeClr val="lt1"/>
-          </a:fontRef>
-        </p:style>
-        <p:txBody>
-          <a:bodyPr rtlCol="0" anchor="ctr"/>
-          <a:lstStyle/>
-          <a:p>
-            <a:pPr algn="ctr"/>
-          </a:p>
-        </p:txBody>
-      </p:sp>
-      <p:sp>
-        <p:nvSpPr>
-          <p:cNvPr id="10" name="TextBox 9"/>
-          <p:cNvSpPr txBox="1"/>
-          <p:nvPr/>
-        </p:nvSpPr>
-        <p:spPr>
-          <a:xfrm>
-            <a:off x="822960" y="3822191"/>
-            <a:ext cx="502920" cy="457200"/>
-          </a:xfrm>
-          <a:prstGeom prst="rect">
-            <a:avLst/>
-          </a:prstGeom>
-          <a:noFill/>
-        </p:spPr>
-        <p:txBody>
-          <a:bodyPr wrap="square" lIns="0" rIns="0" tIns="0" bIns="0">
-            <a:spAutoFit/>
-          </a:bodyPr>
-          <a:lstStyle/>
-          <a:p>
-            <a:pPr algn="ctr">
-              <a:lnSpc>
-                <a:spcPct val="100000"/>
-              </a:lnSpc>
-            </a:pPr>
-            <a:r>
-              <a:rPr sz="1600" b="0" i="0">
-                <a:solidFill>
-                  <a:srgbClr val="1D2735"/>
-                </a:solidFill>
-                <a:latin typeface="Pretendard"/>
-                <a:ea typeface="Pretendard"/>
-              </a:rPr>
-              <a:t>📋</a:t>
-            </a:r>
-          </a:p>
-        </p:txBody>
-      </p:sp>
-      <p:sp>
-        <p:nvSpPr>
-          <p:cNvPr id="11" name="TextBox 10"/>
-          <p:cNvSpPr txBox="1"/>
-          <p:nvPr/>
-        </p:nvSpPr>
-        <p:spPr>
-          <a:xfrm>
-            <a:off x="1389888" y="3813048"/>
-            <a:ext cx="4297680" cy="960120"/>
-          </a:xfrm>
-          <a:prstGeom prst="rect">
-            <a:avLst/>
-          </a:prstGeom>
-          <a:noFill/>
-        </p:spPr>
-        <p:txBody>
-          <a:bodyPr wrap="square" lIns="0" rIns="0" tIns="0" bIns="0">
-            <a:spAutoFit/>
-          </a:bodyPr>
-          <a:lstStyle/>
-          <a:p>
-            <a:pPr algn="l">
-              <a:lnSpc>
-                <a:spcPct val="100000"/>
-              </a:lnSpc>
-              <a:spcAft>
-                <a:spcPts val="300"/>
-              </a:spcAft>
-            </a:pPr>
-            <a:r>
-              <a:rPr sz="1200" b="0" i="0">
-                <a:solidFill>
-                  <a:srgbClr val="1D2735"/>
-                </a:solidFill>
-                <a:latin typeface="Pretendard ExtraBold"/>
-                <a:ea typeface="Pretendard ExtraBold"/>
-              </a:rPr>
-              <a:t>사진 올리기부터 저장까지</a:t>
-            </a:r>
-          </a:p>
-          <a:p>
-            <a:pPr algn="l">
-              <a:lnSpc>
-                <a:spcPct val="128000"/>
-              </a:lnSpc>
-            </a:pPr>
-            <a:r>
-              <a:rPr sz="1050" b="0" i="0">
-                <a:solidFill>
-                  <a:srgbClr val="455569"/>
-                </a:solidFill>
-                <a:latin typeface="Pretendard"/>
-                <a:ea typeface="Pretendard"/>
-              </a:rPr>
-              <a:t>각 단계에서 무엇을 누르고 무엇을 입력하는지 화면 위에서 하나씩 짚어 줍니다.</a:t>
-            </a:r>
-          </a:p>
-        </p:txBody>
-      </p:sp>
-      <p:sp>
-        <p:nvSpPr>
-          <p:cNvPr id="12" name="Rectangle 11"/>
-          <p:cNvSpPr/>
-          <p:nvPr/>
-        </p:nvSpPr>
-        <p:spPr>
-          <a:xfrm>
-            <a:off x="822960" y="4818888"/>
-            <a:ext cx="4846320" cy="10972"/>
-          </a:xfrm>
-          <a:prstGeom prst="rect">
-            <a:avLst/>
-          </a:prstGeom>
-          <a:solidFill>
-            <a:srgbClr val="EBE5DB"/>
-          </a:solidFill>
-          <a:ln>
-            <a:noFill/>
-          </a:ln>
-          <a:effectLst/>
-        </p:spPr>
-        <p:style>
-          <a:lnRef idx="1">
-            <a:schemeClr val="accent1"/>
-          </a:lnRef>
-          <a:fillRef idx="3">
-            <a:schemeClr val="accent1"/>
-          </a:fillRef>
-          <a:effectRef idx="2">
-            <a:schemeClr val="accent1"/>
-          </a:effectRef>
-          <a:fontRef idx="minor">
-            <a:schemeClr val="lt1"/>
-          </a:fontRef>
-        </p:style>
-        <p:txBody>
-          <a:bodyPr rtlCol="0" anchor="ctr"/>
-          <a:lstStyle/>
-          <a:p>
-            <a:pPr algn="ctr"/>
-          </a:p>
-        </p:txBody>
-      </p:sp>
-      <p:sp>
-        <p:nvSpPr>
-          <p:cNvPr id="13" name="TextBox 12"/>
-          <p:cNvSpPr txBox="1"/>
-          <p:nvPr/>
-        </p:nvSpPr>
-        <p:spPr>
-          <a:xfrm>
-            <a:off x="822960" y="4901183"/>
-            <a:ext cx="502920" cy="457200"/>
-          </a:xfrm>
-          <a:prstGeom prst="rect">
-            <a:avLst/>
-          </a:prstGeom>
-          <a:noFill/>
-        </p:spPr>
-        <p:txBody>
-          <a:bodyPr wrap="square" lIns="0" rIns="0" tIns="0" bIns="0">
-            <a:spAutoFit/>
-          </a:bodyPr>
-          <a:lstStyle/>
-          <a:p>
-            <a:pPr algn="ctr">
-              <a:lnSpc>
-                <a:spcPct val="100000"/>
-              </a:lnSpc>
-            </a:pPr>
-            <a:r>
-              <a:rPr sz="1600" b="0" i="0">
-                <a:solidFill>
-                  <a:srgbClr val="1D2735"/>
-                </a:solidFill>
-                <a:latin typeface="Pretendard"/>
-                <a:ea typeface="Pretendard"/>
-              </a:rPr>
-              <a:t>🔁</a:t>
-            </a:r>
-          </a:p>
-        </p:txBody>
-      </p:sp>
-      <p:sp>
-        <p:nvSpPr>
-          <p:cNvPr id="14" name="TextBox 13"/>
-          <p:cNvSpPr txBox="1"/>
-          <p:nvPr/>
-        </p:nvSpPr>
-        <p:spPr>
-          <a:xfrm>
-            <a:off x="1389888" y="4892040"/>
-            <a:ext cx="4297680" cy="960120"/>
-          </a:xfrm>
-          <a:prstGeom prst="rect">
-            <a:avLst/>
-          </a:prstGeom>
-          <a:noFill/>
-        </p:spPr>
-        <p:txBody>
-          <a:bodyPr wrap="square" lIns="0" rIns="0" tIns="0" bIns="0">
-            <a:spAutoFit/>
-          </a:bodyPr>
-          <a:lstStyle/>
-          <a:p>
-            <a:pPr algn="l">
-              <a:lnSpc>
-                <a:spcPct val="100000"/>
-              </a:lnSpc>
-              <a:spcAft>
-                <a:spcPts val="300"/>
-              </a:spcAft>
-            </a:pPr>
-            <a:r>
-              <a:rPr sz="1200" b="0" i="0">
-                <a:solidFill>
-                  <a:srgbClr val="1D2735"/>
-                </a:solidFill>
-                <a:latin typeface="Pretendard ExtraBold"/>
-                <a:ea typeface="Pretendard ExtraBold"/>
-              </a:rPr>
-              <a:t>언제든 다시 보기</a:t>
-            </a:r>
-          </a:p>
-          <a:p>
-            <a:pPr algn="l">
-              <a:lnSpc>
-                <a:spcPct val="128000"/>
-              </a:lnSpc>
-            </a:pPr>
-            <a:r>
-              <a:rPr sz="1050" b="0" i="0">
-                <a:solidFill>
-                  <a:srgbClr val="455569"/>
-                </a:solidFill>
-                <a:latin typeface="Pretendard"/>
-                <a:ea typeface="Pretendard"/>
-              </a:rPr>
-              <a:t>첫 화면의 “사용법 보기”를 누르면 언제든 처음부터 다시 볼 수 있습니다.</a:t>
-            </a:r>
-          </a:p>
-        </p:txBody>
-      </p:sp>
-      <p:pic>
-        <p:nvPicPr>
-          <p:cNvPr id="15" name="Picture 14" descr="fc_guide.jpg"/>
-          <p:cNvPicPr>
-            <a:picLocks noChangeAspect="1"/>
-          </p:cNvPicPr>
-          <p:nvPr/>
-        </p:nvPicPr>
-        <p:blipFill>
-          <a:blip r:embed="rId2"/>
-          <a:stretch>
-            <a:fillRect/>
-          </a:stretch>
-        </p:blipFill>
-        <p:spPr>
-          <a:xfrm>
-            <a:off x="6263640" y="1371600"/>
-            <a:ext cx="3657600" cy="3237186"/>
-          </a:xfrm>
-          <a:prstGeom prst="rect">
-            <a:avLst/>
-          </a:prstGeom>
-          <a:ln w="12700">
-            <a:solidFill>
-              <a:srgbClr val="EBE5DB"/>
-            </a:solidFill>
-          </a:ln>
-          <a:effectLst/>
-          <a:effectLst>
-            <a:outerShdw blurRad="170000" dist="50000" dir="5400000" rotWithShape="0">
-              <a:srgbClr val="16241C">
-                <a:alpha val="30000"/>
-              </a:srgbClr>
-            </a:outerShdw>
-          </a:effectLst>
-        </p:spPr>
-      </p:pic>
-      <p:sp>
-        <p:nvSpPr>
-          <p:cNvPr id="16" name="TextBox 15"/>
-          <p:cNvSpPr txBox="1"/>
-          <p:nvPr/>
-        </p:nvSpPr>
-        <p:spPr>
-          <a:xfrm>
-            <a:off x="5989320" y="4718514"/>
-            <a:ext cx="4206240" cy="256032"/>
-          </a:xfrm>
-          <a:prstGeom prst="rect">
-            <a:avLst/>
-          </a:prstGeom>
-          <a:noFill/>
-        </p:spPr>
-        <p:txBody>
-          <a:bodyPr wrap="square" lIns="0" rIns="0" tIns="0" bIns="0">
-            <a:spAutoFit/>
-          </a:bodyPr>
-          <a:lstStyle/>
-          <a:p>
-            <a:pPr algn="ctr">
-              <a:lnSpc>
-                <a:spcPct val="100000"/>
-              </a:lnSpc>
-            </a:pPr>
-            <a:r>
-              <a:rPr sz="900" b="0" i="0">
-                <a:solidFill>
-                  <a:srgbClr val="455569"/>
-                </a:solidFill>
-                <a:latin typeface="Pretendard"/>
-                <a:ea typeface="Pretendard"/>
-              </a:rPr>
-              <a:t>사용법 안내 실제 화면</a:t>
-            </a:r>
-          </a:p>
-        </p:txBody>
-      </p:sp>
-      <p:sp>
-        <p:nvSpPr>
-          <p:cNvPr id="17" name="Rounded Rectangle 16"/>
-          <p:cNvSpPr/>
-          <p:nvPr/>
-        </p:nvSpPr>
-        <p:spPr>
-          <a:xfrm>
-            <a:off x="502920" y="6355080"/>
-            <a:ext cx="868680" cy="329184"/>
-          </a:xfrm>
-          <a:prstGeom prst="roundRect">
-            <a:avLst>
-              <a:gd name="adj" fmla="val 50000"/>
-            </a:avLst>
-          </a:prstGeom>
-          <a:solidFill>
-            <a:srgbClr val="FFFFFF"/>
-          </a:solidFill>
-          <a:ln w="9525">
-            <a:solidFill>
-              <a:srgbClr val="EBE5DB"/>
-            </a:solidFill>
-          </a:ln>
-          <a:effectLst/>
-        </p:spPr>
-        <p:style>
-          <a:lnRef idx="1">
-            <a:schemeClr val="accent1"/>
-          </a:lnRef>
-          <a:fillRef idx="3">
-            <a:schemeClr val="accent1"/>
-          </a:fillRef>
-          <a:effectRef idx="2">
-            <a:schemeClr val="accent1"/>
-          </a:effectRef>
-          <a:fontRef idx="minor">
-            <a:schemeClr val="lt1"/>
-          </a:fontRef>
-        </p:style>
-        <p:txBody>
-          <a:bodyPr rtlCol="0" anchor="ctr" wrap="none" lIns="0" rIns="0" tIns="0" bIns="0"/>
-          <a:lstStyle/>
-          <a:p>
-            <a:pPr algn="ctr">
-              <a:lnSpc>
-                <a:spcPct val="100000"/>
-              </a:lnSpc>
-            </a:pPr>
-            <a:r>
-              <a:rPr sz="1050" b="0" i="0">
-                <a:solidFill>
-                  <a:srgbClr val="455569"/>
-                </a:solidFill>
-                <a:latin typeface="Pretendard SemiBold"/>
-                <a:ea typeface="Pretendard SemiBold"/>
-              </a:rPr>
-              <a:t>15 / 19</a:t>
-            </a:r>
-          </a:p>
-        </p:txBody>
-      </p:sp>
-    </p:spTree>
-  </p:cSld>
-  <p:clrMapOvr>
-    <a:masterClrMapping/>
-  </p:clrMapOvr>
-</p:sld>
-</file>
-
-<file path=ppt/slides/slide16.xml><?xml version="1.0" encoding="utf-8"?>
-<p:sld xmlns:a="http://schemas.openxmlformats.org/drawingml/2006/main" xmlns:p="http://schemas.openxmlformats.org/presentationml/2006/main" xmlns:r="http://schemas.openxmlformats.org/officeDocument/2006/relationships">
-  <p:cSld>
-    <p:spTree>
-      <p:nvGrpSpPr>
-        <p:cNvPr id="1" name=""/>
-        <p:cNvGrpSpPr/>
-        <p:nvPr/>
-      </p:nvGrpSpPr>
-      <p:grpSpPr/>
-      <p:sp>
-        <p:nvSpPr>
-          <p:cNvPr id="2" name="Rectangle 1"/>
-          <p:cNvSpPr/>
-          <p:nvPr/>
-        </p:nvSpPr>
-        <p:spPr>
-          <a:xfrm>
-            <a:off x="0" y="0"/>
-            <a:ext cx="12191695" cy="6858000"/>
-          </a:xfrm>
-          <a:prstGeom prst="rect">
-            <a:avLst/>
-          </a:prstGeom>
-          <a:solidFill>
-            <a:srgbClr val="FFFDF9"/>
-          </a:solidFill>
-          <a:ln>
-            <a:noFill/>
-          </a:ln>
-          <a:effectLst/>
-        </p:spPr>
-        <p:style>
-          <a:lnRef idx="1">
-            <a:schemeClr val="accent1"/>
-          </a:lnRef>
-          <a:fillRef idx="3">
-            <a:schemeClr val="accent1"/>
-          </a:fillRef>
-          <a:effectRef idx="2">
-            <a:schemeClr val="accent1"/>
-          </a:effectRef>
-          <a:fontRef idx="minor">
-            <a:schemeClr val="lt1"/>
-          </a:fontRef>
-        </p:style>
-        <p:txBody>
-          <a:bodyPr rtlCol="0" anchor="ctr"/>
-          <a:lstStyle/>
-          <a:p>
-            <a:pPr algn="ctr"/>
-          </a:p>
-        </p:txBody>
-      </p:sp>
-      <p:sp>
-        <p:nvSpPr>
-          <p:cNvPr id="3" name="Rectangle 2"/>
-          <p:cNvSpPr/>
-          <p:nvPr/>
-        </p:nvSpPr>
-        <p:spPr>
-          <a:xfrm>
-            <a:off x="0" y="0"/>
-            <a:ext cx="12191695" cy="45720"/>
-          </a:xfrm>
-          <a:prstGeom prst="rect">
-            <a:avLst/>
-          </a:prstGeom>
-          <a:solidFill>
-            <a:srgbClr val="173F54"/>
-          </a:solidFill>
-          <a:ln>
-            <a:noFill/>
-          </a:ln>
-          <a:effectLst/>
-        </p:spPr>
-        <p:style>
-          <a:lnRef idx="1">
-            <a:schemeClr val="accent1"/>
-          </a:lnRef>
-          <a:fillRef idx="3">
-            <a:schemeClr val="accent1"/>
-          </a:fillRef>
-          <a:effectRef idx="2">
-            <a:schemeClr val="accent1"/>
-          </a:effectRef>
-          <a:fontRef idx="minor">
-            <a:schemeClr val="lt1"/>
-          </a:fontRef>
-        </p:style>
-        <p:txBody>
-          <a:bodyPr rtlCol="0" anchor="ctr"/>
-          <a:lstStyle/>
-          <a:p>
-            <a:pPr algn="ctr"/>
-          </a:p>
-        </p:txBody>
-      </p:sp>
-      <p:sp>
-        <p:nvSpPr>
-          <p:cNvPr id="4" name="TextBox 3"/>
-          <p:cNvSpPr txBox="1"/>
-          <p:nvPr/>
-        </p:nvSpPr>
-        <p:spPr>
-          <a:xfrm>
-            <a:off x="8503920" y="1645920"/>
-            <a:ext cx="3017520" cy="3474720"/>
-          </a:xfrm>
-          <a:prstGeom prst="rect">
-            <a:avLst/>
-          </a:prstGeom>
-          <a:noFill/>
-        </p:spPr>
-        <p:txBody>
-          <a:bodyPr wrap="square" lIns="0" rIns="0" tIns="0" bIns="0">
-            <a:spAutoFit/>
-          </a:bodyPr>
-          <a:lstStyle/>
-          <a:p>
-            <a:pPr algn="r">
-              <a:lnSpc>
-                <a:spcPct val="100000"/>
-              </a:lnSpc>
-            </a:pPr>
-            <a:r>
-              <a:rPr sz="19000" b="1" i="0">
-                <a:solidFill>
-                  <a:srgbClr val="ECE4D4"/>
-                </a:solidFill>
-                <a:latin typeface="Noto Serif KR"/>
-                <a:ea typeface="Noto Serif KR"/>
-              </a:rPr>
-              <a:t>3</a:t>
-            </a:r>
-          </a:p>
-        </p:txBody>
-      </p:sp>
-      <p:sp>
-        <p:nvSpPr>
-          <p:cNvPr id="5" name="Rounded Rectangle 4"/>
-          <p:cNvSpPr/>
-          <p:nvPr/>
-        </p:nvSpPr>
-        <p:spPr>
-          <a:xfrm>
-            <a:off x="822960" y="2148840"/>
-            <a:ext cx="868680" cy="384048"/>
-          </a:xfrm>
-          <a:prstGeom prst="roundRect">
-            <a:avLst>
-              <a:gd name="adj" fmla="val 50000"/>
-            </a:avLst>
-          </a:prstGeom>
-          <a:solidFill>
-            <a:srgbClr val="F6EFE5"/>
-          </a:solidFill>
-          <a:ln>
-            <a:noFill/>
-          </a:ln>
-          <a:effectLst/>
-        </p:spPr>
-        <p:style>
-          <a:lnRef idx="1">
-            <a:schemeClr val="accent1"/>
-          </a:lnRef>
-          <a:fillRef idx="3">
-            <a:schemeClr val="accent1"/>
-          </a:fillRef>
-          <a:effectRef idx="2">
-            <a:schemeClr val="accent1"/>
-          </a:effectRef>
-          <a:fontRef idx="minor">
-            <a:schemeClr val="lt1"/>
-          </a:fontRef>
-        </p:style>
-        <p:txBody>
-          <a:bodyPr rtlCol="0" anchor="ctr" wrap="none" lIns="0" rIns="0" tIns="0" bIns="0"/>
-          <a:lstStyle/>
-          <a:p>
-            <a:pPr algn="ctr">
-              <a:lnSpc>
-                <a:spcPct val="100000"/>
-              </a:lnSpc>
-            </a:pPr>
-            <a:r>
-              <a:rPr sz="1150" b="0" i="0">
-                <a:solidFill>
-                  <a:srgbClr val="9A7440"/>
-                </a:solidFill>
-                <a:latin typeface="Pretendard SemiBold"/>
-                <a:ea typeface="Pretendard SemiBold"/>
-              </a:rPr>
-              <a:t>3부</a:t>
-            </a:r>
-          </a:p>
-        </p:txBody>
-      </p:sp>
-      <p:sp>
-        <p:nvSpPr>
-          <p:cNvPr id="6" name="TextBox 5"/>
-          <p:cNvSpPr txBox="1"/>
-          <p:nvPr/>
-        </p:nvSpPr>
-        <p:spPr>
-          <a:xfrm>
-            <a:off x="822960" y="2743200"/>
-            <a:ext cx="6949440" cy="2468880"/>
-          </a:xfrm>
-          <a:prstGeom prst="rect">
-            <a:avLst/>
-          </a:prstGeom>
-          <a:noFill/>
-        </p:spPr>
-        <p:txBody>
-          <a:bodyPr wrap="square" lIns="0" rIns="0" tIns="0" bIns="0">
-            <a:spAutoFit/>
-          </a:bodyPr>
-          <a:lstStyle/>
-          <a:p>
-            <a:pPr algn="l">
-              <a:lnSpc>
-                <a:spcPct val="132000"/>
-              </a:lnSpc>
-            </a:pPr>
-            <a:r>
-              <a:rPr sz="3200" b="1" i="0">
-                <a:solidFill>
-                  <a:srgbClr val="1D2735"/>
-                </a:solidFill>
-                <a:latin typeface="Noto Serif KR"/>
-                <a:ea typeface="Noto Serif KR"/>
-              </a:rPr>
-              <a:t>두 서비스</a:t>
-            </a:r>
-          </a:p>
-          <a:p>
-            <a:pPr algn="l">
-              <a:lnSpc>
-                <a:spcPct val="132000"/>
-              </a:lnSpc>
-            </a:pPr>
-            <a:r>
-              <a:rPr sz="3200" b="1" i="0">
-                <a:solidFill>
-                  <a:srgbClr val="1D2735"/>
-                </a:solidFill>
-                <a:latin typeface="Noto Serif KR"/>
-                <a:ea typeface="Noto Serif KR"/>
-              </a:rPr>
-              <a:t>연결</a:t>
-            </a:r>
-          </a:p>
-          <a:p>
-            <a:pPr algn="l">
-              <a:lnSpc>
-                <a:spcPct val="145000"/>
-              </a:lnSpc>
-              <a:spcBef>
-                <a:spcPts val="1400"/>
-              </a:spcBef>
-            </a:pPr>
-            <a:r>
-              <a:rPr sz="1300" b="0" i="0">
-                <a:solidFill>
-                  <a:srgbClr val="455569"/>
-                </a:solidFill>
-                <a:latin typeface="Pretendard"/>
-                <a:ea typeface="Pretendard"/>
-              </a:rPr>
-              <a:t>프리캔버스와 검색마스터를 오가며 쓰는 방법입니다.</a:t>
-            </a:r>
-          </a:p>
-        </p:txBody>
-      </p:sp>
-    </p:spTree>
-  </p:cSld>
-  <p:clrMapOvr>
-    <a:masterClrMapping/>
-  </p:clrMapOvr>
-</p:sld>
-</file>
-
-<file path=ppt/slides/slide17.xml><?xml version="1.0" encoding="utf-8"?>
-<p:sld xmlns:a="http://schemas.openxmlformats.org/drawingml/2006/main" xmlns:p="http://schemas.openxmlformats.org/presentationml/2006/main" xmlns:r="http://schemas.openxmlformats.org/officeDocument/2006/relationships">
-  <p:cSld>
-    <p:spTree>
-      <p:nvGrpSpPr>
-        <p:cNvPr id="1" name=""/>
-        <p:cNvGrpSpPr/>
-        <p:nvPr/>
-      </p:nvGrpSpPr>
-      <p:grpSpPr/>
-      <p:sp>
-        <p:nvSpPr>
-          <p:cNvPr id="2" name="Rectangle 1"/>
-          <p:cNvSpPr/>
-          <p:nvPr/>
-        </p:nvSpPr>
-        <p:spPr>
-          <a:xfrm>
-            <a:off x="0" y="0"/>
-            <a:ext cx="12191695" cy="6858000"/>
-          </a:xfrm>
-          <a:prstGeom prst="rect">
-            <a:avLst/>
-          </a:prstGeom>
-          <a:solidFill>
-            <a:srgbClr val="FFFDF9"/>
-          </a:solidFill>
-          <a:ln>
-            <a:noFill/>
-          </a:ln>
-          <a:effectLst/>
-        </p:spPr>
-        <p:style>
-          <a:lnRef idx="1">
-            <a:schemeClr val="accent1"/>
-          </a:lnRef>
-          <a:fillRef idx="3">
-            <a:schemeClr val="accent1"/>
-          </a:fillRef>
-          <a:effectRef idx="2">
-            <a:schemeClr val="accent1"/>
-          </a:effectRef>
-          <a:fontRef idx="minor">
-            <a:schemeClr val="lt1"/>
-          </a:fontRef>
-        </p:style>
-        <p:txBody>
-          <a:bodyPr rtlCol="0" anchor="ctr"/>
-          <a:lstStyle/>
-          <a:p>
-            <a:pPr algn="ctr"/>
-          </a:p>
-        </p:txBody>
-      </p:sp>
-      <p:sp>
-        <p:nvSpPr>
-          <p:cNvPr id="3" name="Rectangle 2"/>
-          <p:cNvSpPr/>
-          <p:nvPr/>
-        </p:nvSpPr>
-        <p:spPr>
-          <a:xfrm>
-            <a:off x="0" y="0"/>
-            <a:ext cx="12191695" cy="45720"/>
-          </a:xfrm>
-          <a:prstGeom prst="rect">
-            <a:avLst/>
-          </a:prstGeom>
-          <a:solidFill>
-            <a:srgbClr val="173F54"/>
-          </a:solidFill>
-          <a:ln>
-            <a:noFill/>
-          </a:ln>
-          <a:effectLst/>
-        </p:spPr>
-        <p:style>
-          <a:lnRef idx="1">
-            <a:schemeClr val="accent1"/>
-          </a:lnRef>
-          <a:fillRef idx="3">
-            <a:schemeClr val="accent1"/>
-          </a:fillRef>
-          <a:effectRef idx="2">
-            <a:schemeClr val="accent1"/>
-          </a:effectRef>
-          <a:fontRef idx="minor">
-            <a:schemeClr val="lt1"/>
-          </a:fontRef>
-        </p:style>
-        <p:txBody>
-          <a:bodyPr rtlCol="0" anchor="ctr"/>
-          <a:lstStyle/>
-          <a:p>
-            <a:pPr algn="ctr"/>
-          </a:p>
-        </p:txBody>
-      </p:sp>
-      <p:sp>
-        <p:nvSpPr>
-          <p:cNvPr id="4" name="Rectangle 3"/>
-          <p:cNvSpPr/>
-          <p:nvPr/>
-        </p:nvSpPr>
-        <p:spPr>
-          <a:xfrm>
-            <a:off x="822960" y="644652"/>
-            <a:ext cx="384048" cy="16459"/>
-          </a:xfrm>
-          <a:prstGeom prst="rect">
-            <a:avLst/>
-          </a:prstGeom>
-          <a:solidFill>
-            <a:srgbClr val="9A7440"/>
-          </a:solidFill>
-          <a:ln>
-            <a:noFill/>
-          </a:ln>
-          <a:effectLst/>
-        </p:spPr>
-        <p:style>
-          <a:lnRef idx="1">
-            <a:schemeClr val="accent1"/>
-          </a:lnRef>
-          <a:fillRef idx="3">
-            <a:schemeClr val="accent1"/>
-          </a:fillRef>
-          <a:effectRef idx="2">
-            <a:schemeClr val="accent1"/>
-          </a:effectRef>
-          <a:fontRef idx="minor">
-            <a:schemeClr val="lt1"/>
-          </a:fontRef>
-        </p:style>
-        <p:txBody>
-          <a:bodyPr rtlCol="0" anchor="ctr"/>
-          <a:lstStyle/>
-          <a:p>
-            <a:pPr algn="ctr"/>
-          </a:p>
-        </p:txBody>
-      </p:sp>
-      <p:sp>
-        <p:nvSpPr>
-          <p:cNvPr id="5" name="TextBox 4"/>
-          <p:cNvSpPr txBox="1"/>
-          <p:nvPr/>
-        </p:nvSpPr>
-        <p:spPr>
-          <a:xfrm>
-            <a:off x="1325880" y="566928"/>
-            <a:ext cx="8686800" cy="274320"/>
-          </a:xfrm>
-          <a:prstGeom prst="rect">
-            <a:avLst/>
-          </a:prstGeom>
-          <a:noFill/>
-        </p:spPr>
-        <p:txBody>
-          <a:bodyPr wrap="square" lIns="0" rIns="0" tIns="0" bIns="0">
-            <a:spAutoFit/>
-          </a:bodyPr>
-          <a:lstStyle/>
-          <a:p>
-            <a:pPr algn="l">
-              <a:lnSpc>
-                <a:spcPct val="100000"/>
-              </a:lnSpc>
-            </a:pPr>
-            <a:r>
-              <a:rPr sz="1050" b="0" i="0" spc="190">
-                <a:solidFill>
-                  <a:srgbClr val="1F5068"/>
-                </a:solidFill>
-                <a:latin typeface="Pretendard ExtraBold"/>
-                <a:ea typeface="Pretendard ExtraBold"/>
-              </a:rPr>
-              <a:t>두 서비스 연결</a:t>
-            </a:r>
-          </a:p>
-        </p:txBody>
-      </p:sp>
-      <p:sp>
-        <p:nvSpPr>
-          <p:cNvPr id="6" name="TextBox 5"/>
-          <p:cNvSpPr txBox="1"/>
-          <p:nvPr/>
-        </p:nvSpPr>
-        <p:spPr>
-          <a:xfrm>
-            <a:off x="822960" y="960120"/>
-            <a:ext cx="10515600" cy="566928"/>
-          </a:xfrm>
-          <a:prstGeom prst="rect">
-            <a:avLst/>
-          </a:prstGeom>
-          <a:noFill/>
-        </p:spPr>
-        <p:txBody>
-          <a:bodyPr wrap="square" lIns="0" rIns="0" tIns="0" bIns="0">
-            <a:spAutoFit/>
-          </a:bodyPr>
-          <a:lstStyle/>
-          <a:p>
-            <a:pPr algn="ctr">
-              <a:lnSpc>
-                <a:spcPct val="100000"/>
-              </a:lnSpc>
-            </a:pPr>
-            <a:r>
-              <a:rPr sz="2200" b="1" i="0">
-                <a:solidFill>
-                  <a:srgbClr val="1D2735"/>
-                </a:solidFill>
-                <a:latin typeface="Noto Serif KR"/>
-                <a:ea typeface="Noto Serif KR"/>
-              </a:rPr>
-              <a:t>프리캔버스 상단 메뉴에서 </a:t>
-            </a:r>
-            <a:r>
-              <a:rPr sz="2200" b="1" i="0">
-                <a:solidFill>
-                  <a:srgbClr val="1F5068"/>
-                </a:solidFill>
-                <a:latin typeface="Noto Serif KR"/>
-                <a:ea typeface="Noto Serif KR"/>
-              </a:rPr>
-              <a:t>검색마스터</a:t>
-            </a:r>
-            <a:r>
-              <a:rPr sz="2200" b="1" i="0">
-                <a:solidFill>
-                  <a:srgbClr val="1D2735"/>
-                </a:solidFill>
-                <a:latin typeface="Noto Serif KR"/>
-                <a:ea typeface="Noto Serif KR"/>
-              </a:rPr>
-              <a:t>로 바로 이동합니다.</a:t>
-            </a:r>
-          </a:p>
-        </p:txBody>
-      </p:sp>
-      <p:pic>
-        <p:nvPicPr>
-          <p:cNvPr id="7" name="Picture 6" descr="fc_nav.jpg"/>
-          <p:cNvPicPr>
-            <a:picLocks noChangeAspect="1"/>
-          </p:cNvPicPr>
-          <p:nvPr/>
-        </p:nvPicPr>
-        <p:blipFill>
-          <a:blip r:embed="rId2"/>
-          <a:stretch>
-            <a:fillRect/>
-          </a:stretch>
-        </p:blipFill>
-        <p:spPr>
-          <a:xfrm>
-            <a:off x="1097280" y="1783080"/>
-            <a:ext cx="9994392" cy="616321"/>
-          </a:xfrm>
-          <a:prstGeom prst="rect">
-            <a:avLst/>
-          </a:prstGeom>
-          <a:ln w="12700">
-            <a:solidFill>
-              <a:srgbClr val="DAD2C6"/>
-            </a:solidFill>
-          </a:ln>
-          <a:effectLst/>
-          <a:effectLst>
-            <a:outerShdw blurRad="170000" dist="50000" dir="5400000" rotWithShape="0">
-              <a:srgbClr val="16241C">
-                <a:alpha val="30000"/>
-              </a:srgbClr>
-            </a:outerShdw>
-          </a:effectLst>
-        </p:spPr>
-      </p:pic>
-      <p:sp>
-        <p:nvSpPr>
-          <p:cNvPr id="8" name="Oval 7"/>
-          <p:cNvSpPr/>
-          <p:nvPr/>
-        </p:nvSpPr>
-        <p:spPr>
-          <a:xfrm>
-            <a:off x="6014520" y="1732788"/>
-            <a:ext cx="929478" cy="716904"/>
-          </a:xfrm>
-          <a:prstGeom prst="ellipse">
-            <a:avLst/>
-          </a:prstGeom>
-          <a:noFill/>
-          <a:ln w="28575">
-            <a:solidFill>
-              <a:srgbClr val="1F5068"/>
-            </a:solidFill>
-          </a:ln>
-          <a:effectLst/>
-        </p:spPr>
-        <p:style>
-          <a:lnRef idx="1">
-            <a:schemeClr val="accent1"/>
-          </a:lnRef>
-          <a:fillRef idx="3">
-            <a:schemeClr val="accent1"/>
-          </a:fillRef>
-          <a:effectRef idx="2">
-            <a:schemeClr val="accent1"/>
-          </a:effectRef>
-          <a:fontRef idx="minor">
-            <a:schemeClr val="lt1"/>
-          </a:fontRef>
-        </p:style>
-        <p:txBody>
-          <a:bodyPr rtlCol="0" anchor="ctr"/>
-          <a:lstStyle/>
-          <a:p>
-            <a:pPr algn="ctr"/>
-          </a:p>
-        </p:txBody>
-      </p:sp>
-      <p:sp>
-        <p:nvSpPr>
-          <p:cNvPr id="9" name="TextBox 8"/>
-          <p:cNvSpPr txBox="1"/>
-          <p:nvPr/>
-        </p:nvSpPr>
-        <p:spPr>
-          <a:xfrm>
-            <a:off x="822960" y="2527416"/>
-            <a:ext cx="10543032" cy="256032"/>
-          </a:xfrm>
-          <a:prstGeom prst="rect">
-            <a:avLst/>
-          </a:prstGeom>
-          <a:noFill/>
-        </p:spPr>
-        <p:txBody>
-          <a:bodyPr wrap="square" lIns="0" rIns="0" tIns="0" bIns="0">
-            <a:spAutoFit/>
-          </a:bodyPr>
-          <a:lstStyle/>
-          <a:p>
-            <a:pPr algn="ctr">
-              <a:lnSpc>
-                <a:spcPct val="100000"/>
-              </a:lnSpc>
-            </a:pPr>
-            <a:r>
-              <a:rPr sz="950" b="0" i="0">
-                <a:solidFill>
-                  <a:srgbClr val="1F5068"/>
-                </a:solidFill>
-                <a:latin typeface="Pretendard ExtraBold"/>
-                <a:ea typeface="Pretendard ExtraBold"/>
-              </a:rPr>
-              <a:t>프리캔버스 상단 메뉴 속 「검색마스터」 — 실제 화면</a:t>
-            </a:r>
-          </a:p>
-        </p:txBody>
-      </p:sp>
-      <p:sp>
-        <p:nvSpPr>
-          <p:cNvPr id="10" name="Rounded Rectangle 9"/>
-          <p:cNvSpPr/>
-          <p:nvPr/>
-        </p:nvSpPr>
-        <p:spPr>
-          <a:xfrm>
-            <a:off x="1188720" y="3291840"/>
-            <a:ext cx="4206240" cy="1371600"/>
-          </a:xfrm>
-          <a:prstGeom prst="roundRect">
-            <a:avLst>
-              <a:gd name="adj" fmla="val 10000"/>
-            </a:avLst>
-          </a:prstGeom>
-          <a:solidFill>
-            <a:srgbClr val="FFFDF7"/>
-          </a:solidFill>
-          <a:ln w="9525">
-            <a:solidFill>
-              <a:srgbClr val="DAD2C6"/>
-            </a:solidFill>
-          </a:ln>
-          <a:effectLst/>
-          <a:effectLst>
-            <a:outerShdw blurRad="170000" dist="50000" dir="5400000" rotWithShape="0">
-              <a:srgbClr val="16241C">
-                <a:alpha val="30000"/>
-              </a:srgbClr>
-            </a:outerShdw>
-          </a:effectLst>
-        </p:spPr>
-        <p:style>
-          <a:lnRef idx="1">
-            <a:schemeClr val="accent1"/>
-          </a:lnRef>
-          <a:fillRef idx="3">
-            <a:schemeClr val="accent1"/>
-          </a:fillRef>
-          <a:effectRef idx="2">
-            <a:schemeClr val="accent1"/>
-          </a:effectRef>
-          <a:fontRef idx="minor">
-            <a:schemeClr val="lt1"/>
-          </a:fontRef>
-        </p:style>
-        <p:txBody>
-          <a:bodyPr rtlCol="0" anchor="ctr"/>
-          <a:lstStyle/>
-          <a:p>
-            <a:pPr algn="ctr"/>
-          </a:p>
-        </p:txBody>
-      </p:sp>
-      <p:sp>
-        <p:nvSpPr>
-          <p:cNvPr id="11" name="TextBox 10"/>
-          <p:cNvSpPr txBox="1"/>
-          <p:nvPr/>
-        </p:nvSpPr>
-        <p:spPr>
-          <a:xfrm>
-            <a:off x="1481328" y="3529584"/>
-            <a:ext cx="3611880" cy="960120"/>
-          </a:xfrm>
-          <a:prstGeom prst="rect">
-            <a:avLst/>
-          </a:prstGeom>
-          <a:noFill/>
-        </p:spPr>
-        <p:txBody>
-          <a:bodyPr wrap="square" lIns="0" rIns="0" tIns="0" bIns="0">
-            <a:spAutoFit/>
-          </a:bodyPr>
-          <a:lstStyle/>
-          <a:p>
-            <a:pPr algn="l">
-              <a:lnSpc>
-                <a:spcPct val="100000"/>
-              </a:lnSpc>
-              <a:spcAft>
-                <a:spcPts val="500"/>
-              </a:spcAft>
-            </a:pPr>
-            <a:r>
-              <a:rPr sz="1450" b="1" i="0">
-                <a:solidFill>
-                  <a:srgbClr val="1D2735"/>
-                </a:solidFill>
-                <a:latin typeface="Noto Serif KR"/>
-                <a:ea typeface="Noto Serif KR"/>
-              </a:rPr>
-              <a:t>프리캔버스에서 작업하다가</a:t>
-            </a:r>
-          </a:p>
-          <a:p>
-            <a:pPr algn="l">
-              <a:lnSpc>
-                <a:spcPct val="130000"/>
-              </a:lnSpc>
-            </a:pPr>
-            <a:r>
-              <a:rPr sz="1100" b="0" i="0">
-                <a:solidFill>
-                  <a:srgbClr val="28364A"/>
-                </a:solidFill>
-                <a:latin typeface="Pretendard"/>
-                <a:ea typeface="Pretendard"/>
-              </a:rPr>
-              <a:t>상세페이지를 만들다 상품명이나 키워드가 필요해지면,</a:t>
-            </a:r>
-          </a:p>
-        </p:txBody>
-      </p:sp>
-      <p:sp>
-        <p:nvSpPr>
-          <p:cNvPr id="12" name="TextBox 11"/>
-          <p:cNvSpPr txBox="1"/>
-          <p:nvPr/>
-        </p:nvSpPr>
-        <p:spPr>
-          <a:xfrm>
-            <a:off x="5577840" y="3566160"/>
-            <a:ext cx="1051560" cy="868680"/>
-          </a:xfrm>
-          <a:prstGeom prst="rect">
-            <a:avLst/>
-          </a:prstGeom>
-          <a:noFill/>
-        </p:spPr>
-        <p:txBody>
-          <a:bodyPr wrap="square" lIns="0" rIns="0" tIns="0" bIns="0">
-            <a:spAutoFit/>
-          </a:bodyPr>
-          <a:lstStyle/>
-          <a:p>
-            <a:pPr algn="ctr">
-              <a:lnSpc>
-                <a:spcPct val="100000"/>
-              </a:lnSpc>
-              <a:spcAft>
-                <a:spcPts val="300"/>
-              </a:spcAft>
-            </a:pPr>
-            <a:r>
-              <a:rPr sz="2400" b="1" i="0">
-                <a:solidFill>
-                  <a:srgbClr val="9A7440"/>
-                </a:solidFill>
-                <a:latin typeface="Pretendard"/>
-                <a:ea typeface="Pretendard"/>
-              </a:rPr>
-              <a:t>→</a:t>
-            </a:r>
-          </a:p>
-          <a:p>
-            <a:pPr algn="ctr">
-              <a:lnSpc>
-                <a:spcPct val="100000"/>
-              </a:lnSpc>
-            </a:pPr>
-            <a:r>
-              <a:rPr sz="950" b="0" i="0">
-                <a:solidFill>
-                  <a:srgbClr val="7D5E33"/>
-                </a:solidFill>
-                <a:latin typeface="Pretendard ExtraBold"/>
-                <a:ea typeface="Pretendard ExtraBold"/>
-              </a:rPr>
-              <a:t>버튼 한 번</a:t>
-            </a:r>
-          </a:p>
-        </p:txBody>
-      </p:sp>
-      <p:sp>
-        <p:nvSpPr>
-          <p:cNvPr id="13" name="Rounded Rectangle 12"/>
-          <p:cNvSpPr/>
-          <p:nvPr/>
-        </p:nvSpPr>
-        <p:spPr>
-          <a:xfrm>
-            <a:off x="6812280" y="3291840"/>
-            <a:ext cx="4206240" cy="1371600"/>
-          </a:xfrm>
-          <a:prstGeom prst="roundRect">
-            <a:avLst>
-              <a:gd name="adj" fmla="val 10000"/>
-            </a:avLst>
-          </a:prstGeom>
-          <a:solidFill>
-            <a:srgbClr val="F4F8FA"/>
-          </a:solidFill>
-          <a:ln w="9525">
-            <a:solidFill>
-              <a:srgbClr val="D8E3EA"/>
-            </a:solidFill>
-          </a:ln>
-          <a:effectLst/>
-          <a:effectLst>
-            <a:outerShdw blurRad="170000" dist="50000" dir="5400000" rotWithShape="0">
-              <a:srgbClr val="16241C">
-                <a:alpha val="30000"/>
-              </a:srgbClr>
-            </a:outerShdw>
-          </a:effectLst>
-        </p:spPr>
-        <p:style>
-          <a:lnRef idx="1">
-            <a:schemeClr val="accent1"/>
-          </a:lnRef>
-          <a:fillRef idx="3">
-            <a:schemeClr val="accent1"/>
-          </a:fillRef>
-          <a:effectRef idx="2">
-            <a:schemeClr val="accent1"/>
-          </a:effectRef>
-          <a:fontRef idx="minor">
-            <a:schemeClr val="lt1"/>
-          </a:fontRef>
-        </p:style>
-        <p:txBody>
-          <a:bodyPr rtlCol="0" anchor="ctr"/>
-          <a:lstStyle/>
-          <a:p>
-            <a:pPr algn="ctr"/>
-          </a:p>
-        </p:txBody>
-      </p:sp>
-      <p:sp>
-        <p:nvSpPr>
-          <p:cNvPr id="14" name="TextBox 13"/>
-          <p:cNvSpPr txBox="1"/>
-          <p:nvPr/>
-        </p:nvSpPr>
-        <p:spPr>
-          <a:xfrm>
-            <a:off x="7104888" y="3529584"/>
-            <a:ext cx="3611880" cy="960120"/>
-          </a:xfrm>
-          <a:prstGeom prst="rect">
-            <a:avLst/>
-          </a:prstGeom>
-          <a:noFill/>
-        </p:spPr>
-        <p:txBody>
-          <a:bodyPr wrap="square" lIns="0" rIns="0" tIns="0" bIns="0">
-            <a:spAutoFit/>
-          </a:bodyPr>
-          <a:lstStyle/>
-          <a:p>
-            <a:pPr algn="l">
-              <a:lnSpc>
-                <a:spcPct val="100000"/>
-              </a:lnSpc>
-              <a:spcAft>
-                <a:spcPts val="500"/>
-              </a:spcAft>
-            </a:pPr>
-            <a:r>
-              <a:rPr sz="1450" b="1" i="0">
-                <a:solidFill>
-                  <a:srgbClr val="1D2735"/>
-                </a:solidFill>
-                <a:latin typeface="Noto Serif KR"/>
-                <a:ea typeface="Noto Serif KR"/>
-              </a:rPr>
-              <a:t>검색마스터가 새 탭으로</a:t>
-            </a:r>
-          </a:p>
-          <a:p>
-            <a:pPr algn="l">
-              <a:lnSpc>
-                <a:spcPct val="130000"/>
-              </a:lnSpc>
-            </a:pPr>
-            <a:r>
-              <a:rPr sz="1100" b="0" i="0">
-                <a:solidFill>
-                  <a:srgbClr val="28364A"/>
-                </a:solidFill>
-                <a:latin typeface="Pretendard"/>
-                <a:ea typeface="Pretendard"/>
-              </a:rPr>
-              <a:t>쓰던 구글 계정 그대로 열립니다. 다시 로그인할 필요가 없습니다.</a:t>
-            </a:r>
-          </a:p>
-        </p:txBody>
-      </p:sp>
-      <p:sp>
-        <p:nvSpPr>
-          <p:cNvPr id="15" name="Rounded Rectangle 14"/>
-          <p:cNvSpPr/>
-          <p:nvPr/>
-        </p:nvSpPr>
-        <p:spPr>
-          <a:xfrm>
-            <a:off x="3063240" y="5230368"/>
-            <a:ext cx="1691640" cy="384048"/>
-          </a:xfrm>
-          <a:prstGeom prst="roundRect">
-            <a:avLst>
-              <a:gd name="adj" fmla="val 50000"/>
-            </a:avLst>
-          </a:prstGeom>
-          <a:solidFill>
-            <a:srgbClr val="FFFFFF"/>
-          </a:solidFill>
-          <a:ln w="9525">
-            <a:solidFill>
-              <a:srgbClr val="DAD2C6"/>
-            </a:solidFill>
-          </a:ln>
-          <a:effectLst/>
-        </p:spPr>
-        <p:style>
-          <a:lnRef idx="1">
-            <a:schemeClr val="accent1"/>
-          </a:lnRef>
-          <a:fillRef idx="3">
-            <a:schemeClr val="accent1"/>
-          </a:fillRef>
-          <a:effectRef idx="2">
-            <a:schemeClr val="accent1"/>
-          </a:effectRef>
-          <a:fontRef idx="minor">
-            <a:schemeClr val="lt1"/>
-          </a:fontRef>
-        </p:style>
-        <p:txBody>
-          <a:bodyPr rtlCol="0" anchor="ctr" wrap="none" lIns="0" rIns="0" tIns="0" bIns="0"/>
-          <a:lstStyle/>
-          <a:p>
-            <a:pPr algn="ctr">
-              <a:lnSpc>
-                <a:spcPct val="100000"/>
-              </a:lnSpc>
-            </a:pPr>
-            <a:r>
-              <a:rPr sz="1050" b="0" i="0">
-                <a:solidFill>
-                  <a:srgbClr val="1D2735"/>
-                </a:solidFill>
-                <a:latin typeface="Pretendard SemiBold"/>
-                <a:ea typeface="Pretendard SemiBold"/>
-              </a:rPr>
-              <a:t>● 하나의 구글 계정</a:t>
-            </a:r>
-          </a:p>
-        </p:txBody>
-      </p:sp>
-      <p:sp>
-        <p:nvSpPr>
-          <p:cNvPr id="16" name="TextBox 15"/>
-          <p:cNvSpPr txBox="1"/>
-          <p:nvPr/>
-        </p:nvSpPr>
-        <p:spPr>
-          <a:xfrm>
-            <a:off x="4864608" y="5330952"/>
-            <a:ext cx="5120640" cy="274320"/>
-          </a:xfrm>
-          <a:prstGeom prst="rect">
-            <a:avLst/>
-          </a:prstGeom>
-          <a:noFill/>
-        </p:spPr>
-        <p:txBody>
-          <a:bodyPr wrap="square" lIns="0" rIns="0" tIns="0" bIns="0">
-            <a:spAutoFit/>
-          </a:bodyPr>
-          <a:lstStyle/>
-          <a:p>
-            <a:pPr algn="l">
-              <a:lnSpc>
-                <a:spcPct val="100000"/>
-              </a:lnSpc>
-            </a:pPr>
-            <a:r>
-              <a:rPr sz="1050" b="0" i="0">
-                <a:solidFill>
-                  <a:srgbClr val="455569"/>
-                </a:solidFill>
-                <a:latin typeface="Pretendard"/>
-                <a:ea typeface="Pretendard"/>
-              </a:rPr>
-              <a:t>으로 두 서비스를 오갑니다. 구독은 서비스별로 따로 적용됩니다.</a:t>
-            </a:r>
-          </a:p>
-        </p:txBody>
-      </p:sp>
-      <p:sp>
-        <p:nvSpPr>
-          <p:cNvPr id="17" name="Rounded Rectangle 16"/>
-          <p:cNvSpPr/>
-          <p:nvPr/>
-        </p:nvSpPr>
-        <p:spPr>
-          <a:xfrm>
-            <a:off x="502920" y="6355080"/>
-            <a:ext cx="868680" cy="329184"/>
-          </a:xfrm>
-          <a:prstGeom prst="roundRect">
-            <a:avLst>
-              <a:gd name="adj" fmla="val 50000"/>
-            </a:avLst>
-          </a:prstGeom>
-          <a:solidFill>
-            <a:srgbClr val="FFFFFF"/>
-          </a:solidFill>
-          <a:ln w="9525">
-            <a:solidFill>
-              <a:srgbClr val="EBE5DB"/>
-            </a:solidFill>
-          </a:ln>
-          <a:effectLst/>
-        </p:spPr>
-        <p:style>
-          <a:lnRef idx="1">
-            <a:schemeClr val="accent1"/>
-          </a:lnRef>
-          <a:fillRef idx="3">
-            <a:schemeClr val="accent1"/>
-          </a:fillRef>
-          <a:effectRef idx="2">
-            <a:schemeClr val="accent1"/>
-          </a:effectRef>
-          <a:fontRef idx="minor">
-            <a:schemeClr val="lt1"/>
-          </a:fontRef>
-        </p:style>
-        <p:txBody>
-          <a:bodyPr rtlCol="0" anchor="ctr" wrap="none" lIns="0" rIns="0" tIns="0" bIns="0"/>
-          <a:lstStyle/>
-          <a:p>
-            <a:pPr algn="ctr">
-              <a:lnSpc>
-                <a:spcPct val="100000"/>
-              </a:lnSpc>
-            </a:pPr>
-            <a:r>
-              <a:rPr sz="1050" b="0" i="0">
-                <a:solidFill>
-                  <a:srgbClr val="455569"/>
-                </a:solidFill>
-                <a:latin typeface="Pretendard SemiBold"/>
-                <a:ea typeface="Pretendard SemiBold"/>
-              </a:rPr>
-              <a:t>17 / 19</a:t>
-            </a:r>
-          </a:p>
-        </p:txBody>
-      </p:sp>
-    </p:spTree>
-  </p:cSld>
-  <p:clrMapOvr>
-    <a:masterClrMapping/>
-  </p:clrMapOvr>
-</p:sld>
-</file>
-
-<file path=ppt/slides/slide18.xml><?xml version="1.0" encoding="utf-8"?>
-<p:sld xmlns:a="http://schemas.openxmlformats.org/drawingml/2006/main" xmlns:p="http://schemas.openxmlformats.org/presentationml/2006/main" xmlns:r="http://schemas.openxmlformats.org/officeDocument/2006/relationships">
-  <p:cSld>
-    <p:spTree>
-      <p:nvGrpSpPr>
-        <p:cNvPr id="1" name=""/>
-        <p:cNvGrpSpPr/>
-        <p:nvPr/>
-      </p:nvGrpSpPr>
-      <p:grpSpPr/>
-      <p:sp>
-        <p:nvSpPr>
-          <p:cNvPr id="2" name="Rectangle 1"/>
-          <p:cNvSpPr/>
-          <p:nvPr/>
-        </p:nvSpPr>
-        <p:spPr>
-          <a:xfrm>
-            <a:off x="0" y="0"/>
-            <a:ext cx="12191695" cy="6858000"/>
-          </a:xfrm>
-          <a:prstGeom prst="rect">
-            <a:avLst/>
-          </a:prstGeom>
-          <a:solidFill>
-            <a:srgbClr val="FFFDF9"/>
-          </a:solidFill>
-          <a:ln>
-            <a:noFill/>
-          </a:ln>
-          <a:effectLst/>
-        </p:spPr>
-        <p:style>
-          <a:lnRef idx="1">
-            <a:schemeClr val="accent1"/>
-          </a:lnRef>
-          <a:fillRef idx="3">
-            <a:schemeClr val="accent1"/>
-          </a:fillRef>
-          <a:effectRef idx="2">
-            <a:schemeClr val="accent1"/>
-          </a:effectRef>
-          <a:fontRef idx="minor">
-            <a:schemeClr val="lt1"/>
-          </a:fontRef>
-        </p:style>
-        <p:txBody>
-          <a:bodyPr rtlCol="0" anchor="ctr"/>
-          <a:lstStyle/>
-          <a:p>
-            <a:pPr algn="ctr"/>
-          </a:p>
-        </p:txBody>
-      </p:sp>
-      <p:sp>
-        <p:nvSpPr>
-          <p:cNvPr id="3" name="Rectangle 2"/>
-          <p:cNvSpPr/>
-          <p:nvPr/>
-        </p:nvSpPr>
-        <p:spPr>
-          <a:xfrm>
-            <a:off x="0" y="0"/>
-            <a:ext cx="12191695" cy="45720"/>
-          </a:xfrm>
-          <a:prstGeom prst="rect">
-            <a:avLst/>
-          </a:prstGeom>
-          <a:solidFill>
-            <a:srgbClr val="173F54"/>
-          </a:solidFill>
-          <a:ln>
-            <a:noFill/>
-          </a:ln>
-          <a:effectLst/>
-        </p:spPr>
-        <p:style>
-          <a:lnRef idx="1">
-            <a:schemeClr val="accent1"/>
-          </a:lnRef>
-          <a:fillRef idx="3">
-            <a:schemeClr val="accent1"/>
-          </a:fillRef>
-          <a:effectRef idx="2">
-            <a:schemeClr val="accent1"/>
-          </a:effectRef>
-          <a:fontRef idx="minor">
-            <a:schemeClr val="lt1"/>
-          </a:fontRef>
-        </p:style>
-        <p:txBody>
-          <a:bodyPr rtlCol="0" anchor="ctr"/>
-          <a:lstStyle/>
-          <a:p>
-            <a:pPr algn="ctr"/>
-          </a:p>
-        </p:txBody>
-      </p:sp>
-      <p:sp>
-        <p:nvSpPr>
-          <p:cNvPr id="4" name="Rectangle 3"/>
-          <p:cNvSpPr/>
-          <p:nvPr/>
-        </p:nvSpPr>
-        <p:spPr>
-          <a:xfrm>
-            <a:off x="822960" y="644652"/>
-            <a:ext cx="384048" cy="16459"/>
-          </a:xfrm>
-          <a:prstGeom prst="rect">
-            <a:avLst/>
-          </a:prstGeom>
-          <a:solidFill>
-            <a:srgbClr val="9A7440"/>
-          </a:solidFill>
-          <a:ln>
-            <a:noFill/>
-          </a:ln>
-          <a:effectLst/>
-        </p:spPr>
-        <p:style>
-          <a:lnRef idx="1">
-            <a:schemeClr val="accent1"/>
-          </a:lnRef>
-          <a:fillRef idx="3">
-            <a:schemeClr val="accent1"/>
-          </a:fillRef>
-          <a:effectRef idx="2">
-            <a:schemeClr val="accent1"/>
-          </a:effectRef>
-          <a:fontRef idx="minor">
-            <a:schemeClr val="lt1"/>
-          </a:fontRef>
-        </p:style>
-        <p:txBody>
-          <a:bodyPr rtlCol="0" anchor="ctr"/>
-          <a:lstStyle/>
-          <a:p>
-            <a:pPr algn="ctr"/>
-          </a:p>
-        </p:txBody>
-      </p:sp>
-      <p:sp>
-        <p:nvSpPr>
-          <p:cNvPr id="5" name="TextBox 4"/>
-          <p:cNvSpPr txBox="1"/>
-          <p:nvPr/>
-        </p:nvSpPr>
-        <p:spPr>
-          <a:xfrm>
-            <a:off x="1325880" y="566928"/>
-            <a:ext cx="8686800" cy="274320"/>
-          </a:xfrm>
-          <a:prstGeom prst="rect">
-            <a:avLst/>
-          </a:prstGeom>
-          <a:noFill/>
-        </p:spPr>
-        <p:txBody>
-          <a:bodyPr wrap="square" lIns="0" rIns="0" tIns="0" bIns="0">
-            <a:spAutoFit/>
-          </a:bodyPr>
-          <a:lstStyle/>
-          <a:p>
-            <a:pPr algn="l">
-              <a:lnSpc>
-                <a:spcPct val="100000"/>
-              </a:lnSpc>
-            </a:pPr>
-            <a:r>
-              <a:rPr sz="1050" b="0" i="0" spc="190">
-                <a:solidFill>
-                  <a:srgbClr val="1F5068"/>
-                </a:solidFill>
-                <a:latin typeface="Pretendard ExtraBold"/>
-                <a:ea typeface="Pretendard ExtraBold"/>
-              </a:rPr>
-              <a:t>실제 작업 순서</a:t>
-            </a:r>
-          </a:p>
-        </p:txBody>
-      </p:sp>
-      <p:sp>
-        <p:nvSpPr>
-          <p:cNvPr id="6" name="TextBox 5"/>
-          <p:cNvSpPr txBox="1"/>
-          <p:nvPr/>
-        </p:nvSpPr>
-        <p:spPr>
-          <a:xfrm>
-            <a:off x="822960" y="960120"/>
-            <a:ext cx="10515600" cy="566928"/>
-          </a:xfrm>
-          <a:prstGeom prst="rect">
-            <a:avLst/>
-          </a:prstGeom>
-          <a:noFill/>
-        </p:spPr>
-        <p:txBody>
-          <a:bodyPr wrap="square" lIns="0" rIns="0" tIns="0" bIns="0">
-            <a:spAutoFit/>
-          </a:bodyPr>
-          <a:lstStyle/>
-          <a:p>
-            <a:pPr algn="l">
-              <a:lnSpc>
-                <a:spcPct val="100000"/>
-              </a:lnSpc>
-            </a:pPr>
-            <a:r>
-              <a:rPr sz="2300" b="1" i="0">
-                <a:solidFill>
-                  <a:srgbClr val="1D2735"/>
-                </a:solidFill>
-                <a:latin typeface="Noto Serif KR"/>
-                <a:ea typeface="Noto Serif KR"/>
-              </a:rPr>
-              <a:t>상품 등록, 이 순서로 하면 됩니다.</a:t>
-            </a:r>
-          </a:p>
-        </p:txBody>
-      </p:sp>
-      <p:sp>
-        <p:nvSpPr>
-          <p:cNvPr id="7" name="Rectangle 6"/>
-          <p:cNvSpPr/>
-          <p:nvPr/>
-        </p:nvSpPr>
-        <p:spPr>
-          <a:xfrm>
-            <a:off x="2269540" y="2194560"/>
-            <a:ext cx="18288" cy="969264"/>
-          </a:xfrm>
-          <a:prstGeom prst="rect">
-            <a:avLst/>
-          </a:prstGeom>
-          <a:solidFill>
-            <a:srgbClr val="DAD2C6"/>
-          </a:solidFill>
-          <a:ln>
-            <a:noFill/>
-          </a:ln>
-          <a:effectLst/>
-        </p:spPr>
-        <p:style>
-          <a:lnRef idx="1">
-            <a:schemeClr val="accent1"/>
-          </a:lnRef>
-          <a:fillRef idx="3">
-            <a:schemeClr val="accent1"/>
-          </a:fillRef>
-          <a:effectRef idx="2">
-            <a:schemeClr val="accent1"/>
-          </a:effectRef>
-          <a:fontRef idx="minor">
-            <a:schemeClr val="lt1"/>
-          </a:fontRef>
-        </p:style>
-        <p:txBody>
-          <a:bodyPr rtlCol="0" anchor="ctr"/>
-          <a:lstStyle/>
-          <a:p>
-            <a:pPr algn="ctr"/>
-          </a:p>
-        </p:txBody>
-      </p:sp>
-      <p:sp>
-        <p:nvSpPr>
-          <p:cNvPr id="8" name="TextBox 7"/>
-          <p:cNvSpPr txBox="1"/>
-          <p:nvPr/>
-        </p:nvSpPr>
-        <p:spPr>
-          <a:xfrm>
-            <a:off x="822960" y="1965960"/>
-            <a:ext cx="1188720" cy="274320"/>
-          </a:xfrm>
-          <a:prstGeom prst="rect">
-            <a:avLst/>
-          </a:prstGeom>
-          <a:noFill/>
-        </p:spPr>
-        <p:txBody>
-          <a:bodyPr wrap="square" lIns="0" rIns="0" tIns="0" bIns="0">
-            <a:spAutoFit/>
-          </a:bodyPr>
-          <a:lstStyle/>
-          <a:p>
-            <a:pPr algn="r">
-              <a:lnSpc>
-                <a:spcPct val="100000"/>
-              </a:lnSpc>
-            </a:pPr>
-            <a:r>
-              <a:rPr sz="1250" b="1" i="0">
-                <a:solidFill>
-                  <a:srgbClr val="7D5E33"/>
-                </a:solidFill>
-                <a:latin typeface="Noto Serif KR"/>
-                <a:ea typeface="Noto Serif KR"/>
-              </a:rPr>
-              <a:t>1단계</a:t>
-            </a:r>
-          </a:p>
-        </p:txBody>
-      </p:sp>
-      <p:sp>
-        <p:nvSpPr>
-          <p:cNvPr id="9" name="Oval 8"/>
-          <p:cNvSpPr/>
-          <p:nvPr/>
-        </p:nvSpPr>
-        <p:spPr>
-          <a:xfrm>
-            <a:off x="2212848" y="1993392"/>
-            <a:ext cx="132588" cy="132588"/>
-          </a:xfrm>
-          <a:prstGeom prst="ellipse">
-            <a:avLst/>
-          </a:prstGeom>
-          <a:solidFill>
-            <a:srgbClr val="9A7440"/>
-          </a:solidFill>
-          <a:ln w="19050">
-            <a:solidFill>
-              <a:srgbClr val="FFFFFF"/>
-            </a:solidFill>
-          </a:ln>
-          <a:effectLst/>
-        </p:spPr>
-        <p:style>
-          <a:lnRef idx="1">
-            <a:schemeClr val="accent1"/>
-          </a:lnRef>
-          <a:fillRef idx="3">
-            <a:schemeClr val="accent1"/>
-          </a:fillRef>
-          <a:effectRef idx="2">
-            <a:schemeClr val="accent1"/>
-          </a:effectRef>
-          <a:fontRef idx="minor">
-            <a:schemeClr val="lt1"/>
-          </a:fontRef>
-        </p:style>
-        <p:txBody>
-          <a:bodyPr rtlCol="0" anchor="ctr"/>
-          <a:lstStyle/>
-          <a:p>
-            <a:pPr algn="ctr"/>
-          </a:p>
-        </p:txBody>
-      </p:sp>
-      <p:sp>
-        <p:nvSpPr>
-          <p:cNvPr id="10" name="Rounded Rectangle 9"/>
-          <p:cNvSpPr/>
-          <p:nvPr/>
-        </p:nvSpPr>
-        <p:spPr>
-          <a:xfrm>
-            <a:off x="2606040" y="1920240"/>
-            <a:ext cx="1024128" cy="256032"/>
-          </a:xfrm>
-          <a:prstGeom prst="roundRect">
-            <a:avLst>
-              <a:gd name="adj" fmla="val 50000"/>
-            </a:avLst>
-          </a:prstGeom>
-          <a:solidFill>
-            <a:srgbClr val="F6EFE5"/>
-          </a:solidFill>
-          <a:ln>
-            <a:noFill/>
-          </a:ln>
-          <a:effectLst/>
-        </p:spPr>
-        <p:style>
-          <a:lnRef idx="1">
-            <a:schemeClr val="accent1"/>
-          </a:lnRef>
-          <a:fillRef idx="3">
-            <a:schemeClr val="accent1"/>
-          </a:fillRef>
-          <a:effectRef idx="2">
-            <a:schemeClr val="accent1"/>
-          </a:effectRef>
-          <a:fontRef idx="minor">
-            <a:schemeClr val="lt1"/>
-          </a:fontRef>
-        </p:style>
-        <p:txBody>
-          <a:bodyPr rtlCol="0" anchor="ctr" wrap="none" lIns="0" rIns="0" tIns="0" bIns="0"/>
-          <a:lstStyle/>
-          <a:p>
-            <a:pPr algn="ctr">
-              <a:lnSpc>
-                <a:spcPct val="100000"/>
-              </a:lnSpc>
-            </a:pPr>
-            <a:r>
-              <a:rPr sz="900" b="0" i="0">
-                <a:solidFill>
-                  <a:srgbClr val="7D5E33"/>
-                </a:solidFill>
-                <a:latin typeface="Pretendard SemiBold"/>
-                <a:ea typeface="Pretendard SemiBold"/>
-              </a:rPr>
-              <a:t>프리캔버스</a:t>
-            </a:r>
-          </a:p>
-        </p:txBody>
-      </p:sp>
-      <p:sp>
-        <p:nvSpPr>
-          <p:cNvPr id="11" name="TextBox 10"/>
-          <p:cNvSpPr txBox="1"/>
-          <p:nvPr/>
-        </p:nvSpPr>
-        <p:spPr>
-          <a:xfrm>
-            <a:off x="2606040" y="2258568"/>
-            <a:ext cx="8595360" cy="658368"/>
-          </a:xfrm>
-          <a:prstGeom prst="rect">
-            <a:avLst/>
-          </a:prstGeom>
-          <a:noFill/>
-        </p:spPr>
-        <p:txBody>
-          <a:bodyPr wrap="square" lIns="0" rIns="0" tIns="0" bIns="0">
-            <a:spAutoFit/>
-          </a:bodyPr>
-          <a:lstStyle/>
-          <a:p>
-            <a:pPr algn="l">
-              <a:lnSpc>
-                <a:spcPct val="100000"/>
-              </a:lnSpc>
-              <a:spcAft>
-                <a:spcPts val="200"/>
-              </a:spcAft>
-            </a:pPr>
-            <a:r>
-              <a:rPr sz="1350" b="0" i="0">
-                <a:solidFill>
-                  <a:srgbClr val="1D2735"/>
-                </a:solidFill>
-                <a:latin typeface="Pretendard ExtraBold"/>
-                <a:ea typeface="Pretendard ExtraBold"/>
-              </a:rPr>
-              <a:t>소싱 링크 붙여넣기</a:t>
-            </a:r>
-          </a:p>
-          <a:p>
-            <a:pPr algn="l">
-              <a:lnSpc>
-                <a:spcPct val="125000"/>
-              </a:lnSpc>
-            </a:pPr>
-            <a:r>
-              <a:rPr sz="1050" b="0" i="0">
-                <a:solidFill>
-                  <a:srgbClr val="455569"/>
-                </a:solidFill>
-                <a:latin typeface="Pretendard"/>
-                <a:ea typeface="Pretendard"/>
-              </a:rPr>
-              <a:t>스마트스토어·1688 상품 주소로 이미지와 상품 정보를 가져옵니다.</a:t>
-            </a:r>
-          </a:p>
-        </p:txBody>
-      </p:sp>
-      <p:sp>
-        <p:nvSpPr>
-          <p:cNvPr id="12" name="Rectangle 11"/>
-          <p:cNvSpPr/>
-          <p:nvPr/>
-        </p:nvSpPr>
-        <p:spPr>
-          <a:xfrm>
-            <a:off x="2269540" y="3273552"/>
-            <a:ext cx="18288" cy="969264"/>
-          </a:xfrm>
-          <a:prstGeom prst="rect">
-            <a:avLst/>
-          </a:prstGeom>
-          <a:solidFill>
-            <a:srgbClr val="DAD2C6"/>
-          </a:solidFill>
-          <a:ln>
-            <a:noFill/>
-          </a:ln>
-          <a:effectLst/>
-        </p:spPr>
-        <p:style>
-          <a:lnRef idx="1">
-            <a:schemeClr val="accent1"/>
-          </a:lnRef>
-          <a:fillRef idx="3">
-            <a:schemeClr val="accent1"/>
-          </a:fillRef>
-          <a:effectRef idx="2">
-            <a:schemeClr val="accent1"/>
-          </a:effectRef>
-          <a:fontRef idx="minor">
-            <a:schemeClr val="lt1"/>
-          </a:fontRef>
-        </p:style>
-        <p:txBody>
-          <a:bodyPr rtlCol="0" anchor="ctr"/>
-          <a:lstStyle/>
-          <a:p>
-            <a:pPr algn="ctr"/>
-          </a:p>
-        </p:txBody>
-      </p:sp>
-      <p:sp>
-        <p:nvSpPr>
-          <p:cNvPr id="13" name="TextBox 12"/>
-          <p:cNvSpPr txBox="1"/>
-          <p:nvPr/>
-        </p:nvSpPr>
-        <p:spPr>
-          <a:xfrm>
-            <a:off x="822960" y="3044952"/>
-            <a:ext cx="1188720" cy="274320"/>
-          </a:xfrm>
-          <a:prstGeom prst="rect">
-            <a:avLst/>
-          </a:prstGeom>
-          <a:noFill/>
-        </p:spPr>
-        <p:txBody>
-          <a:bodyPr wrap="square" lIns="0" rIns="0" tIns="0" bIns="0">
-            <a:spAutoFit/>
-          </a:bodyPr>
-          <a:lstStyle/>
-          <a:p>
-            <a:pPr algn="r">
-              <a:lnSpc>
-                <a:spcPct val="100000"/>
-              </a:lnSpc>
-            </a:pPr>
-            <a:r>
-              <a:rPr sz="1250" b="1" i="0">
-                <a:solidFill>
-                  <a:srgbClr val="7D5E33"/>
-                </a:solidFill>
-                <a:latin typeface="Noto Serif KR"/>
-                <a:ea typeface="Noto Serif KR"/>
-              </a:rPr>
-              <a:t>2단계</a:t>
-            </a:r>
-          </a:p>
-        </p:txBody>
-      </p:sp>
-      <p:sp>
-        <p:nvSpPr>
-          <p:cNvPr id="14" name="Oval 13"/>
-          <p:cNvSpPr/>
-          <p:nvPr/>
-        </p:nvSpPr>
-        <p:spPr>
-          <a:xfrm>
-            <a:off x="2212848" y="3072384"/>
-            <a:ext cx="132588" cy="132588"/>
-          </a:xfrm>
-          <a:prstGeom prst="ellipse">
-            <a:avLst/>
-          </a:prstGeom>
-          <a:solidFill>
-            <a:srgbClr val="1F5068"/>
-          </a:solidFill>
-          <a:ln w="19050">
-            <a:solidFill>
-              <a:srgbClr val="FFFFFF"/>
-            </a:solidFill>
-          </a:ln>
-          <a:effectLst/>
-        </p:spPr>
-        <p:style>
-          <a:lnRef idx="1">
-            <a:schemeClr val="accent1"/>
-          </a:lnRef>
-          <a:fillRef idx="3">
-            <a:schemeClr val="accent1"/>
-          </a:fillRef>
-          <a:effectRef idx="2">
-            <a:schemeClr val="accent1"/>
-          </a:effectRef>
-          <a:fontRef idx="minor">
-            <a:schemeClr val="lt1"/>
-          </a:fontRef>
-        </p:style>
-        <p:txBody>
-          <a:bodyPr rtlCol="0" anchor="ctr"/>
-          <a:lstStyle/>
-          <a:p>
-            <a:pPr algn="ctr"/>
-          </a:p>
-        </p:txBody>
-      </p:sp>
-      <p:sp>
-        <p:nvSpPr>
-          <p:cNvPr id="15" name="Rounded Rectangle 14"/>
-          <p:cNvSpPr/>
-          <p:nvPr/>
-        </p:nvSpPr>
-        <p:spPr>
-          <a:xfrm>
-            <a:off x="2606040" y="2999232"/>
-            <a:ext cx="1024128" cy="256032"/>
-          </a:xfrm>
-          <a:prstGeom prst="roundRect">
-            <a:avLst>
-              <a:gd name="adj" fmla="val 50000"/>
-            </a:avLst>
-          </a:prstGeom>
-          <a:solidFill>
-            <a:srgbClr val="EAF1F5"/>
-          </a:solidFill>
-          <a:ln>
-            <a:noFill/>
-          </a:ln>
-          <a:effectLst/>
-        </p:spPr>
-        <p:style>
-          <a:lnRef idx="1">
-            <a:schemeClr val="accent1"/>
-          </a:lnRef>
-          <a:fillRef idx="3">
-            <a:schemeClr val="accent1"/>
-          </a:fillRef>
-          <a:effectRef idx="2">
-            <a:schemeClr val="accent1"/>
-          </a:effectRef>
-          <a:fontRef idx="minor">
-            <a:schemeClr val="lt1"/>
-          </a:fontRef>
-        </p:style>
-        <p:txBody>
-          <a:bodyPr rtlCol="0" anchor="ctr" wrap="none" lIns="0" rIns="0" tIns="0" bIns="0"/>
-          <a:lstStyle/>
-          <a:p>
-            <a:pPr algn="ctr">
-              <a:lnSpc>
-                <a:spcPct val="100000"/>
-              </a:lnSpc>
-            </a:pPr>
-            <a:r>
-              <a:rPr sz="900" b="0" i="0">
-                <a:solidFill>
-                  <a:srgbClr val="1F5068"/>
-                </a:solidFill>
-                <a:latin typeface="Pretendard SemiBold"/>
-                <a:ea typeface="Pretendard SemiBold"/>
-              </a:rPr>
-              <a:t>검색마스터</a:t>
-            </a:r>
-          </a:p>
-        </p:txBody>
-      </p:sp>
-      <p:sp>
-        <p:nvSpPr>
-          <p:cNvPr id="16" name="TextBox 15"/>
-          <p:cNvSpPr txBox="1"/>
-          <p:nvPr/>
-        </p:nvSpPr>
-        <p:spPr>
-          <a:xfrm>
-            <a:off x="2606040" y="3337560"/>
-            <a:ext cx="8595360" cy="658368"/>
-          </a:xfrm>
-          <a:prstGeom prst="rect">
-            <a:avLst/>
-          </a:prstGeom>
-          <a:noFill/>
-        </p:spPr>
-        <p:txBody>
-          <a:bodyPr wrap="square" lIns="0" rIns="0" tIns="0" bIns="0">
-            <a:spAutoFit/>
-          </a:bodyPr>
-          <a:lstStyle/>
-          <a:p>
-            <a:pPr algn="l">
-              <a:lnSpc>
-                <a:spcPct val="100000"/>
-              </a:lnSpc>
-              <a:spcAft>
-                <a:spcPts val="200"/>
-              </a:spcAft>
-            </a:pPr>
-            <a:r>
-              <a:rPr sz="1350" b="0" i="0">
-                <a:solidFill>
-                  <a:srgbClr val="1D2735"/>
-                </a:solidFill>
-                <a:latin typeface="Pretendard ExtraBold"/>
-                <a:ea typeface="Pretendard ExtraBold"/>
-              </a:rPr>
-              <a:t>상품명·키워드 만들기</a:t>
-            </a:r>
-          </a:p>
-          <a:p>
-            <a:pPr algn="l">
-              <a:lnSpc>
-                <a:spcPct val="125000"/>
-              </a:lnSpc>
-            </a:pPr>
-            <a:r>
-              <a:rPr sz="1050" b="0" i="0">
-                <a:solidFill>
-                  <a:srgbClr val="455569"/>
-                </a:solidFill>
-                <a:latin typeface="Pretendard"/>
-                <a:ea typeface="Pretendard"/>
-              </a:rPr>
-              <a:t>상단 메뉴로 이동해 사진과 설명을 넣고, 판매 채널에 맞는 상품명을 만듭니다.</a:t>
-            </a:r>
-          </a:p>
-        </p:txBody>
-      </p:sp>
-      <p:sp>
-        <p:nvSpPr>
-          <p:cNvPr id="17" name="Rectangle 16"/>
-          <p:cNvSpPr/>
-          <p:nvPr/>
-        </p:nvSpPr>
-        <p:spPr>
-          <a:xfrm>
-            <a:off x="2269540" y="4352544"/>
-            <a:ext cx="18288" cy="969264"/>
-          </a:xfrm>
-          <a:prstGeom prst="rect">
-            <a:avLst/>
-          </a:prstGeom>
-          <a:solidFill>
-            <a:srgbClr val="DAD2C6"/>
-          </a:solidFill>
-          <a:ln>
-            <a:noFill/>
-          </a:ln>
-          <a:effectLst/>
-        </p:spPr>
-        <p:style>
-          <a:lnRef idx="1">
-            <a:schemeClr val="accent1"/>
-          </a:lnRef>
-          <a:fillRef idx="3">
-            <a:schemeClr val="accent1"/>
-          </a:fillRef>
-          <a:effectRef idx="2">
-            <a:schemeClr val="accent1"/>
-          </a:effectRef>
-          <a:fontRef idx="minor">
-            <a:schemeClr val="lt1"/>
-          </a:fontRef>
-        </p:style>
-        <p:txBody>
-          <a:bodyPr rtlCol="0" anchor="ctr"/>
-          <a:lstStyle/>
-          <a:p>
-            <a:pPr algn="ctr"/>
-          </a:p>
-        </p:txBody>
-      </p:sp>
-      <p:sp>
-        <p:nvSpPr>
-          <p:cNvPr id="18" name="TextBox 17"/>
-          <p:cNvSpPr txBox="1"/>
-          <p:nvPr/>
-        </p:nvSpPr>
-        <p:spPr>
-          <a:xfrm>
-            <a:off x="822960" y="4123944"/>
-            <a:ext cx="1188720" cy="274320"/>
-          </a:xfrm>
-          <a:prstGeom prst="rect">
-            <a:avLst/>
-          </a:prstGeom>
-          <a:noFill/>
-        </p:spPr>
-        <p:txBody>
-          <a:bodyPr wrap="square" lIns="0" rIns="0" tIns="0" bIns="0">
-            <a:spAutoFit/>
-          </a:bodyPr>
-          <a:lstStyle/>
-          <a:p>
-            <a:pPr algn="r">
-              <a:lnSpc>
-                <a:spcPct val="100000"/>
-              </a:lnSpc>
-            </a:pPr>
-            <a:r>
-              <a:rPr sz="1250" b="1" i="0">
-                <a:solidFill>
-                  <a:srgbClr val="7D5E33"/>
-                </a:solidFill>
-                <a:latin typeface="Noto Serif KR"/>
-                <a:ea typeface="Noto Serif KR"/>
-              </a:rPr>
-              <a:t>3단계</a:t>
-            </a:r>
-          </a:p>
-        </p:txBody>
-      </p:sp>
-      <p:sp>
-        <p:nvSpPr>
-          <p:cNvPr id="19" name="Oval 18"/>
-          <p:cNvSpPr/>
-          <p:nvPr/>
-        </p:nvSpPr>
-        <p:spPr>
-          <a:xfrm>
-            <a:off x="2212848" y="4151376"/>
-            <a:ext cx="132588" cy="132588"/>
-          </a:xfrm>
-          <a:prstGeom prst="ellipse">
-            <a:avLst/>
-          </a:prstGeom>
-          <a:solidFill>
-            <a:srgbClr val="9A7440"/>
-          </a:solidFill>
-          <a:ln w="19050">
-            <a:solidFill>
-              <a:srgbClr val="FFFFFF"/>
-            </a:solidFill>
-          </a:ln>
-          <a:effectLst/>
-        </p:spPr>
-        <p:style>
-          <a:lnRef idx="1">
-            <a:schemeClr val="accent1"/>
-          </a:lnRef>
-          <a:fillRef idx="3">
-            <a:schemeClr val="accent1"/>
-          </a:fillRef>
-          <a:effectRef idx="2">
-            <a:schemeClr val="accent1"/>
-          </a:effectRef>
-          <a:fontRef idx="minor">
-            <a:schemeClr val="lt1"/>
-          </a:fontRef>
-        </p:style>
-        <p:txBody>
-          <a:bodyPr rtlCol="0" anchor="ctr"/>
-          <a:lstStyle/>
-          <a:p>
-            <a:pPr algn="ctr"/>
-          </a:p>
-        </p:txBody>
-      </p:sp>
-      <p:sp>
-        <p:nvSpPr>
-          <p:cNvPr id="20" name="Rounded Rectangle 19"/>
-          <p:cNvSpPr/>
-          <p:nvPr/>
-        </p:nvSpPr>
-        <p:spPr>
-          <a:xfrm>
-            <a:off x="2606040" y="4078224"/>
-            <a:ext cx="1024128" cy="256032"/>
-          </a:xfrm>
-          <a:prstGeom prst="roundRect">
-            <a:avLst>
-              <a:gd name="adj" fmla="val 50000"/>
-            </a:avLst>
-          </a:prstGeom>
-          <a:solidFill>
-            <a:srgbClr val="F6EFE5"/>
-          </a:solidFill>
-          <a:ln>
-            <a:noFill/>
-          </a:ln>
-          <a:effectLst/>
-        </p:spPr>
-        <p:style>
-          <a:lnRef idx="1">
-            <a:schemeClr val="accent1"/>
-          </a:lnRef>
-          <a:fillRef idx="3">
-            <a:schemeClr val="accent1"/>
-          </a:fillRef>
-          <a:effectRef idx="2">
-            <a:schemeClr val="accent1"/>
-          </a:effectRef>
-          <a:fontRef idx="minor">
-            <a:schemeClr val="lt1"/>
-          </a:fontRef>
-        </p:style>
-        <p:txBody>
-          <a:bodyPr rtlCol="0" anchor="ctr" wrap="none" lIns="0" rIns="0" tIns="0" bIns="0"/>
-          <a:lstStyle/>
-          <a:p>
-            <a:pPr algn="ctr">
-              <a:lnSpc>
-                <a:spcPct val="100000"/>
-              </a:lnSpc>
-            </a:pPr>
-            <a:r>
-              <a:rPr sz="900" b="0" i="0">
-                <a:solidFill>
-                  <a:srgbClr val="7D5E33"/>
-                </a:solidFill>
-                <a:latin typeface="Pretendard SemiBold"/>
-                <a:ea typeface="Pretendard SemiBold"/>
-              </a:rPr>
-              <a:t>프리캔버스</a:t>
-            </a:r>
-          </a:p>
-        </p:txBody>
-      </p:sp>
-      <p:sp>
-        <p:nvSpPr>
-          <p:cNvPr id="21" name="TextBox 20"/>
-          <p:cNvSpPr txBox="1"/>
-          <p:nvPr/>
-        </p:nvSpPr>
-        <p:spPr>
-          <a:xfrm>
-            <a:off x="2606040" y="4416552"/>
-            <a:ext cx="8595360" cy="658368"/>
-          </a:xfrm>
-          <a:prstGeom prst="rect">
-            <a:avLst/>
-          </a:prstGeom>
-          <a:noFill/>
-        </p:spPr>
-        <p:txBody>
-          <a:bodyPr wrap="square" lIns="0" rIns="0" tIns="0" bIns="0">
-            <a:spAutoFit/>
-          </a:bodyPr>
-          <a:lstStyle/>
-          <a:p>
-            <a:pPr algn="l">
-              <a:lnSpc>
-                <a:spcPct val="100000"/>
-              </a:lnSpc>
-              <a:spcAft>
-                <a:spcPts val="200"/>
-              </a:spcAft>
-            </a:pPr>
-            <a:r>
-              <a:rPr sz="1350" b="0" i="0">
-                <a:solidFill>
-                  <a:srgbClr val="1D2735"/>
-                </a:solidFill>
-                <a:latin typeface="Pretendard ExtraBold"/>
-                <a:ea typeface="Pretendard ExtraBold"/>
-              </a:rPr>
-              <a:t>상세·영상·카드뉴스 만들기</a:t>
-            </a:r>
-          </a:p>
-          <a:p>
-            <a:pPr algn="l">
-              <a:lnSpc>
-                <a:spcPct val="125000"/>
-              </a:lnSpc>
-            </a:pPr>
-            <a:r>
-              <a:rPr sz="1050" b="0" i="0">
-                <a:solidFill>
-                  <a:srgbClr val="455569"/>
-                </a:solidFill>
-                <a:latin typeface="Pretendard"/>
-                <a:ea typeface="Pretendard"/>
-              </a:rPr>
-              <a:t>같은 재료로 상세페이지를 만들고, 필요하면 영상 번역과 카드뉴스까지 뽑습니다.</a:t>
-            </a:r>
-          </a:p>
-        </p:txBody>
-      </p:sp>
-      <p:sp>
-        <p:nvSpPr>
-          <p:cNvPr id="22" name="TextBox 21"/>
-          <p:cNvSpPr txBox="1"/>
-          <p:nvPr/>
-        </p:nvSpPr>
-        <p:spPr>
-          <a:xfrm>
-            <a:off x="822960" y="5202936"/>
-            <a:ext cx="1188720" cy="274320"/>
-          </a:xfrm>
-          <a:prstGeom prst="rect">
-            <a:avLst/>
-          </a:prstGeom>
-          <a:noFill/>
-        </p:spPr>
-        <p:txBody>
-          <a:bodyPr wrap="square" lIns="0" rIns="0" tIns="0" bIns="0">
-            <a:spAutoFit/>
-          </a:bodyPr>
-          <a:lstStyle/>
-          <a:p>
-            <a:pPr algn="r">
-              <a:lnSpc>
-                <a:spcPct val="100000"/>
-              </a:lnSpc>
-            </a:pPr>
-            <a:r>
-              <a:rPr sz="1250" b="1" i="0">
-                <a:solidFill>
-                  <a:srgbClr val="7D5E33"/>
-                </a:solidFill>
-                <a:latin typeface="Noto Serif KR"/>
-                <a:ea typeface="Noto Serif KR"/>
-              </a:rPr>
-              <a:t>4단계</a:t>
-            </a:r>
-          </a:p>
-        </p:txBody>
-      </p:sp>
-      <p:sp>
-        <p:nvSpPr>
-          <p:cNvPr id="23" name="Oval 22"/>
-          <p:cNvSpPr/>
-          <p:nvPr/>
-        </p:nvSpPr>
-        <p:spPr>
-          <a:xfrm>
-            <a:off x="2212848" y="5230368"/>
-            <a:ext cx="132588" cy="132588"/>
-          </a:xfrm>
-          <a:prstGeom prst="ellipse">
-            <a:avLst/>
-          </a:prstGeom>
-          <a:solidFill>
-            <a:srgbClr val="1D2735"/>
-          </a:solidFill>
-          <a:ln w="19050">
-            <a:solidFill>
-              <a:srgbClr val="FFFFFF"/>
-            </a:solidFill>
-          </a:ln>
-          <a:effectLst/>
-        </p:spPr>
-        <p:style>
-          <a:lnRef idx="1">
-            <a:schemeClr val="accent1"/>
-          </a:lnRef>
-          <a:fillRef idx="3">
-            <a:schemeClr val="accent1"/>
-          </a:fillRef>
-          <a:effectRef idx="2">
-            <a:schemeClr val="accent1"/>
-          </a:effectRef>
-          <a:fontRef idx="minor">
-            <a:schemeClr val="lt1"/>
-          </a:fontRef>
-        </p:style>
-        <p:txBody>
-          <a:bodyPr rtlCol="0" anchor="ctr"/>
-          <a:lstStyle/>
-          <a:p>
-            <a:pPr algn="ctr"/>
-          </a:p>
-        </p:txBody>
-      </p:sp>
-      <p:sp>
-        <p:nvSpPr>
-          <p:cNvPr id="24" name="Rounded Rectangle 23"/>
-          <p:cNvSpPr/>
-          <p:nvPr/>
-        </p:nvSpPr>
-        <p:spPr>
-          <a:xfrm>
-            <a:off x="2606040" y="5157216"/>
-            <a:ext cx="640080" cy="256032"/>
-          </a:xfrm>
-          <a:prstGeom prst="roundRect">
-            <a:avLst>
-              <a:gd name="adj" fmla="val 50000"/>
-            </a:avLst>
-          </a:prstGeom>
-          <a:solidFill>
-            <a:srgbClr val="EDF0EC"/>
-          </a:solidFill>
-          <a:ln>
-            <a:noFill/>
-          </a:ln>
-          <a:effectLst/>
-        </p:spPr>
-        <p:style>
-          <a:lnRef idx="1">
-            <a:schemeClr val="accent1"/>
-          </a:lnRef>
-          <a:fillRef idx="3">
-            <a:schemeClr val="accent1"/>
-          </a:fillRef>
-          <a:effectRef idx="2">
-            <a:schemeClr val="accent1"/>
-          </a:effectRef>
-          <a:fontRef idx="minor">
-            <a:schemeClr val="lt1"/>
-          </a:fontRef>
-        </p:style>
-        <p:txBody>
-          <a:bodyPr rtlCol="0" anchor="ctr" wrap="none" lIns="0" rIns="0" tIns="0" bIns="0"/>
-          <a:lstStyle/>
-          <a:p>
-            <a:pPr algn="ctr">
-              <a:lnSpc>
-                <a:spcPct val="100000"/>
-              </a:lnSpc>
-            </a:pPr>
-            <a:r>
-              <a:rPr sz="900" b="0" i="0">
-                <a:solidFill>
-                  <a:srgbClr val="455569"/>
-                </a:solidFill>
-                <a:latin typeface="Pretendard SemiBold"/>
-                <a:ea typeface="Pretendard SemiBold"/>
-              </a:rPr>
-              <a:t>셀러</a:t>
-            </a:r>
-          </a:p>
-        </p:txBody>
-      </p:sp>
-      <p:sp>
-        <p:nvSpPr>
-          <p:cNvPr id="25" name="TextBox 24"/>
-          <p:cNvSpPr txBox="1"/>
-          <p:nvPr/>
-        </p:nvSpPr>
-        <p:spPr>
-          <a:xfrm>
-            <a:off x="2606040" y="5495544"/>
-            <a:ext cx="8595360" cy="658368"/>
-          </a:xfrm>
-          <a:prstGeom prst="rect">
-            <a:avLst/>
-          </a:prstGeom>
-          <a:noFill/>
-        </p:spPr>
-        <p:txBody>
-          <a:bodyPr wrap="square" lIns="0" rIns="0" tIns="0" bIns="0">
-            <a:spAutoFit/>
-          </a:bodyPr>
-          <a:lstStyle/>
-          <a:p>
-            <a:pPr algn="l">
-              <a:lnSpc>
-                <a:spcPct val="100000"/>
-              </a:lnSpc>
-              <a:spcAft>
-                <a:spcPts val="200"/>
-              </a:spcAft>
-            </a:pPr>
-            <a:r>
-              <a:rPr sz="1350" b="0" i="0">
-                <a:solidFill>
-                  <a:srgbClr val="1D2735"/>
-                </a:solidFill>
-                <a:latin typeface="Pretendard ExtraBold"/>
-                <a:ea typeface="Pretendard ExtraBold"/>
-              </a:rPr>
-              <a:t>플랫폼에 등록</a:t>
-            </a:r>
-          </a:p>
-          <a:p>
-            <a:pPr algn="l">
-              <a:lnSpc>
-                <a:spcPct val="125000"/>
-              </a:lnSpc>
-            </a:pPr>
-            <a:r>
-              <a:rPr sz="1050" b="0" i="0">
-                <a:solidFill>
-                  <a:srgbClr val="455569"/>
-                </a:solidFill>
-                <a:latin typeface="Pretendard"/>
-                <a:ea typeface="Pretendard"/>
-              </a:rPr>
-              <a:t>완성본을 내려받아 판매 플랫폼에 그대로 올립니다.</a:t>
-            </a:r>
-          </a:p>
-        </p:txBody>
-      </p:sp>
-      <p:sp>
-        <p:nvSpPr>
-          <p:cNvPr id="26" name="Rounded Rectangle 25"/>
-          <p:cNvSpPr/>
-          <p:nvPr/>
-        </p:nvSpPr>
-        <p:spPr>
-          <a:xfrm>
-            <a:off x="502920" y="6355080"/>
-            <a:ext cx="868680" cy="329184"/>
-          </a:xfrm>
-          <a:prstGeom prst="roundRect">
-            <a:avLst>
-              <a:gd name="adj" fmla="val 50000"/>
-            </a:avLst>
-          </a:prstGeom>
-          <a:solidFill>
-            <a:srgbClr val="FFFFFF"/>
-          </a:solidFill>
-          <a:ln w="9525">
-            <a:solidFill>
-              <a:srgbClr val="EBE5DB"/>
-            </a:solidFill>
-          </a:ln>
-          <a:effectLst/>
-        </p:spPr>
-        <p:style>
-          <a:lnRef idx="1">
-            <a:schemeClr val="accent1"/>
-          </a:lnRef>
-          <a:fillRef idx="3">
-            <a:schemeClr val="accent1"/>
-          </a:fillRef>
-          <a:effectRef idx="2">
-            <a:schemeClr val="accent1"/>
-          </a:effectRef>
-          <a:fontRef idx="minor">
-            <a:schemeClr val="lt1"/>
-          </a:fontRef>
-        </p:style>
-        <p:txBody>
-          <a:bodyPr rtlCol="0" anchor="ctr" wrap="none" lIns="0" rIns="0" tIns="0" bIns="0"/>
-          <a:lstStyle/>
-          <a:p>
-            <a:pPr algn="ctr">
-              <a:lnSpc>
-                <a:spcPct val="100000"/>
-              </a:lnSpc>
-            </a:pPr>
-            <a:r>
-              <a:rPr sz="1050" b="0" i="0">
-                <a:solidFill>
-                  <a:srgbClr val="455569"/>
-                </a:solidFill>
-                <a:latin typeface="Pretendard SemiBold"/>
-                <a:ea typeface="Pretendard SemiBold"/>
-              </a:rPr>
-              <a:t>18 / 19</a:t>
-            </a:r>
-          </a:p>
-        </p:txBody>
-      </p:sp>
-    </p:spTree>
-  </p:cSld>
-  <p:clrMapOvr>
-    <a:masterClrMapping/>
-  </p:clrMapOvr>
-</p:sld>
-</file>
-
-<file path=ppt/slides/slide19.xml><?xml version="1.0" encoding="utf-8"?>
-<p:sld xmlns:a="http://schemas.openxmlformats.org/drawingml/2006/main" xmlns:p="http://schemas.openxmlformats.org/presentationml/2006/main" xmlns:r="http://schemas.openxmlformats.org/officeDocument/2006/relationships">
-  <p:cSld>
-    <p:spTree>
-      <p:nvGrpSpPr>
-        <p:cNvPr id="1" name=""/>
-        <p:cNvGrpSpPr/>
-        <p:nvPr/>
-      </p:nvGrpSpPr>
-      <p:grpSpPr/>
-      <p:sp>
-        <p:nvSpPr>
-          <p:cNvPr id="2" name="Rectangle 1"/>
-          <p:cNvSpPr/>
-          <p:nvPr/>
-        </p:nvSpPr>
-        <p:spPr>
-          <a:xfrm>
-            <a:off x="0" y="0"/>
-            <a:ext cx="12191695" cy="6858000"/>
-          </a:xfrm>
-          <a:prstGeom prst="rect">
-            <a:avLst/>
-          </a:prstGeom>
-          <a:solidFill>
-            <a:srgbClr val="FFFDF9"/>
-          </a:solidFill>
-          <a:ln>
-            <a:noFill/>
-          </a:ln>
-          <a:effectLst/>
-        </p:spPr>
-        <p:style>
-          <a:lnRef idx="1">
-            <a:schemeClr val="accent1"/>
-          </a:lnRef>
-          <a:fillRef idx="3">
-            <a:schemeClr val="accent1"/>
-          </a:fillRef>
-          <a:effectRef idx="2">
-            <a:schemeClr val="accent1"/>
-          </a:effectRef>
-          <a:fontRef idx="minor">
-            <a:schemeClr val="lt1"/>
-          </a:fontRef>
-        </p:style>
-        <p:txBody>
-          <a:bodyPr rtlCol="0" anchor="ctr"/>
-          <a:lstStyle/>
-          <a:p>
-            <a:pPr algn="ctr"/>
-          </a:p>
-        </p:txBody>
-      </p:sp>
-      <p:sp>
-        <p:nvSpPr>
-          <p:cNvPr id="3" name="Rectangle 2"/>
-          <p:cNvSpPr/>
-          <p:nvPr/>
-        </p:nvSpPr>
-        <p:spPr>
-          <a:xfrm>
-            <a:off x="0" y="0"/>
-            <a:ext cx="12191695" cy="45720"/>
-          </a:xfrm>
-          <a:prstGeom prst="rect">
-            <a:avLst/>
-          </a:prstGeom>
-          <a:solidFill>
-            <a:srgbClr val="173F54"/>
-          </a:solidFill>
-          <a:ln>
-            <a:noFill/>
-          </a:ln>
-          <a:effectLst/>
-        </p:spPr>
-        <p:style>
-          <a:lnRef idx="1">
-            <a:schemeClr val="accent1"/>
-          </a:lnRef>
-          <a:fillRef idx="3">
-            <a:schemeClr val="accent1"/>
-          </a:fillRef>
-          <a:effectRef idx="2">
-            <a:schemeClr val="accent1"/>
-          </a:effectRef>
-          <a:fontRef idx="minor">
-            <a:schemeClr val="lt1"/>
-          </a:fontRef>
-        </p:style>
-        <p:txBody>
-          <a:bodyPr rtlCol="0" anchor="ctr"/>
-          <a:lstStyle/>
-          <a:p>
-            <a:pPr algn="ctr"/>
-          </a:p>
-        </p:txBody>
-      </p:sp>
-      <p:sp>
-        <p:nvSpPr>
           <p:cNvPr id="4" name="TextBox 3"/>
           <p:cNvSpPr txBox="1"/>
           <p:nvPr/>
@@ -11649,8 +9031,8 @@
         </p:nvSpPr>
         <p:spPr>
           <a:xfrm>
-            <a:off x="914400" y="5943600"/>
-            <a:ext cx="10360152" cy="411480"/>
+            <a:off x="914400" y="5806440"/>
+            <a:ext cx="10360152" cy="731520"/>
           </a:xfrm>
           <a:prstGeom prst="rect">
             <a:avLst/>
@@ -11667,9 +9049,49 @@
               <a:lnSpc>
                 <a:spcPct val="100000"/>
               </a:lnSpc>
-            </a:pPr>
-            <a:r>
-              <a:rPr sz="1700" b="1" i="0">
+              <a:spcAft>
+                <a:spcPts val="1000"/>
+              </a:spcAft>
+            </a:pPr>
+            <a:r>
+              <a:rPr sz="1050" b="0" i="0">
+                <a:solidFill>
+                  <a:srgbClr val="455569"/>
+                </a:solidFill>
+                <a:latin typeface="Pretendard"/>
+                <a:ea typeface="Pretendard"/>
+              </a:rPr>
+              <a:t>쓰다가 막히는 게 있으면, 화면 아래 </a:t>
+            </a:r>
+            <a:r>
+              <a:rPr sz="1050" b="0" i="0">
+                <a:solidFill>
+                  <a:srgbClr val="28364A"/>
+                </a:solidFill>
+                <a:latin typeface="Pretendard ExtraBold"/>
+                <a:ea typeface="Pretendard ExtraBold"/>
+              </a:rPr>
+              <a:t>'고객센터 문의하기'</a:t>
+            </a:r>
+            <a:r>
+              <a:rPr sz="1050" b="0" i="0">
+                <a:solidFill>
+                  <a:srgbClr val="455569"/>
+                </a:solidFill>
+                <a:latin typeface="Pretendard"/>
+                <a:ea typeface="Pretendard"/>
+              </a:rPr>
+              <a:t>로 편하게 남겨 주세요.</a:t>
+            </a:r>
+          </a:p>
+          <a:p>
+            <a:pPr algn="ctr">
+              <a:lnSpc>
+                <a:spcPct val="100000"/>
+              </a:lnSpc>
+            </a:pPr>
+            <a:r>
+              <a:rPr sz="1600" b="1" i="0">
                 <a:solidFill>
                   <a:srgbClr val="28364A"/>
                 </a:solidFill>
@@ -12495,7 +9917,7 @@
                 <a:latin typeface="Pretendard SemiBold"/>
                 <a:ea typeface="Pretendard SemiBold"/>
               </a:rPr>
-              <a:t>2 / 19</a:t>
+              <a:t>2 / 15</a:t>
             </a:r>
           </a:p>
         </p:txBody>
@@ -12685,7 +10107,7 @@
                 <a:latin typeface="Pretendard ExtraBold"/>
                 <a:ea typeface="Pretendard ExtraBold"/>
               </a:rPr>
-              <a:t>함께 쓰면</a:t>
+              <a:t>검색마스터 새 기능</a:t>
             </a:r>
           </a:p>
         </p:txBody>
@@ -12698,8 +10120,8 @@
         </p:nvSpPr>
         <p:spPr>
           <a:xfrm>
-            <a:off x="822960" y="1005840"/>
-            <a:ext cx="10515600" cy="1417320"/>
+            <a:off x="822960" y="1234440"/>
+            <a:ext cx="4937760" cy="1280160"/>
           </a:xfrm>
           <a:prstGeom prst="rect">
             <a:avLst/>
@@ -12718,48 +10140,429 @@
               </a:lnSpc>
             </a:pPr>
             <a:r>
-              <a:rPr sz="2600" b="1" i="0">
+              <a:rPr sz="2400" b="1" i="0">
                 <a:solidFill>
                   <a:srgbClr val="1D2735"/>
                 </a:solidFill>
                 <a:latin typeface="Noto Serif KR"/>
                 <a:ea typeface="Noto Serif KR"/>
               </a:rPr>
-              <a:t>검색마스터로 이름을 만들고,</a:t>
+              <a:t>상품 설명 입력</a:t>
             </a:r>
           </a:p>
           <a:p>
             <a:pPr algn="l">
               <a:lnSpc>
-                <a:spcPct val="130000"/>
-              </a:lnSpc>
-            </a:pPr>
-            <a:r>
-              <a:rPr sz="2600" b="1" i="0">
+                <a:spcPct val="140000"/>
+              </a:lnSpc>
+              <a:spcBef>
+                <a:spcPts val="800"/>
+              </a:spcBef>
+            </a:pPr>
+            <a:r>
+              <a:rPr sz="1200" b="0" i="0">
+                <a:solidFill>
+                  <a:srgbClr val="455569"/>
+                </a:solidFill>
+                <a:latin typeface="Pretendard"/>
+                <a:ea typeface="Pretendard"/>
+              </a:rPr>
+              <a:t>사진과 함께 상품 설명을 입력하면, 상품명이 눈에 띄게 정확해집니다.</a:t>
+            </a:r>
+          </a:p>
+        </p:txBody>
+      </p:sp>
+      <p:sp>
+        <p:nvSpPr>
+          <p:cNvPr id="7" name="TextBox 6"/>
+          <p:cNvSpPr txBox="1"/>
+          <p:nvPr/>
+        </p:nvSpPr>
+        <p:spPr>
+          <a:xfrm>
+            <a:off x="822960" y="2743200"/>
+            <a:ext cx="502920" cy="457200"/>
+          </a:xfrm>
+          <a:prstGeom prst="rect">
+            <a:avLst/>
+          </a:prstGeom>
+          <a:noFill/>
+        </p:spPr>
+        <p:txBody>
+          <a:bodyPr wrap="square" lIns="0" rIns="0" tIns="0" bIns="0">
+            <a:spAutoFit/>
+          </a:bodyPr>
+          <a:lstStyle/>
+          <a:p>
+            <a:pPr algn="ctr">
+              <a:lnSpc>
+                <a:spcPct val="100000"/>
+              </a:lnSpc>
+            </a:pPr>
+            <a:r>
+              <a:rPr sz="1600" b="0" i="0">
                 <a:solidFill>
                   <a:srgbClr val="1D2735"/>
                 </a:solidFill>
-                <a:latin typeface="Noto Serif KR"/>
-                <a:ea typeface="Noto Serif KR"/>
-              </a:rPr>
-              <a:t>프리캔버스로 </a:t>
-            </a:r>
-            <a:r>
-              <a:rPr sz="2600" b="1" i="0">
-                <a:solidFill>
-                  <a:srgbClr val="1F5068"/>
-                </a:solidFill>
-                <a:latin typeface="Noto Serif KR"/>
-                <a:ea typeface="Noto Serif KR"/>
-              </a:rPr>
-              <a:t>페이지를 만듭니다.</a:t>
+                <a:latin typeface="Pretendard"/>
+                <a:ea typeface="Pretendard"/>
+              </a:rPr>
+              <a:t>✏️</a:t>
+            </a:r>
+          </a:p>
+        </p:txBody>
+      </p:sp>
+      <p:sp>
+        <p:nvSpPr>
+          <p:cNvPr id="8" name="TextBox 7"/>
+          <p:cNvSpPr txBox="1"/>
+          <p:nvPr/>
+        </p:nvSpPr>
+        <p:spPr>
+          <a:xfrm>
+            <a:off x="1389888" y="2734056"/>
+            <a:ext cx="4297680" cy="960120"/>
+          </a:xfrm>
+          <a:prstGeom prst="rect">
+            <a:avLst/>
+          </a:prstGeom>
+          <a:noFill/>
+        </p:spPr>
+        <p:txBody>
+          <a:bodyPr wrap="square" lIns="0" rIns="0" tIns="0" bIns="0">
+            <a:spAutoFit/>
+          </a:bodyPr>
+          <a:lstStyle/>
+          <a:p>
+            <a:pPr algn="l">
+              <a:lnSpc>
+                <a:spcPct val="100000"/>
+              </a:lnSpc>
+              <a:spcAft>
+                <a:spcPts val="300"/>
+              </a:spcAft>
+            </a:pPr>
+            <a:r>
+              <a:rPr sz="1200" b="0" i="0">
+                <a:solidFill>
+                  <a:srgbClr val="1D2735"/>
+                </a:solidFill>
+                <a:latin typeface="Pretendard ExtraBold"/>
+                <a:ea typeface="Pretendard ExtraBold"/>
+              </a:rPr>
+              <a:t>실제 상품·용도 설명 입력</a:t>
+            </a:r>
+          </a:p>
+          <a:p>
+            <a:pPr algn="l">
+              <a:lnSpc>
+                <a:spcPct val="128000"/>
+              </a:lnSpc>
+            </a:pPr>
+            <a:r>
+              <a:rPr sz="1050" b="0" i="0">
+                <a:solidFill>
+                  <a:srgbClr val="455569"/>
+                </a:solidFill>
+                <a:latin typeface="Pretendard"/>
+                <a:ea typeface="Pretendard"/>
+              </a:rPr>
+              <a:t>“책상 위에 놓는 무선 충전 겸용 스탠드”처럼 한 줄만 적으면, 사진만으로는 놓치기 쉬운 재질과 용도까지 상품명에 담깁니다.</a:t>
+            </a:r>
+          </a:p>
+        </p:txBody>
+      </p:sp>
+      <p:sp>
+        <p:nvSpPr>
+          <p:cNvPr id="9" name="Rectangle 8"/>
+          <p:cNvSpPr/>
+          <p:nvPr/>
+        </p:nvSpPr>
+        <p:spPr>
+          <a:xfrm>
+            <a:off x="822960" y="3739896"/>
+            <a:ext cx="4846320" cy="10972"/>
+          </a:xfrm>
+          <a:prstGeom prst="rect">
+            <a:avLst/>
+          </a:prstGeom>
+          <a:solidFill>
+            <a:srgbClr val="EBE5DB"/>
+          </a:solidFill>
+          <a:ln>
+            <a:noFill/>
+          </a:ln>
+          <a:effectLst/>
+        </p:spPr>
+        <p:style>
+          <a:lnRef idx="1">
+            <a:schemeClr val="accent1"/>
+          </a:lnRef>
+          <a:fillRef idx="3">
+            <a:schemeClr val="accent1"/>
+          </a:fillRef>
+          <a:effectRef idx="2">
+            <a:schemeClr val="accent1"/>
+          </a:effectRef>
+          <a:fontRef idx="minor">
+            <a:schemeClr val="lt1"/>
+          </a:fontRef>
+        </p:style>
+        <p:txBody>
+          <a:bodyPr rtlCol="0" anchor="ctr"/>
+          <a:lstStyle/>
+          <a:p>
+            <a:pPr algn="ctr"/>
+          </a:p>
+        </p:txBody>
+      </p:sp>
+      <p:sp>
+        <p:nvSpPr>
+          <p:cNvPr id="10" name="TextBox 9"/>
+          <p:cNvSpPr txBox="1"/>
+          <p:nvPr/>
+        </p:nvSpPr>
+        <p:spPr>
+          <a:xfrm>
+            <a:off x="822960" y="3822191"/>
+            <a:ext cx="502920" cy="457200"/>
+          </a:xfrm>
+          <a:prstGeom prst="rect">
+            <a:avLst/>
+          </a:prstGeom>
+          <a:noFill/>
+        </p:spPr>
+        <p:txBody>
+          <a:bodyPr wrap="square" lIns="0" rIns="0" tIns="0" bIns="0">
+            <a:spAutoFit/>
+          </a:bodyPr>
+          <a:lstStyle/>
+          <a:p>
+            <a:pPr algn="ctr">
+              <a:lnSpc>
+                <a:spcPct val="100000"/>
+              </a:lnSpc>
+            </a:pPr>
+            <a:r>
+              <a:rPr sz="1600" b="0" i="0">
+                <a:solidFill>
+                  <a:srgbClr val="1D2735"/>
+                </a:solidFill>
+                <a:latin typeface="Pretendard"/>
+                <a:ea typeface="Pretendard"/>
+              </a:rPr>
+              <a:t>🛍️</a:t>
+            </a:r>
+          </a:p>
+        </p:txBody>
+      </p:sp>
+      <p:sp>
+        <p:nvSpPr>
+          <p:cNvPr id="11" name="TextBox 10"/>
+          <p:cNvSpPr txBox="1"/>
+          <p:nvPr/>
+        </p:nvSpPr>
+        <p:spPr>
+          <a:xfrm>
+            <a:off x="1389888" y="3813048"/>
+            <a:ext cx="4297680" cy="960120"/>
+          </a:xfrm>
+          <a:prstGeom prst="rect">
+            <a:avLst/>
+          </a:prstGeom>
+          <a:noFill/>
+        </p:spPr>
+        <p:txBody>
+          <a:bodyPr wrap="square" lIns="0" rIns="0" tIns="0" bIns="0">
+            <a:spAutoFit/>
+          </a:bodyPr>
+          <a:lstStyle/>
+          <a:p>
+            <a:pPr algn="l">
+              <a:lnSpc>
+                <a:spcPct val="100000"/>
+              </a:lnSpc>
+              <a:spcAft>
+                <a:spcPts val="300"/>
+              </a:spcAft>
+            </a:pPr>
+            <a:r>
+              <a:rPr sz="1200" b="0" i="0">
+                <a:solidFill>
+                  <a:srgbClr val="1D2735"/>
+                </a:solidFill>
+                <a:latin typeface="Pretendard ExtraBold"/>
+                <a:ea typeface="Pretendard ExtraBold"/>
+              </a:rPr>
+              <a:t>판매 채널별 상품명</a:t>
+            </a:r>
+          </a:p>
+          <a:p>
+            <a:pPr algn="l">
+              <a:lnSpc>
+                <a:spcPct val="128000"/>
+              </a:lnSpc>
+            </a:pPr>
+            <a:r>
+              <a:rPr sz="1050" b="0" i="0">
+                <a:solidFill>
+                  <a:srgbClr val="455569"/>
+                </a:solidFill>
+                <a:latin typeface="Pretendard"/>
+                <a:ea typeface="Pretendard"/>
+              </a:rPr>
+              <a:t>네이버쇼핑은 검색 노출 폭, 쿠팡은 구매 판단 키워드, 일반몰은 가독성 — 채널을 고르면 그에 맞춰 짓습니다.</a:t>
+            </a:r>
+          </a:p>
+        </p:txBody>
+      </p:sp>
+      <p:sp>
+        <p:nvSpPr>
+          <p:cNvPr id="12" name="Rectangle 11"/>
+          <p:cNvSpPr/>
+          <p:nvPr/>
+        </p:nvSpPr>
+        <p:spPr>
+          <a:xfrm>
+            <a:off x="822960" y="4818888"/>
+            <a:ext cx="4846320" cy="10972"/>
+          </a:xfrm>
+          <a:prstGeom prst="rect">
+            <a:avLst/>
+          </a:prstGeom>
+          <a:solidFill>
+            <a:srgbClr val="EBE5DB"/>
+          </a:solidFill>
+          <a:ln>
+            <a:noFill/>
+          </a:ln>
+          <a:effectLst/>
+        </p:spPr>
+        <p:style>
+          <a:lnRef idx="1">
+            <a:schemeClr val="accent1"/>
+          </a:lnRef>
+          <a:fillRef idx="3">
+            <a:schemeClr val="accent1"/>
+          </a:fillRef>
+          <a:effectRef idx="2">
+            <a:schemeClr val="accent1"/>
+          </a:effectRef>
+          <a:fontRef idx="minor">
+            <a:schemeClr val="lt1"/>
+          </a:fontRef>
+        </p:style>
+        <p:txBody>
+          <a:bodyPr rtlCol="0" anchor="ctr"/>
+          <a:lstStyle/>
+          <a:p>
+            <a:pPr algn="ctr"/>
+          </a:p>
+        </p:txBody>
+      </p:sp>
+      <p:sp>
+        <p:nvSpPr>
+          <p:cNvPr id="13" name="TextBox 12"/>
+          <p:cNvSpPr txBox="1"/>
+          <p:nvPr/>
+        </p:nvSpPr>
+        <p:spPr>
+          <a:xfrm>
+            <a:off x="822960" y="4901183"/>
+            <a:ext cx="502920" cy="457200"/>
+          </a:xfrm>
+          <a:prstGeom prst="rect">
+            <a:avLst/>
+          </a:prstGeom>
+          <a:noFill/>
+        </p:spPr>
+        <p:txBody>
+          <a:bodyPr wrap="square" lIns="0" rIns="0" tIns="0" bIns="0">
+            <a:spAutoFit/>
+          </a:bodyPr>
+          <a:lstStyle/>
+          <a:p>
+            <a:pPr algn="ctr">
+              <a:lnSpc>
+                <a:spcPct val="100000"/>
+              </a:lnSpc>
+            </a:pPr>
+            <a:r>
+              <a:rPr sz="1600" b="0" i="0">
+                <a:solidFill>
+                  <a:srgbClr val="1D2735"/>
+                </a:solidFill>
+                <a:latin typeface="Pretendard"/>
+                <a:ea typeface="Pretendard"/>
+              </a:rPr>
+              <a:t>⚡</a:t>
+            </a:r>
+          </a:p>
+        </p:txBody>
+      </p:sp>
+      <p:sp>
+        <p:nvSpPr>
+          <p:cNvPr id="14" name="TextBox 13"/>
+          <p:cNvSpPr txBox="1"/>
+          <p:nvPr/>
+        </p:nvSpPr>
+        <p:spPr>
+          <a:xfrm>
+            <a:off x="1389888" y="4892040"/>
+            <a:ext cx="4297680" cy="960120"/>
+          </a:xfrm>
+          <a:prstGeom prst="rect">
+            <a:avLst/>
+          </a:prstGeom>
+          <a:noFill/>
+        </p:spPr>
+        <p:txBody>
+          <a:bodyPr wrap="square" lIns="0" rIns="0" tIns="0" bIns="0">
+            <a:spAutoFit/>
+          </a:bodyPr>
+          <a:lstStyle/>
+          <a:p>
+            <a:pPr algn="l">
+              <a:lnSpc>
+                <a:spcPct val="100000"/>
+              </a:lnSpc>
+              <a:spcAft>
+                <a:spcPts val="300"/>
+              </a:spcAft>
+            </a:pPr>
+            <a:r>
+              <a:rPr sz="1200" b="0" i="0">
+                <a:solidFill>
+                  <a:srgbClr val="1D2735"/>
+                </a:solidFill>
+                <a:latin typeface="Pretendard ExtraBold"/>
+                <a:ea typeface="Pretendard ExtraBold"/>
+              </a:rPr>
+              <a:t>업로드·생성 화면 개선</a:t>
+            </a:r>
+          </a:p>
+          <a:p>
+            <a:pPr algn="l">
+              <a:lnSpc>
+                <a:spcPct val="128000"/>
+              </a:lnSpc>
+            </a:pPr>
+            <a:r>
+              <a:rPr sz="1050" b="0" i="0">
+                <a:solidFill>
+                  <a:srgbClr val="455569"/>
+                </a:solidFill>
+                <a:latin typeface="Pretendard"/>
+                <a:ea typeface="Pretendard"/>
+              </a:rPr>
+              <a:t>사진을 올리면 바로 보이고, 생성 진행 상태도 화면에 그대로 표시됩니다.</a:t>
             </a:r>
           </a:p>
         </p:txBody>
       </p:sp>
       <p:pic>
         <p:nvPicPr>
-          <p:cNvPr id="7" name="Picture 6" descr="sm_head.jpg"/>
+          <p:cNvPr id="15" name="Picture 14" descr="sm_app.jpg"/>
           <p:cNvPicPr>
             <a:picLocks noChangeAspect="1"/>
           </p:cNvPicPr>
@@ -12773,8 +10576,8 @@
         </p:blipFill>
         <p:spPr>
           <a:xfrm>
-            <a:off x="822960" y="2971800"/>
-            <a:ext cx="4572000" cy="1649186"/>
+            <a:off x="6263640" y="1143000"/>
+            <a:ext cx="3794760" cy="2929555"/>
           </a:xfrm>
           <a:prstGeom prst="rect">
             <a:avLst/>
@@ -12796,14 +10599,14 @@
       </p:pic>
       <p:sp>
         <p:nvSpPr>
-          <p:cNvPr id="8" name="TextBox 7"/>
+          <p:cNvPr id="16" name="TextBox 15"/>
           <p:cNvSpPr txBox="1"/>
           <p:nvPr/>
         </p:nvSpPr>
         <p:spPr>
           <a:xfrm>
-            <a:off x="5532120" y="3383280"/>
-            <a:ext cx="1143000" cy="914400"/>
+            <a:off x="5989320" y="4182282"/>
+            <a:ext cx="4343400" cy="256032"/>
           </a:xfrm>
           <a:prstGeom prst="rect">
             <a:avLst/>
@@ -12820,60 +10623,23 @@
               <a:lnSpc>
                 <a:spcPct val="100000"/>
               </a:lnSpc>
-              <a:spcAft>
-                <a:spcPts val="400"/>
-              </a:spcAft>
-            </a:pPr>
-            <a:r>
-              <a:rPr sz="2600" b="1" i="0">
-                <a:solidFill>
-                  <a:srgbClr val="9A7440"/>
+            </a:pPr>
+            <a:r>
+              <a:rPr sz="900" b="0" i="0">
+                <a:solidFill>
+                  <a:srgbClr val="455569"/>
                 </a:solidFill>
                 <a:latin typeface="Pretendard"/>
                 <a:ea typeface="Pretendard"/>
               </a:rPr>
-              <a:t>→</a:t>
-            </a:r>
-          </a:p>
-          <a:p>
-            <a:pPr algn="ctr">
-              <a:lnSpc>
-                <a:spcPct val="100000"/>
-              </a:lnSpc>
-            </a:pPr>
-            <a:r>
-              <a:rPr sz="950" b="0" i="0">
-                <a:solidFill>
-                  <a:srgbClr val="7D5E33"/>
-                </a:solidFill>
-                <a:latin typeface="Pretendard ExtraBold"/>
-                <a:ea typeface="Pretendard ExtraBold"/>
-              </a:rPr>
-              <a:t>같은 상품</a:t>
-            </a:r>
-          </a:p>
-          <a:p>
-            <a:pPr algn="ctr">
-              <a:lnSpc>
-                <a:spcPct val="100000"/>
-              </a:lnSpc>
-            </a:pPr>
-            <a:r>
-              <a:rPr sz="950" b="0" i="0">
-                <a:solidFill>
-                  <a:srgbClr val="7D5E33"/>
-                </a:solidFill>
-                <a:latin typeface="Pretendard ExtraBold"/>
-                <a:ea typeface="Pretendard ExtraBold"/>
-              </a:rPr>
-              <a:t>같은 구글 계정</a:t>
+              <a:t>사진 · 판매 채널 · 상품 설명 · 키워드 — 한 화면 입력</a:t>
             </a:r>
           </a:p>
         </p:txBody>
       </p:sp>
       <p:pic>
         <p:nvPicPr>
-          <p:cNvPr id="9" name="Picture 8" descr="fc_hero.jpg"/>
+          <p:cNvPr id="17" name="Picture 16" descr="sm_recent.jpg"/>
           <p:cNvPicPr>
             <a:picLocks noChangeAspect="1"/>
           </p:cNvPicPr>
@@ -12887,8 +10653,8 @@
         </p:blipFill>
         <p:spPr>
           <a:xfrm>
-            <a:off x="6812280" y="3108960"/>
-            <a:ext cx="4572000" cy="1194816"/>
+            <a:off x="6263640" y="4529754"/>
+            <a:ext cx="3794760" cy="460792"/>
           </a:xfrm>
           <a:prstGeom prst="rect">
             <a:avLst/>
@@ -12910,14 +10676,14 @@
       </p:pic>
       <p:sp>
         <p:nvSpPr>
-          <p:cNvPr id="10" name="TextBox 9"/>
+          <p:cNvPr id="18" name="TextBox 17"/>
           <p:cNvSpPr txBox="1"/>
           <p:nvPr/>
         </p:nvSpPr>
         <p:spPr>
           <a:xfrm>
-            <a:off x="1463040" y="5440680"/>
-            <a:ext cx="9235440" cy="731520"/>
+            <a:off x="5989320" y="5063699"/>
+            <a:ext cx="4343400" cy="256032"/>
           </a:xfrm>
           <a:prstGeom prst="rect">
             <a:avLst/>
@@ -12932,45 +10698,25 @@
           <a:p>
             <a:pPr algn="ctr">
               <a:lnSpc>
-                <a:spcPct val="150000"/>
-              </a:lnSpc>
-            </a:pPr>
-            <a:r>
-              <a:rPr sz="1250" b="0" i="0">
-                <a:solidFill>
-                  <a:srgbClr val="28364A"/>
+                <a:spcPct val="100000"/>
+              </a:lnSpc>
+            </a:pPr>
+            <a:r>
+              <a:rPr sz="900" b="0" i="0">
+                <a:solidFill>
+                  <a:srgbClr val="455569"/>
                 </a:solidFill>
                 <a:latin typeface="Pretendard"/>
                 <a:ea typeface="Pretendard"/>
               </a:rPr>
-              <a:t>오늘 소개할 내용은 </a:t>
-            </a:r>
-            <a:r>
-              <a:rPr sz="1250" b="0" i="0">
-                <a:solidFill>
-                  <a:srgbClr val="28364A"/>
-                </a:solidFill>
-                <a:latin typeface="Pretendard ExtraBold"/>
-                <a:ea typeface="Pretendard ExtraBold"/>
-              </a:rPr>
-              <a:t>최근 새로 추가된 기능들</a:t>
-            </a:r>
-            <a:r>
-              <a:rPr sz="1250" b="0" i="0">
-                <a:solidFill>
-                  <a:srgbClr val="28364A"/>
-                </a:solidFill>
-                <a:latin typeface="Pretendard"/>
-                <a:ea typeface="Pretendard"/>
-              </a:rPr>
-              <a:t>입니다. 전부 실제 화면으로 보여드립니다.</a:t>
-            </a:r>
-          </a:p>
-        </p:txBody>
-      </p:sp>
-      <p:sp>
-        <p:nvSpPr>
-          <p:cNvPr id="11" name="Rounded Rectangle 10"/>
+              <a:t>실제 생성 결과 — 복사해서 바로 씁니다</a:t>
+            </a:r>
+          </a:p>
+        </p:txBody>
+      </p:sp>
+      <p:sp>
+        <p:nvSpPr>
+          <p:cNvPr id="19" name="Rounded Rectangle 18"/>
           <p:cNvSpPr/>
           <p:nvPr/>
         </p:nvSpPr>
@@ -13025,7 +10771,7 @@
                 <a:latin typeface="Pretendard SemiBold"/>
                 <a:ea typeface="Pretendard SemiBold"/>
               </a:rPr>
-              <a:t>3 / 19</a:t>
+              <a:t>3 / 15</a:t>
             </a:r>
           </a:p>
         </p:txBody>
@@ -13138,62 +10884,20 @@
       </p:sp>
       <p:sp>
         <p:nvSpPr>
-          <p:cNvPr id="4" name="TextBox 3"/>
-          <p:cNvSpPr txBox="1"/>
-          <p:nvPr/>
-        </p:nvSpPr>
-        <p:spPr>
-          <a:xfrm>
-            <a:off x="8503920" y="1645920"/>
-            <a:ext cx="3017520" cy="3474720"/>
-          </a:xfrm>
-          <a:prstGeom prst="rect">
-            <a:avLst/>
-          </a:prstGeom>
-          <a:noFill/>
-        </p:spPr>
-        <p:txBody>
-          <a:bodyPr wrap="square" lIns="0" rIns="0" tIns="0" bIns="0">
-            <a:spAutoFit/>
-          </a:bodyPr>
-          <a:lstStyle/>
-          <a:p>
-            <a:pPr algn="r">
-              <a:lnSpc>
-                <a:spcPct val="100000"/>
-              </a:lnSpc>
-            </a:pPr>
-            <a:r>
-              <a:rPr sz="19000" b="1" i="0">
-                <a:solidFill>
-                  <a:srgbClr val="ECE4D4"/>
-                </a:solidFill>
-                <a:latin typeface="Noto Serif KR"/>
-                <a:ea typeface="Noto Serif KR"/>
-              </a:rPr>
-              <a:t>1</a:t>
-            </a:r>
-          </a:p>
-        </p:txBody>
-      </p:sp>
-      <p:sp>
-        <p:nvSpPr>
-          <p:cNvPr id="5" name="Rounded Rectangle 4"/>
+          <p:cNvPr id="4" name="Rectangle 3"/>
           <p:cNvSpPr/>
           <p:nvPr/>
         </p:nvSpPr>
         <p:spPr>
           <a:xfrm>
-            <a:off x="822960" y="2148840"/>
-            <a:ext cx="868680" cy="384048"/>
-          </a:xfrm>
-          <a:prstGeom prst="roundRect">
-            <a:avLst>
-              <a:gd name="adj" fmla="val 50000"/>
-            </a:avLst>
+            <a:off x="822960" y="644652"/>
+            <a:ext cx="384048" cy="16459"/>
+          </a:xfrm>
+          <a:prstGeom prst="rect">
+            <a:avLst/>
           </a:prstGeom>
           <a:solidFill>
-            <a:srgbClr val="F6EFE5"/>
+            <a:srgbClr val="9A7440"/>
           </a:solidFill>
           <a:ln>
             <a:noFill/>
@@ -13215,37 +10919,23 @@
           </a:fontRef>
         </p:style>
         <p:txBody>
-          <a:bodyPr rtlCol="0" anchor="ctr" wrap="none" lIns="0" rIns="0" tIns="0" bIns="0"/>
-          <a:lstStyle/>
-          <a:p>
-            <a:pPr algn="ctr">
-              <a:lnSpc>
-                <a:spcPct val="100000"/>
-              </a:lnSpc>
-            </a:pPr>
-            <a:r>
-              <a:rPr sz="1150" b="0" i="0">
-                <a:solidFill>
-                  <a:srgbClr val="9A7440"/>
-                </a:solidFill>
-                <a:latin typeface="Pretendard SemiBold"/>
-                <a:ea typeface="Pretendard SemiBold"/>
-              </a:rPr>
-              <a:t>1부</a:t>
-            </a:r>
-          </a:p>
-        </p:txBody>
-      </p:sp>
-      <p:sp>
-        <p:nvSpPr>
-          <p:cNvPr id="6" name="TextBox 5"/>
+          <a:bodyPr rtlCol="0" anchor="ctr"/>
+          <a:lstStyle/>
+          <a:p>
+            <a:pPr algn="ctr"/>
+          </a:p>
+        </p:txBody>
+      </p:sp>
+      <p:sp>
+        <p:nvSpPr>
+          <p:cNvPr id="5" name="TextBox 4"/>
           <p:cNvSpPr txBox="1"/>
           <p:nvPr/>
         </p:nvSpPr>
         <p:spPr>
           <a:xfrm>
-            <a:off x="822960" y="2743200"/>
-            <a:ext cx="6949440" cy="2468880"/>
+            <a:off x="1325880" y="566928"/>
+            <a:ext cx="8686800" cy="274320"/>
           </a:xfrm>
           <a:prstGeom prst="rect">
             <a:avLst/>
@@ -13260,55 +10950,586 @@
           <a:p>
             <a:pPr algn="l">
               <a:lnSpc>
-                <a:spcPct val="132000"/>
-              </a:lnSpc>
-            </a:pPr>
-            <a:r>
-              <a:rPr sz="3200" b="1" i="0">
+                <a:spcPct val="100000"/>
+              </a:lnSpc>
+            </a:pPr>
+            <a:r>
+              <a:rPr sz="1050" b="0" i="0" spc="190">
+                <a:solidFill>
+                  <a:srgbClr val="1F5068"/>
+                </a:solidFill>
+                <a:latin typeface="Pretendard ExtraBold"/>
+                <a:ea typeface="Pretendard ExtraBold"/>
+              </a:rPr>
+              <a:t>프리캔버스 첫 화면</a:t>
+            </a:r>
+          </a:p>
+        </p:txBody>
+      </p:sp>
+      <p:sp>
+        <p:nvSpPr>
+          <p:cNvPr id="6" name="TextBox 5"/>
+          <p:cNvSpPr txBox="1"/>
+          <p:nvPr/>
+        </p:nvSpPr>
+        <p:spPr>
+          <a:xfrm>
+            <a:off x="822960" y="932688"/>
+            <a:ext cx="10515600" cy="566928"/>
+          </a:xfrm>
+          <a:prstGeom prst="rect">
+            <a:avLst/>
+          </a:prstGeom>
+          <a:noFill/>
+        </p:spPr>
+        <p:txBody>
+          <a:bodyPr wrap="square" lIns="0" rIns="0" tIns="0" bIns="0">
+            <a:spAutoFit/>
+          </a:bodyPr>
+          <a:lstStyle/>
+          <a:p>
+            <a:pPr algn="l">
+              <a:lnSpc>
+                <a:spcPct val="100000"/>
+              </a:lnSpc>
+            </a:pPr>
+            <a:r>
+              <a:rPr sz="2300" b="1" i="0">
                 <a:solidFill>
                   <a:srgbClr val="1D2735"/>
                 </a:solidFill>
                 <a:latin typeface="Noto Serif KR"/>
                 <a:ea typeface="Noto Serif KR"/>
               </a:rPr>
-              <a:t>검색마스터</a:t>
-            </a:r>
-          </a:p>
+              <a:t>세 가지 작업 중에 골라 시작합니다.</a:t>
+            </a:r>
+          </a:p>
+        </p:txBody>
+      </p:sp>
+      <p:pic>
+        <p:nvPicPr>
+          <p:cNvPr id="7" name="Picture 6" descr="fc_modes.jpg"/>
+          <p:cNvPicPr>
+            <a:picLocks noChangeAspect="1"/>
+          </p:cNvPicPr>
+          <p:nvPr/>
+        </p:nvPicPr>
+        <p:blipFill>
+          <a:blip r:embed="rId2"/>
+          <a:stretch>
+            <a:fillRect/>
+          </a:stretch>
+        </p:blipFill>
+        <p:spPr>
+          <a:xfrm>
+            <a:off x="822960" y="1600200"/>
+            <a:ext cx="10543032" cy="1286250"/>
+          </a:xfrm>
+          <a:prstGeom prst="rect">
+            <a:avLst/>
+          </a:prstGeom>
+          <a:ln w="12700">
+            <a:solidFill>
+              <a:srgbClr val="EBE5DB"/>
+            </a:solidFill>
+          </a:ln>
+          <a:effectLst/>
+          <a:effectLst>
+            <a:outerShdw blurRad="170000" dist="50000" dir="5400000" rotWithShape="0">
+              <a:srgbClr val="16241C">
+                <a:alpha val="30000"/>
+              </a:srgbClr>
+            </a:outerShdw>
+          </a:effectLst>
+        </p:spPr>
+      </p:pic>
+      <p:sp>
+        <p:nvSpPr>
+          <p:cNvPr id="8" name="Rectangle 7"/>
+          <p:cNvSpPr/>
+          <p:nvPr/>
+        </p:nvSpPr>
+        <p:spPr>
+          <a:xfrm>
+            <a:off x="822960" y="3206489"/>
+            <a:ext cx="29260" cy="566928"/>
+          </a:xfrm>
+          <a:prstGeom prst="rect">
+            <a:avLst/>
+          </a:prstGeom>
+          <a:solidFill>
+            <a:srgbClr val="1F5068"/>
+          </a:solidFill>
+          <a:ln>
+            <a:noFill/>
+          </a:ln>
+          <a:effectLst/>
+        </p:spPr>
+        <p:style>
+          <a:lnRef idx="1">
+            <a:schemeClr val="accent1"/>
+          </a:lnRef>
+          <a:fillRef idx="3">
+            <a:schemeClr val="accent1"/>
+          </a:fillRef>
+          <a:effectRef idx="2">
+            <a:schemeClr val="accent1"/>
+          </a:effectRef>
+          <a:fontRef idx="minor">
+            <a:schemeClr val="lt1"/>
+          </a:fontRef>
+        </p:style>
+        <p:txBody>
+          <a:bodyPr rtlCol="0" anchor="ctr"/>
+          <a:lstStyle/>
+          <a:p>
+            <a:pPr algn="ctr"/>
+          </a:p>
+        </p:txBody>
+      </p:sp>
+      <p:sp>
+        <p:nvSpPr>
+          <p:cNvPr id="9" name="TextBox 8"/>
+          <p:cNvSpPr txBox="1"/>
+          <p:nvPr/>
+        </p:nvSpPr>
+        <p:spPr>
+          <a:xfrm>
+            <a:off x="1024128" y="3179057"/>
+            <a:ext cx="5760720" cy="658368"/>
+          </a:xfrm>
+          <a:prstGeom prst="rect">
+            <a:avLst/>
+          </a:prstGeom>
+          <a:noFill/>
+        </p:spPr>
+        <p:txBody>
+          <a:bodyPr wrap="square" lIns="0" rIns="0" tIns="0" bIns="0">
+            <a:spAutoFit/>
+          </a:bodyPr>
+          <a:lstStyle/>
           <a:p>
             <a:pPr algn="l">
               <a:lnSpc>
-                <a:spcPct val="132000"/>
-              </a:lnSpc>
-            </a:pPr>
-            <a:r>
-              <a:rPr sz="3200" b="1" i="0">
+                <a:spcPct val="100000"/>
+              </a:lnSpc>
+              <a:spcAft>
+                <a:spcPts val="200"/>
+              </a:spcAft>
+            </a:pPr>
+            <a:r>
+              <a:rPr sz="1250" b="0" i="0">
                 <a:solidFill>
                   <a:srgbClr val="1D2735"/>
                 </a:solidFill>
-                <a:latin typeface="Noto Serif KR"/>
-                <a:ea typeface="Noto Serif KR"/>
-              </a:rPr>
-              <a:t>새 기능</a:t>
+                <a:latin typeface="Pretendard ExtraBold"/>
+                <a:ea typeface="Pretendard ExtraBold"/>
+              </a:rPr>
+              <a:t>새 상세페이지 만들기</a:t>
             </a:r>
           </a:p>
           <a:p>
             <a:pPr algn="l">
               <a:lnSpc>
-                <a:spcPct val="145000"/>
-              </a:lnSpc>
-              <a:spcBef>
-                <a:spcPts val="1400"/>
-              </a:spcBef>
-            </a:pPr>
-            <a:r>
-              <a:rPr sz="1300" b="0" i="0">
+                <a:spcPct val="125000"/>
+              </a:lnSpc>
+            </a:pPr>
+            <a:r>
+              <a:rPr sz="1050" b="0" i="0">
                 <a:solidFill>
                   <a:srgbClr val="455569"/>
                 </a:solidFill>
                 <a:latin typeface="Pretendard"/>
                 <a:ea typeface="Pretendard"/>
               </a:rPr>
-              <a:t>상품명 생성기에 추가된 기능을 소개합니다.</a:t>
+              <a:t>제품 사진과 정보를 넣으면 상세페이지를 처음부터 만들어 줍니다.</a:t>
+            </a:r>
+          </a:p>
+        </p:txBody>
+      </p:sp>
+      <p:sp>
+        <p:nvSpPr>
+          <p:cNvPr id="10" name="Rectangle 9"/>
+          <p:cNvSpPr/>
+          <p:nvPr/>
+        </p:nvSpPr>
+        <p:spPr>
+          <a:xfrm>
+            <a:off x="822960" y="3956297"/>
+            <a:ext cx="29260" cy="566928"/>
+          </a:xfrm>
+          <a:prstGeom prst="rect">
+            <a:avLst/>
+          </a:prstGeom>
+          <a:solidFill>
+            <a:srgbClr val="9A7440"/>
+          </a:solidFill>
+          <a:ln>
+            <a:noFill/>
+          </a:ln>
+          <a:effectLst/>
+        </p:spPr>
+        <p:style>
+          <a:lnRef idx="1">
+            <a:schemeClr val="accent1"/>
+          </a:lnRef>
+          <a:fillRef idx="3">
+            <a:schemeClr val="accent1"/>
+          </a:fillRef>
+          <a:effectRef idx="2">
+            <a:schemeClr val="accent1"/>
+          </a:effectRef>
+          <a:fontRef idx="minor">
+            <a:schemeClr val="lt1"/>
+          </a:fontRef>
+        </p:style>
+        <p:txBody>
+          <a:bodyPr rtlCol="0" anchor="ctr"/>
+          <a:lstStyle/>
+          <a:p>
+            <a:pPr algn="ctr"/>
+          </a:p>
+        </p:txBody>
+      </p:sp>
+      <p:sp>
+        <p:nvSpPr>
+          <p:cNvPr id="11" name="TextBox 10"/>
+          <p:cNvSpPr txBox="1"/>
+          <p:nvPr/>
+        </p:nvSpPr>
+        <p:spPr>
+          <a:xfrm>
+            <a:off x="1024128" y="3928865"/>
+            <a:ext cx="5760720" cy="658368"/>
+          </a:xfrm>
+          <a:prstGeom prst="rect">
+            <a:avLst/>
+          </a:prstGeom>
+          <a:noFill/>
+        </p:spPr>
+        <p:txBody>
+          <a:bodyPr wrap="square" lIns="0" rIns="0" tIns="0" bIns="0">
+            <a:spAutoFit/>
+          </a:bodyPr>
+          <a:lstStyle/>
+          <a:p>
+            <a:pPr algn="l">
+              <a:lnSpc>
+                <a:spcPct val="100000"/>
+              </a:lnSpc>
+              <a:spcAft>
+                <a:spcPts val="200"/>
+              </a:spcAft>
+            </a:pPr>
+            <a:r>
+              <a:rPr sz="1250" b="0" i="0">
+                <a:solidFill>
+                  <a:srgbClr val="1D2735"/>
+                </a:solidFill>
+                <a:latin typeface="Pretendard ExtraBold"/>
+                <a:ea typeface="Pretendard ExtraBold"/>
+              </a:rPr>
+              <a:t>기존 상세페이지 편집</a:t>
+            </a:r>
+          </a:p>
+          <a:p>
+            <a:pPr algn="l">
+              <a:lnSpc>
+                <a:spcPct val="125000"/>
+              </a:lnSpc>
+            </a:pPr>
+            <a:r>
+              <a:rPr sz="1050" b="0" i="0">
+                <a:solidFill>
+                  <a:srgbClr val="455569"/>
+                </a:solidFill>
+                <a:latin typeface="Pretendard"/>
+                <a:ea typeface="Pretendard"/>
+              </a:rPr>
+              <a:t>이미 있는 상세 캡처를 올려 블록 단위로 수정합니다.</a:t>
+            </a:r>
+          </a:p>
+        </p:txBody>
+      </p:sp>
+      <p:sp>
+        <p:nvSpPr>
+          <p:cNvPr id="12" name="Rectangle 11"/>
+          <p:cNvSpPr/>
+          <p:nvPr/>
+        </p:nvSpPr>
+        <p:spPr>
+          <a:xfrm>
+            <a:off x="822960" y="4706105"/>
+            <a:ext cx="29260" cy="566928"/>
+          </a:xfrm>
+          <a:prstGeom prst="rect">
+            <a:avLst/>
+          </a:prstGeom>
+          <a:solidFill>
+            <a:srgbClr val="1D2735"/>
+          </a:solidFill>
+          <a:ln>
+            <a:noFill/>
+          </a:ln>
+          <a:effectLst/>
+        </p:spPr>
+        <p:style>
+          <a:lnRef idx="1">
+            <a:schemeClr val="accent1"/>
+          </a:lnRef>
+          <a:fillRef idx="3">
+            <a:schemeClr val="accent1"/>
+          </a:fillRef>
+          <a:effectRef idx="2">
+            <a:schemeClr val="accent1"/>
+          </a:effectRef>
+          <a:fontRef idx="minor">
+            <a:schemeClr val="lt1"/>
+          </a:fontRef>
+        </p:style>
+        <p:txBody>
+          <a:bodyPr rtlCol="0" anchor="ctr"/>
+          <a:lstStyle/>
+          <a:p>
+            <a:pPr algn="ctr"/>
+          </a:p>
+        </p:txBody>
+      </p:sp>
+      <p:sp>
+        <p:nvSpPr>
+          <p:cNvPr id="13" name="TextBox 12"/>
+          <p:cNvSpPr txBox="1"/>
+          <p:nvPr/>
+        </p:nvSpPr>
+        <p:spPr>
+          <a:xfrm>
+            <a:off x="1024128" y="4678673"/>
+            <a:ext cx="5760720" cy="658368"/>
+          </a:xfrm>
+          <a:prstGeom prst="rect">
+            <a:avLst/>
+          </a:prstGeom>
+          <a:noFill/>
+        </p:spPr>
+        <p:txBody>
+          <a:bodyPr wrap="square" lIns="0" rIns="0" tIns="0" bIns="0">
+            <a:spAutoFit/>
+          </a:bodyPr>
+          <a:lstStyle/>
+          <a:p>
+            <a:pPr algn="l">
+              <a:lnSpc>
+                <a:spcPct val="100000"/>
+              </a:lnSpc>
+              <a:spcAft>
+                <a:spcPts val="200"/>
+              </a:spcAft>
+            </a:pPr>
+            <a:r>
+              <a:rPr sz="1250" b="0" i="0">
+                <a:solidFill>
+                  <a:srgbClr val="1D2735"/>
+                </a:solidFill>
+                <a:latin typeface="Pretendard ExtraBold"/>
+                <a:ea typeface="Pretendard ExtraBold"/>
+              </a:rPr>
+              <a:t>1688 영상 번역</a:t>
+            </a:r>
+          </a:p>
+          <a:p>
+            <a:pPr algn="l">
+              <a:lnSpc>
+                <a:spcPct val="125000"/>
+              </a:lnSpc>
+            </a:pPr>
+            <a:r>
+              <a:rPr sz="1050" b="0" i="0">
+                <a:solidFill>
+                  <a:srgbClr val="455569"/>
+                </a:solidFill>
+                <a:latin typeface="Pretendard"/>
+                <a:ea typeface="Pretendard"/>
+              </a:rPr>
+              <a:t>중국 상품 영상을 한국어 자막·더빙 영상으로 바꿉니다.</a:t>
+            </a:r>
+          </a:p>
+        </p:txBody>
+      </p:sp>
+      <p:sp>
+        <p:nvSpPr>
+          <p:cNvPr id="14" name="TextBox 13"/>
+          <p:cNvSpPr txBox="1"/>
+          <p:nvPr/>
+        </p:nvSpPr>
+        <p:spPr>
+          <a:xfrm>
+            <a:off x="822960" y="5483345"/>
+            <a:ext cx="5943600" cy="594360"/>
+          </a:xfrm>
+          <a:prstGeom prst="rect">
+            <a:avLst/>
+          </a:prstGeom>
+          <a:noFill/>
+        </p:spPr>
+        <p:txBody>
+          <a:bodyPr wrap="square" lIns="0" rIns="0" tIns="0" bIns="0">
+            <a:spAutoFit/>
+          </a:bodyPr>
+          <a:lstStyle/>
+          <a:p>
+            <a:pPr algn="l">
+              <a:lnSpc>
+                <a:spcPct val="135000"/>
+              </a:lnSpc>
+            </a:pPr>
+            <a:r>
+              <a:rPr sz="1100" b="0" i="0">
+                <a:solidFill>
+                  <a:srgbClr val="28364A"/>
+                </a:solidFill>
+                <a:latin typeface="Pretendard"/>
+                <a:ea typeface="Pretendard"/>
+              </a:rPr>
+              <a:t>결과물 종류는 일반·의류·과일채소 상세페이지에 </a:t>
+            </a:r>
+            <a:r>
+              <a:rPr sz="1100" b="0" i="0">
+                <a:solidFill>
+                  <a:srgbClr val="28364A"/>
+                </a:solidFill>
+                <a:latin typeface="Pretendard ExtraBold"/>
+                <a:ea typeface="Pretendard ExtraBold"/>
+              </a:rPr>
+              <a:t>카드뉴스</a:t>
+            </a:r>
+            <a:r>
+              <a:rPr sz="1100" b="0" i="0">
+                <a:solidFill>
+                  <a:srgbClr val="28364A"/>
+                </a:solidFill>
+                <a:latin typeface="Pretendard"/>
+                <a:ea typeface="Pretendard"/>
+              </a:rPr>
+              <a:t>, </a:t>
+            </a:r>
+            <a:r>
+              <a:rPr sz="1100" b="0" i="0">
+                <a:solidFill>
+                  <a:srgbClr val="28364A"/>
+                </a:solidFill>
+                <a:latin typeface="Pretendard ExtraBold"/>
+                <a:ea typeface="Pretendard ExtraBold"/>
+              </a:rPr>
+              <a:t>상품 썸네일</a:t>
+            </a:r>
+            <a:r>
+              <a:rPr sz="1100" b="0" i="0">
+                <a:solidFill>
+                  <a:srgbClr val="28364A"/>
+                </a:solidFill>
+                <a:latin typeface="Pretendard"/>
+                <a:ea typeface="Pretendard"/>
+              </a:rPr>
+              <a:t>까지 다섯 가지입니다.</a:t>
+            </a:r>
+          </a:p>
+        </p:txBody>
+      </p:sp>
+      <p:pic>
+        <p:nvPicPr>
+          <p:cNvPr id="15" name="Picture 14" descr="fc_types.jpg"/>
+          <p:cNvPicPr>
+            <a:picLocks noChangeAspect="1"/>
+          </p:cNvPicPr>
+          <p:nvPr/>
+        </p:nvPicPr>
+        <p:blipFill>
+          <a:blip r:embed="rId3"/>
+          <a:stretch>
+            <a:fillRect/>
+          </a:stretch>
+        </p:blipFill>
+        <p:spPr>
+          <a:xfrm>
+            <a:off x="8092440" y="3224777"/>
+            <a:ext cx="1783080" cy="2473054"/>
+          </a:xfrm>
+          <a:prstGeom prst="rect">
+            <a:avLst/>
+          </a:prstGeom>
+          <a:ln w="12700">
+            <a:solidFill>
+              <a:srgbClr val="EBE5DB"/>
+            </a:solidFill>
+          </a:ln>
+          <a:effectLst/>
+          <a:effectLst>
+            <a:outerShdw blurRad="170000" dist="50000" dir="5400000" rotWithShape="0">
+              <a:srgbClr val="16241C">
+                <a:alpha val="30000"/>
+              </a:srgbClr>
+            </a:outerShdw>
+          </a:effectLst>
+        </p:spPr>
+      </p:pic>
+      <p:sp>
+        <p:nvSpPr>
+          <p:cNvPr id="16" name="Rounded Rectangle 15"/>
+          <p:cNvSpPr/>
+          <p:nvPr/>
+        </p:nvSpPr>
+        <p:spPr>
+          <a:xfrm>
+            <a:off x="502920" y="6355080"/>
+            <a:ext cx="868680" cy="329184"/>
+          </a:xfrm>
+          <a:prstGeom prst="roundRect">
+            <a:avLst>
+              <a:gd name="adj" fmla="val 50000"/>
+            </a:avLst>
+          </a:prstGeom>
+          <a:solidFill>
+            <a:srgbClr val="FFFFFF"/>
+          </a:solidFill>
+          <a:ln w="9525">
+            <a:solidFill>
+              <a:srgbClr val="EBE5DB"/>
+            </a:solidFill>
+          </a:ln>
+          <a:effectLst/>
+        </p:spPr>
+        <p:style>
+          <a:lnRef idx="1">
+            <a:schemeClr val="accent1"/>
+          </a:lnRef>
+          <a:fillRef idx="3">
+            <a:schemeClr val="accent1"/>
+          </a:fillRef>
+          <a:effectRef idx="2">
+            <a:schemeClr val="accent1"/>
+          </a:effectRef>
+          <a:fontRef idx="minor">
+            <a:schemeClr val="lt1"/>
+          </a:fontRef>
+        </p:style>
+        <p:txBody>
+          <a:bodyPr rtlCol="0" anchor="ctr" wrap="none" lIns="0" rIns="0" tIns="0" bIns="0"/>
+          <a:lstStyle/>
+          <a:p>
+            <a:pPr algn="ctr">
+              <a:lnSpc>
+                <a:spcPct val="100000"/>
+              </a:lnSpc>
+            </a:pPr>
+            <a:r>
+              <a:rPr sz="1050" b="0" i="0">
+                <a:solidFill>
+                  <a:srgbClr val="455569"/>
+                </a:solidFill>
+                <a:latin typeface="Pretendard SemiBold"/>
+                <a:ea typeface="Pretendard SemiBold"/>
+              </a:rPr>
+              <a:t>4 / 15</a:t>
             </a:r>
           </a:p>
         </p:txBody>
@@ -13498,7 +11719,7 @@
                 <a:latin typeface="Pretendard ExtraBold"/>
                 <a:ea typeface="Pretendard ExtraBold"/>
               </a:rPr>
-              <a:t>검색마스터 새 기능</a:t>
+              <a:t>프리캔버스 새 기능 ①</a:t>
             </a:r>
           </a:p>
         </p:txBody>
@@ -13538,7 +11759,7 @@
                 <a:latin typeface="Noto Serif KR"/>
                 <a:ea typeface="Noto Serif KR"/>
               </a:rPr>
-              <a:t>상품 설명 입력</a:t>
+              <a:t>상품 링크로 빠른 시작</a:t>
             </a:r>
           </a:p>
           <a:p>
@@ -13558,7 +11779,7 @@
                 <a:latin typeface="Pretendard"/>
                 <a:ea typeface="Pretendard"/>
               </a:rPr>
-              <a:t>사진과 함께 상품 설명을 입력하면, 상품명이 눈에 띄게 정확해집니다.</a:t>
+              <a:t>소싱한 상품의 주소만 붙여넣으면, 이미지와 상품 정보가 자동으로 담깁니다.</a:t>
             </a:r>
           </a:p>
         </p:txBody>
@@ -13598,7 +11819,7 @@
                 <a:latin typeface="Pretendard"/>
                 <a:ea typeface="Pretendard"/>
               </a:rPr>
-              <a:t>✏️</a:t>
+              <a:t>🔗</a:t>
             </a:r>
           </a:p>
         </p:txBody>
@@ -13641,7 +11862,7 @@
                 <a:latin typeface="Pretendard ExtraBold"/>
                 <a:ea typeface="Pretendard ExtraBold"/>
               </a:rPr>
-              <a:t>실제 상품·용도 설명 입력</a:t>
+              <a:t>스마트스토어·1688 링크 불러오기</a:t>
             </a:r>
           </a:p>
           <a:p>
@@ -13658,7 +11879,7 @@
                 <a:latin typeface="Pretendard"/>
                 <a:ea typeface="Pretendard"/>
               </a:rPr>
-              <a:t>“책상 위에 놓는 무선 충전 겸용 스탠드”처럼 한 줄만 적으면, 사진만으로는 놓치기 쉬운 재질과 용도까지 상품명에 담깁니다.</a:t>
+              <a:t>상품 주소를 붙여넣으면 새 창이 열려 상세 내용과 이미지를 가져옵니다. 최근 업데이트로 속도가 눈에 띄게 빨라졌습니다.</a:t>
             </a:r>
           </a:p>
         </p:txBody>
@@ -13742,7 +11963,7 @@
                 <a:latin typeface="Pretendard"/>
                 <a:ea typeface="Pretendard"/>
               </a:rPr>
-              <a:t>🛍️</a:t>
+              <a:t>🤖</a:t>
             </a:r>
           </a:p>
         </p:txBody>
@@ -13785,7 +12006,7 @@
                 <a:latin typeface="Pretendard ExtraBold"/>
                 <a:ea typeface="Pretendard ExtraBold"/>
               </a:rPr>
-              <a:t>판매 채널별 상품명</a:t>
+              <a:t>상품 아닌 이미지는 AI가 거릅니다</a:t>
             </a:r>
           </a:p>
           <a:p>
@@ -13802,7 +12023,7 @@
                 <a:latin typeface="Pretendard"/>
                 <a:ea typeface="Pretendard"/>
               </a:rPr>
-              <a:t>네이버쇼핑은 검색 노출 폭, 쿠팡은 구매 판단 키워드, 일반몰은 가독성 — 채널을 고르면 그에 맞춰 짓습니다.</a:t>
+              <a:t>공지·구매평·할인 배너처럼 상세에 못 쓰는 이미지를 알아서 빼고, 중국어 문구도 한국어 기준으로 정리합니다.</a:t>
             </a:r>
           </a:p>
         </p:txBody>
@@ -13886,7 +12107,7 @@
                 <a:latin typeface="Pretendard"/>
                 <a:ea typeface="Pretendard"/>
               </a:rPr>
-              <a:t>⚡</a:t>
+              <a:t>🧩</a:t>
             </a:r>
           </a:p>
         </p:txBody>
@@ -13929,7 +12150,7 @@
                 <a:latin typeface="Pretendard ExtraBold"/>
                 <a:ea typeface="Pretendard ExtraBold"/>
               </a:rPr>
-              <a:t>업로드·생성 화면 개선</a:t>
+              <a:t>확장 프로그램은 한 번만 설치</a:t>
             </a:r>
           </a:p>
           <a:p>
@@ -13946,14 +12167,14 @@
                 <a:latin typeface="Pretendard"/>
                 <a:ea typeface="Pretendard"/>
               </a:rPr>
-              <a:t>사진을 올리면 바로 보이고, 생성 진행 상태도 화면에 그대로 표시됩니다.</a:t>
+              <a:t>웹스토어 버튼과 설치 안내가 화면 안에 있습니다. 처음 한 번만 설치하면 다음부터는 붙여넣기만 하면 됩니다.</a:t>
             </a:r>
           </a:p>
         </p:txBody>
       </p:sp>
       <p:pic>
         <p:nvPicPr>
-          <p:cNvPr id="15" name="Picture 14" descr="sm_app.jpg"/>
+          <p:cNvPr id="15" name="Picture 14" descr="fc_link.jpg"/>
           <p:cNvPicPr>
             <a:picLocks noChangeAspect="1"/>
           </p:cNvPicPr>
@@ -13967,8 +12188,8 @@
         </p:blipFill>
         <p:spPr>
           <a:xfrm>
-            <a:off x="6263640" y="1170432"/>
-            <a:ext cx="4343400" cy="3353105"/>
+            <a:off x="6263640" y="1783080"/>
+            <a:ext cx="4892040" cy="2690622"/>
           </a:xfrm>
           <a:prstGeom prst="rect">
             <a:avLst/>
@@ -13996,8 +12217,8 @@
         </p:nvSpPr>
         <p:spPr>
           <a:xfrm>
-            <a:off x="5989320" y="4633264"/>
-            <a:ext cx="4892040" cy="256032"/>
+            <a:off x="5989320" y="4583430"/>
+            <a:ext cx="5440679" cy="256032"/>
           </a:xfrm>
           <a:prstGeom prst="rect">
             <a:avLst/>
@@ -14023,7 +12244,7 @@
                 <a:latin typeface="Pretendard"/>
                 <a:ea typeface="Pretendard"/>
               </a:rPr>
-              <a:t>사진 · 판매 채널 · 상품 설명 · 추가 키워드 — 한 화면에서 입력합니다</a:t>
+              <a:t>스마트스토어 링크와 1688 링크, 각각 “불러오기” 버튼 하나로 끝납니다</a:t>
             </a:r>
           </a:p>
         </p:txBody>
@@ -14085,7 +12306,7 @@
                 <a:latin typeface="Pretendard SemiBold"/>
                 <a:ea typeface="Pretendard SemiBold"/>
               </a:rPr>
-              <a:t>5 / 19</a:t>
+              <a:t>5 / 15</a:t>
             </a:r>
           </a:p>
         </p:txBody>
@@ -14198,62 +12419,20 @@
       </p:sp>
       <p:sp>
         <p:nvSpPr>
-          <p:cNvPr id="4" name="TextBox 3"/>
-          <p:cNvSpPr txBox="1"/>
-          <p:nvPr/>
-        </p:nvSpPr>
-        <p:spPr>
-          <a:xfrm>
-            <a:off x="8503920" y="1645920"/>
-            <a:ext cx="3017520" cy="3474720"/>
-          </a:xfrm>
-          <a:prstGeom prst="rect">
-            <a:avLst/>
-          </a:prstGeom>
-          <a:noFill/>
-        </p:spPr>
-        <p:txBody>
-          <a:bodyPr wrap="square" lIns="0" rIns="0" tIns="0" bIns="0">
-            <a:spAutoFit/>
-          </a:bodyPr>
-          <a:lstStyle/>
-          <a:p>
-            <a:pPr algn="r">
-              <a:lnSpc>
-                <a:spcPct val="100000"/>
-              </a:lnSpc>
-            </a:pPr>
-            <a:r>
-              <a:rPr sz="19000" b="1" i="0">
-                <a:solidFill>
-                  <a:srgbClr val="ECE4D4"/>
-                </a:solidFill>
-                <a:latin typeface="Noto Serif KR"/>
-                <a:ea typeface="Noto Serif KR"/>
-              </a:rPr>
-              <a:t>2</a:t>
-            </a:r>
-          </a:p>
-        </p:txBody>
-      </p:sp>
-      <p:sp>
-        <p:nvSpPr>
-          <p:cNvPr id="5" name="Rounded Rectangle 4"/>
+          <p:cNvPr id="4" name="Rectangle 3"/>
           <p:cNvSpPr/>
           <p:nvPr/>
         </p:nvSpPr>
         <p:spPr>
           <a:xfrm>
-            <a:off x="822960" y="2148840"/>
-            <a:ext cx="868680" cy="384048"/>
-          </a:xfrm>
-          <a:prstGeom prst="roundRect">
-            <a:avLst>
-              <a:gd name="adj" fmla="val 50000"/>
-            </a:avLst>
+            <a:off x="822960" y="644652"/>
+            <a:ext cx="384048" cy="16459"/>
+          </a:xfrm>
+          <a:prstGeom prst="rect">
+            <a:avLst/>
           </a:prstGeom>
           <a:solidFill>
-            <a:srgbClr val="F6EFE5"/>
+            <a:srgbClr val="9A7440"/>
           </a:solidFill>
           <a:ln>
             <a:noFill/>
@@ -14275,37 +12454,23 @@
           </a:fontRef>
         </p:style>
         <p:txBody>
-          <a:bodyPr rtlCol="0" anchor="ctr" wrap="none" lIns="0" rIns="0" tIns="0" bIns="0"/>
-          <a:lstStyle/>
-          <a:p>
-            <a:pPr algn="ctr">
-              <a:lnSpc>
-                <a:spcPct val="100000"/>
-              </a:lnSpc>
-            </a:pPr>
-            <a:r>
-              <a:rPr sz="1150" b="0" i="0">
-                <a:solidFill>
-                  <a:srgbClr val="9A7440"/>
-                </a:solidFill>
-                <a:latin typeface="Pretendard SemiBold"/>
-                <a:ea typeface="Pretendard SemiBold"/>
-              </a:rPr>
-              <a:t>2부</a:t>
-            </a:r>
-          </a:p>
-        </p:txBody>
-      </p:sp>
-      <p:sp>
-        <p:nvSpPr>
-          <p:cNvPr id="6" name="TextBox 5"/>
+          <a:bodyPr rtlCol="0" anchor="ctr"/>
+          <a:lstStyle/>
+          <a:p>
+            <a:pPr algn="ctr"/>
+          </a:p>
+        </p:txBody>
+      </p:sp>
+      <p:sp>
+        <p:nvSpPr>
+          <p:cNvPr id="5" name="TextBox 4"/>
           <p:cNvSpPr txBox="1"/>
           <p:nvPr/>
         </p:nvSpPr>
         <p:spPr>
           <a:xfrm>
-            <a:off x="822960" y="2743200"/>
-            <a:ext cx="6949440" cy="2468880"/>
+            <a:off x="1325880" y="566928"/>
+            <a:ext cx="8686800" cy="274320"/>
           </a:xfrm>
           <a:prstGeom prst="rect">
             <a:avLst/>
@@ -14320,55 +12485,605 @@
           <a:p>
             <a:pPr algn="l">
               <a:lnSpc>
-                <a:spcPct val="132000"/>
-              </a:lnSpc>
-            </a:pPr>
-            <a:r>
-              <a:rPr sz="3200" b="1" i="0">
+                <a:spcPct val="100000"/>
+              </a:lnSpc>
+            </a:pPr>
+            <a:r>
+              <a:rPr sz="1050" b="0" i="0" spc="190">
+                <a:solidFill>
+                  <a:srgbClr val="1F5068"/>
+                </a:solidFill>
+                <a:latin typeface="Pretendard ExtraBold"/>
+                <a:ea typeface="Pretendard ExtraBold"/>
+              </a:rPr>
+              <a:t>프리캔버스 새 기능 ②</a:t>
+            </a:r>
+          </a:p>
+        </p:txBody>
+      </p:sp>
+      <p:sp>
+        <p:nvSpPr>
+          <p:cNvPr id="6" name="TextBox 5"/>
+          <p:cNvSpPr txBox="1"/>
+          <p:nvPr/>
+        </p:nvSpPr>
+        <p:spPr>
+          <a:xfrm>
+            <a:off x="822960" y="1234440"/>
+            <a:ext cx="4937760" cy="1280160"/>
+          </a:xfrm>
+          <a:prstGeom prst="rect">
+            <a:avLst/>
+          </a:prstGeom>
+          <a:noFill/>
+        </p:spPr>
+        <p:txBody>
+          <a:bodyPr wrap="square" lIns="0" rIns="0" tIns="0" bIns="0">
+            <a:spAutoFit/>
+          </a:bodyPr>
+          <a:lstStyle/>
+          <a:p>
+            <a:pPr algn="l">
+              <a:lnSpc>
+                <a:spcPct val="130000"/>
+              </a:lnSpc>
+            </a:pPr>
+            <a:r>
+              <a:rPr sz="2400" b="1" i="0">
                 <a:solidFill>
                   <a:srgbClr val="1D2735"/>
                 </a:solidFill>
                 <a:latin typeface="Noto Serif KR"/>
                 <a:ea typeface="Noto Serif KR"/>
               </a:rPr>
-              <a:t>프리캔버스</a:t>
+              <a:t>1688 영상 번역</a:t>
             </a:r>
           </a:p>
           <a:p>
             <a:pPr algn="l">
               <a:lnSpc>
-                <a:spcPct val="132000"/>
-              </a:lnSpc>
-            </a:pPr>
-            <a:r>
-              <a:rPr sz="3200" b="1" i="0">
-                <a:solidFill>
-                  <a:srgbClr val="1D2735"/>
-                </a:solidFill>
-                <a:latin typeface="Noto Serif KR"/>
-                <a:ea typeface="Noto Serif KR"/>
-              </a:rPr>
-              <a:t>새 기능</a:t>
-            </a:r>
-          </a:p>
-          <a:p>
-            <a:pPr algn="l">
-              <a:lnSpc>
-                <a:spcPct val="145000"/>
+                <a:spcPct val="140000"/>
               </a:lnSpc>
               <a:spcBef>
-                <a:spcPts val="1400"/>
+                <a:spcPts val="800"/>
               </a:spcBef>
             </a:pPr>
             <a:r>
-              <a:rPr sz="1300" b="0" i="0">
+              <a:rPr sz="1200" b="0" i="0">
                 <a:solidFill>
                   <a:srgbClr val="455569"/>
                 </a:solidFill>
                 <a:latin typeface="Pretendard"/>
                 <a:ea typeface="Pretendard"/>
               </a:rPr>
-              <a:t>상세페이지·영상·카드뉴스 제작에 추가된 기능을 소개합니다.</a:t>
+              <a:t>중국어 상품 영상을 쇼츠형 한국어 영상으로 바꿔 줍니다.</a:t>
+            </a:r>
+          </a:p>
+        </p:txBody>
+      </p:sp>
+      <p:sp>
+        <p:nvSpPr>
+          <p:cNvPr id="7" name="TextBox 6"/>
+          <p:cNvSpPr txBox="1"/>
+          <p:nvPr/>
+        </p:nvSpPr>
+        <p:spPr>
+          <a:xfrm>
+            <a:off x="822960" y="2743200"/>
+            <a:ext cx="502920" cy="457200"/>
+          </a:xfrm>
+          <a:prstGeom prst="rect">
+            <a:avLst/>
+          </a:prstGeom>
+          <a:noFill/>
+        </p:spPr>
+        <p:txBody>
+          <a:bodyPr wrap="square" lIns="0" rIns="0" tIns="0" bIns="0">
+            <a:spAutoFit/>
+          </a:bodyPr>
+          <a:lstStyle/>
+          <a:p>
+            <a:pPr algn="ctr">
+              <a:lnSpc>
+                <a:spcPct val="100000"/>
+              </a:lnSpc>
+            </a:pPr>
+            <a:r>
+              <a:rPr sz="1600" b="0" i="0">
+                <a:solidFill>
+                  <a:srgbClr val="1D2735"/>
+                </a:solidFill>
+                <a:latin typeface="Pretendard"/>
+                <a:ea typeface="Pretendard"/>
+              </a:rPr>
+              <a:t>🎬</a:t>
+            </a:r>
+          </a:p>
+        </p:txBody>
+      </p:sp>
+      <p:sp>
+        <p:nvSpPr>
+          <p:cNvPr id="8" name="TextBox 7"/>
+          <p:cNvSpPr txBox="1"/>
+          <p:nvPr/>
+        </p:nvSpPr>
+        <p:spPr>
+          <a:xfrm>
+            <a:off x="1389888" y="2734056"/>
+            <a:ext cx="4297680" cy="960120"/>
+          </a:xfrm>
+          <a:prstGeom prst="rect">
+            <a:avLst/>
+          </a:prstGeom>
+          <a:noFill/>
+        </p:spPr>
+        <p:txBody>
+          <a:bodyPr wrap="square" lIns="0" rIns="0" tIns="0" bIns="0">
+            <a:spAutoFit/>
+          </a:bodyPr>
+          <a:lstStyle/>
+          <a:p>
+            <a:pPr algn="l">
+              <a:lnSpc>
+                <a:spcPct val="100000"/>
+              </a:lnSpc>
+              <a:spcAft>
+                <a:spcPts val="300"/>
+              </a:spcAft>
+            </a:pPr>
+            <a:r>
+              <a:rPr sz="1200" b="0" i="0">
+                <a:solidFill>
+                  <a:srgbClr val="1D2735"/>
+                </a:solidFill>
+                <a:latin typeface="Pretendard ExtraBold"/>
+                <a:ea typeface="Pretendard ExtraBold"/>
+              </a:rPr>
+              <a:t>자막을 자연스러운 한국어로</a:t>
+            </a:r>
+          </a:p>
+          <a:p>
+            <a:pPr algn="l">
+              <a:lnSpc>
+                <a:spcPct val="128000"/>
+              </a:lnSpc>
+            </a:pPr>
+            <a:r>
+              <a:rPr sz="1050" b="0" i="0">
+                <a:solidFill>
+                  <a:srgbClr val="455569"/>
+                </a:solidFill>
+                <a:latin typeface="Pretendard"/>
+                <a:ea typeface="Pretendard"/>
+              </a:rPr>
+              <a:t>중국어 문구를 지우고, AI가 대본을 한국어답게 다듬은 자막을 입힙니다. 번역투가 아니라 읽히는 문장입니다.</a:t>
+            </a:r>
+          </a:p>
+        </p:txBody>
+      </p:sp>
+      <p:sp>
+        <p:nvSpPr>
+          <p:cNvPr id="9" name="Rectangle 8"/>
+          <p:cNvSpPr/>
+          <p:nvPr/>
+        </p:nvSpPr>
+        <p:spPr>
+          <a:xfrm>
+            <a:off x="822960" y="3739896"/>
+            <a:ext cx="4846320" cy="10972"/>
+          </a:xfrm>
+          <a:prstGeom prst="rect">
+            <a:avLst/>
+          </a:prstGeom>
+          <a:solidFill>
+            <a:srgbClr val="EBE5DB"/>
+          </a:solidFill>
+          <a:ln>
+            <a:noFill/>
+          </a:ln>
+          <a:effectLst/>
+        </p:spPr>
+        <p:style>
+          <a:lnRef idx="1">
+            <a:schemeClr val="accent1"/>
+          </a:lnRef>
+          <a:fillRef idx="3">
+            <a:schemeClr val="accent1"/>
+          </a:fillRef>
+          <a:effectRef idx="2">
+            <a:schemeClr val="accent1"/>
+          </a:effectRef>
+          <a:fontRef idx="minor">
+            <a:schemeClr val="lt1"/>
+          </a:fontRef>
+        </p:style>
+        <p:txBody>
+          <a:bodyPr rtlCol="0" anchor="ctr"/>
+          <a:lstStyle/>
+          <a:p>
+            <a:pPr algn="ctr"/>
+          </a:p>
+        </p:txBody>
+      </p:sp>
+      <p:sp>
+        <p:nvSpPr>
+          <p:cNvPr id="10" name="TextBox 9"/>
+          <p:cNvSpPr txBox="1"/>
+          <p:nvPr/>
+        </p:nvSpPr>
+        <p:spPr>
+          <a:xfrm>
+            <a:off x="822960" y="3822191"/>
+            <a:ext cx="502920" cy="457200"/>
+          </a:xfrm>
+          <a:prstGeom prst="rect">
+            <a:avLst/>
+          </a:prstGeom>
+          <a:noFill/>
+        </p:spPr>
+        <p:txBody>
+          <a:bodyPr wrap="square" lIns="0" rIns="0" tIns="0" bIns="0">
+            <a:spAutoFit/>
+          </a:bodyPr>
+          <a:lstStyle/>
+          <a:p>
+            <a:pPr algn="ctr">
+              <a:lnSpc>
+                <a:spcPct val="100000"/>
+              </a:lnSpc>
+            </a:pPr>
+            <a:r>
+              <a:rPr sz="1600" b="0" i="0">
+                <a:solidFill>
+                  <a:srgbClr val="1D2735"/>
+                </a:solidFill>
+                <a:latin typeface="Pretendard"/>
+                <a:ea typeface="Pretendard"/>
+              </a:rPr>
+              <a:t>🔊</a:t>
+            </a:r>
+          </a:p>
+        </p:txBody>
+      </p:sp>
+      <p:sp>
+        <p:nvSpPr>
+          <p:cNvPr id="11" name="TextBox 10"/>
+          <p:cNvSpPr txBox="1"/>
+          <p:nvPr/>
+        </p:nvSpPr>
+        <p:spPr>
+          <a:xfrm>
+            <a:off x="1389888" y="3813048"/>
+            <a:ext cx="4297680" cy="960120"/>
+          </a:xfrm>
+          <a:prstGeom prst="rect">
+            <a:avLst/>
+          </a:prstGeom>
+          <a:noFill/>
+        </p:spPr>
+        <p:txBody>
+          <a:bodyPr wrap="square" lIns="0" rIns="0" tIns="0" bIns="0">
+            <a:spAutoFit/>
+          </a:bodyPr>
+          <a:lstStyle/>
+          <a:p>
+            <a:pPr algn="l">
+              <a:lnSpc>
+                <a:spcPct val="100000"/>
+              </a:lnSpc>
+              <a:spcAft>
+                <a:spcPts val="300"/>
+              </a:spcAft>
+            </a:pPr>
+            <a:r>
+              <a:rPr sz="1200" b="0" i="0">
+                <a:solidFill>
+                  <a:srgbClr val="1D2735"/>
+                </a:solidFill>
+                <a:latin typeface="Pretendard ExtraBold"/>
+                <a:ea typeface="Pretendard ExtraBold"/>
+              </a:rPr>
+              <a:t>한국어 더빙, 원하면 음소거</a:t>
+            </a:r>
+          </a:p>
+          <a:p>
+            <a:pPr algn="l">
+              <a:lnSpc>
+                <a:spcPct val="128000"/>
+              </a:lnSpc>
+            </a:pPr>
+            <a:r>
+              <a:rPr sz="1050" b="0" i="0">
+                <a:solidFill>
+                  <a:srgbClr val="455569"/>
+                </a:solidFill>
+                <a:latin typeface="Pretendard"/>
+                <a:ea typeface="Pretendard"/>
+              </a:rPr>
+              <a:t>자막에 맞춰 한국어 음성을 입히고, 음성 없이 자막만 남기는 선택도 됩니다.</a:t>
+            </a:r>
+          </a:p>
+        </p:txBody>
+      </p:sp>
+      <p:sp>
+        <p:nvSpPr>
+          <p:cNvPr id="12" name="Rectangle 11"/>
+          <p:cNvSpPr/>
+          <p:nvPr/>
+        </p:nvSpPr>
+        <p:spPr>
+          <a:xfrm>
+            <a:off x="822960" y="4818888"/>
+            <a:ext cx="4846320" cy="10972"/>
+          </a:xfrm>
+          <a:prstGeom prst="rect">
+            <a:avLst/>
+          </a:prstGeom>
+          <a:solidFill>
+            <a:srgbClr val="EBE5DB"/>
+          </a:solidFill>
+          <a:ln>
+            <a:noFill/>
+          </a:ln>
+          <a:effectLst/>
+        </p:spPr>
+        <p:style>
+          <a:lnRef idx="1">
+            <a:schemeClr val="accent1"/>
+          </a:lnRef>
+          <a:fillRef idx="3">
+            <a:schemeClr val="accent1"/>
+          </a:fillRef>
+          <a:effectRef idx="2">
+            <a:schemeClr val="accent1"/>
+          </a:effectRef>
+          <a:fontRef idx="minor">
+            <a:schemeClr val="lt1"/>
+          </a:fontRef>
+        </p:style>
+        <p:txBody>
+          <a:bodyPr rtlCol="0" anchor="ctr"/>
+          <a:lstStyle/>
+          <a:p>
+            <a:pPr algn="ctr"/>
+          </a:p>
+        </p:txBody>
+      </p:sp>
+      <p:sp>
+        <p:nvSpPr>
+          <p:cNvPr id="13" name="TextBox 12"/>
+          <p:cNvSpPr txBox="1"/>
+          <p:nvPr/>
+        </p:nvSpPr>
+        <p:spPr>
+          <a:xfrm>
+            <a:off x="822960" y="4901183"/>
+            <a:ext cx="502920" cy="457200"/>
+          </a:xfrm>
+          <a:prstGeom prst="rect">
+            <a:avLst/>
+          </a:prstGeom>
+          <a:noFill/>
+        </p:spPr>
+        <p:txBody>
+          <a:bodyPr wrap="square" lIns="0" rIns="0" tIns="0" bIns="0">
+            <a:spAutoFit/>
+          </a:bodyPr>
+          <a:lstStyle/>
+          <a:p>
+            <a:pPr algn="ctr">
+              <a:lnSpc>
+                <a:spcPct val="100000"/>
+              </a:lnSpc>
+            </a:pPr>
+            <a:r>
+              <a:rPr sz="1600" b="0" i="0">
+                <a:solidFill>
+                  <a:srgbClr val="1D2735"/>
+                </a:solidFill>
+                <a:latin typeface="Pretendard"/>
+                <a:ea typeface="Pretendard"/>
+              </a:rPr>
+              <a:t>📱</a:t>
+            </a:r>
+          </a:p>
+        </p:txBody>
+      </p:sp>
+      <p:sp>
+        <p:nvSpPr>
+          <p:cNvPr id="14" name="TextBox 13"/>
+          <p:cNvSpPr txBox="1"/>
+          <p:nvPr/>
+        </p:nvSpPr>
+        <p:spPr>
+          <a:xfrm>
+            <a:off x="1389888" y="4892040"/>
+            <a:ext cx="4297680" cy="960120"/>
+          </a:xfrm>
+          <a:prstGeom prst="rect">
+            <a:avLst/>
+          </a:prstGeom>
+          <a:noFill/>
+        </p:spPr>
+        <p:txBody>
+          <a:bodyPr wrap="square" lIns="0" rIns="0" tIns="0" bIns="0">
+            <a:spAutoFit/>
+          </a:bodyPr>
+          <a:lstStyle/>
+          <a:p>
+            <a:pPr algn="l">
+              <a:lnSpc>
+                <a:spcPct val="100000"/>
+              </a:lnSpc>
+              <a:spcAft>
+                <a:spcPts val="300"/>
+              </a:spcAft>
+            </a:pPr>
+            <a:r>
+              <a:rPr sz="1200" b="0" i="0">
+                <a:solidFill>
+                  <a:srgbClr val="1D2735"/>
+                </a:solidFill>
+                <a:latin typeface="Pretendard ExtraBold"/>
+                <a:ea typeface="Pretendard ExtraBold"/>
+              </a:rPr>
+              <a:t>쇼츠 템플릿으로 저장</a:t>
+            </a:r>
+          </a:p>
+          <a:p>
+            <a:pPr algn="l">
+              <a:lnSpc>
+                <a:spcPct val="128000"/>
+              </a:lnSpc>
+            </a:pPr>
+            <a:r>
+              <a:rPr sz="1050" b="0" i="0">
+                <a:solidFill>
+                  <a:srgbClr val="455569"/>
+                </a:solidFill>
+                <a:latin typeface="Pretendard"/>
+                <a:ea typeface="Pretendard"/>
+              </a:rPr>
+              <a:t>쇼츠 헤드라인 템플릿이 입혀진 9:16 MP4로 저장되고, SRT·VTT 자막 파일도 함께 나옵니다.</a:t>
+            </a:r>
+          </a:p>
+        </p:txBody>
+      </p:sp>
+      <p:pic>
+        <p:nvPicPr>
+          <p:cNvPr id="15" name="Picture 14" descr="v1688_list.jpg"/>
+          <p:cNvPicPr>
+            <a:picLocks noChangeAspect="1"/>
+          </p:cNvPicPr>
+          <p:nvPr/>
+        </p:nvPicPr>
+        <p:blipFill>
+          <a:blip r:embed="rId2"/>
+          <a:stretch>
+            <a:fillRect/>
+          </a:stretch>
+        </p:blipFill>
+        <p:spPr>
+          <a:xfrm>
+            <a:off x="6263640" y="1965960"/>
+            <a:ext cx="5029200" cy="1954682"/>
+          </a:xfrm>
+          <a:prstGeom prst="rect">
+            <a:avLst/>
+          </a:prstGeom>
+          <a:ln w="12700">
+            <a:solidFill>
+              <a:srgbClr val="EBE5DB"/>
+            </a:solidFill>
+          </a:ln>
+          <a:effectLst/>
+          <a:effectLst>
+            <a:outerShdw blurRad="170000" dist="50000" dir="5400000" rotWithShape="0">
+              <a:srgbClr val="16241C">
+                <a:alpha val="30000"/>
+              </a:srgbClr>
+            </a:outerShdw>
+          </a:effectLst>
+        </p:spPr>
+      </p:pic>
+      <p:sp>
+        <p:nvSpPr>
+          <p:cNvPr id="16" name="TextBox 15"/>
+          <p:cNvSpPr txBox="1"/>
+          <p:nvPr/>
+        </p:nvSpPr>
+        <p:spPr>
+          <a:xfrm>
+            <a:off x="5989320" y="4030370"/>
+            <a:ext cx="5577840" cy="256032"/>
+          </a:xfrm>
+          <a:prstGeom prst="rect">
+            <a:avLst/>
+          </a:prstGeom>
+          <a:noFill/>
+        </p:spPr>
+        <p:txBody>
+          <a:bodyPr wrap="square" lIns="0" rIns="0" tIns="0" bIns="0">
+            <a:spAutoFit/>
+          </a:bodyPr>
+          <a:lstStyle/>
+          <a:p>
+            <a:pPr algn="ctr">
+              <a:lnSpc>
+                <a:spcPct val="100000"/>
+              </a:lnSpc>
+            </a:pPr>
+            <a:r>
+              <a:rPr sz="900" b="0" i="0">
+                <a:solidFill>
+                  <a:srgbClr val="455569"/>
+                </a:solidFill>
+                <a:latin typeface="Pretendard"/>
+                <a:ea typeface="Pretendard"/>
+              </a:rPr>
+              <a:t>실제 작업 목록 — 템플릿·더빙 설정이 남고, MP4·SRT·VTT로 내려받습니다</a:t>
+            </a:r>
+          </a:p>
+        </p:txBody>
+      </p:sp>
+      <p:sp>
+        <p:nvSpPr>
+          <p:cNvPr id="17" name="Rounded Rectangle 16"/>
+          <p:cNvSpPr/>
+          <p:nvPr/>
+        </p:nvSpPr>
+        <p:spPr>
+          <a:xfrm>
+            <a:off x="502920" y="6355080"/>
+            <a:ext cx="868680" cy="329184"/>
+          </a:xfrm>
+          <a:prstGeom prst="roundRect">
+            <a:avLst>
+              <a:gd name="adj" fmla="val 50000"/>
+            </a:avLst>
+          </a:prstGeom>
+          <a:solidFill>
+            <a:srgbClr val="FFFFFF"/>
+          </a:solidFill>
+          <a:ln w="9525">
+            <a:solidFill>
+              <a:srgbClr val="EBE5DB"/>
+            </a:solidFill>
+          </a:ln>
+          <a:effectLst/>
+        </p:spPr>
+        <p:style>
+          <a:lnRef idx="1">
+            <a:schemeClr val="accent1"/>
+          </a:lnRef>
+          <a:fillRef idx="3">
+            <a:schemeClr val="accent1"/>
+          </a:fillRef>
+          <a:effectRef idx="2">
+            <a:schemeClr val="accent1"/>
+          </a:effectRef>
+          <a:fontRef idx="minor">
+            <a:schemeClr val="lt1"/>
+          </a:fontRef>
+        </p:style>
+        <p:txBody>
+          <a:bodyPr rtlCol="0" anchor="ctr" wrap="none" lIns="0" rIns="0" tIns="0" bIns="0"/>
+          <a:lstStyle/>
+          <a:p>
+            <a:pPr algn="ctr">
+              <a:lnSpc>
+                <a:spcPct val="100000"/>
+              </a:lnSpc>
+            </a:pPr>
+            <a:r>
+              <a:rPr sz="1050" b="0" i="0">
+                <a:solidFill>
+                  <a:srgbClr val="455569"/>
+                </a:solidFill>
+                <a:latin typeface="Pretendard SemiBold"/>
+                <a:ea typeface="Pretendard SemiBold"/>
+              </a:rPr>
+              <a:t>6 / 15</a:t>
             </a:r>
           </a:p>
         </p:txBody>
@@ -14558,7 +13273,7 @@
                 <a:latin typeface="Pretendard ExtraBold"/>
                 <a:ea typeface="Pretendard ExtraBold"/>
               </a:rPr>
-              <a:t>프리캔버스 첫 화면</a:t>
+              <a:t>프리캔버스 새 기능 ③</a:t>
             </a:r>
           </a:p>
         </p:txBody>
@@ -14571,8 +13286,8 @@
         </p:nvSpPr>
         <p:spPr>
           <a:xfrm>
-            <a:off x="822960" y="932688"/>
-            <a:ext cx="10515600" cy="566928"/>
+            <a:off x="822960" y="1234440"/>
+            <a:ext cx="4937760" cy="1280160"/>
           </a:xfrm>
           <a:prstGeom prst="rect">
             <a:avLst/>
@@ -14587,25 +13302,433 @@
           <a:p>
             <a:pPr algn="l">
               <a:lnSpc>
-                <a:spcPct val="100000"/>
-              </a:lnSpc>
-            </a:pPr>
-            <a:r>
-              <a:rPr sz="2300" b="1" i="0">
+                <a:spcPct val="130000"/>
+              </a:lnSpc>
+            </a:pPr>
+            <a:r>
+              <a:rPr sz="2400" b="1" i="0">
                 <a:solidFill>
                   <a:srgbClr val="1D2735"/>
                 </a:solidFill>
                 <a:latin typeface="Noto Serif KR"/>
                 <a:ea typeface="Noto Serif KR"/>
               </a:rPr>
-              <a:t>세 가지 작업 중에 골라 시작합니다.</a:t>
+              <a:t>기존 상세페이지 편집</a:t>
+            </a:r>
+          </a:p>
+          <a:p>
+            <a:pPr algn="l">
+              <a:lnSpc>
+                <a:spcPct val="140000"/>
+              </a:lnSpc>
+              <a:spcBef>
+                <a:spcPts val="800"/>
+              </a:spcBef>
+            </a:pPr>
+            <a:r>
+              <a:rPr sz="1200" b="0" i="0">
+                <a:solidFill>
+                  <a:srgbClr val="455569"/>
+                </a:solidFill>
+                <a:latin typeface="Pretendard"/>
+                <a:ea typeface="Pretendard"/>
+              </a:rPr>
+              <a:t>긴 상세 캡처를 올리면 블록 단위로 나뉘어, 원하는 부분만 고칠 수 있습니다.</a:t>
+            </a:r>
+          </a:p>
+        </p:txBody>
+      </p:sp>
+      <p:sp>
+        <p:nvSpPr>
+          <p:cNvPr id="7" name="TextBox 6"/>
+          <p:cNvSpPr txBox="1"/>
+          <p:nvPr/>
+        </p:nvSpPr>
+        <p:spPr>
+          <a:xfrm>
+            <a:off x="822960" y="2743200"/>
+            <a:ext cx="502920" cy="457200"/>
+          </a:xfrm>
+          <a:prstGeom prst="rect">
+            <a:avLst/>
+          </a:prstGeom>
+          <a:noFill/>
+        </p:spPr>
+        <p:txBody>
+          <a:bodyPr wrap="square" lIns="0" rIns="0" tIns="0" bIns="0">
+            <a:spAutoFit/>
+          </a:bodyPr>
+          <a:lstStyle/>
+          <a:p>
+            <a:pPr algn="ctr">
+              <a:lnSpc>
+                <a:spcPct val="100000"/>
+              </a:lnSpc>
+            </a:pPr>
+            <a:r>
+              <a:rPr sz="1600" b="0" i="0">
+                <a:solidFill>
+                  <a:srgbClr val="1D2735"/>
+                </a:solidFill>
+                <a:latin typeface="Pretendard"/>
+                <a:ea typeface="Pretendard"/>
+              </a:rPr>
+              <a:t>🧱</a:t>
+            </a:r>
+          </a:p>
+        </p:txBody>
+      </p:sp>
+      <p:sp>
+        <p:nvSpPr>
+          <p:cNvPr id="8" name="TextBox 7"/>
+          <p:cNvSpPr txBox="1"/>
+          <p:nvPr/>
+        </p:nvSpPr>
+        <p:spPr>
+          <a:xfrm>
+            <a:off x="1389888" y="2734056"/>
+            <a:ext cx="4297680" cy="960120"/>
+          </a:xfrm>
+          <a:prstGeom prst="rect">
+            <a:avLst/>
+          </a:prstGeom>
+          <a:noFill/>
+        </p:spPr>
+        <p:txBody>
+          <a:bodyPr wrap="square" lIns="0" rIns="0" tIns="0" bIns="0">
+            <a:spAutoFit/>
+          </a:bodyPr>
+          <a:lstStyle/>
+          <a:p>
+            <a:pPr algn="l">
+              <a:lnSpc>
+                <a:spcPct val="100000"/>
+              </a:lnSpc>
+              <a:spcAft>
+                <a:spcPts val="300"/>
+              </a:spcAft>
+            </a:pPr>
+            <a:r>
+              <a:rPr sz="1200" b="0" i="0">
+                <a:solidFill>
+                  <a:srgbClr val="1D2735"/>
+                </a:solidFill>
+                <a:latin typeface="Pretendard ExtraBold"/>
+                <a:ea typeface="Pretendard ExtraBold"/>
+              </a:rPr>
+              <a:t>캡처가 편집 블록으로 나뉩니다</a:t>
+            </a:r>
+          </a:p>
+          <a:p>
+            <a:pPr algn="l">
+              <a:lnSpc>
+                <a:spcPct val="128000"/>
+              </a:lnSpc>
+            </a:pPr>
+            <a:r>
+              <a:rPr sz="1050" b="0" i="0">
+                <a:solidFill>
+                  <a:srgbClr val="455569"/>
+                </a:solidFill>
+                <a:latin typeface="Pretendard"/>
+                <a:ea typeface="Pretendard"/>
+              </a:rPr>
+              <a:t>길게 이어진 상세 이미지를 내용 경계에 맞춰 이미지 블록과 글 블록으로 자동 분리합니다.</a:t>
+            </a:r>
+          </a:p>
+        </p:txBody>
+      </p:sp>
+      <p:sp>
+        <p:nvSpPr>
+          <p:cNvPr id="9" name="Rectangle 8"/>
+          <p:cNvSpPr/>
+          <p:nvPr/>
+        </p:nvSpPr>
+        <p:spPr>
+          <a:xfrm>
+            <a:off x="822960" y="3739896"/>
+            <a:ext cx="4846320" cy="10972"/>
+          </a:xfrm>
+          <a:prstGeom prst="rect">
+            <a:avLst/>
+          </a:prstGeom>
+          <a:solidFill>
+            <a:srgbClr val="EBE5DB"/>
+          </a:solidFill>
+          <a:ln>
+            <a:noFill/>
+          </a:ln>
+          <a:effectLst/>
+        </p:spPr>
+        <p:style>
+          <a:lnRef idx="1">
+            <a:schemeClr val="accent1"/>
+          </a:lnRef>
+          <a:fillRef idx="3">
+            <a:schemeClr val="accent1"/>
+          </a:fillRef>
+          <a:effectRef idx="2">
+            <a:schemeClr val="accent1"/>
+          </a:effectRef>
+          <a:fontRef idx="minor">
+            <a:schemeClr val="lt1"/>
+          </a:fontRef>
+        </p:style>
+        <p:txBody>
+          <a:bodyPr rtlCol="0" anchor="ctr"/>
+          <a:lstStyle/>
+          <a:p>
+            <a:pPr algn="ctr"/>
+          </a:p>
+        </p:txBody>
+      </p:sp>
+      <p:sp>
+        <p:nvSpPr>
+          <p:cNvPr id="10" name="TextBox 9"/>
+          <p:cNvSpPr txBox="1"/>
+          <p:nvPr/>
+        </p:nvSpPr>
+        <p:spPr>
+          <a:xfrm>
+            <a:off x="822960" y="3822191"/>
+            <a:ext cx="502920" cy="457200"/>
+          </a:xfrm>
+          <a:prstGeom prst="rect">
+            <a:avLst/>
+          </a:prstGeom>
+          <a:noFill/>
+        </p:spPr>
+        <p:txBody>
+          <a:bodyPr wrap="square" lIns="0" rIns="0" tIns="0" bIns="0">
+            <a:spAutoFit/>
+          </a:bodyPr>
+          <a:lstStyle/>
+          <a:p>
+            <a:pPr algn="ctr">
+              <a:lnSpc>
+                <a:spcPct val="100000"/>
+              </a:lnSpc>
+            </a:pPr>
+            <a:r>
+              <a:rPr sz="1600" b="0" i="0">
+                <a:solidFill>
+                  <a:srgbClr val="1D2735"/>
+                </a:solidFill>
+                <a:latin typeface="Pretendard"/>
+                <a:ea typeface="Pretendard"/>
+              </a:rPr>
+              <a:t>↔️</a:t>
+            </a:r>
+          </a:p>
+        </p:txBody>
+      </p:sp>
+      <p:sp>
+        <p:nvSpPr>
+          <p:cNvPr id="11" name="TextBox 10"/>
+          <p:cNvSpPr txBox="1"/>
+          <p:nvPr/>
+        </p:nvSpPr>
+        <p:spPr>
+          <a:xfrm>
+            <a:off x="1389888" y="3813048"/>
+            <a:ext cx="4297680" cy="960120"/>
+          </a:xfrm>
+          <a:prstGeom prst="rect">
+            <a:avLst/>
+          </a:prstGeom>
+          <a:noFill/>
+        </p:spPr>
+        <p:txBody>
+          <a:bodyPr wrap="square" lIns="0" rIns="0" tIns="0" bIns="0">
+            <a:spAutoFit/>
+          </a:bodyPr>
+          <a:lstStyle/>
+          <a:p>
+            <a:pPr algn="l">
+              <a:lnSpc>
+                <a:spcPct val="100000"/>
+              </a:lnSpc>
+              <a:spcAft>
+                <a:spcPts val="300"/>
+              </a:spcAft>
+            </a:pPr>
+            <a:r>
+              <a:rPr sz="1200" b="0" i="0">
+                <a:solidFill>
+                  <a:srgbClr val="1D2735"/>
+                </a:solidFill>
+                <a:latin typeface="Pretendard ExtraBold"/>
+                <a:ea typeface="Pretendard ExtraBold"/>
+              </a:rPr>
+              <a:t>나뉜 경계는 드래그로 조정</a:t>
+            </a:r>
+          </a:p>
+          <a:p>
+            <a:pPr algn="l">
+              <a:lnSpc>
+                <a:spcPct val="128000"/>
+              </a:lnSpc>
+            </a:pPr>
+            <a:r>
+              <a:rPr sz="1050" b="0" i="0">
+                <a:solidFill>
+                  <a:srgbClr val="455569"/>
+                </a:solidFill>
+                <a:latin typeface="Pretendard"/>
+                <a:ea typeface="Pretendard"/>
+              </a:rPr>
+              <a:t>잘린 위치가 아쉬우면 경계선을 마우스로 끌어 원하는 지점에서 다시 자릅니다.</a:t>
+            </a:r>
+          </a:p>
+        </p:txBody>
+      </p:sp>
+      <p:sp>
+        <p:nvSpPr>
+          <p:cNvPr id="12" name="Rectangle 11"/>
+          <p:cNvSpPr/>
+          <p:nvPr/>
+        </p:nvSpPr>
+        <p:spPr>
+          <a:xfrm>
+            <a:off x="822960" y="4818888"/>
+            <a:ext cx="4846320" cy="10972"/>
+          </a:xfrm>
+          <a:prstGeom prst="rect">
+            <a:avLst/>
+          </a:prstGeom>
+          <a:solidFill>
+            <a:srgbClr val="EBE5DB"/>
+          </a:solidFill>
+          <a:ln>
+            <a:noFill/>
+          </a:ln>
+          <a:effectLst/>
+        </p:spPr>
+        <p:style>
+          <a:lnRef idx="1">
+            <a:schemeClr val="accent1"/>
+          </a:lnRef>
+          <a:fillRef idx="3">
+            <a:schemeClr val="accent1"/>
+          </a:fillRef>
+          <a:effectRef idx="2">
+            <a:schemeClr val="accent1"/>
+          </a:effectRef>
+          <a:fontRef idx="minor">
+            <a:schemeClr val="lt1"/>
+          </a:fontRef>
+        </p:style>
+        <p:txBody>
+          <a:bodyPr rtlCol="0" anchor="ctr"/>
+          <a:lstStyle/>
+          <a:p>
+            <a:pPr algn="ctr"/>
+          </a:p>
+        </p:txBody>
+      </p:sp>
+      <p:sp>
+        <p:nvSpPr>
+          <p:cNvPr id="13" name="TextBox 12"/>
+          <p:cNvSpPr txBox="1"/>
+          <p:nvPr/>
+        </p:nvSpPr>
+        <p:spPr>
+          <a:xfrm>
+            <a:off x="822960" y="4901183"/>
+            <a:ext cx="502920" cy="457200"/>
+          </a:xfrm>
+          <a:prstGeom prst="rect">
+            <a:avLst/>
+          </a:prstGeom>
+          <a:noFill/>
+        </p:spPr>
+        <p:txBody>
+          <a:bodyPr wrap="square" lIns="0" rIns="0" tIns="0" bIns="0">
+            <a:spAutoFit/>
+          </a:bodyPr>
+          <a:lstStyle/>
+          <a:p>
+            <a:pPr algn="ctr">
+              <a:lnSpc>
+                <a:spcPct val="100000"/>
+              </a:lnSpc>
+            </a:pPr>
+            <a:r>
+              <a:rPr sz="1600" b="0" i="0">
+                <a:solidFill>
+                  <a:srgbClr val="1D2735"/>
+                </a:solidFill>
+                <a:latin typeface="Pretendard"/>
+                <a:ea typeface="Pretendard"/>
+              </a:rPr>
+              <a:t>✏️</a:t>
+            </a:r>
+          </a:p>
+        </p:txBody>
+      </p:sp>
+      <p:sp>
+        <p:nvSpPr>
+          <p:cNvPr id="14" name="TextBox 13"/>
+          <p:cNvSpPr txBox="1"/>
+          <p:nvPr/>
+        </p:nvSpPr>
+        <p:spPr>
+          <a:xfrm>
+            <a:off x="1389888" y="4892040"/>
+            <a:ext cx="4297680" cy="960120"/>
+          </a:xfrm>
+          <a:prstGeom prst="rect">
+            <a:avLst/>
+          </a:prstGeom>
+          <a:noFill/>
+        </p:spPr>
+        <p:txBody>
+          <a:bodyPr wrap="square" lIns="0" rIns="0" tIns="0" bIns="0">
+            <a:spAutoFit/>
+          </a:bodyPr>
+          <a:lstStyle/>
+          <a:p>
+            <a:pPr algn="l">
+              <a:lnSpc>
+                <a:spcPct val="100000"/>
+              </a:lnSpc>
+              <a:spcAft>
+                <a:spcPts val="300"/>
+              </a:spcAft>
+            </a:pPr>
+            <a:r>
+              <a:rPr sz="1200" b="0" i="0">
+                <a:solidFill>
+                  <a:srgbClr val="1D2735"/>
+                </a:solidFill>
+                <a:latin typeface="Pretendard ExtraBold"/>
+                <a:ea typeface="Pretendard ExtraBold"/>
+              </a:rPr>
+              <a:t>이미지 속 글자 수정</a:t>
+            </a:r>
+          </a:p>
+          <a:p>
+            <a:pPr algn="l">
+              <a:lnSpc>
+                <a:spcPct val="128000"/>
+              </a:lnSpc>
+            </a:pPr>
+            <a:r>
+              <a:rPr sz="1050" b="0" i="0">
+                <a:solidFill>
+                  <a:srgbClr val="455569"/>
+                </a:solidFill>
+                <a:latin typeface="Pretendard"/>
+                <a:ea typeface="Pretendard"/>
+              </a:rPr>
+              <a:t>이미지 안 문구를 골라 내용을 고치고 글꼴을 정하면, 그대로 다시 그려 줍니다.</a:t>
             </a:r>
           </a:p>
         </p:txBody>
       </p:sp>
       <p:pic>
         <p:nvPicPr>
-          <p:cNvPr id="7" name="Picture 6" descr="fc_modes.jpg"/>
+          <p:cNvPr id="15" name="Picture 14" descr="fc_edit.jpg"/>
           <p:cNvPicPr>
             <a:picLocks noChangeAspect="1"/>
           </p:cNvPicPr>
@@ -14619,8 +13742,8 @@
         </p:blipFill>
         <p:spPr>
           <a:xfrm>
-            <a:off x="822960" y="1600200"/>
-            <a:ext cx="10543032" cy="1286250"/>
+            <a:off x="6263640" y="1874519"/>
+            <a:ext cx="4983480" cy="2382103"/>
           </a:xfrm>
           <a:prstGeom prst="rect">
             <a:avLst/>
@@ -14642,58 +13765,14 @@
       </p:pic>
       <p:sp>
         <p:nvSpPr>
-          <p:cNvPr id="8" name="Rectangle 7"/>
-          <p:cNvSpPr/>
-          <p:nvPr/>
-        </p:nvSpPr>
-        <p:spPr>
-          <a:xfrm>
-            <a:off x="822960" y="3206489"/>
-            <a:ext cx="29260" cy="566928"/>
-          </a:xfrm>
-          <a:prstGeom prst="rect">
-            <a:avLst/>
-          </a:prstGeom>
-          <a:solidFill>
-            <a:srgbClr val="1F5068"/>
-          </a:solidFill>
-          <a:ln>
-            <a:noFill/>
-          </a:ln>
-          <a:effectLst/>
-        </p:spPr>
-        <p:style>
-          <a:lnRef idx="1">
-            <a:schemeClr val="accent1"/>
-          </a:lnRef>
-          <a:fillRef idx="3">
-            <a:schemeClr val="accent1"/>
-          </a:fillRef>
-          <a:effectRef idx="2">
-            <a:schemeClr val="accent1"/>
-          </a:effectRef>
-          <a:fontRef idx="minor">
-            <a:schemeClr val="lt1"/>
-          </a:fontRef>
-        </p:style>
-        <p:txBody>
-          <a:bodyPr rtlCol="0" anchor="ctr"/>
-          <a:lstStyle/>
-          <a:p>
-            <a:pPr algn="ctr"/>
-          </a:p>
-        </p:txBody>
-      </p:sp>
-      <p:sp>
-        <p:nvSpPr>
-          <p:cNvPr id="9" name="TextBox 8"/>
+          <p:cNvPr id="16" name="TextBox 15"/>
           <p:cNvSpPr txBox="1"/>
           <p:nvPr/>
         </p:nvSpPr>
         <p:spPr>
           <a:xfrm>
-            <a:off x="1024128" y="3179057"/>
-            <a:ext cx="5760720" cy="658368"/>
+            <a:off x="5989320" y="4366351"/>
+            <a:ext cx="5532120" cy="256032"/>
           </a:xfrm>
           <a:prstGeom prst="rect">
             <a:avLst/>
@@ -14706,372 +13785,27 @@
           </a:bodyPr>
           <a:lstStyle/>
           <a:p>
-            <a:pPr algn="l">
+            <a:pPr algn="ctr">
               <a:lnSpc>
                 <a:spcPct val="100000"/>
               </a:lnSpc>
-              <a:spcAft>
-                <a:spcPts val="200"/>
-              </a:spcAft>
-            </a:pPr>
-            <a:r>
-              <a:rPr sz="1250" b="0" i="0">
-                <a:solidFill>
-                  <a:srgbClr val="1D2735"/>
-                </a:solidFill>
-                <a:latin typeface="Pretendard ExtraBold"/>
-                <a:ea typeface="Pretendard ExtraBold"/>
-              </a:rPr>
-              <a:t>새 상세페이지 만들기</a:t>
-            </a:r>
-          </a:p>
-          <a:p>
-            <a:pPr algn="l">
-              <a:lnSpc>
-                <a:spcPct val="125000"/>
-              </a:lnSpc>
-            </a:pPr>
-            <a:r>
-              <a:rPr sz="1050" b="0" i="0">
+            </a:pPr>
+            <a:r>
+              <a:rPr sz="900" b="0" i="0">
                 <a:solidFill>
                   <a:srgbClr val="455569"/>
                 </a:solidFill>
                 <a:latin typeface="Pretendard"/>
                 <a:ea typeface="Pretendard"/>
               </a:rPr>
-              <a:t>제품 사진과 정보를 넣으면 상세페이지를 처음부터 만들어 줍니다.</a:t>
-            </a:r>
-          </a:p>
-        </p:txBody>
-      </p:sp>
-      <p:sp>
-        <p:nvSpPr>
-          <p:cNvPr id="10" name="Rectangle 9"/>
-          <p:cNvSpPr/>
-          <p:nvPr/>
-        </p:nvSpPr>
-        <p:spPr>
-          <a:xfrm>
-            <a:off x="822960" y="3956297"/>
-            <a:ext cx="29260" cy="566928"/>
-          </a:xfrm>
-          <a:prstGeom prst="rect">
-            <a:avLst/>
-          </a:prstGeom>
-          <a:solidFill>
-            <a:srgbClr val="9A7440"/>
-          </a:solidFill>
-          <a:ln>
-            <a:noFill/>
-          </a:ln>
-          <a:effectLst/>
-        </p:spPr>
-        <p:style>
-          <a:lnRef idx="1">
-            <a:schemeClr val="accent1"/>
-          </a:lnRef>
-          <a:fillRef idx="3">
-            <a:schemeClr val="accent1"/>
-          </a:fillRef>
-          <a:effectRef idx="2">
-            <a:schemeClr val="accent1"/>
-          </a:effectRef>
-          <a:fontRef idx="minor">
-            <a:schemeClr val="lt1"/>
-          </a:fontRef>
-        </p:style>
-        <p:txBody>
-          <a:bodyPr rtlCol="0" anchor="ctr"/>
-          <a:lstStyle/>
-          <a:p>
-            <a:pPr algn="ctr"/>
-          </a:p>
-        </p:txBody>
-      </p:sp>
-      <p:sp>
-        <p:nvSpPr>
-          <p:cNvPr id="11" name="TextBox 10"/>
-          <p:cNvSpPr txBox="1"/>
-          <p:nvPr/>
-        </p:nvSpPr>
-        <p:spPr>
-          <a:xfrm>
-            <a:off x="1024128" y="3928865"/>
-            <a:ext cx="5760720" cy="658368"/>
-          </a:xfrm>
-          <a:prstGeom prst="rect">
-            <a:avLst/>
-          </a:prstGeom>
-          <a:noFill/>
-        </p:spPr>
-        <p:txBody>
-          <a:bodyPr wrap="square" lIns="0" rIns="0" tIns="0" bIns="0">
-            <a:spAutoFit/>
-          </a:bodyPr>
-          <a:lstStyle/>
-          <a:p>
-            <a:pPr algn="l">
-              <a:lnSpc>
-                <a:spcPct val="100000"/>
-              </a:lnSpc>
-              <a:spcAft>
-                <a:spcPts val="200"/>
-              </a:spcAft>
-            </a:pPr>
-            <a:r>
-              <a:rPr sz="1250" b="0" i="0">
-                <a:solidFill>
-                  <a:srgbClr val="1D2735"/>
-                </a:solidFill>
-                <a:latin typeface="Pretendard ExtraBold"/>
-                <a:ea typeface="Pretendard ExtraBold"/>
-              </a:rPr>
-              <a:t>기존 상세페이지 편집</a:t>
-            </a:r>
-          </a:p>
-          <a:p>
-            <a:pPr algn="l">
-              <a:lnSpc>
-                <a:spcPct val="125000"/>
-              </a:lnSpc>
-            </a:pPr>
-            <a:r>
-              <a:rPr sz="1050" b="0" i="0">
-                <a:solidFill>
-                  <a:srgbClr val="455569"/>
-                </a:solidFill>
-                <a:latin typeface="Pretendard"/>
-                <a:ea typeface="Pretendard"/>
-              </a:rPr>
-              <a:t>이미 있는 상세 캡처를 올려 블록 단위로 수정합니다.</a:t>
-            </a:r>
-          </a:p>
-        </p:txBody>
-      </p:sp>
-      <p:sp>
-        <p:nvSpPr>
-          <p:cNvPr id="12" name="Rectangle 11"/>
-          <p:cNvSpPr/>
-          <p:nvPr/>
-        </p:nvSpPr>
-        <p:spPr>
-          <a:xfrm>
-            <a:off x="822960" y="4706105"/>
-            <a:ext cx="29260" cy="566928"/>
-          </a:xfrm>
-          <a:prstGeom prst="rect">
-            <a:avLst/>
-          </a:prstGeom>
-          <a:solidFill>
-            <a:srgbClr val="1D2735"/>
-          </a:solidFill>
-          <a:ln>
-            <a:noFill/>
-          </a:ln>
-          <a:effectLst/>
-        </p:spPr>
-        <p:style>
-          <a:lnRef idx="1">
-            <a:schemeClr val="accent1"/>
-          </a:lnRef>
-          <a:fillRef idx="3">
-            <a:schemeClr val="accent1"/>
-          </a:fillRef>
-          <a:effectRef idx="2">
-            <a:schemeClr val="accent1"/>
-          </a:effectRef>
-          <a:fontRef idx="minor">
-            <a:schemeClr val="lt1"/>
-          </a:fontRef>
-        </p:style>
-        <p:txBody>
-          <a:bodyPr rtlCol="0" anchor="ctr"/>
-          <a:lstStyle/>
-          <a:p>
-            <a:pPr algn="ctr"/>
-          </a:p>
-        </p:txBody>
-      </p:sp>
-      <p:sp>
-        <p:nvSpPr>
-          <p:cNvPr id="13" name="TextBox 12"/>
-          <p:cNvSpPr txBox="1"/>
-          <p:nvPr/>
-        </p:nvSpPr>
-        <p:spPr>
-          <a:xfrm>
-            <a:off x="1024128" y="4678673"/>
-            <a:ext cx="5760720" cy="658368"/>
-          </a:xfrm>
-          <a:prstGeom prst="rect">
-            <a:avLst/>
-          </a:prstGeom>
-          <a:noFill/>
-        </p:spPr>
-        <p:txBody>
-          <a:bodyPr wrap="square" lIns="0" rIns="0" tIns="0" bIns="0">
-            <a:spAutoFit/>
-          </a:bodyPr>
-          <a:lstStyle/>
-          <a:p>
-            <a:pPr algn="l">
-              <a:lnSpc>
-                <a:spcPct val="100000"/>
-              </a:lnSpc>
-              <a:spcAft>
-                <a:spcPts val="200"/>
-              </a:spcAft>
-            </a:pPr>
-            <a:r>
-              <a:rPr sz="1250" b="0" i="0">
-                <a:solidFill>
-                  <a:srgbClr val="1D2735"/>
-                </a:solidFill>
-                <a:latin typeface="Pretendard ExtraBold"/>
-                <a:ea typeface="Pretendard ExtraBold"/>
-              </a:rPr>
-              <a:t>1688 영상 번역</a:t>
-            </a:r>
-          </a:p>
-          <a:p>
-            <a:pPr algn="l">
-              <a:lnSpc>
-                <a:spcPct val="125000"/>
-              </a:lnSpc>
-            </a:pPr>
-            <a:r>
-              <a:rPr sz="1050" b="0" i="0">
-                <a:solidFill>
-                  <a:srgbClr val="455569"/>
-                </a:solidFill>
-                <a:latin typeface="Pretendard"/>
-                <a:ea typeface="Pretendard"/>
-              </a:rPr>
-              <a:t>중국 상품 영상을 한국어 자막·더빙 영상으로 바꿉니다.</a:t>
-            </a:r>
-          </a:p>
-        </p:txBody>
-      </p:sp>
-      <p:sp>
-        <p:nvSpPr>
-          <p:cNvPr id="14" name="TextBox 13"/>
-          <p:cNvSpPr txBox="1"/>
-          <p:nvPr/>
-        </p:nvSpPr>
-        <p:spPr>
-          <a:xfrm>
-            <a:off x="822960" y="5483345"/>
-            <a:ext cx="5943600" cy="594360"/>
-          </a:xfrm>
-          <a:prstGeom prst="rect">
-            <a:avLst/>
-          </a:prstGeom>
-          <a:noFill/>
-        </p:spPr>
-        <p:txBody>
-          <a:bodyPr wrap="square" lIns="0" rIns="0" tIns="0" bIns="0">
-            <a:spAutoFit/>
-          </a:bodyPr>
-          <a:lstStyle/>
-          <a:p>
-            <a:pPr algn="l">
-              <a:lnSpc>
-                <a:spcPct val="135000"/>
-              </a:lnSpc>
-            </a:pPr>
-            <a:r>
-              <a:rPr sz="1100" b="0" i="0">
-                <a:solidFill>
-                  <a:srgbClr val="28364A"/>
-                </a:solidFill>
-                <a:latin typeface="Pretendard"/>
-                <a:ea typeface="Pretendard"/>
-              </a:rPr>
-              <a:t>결과물 종류는 일반·의류·과일채소 상세페이지에 </a:t>
-            </a:r>
-            <a:r>
-              <a:rPr sz="1100" b="0" i="0">
-                <a:solidFill>
-                  <a:srgbClr val="28364A"/>
-                </a:solidFill>
-                <a:latin typeface="Pretendard ExtraBold"/>
-                <a:ea typeface="Pretendard ExtraBold"/>
-              </a:rPr>
-              <a:t>카드뉴스</a:t>
-            </a:r>
-            <a:r>
-              <a:rPr sz="1100" b="0" i="0">
-                <a:solidFill>
-                  <a:srgbClr val="28364A"/>
-                </a:solidFill>
-                <a:latin typeface="Pretendard"/>
-                <a:ea typeface="Pretendard"/>
-              </a:rPr>
-              <a:t>, </a:t>
-            </a:r>
-            <a:r>
-              <a:rPr sz="1100" b="0" i="0">
-                <a:solidFill>
-                  <a:srgbClr val="28364A"/>
-                </a:solidFill>
-                <a:latin typeface="Pretendard ExtraBold"/>
-                <a:ea typeface="Pretendard ExtraBold"/>
-              </a:rPr>
-              <a:t>상품 썸네일</a:t>
-            </a:r>
-            <a:r>
-              <a:rPr sz="1100" b="0" i="0">
-                <a:solidFill>
-                  <a:srgbClr val="28364A"/>
-                </a:solidFill>
-                <a:latin typeface="Pretendard"/>
-                <a:ea typeface="Pretendard"/>
-              </a:rPr>
-              <a:t>까지 다섯 가지입니다.</a:t>
-            </a:r>
-          </a:p>
-        </p:txBody>
-      </p:sp>
-      <p:pic>
-        <p:nvPicPr>
-          <p:cNvPr id="15" name="Picture 14" descr="fc_types.jpg"/>
-          <p:cNvPicPr>
-            <a:picLocks noChangeAspect="1"/>
-          </p:cNvPicPr>
-          <p:nvPr/>
-        </p:nvPicPr>
-        <p:blipFill>
-          <a:blip r:embed="rId3"/>
-          <a:stretch>
-            <a:fillRect/>
-          </a:stretch>
-        </p:blipFill>
-        <p:spPr>
-          <a:xfrm>
-            <a:off x="8092440" y="3224777"/>
-            <a:ext cx="1783080" cy="2473054"/>
-          </a:xfrm>
-          <a:prstGeom prst="rect">
-            <a:avLst/>
-          </a:prstGeom>
-          <a:ln w="12700">
-            <a:solidFill>
-              <a:srgbClr val="EBE5DB"/>
-            </a:solidFill>
-          </a:ln>
-          <a:effectLst/>
-          <a:effectLst>
-            <a:outerShdw blurRad="170000" dist="50000" dir="5400000" rotWithShape="0">
-              <a:srgbClr val="16241C">
-                <a:alpha val="30000"/>
-              </a:srgbClr>
-            </a:outerShdw>
-          </a:effectLst>
-        </p:spPr>
-      </p:pic>
-      <p:sp>
-        <p:nvSpPr>
-          <p:cNvPr id="16" name="Rounded Rectangle 15"/>
+              <a:t>캡처를 올리면 이미지·텍스트 블록으로 정리됩니다</a:t>
+            </a:r>
+          </a:p>
+        </p:txBody>
+      </p:sp>
+      <p:sp>
+        <p:nvSpPr>
+          <p:cNvPr id="17" name="Rounded Rectangle 16"/>
           <p:cNvSpPr/>
           <p:nvPr/>
         </p:nvSpPr>
@@ -15126,7 +13860,7 @@
                 <a:latin typeface="Pretendard SemiBold"/>
                 <a:ea typeface="Pretendard SemiBold"/>
               </a:rPr>
-              <a:t>7 / 19</a:t>
+              <a:t>7 / 15</a:t>
             </a:r>
           </a:p>
         </p:txBody>
@@ -15316,7 +14050,7 @@
                 <a:latin typeface="Pretendard ExtraBold"/>
                 <a:ea typeface="Pretendard ExtraBold"/>
               </a:rPr>
-              <a:t>프리캔버스 새 기능 ①</a:t>
+              <a:t>프리캔버스 새 기능 ④</a:t>
             </a:r>
           </a:p>
         </p:txBody>
@@ -15356,7 +14090,7 @@
                 <a:latin typeface="Noto Serif KR"/>
                 <a:ea typeface="Noto Serif KR"/>
               </a:rPr>
-              <a:t>상품 링크로 빠른 시작</a:t>
+              <a:t>카드뉴스 만들기</a:t>
             </a:r>
           </a:p>
           <a:p>
@@ -15376,7 +14110,7 @@
                 <a:latin typeface="Pretendard"/>
                 <a:ea typeface="Pretendard"/>
               </a:rPr>
-              <a:t>소싱한 상품의 주소만 붙여넣으면, 이미지와 상품 정보가 자동으로 담깁니다.</a:t>
+              <a:t>홍보용 카드뉴스 여러 장을 한 번에 만듭니다. 사진이 없어도 됩니다.</a:t>
             </a:r>
           </a:p>
         </p:txBody>
@@ -15416,7 +14150,7 @@
                 <a:latin typeface="Pretendard"/>
                 <a:ea typeface="Pretendard"/>
               </a:rPr>
-              <a:t>🔗</a:t>
+              <a:t>📰</a:t>
             </a:r>
           </a:p>
         </p:txBody>
@@ -15459,7 +14193,7 @@
                 <a:latin typeface="Pretendard ExtraBold"/>
                 <a:ea typeface="Pretendard ExtraBold"/>
               </a:rPr>
-              <a:t>스마트스토어·1688 링크 불러오기</a:t>
+              <a:t>내용만 적으면 여러 장이 한 번에</a:t>
             </a:r>
           </a:p>
           <a:p>
@@ -15476,7 +14210,7 @@
                 <a:latin typeface="Pretendard"/>
                 <a:ea typeface="Pretendard"/>
               </a:rPr>
-              <a:t>상품 주소를 붙여넣으면 작은 새 창이 열려 상세 내용과 상품 이미지를 가져옵니다. 가격 정보는 자동으로 걸러냅니다.</a:t>
+              <a:t>주제와 하고 싶은 말을 적으면, 넘겨보는 카드 여러 장이 순서대로 만들어집니다.</a:t>
             </a:r>
           </a:p>
         </p:txBody>
@@ -15560,7 +14294,7 @@
                 <a:latin typeface="Pretendard"/>
                 <a:ea typeface="Pretendard"/>
               </a:rPr>
-              <a:t>🧩</a:t>
+              <a:t>🎨</a:t>
             </a:r>
           </a:p>
         </p:txBody>
@@ -15603,7 +14337,7 @@
                 <a:latin typeface="Pretendard ExtraBold"/>
                 <a:ea typeface="Pretendard ExtraBold"/>
               </a:rPr>
-              <a:t>확장 프로그램은 한 번만 설치</a:t>
+              <a:t>모든 장의 디자인 통일</a:t>
             </a:r>
           </a:p>
           <a:p>
@@ -15620,7 +14354,7 @@
                 <a:latin typeface="Pretendard"/>
                 <a:ea typeface="Pretendard"/>
               </a:rPr>
-              <a:t>웹스토어 버튼과 설치 안내가 화면 안에 있습니다. 처음 한 번만 설치하면 다음부터는 붙여넣기만 하면 됩니다.</a:t>
+              <a:t>색·글꼴·구성을 먼저 정하고 그리기 때문에, 장마다 분위기가 달라지지 않습니다.</a:t>
             </a:r>
           </a:p>
         </p:txBody>
@@ -15704,7 +14438,7 @@
                 <a:latin typeface="Pretendard"/>
                 <a:ea typeface="Pretendard"/>
               </a:rPr>
-              <a:t>🧹</a:t>
+              <a:t>🛠️</a:t>
             </a:r>
           </a:p>
         </p:txBody>
@@ -15747,7 +14481,7 @@
                 <a:latin typeface="Pretendard ExtraBold"/>
                 <a:ea typeface="Pretendard ExtraBold"/>
               </a:rPr>
-              <a:t>중국어 자동 정리</a:t>
+              <a:t>장마다 버튼 하나로 수정</a:t>
             </a:r>
           </a:p>
           <a:p>
@@ -15764,14 +14498,14 @@
                 <a:latin typeface="Pretendard"/>
                 <a:ea typeface="Pretendard"/>
               </a:rPr>
-              <a:t>1688에서 가져온 문구 속 중국어와 불필요한 표기를 한국어 기준으로 정리해 줍니다.</a:t>
+              <a:t>상품 크게 · 여백 정리 · 고급스럽게 · 문구 짧게 · 배경만 변경 · 글자 없는 버전 — 버튼으로 바로 고칩니다.</a:t>
             </a:r>
           </a:p>
         </p:txBody>
       </p:sp>
       <p:pic>
         <p:nvPicPr>
-          <p:cNvPr id="15" name="Picture 14" descr="fc_link.jpg"/>
+          <p:cNvPr id="15" name="Picture 14" descr="cn_grid.jpg"/>
           <p:cNvPicPr>
             <a:picLocks noChangeAspect="1"/>
           </p:cNvPicPr>
@@ -15785,8 +14519,8 @@
         </p:blipFill>
         <p:spPr>
           <a:xfrm>
-            <a:off x="6263640" y="1783080"/>
-            <a:ext cx="4892040" cy="2690622"/>
+            <a:off x="6263640" y="2011680"/>
+            <a:ext cx="5074920" cy="2385212"/>
           </a:xfrm>
           <a:prstGeom prst="rect">
             <a:avLst/>
@@ -15814,8 +14548,8 @@
         </p:nvSpPr>
         <p:spPr>
           <a:xfrm>
-            <a:off x="5989320" y="4583430"/>
-            <a:ext cx="5440679" cy="256032"/>
+            <a:off x="5989320" y="4506620"/>
+            <a:ext cx="5623559" cy="256032"/>
           </a:xfrm>
           <a:prstGeom prst="rect">
             <a:avLst/>
@@ -15841,7 +14575,7 @@
                 <a:latin typeface="Pretendard"/>
                 <a:ea typeface="Pretendard"/>
               </a:rPr>
-              <a:t>스마트스토어 링크와 1688 링크, 각각 “불러오기” 버튼 하나로 끝납니다</a:t>
+              <a:t>실제 생성 결과 — 카드마다 템플릿과 빠른 수정 버튼이 붙습니다</a:t>
             </a:r>
           </a:p>
         </p:txBody>
@@ -15903,7 +14637,7 @@
                 <a:latin typeface="Pretendard SemiBold"/>
                 <a:ea typeface="Pretendard SemiBold"/>
               </a:rPr>
-              <a:t>8 / 19</a:t>
+              <a:t>8 / 15</a:t>
             </a:r>
           </a:p>
         </p:txBody>
@@ -16093,7 +14827,7 @@
                 <a:latin typeface="Pretendard ExtraBold"/>
                 <a:ea typeface="Pretendard ExtraBold"/>
               </a:rPr>
-              <a:t>프리캔버스 새 기능 ②</a:t>
+              <a:t>프리캔버스 새 기능 ⑤</a:t>
             </a:r>
           </a:p>
         </p:txBody>
@@ -16133,7 +14867,7 @@
                 <a:latin typeface="Noto Serif KR"/>
                 <a:ea typeface="Noto Serif KR"/>
               </a:rPr>
-              <a:t>1688 영상 번역</a:t>
+              <a:t>GIF 만들기</a:t>
             </a:r>
           </a:p>
           <a:p>
@@ -16153,7 +14887,7 @@
                 <a:latin typeface="Pretendard"/>
                 <a:ea typeface="Pretendard"/>
               </a:rPr>
-              <a:t>중국어 상품 영상을 한국어 자막·더빙 영상으로 바꿔 줍니다.</a:t>
+              <a:t>완성된 상세 이미지를 움직이는 GIF로 만들어, 상세페이지에서 시선을 잡습니다.</a:t>
             </a:r>
           </a:p>
         </p:txBody>
@@ -16193,7 +14927,7 @@
                 <a:latin typeface="Pretendard"/>
                 <a:ea typeface="Pretendard"/>
               </a:rPr>
-              <a:t>🎬</a:t>
+              <a:t>🎞️</a:t>
             </a:r>
           </a:p>
         </p:txBody>
@@ -16236,7 +14970,7 @@
                 <a:latin typeface="Pretendard ExtraBold"/>
                 <a:ea typeface="Pretendard ExtraBold"/>
               </a:rPr>
-              <a:t>중국어 자막을 한국어 자막으로</a:t>
+              <a:t>텍스트 없음 · 텍스트 유지, 두 가지</a:t>
             </a:r>
           </a:p>
           <a:p>
@@ -16253,7 +14987,7 @@
                 <a:latin typeface="Pretendard"/>
                 <a:ea typeface="Pretendard"/>
               </a:rPr>
-              <a:t>영상 속 중국어 문구 자리를 찾아 지우고, 그 자리에 한국어 자막을 입힙니다.</a:t>
+              <a:t>문구 없이 장면만 움직이는 GIF와 문구가 함께 든 GIF 중 골라 만듭니다.</a:t>
             </a:r>
           </a:p>
         </p:txBody>
@@ -16337,7 +15071,7 @@
                 <a:latin typeface="Pretendard"/>
                 <a:ea typeface="Pretendard"/>
               </a:rPr>
-              <a:t>🔊</a:t>
+              <a:t>🛒</a:t>
             </a:r>
           </a:p>
         </p:txBody>
@@ -16380,7 +15114,7 @@
                 <a:latin typeface="Pretendard ExtraBold"/>
                 <a:ea typeface="Pretendard ExtraBold"/>
               </a:rPr>
-              <a:t>한국어 음성 더빙</a:t>
+              <a:t>상세페이지에 그대로 사용</a:t>
             </a:r>
           </a:p>
           <a:p>
@@ -16397,7 +15131,7 @@
                 <a:latin typeface="Pretendard"/>
                 <a:ea typeface="Pretendard"/>
               </a:rPr>
-              <a:t>자막에 맞춰 한국어 음성을 입혀, 소리까지 한국어인 영상으로 만듭니다.</a:t>
+              <a:t>움직이는 이미지가 한두 장 들어가면 스크롤이 멈춥니다. 스마트스토어 상세에 바로 올릴 수 있습니다.</a:t>
             </a:r>
           </a:p>
         </p:txBody>
@@ -16481,7 +15215,7 @@
                 <a:latin typeface="Pretendard"/>
                 <a:ea typeface="Pretendard"/>
               </a:rPr>
-              <a:t>📱</a:t>
+              <a:t>📦</a:t>
             </a:r>
           </a:p>
         </p:txBody>
@@ -16524,7 +15258,7 @@
                 <a:latin typeface="Pretendard ExtraBold"/>
                 <a:ea typeface="Pretendard ExtraBold"/>
               </a:rPr>
-              <a:t>세로 영상으로 저장</a:t>
+              <a:t>MP4 저장·전체저장 포함</a:t>
             </a:r>
           </a:p>
           <a:p>
@@ -16541,14 +15275,14 @@
                 <a:latin typeface="Pretendard"/>
                 <a:ea typeface="Pretendard"/>
               </a:rPr>
-              <a:t>쇼츠·릴스에 바로 올릴 수 있는 세로 비율로 저장되고, 자막 파일도 함께 나옵니다.</a:t>
+              <a:t>만들어진 GIF 카드를 누르면 MP4 영상으로도 저장되고, 전체저장 ZIP 안 gifs 폴더에도 함께 담깁니다.</a:t>
             </a:r>
           </a:p>
         </p:txBody>
       </p:sp>
       <p:pic>
         <p:nvPicPr>
-          <p:cNvPr id="15" name="Picture 14" descr="fc_1688.jpg"/>
+          <p:cNvPr id="15" name="Picture 14" descr="gif_top.jpg"/>
           <p:cNvPicPr>
             <a:picLocks noChangeAspect="1"/>
           </p:cNvPicPr>
@@ -16562,8 +15296,8 @@
         </p:blipFill>
         <p:spPr>
           <a:xfrm>
-            <a:off x="6263640" y="1874519"/>
-            <a:ext cx="4983480" cy="2382103"/>
+            <a:off x="6263640" y="1965960"/>
+            <a:ext cx="5029200" cy="2625242"/>
           </a:xfrm>
           <a:prstGeom prst="rect">
             <a:avLst/>
@@ -16591,8 +15325,8 @@
         </p:nvSpPr>
         <p:spPr>
           <a:xfrm>
-            <a:off x="5989320" y="4366351"/>
-            <a:ext cx="5532120" cy="256032"/>
+            <a:off x="5989320" y="4700930"/>
+            <a:ext cx="5577840" cy="256032"/>
           </a:xfrm>
           <a:prstGeom prst="rect">
             <a:avLst/>
@@ -16618,7 +15352,7 @@
                 <a:latin typeface="Pretendard"/>
                 <a:ea typeface="Pretendard"/>
               </a:rPr>
-              <a:t>영상 찾기부터 한국어 자막 생성·저장까지 이 화면에서 진행합니다</a:t>
+              <a:t>결과 화면의 GIF 생성 버튼 — 실제 화면</a:t>
             </a:r>
           </a:p>
         </p:txBody>
@@ -16680,7 +15414,7 @@
                 <a:latin typeface="Pretendard SemiBold"/>
                 <a:ea typeface="Pretendard SemiBold"/>
               </a:rPr>
-              <a:t>9 / 19</a:t>
+              <a:t>9 / 15</a:t>
             </a:r>
           </a:p>
         </p:txBody>

--- a/slides.pptx
+++ b/slides.pptx
@@ -3117,7 +3117,7 @@
             <a:avLst/>
           </a:prstGeom>
           <a:solidFill>
-            <a:srgbClr val="FFFDF9"/>
+            <a:srgbClr val="FCFAF4"/>
           </a:solidFill>
           <a:ln>
             <a:noFill/>
@@ -3161,7 +3161,7 @@
             <a:avLst/>
           </a:prstGeom>
           <a:solidFill>
-            <a:srgbClr val="173F54"/>
+            <a:srgbClr val="0B3B3F"/>
           </a:solidFill>
           <a:ln>
             <a:noFill/>
@@ -3220,7 +3220,7 @@
             <a:r>
               <a:rPr sz="1150" b="0" i="0" spc="140">
                 <a:solidFill>
-                  <a:srgbClr val="1F5068"/>
+                  <a:srgbClr val="0F4E53"/>
                 </a:solidFill>
                 <a:latin typeface="Pretendard ExtraBold"/>
                 <a:ea typeface="Pretendard ExtraBold"/>
@@ -3260,7 +3260,7 @@
             <a:r>
               <a:rPr sz="3800" b="1" i="0">
                 <a:solidFill>
-                  <a:srgbClr val="1D2735"/>
+                  <a:srgbClr val="191F28"/>
                 </a:solidFill>
                 <a:latin typeface="Noto Serif KR"/>
                 <a:ea typeface="Noto Serif KR"/>
@@ -3270,7 +3270,7 @@
             <a:r>
               <a:rPr sz="3800" b="1" i="0">
                 <a:solidFill>
-                  <a:srgbClr val="9A7440"/>
+                  <a:srgbClr val="0F4E53"/>
                 </a:solidFill>
                 <a:latin typeface="Noto Serif KR"/>
                 <a:ea typeface="Noto Serif KR"/>
@@ -3280,7 +3280,7 @@
             <a:r>
               <a:rPr sz="3800" b="1" i="0">
                 <a:solidFill>
-                  <a:srgbClr val="1D2735"/>
+                  <a:srgbClr val="191F28"/>
                 </a:solidFill>
                 <a:latin typeface="Noto Serif KR"/>
                 <a:ea typeface="Noto Serif KR"/>
@@ -3320,7 +3320,7 @@
             <a:r>
               <a:rPr sz="1400" b="0" i="0">
                 <a:solidFill>
-                  <a:srgbClr val="455569"/>
+                  <a:srgbClr val="4E5964"/>
                 </a:solidFill>
                 <a:latin typeface="Pretendard SemiBold"/>
                 <a:ea typeface="Pretendard SemiBold"/>
@@ -3360,7 +3360,7 @@
             <a:r>
               <a:rPr sz="1200" b="0" i="0">
                 <a:solidFill>
-                  <a:srgbClr val="1F5068"/>
+                  <a:srgbClr val="0F4E53"/>
                 </a:solidFill>
                 <a:latin typeface="Pretendard ExtraBold"/>
                 <a:ea typeface="Pretendard ExtraBold"/>
@@ -3370,7 +3370,7 @@
             <a:r>
               <a:rPr sz="1200" b="0" i="0">
                 <a:solidFill>
-                  <a:srgbClr val="455569"/>
+                  <a:srgbClr val="4E5964"/>
                 </a:solidFill>
                 <a:latin typeface="Pretendard"/>
                 <a:ea typeface="Pretendard"/>
@@ -3380,7 +3380,7 @@
             <a:r>
               <a:rPr sz="1200" b="0" i="0">
                 <a:solidFill>
-                  <a:srgbClr val="1F5068"/>
+                  <a:srgbClr val="0F4E53"/>
                 </a:solidFill>
                 <a:latin typeface="Pretendard ExtraBold"/>
                 <a:ea typeface="Pretendard ExtraBold"/>
@@ -3414,7 +3414,7 @@
           </a:prstGeom>
           <a:ln w="12700">
             <a:solidFill>
-              <a:srgbClr val="EBE5DB"/>
+              <a:srgbClr val="EAE5D8"/>
             </a:solidFill>
           </a:ln>
           <a:effectLst/>
@@ -3451,7 +3451,7 @@
           </a:prstGeom>
           <a:ln w="12700">
             <a:solidFill>
-              <a:srgbClr val="EBE5DB"/>
+              <a:srgbClr val="EAE5D8"/>
             </a:solidFill>
           </a:ln>
           <a:effectLst/>
@@ -3494,7 +3494,7 @@
             <a:r>
               <a:rPr sz="1300" b="0" i="0">
                 <a:solidFill>
-                  <a:srgbClr val="455569"/>
+                  <a:srgbClr val="4E5964"/>
                 </a:solidFill>
                 <a:latin typeface="Pretendard"/>
                 <a:ea typeface="Pretendard"/>
@@ -3511,7 +3511,7 @@
             <a:r>
               <a:rPr sz="1300" b="0" i="0">
                 <a:solidFill>
-                  <a:srgbClr val="28364A"/>
+                  <a:srgbClr val="2B333D"/>
                 </a:solidFill>
                 <a:latin typeface="Pretendard ExtraBold"/>
                 <a:ea typeface="Pretendard ExtraBold"/>
@@ -3521,7 +3521,7 @@
             <a:r>
               <a:rPr sz="1300" b="0" i="0">
                 <a:solidFill>
-                  <a:srgbClr val="455569"/>
+                  <a:srgbClr val="4E5964"/>
                 </a:solidFill>
                 <a:latin typeface="Pretendard"/>
                 <a:ea typeface="Pretendard"/>
@@ -3564,7 +3564,7 @@
             <a:avLst/>
           </a:prstGeom>
           <a:solidFill>
-            <a:srgbClr val="FFFDF9"/>
+            <a:srgbClr val="FCFAF4"/>
           </a:solidFill>
           <a:ln>
             <a:noFill/>
@@ -3608,7 +3608,7 @@
             <a:avLst/>
           </a:prstGeom>
           <a:solidFill>
-            <a:srgbClr val="173F54"/>
+            <a:srgbClr val="0B3B3F"/>
           </a:solidFill>
           <a:ln>
             <a:noFill/>
@@ -3652,7 +3652,7 @@
             <a:avLst/>
           </a:prstGeom>
           <a:solidFill>
-            <a:srgbClr val="9A7440"/>
+            <a:srgbClr val="0F4E53"/>
           </a:solidFill>
           <a:ln>
             <a:noFill/>
@@ -3711,7 +3711,7 @@
             <a:r>
               <a:rPr sz="1050" b="0" i="0" spc="190">
                 <a:solidFill>
-                  <a:srgbClr val="1F5068"/>
+                  <a:srgbClr val="0F4E53"/>
                 </a:solidFill>
                 <a:latin typeface="Pretendard ExtraBold"/>
                 <a:ea typeface="Pretendard ExtraBold"/>
@@ -3751,7 +3751,7 @@
             <a:r>
               <a:rPr sz="2400" b="1" i="0">
                 <a:solidFill>
-                  <a:srgbClr val="1D2735"/>
+                  <a:srgbClr val="191F28"/>
                 </a:solidFill>
                 <a:latin typeface="Noto Serif KR"/>
                 <a:ea typeface="Noto Serif KR"/>
@@ -3771,7 +3771,7 @@
             <a:r>
               <a:rPr sz="1200" b="0" i="0">
                 <a:solidFill>
-                  <a:srgbClr val="455569"/>
+                  <a:srgbClr val="4E5964"/>
                 </a:solidFill>
                 <a:latin typeface="Pretendard"/>
                 <a:ea typeface="Pretendard"/>
@@ -3811,7 +3811,7 @@
             <a:r>
               <a:rPr sz="1600" b="0" i="0">
                 <a:solidFill>
-                  <a:srgbClr val="1D2735"/>
+                  <a:srgbClr val="191F28"/>
                 </a:solidFill>
                 <a:latin typeface="Pretendard"/>
                 <a:ea typeface="Pretendard"/>
@@ -3854,7 +3854,7 @@
             <a:r>
               <a:rPr sz="1200" b="0" i="0">
                 <a:solidFill>
-                  <a:srgbClr val="1D2735"/>
+                  <a:srgbClr val="191F28"/>
                 </a:solidFill>
                 <a:latin typeface="Pretendard ExtraBold"/>
                 <a:ea typeface="Pretendard ExtraBold"/>
@@ -3871,7 +3871,7 @@
             <a:r>
               <a:rPr sz="1050" b="0" i="0">
                 <a:solidFill>
-                  <a:srgbClr val="455569"/>
+                  <a:srgbClr val="4E5964"/>
                 </a:solidFill>
                 <a:latin typeface="Pretendard"/>
                 <a:ea typeface="Pretendard"/>
@@ -3896,7 +3896,7 @@
             <a:avLst/>
           </a:prstGeom>
           <a:solidFill>
-            <a:srgbClr val="EBE5DB"/>
+            <a:srgbClr val="EAE5D8"/>
           </a:solidFill>
           <a:ln>
             <a:noFill/>
@@ -3955,7 +3955,7 @@
             <a:r>
               <a:rPr sz="1600" b="0" i="0">
                 <a:solidFill>
-                  <a:srgbClr val="1D2735"/>
+                  <a:srgbClr val="191F28"/>
                 </a:solidFill>
                 <a:latin typeface="Pretendard"/>
                 <a:ea typeface="Pretendard"/>
@@ -3998,7 +3998,7 @@
             <a:r>
               <a:rPr sz="1200" b="0" i="0">
                 <a:solidFill>
-                  <a:srgbClr val="1D2735"/>
+                  <a:srgbClr val="191F28"/>
                 </a:solidFill>
                 <a:latin typeface="Pretendard ExtraBold"/>
                 <a:ea typeface="Pretendard ExtraBold"/>
@@ -4015,7 +4015,7 @@
             <a:r>
               <a:rPr sz="1050" b="0" i="0">
                 <a:solidFill>
-                  <a:srgbClr val="455569"/>
+                  <a:srgbClr val="4E5964"/>
                 </a:solidFill>
                 <a:latin typeface="Pretendard"/>
                 <a:ea typeface="Pretendard"/>
@@ -4040,7 +4040,7 @@
             <a:avLst/>
           </a:prstGeom>
           <a:solidFill>
-            <a:srgbClr val="EBE5DB"/>
+            <a:srgbClr val="EAE5D8"/>
           </a:solidFill>
           <a:ln>
             <a:noFill/>
@@ -4099,7 +4099,7 @@
             <a:r>
               <a:rPr sz="1600" b="0" i="0">
                 <a:solidFill>
-                  <a:srgbClr val="1D2735"/>
+                  <a:srgbClr val="191F28"/>
                 </a:solidFill>
                 <a:latin typeface="Pretendard"/>
                 <a:ea typeface="Pretendard"/>
@@ -4142,7 +4142,7 @@
             <a:r>
               <a:rPr sz="1200" b="0" i="0">
                 <a:solidFill>
-                  <a:srgbClr val="1D2735"/>
+                  <a:srgbClr val="191F28"/>
                 </a:solidFill>
                 <a:latin typeface="Pretendard ExtraBold"/>
                 <a:ea typeface="Pretendard ExtraBold"/>
@@ -4159,7 +4159,7 @@
             <a:r>
               <a:rPr sz="1050" b="0" i="0">
                 <a:solidFill>
-                  <a:srgbClr val="455569"/>
+                  <a:srgbClr val="4E5964"/>
                 </a:solidFill>
                 <a:latin typeface="Pretendard"/>
                 <a:ea typeface="Pretendard"/>
@@ -4186,11 +4186,11 @@
             </a:avLst>
           </a:prstGeom>
           <a:solidFill>
-            <a:srgbClr val="28364A"/>
+            <a:srgbClr val="2B333D"/>
           </a:solidFill>
           <a:ln w="9525">
             <a:solidFill>
-              <a:srgbClr val="EBE5DB"/>
+              <a:srgbClr val="EAE5D8"/>
             </a:solidFill>
           </a:ln>
           <a:effectLst/>
@@ -4361,7 +4361,7 @@
             <a:r>
               <a:rPr sz="850" b="0" i="0">
                 <a:solidFill>
-                  <a:srgbClr val="28364A"/>
+                  <a:srgbClr val="2B333D"/>
                 </a:solidFill>
                 <a:latin typeface="Pretendard SemiBold"/>
                 <a:ea typeface="Pretendard SemiBold"/>
@@ -4388,11 +4388,11 @@
             </a:avLst>
           </a:prstGeom>
           <a:solidFill>
-            <a:srgbClr val="F4F8FA"/>
+            <a:srgbClr val="F2F6F5"/>
           </a:solidFill>
           <a:ln w="9525">
             <a:solidFill>
-              <a:srgbClr val="D8E3EA"/>
+              <a:srgbClr val="CFDEDC"/>
             </a:solidFill>
           </a:ln>
           <a:effectLst/>
@@ -4456,7 +4456,7 @@
             <a:r>
               <a:rPr sz="2000" b="0" i="0">
                 <a:solidFill>
-                  <a:srgbClr val="1F5068"/>
+                  <a:srgbClr val="0F4E53"/>
                 </a:solidFill>
                 <a:latin typeface="Pretendard"/>
                 <a:ea typeface="Pretendard"/>
@@ -4483,7 +4483,7 @@
             </a:avLst>
           </a:prstGeom>
           <a:solidFill>
-            <a:srgbClr val="1F5068"/>
+            <a:srgbClr val="0F4E53"/>
           </a:solidFill>
           <a:ln>
             <a:noFill/>
@@ -4556,7 +4556,7 @@
             <a:r>
               <a:rPr sz="900" b="0" i="0">
                 <a:solidFill>
-                  <a:srgbClr val="455569"/>
+                  <a:srgbClr val="4E5964"/>
                 </a:solidFill>
                 <a:latin typeface="Pretendard"/>
                 <a:ea typeface="Pretendard"/>
@@ -4587,7 +4587,7 @@
           </a:solidFill>
           <a:ln w="9525">
             <a:solidFill>
-              <a:srgbClr val="EBE5DB"/>
+              <a:srgbClr val="EAE5D8"/>
             </a:solidFill>
           </a:ln>
           <a:effectLst/>
@@ -4618,7 +4618,7 @@
             <a:r>
               <a:rPr sz="1050" b="0" i="0">
                 <a:solidFill>
-                  <a:srgbClr val="455569"/>
+                  <a:srgbClr val="4E5964"/>
                 </a:solidFill>
                 <a:latin typeface="Pretendard SemiBold"/>
                 <a:ea typeface="Pretendard SemiBold"/>
@@ -4661,7 +4661,7 @@
             <a:avLst/>
           </a:prstGeom>
           <a:solidFill>
-            <a:srgbClr val="FFFDF9"/>
+            <a:srgbClr val="FCFAF4"/>
           </a:solidFill>
           <a:ln>
             <a:noFill/>
@@ -4705,7 +4705,7 @@
             <a:avLst/>
           </a:prstGeom>
           <a:solidFill>
-            <a:srgbClr val="173F54"/>
+            <a:srgbClr val="0B3B3F"/>
           </a:solidFill>
           <a:ln>
             <a:noFill/>
@@ -4749,7 +4749,7 @@
             <a:avLst/>
           </a:prstGeom>
           <a:solidFill>
-            <a:srgbClr val="9A7440"/>
+            <a:srgbClr val="0F4E53"/>
           </a:solidFill>
           <a:ln>
             <a:noFill/>
@@ -4808,7 +4808,7 @@
             <a:r>
               <a:rPr sz="1050" b="0" i="0" spc="190">
                 <a:solidFill>
-                  <a:srgbClr val="1F5068"/>
+                  <a:srgbClr val="0F4E53"/>
                 </a:solidFill>
                 <a:latin typeface="Pretendard ExtraBold"/>
                 <a:ea typeface="Pretendard ExtraBold"/>
@@ -4848,7 +4848,7 @@
             <a:r>
               <a:rPr sz="2400" b="1" i="0">
                 <a:solidFill>
-                  <a:srgbClr val="1D2735"/>
+                  <a:srgbClr val="191F28"/>
                 </a:solidFill>
                 <a:latin typeface="Noto Serif KR"/>
                 <a:ea typeface="Noto Serif KR"/>
@@ -4868,7 +4868,7 @@
             <a:r>
               <a:rPr sz="1200" b="0" i="0">
                 <a:solidFill>
-                  <a:srgbClr val="455569"/>
+                  <a:srgbClr val="4E5964"/>
                 </a:solidFill>
                 <a:latin typeface="Pretendard"/>
                 <a:ea typeface="Pretendard"/>
@@ -4908,7 +4908,7 @@
             <a:r>
               <a:rPr sz="1600" b="0" i="0">
                 <a:solidFill>
-                  <a:srgbClr val="1D2735"/>
+                  <a:srgbClr val="191F28"/>
                 </a:solidFill>
                 <a:latin typeface="Pretendard"/>
                 <a:ea typeface="Pretendard"/>
@@ -4951,7 +4951,7 @@
             <a:r>
               <a:rPr sz="1200" b="0" i="0">
                 <a:solidFill>
-                  <a:srgbClr val="1D2735"/>
+                  <a:srgbClr val="191F28"/>
                 </a:solidFill>
                 <a:latin typeface="Pretendard ExtraBold"/>
                 <a:ea typeface="Pretendard ExtraBold"/>
@@ -4968,7 +4968,7 @@
             <a:r>
               <a:rPr sz="1050" b="0" i="0">
                 <a:solidFill>
-                  <a:srgbClr val="455569"/>
+                  <a:srgbClr val="4E5964"/>
                 </a:solidFill>
                 <a:latin typeface="Pretendard"/>
                 <a:ea typeface="Pretendard"/>
@@ -4993,7 +4993,7 @@
             <a:avLst/>
           </a:prstGeom>
           <a:solidFill>
-            <a:srgbClr val="EBE5DB"/>
+            <a:srgbClr val="EAE5D8"/>
           </a:solidFill>
           <a:ln>
             <a:noFill/>
@@ -5052,7 +5052,7 @@
             <a:r>
               <a:rPr sz="1600" b="0" i="0">
                 <a:solidFill>
-                  <a:srgbClr val="1D2735"/>
+                  <a:srgbClr val="191F28"/>
                 </a:solidFill>
                 <a:latin typeface="Pretendard"/>
                 <a:ea typeface="Pretendard"/>
@@ -5095,7 +5095,7 @@
             <a:r>
               <a:rPr sz="1200" b="0" i="0">
                 <a:solidFill>
-                  <a:srgbClr val="1D2735"/>
+                  <a:srgbClr val="191F28"/>
                 </a:solidFill>
                 <a:latin typeface="Pretendard ExtraBold"/>
                 <a:ea typeface="Pretendard ExtraBold"/>
@@ -5112,7 +5112,7 @@
             <a:r>
               <a:rPr sz="1050" b="0" i="0">
                 <a:solidFill>
-                  <a:srgbClr val="455569"/>
+                  <a:srgbClr val="4E5964"/>
                 </a:solidFill>
                 <a:latin typeface="Pretendard"/>
                 <a:ea typeface="Pretendard"/>
@@ -5137,7 +5137,7 @@
             <a:avLst/>
           </a:prstGeom>
           <a:solidFill>
-            <a:srgbClr val="EBE5DB"/>
+            <a:srgbClr val="EAE5D8"/>
           </a:solidFill>
           <a:ln>
             <a:noFill/>
@@ -5196,7 +5196,7 @@
             <a:r>
               <a:rPr sz="1600" b="0" i="0">
                 <a:solidFill>
-                  <a:srgbClr val="1D2735"/>
+                  <a:srgbClr val="191F28"/>
                 </a:solidFill>
                 <a:latin typeface="Pretendard"/>
                 <a:ea typeface="Pretendard"/>
@@ -5239,7 +5239,7 @@
             <a:r>
               <a:rPr sz="1200" b="0" i="0">
                 <a:solidFill>
-                  <a:srgbClr val="1D2735"/>
+                  <a:srgbClr val="191F28"/>
                 </a:solidFill>
                 <a:latin typeface="Pretendard ExtraBold"/>
                 <a:ea typeface="Pretendard ExtraBold"/>
@@ -5256,7 +5256,7 @@
             <a:r>
               <a:rPr sz="1050" b="0" i="0">
                 <a:solidFill>
-                  <a:srgbClr val="455569"/>
+                  <a:srgbClr val="4E5964"/>
                 </a:solidFill>
                 <a:latin typeface="Pretendard"/>
                 <a:ea typeface="Pretendard"/>
@@ -5290,7 +5290,7 @@
           </a:prstGeom>
           <a:ln w="12700">
             <a:solidFill>
-              <a:srgbClr val="EBE5DB"/>
+              <a:srgbClr val="EAE5D8"/>
             </a:solidFill>
           </a:ln>
           <a:effectLst/>
@@ -5333,7 +5333,7 @@
             <a:r>
               <a:rPr sz="900" b="0" i="0">
                 <a:solidFill>
-                  <a:srgbClr val="455569"/>
+                  <a:srgbClr val="4E5964"/>
                 </a:solidFill>
                 <a:latin typeface="Pretendard"/>
                 <a:ea typeface="Pretendard"/>
@@ -5364,7 +5364,7 @@
           </a:solidFill>
           <a:ln w="9525">
             <a:solidFill>
-              <a:srgbClr val="EBE5DB"/>
+              <a:srgbClr val="EAE5D8"/>
             </a:solidFill>
           </a:ln>
           <a:effectLst/>
@@ -5395,7 +5395,7 @@
             <a:r>
               <a:rPr sz="1050" b="0" i="0">
                 <a:solidFill>
-                  <a:srgbClr val="455569"/>
+                  <a:srgbClr val="4E5964"/>
                 </a:solidFill>
                 <a:latin typeface="Pretendard SemiBold"/>
                 <a:ea typeface="Pretendard SemiBold"/>
@@ -5438,7 +5438,7 @@
             <a:avLst/>
           </a:prstGeom>
           <a:solidFill>
-            <a:srgbClr val="FFFDF9"/>
+            <a:srgbClr val="FCFAF4"/>
           </a:solidFill>
           <a:ln>
             <a:noFill/>
@@ -5482,7 +5482,7 @@
             <a:avLst/>
           </a:prstGeom>
           <a:solidFill>
-            <a:srgbClr val="173F54"/>
+            <a:srgbClr val="0B3B3F"/>
           </a:solidFill>
           <a:ln>
             <a:noFill/>
@@ -5526,7 +5526,7 @@
             <a:avLst/>
           </a:prstGeom>
           <a:solidFill>
-            <a:srgbClr val="9A7440"/>
+            <a:srgbClr val="0F4E53"/>
           </a:solidFill>
           <a:ln>
             <a:noFill/>
@@ -5585,7 +5585,7 @@
             <a:r>
               <a:rPr sz="1050" b="0" i="0" spc="190">
                 <a:solidFill>
-                  <a:srgbClr val="1F5068"/>
+                  <a:srgbClr val="0F4E53"/>
                 </a:solidFill>
                 <a:latin typeface="Pretendard ExtraBold"/>
                 <a:ea typeface="Pretendard ExtraBold"/>
@@ -5625,7 +5625,7 @@
             <a:r>
               <a:rPr sz="2400" b="1" i="0">
                 <a:solidFill>
-                  <a:srgbClr val="1D2735"/>
+                  <a:srgbClr val="191F28"/>
                 </a:solidFill>
                 <a:latin typeface="Noto Serif KR"/>
                 <a:ea typeface="Noto Serif KR"/>
@@ -5645,7 +5645,7 @@
             <a:r>
               <a:rPr sz="1200" b="0" i="0">
                 <a:solidFill>
-                  <a:srgbClr val="455569"/>
+                  <a:srgbClr val="4E5964"/>
                 </a:solidFill>
                 <a:latin typeface="Pretendard"/>
                 <a:ea typeface="Pretendard"/>
@@ -5685,7 +5685,7 @@
             <a:r>
               <a:rPr sz="1600" b="0" i="0">
                 <a:solidFill>
-                  <a:srgbClr val="1D2735"/>
+                  <a:srgbClr val="191F28"/>
                 </a:solidFill>
                 <a:latin typeface="Pretendard"/>
                 <a:ea typeface="Pretendard"/>
@@ -5728,7 +5728,7 @@
             <a:r>
               <a:rPr sz="1200" b="0" i="0">
                 <a:solidFill>
-                  <a:srgbClr val="1D2735"/>
+                  <a:srgbClr val="191F28"/>
                 </a:solidFill>
                 <a:latin typeface="Pretendard ExtraBold"/>
                 <a:ea typeface="Pretendard ExtraBold"/>
@@ -5745,7 +5745,7 @@
             <a:r>
               <a:rPr sz="1050" b="0" i="0">
                 <a:solidFill>
-                  <a:srgbClr val="455569"/>
+                  <a:srgbClr val="4E5964"/>
                 </a:solidFill>
                 <a:latin typeface="Pretendard"/>
                 <a:ea typeface="Pretendard"/>
@@ -5770,7 +5770,7 @@
             <a:avLst/>
           </a:prstGeom>
           <a:solidFill>
-            <a:srgbClr val="EBE5DB"/>
+            <a:srgbClr val="EAE5D8"/>
           </a:solidFill>
           <a:ln>
             <a:noFill/>
@@ -5829,7 +5829,7 @@
             <a:r>
               <a:rPr sz="1600" b="0" i="0">
                 <a:solidFill>
-                  <a:srgbClr val="1D2735"/>
+                  <a:srgbClr val="191F28"/>
                 </a:solidFill>
                 <a:latin typeface="Pretendard"/>
                 <a:ea typeface="Pretendard"/>
@@ -5872,7 +5872,7 @@
             <a:r>
               <a:rPr sz="1200" b="0" i="0">
                 <a:solidFill>
-                  <a:srgbClr val="1D2735"/>
+                  <a:srgbClr val="191F28"/>
                 </a:solidFill>
                 <a:latin typeface="Pretendard ExtraBold"/>
                 <a:ea typeface="Pretendard ExtraBold"/>
@@ -5889,7 +5889,7 @@
             <a:r>
               <a:rPr sz="1050" b="0" i="0">
                 <a:solidFill>
-                  <a:srgbClr val="455569"/>
+                  <a:srgbClr val="4E5964"/>
                 </a:solidFill>
                 <a:latin typeface="Pretendard"/>
                 <a:ea typeface="Pretendard"/>
@@ -5914,7 +5914,7 @@
             <a:avLst/>
           </a:prstGeom>
           <a:solidFill>
-            <a:srgbClr val="EBE5DB"/>
+            <a:srgbClr val="EAE5D8"/>
           </a:solidFill>
           <a:ln>
             <a:noFill/>
@@ -5973,7 +5973,7 @@
             <a:r>
               <a:rPr sz="1600" b="0" i="0">
                 <a:solidFill>
-                  <a:srgbClr val="1D2735"/>
+                  <a:srgbClr val="191F28"/>
                 </a:solidFill>
                 <a:latin typeface="Pretendard"/>
                 <a:ea typeface="Pretendard"/>
@@ -6016,7 +6016,7 @@
             <a:r>
               <a:rPr sz="1200" b="0" i="0">
                 <a:solidFill>
-                  <a:srgbClr val="1D2735"/>
+                  <a:srgbClr val="191F28"/>
                 </a:solidFill>
                 <a:latin typeface="Pretendard ExtraBold"/>
                 <a:ea typeface="Pretendard ExtraBold"/>
@@ -6033,7 +6033,7 @@
             <a:r>
               <a:rPr sz="1050" b="0" i="0">
                 <a:solidFill>
-                  <a:srgbClr val="455569"/>
+                  <a:srgbClr val="4E5964"/>
                 </a:solidFill>
                 <a:latin typeface="Pretendard"/>
                 <a:ea typeface="Pretendard"/>
@@ -6067,7 +6067,7 @@
           </a:prstGeom>
           <a:ln w="12700">
             <a:solidFill>
-              <a:srgbClr val="EBE5DB"/>
+              <a:srgbClr val="EAE5D8"/>
             </a:solidFill>
           </a:ln>
           <a:effectLst/>
@@ -6110,7 +6110,7 @@
             <a:r>
               <a:rPr sz="900" b="0" i="0">
                 <a:solidFill>
-                  <a:srgbClr val="455569"/>
+                  <a:srgbClr val="4E5964"/>
                 </a:solidFill>
                 <a:latin typeface="Pretendard"/>
                 <a:ea typeface="Pretendard"/>
@@ -6141,7 +6141,7 @@
           </a:solidFill>
           <a:ln w="9525">
             <a:solidFill>
-              <a:srgbClr val="EBE5DB"/>
+              <a:srgbClr val="EAE5D8"/>
             </a:solidFill>
           </a:ln>
           <a:effectLst/>
@@ -6172,7 +6172,7 @@
             <a:r>
               <a:rPr sz="1050" b="0" i="0">
                 <a:solidFill>
-                  <a:srgbClr val="455569"/>
+                  <a:srgbClr val="4E5964"/>
                 </a:solidFill>
                 <a:latin typeface="Pretendard SemiBold"/>
                 <a:ea typeface="Pretendard SemiBold"/>
@@ -6215,7 +6215,7 @@
             <a:avLst/>
           </a:prstGeom>
           <a:solidFill>
-            <a:srgbClr val="FFFDF9"/>
+            <a:srgbClr val="FCFAF4"/>
           </a:solidFill>
           <a:ln>
             <a:noFill/>
@@ -6259,7 +6259,7 @@
             <a:avLst/>
           </a:prstGeom>
           <a:solidFill>
-            <a:srgbClr val="173F54"/>
+            <a:srgbClr val="0B3B3F"/>
           </a:solidFill>
           <a:ln>
             <a:noFill/>
@@ -6303,7 +6303,7 @@
             <a:avLst/>
           </a:prstGeom>
           <a:solidFill>
-            <a:srgbClr val="9A7440"/>
+            <a:srgbClr val="0F4E53"/>
           </a:solidFill>
           <a:ln>
             <a:noFill/>
@@ -6362,7 +6362,7 @@
             <a:r>
               <a:rPr sz="1050" b="0" i="0" spc="190">
                 <a:solidFill>
-                  <a:srgbClr val="1F5068"/>
+                  <a:srgbClr val="0F4E53"/>
                 </a:solidFill>
                 <a:latin typeface="Pretendard ExtraBold"/>
                 <a:ea typeface="Pretendard ExtraBold"/>
@@ -6402,7 +6402,7 @@
             <a:r>
               <a:rPr sz="2200" b="1" i="0">
                 <a:solidFill>
-                  <a:srgbClr val="1D2735"/>
+                  <a:srgbClr val="191F28"/>
                 </a:solidFill>
                 <a:latin typeface="Noto Serif KR"/>
                 <a:ea typeface="Noto Serif KR"/>
@@ -6412,7 +6412,7 @@
             <a:r>
               <a:rPr sz="2200" b="1" i="0">
                 <a:solidFill>
-                  <a:srgbClr val="1F5068"/>
+                  <a:srgbClr val="0F4E53"/>
                 </a:solidFill>
                 <a:latin typeface="Noto Serif KR"/>
                 <a:ea typeface="Noto Serif KR"/>
@@ -6422,7 +6422,7 @@
             <a:r>
               <a:rPr sz="2200" b="1" i="0">
                 <a:solidFill>
-                  <a:srgbClr val="1D2735"/>
+                  <a:srgbClr val="191F28"/>
                 </a:solidFill>
                 <a:latin typeface="Noto Serif KR"/>
                 <a:ea typeface="Noto Serif KR"/>
@@ -6456,7 +6456,7 @@
           </a:prstGeom>
           <a:ln w="12700">
             <a:solidFill>
-              <a:srgbClr val="DAD2C6"/>
+              <a:srgbClr val="D9D3C5"/>
             </a:solidFill>
           </a:ln>
           <a:effectLst/>
@@ -6486,7 +6486,7 @@
           <a:noFill/>
           <a:ln w="28575">
             <a:solidFill>
-              <a:srgbClr val="1F5068"/>
+              <a:srgbClr val="0F4E53"/>
             </a:solidFill>
           </a:ln>
           <a:effectLst/>
@@ -6543,7 +6543,7 @@
             <a:r>
               <a:rPr sz="950" b="0" i="0">
                 <a:solidFill>
-                  <a:srgbClr val="1F5068"/>
+                  <a:srgbClr val="0F4E53"/>
                 </a:solidFill>
                 <a:latin typeface="Pretendard ExtraBold"/>
                 <a:ea typeface="Pretendard ExtraBold"/>
@@ -6574,7 +6574,7 @@
           </a:solidFill>
           <a:ln w="9525">
             <a:solidFill>
-              <a:srgbClr val="DAD2C6"/>
+              <a:srgbClr val="D9D3C5"/>
             </a:solidFill>
           </a:ln>
           <a:effectLst/>
@@ -6641,7 +6641,7 @@
             <a:r>
               <a:rPr sz="1450" b="1" i="0">
                 <a:solidFill>
-                  <a:srgbClr val="1D2735"/>
+                  <a:srgbClr val="191F28"/>
                 </a:solidFill>
                 <a:latin typeface="Noto Serif KR"/>
                 <a:ea typeface="Noto Serif KR"/>
@@ -6658,7 +6658,7 @@
             <a:r>
               <a:rPr sz="1100" b="0" i="0">
                 <a:solidFill>
-                  <a:srgbClr val="28364A"/>
+                  <a:srgbClr val="2B333D"/>
                 </a:solidFill>
                 <a:latin typeface="Pretendard"/>
                 <a:ea typeface="Pretendard"/>
@@ -6701,7 +6701,7 @@
             <a:r>
               <a:rPr sz="2400" b="1" i="0">
                 <a:solidFill>
-                  <a:srgbClr val="9A7440"/>
+                  <a:srgbClr val="0F4E53"/>
                 </a:solidFill>
                 <a:latin typeface="Pretendard"/>
                 <a:ea typeface="Pretendard"/>
@@ -6718,7 +6718,7 @@
             <a:r>
               <a:rPr sz="950" b="0" i="0">
                 <a:solidFill>
-                  <a:srgbClr val="7D5E33"/>
+                  <a:srgbClr val="0B3B3F"/>
                 </a:solidFill>
                 <a:latin typeface="Pretendard ExtraBold"/>
                 <a:ea typeface="Pretendard ExtraBold"/>
@@ -6745,11 +6745,11 @@
             </a:avLst>
           </a:prstGeom>
           <a:solidFill>
-            <a:srgbClr val="F4F8FA"/>
+            <a:srgbClr val="F2F6F5"/>
           </a:solidFill>
           <a:ln w="9525">
             <a:solidFill>
-              <a:srgbClr val="D8E3EA"/>
+              <a:srgbClr val="CFDEDC"/>
             </a:solidFill>
           </a:ln>
           <a:effectLst/>
@@ -6816,7 +6816,7 @@
             <a:r>
               <a:rPr sz="1450" b="1" i="0">
                 <a:solidFill>
-                  <a:srgbClr val="1D2735"/>
+                  <a:srgbClr val="191F28"/>
                 </a:solidFill>
                 <a:latin typeface="Noto Serif KR"/>
                 <a:ea typeface="Noto Serif KR"/>
@@ -6833,7 +6833,7 @@
             <a:r>
               <a:rPr sz="1100" b="0" i="0">
                 <a:solidFill>
-                  <a:srgbClr val="28364A"/>
+                  <a:srgbClr val="2B333D"/>
                 </a:solidFill>
                 <a:latin typeface="Pretendard"/>
                 <a:ea typeface="Pretendard"/>
@@ -6864,7 +6864,7 @@
           </a:solidFill>
           <a:ln w="9525">
             <a:solidFill>
-              <a:srgbClr val="DAD2C6"/>
+              <a:srgbClr val="D9D3C5"/>
             </a:solidFill>
           </a:ln>
           <a:effectLst/>
@@ -6895,7 +6895,7 @@
             <a:r>
               <a:rPr sz="1050" b="0" i="0">
                 <a:solidFill>
-                  <a:srgbClr val="1D2735"/>
+                  <a:srgbClr val="191F28"/>
                 </a:solidFill>
                 <a:latin typeface="Pretendard SemiBold"/>
                 <a:ea typeface="Pretendard SemiBold"/>
@@ -6935,7 +6935,7 @@
             <a:r>
               <a:rPr sz="1050" b="0" i="0">
                 <a:solidFill>
-                  <a:srgbClr val="455569"/>
+                  <a:srgbClr val="4E5964"/>
                 </a:solidFill>
                 <a:latin typeface="Pretendard"/>
                 <a:ea typeface="Pretendard"/>
@@ -6966,7 +6966,7 @@
           </a:solidFill>
           <a:ln w="9525">
             <a:solidFill>
-              <a:srgbClr val="EBE5DB"/>
+              <a:srgbClr val="EAE5D8"/>
             </a:solidFill>
           </a:ln>
           <a:effectLst/>
@@ -6997,7 +6997,7 @@
             <a:r>
               <a:rPr sz="1050" b="0" i="0">
                 <a:solidFill>
-                  <a:srgbClr val="455569"/>
+                  <a:srgbClr val="4E5964"/>
                 </a:solidFill>
                 <a:latin typeface="Pretendard SemiBold"/>
                 <a:ea typeface="Pretendard SemiBold"/>
@@ -7040,7 +7040,7 @@
             <a:avLst/>
           </a:prstGeom>
           <a:solidFill>
-            <a:srgbClr val="FFFDF9"/>
+            <a:srgbClr val="FCFAF4"/>
           </a:solidFill>
           <a:ln>
             <a:noFill/>
@@ -7084,7 +7084,7 @@
             <a:avLst/>
           </a:prstGeom>
           <a:solidFill>
-            <a:srgbClr val="173F54"/>
+            <a:srgbClr val="0B3B3F"/>
           </a:solidFill>
           <a:ln>
             <a:noFill/>
@@ -7128,7 +7128,7 @@
             <a:avLst/>
           </a:prstGeom>
           <a:solidFill>
-            <a:srgbClr val="9A7440"/>
+            <a:srgbClr val="0F4E53"/>
           </a:solidFill>
           <a:ln>
             <a:noFill/>
@@ -7187,7 +7187,7 @@
             <a:r>
               <a:rPr sz="1050" b="0" i="0" spc="190">
                 <a:solidFill>
-                  <a:srgbClr val="1F5068"/>
+                  <a:srgbClr val="0F4E53"/>
                 </a:solidFill>
                 <a:latin typeface="Pretendard ExtraBold"/>
                 <a:ea typeface="Pretendard ExtraBold"/>
@@ -7227,7 +7227,7 @@
             <a:r>
               <a:rPr sz="2300" b="1" i="0">
                 <a:solidFill>
-                  <a:srgbClr val="1D2735"/>
+                  <a:srgbClr val="191F28"/>
                 </a:solidFill>
                 <a:latin typeface="Noto Serif KR"/>
                 <a:ea typeface="Noto Serif KR"/>
@@ -7252,7 +7252,7 @@
             <a:avLst/>
           </a:prstGeom>
           <a:solidFill>
-            <a:srgbClr val="DAD2C6"/>
+            <a:srgbClr val="D9D3C5"/>
           </a:solidFill>
           <a:ln>
             <a:noFill/>
@@ -7311,7 +7311,7 @@
             <a:r>
               <a:rPr sz="1250" b="1" i="0">
                 <a:solidFill>
-                  <a:srgbClr val="7D5E33"/>
+                  <a:srgbClr val="0B3B3F"/>
                 </a:solidFill>
                 <a:latin typeface="Noto Serif KR"/>
                 <a:ea typeface="Noto Serif KR"/>
@@ -7336,7 +7336,7 @@
             <a:avLst/>
           </a:prstGeom>
           <a:solidFill>
-            <a:srgbClr val="9A7440"/>
+            <a:srgbClr val="0F4E53"/>
           </a:solidFill>
           <a:ln w="19050">
             <a:solidFill>
@@ -7384,7 +7384,7 @@
             </a:avLst>
           </a:prstGeom>
           <a:solidFill>
-            <a:srgbClr val="F6EFE5"/>
+            <a:srgbClr val="E6EEED"/>
           </a:solidFill>
           <a:ln>
             <a:noFill/>
@@ -7417,7 +7417,7 @@
             <a:r>
               <a:rPr sz="900" b="0" i="0">
                 <a:solidFill>
-                  <a:srgbClr val="7D5E33"/>
+                  <a:srgbClr val="0B3B3F"/>
                 </a:solidFill>
                 <a:latin typeface="Pretendard SemiBold"/>
                 <a:ea typeface="Pretendard SemiBold"/>
@@ -7460,7 +7460,7 @@
             <a:r>
               <a:rPr sz="1350" b="0" i="0">
                 <a:solidFill>
-                  <a:srgbClr val="1D2735"/>
+                  <a:srgbClr val="191F28"/>
                 </a:solidFill>
                 <a:latin typeface="Pretendard ExtraBold"/>
                 <a:ea typeface="Pretendard ExtraBold"/>
@@ -7477,7 +7477,7 @@
             <a:r>
               <a:rPr sz="1050" b="0" i="0">
                 <a:solidFill>
-                  <a:srgbClr val="455569"/>
+                  <a:srgbClr val="4E5964"/>
                 </a:solidFill>
                 <a:latin typeface="Pretendard"/>
                 <a:ea typeface="Pretendard"/>
@@ -7502,7 +7502,7 @@
             <a:avLst/>
           </a:prstGeom>
           <a:solidFill>
-            <a:srgbClr val="DAD2C6"/>
+            <a:srgbClr val="D9D3C5"/>
           </a:solidFill>
           <a:ln>
             <a:noFill/>
@@ -7561,7 +7561,7 @@
             <a:r>
               <a:rPr sz="1250" b="1" i="0">
                 <a:solidFill>
-                  <a:srgbClr val="7D5E33"/>
+                  <a:srgbClr val="0B3B3F"/>
                 </a:solidFill>
                 <a:latin typeface="Noto Serif KR"/>
                 <a:ea typeface="Noto Serif KR"/>
@@ -7586,7 +7586,7 @@
             <a:avLst/>
           </a:prstGeom>
           <a:solidFill>
-            <a:srgbClr val="1F5068"/>
+            <a:srgbClr val="0F4E53"/>
           </a:solidFill>
           <a:ln w="19050">
             <a:solidFill>
@@ -7634,7 +7634,7 @@
             </a:avLst>
           </a:prstGeom>
           <a:solidFill>
-            <a:srgbClr val="EAF1F5"/>
+            <a:srgbClr val="E6EEED"/>
           </a:solidFill>
           <a:ln>
             <a:noFill/>
@@ -7667,7 +7667,7 @@
             <a:r>
               <a:rPr sz="900" b="0" i="0">
                 <a:solidFill>
-                  <a:srgbClr val="1F5068"/>
+                  <a:srgbClr val="0F4E53"/>
                 </a:solidFill>
                 <a:latin typeface="Pretendard SemiBold"/>
                 <a:ea typeface="Pretendard SemiBold"/>
@@ -7710,7 +7710,7 @@
             <a:r>
               <a:rPr sz="1350" b="0" i="0">
                 <a:solidFill>
-                  <a:srgbClr val="1D2735"/>
+                  <a:srgbClr val="191F28"/>
                 </a:solidFill>
                 <a:latin typeface="Pretendard ExtraBold"/>
                 <a:ea typeface="Pretendard ExtraBold"/>
@@ -7727,7 +7727,7 @@
             <a:r>
               <a:rPr sz="1050" b="0" i="0">
                 <a:solidFill>
-                  <a:srgbClr val="455569"/>
+                  <a:srgbClr val="4E5964"/>
                 </a:solidFill>
                 <a:latin typeface="Pretendard"/>
                 <a:ea typeface="Pretendard"/>
@@ -7752,7 +7752,7 @@
             <a:avLst/>
           </a:prstGeom>
           <a:solidFill>
-            <a:srgbClr val="DAD2C6"/>
+            <a:srgbClr val="D9D3C5"/>
           </a:solidFill>
           <a:ln>
             <a:noFill/>
@@ -7811,7 +7811,7 @@
             <a:r>
               <a:rPr sz="1250" b="1" i="0">
                 <a:solidFill>
-                  <a:srgbClr val="7D5E33"/>
+                  <a:srgbClr val="0B3B3F"/>
                 </a:solidFill>
                 <a:latin typeface="Noto Serif KR"/>
                 <a:ea typeface="Noto Serif KR"/>
@@ -7836,7 +7836,7 @@
             <a:avLst/>
           </a:prstGeom>
           <a:solidFill>
-            <a:srgbClr val="9A7440"/>
+            <a:srgbClr val="0F4E53"/>
           </a:solidFill>
           <a:ln w="19050">
             <a:solidFill>
@@ -7884,7 +7884,7 @@
             </a:avLst>
           </a:prstGeom>
           <a:solidFill>
-            <a:srgbClr val="F6EFE5"/>
+            <a:srgbClr val="E6EEED"/>
           </a:solidFill>
           <a:ln>
             <a:noFill/>
@@ -7917,7 +7917,7 @@
             <a:r>
               <a:rPr sz="900" b="0" i="0">
                 <a:solidFill>
-                  <a:srgbClr val="7D5E33"/>
+                  <a:srgbClr val="0B3B3F"/>
                 </a:solidFill>
                 <a:latin typeface="Pretendard SemiBold"/>
                 <a:ea typeface="Pretendard SemiBold"/>
@@ -7960,7 +7960,7 @@
             <a:r>
               <a:rPr sz="1350" b="0" i="0">
                 <a:solidFill>
-                  <a:srgbClr val="1D2735"/>
+                  <a:srgbClr val="191F28"/>
                 </a:solidFill>
                 <a:latin typeface="Pretendard ExtraBold"/>
                 <a:ea typeface="Pretendard ExtraBold"/>
@@ -7977,7 +7977,7 @@
             <a:r>
               <a:rPr sz="1050" b="0" i="0">
                 <a:solidFill>
-                  <a:srgbClr val="455569"/>
+                  <a:srgbClr val="4E5964"/>
                 </a:solidFill>
                 <a:latin typeface="Pretendard"/>
                 <a:ea typeface="Pretendard"/>
@@ -8017,7 +8017,7 @@
             <a:r>
               <a:rPr sz="1250" b="1" i="0">
                 <a:solidFill>
-                  <a:srgbClr val="7D5E33"/>
+                  <a:srgbClr val="0B3B3F"/>
                 </a:solidFill>
                 <a:latin typeface="Noto Serif KR"/>
                 <a:ea typeface="Noto Serif KR"/>
@@ -8042,7 +8042,7 @@
             <a:avLst/>
           </a:prstGeom>
           <a:solidFill>
-            <a:srgbClr val="1D2735"/>
+            <a:srgbClr val="191F28"/>
           </a:solidFill>
           <a:ln w="19050">
             <a:solidFill>
@@ -8123,7 +8123,7 @@
             <a:r>
               <a:rPr sz="900" b="0" i="0">
                 <a:solidFill>
-                  <a:srgbClr val="455569"/>
+                  <a:srgbClr val="4E5964"/>
                 </a:solidFill>
                 <a:latin typeface="Pretendard SemiBold"/>
                 <a:ea typeface="Pretendard SemiBold"/>
@@ -8166,7 +8166,7 @@
             <a:r>
               <a:rPr sz="1350" b="0" i="0">
                 <a:solidFill>
-                  <a:srgbClr val="1D2735"/>
+                  <a:srgbClr val="191F28"/>
                 </a:solidFill>
                 <a:latin typeface="Pretendard ExtraBold"/>
                 <a:ea typeface="Pretendard ExtraBold"/>
@@ -8183,7 +8183,7 @@
             <a:r>
               <a:rPr sz="1050" b="0" i="0">
                 <a:solidFill>
-                  <a:srgbClr val="455569"/>
+                  <a:srgbClr val="4E5964"/>
                 </a:solidFill>
                 <a:latin typeface="Pretendard"/>
                 <a:ea typeface="Pretendard"/>
@@ -8214,7 +8214,7 @@
           </a:solidFill>
           <a:ln w="9525">
             <a:solidFill>
-              <a:srgbClr val="EBE5DB"/>
+              <a:srgbClr val="EAE5D8"/>
             </a:solidFill>
           </a:ln>
           <a:effectLst/>
@@ -8245,7 +8245,7 @@
             <a:r>
               <a:rPr sz="1050" b="0" i="0">
                 <a:solidFill>
-                  <a:srgbClr val="455569"/>
+                  <a:srgbClr val="4E5964"/>
                 </a:solidFill>
                 <a:latin typeface="Pretendard SemiBold"/>
                 <a:ea typeface="Pretendard SemiBold"/>
@@ -8288,7 +8288,7 @@
             <a:avLst/>
           </a:prstGeom>
           <a:solidFill>
-            <a:srgbClr val="FFFDF9"/>
+            <a:srgbClr val="FCFAF4"/>
           </a:solidFill>
           <a:ln>
             <a:noFill/>
@@ -8332,7 +8332,7 @@
             <a:avLst/>
           </a:prstGeom>
           <a:solidFill>
-            <a:srgbClr val="173F54"/>
+            <a:srgbClr val="0B3B3F"/>
           </a:solidFill>
           <a:ln>
             <a:noFill/>
@@ -8391,7 +8391,7 @@
             <a:r>
               <a:rPr sz="1150" b="0" i="0" spc="140">
                 <a:solidFill>
-                  <a:srgbClr val="1F5068"/>
+                  <a:srgbClr val="0F4E53"/>
                 </a:solidFill>
                 <a:latin typeface="Pretendard ExtraBold"/>
                 <a:ea typeface="Pretendard ExtraBold"/>
@@ -8431,7 +8431,7 @@
             <a:r>
               <a:rPr sz="2700" b="1" i="0">
                 <a:solidFill>
-                  <a:srgbClr val="1D2735"/>
+                  <a:srgbClr val="191F28"/>
                 </a:solidFill>
                 <a:latin typeface="Noto Serif KR"/>
                 <a:ea typeface="Noto Serif KR"/>
@@ -8448,7 +8448,7 @@
             <a:r>
               <a:rPr sz="2700" b="1" i="0">
                 <a:solidFill>
-                  <a:srgbClr val="1D2735"/>
+                  <a:srgbClr val="191F28"/>
                 </a:solidFill>
                 <a:latin typeface="Noto Serif KR"/>
                 <a:ea typeface="Noto Serif KR"/>
@@ -8479,7 +8479,7 @@
           </a:solidFill>
           <a:ln w="9525">
             <a:solidFill>
-              <a:srgbClr val="EBE5DB"/>
+              <a:srgbClr val="EAE5D8"/>
             </a:solidFill>
           </a:ln>
           <a:effectLst/>
@@ -8546,7 +8546,7 @@
             <a:r>
               <a:rPr sz="1200" b="0" i="0">
                 <a:solidFill>
-                  <a:srgbClr val="28364A"/>
+                  <a:srgbClr val="2B333D"/>
                 </a:solidFill>
                 <a:latin typeface="Pretendard ExtraBold"/>
                 <a:ea typeface="Pretendard ExtraBold"/>
@@ -8563,7 +8563,7 @@
             <a:r>
               <a:rPr sz="1000" b="0" i="0">
                 <a:solidFill>
-                  <a:srgbClr val="455569"/>
+                  <a:srgbClr val="4E5964"/>
                 </a:solidFill>
                 <a:latin typeface="Pretendard"/>
                 <a:ea typeface="Pretendard"/>
@@ -8594,7 +8594,7 @@
           </a:solidFill>
           <a:ln w="9525">
             <a:solidFill>
-              <a:srgbClr val="EBE5DB"/>
+              <a:srgbClr val="EAE5D8"/>
             </a:solidFill>
           </a:ln>
           <a:effectLst/>
@@ -8661,7 +8661,7 @@
             <a:r>
               <a:rPr sz="1200" b="0" i="0">
                 <a:solidFill>
-                  <a:srgbClr val="28364A"/>
+                  <a:srgbClr val="2B333D"/>
                 </a:solidFill>
                 <a:latin typeface="Pretendard ExtraBold"/>
                 <a:ea typeface="Pretendard ExtraBold"/>
@@ -8678,7 +8678,7 @@
             <a:r>
               <a:rPr sz="1000" b="0" i="0">
                 <a:solidFill>
-                  <a:srgbClr val="455569"/>
+                  <a:srgbClr val="4E5964"/>
                 </a:solidFill>
                 <a:latin typeface="Pretendard"/>
                 <a:ea typeface="Pretendard"/>
@@ -8709,7 +8709,7 @@
           </a:solidFill>
           <a:ln w="9525">
             <a:solidFill>
-              <a:srgbClr val="EBE5DB"/>
+              <a:srgbClr val="EAE5D8"/>
             </a:solidFill>
           </a:ln>
           <a:effectLst/>
@@ -8776,7 +8776,7 @@
             <a:r>
               <a:rPr sz="1200" b="0" i="0">
                 <a:solidFill>
-                  <a:srgbClr val="28364A"/>
+                  <a:srgbClr val="2B333D"/>
                 </a:solidFill>
                 <a:latin typeface="Pretendard ExtraBold"/>
                 <a:ea typeface="Pretendard ExtraBold"/>
@@ -8793,7 +8793,7 @@
             <a:r>
               <a:rPr sz="1000" b="0" i="0">
                 <a:solidFill>
-                  <a:srgbClr val="455569"/>
+                  <a:srgbClr val="4E5964"/>
                 </a:solidFill>
                 <a:latin typeface="Pretendard"/>
                 <a:ea typeface="Pretendard"/>
@@ -8822,11 +8822,11 @@
             </a:avLst>
           </a:prstGeom>
           <a:solidFill>
-            <a:srgbClr val="F7F3EC"/>
+            <a:srgbClr val="F4F0E6"/>
           </a:solidFill>
           <a:ln w="9525">
             <a:solidFill>
-              <a:srgbClr val="DAD2C6"/>
+              <a:srgbClr val="D9D3C5"/>
             </a:solidFill>
           </a:ln>
           <a:effectLst/>
@@ -8886,7 +8886,7 @@
             <a:r>
               <a:rPr sz="1000" b="0" i="0">
                 <a:solidFill>
-                  <a:srgbClr val="9A7440"/>
+                  <a:srgbClr val="0F4E53"/>
                 </a:solidFill>
                 <a:latin typeface="Pretendard ExtraBold"/>
                 <a:ea typeface="Pretendard ExtraBold"/>
@@ -8903,7 +8903,7 @@
             <a:r>
               <a:rPr sz="1350" b="0" i="0">
                 <a:solidFill>
-                  <a:srgbClr val="1F5068"/>
+                  <a:srgbClr val="0F4E53"/>
                 </a:solidFill>
                 <a:latin typeface="Pretendard ExtraBold"/>
                 <a:ea typeface="Pretendard ExtraBold"/>
@@ -8932,11 +8932,11 @@
             </a:avLst>
           </a:prstGeom>
           <a:solidFill>
-            <a:srgbClr val="F7F3EC"/>
+            <a:srgbClr val="F4F0E6"/>
           </a:solidFill>
           <a:ln w="9525">
             <a:solidFill>
-              <a:srgbClr val="DAD2C6"/>
+              <a:srgbClr val="D9D3C5"/>
             </a:solidFill>
           </a:ln>
           <a:effectLst/>
@@ -8996,7 +8996,7 @@
             <a:r>
               <a:rPr sz="1000" b="0" i="0">
                 <a:solidFill>
-                  <a:srgbClr val="9A7440"/>
+                  <a:srgbClr val="0F4E53"/>
                 </a:solidFill>
                 <a:latin typeface="Pretendard ExtraBold"/>
                 <a:ea typeface="Pretendard ExtraBold"/>
@@ -9013,7 +9013,7 @@
             <a:r>
               <a:rPr sz="1350" b="0" i="0">
                 <a:solidFill>
-                  <a:srgbClr val="1F5068"/>
+                  <a:srgbClr val="0F4E53"/>
                 </a:solidFill>
                 <a:latin typeface="Pretendard ExtraBold"/>
                 <a:ea typeface="Pretendard ExtraBold"/>
@@ -9056,7 +9056,7 @@
             <a:r>
               <a:rPr sz="1050" b="0" i="0">
                 <a:solidFill>
-                  <a:srgbClr val="455569"/>
+                  <a:srgbClr val="4E5964"/>
                 </a:solidFill>
                 <a:latin typeface="Pretendard"/>
                 <a:ea typeface="Pretendard"/>
@@ -9066,7 +9066,7 @@
             <a:r>
               <a:rPr sz="1050" b="0" i="0">
                 <a:solidFill>
-                  <a:srgbClr val="28364A"/>
+                  <a:srgbClr val="2B333D"/>
                 </a:solidFill>
                 <a:latin typeface="Pretendard ExtraBold"/>
                 <a:ea typeface="Pretendard ExtraBold"/>
@@ -9076,7 +9076,7 @@
             <a:r>
               <a:rPr sz="1050" b="0" i="0">
                 <a:solidFill>
-                  <a:srgbClr val="455569"/>
+                  <a:srgbClr val="4E5964"/>
                 </a:solidFill>
                 <a:latin typeface="Pretendard"/>
                 <a:ea typeface="Pretendard"/>
@@ -9093,7 +9093,7 @@
             <a:r>
               <a:rPr sz="1600" b="1" i="0">
                 <a:solidFill>
-                  <a:srgbClr val="28364A"/>
+                  <a:srgbClr val="2B333D"/>
                 </a:solidFill>
                 <a:latin typeface="Noto Serif KR"/>
                 <a:ea typeface="Noto Serif KR"/>
@@ -9136,7 +9136,7 @@
             <a:avLst/>
           </a:prstGeom>
           <a:solidFill>
-            <a:srgbClr val="FFFDF9"/>
+            <a:srgbClr val="FCFAF4"/>
           </a:solidFill>
           <a:ln>
             <a:noFill/>
@@ -9180,7 +9180,7 @@
             <a:avLst/>
           </a:prstGeom>
           <a:solidFill>
-            <a:srgbClr val="173F54"/>
+            <a:srgbClr val="0B3B3F"/>
           </a:solidFill>
           <a:ln>
             <a:noFill/>
@@ -9224,7 +9224,7 @@
             <a:avLst/>
           </a:prstGeom>
           <a:solidFill>
-            <a:srgbClr val="9A7440"/>
+            <a:srgbClr val="0F4E53"/>
           </a:solidFill>
           <a:ln>
             <a:noFill/>
@@ -9283,7 +9283,7 @@
             <a:r>
               <a:rPr sz="1050" b="0" i="0" spc="190">
                 <a:solidFill>
-                  <a:srgbClr val="1F5068"/>
+                  <a:srgbClr val="0F4E53"/>
                 </a:solidFill>
                 <a:latin typeface="Pretendard ExtraBold"/>
                 <a:ea typeface="Pretendard ExtraBold"/>
@@ -9323,7 +9323,7 @@
             <a:r>
               <a:rPr sz="2600" b="1" i="0">
                 <a:solidFill>
-                  <a:srgbClr val="1D2735"/>
+                  <a:srgbClr val="191F28"/>
                 </a:solidFill>
                 <a:latin typeface="Noto Serif KR"/>
                 <a:ea typeface="Noto Serif KR"/>
@@ -9350,11 +9350,11 @@
             </a:avLst>
           </a:prstGeom>
           <a:solidFill>
-            <a:srgbClr val="F4F8FA"/>
+            <a:srgbClr val="F2F6F5"/>
           </a:solidFill>
           <a:ln w="9525">
             <a:solidFill>
-              <a:srgbClr val="D8E3EA"/>
+              <a:srgbClr val="CFDEDC"/>
             </a:solidFill>
           </a:ln>
           <a:effectLst/>
@@ -9418,7 +9418,7 @@
             <a:r>
               <a:rPr sz="1700" b="1" i="0">
                 <a:solidFill>
-                  <a:srgbClr val="1D2735"/>
+                  <a:srgbClr val="191F28"/>
                 </a:solidFill>
                 <a:latin typeface="Noto Serif KR"/>
                 <a:ea typeface="Noto Serif KR"/>
@@ -9445,7 +9445,7 @@
             </a:avLst>
           </a:prstGeom>
           <a:solidFill>
-            <a:srgbClr val="EAF1F5"/>
+            <a:srgbClr val="E6EEED"/>
           </a:solidFill>
           <a:ln>
             <a:noFill/>
@@ -9478,7 +9478,7 @@
             <a:r>
               <a:rPr sz="900" b="0" i="0">
                 <a:solidFill>
-                  <a:srgbClr val="1F5068"/>
+                  <a:srgbClr val="0F4E53"/>
                 </a:solidFill>
                 <a:latin typeface="Pretendard SemiBold"/>
                 <a:ea typeface="Pretendard SemiBold"/>
@@ -9521,7 +9521,7 @@
             <a:r>
               <a:rPr sz="1150" b="0" i="0">
                 <a:solidFill>
-                  <a:srgbClr val="28364A"/>
+                  <a:srgbClr val="2B333D"/>
                 </a:solidFill>
                 <a:latin typeface="Pretendard"/>
                 <a:ea typeface="Pretendard"/>
@@ -9538,7 +9538,7 @@
             <a:r>
               <a:rPr sz="1000" b="0" i="0">
                 <a:solidFill>
-                  <a:srgbClr val="6B7A8D"/>
+                  <a:srgbClr val="747E88"/>
                 </a:solidFill>
                 <a:latin typeface="Pretendard"/>
                 <a:ea typeface="Pretendard"/>
@@ -9569,7 +9569,7 @@
           </a:solidFill>
           <a:ln w="9525">
             <a:solidFill>
-              <a:srgbClr val="EBE5DB"/>
+              <a:srgbClr val="EAE5D8"/>
             </a:solidFill>
           </a:ln>
           <a:effectLst/>
@@ -9633,7 +9633,7 @@
             <a:r>
               <a:rPr sz="1700" b="1" i="0">
                 <a:solidFill>
-                  <a:srgbClr val="1D2735"/>
+                  <a:srgbClr val="191F28"/>
                 </a:solidFill>
                 <a:latin typeface="Noto Serif KR"/>
                 <a:ea typeface="Noto Serif KR"/>
@@ -9660,7 +9660,7 @@
             </a:avLst>
           </a:prstGeom>
           <a:solidFill>
-            <a:srgbClr val="F6EFE5"/>
+            <a:srgbClr val="E6EEED"/>
           </a:solidFill>
           <a:ln>
             <a:noFill/>
@@ -9693,7 +9693,7 @@
             <a:r>
               <a:rPr sz="900" b="0" i="0">
                 <a:solidFill>
-                  <a:srgbClr val="9A7440"/>
+                  <a:srgbClr val="0F4E53"/>
                 </a:solidFill>
                 <a:latin typeface="Pretendard SemiBold"/>
                 <a:ea typeface="Pretendard SemiBold"/>
@@ -9736,7 +9736,7 @@
             <a:r>
               <a:rPr sz="1150" b="0" i="0">
                 <a:solidFill>
-                  <a:srgbClr val="28364A"/>
+                  <a:srgbClr val="2B333D"/>
                 </a:solidFill>
                 <a:latin typeface="Pretendard"/>
                 <a:ea typeface="Pretendard"/>
@@ -9753,7 +9753,7 @@
             <a:r>
               <a:rPr sz="1000" b="0" i="0">
                 <a:solidFill>
-                  <a:srgbClr val="6B7A8D"/>
+                  <a:srgbClr val="747E88"/>
                 </a:solidFill>
                 <a:latin typeface="Pretendard"/>
                 <a:ea typeface="Pretendard"/>
@@ -9793,7 +9793,7 @@
             <a:r>
               <a:rPr sz="1250" b="0" i="0">
                 <a:solidFill>
-                  <a:srgbClr val="28364A"/>
+                  <a:srgbClr val="2B333D"/>
                 </a:solidFill>
                 <a:latin typeface="Pretendard"/>
                 <a:ea typeface="Pretendard"/>
@@ -9803,7 +9803,7 @@
             <a:r>
               <a:rPr sz="1250" b="0" i="0">
                 <a:solidFill>
-                  <a:srgbClr val="28364A"/>
+                  <a:srgbClr val="2B333D"/>
                 </a:solidFill>
                 <a:latin typeface="Pretendard ExtraBold"/>
                 <a:ea typeface="Pretendard ExtraBold"/>
@@ -9813,7 +9813,7 @@
             <a:r>
               <a:rPr sz="1250" b="0" i="0">
                 <a:solidFill>
-                  <a:srgbClr val="28364A"/>
+                  <a:srgbClr val="2B333D"/>
                 </a:solidFill>
                 <a:latin typeface="Pretendard"/>
                 <a:ea typeface="Pretendard"/>
@@ -9823,7 +9823,7 @@
             <a:r>
               <a:rPr sz="1250" b="0" i="0">
                 <a:solidFill>
-                  <a:srgbClr val="28364A"/>
+                  <a:srgbClr val="2B333D"/>
                 </a:solidFill>
                 <a:latin typeface="Pretendard ExtraBold"/>
                 <a:ea typeface="Pretendard ExtraBold"/>
@@ -9833,7 +9833,7 @@
             <a:r>
               <a:rPr sz="1250" b="0" i="0">
                 <a:solidFill>
-                  <a:srgbClr val="28364A"/>
+                  <a:srgbClr val="2B333D"/>
                 </a:solidFill>
                 <a:latin typeface="Pretendard"/>
                 <a:ea typeface="Pretendard"/>
@@ -9850,7 +9850,7 @@
             <a:r>
               <a:rPr sz="1250" b="0" i="0">
                 <a:solidFill>
-                  <a:srgbClr val="28364A"/>
+                  <a:srgbClr val="2B333D"/>
                 </a:solidFill>
                 <a:latin typeface="Pretendard"/>
                 <a:ea typeface="Pretendard"/>
@@ -9881,7 +9881,7 @@
           </a:solidFill>
           <a:ln w="9525">
             <a:solidFill>
-              <a:srgbClr val="EBE5DB"/>
+              <a:srgbClr val="EAE5D8"/>
             </a:solidFill>
           </a:ln>
           <a:effectLst/>
@@ -9912,7 +9912,7 @@
             <a:r>
               <a:rPr sz="1050" b="0" i="0">
                 <a:solidFill>
-                  <a:srgbClr val="455569"/>
+                  <a:srgbClr val="4E5964"/>
                 </a:solidFill>
                 <a:latin typeface="Pretendard SemiBold"/>
                 <a:ea typeface="Pretendard SemiBold"/>
@@ -9955,7 +9955,7 @@
             <a:avLst/>
           </a:prstGeom>
           <a:solidFill>
-            <a:srgbClr val="FFFDF9"/>
+            <a:srgbClr val="FCFAF4"/>
           </a:solidFill>
           <a:ln>
             <a:noFill/>
@@ -9999,7 +9999,7 @@
             <a:avLst/>
           </a:prstGeom>
           <a:solidFill>
-            <a:srgbClr val="173F54"/>
+            <a:srgbClr val="0B3B3F"/>
           </a:solidFill>
           <a:ln>
             <a:noFill/>
@@ -10043,7 +10043,7 @@
             <a:avLst/>
           </a:prstGeom>
           <a:solidFill>
-            <a:srgbClr val="9A7440"/>
+            <a:srgbClr val="0F4E53"/>
           </a:solidFill>
           <a:ln>
             <a:noFill/>
@@ -10102,7 +10102,7 @@
             <a:r>
               <a:rPr sz="1050" b="0" i="0" spc="190">
                 <a:solidFill>
-                  <a:srgbClr val="1F5068"/>
+                  <a:srgbClr val="0F4E53"/>
                 </a:solidFill>
                 <a:latin typeface="Pretendard ExtraBold"/>
                 <a:ea typeface="Pretendard ExtraBold"/>
@@ -10142,7 +10142,7 @@
             <a:r>
               <a:rPr sz="2400" b="1" i="0">
                 <a:solidFill>
-                  <a:srgbClr val="1D2735"/>
+                  <a:srgbClr val="191F28"/>
                 </a:solidFill>
                 <a:latin typeface="Noto Serif KR"/>
                 <a:ea typeface="Noto Serif KR"/>
@@ -10162,7 +10162,7 @@
             <a:r>
               <a:rPr sz="1200" b="0" i="0">
                 <a:solidFill>
-                  <a:srgbClr val="455569"/>
+                  <a:srgbClr val="4E5964"/>
                 </a:solidFill>
                 <a:latin typeface="Pretendard"/>
                 <a:ea typeface="Pretendard"/>
@@ -10202,7 +10202,7 @@
             <a:r>
               <a:rPr sz="1600" b="0" i="0">
                 <a:solidFill>
-                  <a:srgbClr val="1D2735"/>
+                  <a:srgbClr val="191F28"/>
                 </a:solidFill>
                 <a:latin typeface="Pretendard"/>
                 <a:ea typeface="Pretendard"/>
@@ -10245,7 +10245,7 @@
             <a:r>
               <a:rPr sz="1200" b="0" i="0">
                 <a:solidFill>
-                  <a:srgbClr val="1D2735"/>
+                  <a:srgbClr val="191F28"/>
                 </a:solidFill>
                 <a:latin typeface="Pretendard ExtraBold"/>
                 <a:ea typeface="Pretendard ExtraBold"/>
@@ -10262,7 +10262,7 @@
             <a:r>
               <a:rPr sz="1050" b="0" i="0">
                 <a:solidFill>
-                  <a:srgbClr val="455569"/>
+                  <a:srgbClr val="4E5964"/>
                 </a:solidFill>
                 <a:latin typeface="Pretendard"/>
                 <a:ea typeface="Pretendard"/>
@@ -10287,7 +10287,7 @@
             <a:avLst/>
           </a:prstGeom>
           <a:solidFill>
-            <a:srgbClr val="EBE5DB"/>
+            <a:srgbClr val="EAE5D8"/>
           </a:solidFill>
           <a:ln>
             <a:noFill/>
@@ -10346,7 +10346,7 @@
             <a:r>
               <a:rPr sz="1600" b="0" i="0">
                 <a:solidFill>
-                  <a:srgbClr val="1D2735"/>
+                  <a:srgbClr val="191F28"/>
                 </a:solidFill>
                 <a:latin typeface="Pretendard"/>
                 <a:ea typeface="Pretendard"/>
@@ -10389,7 +10389,7 @@
             <a:r>
               <a:rPr sz="1200" b="0" i="0">
                 <a:solidFill>
-                  <a:srgbClr val="1D2735"/>
+                  <a:srgbClr val="191F28"/>
                 </a:solidFill>
                 <a:latin typeface="Pretendard ExtraBold"/>
                 <a:ea typeface="Pretendard ExtraBold"/>
@@ -10406,7 +10406,7 @@
             <a:r>
               <a:rPr sz="1050" b="0" i="0">
                 <a:solidFill>
-                  <a:srgbClr val="455569"/>
+                  <a:srgbClr val="4E5964"/>
                 </a:solidFill>
                 <a:latin typeface="Pretendard"/>
                 <a:ea typeface="Pretendard"/>
@@ -10431,7 +10431,7 @@
             <a:avLst/>
           </a:prstGeom>
           <a:solidFill>
-            <a:srgbClr val="EBE5DB"/>
+            <a:srgbClr val="EAE5D8"/>
           </a:solidFill>
           <a:ln>
             <a:noFill/>
@@ -10490,7 +10490,7 @@
             <a:r>
               <a:rPr sz="1600" b="0" i="0">
                 <a:solidFill>
-                  <a:srgbClr val="1D2735"/>
+                  <a:srgbClr val="191F28"/>
                 </a:solidFill>
                 <a:latin typeface="Pretendard"/>
                 <a:ea typeface="Pretendard"/>
@@ -10533,7 +10533,7 @@
             <a:r>
               <a:rPr sz="1200" b="0" i="0">
                 <a:solidFill>
-                  <a:srgbClr val="1D2735"/>
+                  <a:srgbClr val="191F28"/>
                 </a:solidFill>
                 <a:latin typeface="Pretendard ExtraBold"/>
                 <a:ea typeface="Pretendard ExtraBold"/>
@@ -10550,7 +10550,7 @@
             <a:r>
               <a:rPr sz="1050" b="0" i="0">
                 <a:solidFill>
-                  <a:srgbClr val="455569"/>
+                  <a:srgbClr val="4E5964"/>
                 </a:solidFill>
                 <a:latin typeface="Pretendard"/>
                 <a:ea typeface="Pretendard"/>
@@ -10584,7 +10584,7 @@
           </a:prstGeom>
           <a:ln w="12700">
             <a:solidFill>
-              <a:srgbClr val="EBE5DB"/>
+              <a:srgbClr val="EAE5D8"/>
             </a:solidFill>
           </a:ln>
           <a:effectLst/>
@@ -10627,7 +10627,7 @@
             <a:r>
               <a:rPr sz="900" b="0" i="0">
                 <a:solidFill>
-                  <a:srgbClr val="455569"/>
+                  <a:srgbClr val="4E5964"/>
                 </a:solidFill>
                 <a:latin typeface="Pretendard"/>
                 <a:ea typeface="Pretendard"/>
@@ -10654,14 +10654,14 @@
         <p:spPr>
           <a:xfrm>
             <a:off x="6263640" y="4529754"/>
-            <a:ext cx="3794760" cy="460792"/>
+            <a:ext cx="3794760" cy="313700"/>
           </a:xfrm>
           <a:prstGeom prst="rect">
             <a:avLst/>
           </a:prstGeom>
           <a:ln w="12700">
             <a:solidFill>
-              <a:srgbClr val="EBE5DB"/>
+              <a:srgbClr val="EAE5D8"/>
             </a:solidFill>
           </a:ln>
           <a:effectLst/>
@@ -10704,7 +10704,7 @@
             <a:r>
               <a:rPr sz="900" b="0" i="0">
                 <a:solidFill>
-                  <a:srgbClr val="455569"/>
+                  <a:srgbClr val="4E5964"/>
                 </a:solidFill>
                 <a:latin typeface="Pretendard"/>
                 <a:ea typeface="Pretendard"/>
@@ -10735,7 +10735,7 @@
           </a:solidFill>
           <a:ln w="9525">
             <a:solidFill>
-              <a:srgbClr val="EBE5DB"/>
+              <a:srgbClr val="EAE5D8"/>
             </a:solidFill>
           </a:ln>
           <a:effectLst/>
@@ -10766,7 +10766,7 @@
             <a:r>
               <a:rPr sz="1050" b="0" i="0">
                 <a:solidFill>
-                  <a:srgbClr val="455569"/>
+                  <a:srgbClr val="4E5964"/>
                 </a:solidFill>
                 <a:latin typeface="Pretendard SemiBold"/>
                 <a:ea typeface="Pretendard SemiBold"/>
@@ -10809,7 +10809,7 @@
             <a:avLst/>
           </a:prstGeom>
           <a:solidFill>
-            <a:srgbClr val="FFFDF9"/>
+            <a:srgbClr val="FCFAF4"/>
           </a:solidFill>
           <a:ln>
             <a:noFill/>
@@ -10853,7 +10853,7 @@
             <a:avLst/>
           </a:prstGeom>
           <a:solidFill>
-            <a:srgbClr val="173F54"/>
+            <a:srgbClr val="0B3B3F"/>
           </a:solidFill>
           <a:ln>
             <a:noFill/>
@@ -10897,7 +10897,7 @@
             <a:avLst/>
           </a:prstGeom>
           <a:solidFill>
-            <a:srgbClr val="9A7440"/>
+            <a:srgbClr val="0F4E53"/>
           </a:solidFill>
           <a:ln>
             <a:noFill/>
@@ -10956,7 +10956,7 @@
             <a:r>
               <a:rPr sz="1050" b="0" i="0" spc="190">
                 <a:solidFill>
-                  <a:srgbClr val="1F5068"/>
+                  <a:srgbClr val="0F4E53"/>
                 </a:solidFill>
                 <a:latin typeface="Pretendard ExtraBold"/>
                 <a:ea typeface="Pretendard ExtraBold"/>
@@ -10996,7 +10996,7 @@
             <a:r>
               <a:rPr sz="2300" b="1" i="0">
                 <a:solidFill>
-                  <a:srgbClr val="1D2735"/>
+                  <a:srgbClr val="191F28"/>
                 </a:solidFill>
                 <a:latin typeface="Noto Serif KR"/>
                 <a:ea typeface="Noto Serif KR"/>
@@ -11030,7 +11030,7 @@
           </a:prstGeom>
           <a:ln w="12700">
             <a:solidFill>
-              <a:srgbClr val="EBE5DB"/>
+              <a:srgbClr val="EAE5D8"/>
             </a:solidFill>
           </a:ln>
           <a:effectLst/>
@@ -11058,7 +11058,7 @@
             <a:avLst/>
           </a:prstGeom>
           <a:solidFill>
-            <a:srgbClr val="1F5068"/>
+            <a:srgbClr val="0F4E53"/>
           </a:solidFill>
           <a:ln>
             <a:noFill/>
@@ -11120,7 +11120,7 @@
             <a:r>
               <a:rPr sz="1250" b="0" i="0">
                 <a:solidFill>
-                  <a:srgbClr val="1D2735"/>
+                  <a:srgbClr val="191F28"/>
                 </a:solidFill>
                 <a:latin typeface="Pretendard ExtraBold"/>
                 <a:ea typeface="Pretendard ExtraBold"/>
@@ -11137,7 +11137,7 @@
             <a:r>
               <a:rPr sz="1050" b="0" i="0">
                 <a:solidFill>
-                  <a:srgbClr val="455569"/>
+                  <a:srgbClr val="4E5964"/>
                 </a:solidFill>
                 <a:latin typeface="Pretendard"/>
                 <a:ea typeface="Pretendard"/>
@@ -11162,7 +11162,7 @@
             <a:avLst/>
           </a:prstGeom>
           <a:solidFill>
-            <a:srgbClr val="9A7440"/>
+            <a:srgbClr val="0F4E53"/>
           </a:solidFill>
           <a:ln>
             <a:noFill/>
@@ -11224,7 +11224,7 @@
             <a:r>
               <a:rPr sz="1250" b="0" i="0">
                 <a:solidFill>
-                  <a:srgbClr val="1D2735"/>
+                  <a:srgbClr val="191F28"/>
                 </a:solidFill>
                 <a:latin typeface="Pretendard ExtraBold"/>
                 <a:ea typeface="Pretendard ExtraBold"/>
@@ -11241,7 +11241,7 @@
             <a:r>
               <a:rPr sz="1050" b="0" i="0">
                 <a:solidFill>
-                  <a:srgbClr val="455569"/>
+                  <a:srgbClr val="4E5964"/>
                 </a:solidFill>
                 <a:latin typeface="Pretendard"/>
                 <a:ea typeface="Pretendard"/>
@@ -11266,7 +11266,7 @@
             <a:avLst/>
           </a:prstGeom>
           <a:solidFill>
-            <a:srgbClr val="1D2735"/>
+            <a:srgbClr val="191F28"/>
           </a:solidFill>
           <a:ln>
             <a:noFill/>
@@ -11328,7 +11328,7 @@
             <a:r>
               <a:rPr sz="1250" b="0" i="0">
                 <a:solidFill>
-                  <a:srgbClr val="1D2735"/>
+                  <a:srgbClr val="191F28"/>
                 </a:solidFill>
                 <a:latin typeface="Pretendard ExtraBold"/>
                 <a:ea typeface="Pretendard ExtraBold"/>
@@ -11345,7 +11345,7 @@
             <a:r>
               <a:rPr sz="1050" b="0" i="0">
                 <a:solidFill>
-                  <a:srgbClr val="455569"/>
+                  <a:srgbClr val="4E5964"/>
                 </a:solidFill>
                 <a:latin typeface="Pretendard"/>
                 <a:ea typeface="Pretendard"/>
@@ -11385,7 +11385,7 @@
             <a:r>
               <a:rPr sz="1100" b="0" i="0">
                 <a:solidFill>
-                  <a:srgbClr val="28364A"/>
+                  <a:srgbClr val="2B333D"/>
                 </a:solidFill>
                 <a:latin typeface="Pretendard"/>
                 <a:ea typeface="Pretendard"/>
@@ -11395,7 +11395,7 @@
             <a:r>
               <a:rPr sz="1100" b="0" i="0">
                 <a:solidFill>
-                  <a:srgbClr val="28364A"/>
+                  <a:srgbClr val="2B333D"/>
                 </a:solidFill>
                 <a:latin typeface="Pretendard ExtraBold"/>
                 <a:ea typeface="Pretendard ExtraBold"/>
@@ -11405,7 +11405,7 @@
             <a:r>
               <a:rPr sz="1100" b="0" i="0">
                 <a:solidFill>
-                  <a:srgbClr val="28364A"/>
+                  <a:srgbClr val="2B333D"/>
                 </a:solidFill>
                 <a:latin typeface="Pretendard"/>
                 <a:ea typeface="Pretendard"/>
@@ -11415,7 +11415,7 @@
             <a:r>
               <a:rPr sz="1100" b="0" i="0">
                 <a:solidFill>
-                  <a:srgbClr val="28364A"/>
+                  <a:srgbClr val="2B333D"/>
                 </a:solidFill>
                 <a:latin typeface="Pretendard ExtraBold"/>
                 <a:ea typeface="Pretendard ExtraBold"/>
@@ -11425,7 +11425,7 @@
             <a:r>
               <a:rPr sz="1100" b="0" i="0">
                 <a:solidFill>
-                  <a:srgbClr val="28364A"/>
+                  <a:srgbClr val="2B333D"/>
                 </a:solidFill>
                 <a:latin typeface="Pretendard"/>
                 <a:ea typeface="Pretendard"/>
@@ -11459,7 +11459,7 @@
           </a:prstGeom>
           <a:ln w="12700">
             <a:solidFill>
-              <a:srgbClr val="EBE5DB"/>
+              <a:srgbClr val="EAE5D8"/>
             </a:solidFill>
           </a:ln>
           <a:effectLst/>
@@ -11493,7 +11493,7 @@
           </a:solidFill>
           <a:ln w="9525">
             <a:solidFill>
-              <a:srgbClr val="EBE5DB"/>
+              <a:srgbClr val="EAE5D8"/>
             </a:solidFill>
           </a:ln>
           <a:effectLst/>
@@ -11524,7 +11524,7 @@
             <a:r>
               <a:rPr sz="1050" b="0" i="0">
                 <a:solidFill>
-                  <a:srgbClr val="455569"/>
+                  <a:srgbClr val="4E5964"/>
                 </a:solidFill>
                 <a:latin typeface="Pretendard SemiBold"/>
                 <a:ea typeface="Pretendard SemiBold"/>
@@ -11567,7 +11567,7 @@
             <a:avLst/>
           </a:prstGeom>
           <a:solidFill>
-            <a:srgbClr val="FFFDF9"/>
+            <a:srgbClr val="FCFAF4"/>
           </a:solidFill>
           <a:ln>
             <a:noFill/>
@@ -11611,7 +11611,7 @@
             <a:avLst/>
           </a:prstGeom>
           <a:solidFill>
-            <a:srgbClr val="173F54"/>
+            <a:srgbClr val="0B3B3F"/>
           </a:solidFill>
           <a:ln>
             <a:noFill/>
@@ -11655,7 +11655,7 @@
             <a:avLst/>
           </a:prstGeom>
           <a:solidFill>
-            <a:srgbClr val="9A7440"/>
+            <a:srgbClr val="0F4E53"/>
           </a:solidFill>
           <a:ln>
             <a:noFill/>
@@ -11714,7 +11714,7 @@
             <a:r>
               <a:rPr sz="1050" b="0" i="0" spc="190">
                 <a:solidFill>
-                  <a:srgbClr val="1F5068"/>
+                  <a:srgbClr val="0F4E53"/>
                 </a:solidFill>
                 <a:latin typeface="Pretendard ExtraBold"/>
                 <a:ea typeface="Pretendard ExtraBold"/>
@@ -11754,7 +11754,7 @@
             <a:r>
               <a:rPr sz="2400" b="1" i="0">
                 <a:solidFill>
-                  <a:srgbClr val="1D2735"/>
+                  <a:srgbClr val="191F28"/>
                 </a:solidFill>
                 <a:latin typeface="Noto Serif KR"/>
                 <a:ea typeface="Noto Serif KR"/>
@@ -11774,7 +11774,7 @@
             <a:r>
               <a:rPr sz="1200" b="0" i="0">
                 <a:solidFill>
-                  <a:srgbClr val="455569"/>
+                  <a:srgbClr val="4E5964"/>
                 </a:solidFill>
                 <a:latin typeface="Pretendard"/>
                 <a:ea typeface="Pretendard"/>
@@ -11814,7 +11814,7 @@
             <a:r>
               <a:rPr sz="1600" b="0" i="0">
                 <a:solidFill>
-                  <a:srgbClr val="1D2735"/>
+                  <a:srgbClr val="191F28"/>
                 </a:solidFill>
                 <a:latin typeface="Pretendard"/>
                 <a:ea typeface="Pretendard"/>
@@ -11857,7 +11857,7 @@
             <a:r>
               <a:rPr sz="1200" b="0" i="0">
                 <a:solidFill>
-                  <a:srgbClr val="1D2735"/>
+                  <a:srgbClr val="191F28"/>
                 </a:solidFill>
                 <a:latin typeface="Pretendard ExtraBold"/>
                 <a:ea typeface="Pretendard ExtraBold"/>
@@ -11874,7 +11874,7 @@
             <a:r>
               <a:rPr sz="1050" b="0" i="0">
                 <a:solidFill>
-                  <a:srgbClr val="455569"/>
+                  <a:srgbClr val="4E5964"/>
                 </a:solidFill>
                 <a:latin typeface="Pretendard"/>
                 <a:ea typeface="Pretendard"/>
@@ -11899,7 +11899,7 @@
             <a:avLst/>
           </a:prstGeom>
           <a:solidFill>
-            <a:srgbClr val="EBE5DB"/>
+            <a:srgbClr val="EAE5D8"/>
           </a:solidFill>
           <a:ln>
             <a:noFill/>
@@ -11958,7 +11958,7 @@
             <a:r>
               <a:rPr sz="1600" b="0" i="0">
                 <a:solidFill>
-                  <a:srgbClr val="1D2735"/>
+                  <a:srgbClr val="191F28"/>
                 </a:solidFill>
                 <a:latin typeface="Pretendard"/>
                 <a:ea typeface="Pretendard"/>
@@ -12001,7 +12001,7 @@
             <a:r>
               <a:rPr sz="1200" b="0" i="0">
                 <a:solidFill>
-                  <a:srgbClr val="1D2735"/>
+                  <a:srgbClr val="191F28"/>
                 </a:solidFill>
                 <a:latin typeface="Pretendard ExtraBold"/>
                 <a:ea typeface="Pretendard ExtraBold"/>
@@ -12018,7 +12018,7 @@
             <a:r>
               <a:rPr sz="1050" b="0" i="0">
                 <a:solidFill>
-                  <a:srgbClr val="455569"/>
+                  <a:srgbClr val="4E5964"/>
                 </a:solidFill>
                 <a:latin typeface="Pretendard"/>
                 <a:ea typeface="Pretendard"/>
@@ -12043,7 +12043,7 @@
             <a:avLst/>
           </a:prstGeom>
           <a:solidFill>
-            <a:srgbClr val="EBE5DB"/>
+            <a:srgbClr val="EAE5D8"/>
           </a:solidFill>
           <a:ln>
             <a:noFill/>
@@ -12102,7 +12102,7 @@
             <a:r>
               <a:rPr sz="1600" b="0" i="0">
                 <a:solidFill>
-                  <a:srgbClr val="1D2735"/>
+                  <a:srgbClr val="191F28"/>
                 </a:solidFill>
                 <a:latin typeface="Pretendard"/>
                 <a:ea typeface="Pretendard"/>
@@ -12145,7 +12145,7 @@
             <a:r>
               <a:rPr sz="1200" b="0" i="0">
                 <a:solidFill>
-                  <a:srgbClr val="1D2735"/>
+                  <a:srgbClr val="191F28"/>
                 </a:solidFill>
                 <a:latin typeface="Pretendard ExtraBold"/>
                 <a:ea typeface="Pretendard ExtraBold"/>
@@ -12162,7 +12162,7 @@
             <a:r>
               <a:rPr sz="1050" b="0" i="0">
                 <a:solidFill>
-                  <a:srgbClr val="455569"/>
+                  <a:srgbClr val="4E5964"/>
                 </a:solidFill>
                 <a:latin typeface="Pretendard"/>
                 <a:ea typeface="Pretendard"/>
@@ -12196,7 +12196,7 @@
           </a:prstGeom>
           <a:ln w="12700">
             <a:solidFill>
-              <a:srgbClr val="EBE5DB"/>
+              <a:srgbClr val="EAE5D8"/>
             </a:solidFill>
           </a:ln>
           <a:effectLst/>
@@ -12239,7 +12239,7 @@
             <a:r>
               <a:rPr sz="900" b="0" i="0">
                 <a:solidFill>
-                  <a:srgbClr val="455569"/>
+                  <a:srgbClr val="4E5964"/>
                 </a:solidFill>
                 <a:latin typeface="Pretendard"/>
                 <a:ea typeface="Pretendard"/>
@@ -12270,7 +12270,7 @@
           </a:solidFill>
           <a:ln w="9525">
             <a:solidFill>
-              <a:srgbClr val="EBE5DB"/>
+              <a:srgbClr val="EAE5D8"/>
             </a:solidFill>
           </a:ln>
           <a:effectLst/>
@@ -12301,7 +12301,7 @@
             <a:r>
               <a:rPr sz="1050" b="0" i="0">
                 <a:solidFill>
-                  <a:srgbClr val="455569"/>
+                  <a:srgbClr val="4E5964"/>
                 </a:solidFill>
                 <a:latin typeface="Pretendard SemiBold"/>
                 <a:ea typeface="Pretendard SemiBold"/>
@@ -12344,7 +12344,7 @@
             <a:avLst/>
           </a:prstGeom>
           <a:solidFill>
-            <a:srgbClr val="FFFDF9"/>
+            <a:srgbClr val="FCFAF4"/>
           </a:solidFill>
           <a:ln>
             <a:noFill/>
@@ -12388,7 +12388,7 @@
             <a:avLst/>
           </a:prstGeom>
           <a:solidFill>
-            <a:srgbClr val="173F54"/>
+            <a:srgbClr val="0B3B3F"/>
           </a:solidFill>
           <a:ln>
             <a:noFill/>
@@ -12432,7 +12432,7 @@
             <a:avLst/>
           </a:prstGeom>
           <a:solidFill>
-            <a:srgbClr val="9A7440"/>
+            <a:srgbClr val="0F4E53"/>
           </a:solidFill>
           <a:ln>
             <a:noFill/>
@@ -12491,7 +12491,7 @@
             <a:r>
               <a:rPr sz="1050" b="0" i="0" spc="190">
                 <a:solidFill>
-                  <a:srgbClr val="1F5068"/>
+                  <a:srgbClr val="0F4E53"/>
                 </a:solidFill>
                 <a:latin typeface="Pretendard ExtraBold"/>
                 <a:ea typeface="Pretendard ExtraBold"/>
@@ -12531,7 +12531,7 @@
             <a:r>
               <a:rPr sz="2400" b="1" i="0">
                 <a:solidFill>
-                  <a:srgbClr val="1D2735"/>
+                  <a:srgbClr val="191F28"/>
                 </a:solidFill>
                 <a:latin typeface="Noto Serif KR"/>
                 <a:ea typeface="Noto Serif KR"/>
@@ -12551,7 +12551,7 @@
             <a:r>
               <a:rPr sz="1200" b="0" i="0">
                 <a:solidFill>
-                  <a:srgbClr val="455569"/>
+                  <a:srgbClr val="4E5964"/>
                 </a:solidFill>
                 <a:latin typeface="Pretendard"/>
                 <a:ea typeface="Pretendard"/>
@@ -12591,7 +12591,7 @@
             <a:r>
               <a:rPr sz="1600" b="0" i="0">
                 <a:solidFill>
-                  <a:srgbClr val="1D2735"/>
+                  <a:srgbClr val="191F28"/>
                 </a:solidFill>
                 <a:latin typeface="Pretendard"/>
                 <a:ea typeface="Pretendard"/>
@@ -12634,7 +12634,7 @@
             <a:r>
               <a:rPr sz="1200" b="0" i="0">
                 <a:solidFill>
-                  <a:srgbClr val="1D2735"/>
+                  <a:srgbClr val="191F28"/>
                 </a:solidFill>
                 <a:latin typeface="Pretendard ExtraBold"/>
                 <a:ea typeface="Pretendard ExtraBold"/>
@@ -12651,7 +12651,7 @@
             <a:r>
               <a:rPr sz="1050" b="0" i="0">
                 <a:solidFill>
-                  <a:srgbClr val="455569"/>
+                  <a:srgbClr val="4E5964"/>
                 </a:solidFill>
                 <a:latin typeface="Pretendard"/>
                 <a:ea typeface="Pretendard"/>
@@ -12676,7 +12676,7 @@
             <a:avLst/>
           </a:prstGeom>
           <a:solidFill>
-            <a:srgbClr val="EBE5DB"/>
+            <a:srgbClr val="EAE5D8"/>
           </a:solidFill>
           <a:ln>
             <a:noFill/>
@@ -12735,7 +12735,7 @@
             <a:r>
               <a:rPr sz="1600" b="0" i="0">
                 <a:solidFill>
-                  <a:srgbClr val="1D2735"/>
+                  <a:srgbClr val="191F28"/>
                 </a:solidFill>
                 <a:latin typeface="Pretendard"/>
                 <a:ea typeface="Pretendard"/>
@@ -12778,7 +12778,7 @@
             <a:r>
               <a:rPr sz="1200" b="0" i="0">
                 <a:solidFill>
-                  <a:srgbClr val="1D2735"/>
+                  <a:srgbClr val="191F28"/>
                 </a:solidFill>
                 <a:latin typeface="Pretendard ExtraBold"/>
                 <a:ea typeface="Pretendard ExtraBold"/>
@@ -12795,7 +12795,7 @@
             <a:r>
               <a:rPr sz="1050" b="0" i="0">
                 <a:solidFill>
-                  <a:srgbClr val="455569"/>
+                  <a:srgbClr val="4E5964"/>
                 </a:solidFill>
                 <a:latin typeface="Pretendard"/>
                 <a:ea typeface="Pretendard"/>
@@ -12820,7 +12820,7 @@
             <a:avLst/>
           </a:prstGeom>
           <a:solidFill>
-            <a:srgbClr val="EBE5DB"/>
+            <a:srgbClr val="EAE5D8"/>
           </a:solidFill>
           <a:ln>
             <a:noFill/>
@@ -12879,7 +12879,7 @@
             <a:r>
               <a:rPr sz="1600" b="0" i="0">
                 <a:solidFill>
-                  <a:srgbClr val="1D2735"/>
+                  <a:srgbClr val="191F28"/>
                 </a:solidFill>
                 <a:latin typeface="Pretendard"/>
                 <a:ea typeface="Pretendard"/>
@@ -12922,7 +12922,7 @@
             <a:r>
               <a:rPr sz="1200" b="0" i="0">
                 <a:solidFill>
-                  <a:srgbClr val="1D2735"/>
+                  <a:srgbClr val="191F28"/>
                 </a:solidFill>
                 <a:latin typeface="Pretendard ExtraBold"/>
                 <a:ea typeface="Pretendard ExtraBold"/>
@@ -12939,7 +12939,7 @@
             <a:r>
               <a:rPr sz="1050" b="0" i="0">
                 <a:solidFill>
-                  <a:srgbClr val="455569"/>
+                  <a:srgbClr val="4E5964"/>
                 </a:solidFill>
                 <a:latin typeface="Pretendard"/>
                 <a:ea typeface="Pretendard"/>
@@ -12973,7 +12973,7 @@
           </a:prstGeom>
           <a:ln w="12700">
             <a:solidFill>
-              <a:srgbClr val="EBE5DB"/>
+              <a:srgbClr val="EAE5D8"/>
             </a:solidFill>
           </a:ln>
           <a:effectLst/>
@@ -13016,7 +13016,7 @@
             <a:r>
               <a:rPr sz="900" b="0" i="0">
                 <a:solidFill>
-                  <a:srgbClr val="455569"/>
+                  <a:srgbClr val="4E5964"/>
                 </a:solidFill>
                 <a:latin typeface="Pretendard"/>
                 <a:ea typeface="Pretendard"/>
@@ -13047,7 +13047,7 @@
           </a:solidFill>
           <a:ln w="9525">
             <a:solidFill>
-              <a:srgbClr val="EBE5DB"/>
+              <a:srgbClr val="EAE5D8"/>
             </a:solidFill>
           </a:ln>
           <a:effectLst/>
@@ -13078,7 +13078,7 @@
             <a:r>
               <a:rPr sz="1050" b="0" i="0">
                 <a:solidFill>
-                  <a:srgbClr val="455569"/>
+                  <a:srgbClr val="4E5964"/>
                 </a:solidFill>
                 <a:latin typeface="Pretendard SemiBold"/>
                 <a:ea typeface="Pretendard SemiBold"/>
@@ -13121,7 +13121,7 @@
             <a:avLst/>
           </a:prstGeom>
           <a:solidFill>
-            <a:srgbClr val="FFFDF9"/>
+            <a:srgbClr val="FCFAF4"/>
           </a:solidFill>
           <a:ln>
             <a:noFill/>
@@ -13165,7 +13165,7 @@
             <a:avLst/>
           </a:prstGeom>
           <a:solidFill>
-            <a:srgbClr val="173F54"/>
+            <a:srgbClr val="0B3B3F"/>
           </a:solidFill>
           <a:ln>
             <a:noFill/>
@@ -13209,7 +13209,7 @@
             <a:avLst/>
           </a:prstGeom>
           <a:solidFill>
-            <a:srgbClr val="9A7440"/>
+            <a:srgbClr val="0F4E53"/>
           </a:solidFill>
           <a:ln>
             <a:noFill/>
@@ -13268,7 +13268,7 @@
             <a:r>
               <a:rPr sz="1050" b="0" i="0" spc="190">
                 <a:solidFill>
-                  <a:srgbClr val="1F5068"/>
+                  <a:srgbClr val="0F4E53"/>
                 </a:solidFill>
                 <a:latin typeface="Pretendard ExtraBold"/>
                 <a:ea typeface="Pretendard ExtraBold"/>
@@ -13308,7 +13308,7 @@
             <a:r>
               <a:rPr sz="2400" b="1" i="0">
                 <a:solidFill>
-                  <a:srgbClr val="1D2735"/>
+                  <a:srgbClr val="191F28"/>
                 </a:solidFill>
                 <a:latin typeface="Noto Serif KR"/>
                 <a:ea typeface="Noto Serif KR"/>
@@ -13328,7 +13328,7 @@
             <a:r>
               <a:rPr sz="1200" b="0" i="0">
                 <a:solidFill>
-                  <a:srgbClr val="455569"/>
+                  <a:srgbClr val="4E5964"/>
                 </a:solidFill>
                 <a:latin typeface="Pretendard"/>
                 <a:ea typeface="Pretendard"/>
@@ -13368,7 +13368,7 @@
             <a:r>
               <a:rPr sz="1600" b="0" i="0">
                 <a:solidFill>
-                  <a:srgbClr val="1D2735"/>
+                  <a:srgbClr val="191F28"/>
                 </a:solidFill>
                 <a:latin typeface="Pretendard"/>
                 <a:ea typeface="Pretendard"/>
@@ -13411,7 +13411,7 @@
             <a:r>
               <a:rPr sz="1200" b="0" i="0">
                 <a:solidFill>
-                  <a:srgbClr val="1D2735"/>
+                  <a:srgbClr val="191F28"/>
                 </a:solidFill>
                 <a:latin typeface="Pretendard ExtraBold"/>
                 <a:ea typeface="Pretendard ExtraBold"/>
@@ -13428,7 +13428,7 @@
             <a:r>
               <a:rPr sz="1050" b="0" i="0">
                 <a:solidFill>
-                  <a:srgbClr val="455569"/>
+                  <a:srgbClr val="4E5964"/>
                 </a:solidFill>
                 <a:latin typeface="Pretendard"/>
                 <a:ea typeface="Pretendard"/>
@@ -13453,7 +13453,7 @@
             <a:avLst/>
           </a:prstGeom>
           <a:solidFill>
-            <a:srgbClr val="EBE5DB"/>
+            <a:srgbClr val="EAE5D8"/>
           </a:solidFill>
           <a:ln>
             <a:noFill/>
@@ -13512,7 +13512,7 @@
             <a:r>
               <a:rPr sz="1600" b="0" i="0">
                 <a:solidFill>
-                  <a:srgbClr val="1D2735"/>
+                  <a:srgbClr val="191F28"/>
                 </a:solidFill>
                 <a:latin typeface="Pretendard"/>
                 <a:ea typeface="Pretendard"/>
@@ -13555,7 +13555,7 @@
             <a:r>
               <a:rPr sz="1200" b="0" i="0">
                 <a:solidFill>
-                  <a:srgbClr val="1D2735"/>
+                  <a:srgbClr val="191F28"/>
                 </a:solidFill>
                 <a:latin typeface="Pretendard ExtraBold"/>
                 <a:ea typeface="Pretendard ExtraBold"/>
@@ -13572,7 +13572,7 @@
             <a:r>
               <a:rPr sz="1050" b="0" i="0">
                 <a:solidFill>
-                  <a:srgbClr val="455569"/>
+                  <a:srgbClr val="4E5964"/>
                 </a:solidFill>
                 <a:latin typeface="Pretendard"/>
                 <a:ea typeface="Pretendard"/>
@@ -13597,7 +13597,7 @@
             <a:avLst/>
           </a:prstGeom>
           <a:solidFill>
-            <a:srgbClr val="EBE5DB"/>
+            <a:srgbClr val="EAE5D8"/>
           </a:solidFill>
           <a:ln>
             <a:noFill/>
@@ -13656,7 +13656,7 @@
             <a:r>
               <a:rPr sz="1600" b="0" i="0">
                 <a:solidFill>
-                  <a:srgbClr val="1D2735"/>
+                  <a:srgbClr val="191F28"/>
                 </a:solidFill>
                 <a:latin typeface="Pretendard"/>
                 <a:ea typeface="Pretendard"/>
@@ -13699,7 +13699,7 @@
             <a:r>
               <a:rPr sz="1200" b="0" i="0">
                 <a:solidFill>
-                  <a:srgbClr val="1D2735"/>
+                  <a:srgbClr val="191F28"/>
                 </a:solidFill>
                 <a:latin typeface="Pretendard ExtraBold"/>
                 <a:ea typeface="Pretendard ExtraBold"/>
@@ -13716,7 +13716,7 @@
             <a:r>
               <a:rPr sz="1050" b="0" i="0">
                 <a:solidFill>
-                  <a:srgbClr val="455569"/>
+                  <a:srgbClr val="4E5964"/>
                 </a:solidFill>
                 <a:latin typeface="Pretendard"/>
                 <a:ea typeface="Pretendard"/>
@@ -13750,7 +13750,7 @@
           </a:prstGeom>
           <a:ln w="12700">
             <a:solidFill>
-              <a:srgbClr val="EBE5DB"/>
+              <a:srgbClr val="EAE5D8"/>
             </a:solidFill>
           </a:ln>
           <a:effectLst/>
@@ -13793,7 +13793,7 @@
             <a:r>
               <a:rPr sz="900" b="0" i="0">
                 <a:solidFill>
-                  <a:srgbClr val="455569"/>
+                  <a:srgbClr val="4E5964"/>
                 </a:solidFill>
                 <a:latin typeface="Pretendard"/>
                 <a:ea typeface="Pretendard"/>
@@ -13824,7 +13824,7 @@
           </a:solidFill>
           <a:ln w="9525">
             <a:solidFill>
-              <a:srgbClr val="EBE5DB"/>
+              <a:srgbClr val="EAE5D8"/>
             </a:solidFill>
           </a:ln>
           <a:effectLst/>
@@ -13855,7 +13855,7 @@
             <a:r>
               <a:rPr sz="1050" b="0" i="0">
                 <a:solidFill>
-                  <a:srgbClr val="455569"/>
+                  <a:srgbClr val="4E5964"/>
                 </a:solidFill>
                 <a:latin typeface="Pretendard SemiBold"/>
                 <a:ea typeface="Pretendard SemiBold"/>
@@ -13898,7 +13898,7 @@
             <a:avLst/>
           </a:prstGeom>
           <a:solidFill>
-            <a:srgbClr val="FFFDF9"/>
+            <a:srgbClr val="FCFAF4"/>
           </a:solidFill>
           <a:ln>
             <a:noFill/>
@@ -13942,7 +13942,7 @@
             <a:avLst/>
           </a:prstGeom>
           <a:solidFill>
-            <a:srgbClr val="173F54"/>
+            <a:srgbClr val="0B3B3F"/>
           </a:solidFill>
           <a:ln>
             <a:noFill/>
@@ -13986,7 +13986,7 @@
             <a:avLst/>
           </a:prstGeom>
           <a:solidFill>
-            <a:srgbClr val="9A7440"/>
+            <a:srgbClr val="0F4E53"/>
           </a:solidFill>
           <a:ln>
             <a:noFill/>
@@ -14045,7 +14045,7 @@
             <a:r>
               <a:rPr sz="1050" b="0" i="0" spc="190">
                 <a:solidFill>
-                  <a:srgbClr val="1F5068"/>
+                  <a:srgbClr val="0F4E53"/>
                 </a:solidFill>
                 <a:latin typeface="Pretendard ExtraBold"/>
                 <a:ea typeface="Pretendard ExtraBold"/>
@@ -14085,7 +14085,7 @@
             <a:r>
               <a:rPr sz="2400" b="1" i="0">
                 <a:solidFill>
-                  <a:srgbClr val="1D2735"/>
+                  <a:srgbClr val="191F28"/>
                 </a:solidFill>
                 <a:latin typeface="Noto Serif KR"/>
                 <a:ea typeface="Noto Serif KR"/>
@@ -14105,7 +14105,7 @@
             <a:r>
               <a:rPr sz="1200" b="0" i="0">
                 <a:solidFill>
-                  <a:srgbClr val="455569"/>
+                  <a:srgbClr val="4E5964"/>
                 </a:solidFill>
                 <a:latin typeface="Pretendard"/>
                 <a:ea typeface="Pretendard"/>
@@ -14145,7 +14145,7 @@
             <a:r>
               <a:rPr sz="1600" b="0" i="0">
                 <a:solidFill>
-                  <a:srgbClr val="1D2735"/>
+                  <a:srgbClr val="191F28"/>
                 </a:solidFill>
                 <a:latin typeface="Pretendard"/>
                 <a:ea typeface="Pretendard"/>
@@ -14188,7 +14188,7 @@
             <a:r>
               <a:rPr sz="1200" b="0" i="0">
                 <a:solidFill>
-                  <a:srgbClr val="1D2735"/>
+                  <a:srgbClr val="191F28"/>
                 </a:solidFill>
                 <a:latin typeface="Pretendard ExtraBold"/>
                 <a:ea typeface="Pretendard ExtraBold"/>
@@ -14205,7 +14205,7 @@
             <a:r>
               <a:rPr sz="1050" b="0" i="0">
                 <a:solidFill>
-                  <a:srgbClr val="455569"/>
+                  <a:srgbClr val="4E5964"/>
                 </a:solidFill>
                 <a:latin typeface="Pretendard"/>
                 <a:ea typeface="Pretendard"/>
@@ -14230,7 +14230,7 @@
             <a:avLst/>
           </a:prstGeom>
           <a:solidFill>
-            <a:srgbClr val="EBE5DB"/>
+            <a:srgbClr val="EAE5D8"/>
           </a:solidFill>
           <a:ln>
             <a:noFill/>
@@ -14289,7 +14289,7 @@
             <a:r>
               <a:rPr sz="1600" b="0" i="0">
                 <a:solidFill>
-                  <a:srgbClr val="1D2735"/>
+                  <a:srgbClr val="191F28"/>
                 </a:solidFill>
                 <a:latin typeface="Pretendard"/>
                 <a:ea typeface="Pretendard"/>
@@ -14332,7 +14332,7 @@
             <a:r>
               <a:rPr sz="1200" b="0" i="0">
                 <a:solidFill>
-                  <a:srgbClr val="1D2735"/>
+                  <a:srgbClr val="191F28"/>
                 </a:solidFill>
                 <a:latin typeface="Pretendard ExtraBold"/>
                 <a:ea typeface="Pretendard ExtraBold"/>
@@ -14349,7 +14349,7 @@
             <a:r>
               <a:rPr sz="1050" b="0" i="0">
                 <a:solidFill>
-                  <a:srgbClr val="455569"/>
+                  <a:srgbClr val="4E5964"/>
                 </a:solidFill>
                 <a:latin typeface="Pretendard"/>
                 <a:ea typeface="Pretendard"/>
@@ -14374,7 +14374,7 @@
             <a:avLst/>
           </a:prstGeom>
           <a:solidFill>
-            <a:srgbClr val="EBE5DB"/>
+            <a:srgbClr val="EAE5D8"/>
           </a:solidFill>
           <a:ln>
             <a:noFill/>
@@ -14433,7 +14433,7 @@
             <a:r>
               <a:rPr sz="1600" b="0" i="0">
                 <a:solidFill>
-                  <a:srgbClr val="1D2735"/>
+                  <a:srgbClr val="191F28"/>
                 </a:solidFill>
                 <a:latin typeface="Pretendard"/>
                 <a:ea typeface="Pretendard"/>
@@ -14476,7 +14476,7 @@
             <a:r>
               <a:rPr sz="1200" b="0" i="0">
                 <a:solidFill>
-                  <a:srgbClr val="1D2735"/>
+                  <a:srgbClr val="191F28"/>
                 </a:solidFill>
                 <a:latin typeface="Pretendard ExtraBold"/>
                 <a:ea typeface="Pretendard ExtraBold"/>
@@ -14493,7 +14493,7 @@
             <a:r>
               <a:rPr sz="1050" b="0" i="0">
                 <a:solidFill>
-                  <a:srgbClr val="455569"/>
+                  <a:srgbClr val="4E5964"/>
                 </a:solidFill>
                 <a:latin typeface="Pretendard"/>
                 <a:ea typeface="Pretendard"/>
@@ -14527,7 +14527,7 @@
           </a:prstGeom>
           <a:ln w="12700">
             <a:solidFill>
-              <a:srgbClr val="EBE5DB"/>
+              <a:srgbClr val="EAE5D8"/>
             </a:solidFill>
           </a:ln>
           <a:effectLst/>
@@ -14570,7 +14570,7 @@
             <a:r>
               <a:rPr sz="900" b="0" i="0">
                 <a:solidFill>
-                  <a:srgbClr val="455569"/>
+                  <a:srgbClr val="4E5964"/>
                 </a:solidFill>
                 <a:latin typeface="Pretendard"/>
                 <a:ea typeface="Pretendard"/>
@@ -14601,7 +14601,7 @@
           </a:solidFill>
           <a:ln w="9525">
             <a:solidFill>
-              <a:srgbClr val="EBE5DB"/>
+              <a:srgbClr val="EAE5D8"/>
             </a:solidFill>
           </a:ln>
           <a:effectLst/>
@@ -14632,7 +14632,7 @@
             <a:r>
               <a:rPr sz="1050" b="0" i="0">
                 <a:solidFill>
-                  <a:srgbClr val="455569"/>
+                  <a:srgbClr val="4E5964"/>
                 </a:solidFill>
                 <a:latin typeface="Pretendard SemiBold"/>
                 <a:ea typeface="Pretendard SemiBold"/>
@@ -14675,7 +14675,7 @@
             <a:avLst/>
           </a:prstGeom>
           <a:solidFill>
-            <a:srgbClr val="FFFDF9"/>
+            <a:srgbClr val="FCFAF4"/>
           </a:solidFill>
           <a:ln>
             <a:noFill/>
@@ -14719,7 +14719,7 @@
             <a:avLst/>
           </a:prstGeom>
           <a:solidFill>
-            <a:srgbClr val="173F54"/>
+            <a:srgbClr val="0B3B3F"/>
           </a:solidFill>
           <a:ln>
             <a:noFill/>
@@ -14763,7 +14763,7 @@
             <a:avLst/>
           </a:prstGeom>
           <a:solidFill>
-            <a:srgbClr val="9A7440"/>
+            <a:srgbClr val="0F4E53"/>
           </a:solidFill>
           <a:ln>
             <a:noFill/>
@@ -14822,7 +14822,7 @@
             <a:r>
               <a:rPr sz="1050" b="0" i="0" spc="190">
                 <a:solidFill>
-                  <a:srgbClr val="1F5068"/>
+                  <a:srgbClr val="0F4E53"/>
                 </a:solidFill>
                 <a:latin typeface="Pretendard ExtraBold"/>
                 <a:ea typeface="Pretendard ExtraBold"/>
@@ -14862,7 +14862,7 @@
             <a:r>
               <a:rPr sz="2400" b="1" i="0">
                 <a:solidFill>
-                  <a:srgbClr val="1D2735"/>
+                  <a:srgbClr val="191F28"/>
                 </a:solidFill>
                 <a:latin typeface="Noto Serif KR"/>
                 <a:ea typeface="Noto Serif KR"/>
@@ -14882,7 +14882,7 @@
             <a:r>
               <a:rPr sz="1200" b="0" i="0">
                 <a:solidFill>
-                  <a:srgbClr val="455569"/>
+                  <a:srgbClr val="4E5964"/>
                 </a:solidFill>
                 <a:latin typeface="Pretendard"/>
                 <a:ea typeface="Pretendard"/>
@@ -14922,7 +14922,7 @@
             <a:r>
               <a:rPr sz="1600" b="0" i="0">
                 <a:solidFill>
-                  <a:srgbClr val="1D2735"/>
+                  <a:srgbClr val="191F28"/>
                 </a:solidFill>
                 <a:latin typeface="Pretendard"/>
                 <a:ea typeface="Pretendard"/>
@@ -14965,7 +14965,7 @@
             <a:r>
               <a:rPr sz="1200" b="0" i="0">
                 <a:solidFill>
-                  <a:srgbClr val="1D2735"/>
+                  <a:srgbClr val="191F28"/>
                 </a:solidFill>
                 <a:latin typeface="Pretendard ExtraBold"/>
                 <a:ea typeface="Pretendard ExtraBold"/>
@@ -14982,7 +14982,7 @@
             <a:r>
               <a:rPr sz="1050" b="0" i="0">
                 <a:solidFill>
-                  <a:srgbClr val="455569"/>
+                  <a:srgbClr val="4E5964"/>
                 </a:solidFill>
                 <a:latin typeface="Pretendard"/>
                 <a:ea typeface="Pretendard"/>
@@ -15007,7 +15007,7 @@
             <a:avLst/>
           </a:prstGeom>
           <a:solidFill>
-            <a:srgbClr val="EBE5DB"/>
+            <a:srgbClr val="EAE5D8"/>
           </a:solidFill>
           <a:ln>
             <a:noFill/>
@@ -15066,7 +15066,7 @@
             <a:r>
               <a:rPr sz="1600" b="0" i="0">
                 <a:solidFill>
-                  <a:srgbClr val="1D2735"/>
+                  <a:srgbClr val="191F28"/>
                 </a:solidFill>
                 <a:latin typeface="Pretendard"/>
                 <a:ea typeface="Pretendard"/>
@@ -15109,7 +15109,7 @@
             <a:r>
               <a:rPr sz="1200" b="0" i="0">
                 <a:solidFill>
-                  <a:srgbClr val="1D2735"/>
+                  <a:srgbClr val="191F28"/>
                 </a:solidFill>
                 <a:latin typeface="Pretendard ExtraBold"/>
                 <a:ea typeface="Pretendard ExtraBold"/>
@@ -15126,7 +15126,7 @@
             <a:r>
               <a:rPr sz="1050" b="0" i="0">
                 <a:solidFill>
-                  <a:srgbClr val="455569"/>
+                  <a:srgbClr val="4E5964"/>
                 </a:solidFill>
                 <a:latin typeface="Pretendard"/>
                 <a:ea typeface="Pretendard"/>
@@ -15151,7 +15151,7 @@
             <a:avLst/>
           </a:prstGeom>
           <a:solidFill>
-            <a:srgbClr val="EBE5DB"/>
+            <a:srgbClr val="EAE5D8"/>
           </a:solidFill>
           <a:ln>
             <a:noFill/>
@@ -15210,7 +15210,7 @@
             <a:r>
               <a:rPr sz="1600" b="0" i="0">
                 <a:solidFill>
-                  <a:srgbClr val="1D2735"/>
+                  <a:srgbClr val="191F28"/>
                 </a:solidFill>
                 <a:latin typeface="Pretendard"/>
                 <a:ea typeface="Pretendard"/>
@@ -15253,7 +15253,7 @@
             <a:r>
               <a:rPr sz="1200" b="0" i="0">
                 <a:solidFill>
-                  <a:srgbClr val="1D2735"/>
+                  <a:srgbClr val="191F28"/>
                 </a:solidFill>
                 <a:latin typeface="Pretendard ExtraBold"/>
                 <a:ea typeface="Pretendard ExtraBold"/>
@@ -15270,7 +15270,7 @@
             <a:r>
               <a:rPr sz="1050" b="0" i="0">
                 <a:solidFill>
-                  <a:srgbClr val="455569"/>
+                  <a:srgbClr val="4E5964"/>
                 </a:solidFill>
                 <a:latin typeface="Pretendard"/>
                 <a:ea typeface="Pretendard"/>
@@ -15304,7 +15304,7 @@
           </a:prstGeom>
           <a:ln w="12700">
             <a:solidFill>
-              <a:srgbClr val="EBE5DB"/>
+              <a:srgbClr val="EAE5D8"/>
             </a:solidFill>
           </a:ln>
           <a:effectLst/>
@@ -15347,7 +15347,7 @@
             <a:r>
               <a:rPr sz="900" b="0" i="0">
                 <a:solidFill>
-                  <a:srgbClr val="455569"/>
+                  <a:srgbClr val="4E5964"/>
                 </a:solidFill>
                 <a:latin typeface="Pretendard"/>
                 <a:ea typeface="Pretendard"/>
@@ -15378,7 +15378,7 @@
           </a:solidFill>
           <a:ln w="9525">
             <a:solidFill>
-              <a:srgbClr val="EBE5DB"/>
+              <a:srgbClr val="EAE5D8"/>
             </a:solidFill>
           </a:ln>
           <a:effectLst/>
@@ -15409,7 +15409,7 @@
             <a:r>
               <a:rPr sz="1050" b="0" i="0">
                 <a:solidFill>
-                  <a:srgbClr val="455569"/>
+                  <a:srgbClr val="4E5964"/>
                 </a:solidFill>
                 <a:latin typeface="Pretendard SemiBold"/>
                 <a:ea typeface="Pretendard SemiBold"/>

--- a/slides.pptx
+++ b/slides.pptx
@@ -6115,7 +6115,7 @@
                 <a:latin typeface="Pretendard"/>
                 <a:ea typeface="Pretendard"/>
               </a:rPr>
-              <a:t>사용법 안내 실제 화면</a:t>
+              <a:t>“1단계: 제품 사진 올리기” — 상단 탭에서 결과물별 안내를 고릅니다</a:t>
             </a:r>
           </a:p>
         </p:txBody>
@@ -12244,7 +12244,7 @@
                 <a:latin typeface="Pretendard"/>
                 <a:ea typeface="Pretendard"/>
               </a:rPr>
-              <a:t>스마트스토어 링크와 1688 링크, 각각 “불러오기” 버튼 하나로 끝납니다</a:t>
+              <a:t>링크마다 “불러오기” 버튼 하나 — 가격·비상품 이미지는 자동으로 걸러집니다</a:t>
             </a:r>
           </a:p>
         </p:txBody>
@@ -13021,7 +13021,7 @@
                 <a:latin typeface="Pretendard"/>
                 <a:ea typeface="Pretendard"/>
               </a:rPr>
-              <a:t>실제 작업 목록 — 템플릿·더빙 설정이 남고, MP4·SRT·VTT로 내려받습니다</a:t>
+              <a:t>완료된 작업 목록 — 쇼츠 템플릿·더빙 설정이 남고, MP4·SRT·VTT로 내려받습니다</a:t>
             </a:r>
           </a:p>
         </p:txBody>
@@ -13798,7 +13798,7 @@
                 <a:latin typeface="Pretendard"/>
                 <a:ea typeface="Pretendard"/>
               </a:rPr>
-              <a:t>캡처를 올리면 이미지·텍스트 블록으로 정리됩니다</a:t>
+              <a:t>편집 시작 화면 — 캡처를 올리면 블록 편집이 이어집니다</a:t>
             </a:r>
           </a:p>
         </p:txBody>
@@ -15352,7 +15352,7 @@
                 <a:latin typeface="Pretendard"/>
                 <a:ea typeface="Pretendard"/>
               </a:rPr>
-              <a:t>결과 화면의 GIF 생성 버튼 — 실제 화면</a:t>
+              <a:t>GIF 생성 버튼 — (2/2)는 만들 수 있는 남은 횟수입니다</a:t>
             </a:r>
           </a:p>
         </p:txBody>

--- a/slides.pptx
+++ b/slides.pptx
@@ -4169,26 +4169,29 @@
           </a:p>
         </p:txBody>
       </p:sp>
-      <p:sp>
-        <p:nvSpPr>
-          <p:cNvPr id="15" name="Rounded Rectangle 14"/>
-          <p:cNvSpPr/>
-          <p:nvPr/>
-        </p:nvSpPr>
-        <p:spPr>
-          <a:xfrm>
-            <a:off x="6400800" y="2468880"/>
-            <a:ext cx="2377440" cy="1783080"/>
-          </a:xfrm>
-          <a:prstGeom prst="roundRect">
-            <a:avLst>
-              <a:gd name="adj" fmla="val 10000"/>
-            </a:avLst>
-          </a:prstGeom>
-          <a:solidFill>
-            <a:srgbClr val="2B333D"/>
-          </a:solidFill>
-          <a:ln w="9525">
+      <p:pic>
+        <p:nvPicPr>
+          <p:cNvPr id="15" name="Picture 14" descr="eraser_ui.jpg"/>
+          <p:cNvPicPr>
+            <a:picLocks noChangeAspect="1"/>
+          </p:cNvPicPr>
+          <p:nvPr/>
+        </p:nvPicPr>
+        <p:blipFill>
+          <a:blip r:embed="rId2"/>
+          <a:stretch>
+            <a:fillRect/>
+          </a:stretch>
+        </p:blipFill>
+        <p:spPr>
+          <a:xfrm>
+            <a:off x="6720840" y="1371600"/>
+            <a:ext cx="3886200" cy="3785159"/>
+          </a:xfrm>
+          <a:prstGeom prst="rect">
+            <a:avLst/>
+          </a:prstGeom>
+          <a:ln w="12700">
             <a:solidFill>
               <a:srgbClr val="EAE5D8"/>
             </a:solidFill>
@@ -4202,197 +4205,32 @@
             </a:outerShdw>
           </a:effectLst>
         </p:spPr>
-        <p:style>
-          <a:lnRef idx="1">
-            <a:schemeClr val="accent1"/>
-          </a:lnRef>
-          <a:fillRef idx="3">
-            <a:schemeClr val="accent1"/>
-          </a:fillRef>
-          <a:effectRef idx="2">
-            <a:schemeClr val="accent1"/>
-          </a:effectRef>
-          <a:fontRef idx="minor">
-            <a:schemeClr val="lt1"/>
-          </a:fontRef>
-        </p:style>
-        <p:txBody>
-          <a:bodyPr rtlCol="0" anchor="ctr"/>
-          <a:lstStyle/>
-          <a:p>
-            <a:pPr algn="ctr"/>
-          </a:p>
-        </p:txBody>
-      </p:sp>
-      <p:sp>
-        <p:nvSpPr>
-          <p:cNvPr id="16" name="TextBox 15"/>
-          <p:cNvSpPr txBox="1"/>
-          <p:nvPr/>
-        </p:nvSpPr>
-        <p:spPr>
-          <a:xfrm rot="20760000">
-            <a:off x="6629400" y="3063240"/>
-            <a:ext cx="1920240" cy="457200"/>
-          </a:xfrm>
-          <a:prstGeom prst="rect">
-            <a:avLst/>
-          </a:prstGeom>
-          <a:noFill/>
-        </p:spPr>
-        <p:txBody>
-          <a:bodyPr wrap="square" lIns="0" rIns="0" tIns="0" bIns="0">
-            <a:spAutoFit/>
-          </a:bodyPr>
-          <a:lstStyle/>
-          <a:p>
-            <a:pPr algn="ctr">
-              <a:lnSpc>
-                <a:spcPct val="100000"/>
-              </a:lnSpc>
-            </a:pPr>
-            <a:r>
-              <a:rPr sz="1500" b="0" i="0" spc="280">
-                <a:solidFill>
-                  <a:srgbClr val="9AA7B8"/>
-                </a:solidFill>
-                <a:latin typeface="Pretendard ExtraBold"/>
-                <a:ea typeface="Pretendard ExtraBold"/>
-              </a:rPr>
-              <a:t>워터마크</a:t>
-            </a:r>
-          </a:p>
-        </p:txBody>
-      </p:sp>
-      <p:sp>
-        <p:nvSpPr>
-          <p:cNvPr id="17" name="Rounded Rectangle 16"/>
-          <p:cNvSpPr/>
-          <p:nvPr/>
-        </p:nvSpPr>
-        <p:spPr>
-          <a:xfrm>
-            <a:off x="6766560" y="2926080"/>
-            <a:ext cx="1645920" cy="685800"/>
-          </a:xfrm>
-          <a:prstGeom prst="roundRect">
-            <a:avLst>
-              <a:gd name="adj" fmla="val 50000"/>
-            </a:avLst>
-          </a:prstGeom>
-          <a:noFill/>
-          <a:ln w="22225">
+      </p:pic>
+      <p:pic>
+        <p:nvPicPr>
+          <p:cNvPr id="16" name="Picture 15" descr="eraser_bar.jpg"/>
+          <p:cNvPicPr>
+            <a:picLocks noChangeAspect="1"/>
+          </p:cNvPicPr>
+          <p:nvPr/>
+        </p:nvPicPr>
+        <p:blipFill>
+          <a:blip r:embed="rId3"/>
+          <a:stretch>
+            <a:fillRect/>
+          </a:stretch>
+        </p:blipFill>
+        <p:spPr>
+          <a:xfrm>
+            <a:off x="6720840" y="5248198"/>
+            <a:ext cx="3886200" cy="349758"/>
+          </a:xfrm>
+          <a:prstGeom prst="rect">
+            <a:avLst/>
+          </a:prstGeom>
+          <a:ln w="12700">
             <a:solidFill>
-              <a:srgbClr val="D5DDE6"/>
-            </a:solidFill>
-            <a:prstDash val="dash"/>
-          </a:ln>
-          <a:effectLst/>
-        </p:spPr>
-        <p:style>
-          <a:lnRef idx="1">
-            <a:schemeClr val="accent1"/>
-          </a:lnRef>
-          <a:fillRef idx="3">
-            <a:schemeClr val="accent1"/>
-          </a:fillRef>
-          <a:effectRef idx="2">
-            <a:schemeClr val="accent1"/>
-          </a:effectRef>
-          <a:fontRef idx="minor">
-            <a:schemeClr val="lt1"/>
-          </a:fontRef>
-        </p:style>
-        <p:txBody>
-          <a:bodyPr rtlCol="0" anchor="ctr"/>
-          <a:lstStyle/>
-          <a:p>
-            <a:pPr algn="ctr"/>
-          </a:p>
-        </p:txBody>
-      </p:sp>
-      <p:sp>
-        <p:nvSpPr>
-          <p:cNvPr id="18" name="Rounded Rectangle 17"/>
-          <p:cNvSpPr/>
-          <p:nvPr/>
-        </p:nvSpPr>
-        <p:spPr>
-          <a:xfrm>
-            <a:off x="6565392" y="3913632"/>
-            <a:ext cx="868680" cy="274320"/>
-          </a:xfrm>
-          <a:prstGeom prst="roundRect">
-            <a:avLst>
-              <a:gd name="adj" fmla="val 50000"/>
-            </a:avLst>
-          </a:prstGeom>
-          <a:solidFill>
-            <a:srgbClr val="FFFFFF"/>
-          </a:solidFill>
-          <a:ln>
-            <a:noFill/>
-          </a:ln>
-          <a:effectLst/>
-        </p:spPr>
-        <p:style>
-          <a:lnRef idx="1">
-            <a:schemeClr val="accent1"/>
-          </a:lnRef>
-          <a:fillRef idx="3">
-            <a:schemeClr val="accent1"/>
-          </a:fillRef>
-          <a:effectRef idx="2">
-            <a:schemeClr val="accent1"/>
-          </a:effectRef>
-          <a:fontRef idx="minor">
-            <a:schemeClr val="lt1"/>
-          </a:fontRef>
-        </p:style>
-        <p:txBody>
-          <a:bodyPr rtlCol="0" anchor="ctr" wrap="none" lIns="0" rIns="0" tIns="0" bIns="0"/>
-          <a:lstStyle/>
-          <a:p>
-            <a:pPr algn="ctr">
-              <a:lnSpc>
-                <a:spcPct val="100000"/>
-              </a:lnSpc>
-            </a:pPr>
-            <a:r>
-              <a:rPr sz="850" b="0" i="0">
-                <a:solidFill>
-                  <a:srgbClr val="2B333D"/>
-                </a:solidFill>
-                <a:latin typeface="Pretendard SemiBold"/>
-                <a:ea typeface="Pretendard SemiBold"/>
-              </a:rPr>
-              <a:t>지우기 전</a:t>
-            </a:r>
-          </a:p>
-        </p:txBody>
-      </p:sp>
-      <p:sp>
-        <p:nvSpPr>
-          <p:cNvPr id="19" name="Rounded Rectangle 18"/>
-          <p:cNvSpPr/>
-          <p:nvPr/>
-        </p:nvSpPr>
-        <p:spPr>
-          <a:xfrm>
-            <a:off x="9006840" y="2468880"/>
-            <a:ext cx="2377440" cy="1783080"/>
-          </a:xfrm>
-          <a:prstGeom prst="roundRect">
-            <a:avLst>
-              <a:gd name="adj" fmla="val 10000"/>
-            </a:avLst>
-          </a:prstGeom>
-          <a:solidFill>
-            <a:srgbClr val="F2F6F5"/>
-          </a:solidFill>
-          <a:ln w="9525">
-            <a:solidFill>
-              <a:srgbClr val="CFDEDC"/>
+              <a:srgbClr val="EAE5D8"/>
             </a:solidFill>
           </a:ln>
           <a:effectLst/>
@@ -4404,38 +4242,17 @@
             </a:outerShdw>
           </a:effectLst>
         </p:spPr>
-        <p:style>
-          <a:lnRef idx="1">
-            <a:schemeClr val="accent1"/>
-          </a:lnRef>
-          <a:fillRef idx="3">
-            <a:schemeClr val="accent1"/>
-          </a:fillRef>
-          <a:effectRef idx="2">
-            <a:schemeClr val="accent1"/>
-          </a:effectRef>
-          <a:fontRef idx="minor">
-            <a:schemeClr val="lt1"/>
-          </a:fontRef>
-        </p:style>
-        <p:txBody>
-          <a:bodyPr rtlCol="0" anchor="ctr"/>
-          <a:lstStyle/>
-          <a:p>
-            <a:pPr algn="ctr"/>
-          </a:p>
-        </p:txBody>
-      </p:sp>
-      <p:sp>
-        <p:nvSpPr>
-          <p:cNvPr id="20" name="TextBox 19"/>
+      </p:pic>
+      <p:sp>
+        <p:nvSpPr>
+          <p:cNvPr id="17" name="TextBox 16"/>
           <p:cNvSpPr txBox="1"/>
           <p:nvPr/>
         </p:nvSpPr>
         <p:spPr>
           <a:xfrm>
-            <a:off x="10607040" y="2743200"/>
-            <a:ext cx="548640" cy="411480"/>
+            <a:off x="6446520" y="5689396"/>
+            <a:ext cx="4434840" cy="256032"/>
           </a:xfrm>
           <a:prstGeom prst="rect">
             <a:avLst/>
@@ -4448,127 +4265,27 @@
           </a:bodyPr>
           <a:lstStyle/>
           <a:p>
-            <a:pPr algn="l">
+            <a:pPr algn="ctr">
               <a:lnSpc>
                 <a:spcPct val="100000"/>
               </a:lnSpc>
             </a:pPr>
             <a:r>
-              <a:rPr sz="2000" b="0" i="0">
-                <a:solidFill>
-                  <a:srgbClr val="0F4E53"/>
+              <a:rPr sz="900" b="0" i="0">
+                <a:solidFill>
+                  <a:srgbClr val="4E5964"/>
                 </a:solidFill>
                 <a:latin typeface="Pretendard"/>
                 <a:ea typeface="Pretendard"/>
               </a:rPr>
-              <a:t>✦</a:t>
-            </a:r>
-          </a:p>
-        </p:txBody>
-      </p:sp>
-      <p:sp>
-        <p:nvSpPr>
-          <p:cNvPr id="21" name="Rounded Rectangle 20"/>
-          <p:cNvSpPr/>
-          <p:nvPr/>
-        </p:nvSpPr>
-        <p:spPr>
-          <a:xfrm>
-            <a:off x="9171432" y="3913632"/>
-            <a:ext cx="822960" cy="274320"/>
-          </a:xfrm>
-          <a:prstGeom prst="roundRect">
-            <a:avLst>
-              <a:gd name="adj" fmla="val 50000"/>
-            </a:avLst>
-          </a:prstGeom>
-          <a:solidFill>
-            <a:srgbClr val="0F4E53"/>
-          </a:solidFill>
-          <a:ln>
-            <a:noFill/>
-          </a:ln>
-          <a:effectLst/>
-        </p:spPr>
-        <p:style>
-          <a:lnRef idx="1">
-            <a:schemeClr val="accent1"/>
-          </a:lnRef>
-          <a:fillRef idx="3">
-            <a:schemeClr val="accent1"/>
-          </a:fillRef>
-          <a:effectRef idx="2">
-            <a:schemeClr val="accent1"/>
-          </a:effectRef>
-          <a:fontRef idx="minor">
-            <a:schemeClr val="lt1"/>
-          </a:fontRef>
-        </p:style>
-        <p:txBody>
-          <a:bodyPr rtlCol="0" anchor="ctr" wrap="none" lIns="0" rIns="0" tIns="0" bIns="0"/>
-          <a:lstStyle/>
-          <a:p>
-            <a:pPr algn="ctr">
-              <a:lnSpc>
-                <a:spcPct val="100000"/>
-              </a:lnSpc>
-            </a:pPr>
-            <a:r>
-              <a:rPr sz="850" b="0" i="0">
-                <a:solidFill>
-                  <a:srgbClr val="FFFFFF"/>
-                </a:solidFill>
-                <a:latin typeface="Pretendard SemiBold"/>
-                <a:ea typeface="Pretendard SemiBold"/>
-              </a:rPr>
-              <a:t>지운 후</a:t>
-            </a:r>
-          </a:p>
-        </p:txBody>
-      </p:sp>
-      <p:sp>
-        <p:nvSpPr>
-          <p:cNvPr id="22" name="TextBox 21"/>
-          <p:cNvSpPr txBox="1"/>
-          <p:nvPr/>
-        </p:nvSpPr>
-        <p:spPr>
-          <a:xfrm>
-            <a:off x="6400800" y="4526280"/>
-            <a:ext cx="4983480" cy="256032"/>
-          </a:xfrm>
-          <a:prstGeom prst="rect">
-            <a:avLst/>
-          </a:prstGeom>
-          <a:noFill/>
-        </p:spPr>
-        <p:txBody>
-          <a:bodyPr wrap="square" lIns="0" rIns="0" tIns="0" bIns="0">
-            <a:spAutoFit/>
-          </a:bodyPr>
-          <a:lstStyle/>
-          <a:p>
-            <a:pPr algn="ctr">
-              <a:lnSpc>
-                <a:spcPct val="100000"/>
-              </a:lnSpc>
-            </a:pPr>
-            <a:r>
-              <a:rPr sz="900" b="0" i="0">
-                <a:solidFill>
-                  <a:srgbClr val="4E5964"/>
-                </a:solidFill>
-                <a:latin typeface="Pretendard"/>
-                <a:ea typeface="Pretendard"/>
-              </a:rPr>
-              <a:t>칠한 자리만 지워지고, 상품은 그대로 남습니다</a:t>
-            </a:r>
-          </a:p>
-        </p:txBody>
-      </p:sp>
-      <p:sp>
-        <p:nvSpPr>
-          <p:cNvPr id="23" name="Rounded Rectangle 22"/>
+              <a:t>Canvas 편집 속 AI 지우개 — 붓 크기를 정해 문지르고 적용을 누르면 지워집니다</a:t>
+            </a:r>
+          </a:p>
+        </p:txBody>
+      </p:sp>
+      <p:sp>
+        <p:nvSpPr>
+          <p:cNvPr id="18" name="Rounded Rectangle 17"/>
           <p:cNvSpPr/>
           <p:nvPr/>
         </p:nvSpPr>
@@ -13728,7 +13445,7 @@
       </p:sp>
       <p:pic>
         <p:nvPicPr>
-          <p:cNvPr id="15" name="Picture 14" descr="fc_edit.jpg"/>
+          <p:cNvPr id="15" name="Picture 14" descr="ocr_edit.jpg"/>
           <p:cNvPicPr>
             <a:picLocks noChangeAspect="1"/>
           </p:cNvPicPr>
@@ -13742,8 +13459,8 @@
         </p:blipFill>
         <p:spPr>
           <a:xfrm>
-            <a:off x="6263640" y="1874519"/>
-            <a:ext cx="4983480" cy="2382103"/>
+            <a:off x="6263640" y="1371600"/>
+            <a:ext cx="4160520" cy="3600035"/>
           </a:xfrm>
           <a:prstGeom prst="rect">
             <a:avLst/>
@@ -13771,8 +13488,8 @@
         </p:nvSpPr>
         <p:spPr>
           <a:xfrm>
-            <a:off x="5989320" y="4366351"/>
-            <a:ext cx="5532120" cy="256032"/>
+            <a:off x="5989320" y="5081363"/>
+            <a:ext cx="4709159" cy="256032"/>
           </a:xfrm>
           <a:prstGeom prst="rect">
             <a:avLst/>
@@ -13798,7 +13515,7 @@
                 <a:latin typeface="Pretendard"/>
                 <a:ea typeface="Pretendard"/>
               </a:rPr>
-              <a:t>편집 시작 화면 — 캡처를 올리면 블록 편집이 이어집니다</a:t>
+              <a:t>이미지 속 문구 수정 — 파란 박스가 인식된 텍스트 영역입니다</a:t>
             </a:r>
           </a:p>
         </p:txBody>

--- a/slides.pptx
+++ b/slides.pptx
@@ -10279,7 +10279,7 @@
       </p:sp>
       <p:pic>
         <p:nvPicPr>
-          <p:cNvPr id="15" name="Picture 14" descr="sm_app.jpg"/>
+          <p:cNvPr id="15" name="Picture 14" descr="sm_result.jpg"/>
           <p:cNvPicPr>
             <a:picLocks noChangeAspect="1"/>
           </p:cNvPicPr>
@@ -10293,8 +10293,8 @@
         </p:blipFill>
         <p:spPr>
           <a:xfrm>
-            <a:off x="6263640" y="1143000"/>
-            <a:ext cx="3794760" cy="2929555"/>
+            <a:off x="6263640" y="1097280"/>
+            <a:ext cx="3931920" cy="3402623"/>
           </a:xfrm>
           <a:prstGeom prst="rect">
             <a:avLst/>
@@ -10322,8 +10322,8 @@
         </p:nvSpPr>
         <p:spPr>
           <a:xfrm>
-            <a:off x="5989320" y="4182282"/>
-            <a:ext cx="4343400" cy="256032"/>
+            <a:off x="5989320" y="4609631"/>
+            <a:ext cx="4480559" cy="256032"/>
           </a:xfrm>
           <a:prstGeom prst="rect">
             <a:avLst/>
@@ -10349,7 +10349,7 @@
                 <a:latin typeface="Pretendard"/>
                 <a:ea typeface="Pretendard"/>
               </a:rPr>
-              <a:t>사진 · 판매 채널 · 상품 설명 · 키워드 — 한 화면 입력</a:t>
+              <a:t>사진 한 장으로 최종 제목과 AI 모델별 후보까지 — 실제 결과</a:t>
             </a:r>
           </a:p>
         </p:txBody>
@@ -10370,8 +10370,8 @@
         </p:blipFill>
         <p:spPr>
           <a:xfrm>
-            <a:off x="6263640" y="4529754"/>
-            <a:ext cx="3794760" cy="313700"/>
+            <a:off x="6263640" y="4957103"/>
+            <a:ext cx="3931920" cy="325039"/>
           </a:xfrm>
           <a:prstGeom prst="rect">
             <a:avLst/>
@@ -10399,8 +10399,8 @@
         </p:nvSpPr>
         <p:spPr>
           <a:xfrm>
-            <a:off x="5989320" y="5063699"/>
-            <a:ext cx="4343400" cy="256032"/>
+            <a:off x="5989320" y="5507702"/>
+            <a:ext cx="4480559" cy="256032"/>
           </a:xfrm>
           <a:prstGeom prst="rect">
             <a:avLst/>

--- a/slides.pptx
+++ b/slides.pptx
@@ -3716,7 +3716,7 @@
                 <a:latin typeface="Pretendard ExtraBold"/>
                 <a:ea typeface="Pretendard ExtraBold"/>
               </a:rPr>
-              <a:t>프리캔버스 새 기능 ⑥</a:t>
+              <a:t>프리캔버스 새 기능 ⑤</a:t>
             </a:r>
           </a:p>
         </p:txBody>
@@ -3756,7 +3756,7 @@
                 <a:latin typeface="Noto Serif KR"/>
                 <a:ea typeface="Noto Serif KR"/>
               </a:rPr>
-              <a:t>AI 지우개</a:t>
+              <a:t>GIF 만들기</a:t>
             </a:r>
           </a:p>
           <a:p>
@@ -3776,7 +3776,7 @@
                 <a:latin typeface="Pretendard"/>
                 <a:ea typeface="Pretendard"/>
               </a:rPr>
-              <a:t>이미지에서 지우고 싶은 부분만 칠하면 지워집니다.</a:t>
+              <a:t>완성된 상세 이미지를 움직이는 GIF로 만들어, 상세페이지에서 시선을 잡습니다.</a:t>
             </a:r>
           </a:p>
         </p:txBody>
@@ -3816,7 +3816,7 @@
                 <a:latin typeface="Pretendard"/>
                 <a:ea typeface="Pretendard"/>
               </a:rPr>
-              <a:t>🖌️</a:t>
+              <a:t>🎞️</a:t>
             </a:r>
           </a:p>
         </p:txBody>
@@ -3859,7 +3859,7 @@
                 <a:latin typeface="Pretendard ExtraBold"/>
                 <a:ea typeface="Pretendard ExtraBold"/>
               </a:rPr>
-              <a:t>워터마크·글자 지우기</a:t>
+              <a:t>텍스트 없음 · 텍스트 유지, 두 가지</a:t>
             </a:r>
           </a:p>
           <a:p>
@@ -3876,7 +3876,7 @@
                 <a:latin typeface="Pretendard"/>
                 <a:ea typeface="Pretendard"/>
               </a:rPr>
-              <a:t>소싱 이미지에 박힌 워터마크, 중국어 글자, 거슬리는 배경을 칠한 자리만 지웁니다.</a:t>
+              <a:t>문구 없이 장면만 움직이는 GIF와 문구가 함께 든 GIF 중 골라 만듭니다.</a:t>
             </a:r>
           </a:p>
         </p:txBody>
@@ -3960,7 +3960,7 @@
                 <a:latin typeface="Pretendard"/>
                 <a:ea typeface="Pretendard"/>
               </a:rPr>
-              <a:t>⚡</a:t>
+              <a:t>🛒</a:t>
             </a:r>
           </a:p>
         </p:txBody>
@@ -4003,7 +4003,7 @@
                 <a:latin typeface="Pretendard ExtraBold"/>
                 <a:ea typeface="Pretendard ExtraBold"/>
               </a:rPr>
-              <a:t>기다림 없이 바로</a:t>
+              <a:t>상세페이지에 그대로 사용</a:t>
             </a:r>
           </a:p>
           <a:p>
@@ -4020,7 +4020,7 @@
                 <a:latin typeface="Pretendard"/>
                 <a:ea typeface="Pretendard"/>
               </a:rPr>
-              <a:t>편집 화면 안에서 곧바로 지워져, 다른 프로그램을 오갈 필요가 없습니다.</a:t>
+              <a:t>움직이는 이미지가 한두 장 들어가면 스크롤이 멈춥니다. 스마트스토어 상세에 바로 올릴 수 있습니다.</a:t>
             </a:r>
           </a:p>
         </p:txBody>
@@ -4104,7 +4104,7 @@
                 <a:latin typeface="Pretendard"/>
                 <a:ea typeface="Pretendard"/>
               </a:rPr>
-              <a:t>👆</a:t>
+              <a:t>📦</a:t>
             </a:r>
           </a:p>
         </p:txBody>
@@ -4147,7 +4147,7 @@
                 <a:latin typeface="Pretendard ExtraBold"/>
                 <a:ea typeface="Pretendard ExtraBold"/>
               </a:rPr>
-              <a:t>간단한 조작</a:t>
+              <a:t>MP4 저장·전체저장 포함</a:t>
             </a:r>
           </a:p>
           <a:p>
@@ -4164,14 +4164,14 @@
                 <a:latin typeface="Pretendard"/>
                 <a:ea typeface="Pretendard"/>
               </a:rPr>
-              <a:t>복잡한 설정 없이, 문지르면 지워집니다.</a:t>
+              <a:t>만들어진 GIF 카드를 누르면 MP4 영상으로도 저장되고, 전체저장 ZIP 안 gifs 폴더에도 함께 담깁니다.</a:t>
             </a:r>
           </a:p>
         </p:txBody>
       </p:sp>
       <p:pic>
         <p:nvPicPr>
-          <p:cNvPr id="15" name="Picture 14" descr="eraser_ui.jpg"/>
+          <p:cNvPr id="15" name="Picture 14" descr="gif_top.jpg"/>
           <p:cNvPicPr>
             <a:picLocks noChangeAspect="1"/>
           </p:cNvPicPr>
@@ -4185,8 +4185,8 @@
         </p:blipFill>
         <p:spPr>
           <a:xfrm>
-            <a:off x="6720840" y="1371600"/>
-            <a:ext cx="3886200" cy="3785159"/>
+            <a:off x="6263640" y="1965960"/>
+            <a:ext cx="5029200" cy="2625242"/>
           </a:xfrm>
           <a:prstGeom prst="rect">
             <a:avLst/>
@@ -4206,53 +4206,16 @@
           </a:effectLst>
         </p:spPr>
       </p:pic>
-      <p:pic>
-        <p:nvPicPr>
-          <p:cNvPr id="16" name="Picture 15" descr="eraser_bar.jpg"/>
-          <p:cNvPicPr>
-            <a:picLocks noChangeAspect="1"/>
-          </p:cNvPicPr>
-          <p:nvPr/>
-        </p:nvPicPr>
-        <p:blipFill>
-          <a:blip r:embed="rId3"/>
-          <a:stretch>
-            <a:fillRect/>
-          </a:stretch>
-        </p:blipFill>
-        <p:spPr>
-          <a:xfrm>
-            <a:off x="6720840" y="5248198"/>
-            <a:ext cx="3886200" cy="349758"/>
-          </a:xfrm>
-          <a:prstGeom prst="rect">
-            <a:avLst/>
-          </a:prstGeom>
-          <a:ln w="12700">
-            <a:solidFill>
-              <a:srgbClr val="EAE5D8"/>
-            </a:solidFill>
-          </a:ln>
-          <a:effectLst/>
-          <a:effectLst>
-            <a:outerShdw blurRad="170000" dist="50000" dir="5400000" rotWithShape="0">
-              <a:srgbClr val="16241C">
-                <a:alpha val="30000"/>
-              </a:srgbClr>
-            </a:outerShdw>
-          </a:effectLst>
-        </p:spPr>
-      </p:pic>
-      <p:sp>
-        <p:nvSpPr>
-          <p:cNvPr id="17" name="TextBox 16"/>
+      <p:sp>
+        <p:nvSpPr>
+          <p:cNvPr id="16" name="TextBox 15"/>
           <p:cNvSpPr txBox="1"/>
           <p:nvPr/>
         </p:nvSpPr>
         <p:spPr>
           <a:xfrm>
-            <a:off x="6446520" y="5689396"/>
-            <a:ext cx="4434840" cy="256032"/>
+            <a:off x="5989320" y="4700930"/>
+            <a:ext cx="5577840" cy="256032"/>
           </a:xfrm>
           <a:prstGeom prst="rect">
             <a:avLst/>
@@ -4278,14 +4241,14 @@
                 <a:latin typeface="Pretendard"/>
                 <a:ea typeface="Pretendard"/>
               </a:rPr>
-              <a:t>Canvas 편집 속 AI 지우개 — 붓 크기를 정해 문지르고 적용을 누르면 지워집니다</a:t>
-            </a:r>
-          </a:p>
-        </p:txBody>
-      </p:sp>
-      <p:sp>
-        <p:nvSpPr>
-          <p:cNvPr id="18" name="Rounded Rectangle 17"/>
+              <a:t>GIF 생성 버튼 — (2/2)는 만들 수 있는 남은 횟수입니다</a:t>
+            </a:r>
+          </a:p>
+        </p:txBody>
+      </p:sp>
+      <p:sp>
+        <p:nvSpPr>
+          <p:cNvPr id="17" name="Rounded Rectangle 16"/>
           <p:cNvSpPr/>
           <p:nvPr/>
         </p:nvSpPr>
@@ -4530,7 +4493,7 @@
                 <a:latin typeface="Pretendard ExtraBold"/>
                 <a:ea typeface="Pretendard ExtraBold"/>
               </a:rPr>
-              <a:t>저장할 때</a:t>
+              <a:t>프리캔버스 새 기능 ⑥</a:t>
             </a:r>
           </a:p>
         </p:txBody>
@@ -4570,7 +4533,7 @@
                 <a:latin typeface="Noto Serif KR"/>
                 <a:ea typeface="Noto Serif KR"/>
               </a:rPr>
-              <a:t>플랫폼별 사이즈로 전체저장</a:t>
+              <a:t>AI 지우개</a:t>
             </a:r>
           </a:p>
           <a:p>
@@ -4590,7 +4553,7 @@
                 <a:latin typeface="Pretendard"/>
                 <a:ea typeface="Pretendard"/>
               </a:rPr>
-              <a:t>저장할 때 판매 플랫폼을 고르면, 그 플랫폼 규격에 맞는 폭으로 저장됩니다.</a:t>
+              <a:t>이미지에서 지우고 싶은 부분만 칠하면 지워집니다.</a:t>
             </a:r>
           </a:p>
         </p:txBody>
@@ -4630,7 +4593,7 @@
                 <a:latin typeface="Pretendard"/>
                 <a:ea typeface="Pretendard"/>
               </a:rPr>
-              <a:t>📐</a:t>
+              <a:t>🖌️</a:t>
             </a:r>
           </a:p>
         </p:txBody>
@@ -4673,7 +4636,7 @@
                 <a:latin typeface="Pretendard ExtraBold"/>
                 <a:ea typeface="Pretendard ExtraBold"/>
               </a:rPr>
-              <a:t>플랫폼 규격 자동 맞춤</a:t>
+              <a:t>워터마크·글자 지우기</a:t>
             </a:r>
           </a:p>
           <a:p>
@@ -4690,7 +4653,7 @@
                 <a:latin typeface="Pretendard"/>
                 <a:ea typeface="Pretendard"/>
               </a:rPr>
-              <a:t>스마트스토어 860px · 쿠팡 780px · 11번가 831px · 카페24 1000px · 자사몰 1080px.</a:t>
+              <a:t>소싱 이미지에 박힌 워터마크, 중국어 글자, 거슬리는 배경을 칠한 자리만 지웁니다.</a:t>
             </a:r>
           </a:p>
         </p:txBody>
@@ -4774,7 +4737,7 @@
                 <a:latin typeface="Pretendard"/>
                 <a:ea typeface="Pretendard"/>
               </a:rPr>
-              <a:t>📄</a:t>
+              <a:t>⚡</a:t>
             </a:r>
           </a:p>
         </p:txBody>
@@ -4817,7 +4780,7 @@
                 <a:latin typeface="Pretendard ExtraBold"/>
                 <a:ea typeface="Pretendard ExtraBold"/>
               </a:rPr>
-              <a:t>HTML 초안 포함</a:t>
+              <a:t>기다림 없이 바로</a:t>
             </a:r>
           </a:p>
           <a:p>
@@ -4834,7 +4797,7 @@
                 <a:latin typeface="Pretendard"/>
                 <a:ea typeface="Pretendard"/>
               </a:rPr>
-              <a:t>이미지와 함께 상세페이지 HTML 초안이 저장되어, 플랫폼 에디터에 붙여넣기만 하면 됩니다.</a:t>
+              <a:t>편집 화면 안에서 곧바로 지워져, 다른 프로그램을 오갈 필요가 없습니다.</a:t>
             </a:r>
           </a:p>
         </p:txBody>
@@ -4918,7 +4881,7 @@
                 <a:latin typeface="Pretendard"/>
                 <a:ea typeface="Pretendard"/>
               </a:rPr>
-              <a:t>✅</a:t>
+              <a:t>👆</a:t>
             </a:r>
           </a:p>
         </p:txBody>
@@ -4961,7 +4924,7 @@
                 <a:latin typeface="Pretendard ExtraBold"/>
                 <a:ea typeface="Pretendard ExtraBold"/>
               </a:rPr>
-              <a:t>저장 전 자동 점검</a:t>
+              <a:t>간단한 조작</a:t>
             </a:r>
           </a:p>
           <a:p>
@@ -4978,14 +4941,14 @@
                 <a:latin typeface="Pretendard"/>
                 <a:ea typeface="Pretendard"/>
               </a:rPr>
-              <a:t>옵션 이미지·상품정보제공고시·GIF·누락 이미지를 저장 전에 한 번에 확인해 줍니다.</a:t>
+              <a:t>복잡한 설정 없이, 문지르면 지워집니다.</a:t>
             </a:r>
           </a:p>
         </p:txBody>
       </p:sp>
       <p:pic>
         <p:nvPicPr>
-          <p:cNvPr id="15" name="Picture 14" descr="save_modal.jpg"/>
+          <p:cNvPr id="15" name="Picture 14" descr="eraser_ui.jpg"/>
           <p:cNvPicPr>
             <a:picLocks noChangeAspect="1"/>
           </p:cNvPicPr>
@@ -4999,8 +4962,8 @@
         </p:blipFill>
         <p:spPr>
           <a:xfrm>
-            <a:off x="6263640" y="1234440"/>
-            <a:ext cx="2651760" cy="4476117"/>
+            <a:off x="6720840" y="1371600"/>
+            <a:ext cx="3886200" cy="3785159"/>
           </a:xfrm>
           <a:prstGeom prst="rect">
             <a:avLst/>
@@ -5020,16 +4983,53 @@
           </a:effectLst>
         </p:spPr>
       </p:pic>
-      <p:sp>
-        <p:nvSpPr>
-          <p:cNvPr id="16" name="TextBox 15"/>
+      <p:pic>
+        <p:nvPicPr>
+          <p:cNvPr id="16" name="Picture 15" descr="eraser_bar.jpg"/>
+          <p:cNvPicPr>
+            <a:picLocks noChangeAspect="1"/>
+          </p:cNvPicPr>
+          <p:nvPr/>
+        </p:nvPicPr>
+        <p:blipFill>
+          <a:blip r:embed="rId3"/>
+          <a:stretch>
+            <a:fillRect/>
+          </a:stretch>
+        </p:blipFill>
+        <p:spPr>
+          <a:xfrm>
+            <a:off x="6720840" y="5248198"/>
+            <a:ext cx="3886200" cy="349758"/>
+          </a:xfrm>
+          <a:prstGeom prst="rect">
+            <a:avLst/>
+          </a:prstGeom>
+          <a:ln w="12700">
+            <a:solidFill>
+              <a:srgbClr val="EAE5D8"/>
+            </a:solidFill>
+          </a:ln>
+          <a:effectLst/>
+          <a:effectLst>
+            <a:outerShdw blurRad="170000" dist="50000" dir="5400000" rotWithShape="0">
+              <a:srgbClr val="16241C">
+                <a:alpha val="30000"/>
+              </a:srgbClr>
+            </a:outerShdw>
+          </a:effectLst>
+        </p:spPr>
+      </p:pic>
+      <p:sp>
+        <p:nvSpPr>
+          <p:cNvPr id="17" name="TextBox 16"/>
           <p:cNvSpPr txBox="1"/>
           <p:nvPr/>
         </p:nvSpPr>
         <p:spPr>
           <a:xfrm>
-            <a:off x="5989320" y="5820284"/>
-            <a:ext cx="3200400" cy="256032"/>
+            <a:off x="6446520" y="5689396"/>
+            <a:ext cx="4434840" cy="256032"/>
           </a:xfrm>
           <a:prstGeom prst="rect">
             <a:avLst/>
@@ -5055,14 +5055,14 @@
                 <a:latin typeface="Pretendard"/>
                 <a:ea typeface="Pretendard"/>
               </a:rPr>
-              <a:t>저장 방식 선택 — 실제 화면</a:t>
-            </a:r>
-          </a:p>
-        </p:txBody>
-      </p:sp>
-      <p:sp>
-        <p:nvSpPr>
-          <p:cNvPr id="17" name="Rounded Rectangle 16"/>
+              <a:t>Canvas 편집 속 AI 지우개 — 붓 크기를 정해 문지르고 적용을 누르면 지워집니다</a:t>
+            </a:r>
+          </a:p>
+        </p:txBody>
+      </p:sp>
+      <p:sp>
+        <p:nvSpPr>
+          <p:cNvPr id="18" name="Rounded Rectangle 17"/>
           <p:cNvSpPr/>
           <p:nvPr/>
         </p:nvSpPr>
@@ -5307,7 +5307,7 @@
                 <a:latin typeface="Pretendard ExtraBold"/>
                 <a:ea typeface="Pretendard ExtraBold"/>
               </a:rPr>
-              <a:t>처음 쓰는 분이라면</a:t>
+              <a:t>저장할 때</a:t>
             </a:r>
           </a:p>
         </p:txBody>
@@ -5347,7 +5347,7 @@
                 <a:latin typeface="Noto Serif KR"/>
                 <a:ea typeface="Noto Serif KR"/>
               </a:rPr>
-              <a:t>단계별 사용법 안내</a:t>
+              <a:t>플랫폼별 사이즈로 전체저장</a:t>
             </a:r>
           </a:p>
           <a:p>
@@ -5367,7 +5367,7 @@
                 <a:latin typeface="Pretendard"/>
                 <a:ea typeface="Pretendard"/>
               </a:rPr>
-              <a:t>화면 위에 순서대로 안내가 떠서, 처음이어도 따라 하기만 하면 됩니다.</a:t>
+              <a:t>저장할 때 판매 플랫폼을 고르면, 그 플랫폼 규격에 맞는 폭으로 저장됩니다.</a:t>
             </a:r>
           </a:p>
         </p:txBody>
@@ -5407,7 +5407,7 @@
                 <a:latin typeface="Pretendard"/>
                 <a:ea typeface="Pretendard"/>
               </a:rPr>
-              <a:t>🗂️</a:t>
+              <a:t>📐</a:t>
             </a:r>
           </a:p>
         </p:txBody>
@@ -5450,7 +5450,7 @@
                 <a:latin typeface="Pretendard ExtraBold"/>
                 <a:ea typeface="Pretendard ExtraBold"/>
               </a:rPr>
-              <a:t>결과물마다 다른 안내</a:t>
+              <a:t>플랫폼 규격 자동 맞춤</a:t>
             </a:r>
           </a:p>
           <a:p>
@@ -5467,7 +5467,7 @@
                 <a:latin typeface="Pretendard"/>
                 <a:ea typeface="Pretendard"/>
               </a:rPr>
-              <a:t>일반·의류·과일채소·카드뉴스·썸네일 — 만들려는 것에 맞는 안내가 따로 준비되어 있습니다.</a:t>
+              <a:t>스마트스토어 860px · 쿠팡 780px · 11번가 831px · 카페24 1000px · 자사몰 1080px.</a:t>
             </a:r>
           </a:p>
         </p:txBody>
@@ -5551,7 +5551,7 @@
                 <a:latin typeface="Pretendard"/>
                 <a:ea typeface="Pretendard"/>
               </a:rPr>
-              <a:t>📋</a:t>
+              <a:t>📄</a:t>
             </a:r>
           </a:p>
         </p:txBody>
@@ -5594,7 +5594,7 @@
                 <a:latin typeface="Pretendard ExtraBold"/>
                 <a:ea typeface="Pretendard ExtraBold"/>
               </a:rPr>
-              <a:t>사진 올리기부터 저장까지</a:t>
+              <a:t>HTML 초안 포함</a:t>
             </a:r>
           </a:p>
           <a:p>
@@ -5611,7 +5611,7 @@
                 <a:latin typeface="Pretendard"/>
                 <a:ea typeface="Pretendard"/>
               </a:rPr>
-              <a:t>각 단계에서 무엇을 누르고 무엇을 입력하는지 화면 위에서 하나씩 짚어 줍니다.</a:t>
+              <a:t>이미지와 함께 상세페이지 HTML 초안이 저장되어, 플랫폼 에디터에 붙여넣기만 하면 됩니다.</a:t>
             </a:r>
           </a:p>
         </p:txBody>
@@ -5695,7 +5695,7 @@
                 <a:latin typeface="Pretendard"/>
                 <a:ea typeface="Pretendard"/>
               </a:rPr>
-              <a:t>🔁</a:t>
+              <a:t>✅</a:t>
             </a:r>
           </a:p>
         </p:txBody>
@@ -5738,7 +5738,7 @@
                 <a:latin typeface="Pretendard ExtraBold"/>
                 <a:ea typeface="Pretendard ExtraBold"/>
               </a:rPr>
-              <a:t>언제든 다시 보기</a:t>
+              <a:t>저장 전 자동 점검</a:t>
             </a:r>
           </a:p>
           <a:p>
@@ -5755,14 +5755,14 @@
                 <a:latin typeface="Pretendard"/>
                 <a:ea typeface="Pretendard"/>
               </a:rPr>
-              <a:t>첫 화면의 “사용법 보기”를 누르면 언제든 처음부터 다시 볼 수 있습니다.</a:t>
+              <a:t>옵션 이미지·상품정보제공고시·GIF·누락 이미지를 저장 전에 한 번에 확인해 줍니다.</a:t>
             </a:r>
           </a:p>
         </p:txBody>
       </p:sp>
       <p:pic>
         <p:nvPicPr>
-          <p:cNvPr id="15" name="Picture 14" descr="fc_guide.jpg"/>
+          <p:cNvPr id="15" name="Picture 14" descr="save_modal.jpg"/>
           <p:cNvPicPr>
             <a:picLocks noChangeAspect="1"/>
           </p:cNvPicPr>
@@ -5776,8 +5776,8 @@
         </p:blipFill>
         <p:spPr>
           <a:xfrm>
-            <a:off x="6263640" y="1371600"/>
-            <a:ext cx="3657600" cy="3237186"/>
+            <a:off x="6263640" y="1234440"/>
+            <a:ext cx="2651760" cy="4476117"/>
           </a:xfrm>
           <a:prstGeom prst="rect">
             <a:avLst/>
@@ -5805,8 +5805,8 @@
         </p:nvSpPr>
         <p:spPr>
           <a:xfrm>
-            <a:off x="5989320" y="4718514"/>
-            <a:ext cx="4206240" cy="256032"/>
+            <a:off x="5989320" y="5820284"/>
+            <a:ext cx="3200400" cy="256032"/>
           </a:xfrm>
           <a:prstGeom prst="rect">
             <a:avLst/>
@@ -5832,7 +5832,7 @@
                 <a:latin typeface="Pretendard"/>
                 <a:ea typeface="Pretendard"/>
               </a:rPr>
-              <a:t>“1단계: 제품 사진 올리기” — 상단 탭에서 결과물별 안내를 고릅니다</a:t>
+              <a:t>저장 방식 선택 — 실제 화면</a:t>
             </a:r>
           </a:p>
         </p:txBody>
@@ -6084,7 +6084,7 @@
                 <a:latin typeface="Pretendard ExtraBold"/>
                 <a:ea typeface="Pretendard ExtraBold"/>
               </a:rPr>
-              <a:t>두 서비스 연결</a:t>
+              <a:t>처음 쓰는 분이라면</a:t>
             </a:r>
           </a:p>
         </p:txBody>
@@ -6097,8 +6097,8 @@
         </p:nvSpPr>
         <p:spPr>
           <a:xfrm>
-            <a:off x="822960" y="960120"/>
-            <a:ext cx="10515600" cy="566928"/>
+            <a:off x="822960" y="1234440"/>
+            <a:ext cx="4937760" cy="1280160"/>
           </a:xfrm>
           <a:prstGeom prst="rect">
             <a:avLst/>
@@ -6111,47 +6111,435 @@
           </a:bodyPr>
           <a:lstStyle/>
           <a:p>
-            <a:pPr algn="ctr">
-              <a:lnSpc>
-                <a:spcPct val="100000"/>
-              </a:lnSpc>
-            </a:pPr>
-            <a:r>
-              <a:rPr sz="2200" b="1" i="0">
+            <a:pPr algn="l">
+              <a:lnSpc>
+                <a:spcPct val="130000"/>
+              </a:lnSpc>
+            </a:pPr>
+            <a:r>
+              <a:rPr sz="2400" b="1" i="0">
                 <a:solidFill>
                   <a:srgbClr val="191F28"/>
                 </a:solidFill>
                 <a:latin typeface="Noto Serif KR"/>
                 <a:ea typeface="Noto Serif KR"/>
               </a:rPr>
-              <a:t>프리캔버스 상단 메뉴에서 </a:t>
-            </a:r>
-            <a:r>
-              <a:rPr sz="2200" b="1" i="0">
-                <a:solidFill>
-                  <a:srgbClr val="0F4E53"/>
-                </a:solidFill>
-                <a:latin typeface="Noto Serif KR"/>
-                <a:ea typeface="Noto Serif KR"/>
-              </a:rPr>
-              <a:t>검색마스터</a:t>
-            </a:r>
-            <a:r>
-              <a:rPr sz="2200" b="1" i="0">
+              <a:t>단계별 사용법 안내</a:t>
+            </a:r>
+          </a:p>
+          <a:p>
+            <a:pPr algn="l">
+              <a:lnSpc>
+                <a:spcPct val="140000"/>
+              </a:lnSpc>
+              <a:spcBef>
+                <a:spcPts val="800"/>
+              </a:spcBef>
+            </a:pPr>
+            <a:r>
+              <a:rPr sz="1200" b="0" i="0">
+                <a:solidFill>
+                  <a:srgbClr val="4E5964"/>
+                </a:solidFill>
+                <a:latin typeface="Pretendard"/>
+                <a:ea typeface="Pretendard"/>
+              </a:rPr>
+              <a:t>화면 위에 순서대로 안내가 떠서, 처음이어도 따라 하기만 하면 됩니다.</a:t>
+            </a:r>
+          </a:p>
+        </p:txBody>
+      </p:sp>
+      <p:sp>
+        <p:nvSpPr>
+          <p:cNvPr id="7" name="TextBox 6"/>
+          <p:cNvSpPr txBox="1"/>
+          <p:nvPr/>
+        </p:nvSpPr>
+        <p:spPr>
+          <a:xfrm>
+            <a:off x="822960" y="2743200"/>
+            <a:ext cx="502920" cy="457200"/>
+          </a:xfrm>
+          <a:prstGeom prst="rect">
+            <a:avLst/>
+          </a:prstGeom>
+          <a:noFill/>
+        </p:spPr>
+        <p:txBody>
+          <a:bodyPr wrap="square" lIns="0" rIns="0" tIns="0" bIns="0">
+            <a:spAutoFit/>
+          </a:bodyPr>
+          <a:lstStyle/>
+          <a:p>
+            <a:pPr algn="ctr">
+              <a:lnSpc>
+                <a:spcPct val="100000"/>
+              </a:lnSpc>
+            </a:pPr>
+            <a:r>
+              <a:rPr sz="1600" b="0" i="0">
                 <a:solidFill>
                   <a:srgbClr val="191F28"/>
                 </a:solidFill>
-                <a:latin typeface="Noto Serif KR"/>
-                <a:ea typeface="Noto Serif KR"/>
-              </a:rPr>
-              <a:t>로 바로 이동합니다.</a:t>
+                <a:latin typeface="Pretendard"/>
+                <a:ea typeface="Pretendard"/>
+              </a:rPr>
+              <a:t>🗂️</a:t>
+            </a:r>
+          </a:p>
+        </p:txBody>
+      </p:sp>
+      <p:sp>
+        <p:nvSpPr>
+          <p:cNvPr id="8" name="TextBox 7"/>
+          <p:cNvSpPr txBox="1"/>
+          <p:nvPr/>
+        </p:nvSpPr>
+        <p:spPr>
+          <a:xfrm>
+            <a:off x="1389888" y="2734056"/>
+            <a:ext cx="4297680" cy="960120"/>
+          </a:xfrm>
+          <a:prstGeom prst="rect">
+            <a:avLst/>
+          </a:prstGeom>
+          <a:noFill/>
+        </p:spPr>
+        <p:txBody>
+          <a:bodyPr wrap="square" lIns="0" rIns="0" tIns="0" bIns="0">
+            <a:spAutoFit/>
+          </a:bodyPr>
+          <a:lstStyle/>
+          <a:p>
+            <a:pPr algn="l">
+              <a:lnSpc>
+                <a:spcPct val="100000"/>
+              </a:lnSpc>
+              <a:spcAft>
+                <a:spcPts val="300"/>
+              </a:spcAft>
+            </a:pPr>
+            <a:r>
+              <a:rPr sz="1200" b="0" i="0">
+                <a:solidFill>
+                  <a:srgbClr val="191F28"/>
+                </a:solidFill>
+                <a:latin typeface="Pretendard ExtraBold"/>
+                <a:ea typeface="Pretendard ExtraBold"/>
+              </a:rPr>
+              <a:t>결과물마다 다른 안내</a:t>
+            </a:r>
+          </a:p>
+          <a:p>
+            <a:pPr algn="l">
+              <a:lnSpc>
+                <a:spcPct val="128000"/>
+              </a:lnSpc>
+            </a:pPr>
+            <a:r>
+              <a:rPr sz="1050" b="0" i="0">
+                <a:solidFill>
+                  <a:srgbClr val="4E5964"/>
+                </a:solidFill>
+                <a:latin typeface="Pretendard"/>
+                <a:ea typeface="Pretendard"/>
+              </a:rPr>
+              <a:t>일반·의류·과일채소·카드뉴스·썸네일 — 만들려는 것에 맞는 안내가 따로 준비되어 있습니다.</a:t>
+            </a:r>
+          </a:p>
+        </p:txBody>
+      </p:sp>
+      <p:sp>
+        <p:nvSpPr>
+          <p:cNvPr id="9" name="Rectangle 8"/>
+          <p:cNvSpPr/>
+          <p:nvPr/>
+        </p:nvSpPr>
+        <p:spPr>
+          <a:xfrm>
+            <a:off x="822960" y="3739896"/>
+            <a:ext cx="4846320" cy="10972"/>
+          </a:xfrm>
+          <a:prstGeom prst="rect">
+            <a:avLst/>
+          </a:prstGeom>
+          <a:solidFill>
+            <a:srgbClr val="EAE5D8"/>
+          </a:solidFill>
+          <a:ln>
+            <a:noFill/>
+          </a:ln>
+          <a:effectLst/>
+        </p:spPr>
+        <p:style>
+          <a:lnRef idx="1">
+            <a:schemeClr val="accent1"/>
+          </a:lnRef>
+          <a:fillRef idx="3">
+            <a:schemeClr val="accent1"/>
+          </a:fillRef>
+          <a:effectRef idx="2">
+            <a:schemeClr val="accent1"/>
+          </a:effectRef>
+          <a:fontRef idx="minor">
+            <a:schemeClr val="lt1"/>
+          </a:fontRef>
+        </p:style>
+        <p:txBody>
+          <a:bodyPr rtlCol="0" anchor="ctr"/>
+          <a:lstStyle/>
+          <a:p>
+            <a:pPr algn="ctr"/>
+          </a:p>
+        </p:txBody>
+      </p:sp>
+      <p:sp>
+        <p:nvSpPr>
+          <p:cNvPr id="10" name="TextBox 9"/>
+          <p:cNvSpPr txBox="1"/>
+          <p:nvPr/>
+        </p:nvSpPr>
+        <p:spPr>
+          <a:xfrm>
+            <a:off x="822960" y="3822191"/>
+            <a:ext cx="502920" cy="457200"/>
+          </a:xfrm>
+          <a:prstGeom prst="rect">
+            <a:avLst/>
+          </a:prstGeom>
+          <a:noFill/>
+        </p:spPr>
+        <p:txBody>
+          <a:bodyPr wrap="square" lIns="0" rIns="0" tIns="0" bIns="0">
+            <a:spAutoFit/>
+          </a:bodyPr>
+          <a:lstStyle/>
+          <a:p>
+            <a:pPr algn="ctr">
+              <a:lnSpc>
+                <a:spcPct val="100000"/>
+              </a:lnSpc>
+            </a:pPr>
+            <a:r>
+              <a:rPr sz="1600" b="0" i="0">
+                <a:solidFill>
+                  <a:srgbClr val="191F28"/>
+                </a:solidFill>
+                <a:latin typeface="Pretendard"/>
+                <a:ea typeface="Pretendard"/>
+              </a:rPr>
+              <a:t>📋</a:t>
+            </a:r>
+          </a:p>
+        </p:txBody>
+      </p:sp>
+      <p:sp>
+        <p:nvSpPr>
+          <p:cNvPr id="11" name="TextBox 10"/>
+          <p:cNvSpPr txBox="1"/>
+          <p:nvPr/>
+        </p:nvSpPr>
+        <p:spPr>
+          <a:xfrm>
+            <a:off x="1389888" y="3813048"/>
+            <a:ext cx="4297680" cy="960120"/>
+          </a:xfrm>
+          <a:prstGeom prst="rect">
+            <a:avLst/>
+          </a:prstGeom>
+          <a:noFill/>
+        </p:spPr>
+        <p:txBody>
+          <a:bodyPr wrap="square" lIns="0" rIns="0" tIns="0" bIns="0">
+            <a:spAutoFit/>
+          </a:bodyPr>
+          <a:lstStyle/>
+          <a:p>
+            <a:pPr algn="l">
+              <a:lnSpc>
+                <a:spcPct val="100000"/>
+              </a:lnSpc>
+              <a:spcAft>
+                <a:spcPts val="300"/>
+              </a:spcAft>
+            </a:pPr>
+            <a:r>
+              <a:rPr sz="1200" b="0" i="0">
+                <a:solidFill>
+                  <a:srgbClr val="191F28"/>
+                </a:solidFill>
+                <a:latin typeface="Pretendard ExtraBold"/>
+                <a:ea typeface="Pretendard ExtraBold"/>
+              </a:rPr>
+              <a:t>사진 올리기부터 저장까지</a:t>
+            </a:r>
+          </a:p>
+          <a:p>
+            <a:pPr algn="l">
+              <a:lnSpc>
+                <a:spcPct val="128000"/>
+              </a:lnSpc>
+            </a:pPr>
+            <a:r>
+              <a:rPr sz="1050" b="0" i="0">
+                <a:solidFill>
+                  <a:srgbClr val="4E5964"/>
+                </a:solidFill>
+                <a:latin typeface="Pretendard"/>
+                <a:ea typeface="Pretendard"/>
+              </a:rPr>
+              <a:t>각 단계에서 무엇을 누르고 무엇을 입력하는지 화면 위에서 하나씩 짚어 줍니다.</a:t>
+            </a:r>
+          </a:p>
+        </p:txBody>
+      </p:sp>
+      <p:sp>
+        <p:nvSpPr>
+          <p:cNvPr id="12" name="Rectangle 11"/>
+          <p:cNvSpPr/>
+          <p:nvPr/>
+        </p:nvSpPr>
+        <p:spPr>
+          <a:xfrm>
+            <a:off x="822960" y="4818888"/>
+            <a:ext cx="4846320" cy="10972"/>
+          </a:xfrm>
+          <a:prstGeom prst="rect">
+            <a:avLst/>
+          </a:prstGeom>
+          <a:solidFill>
+            <a:srgbClr val="EAE5D8"/>
+          </a:solidFill>
+          <a:ln>
+            <a:noFill/>
+          </a:ln>
+          <a:effectLst/>
+        </p:spPr>
+        <p:style>
+          <a:lnRef idx="1">
+            <a:schemeClr val="accent1"/>
+          </a:lnRef>
+          <a:fillRef idx="3">
+            <a:schemeClr val="accent1"/>
+          </a:fillRef>
+          <a:effectRef idx="2">
+            <a:schemeClr val="accent1"/>
+          </a:effectRef>
+          <a:fontRef idx="minor">
+            <a:schemeClr val="lt1"/>
+          </a:fontRef>
+        </p:style>
+        <p:txBody>
+          <a:bodyPr rtlCol="0" anchor="ctr"/>
+          <a:lstStyle/>
+          <a:p>
+            <a:pPr algn="ctr"/>
+          </a:p>
+        </p:txBody>
+      </p:sp>
+      <p:sp>
+        <p:nvSpPr>
+          <p:cNvPr id="13" name="TextBox 12"/>
+          <p:cNvSpPr txBox="1"/>
+          <p:nvPr/>
+        </p:nvSpPr>
+        <p:spPr>
+          <a:xfrm>
+            <a:off x="822960" y="4901183"/>
+            <a:ext cx="502920" cy="457200"/>
+          </a:xfrm>
+          <a:prstGeom prst="rect">
+            <a:avLst/>
+          </a:prstGeom>
+          <a:noFill/>
+        </p:spPr>
+        <p:txBody>
+          <a:bodyPr wrap="square" lIns="0" rIns="0" tIns="0" bIns="0">
+            <a:spAutoFit/>
+          </a:bodyPr>
+          <a:lstStyle/>
+          <a:p>
+            <a:pPr algn="ctr">
+              <a:lnSpc>
+                <a:spcPct val="100000"/>
+              </a:lnSpc>
+            </a:pPr>
+            <a:r>
+              <a:rPr sz="1600" b="0" i="0">
+                <a:solidFill>
+                  <a:srgbClr val="191F28"/>
+                </a:solidFill>
+                <a:latin typeface="Pretendard"/>
+                <a:ea typeface="Pretendard"/>
+              </a:rPr>
+              <a:t>🔁</a:t>
+            </a:r>
+          </a:p>
+        </p:txBody>
+      </p:sp>
+      <p:sp>
+        <p:nvSpPr>
+          <p:cNvPr id="14" name="TextBox 13"/>
+          <p:cNvSpPr txBox="1"/>
+          <p:nvPr/>
+        </p:nvSpPr>
+        <p:spPr>
+          <a:xfrm>
+            <a:off x="1389888" y="4892040"/>
+            <a:ext cx="4297680" cy="960120"/>
+          </a:xfrm>
+          <a:prstGeom prst="rect">
+            <a:avLst/>
+          </a:prstGeom>
+          <a:noFill/>
+        </p:spPr>
+        <p:txBody>
+          <a:bodyPr wrap="square" lIns="0" rIns="0" tIns="0" bIns="0">
+            <a:spAutoFit/>
+          </a:bodyPr>
+          <a:lstStyle/>
+          <a:p>
+            <a:pPr algn="l">
+              <a:lnSpc>
+                <a:spcPct val="100000"/>
+              </a:lnSpc>
+              <a:spcAft>
+                <a:spcPts val="300"/>
+              </a:spcAft>
+            </a:pPr>
+            <a:r>
+              <a:rPr sz="1200" b="0" i="0">
+                <a:solidFill>
+                  <a:srgbClr val="191F28"/>
+                </a:solidFill>
+                <a:latin typeface="Pretendard ExtraBold"/>
+                <a:ea typeface="Pretendard ExtraBold"/>
+              </a:rPr>
+              <a:t>언제든 다시 보기</a:t>
+            </a:r>
+          </a:p>
+          <a:p>
+            <a:pPr algn="l">
+              <a:lnSpc>
+                <a:spcPct val="128000"/>
+              </a:lnSpc>
+            </a:pPr>
+            <a:r>
+              <a:rPr sz="1050" b="0" i="0">
+                <a:solidFill>
+                  <a:srgbClr val="4E5964"/>
+                </a:solidFill>
+                <a:latin typeface="Pretendard"/>
+                <a:ea typeface="Pretendard"/>
+              </a:rPr>
+              <a:t>첫 화면의 “사용법 보기”를 누르면 언제든 처음부터 다시 볼 수 있습니다.</a:t>
             </a:r>
           </a:p>
         </p:txBody>
       </p:sp>
       <p:pic>
         <p:nvPicPr>
-          <p:cNvPr id="7" name="Picture 6" descr="fc_nav.jpg"/>
+          <p:cNvPr id="15" name="Picture 14" descr="fc_guide.jpg"/>
           <p:cNvPicPr>
             <a:picLocks noChangeAspect="1"/>
           </p:cNvPicPr>
@@ -6165,15 +6553,15 @@
         </p:blipFill>
         <p:spPr>
           <a:xfrm>
-            <a:off x="1097280" y="1783080"/>
-            <a:ext cx="9994392" cy="616321"/>
+            <a:off x="6263640" y="1371600"/>
+            <a:ext cx="3657600" cy="3237186"/>
           </a:xfrm>
           <a:prstGeom prst="rect">
             <a:avLst/>
           </a:prstGeom>
           <a:ln w="12700">
             <a:solidFill>
-              <a:srgbClr val="D9D3C5"/>
+              <a:srgbClr val="EAE5D8"/>
             </a:solidFill>
           </a:ln>
           <a:effectLst/>
@@ -6188,58 +6576,14 @@
       </p:pic>
       <p:sp>
         <p:nvSpPr>
-          <p:cNvPr id="8" name="Oval 7"/>
-          <p:cNvSpPr/>
-          <p:nvPr/>
-        </p:nvSpPr>
-        <p:spPr>
-          <a:xfrm>
-            <a:off x="6014520" y="1732788"/>
-            <a:ext cx="929478" cy="716904"/>
-          </a:xfrm>
-          <a:prstGeom prst="ellipse">
-            <a:avLst/>
-          </a:prstGeom>
-          <a:noFill/>
-          <a:ln w="28575">
-            <a:solidFill>
-              <a:srgbClr val="0F4E53"/>
-            </a:solidFill>
-          </a:ln>
-          <a:effectLst/>
-        </p:spPr>
-        <p:style>
-          <a:lnRef idx="1">
-            <a:schemeClr val="accent1"/>
-          </a:lnRef>
-          <a:fillRef idx="3">
-            <a:schemeClr val="accent1"/>
-          </a:fillRef>
-          <a:effectRef idx="2">
-            <a:schemeClr val="accent1"/>
-          </a:effectRef>
-          <a:fontRef idx="minor">
-            <a:schemeClr val="lt1"/>
-          </a:fontRef>
-        </p:style>
-        <p:txBody>
-          <a:bodyPr rtlCol="0" anchor="ctr"/>
-          <a:lstStyle/>
-          <a:p>
-            <a:pPr algn="ctr"/>
-          </a:p>
-        </p:txBody>
-      </p:sp>
-      <p:sp>
-        <p:nvSpPr>
-          <p:cNvPr id="9" name="TextBox 8"/>
+          <p:cNvPr id="16" name="TextBox 15"/>
           <p:cNvSpPr txBox="1"/>
           <p:nvPr/>
         </p:nvSpPr>
         <p:spPr>
           <a:xfrm>
-            <a:off x="822960" y="2527416"/>
-            <a:ext cx="10543032" cy="256032"/>
+            <a:off x="5989320" y="4718514"/>
+            <a:ext cx="4206240" cy="256032"/>
           </a:xfrm>
           <a:prstGeom prst="rect">
             <a:avLst/>
@@ -6258,406 +6602,14 @@
               </a:lnSpc>
             </a:pPr>
             <a:r>
-              <a:rPr sz="950" b="0" i="0">
-                <a:solidFill>
-                  <a:srgbClr val="0F4E53"/>
-                </a:solidFill>
-                <a:latin typeface="Pretendard ExtraBold"/>
-                <a:ea typeface="Pretendard ExtraBold"/>
-              </a:rPr>
-              <a:t>프리캔버스 상단 메뉴 속 「검색마스터」 — 실제 화면</a:t>
-            </a:r>
-          </a:p>
-        </p:txBody>
-      </p:sp>
-      <p:sp>
-        <p:nvSpPr>
-          <p:cNvPr id="10" name="Rounded Rectangle 9"/>
-          <p:cNvSpPr/>
-          <p:nvPr/>
-        </p:nvSpPr>
-        <p:spPr>
-          <a:xfrm>
-            <a:off x="1188720" y="3291840"/>
-            <a:ext cx="4206240" cy="1371600"/>
-          </a:xfrm>
-          <a:prstGeom prst="roundRect">
-            <a:avLst>
-              <a:gd name="adj" fmla="val 10000"/>
-            </a:avLst>
-          </a:prstGeom>
-          <a:solidFill>
-            <a:srgbClr val="FFFDF7"/>
-          </a:solidFill>
-          <a:ln w="9525">
-            <a:solidFill>
-              <a:srgbClr val="D9D3C5"/>
-            </a:solidFill>
-          </a:ln>
-          <a:effectLst/>
-          <a:effectLst>
-            <a:outerShdw blurRad="170000" dist="50000" dir="5400000" rotWithShape="0">
-              <a:srgbClr val="16241C">
-                <a:alpha val="30000"/>
-              </a:srgbClr>
-            </a:outerShdw>
-          </a:effectLst>
-        </p:spPr>
-        <p:style>
-          <a:lnRef idx="1">
-            <a:schemeClr val="accent1"/>
-          </a:lnRef>
-          <a:fillRef idx="3">
-            <a:schemeClr val="accent1"/>
-          </a:fillRef>
-          <a:effectRef idx="2">
-            <a:schemeClr val="accent1"/>
-          </a:effectRef>
-          <a:fontRef idx="minor">
-            <a:schemeClr val="lt1"/>
-          </a:fontRef>
-        </p:style>
-        <p:txBody>
-          <a:bodyPr rtlCol="0" anchor="ctr"/>
-          <a:lstStyle/>
-          <a:p>
-            <a:pPr algn="ctr"/>
-          </a:p>
-        </p:txBody>
-      </p:sp>
-      <p:sp>
-        <p:nvSpPr>
-          <p:cNvPr id="11" name="TextBox 10"/>
-          <p:cNvSpPr txBox="1"/>
-          <p:nvPr/>
-        </p:nvSpPr>
-        <p:spPr>
-          <a:xfrm>
-            <a:off x="1481328" y="3529584"/>
-            <a:ext cx="3611880" cy="960120"/>
-          </a:xfrm>
-          <a:prstGeom prst="rect">
-            <a:avLst/>
-          </a:prstGeom>
-          <a:noFill/>
-        </p:spPr>
-        <p:txBody>
-          <a:bodyPr wrap="square" lIns="0" rIns="0" tIns="0" bIns="0">
-            <a:spAutoFit/>
-          </a:bodyPr>
-          <a:lstStyle/>
-          <a:p>
-            <a:pPr algn="l">
-              <a:lnSpc>
-                <a:spcPct val="100000"/>
-              </a:lnSpc>
-              <a:spcAft>
-                <a:spcPts val="500"/>
-              </a:spcAft>
-            </a:pPr>
-            <a:r>
-              <a:rPr sz="1450" b="1" i="0">
-                <a:solidFill>
-                  <a:srgbClr val="191F28"/>
-                </a:solidFill>
-                <a:latin typeface="Noto Serif KR"/>
-                <a:ea typeface="Noto Serif KR"/>
-              </a:rPr>
-              <a:t>프리캔버스에서 작업하다가</a:t>
-            </a:r>
-          </a:p>
-          <a:p>
-            <a:pPr algn="l">
-              <a:lnSpc>
-                <a:spcPct val="130000"/>
-              </a:lnSpc>
-            </a:pPr>
-            <a:r>
-              <a:rPr sz="1100" b="0" i="0">
-                <a:solidFill>
-                  <a:srgbClr val="2B333D"/>
+              <a:rPr sz="900" b="0" i="0">
+                <a:solidFill>
+                  <a:srgbClr val="4E5964"/>
                 </a:solidFill>
                 <a:latin typeface="Pretendard"/>
                 <a:ea typeface="Pretendard"/>
               </a:rPr>
-              <a:t>상세페이지를 만들다 상품명이나 키워드가 필요해지면,</a:t>
-            </a:r>
-          </a:p>
-        </p:txBody>
-      </p:sp>
-      <p:sp>
-        <p:nvSpPr>
-          <p:cNvPr id="12" name="TextBox 11"/>
-          <p:cNvSpPr txBox="1"/>
-          <p:nvPr/>
-        </p:nvSpPr>
-        <p:spPr>
-          <a:xfrm>
-            <a:off x="5577840" y="3566160"/>
-            <a:ext cx="1051560" cy="868680"/>
-          </a:xfrm>
-          <a:prstGeom prst="rect">
-            <a:avLst/>
-          </a:prstGeom>
-          <a:noFill/>
-        </p:spPr>
-        <p:txBody>
-          <a:bodyPr wrap="square" lIns="0" rIns="0" tIns="0" bIns="0">
-            <a:spAutoFit/>
-          </a:bodyPr>
-          <a:lstStyle/>
-          <a:p>
-            <a:pPr algn="ctr">
-              <a:lnSpc>
-                <a:spcPct val="100000"/>
-              </a:lnSpc>
-              <a:spcAft>
-                <a:spcPts val="300"/>
-              </a:spcAft>
-            </a:pPr>
-            <a:r>
-              <a:rPr sz="2400" b="1" i="0">
-                <a:solidFill>
-                  <a:srgbClr val="0F4E53"/>
-                </a:solidFill>
-                <a:latin typeface="Pretendard"/>
-                <a:ea typeface="Pretendard"/>
-              </a:rPr>
-              <a:t>→</a:t>
-            </a:r>
-          </a:p>
-          <a:p>
-            <a:pPr algn="ctr">
-              <a:lnSpc>
-                <a:spcPct val="100000"/>
-              </a:lnSpc>
-            </a:pPr>
-            <a:r>
-              <a:rPr sz="950" b="0" i="0">
-                <a:solidFill>
-                  <a:srgbClr val="0B3B3F"/>
-                </a:solidFill>
-                <a:latin typeface="Pretendard ExtraBold"/>
-                <a:ea typeface="Pretendard ExtraBold"/>
-              </a:rPr>
-              <a:t>버튼 한 번</a:t>
-            </a:r>
-          </a:p>
-        </p:txBody>
-      </p:sp>
-      <p:sp>
-        <p:nvSpPr>
-          <p:cNvPr id="13" name="Rounded Rectangle 12"/>
-          <p:cNvSpPr/>
-          <p:nvPr/>
-        </p:nvSpPr>
-        <p:spPr>
-          <a:xfrm>
-            <a:off x="6812280" y="3291840"/>
-            <a:ext cx="4206240" cy="1371600"/>
-          </a:xfrm>
-          <a:prstGeom prst="roundRect">
-            <a:avLst>
-              <a:gd name="adj" fmla="val 10000"/>
-            </a:avLst>
-          </a:prstGeom>
-          <a:solidFill>
-            <a:srgbClr val="F2F6F5"/>
-          </a:solidFill>
-          <a:ln w="9525">
-            <a:solidFill>
-              <a:srgbClr val="CFDEDC"/>
-            </a:solidFill>
-          </a:ln>
-          <a:effectLst/>
-          <a:effectLst>
-            <a:outerShdw blurRad="170000" dist="50000" dir="5400000" rotWithShape="0">
-              <a:srgbClr val="16241C">
-                <a:alpha val="30000"/>
-              </a:srgbClr>
-            </a:outerShdw>
-          </a:effectLst>
-        </p:spPr>
-        <p:style>
-          <a:lnRef idx="1">
-            <a:schemeClr val="accent1"/>
-          </a:lnRef>
-          <a:fillRef idx="3">
-            <a:schemeClr val="accent1"/>
-          </a:fillRef>
-          <a:effectRef idx="2">
-            <a:schemeClr val="accent1"/>
-          </a:effectRef>
-          <a:fontRef idx="minor">
-            <a:schemeClr val="lt1"/>
-          </a:fontRef>
-        </p:style>
-        <p:txBody>
-          <a:bodyPr rtlCol="0" anchor="ctr"/>
-          <a:lstStyle/>
-          <a:p>
-            <a:pPr algn="ctr"/>
-          </a:p>
-        </p:txBody>
-      </p:sp>
-      <p:sp>
-        <p:nvSpPr>
-          <p:cNvPr id="14" name="TextBox 13"/>
-          <p:cNvSpPr txBox="1"/>
-          <p:nvPr/>
-        </p:nvSpPr>
-        <p:spPr>
-          <a:xfrm>
-            <a:off x="7104888" y="3529584"/>
-            <a:ext cx="3611880" cy="960120"/>
-          </a:xfrm>
-          <a:prstGeom prst="rect">
-            <a:avLst/>
-          </a:prstGeom>
-          <a:noFill/>
-        </p:spPr>
-        <p:txBody>
-          <a:bodyPr wrap="square" lIns="0" rIns="0" tIns="0" bIns="0">
-            <a:spAutoFit/>
-          </a:bodyPr>
-          <a:lstStyle/>
-          <a:p>
-            <a:pPr algn="l">
-              <a:lnSpc>
-                <a:spcPct val="100000"/>
-              </a:lnSpc>
-              <a:spcAft>
-                <a:spcPts val="500"/>
-              </a:spcAft>
-            </a:pPr>
-            <a:r>
-              <a:rPr sz="1450" b="1" i="0">
-                <a:solidFill>
-                  <a:srgbClr val="191F28"/>
-                </a:solidFill>
-                <a:latin typeface="Noto Serif KR"/>
-                <a:ea typeface="Noto Serif KR"/>
-              </a:rPr>
-              <a:t>검색마스터가 새 탭으로</a:t>
-            </a:r>
-          </a:p>
-          <a:p>
-            <a:pPr algn="l">
-              <a:lnSpc>
-                <a:spcPct val="130000"/>
-              </a:lnSpc>
-            </a:pPr>
-            <a:r>
-              <a:rPr sz="1100" b="0" i="0">
-                <a:solidFill>
-                  <a:srgbClr val="2B333D"/>
-                </a:solidFill>
-                <a:latin typeface="Pretendard"/>
-                <a:ea typeface="Pretendard"/>
-              </a:rPr>
-              <a:t>쓰던 구글 계정 그대로 열립니다. 다시 로그인할 필요가 없습니다.</a:t>
-            </a:r>
-          </a:p>
-        </p:txBody>
-      </p:sp>
-      <p:sp>
-        <p:nvSpPr>
-          <p:cNvPr id="15" name="Rounded Rectangle 14"/>
-          <p:cNvSpPr/>
-          <p:nvPr/>
-        </p:nvSpPr>
-        <p:spPr>
-          <a:xfrm>
-            <a:off x="3063240" y="5230368"/>
-            <a:ext cx="1691640" cy="384048"/>
-          </a:xfrm>
-          <a:prstGeom prst="roundRect">
-            <a:avLst>
-              <a:gd name="adj" fmla="val 50000"/>
-            </a:avLst>
-          </a:prstGeom>
-          <a:solidFill>
-            <a:srgbClr val="FFFFFF"/>
-          </a:solidFill>
-          <a:ln w="9525">
-            <a:solidFill>
-              <a:srgbClr val="D9D3C5"/>
-            </a:solidFill>
-          </a:ln>
-          <a:effectLst/>
-        </p:spPr>
-        <p:style>
-          <a:lnRef idx="1">
-            <a:schemeClr val="accent1"/>
-          </a:lnRef>
-          <a:fillRef idx="3">
-            <a:schemeClr val="accent1"/>
-          </a:fillRef>
-          <a:effectRef idx="2">
-            <a:schemeClr val="accent1"/>
-          </a:effectRef>
-          <a:fontRef idx="minor">
-            <a:schemeClr val="lt1"/>
-          </a:fontRef>
-        </p:style>
-        <p:txBody>
-          <a:bodyPr rtlCol="0" anchor="ctr" wrap="none" lIns="0" rIns="0" tIns="0" bIns="0"/>
-          <a:lstStyle/>
-          <a:p>
-            <a:pPr algn="ctr">
-              <a:lnSpc>
-                <a:spcPct val="100000"/>
-              </a:lnSpc>
-            </a:pPr>
-            <a:r>
-              <a:rPr sz="1050" b="0" i="0">
-                <a:solidFill>
-                  <a:srgbClr val="191F28"/>
-                </a:solidFill>
-                <a:latin typeface="Pretendard SemiBold"/>
-                <a:ea typeface="Pretendard SemiBold"/>
-              </a:rPr>
-              <a:t>● 하나의 구글 계정</a:t>
-            </a:r>
-          </a:p>
-        </p:txBody>
-      </p:sp>
-      <p:sp>
-        <p:nvSpPr>
-          <p:cNvPr id="16" name="TextBox 15"/>
-          <p:cNvSpPr txBox="1"/>
-          <p:nvPr/>
-        </p:nvSpPr>
-        <p:spPr>
-          <a:xfrm>
-            <a:off x="4864608" y="5330952"/>
-            <a:ext cx="5120640" cy="274320"/>
-          </a:xfrm>
-          <a:prstGeom prst="rect">
-            <a:avLst/>
-          </a:prstGeom>
-          <a:noFill/>
-        </p:spPr>
-        <p:txBody>
-          <a:bodyPr wrap="square" lIns="0" rIns="0" tIns="0" bIns="0">
-            <a:spAutoFit/>
-          </a:bodyPr>
-          <a:lstStyle/>
-          <a:p>
-            <a:pPr algn="l">
-              <a:lnSpc>
-                <a:spcPct val="100000"/>
-              </a:lnSpc>
-            </a:pPr>
-            <a:r>
-              <a:rPr sz="1050" b="0" i="0">
-                <a:solidFill>
-                  <a:srgbClr val="4E5964"/>
-                </a:solidFill>
-                <a:latin typeface="Pretendard"/>
-                <a:ea typeface="Pretendard"/>
-              </a:rPr>
-              <a:t>으로 두 서비스를 오갑니다. 구독은 서비스별로 따로 적용됩니다.</a:t>
+              <a:t>“1단계: 제품 사진 올리기” — 상단 탭에서 결과물별 안내를 고릅니다</a:t>
             </a:r>
           </a:p>
         </p:txBody>
@@ -9824,7 +9776,7 @@
                 <a:latin typeface="Pretendard ExtraBold"/>
                 <a:ea typeface="Pretendard ExtraBold"/>
               </a:rPr>
-              <a:t>검색마스터 새 기능</a:t>
+              <a:t>프리캔버스 새 기능 ①</a:t>
             </a:r>
           </a:p>
         </p:txBody>
@@ -9864,7 +9816,7 @@
                 <a:latin typeface="Noto Serif KR"/>
                 <a:ea typeface="Noto Serif KR"/>
               </a:rPr>
-              <a:t>상품 설명 입력</a:t>
+              <a:t>상품 링크로 빠른 시작</a:t>
             </a:r>
           </a:p>
           <a:p>
@@ -9884,7 +9836,7 @@
                 <a:latin typeface="Pretendard"/>
                 <a:ea typeface="Pretendard"/>
               </a:rPr>
-              <a:t>사진과 함께 상품 설명을 입력하면, 상품명이 눈에 띄게 정확해집니다.</a:t>
+              <a:t>소싱한 상품의 주소만 붙여넣으면, 이미지와 상품 정보가 자동으로 담깁니다.</a:t>
             </a:r>
           </a:p>
         </p:txBody>
@@ -9924,7 +9876,7 @@
                 <a:latin typeface="Pretendard"/>
                 <a:ea typeface="Pretendard"/>
               </a:rPr>
-              <a:t>✏️</a:t>
+              <a:t>🔗</a:t>
             </a:r>
           </a:p>
         </p:txBody>
@@ -9967,7 +9919,7 @@
                 <a:latin typeface="Pretendard ExtraBold"/>
                 <a:ea typeface="Pretendard ExtraBold"/>
               </a:rPr>
-              <a:t>실제 상품·용도 설명 입력</a:t>
+              <a:t>스마트스토어·1688 링크 불러오기</a:t>
             </a:r>
           </a:p>
           <a:p>
@@ -9984,7 +9936,7 @@
                 <a:latin typeface="Pretendard"/>
                 <a:ea typeface="Pretendard"/>
               </a:rPr>
-              <a:t>“책상 위에 놓는 무선 충전 겸용 스탠드”처럼 한 줄만 적으면, 사진만으로는 놓치기 쉬운 재질과 용도까지 상품명에 담깁니다.</a:t>
+              <a:t>상품 주소를 붙여넣으면 새 창이 열려 상세 내용과 이미지를 가져옵니다. 최근 업데이트로 속도가 눈에 띄게 빨라졌습니다.</a:t>
             </a:r>
           </a:p>
         </p:txBody>
@@ -10068,7 +10020,7 @@
                 <a:latin typeface="Pretendard"/>
                 <a:ea typeface="Pretendard"/>
               </a:rPr>
-              <a:t>🛍️</a:t>
+              <a:t>🤖</a:t>
             </a:r>
           </a:p>
         </p:txBody>
@@ -10111,7 +10063,7 @@
                 <a:latin typeface="Pretendard ExtraBold"/>
                 <a:ea typeface="Pretendard ExtraBold"/>
               </a:rPr>
-              <a:t>판매 채널별 상품명</a:t>
+              <a:t>상품 아닌 이미지는 AI가 거릅니다</a:t>
             </a:r>
           </a:p>
           <a:p>
@@ -10128,7 +10080,7 @@
                 <a:latin typeface="Pretendard"/>
                 <a:ea typeface="Pretendard"/>
               </a:rPr>
-              <a:t>네이버쇼핑은 검색 노출 폭, 쿠팡은 구매 판단 키워드, 일반몰은 가독성 — 채널을 고르면 그에 맞춰 짓습니다.</a:t>
+              <a:t>공지·구매평·할인 배너처럼 상세에 못 쓰는 이미지를 알아서 빼고, 중국어 문구도 한국어 기준으로 정리합니다.</a:t>
             </a:r>
           </a:p>
         </p:txBody>
@@ -10212,7 +10164,7 @@
                 <a:latin typeface="Pretendard"/>
                 <a:ea typeface="Pretendard"/>
               </a:rPr>
-              <a:t>⚡</a:t>
+              <a:t>🧩</a:t>
             </a:r>
           </a:p>
         </p:txBody>
@@ -10255,7 +10207,7 @@
                 <a:latin typeface="Pretendard ExtraBold"/>
                 <a:ea typeface="Pretendard ExtraBold"/>
               </a:rPr>
-              <a:t>업로드·생성 화면 개선</a:t>
+              <a:t>확장 프로그램은 한 번만 설치</a:t>
             </a:r>
           </a:p>
           <a:p>
@@ -10272,14 +10224,14 @@
                 <a:latin typeface="Pretendard"/>
                 <a:ea typeface="Pretendard"/>
               </a:rPr>
-              <a:t>사진을 올리면 바로 보이고, 생성 진행 상태도 화면에 그대로 표시됩니다.</a:t>
+              <a:t>웹스토어 버튼과 설치 안내가 화면 안에 있습니다. 처음 한 번만 설치하면 다음부터는 붙여넣기만 하면 됩니다.</a:t>
             </a:r>
           </a:p>
         </p:txBody>
       </p:sp>
       <p:pic>
         <p:nvPicPr>
-          <p:cNvPr id="15" name="Picture 14" descr="sm_result.jpg"/>
+          <p:cNvPr id="15" name="Picture 14" descr="fc_link.jpg"/>
           <p:cNvPicPr>
             <a:picLocks noChangeAspect="1"/>
           </p:cNvPicPr>
@@ -10293,8 +10245,8 @@
         </p:blipFill>
         <p:spPr>
           <a:xfrm>
-            <a:off x="6263640" y="1097280"/>
-            <a:ext cx="3931920" cy="3402623"/>
+            <a:off x="6263640" y="1783080"/>
+            <a:ext cx="4892040" cy="2690622"/>
           </a:xfrm>
           <a:prstGeom prst="rect">
             <a:avLst/>
@@ -10322,8 +10274,8 @@
         </p:nvSpPr>
         <p:spPr>
           <a:xfrm>
-            <a:off x="5989320" y="4609631"/>
-            <a:ext cx="4480559" cy="256032"/>
+            <a:off x="5989320" y="4583430"/>
+            <a:ext cx="5440679" cy="256032"/>
           </a:xfrm>
           <a:prstGeom prst="rect">
             <a:avLst/>
@@ -10349,91 +10301,14 @@
                 <a:latin typeface="Pretendard"/>
                 <a:ea typeface="Pretendard"/>
               </a:rPr>
-              <a:t>사진 한 장으로 최종 제목과 AI 모델별 후보까지 — 실제 결과</a:t>
-            </a:r>
-          </a:p>
-        </p:txBody>
-      </p:sp>
-      <p:pic>
-        <p:nvPicPr>
-          <p:cNvPr id="17" name="Picture 16" descr="sm_recent.jpg"/>
-          <p:cNvPicPr>
-            <a:picLocks noChangeAspect="1"/>
-          </p:cNvPicPr>
-          <p:nvPr/>
-        </p:nvPicPr>
-        <p:blipFill>
-          <a:blip r:embed="rId3"/>
-          <a:stretch>
-            <a:fillRect/>
-          </a:stretch>
-        </p:blipFill>
-        <p:spPr>
-          <a:xfrm>
-            <a:off x="6263640" y="4957103"/>
-            <a:ext cx="3931920" cy="325039"/>
-          </a:xfrm>
-          <a:prstGeom prst="rect">
-            <a:avLst/>
-          </a:prstGeom>
-          <a:ln w="12700">
-            <a:solidFill>
-              <a:srgbClr val="EAE5D8"/>
-            </a:solidFill>
-          </a:ln>
-          <a:effectLst/>
-          <a:effectLst>
-            <a:outerShdw blurRad="170000" dist="50000" dir="5400000" rotWithShape="0">
-              <a:srgbClr val="16241C">
-                <a:alpha val="30000"/>
-              </a:srgbClr>
-            </a:outerShdw>
-          </a:effectLst>
-        </p:spPr>
-      </p:pic>
-      <p:sp>
-        <p:nvSpPr>
-          <p:cNvPr id="18" name="TextBox 17"/>
-          <p:cNvSpPr txBox="1"/>
-          <p:nvPr/>
-        </p:nvSpPr>
-        <p:spPr>
-          <a:xfrm>
-            <a:off x="5989320" y="5507702"/>
-            <a:ext cx="4480559" cy="256032"/>
-          </a:xfrm>
-          <a:prstGeom prst="rect">
-            <a:avLst/>
-          </a:prstGeom>
-          <a:noFill/>
-        </p:spPr>
-        <p:txBody>
-          <a:bodyPr wrap="square" lIns="0" rIns="0" tIns="0" bIns="0">
-            <a:spAutoFit/>
-          </a:bodyPr>
-          <a:lstStyle/>
-          <a:p>
-            <a:pPr algn="ctr">
-              <a:lnSpc>
-                <a:spcPct val="100000"/>
-              </a:lnSpc>
-            </a:pPr>
-            <a:r>
-              <a:rPr sz="900" b="0" i="0">
-                <a:solidFill>
-                  <a:srgbClr val="4E5964"/>
-                </a:solidFill>
-                <a:latin typeface="Pretendard"/>
-                <a:ea typeface="Pretendard"/>
-              </a:rPr>
-              <a:t>실제 생성 결과 — 복사해서 바로 씁니다</a:t>
-            </a:r>
-          </a:p>
-        </p:txBody>
-      </p:sp>
-      <p:sp>
-        <p:nvSpPr>
-          <p:cNvPr id="19" name="Rounded Rectangle 18"/>
+              <a:t>링크마다 “불러오기” 버튼 하나 — 가격·비상품 이미지는 자동으로 걸러집니다</a:t>
+            </a:r>
+          </a:p>
+        </p:txBody>
+      </p:sp>
+      <p:sp>
+        <p:nvSpPr>
+          <p:cNvPr id="17" name="Rounded Rectangle 16"/>
           <p:cNvSpPr/>
           <p:nvPr/>
         </p:nvSpPr>
@@ -10678,7 +10553,7 @@
                 <a:latin typeface="Pretendard ExtraBold"/>
                 <a:ea typeface="Pretendard ExtraBold"/>
               </a:rPr>
-              <a:t>프리캔버스 첫 화면</a:t>
+              <a:t>두 서비스 연결</a:t>
             </a:r>
           </a:p>
         </p:txBody>
@@ -10691,7 +10566,7 @@
         </p:nvSpPr>
         <p:spPr>
           <a:xfrm>
-            <a:off x="822960" y="932688"/>
+            <a:off x="822960" y="960120"/>
             <a:ext cx="10515600" cy="566928"/>
           </a:xfrm>
           <a:prstGeom prst="rect">
@@ -10705,27 +10580,47 @@
           </a:bodyPr>
           <a:lstStyle/>
           <a:p>
-            <a:pPr algn="l">
+            <a:pPr algn="ctr">
               <a:lnSpc>
                 <a:spcPct val="100000"/>
               </a:lnSpc>
             </a:pPr>
             <a:r>
-              <a:rPr sz="2300" b="1" i="0">
+              <a:rPr sz="2200" b="1" i="0">
                 <a:solidFill>
                   <a:srgbClr val="191F28"/>
                 </a:solidFill>
                 <a:latin typeface="Noto Serif KR"/>
                 <a:ea typeface="Noto Serif KR"/>
               </a:rPr>
-              <a:t>세 가지 작업 중에 골라 시작합니다.</a:t>
+              <a:t>프리캔버스 상단 메뉴에서 </a:t>
+            </a:r>
+            <a:r>
+              <a:rPr sz="2200" b="1" i="0">
+                <a:solidFill>
+                  <a:srgbClr val="0F4E53"/>
+                </a:solidFill>
+                <a:latin typeface="Noto Serif KR"/>
+                <a:ea typeface="Noto Serif KR"/>
+              </a:rPr>
+              <a:t>검색마스터</a:t>
+            </a:r>
+            <a:r>
+              <a:rPr sz="2200" b="1" i="0">
+                <a:solidFill>
+                  <a:srgbClr val="191F28"/>
+                </a:solidFill>
+                <a:latin typeface="Noto Serif KR"/>
+                <a:ea typeface="Noto Serif KR"/>
+              </a:rPr>
+              <a:t>로 바로 이동합니다.</a:t>
             </a:r>
           </a:p>
         </p:txBody>
       </p:sp>
       <p:pic>
         <p:nvPicPr>
-          <p:cNvPr id="7" name="Picture 6" descr="fc_modes.jpg"/>
+          <p:cNvPr id="7" name="Picture 6" descr="fc_nav.jpg"/>
           <p:cNvPicPr>
             <a:picLocks noChangeAspect="1"/>
           </p:cNvPicPr>
@@ -10739,15 +10634,15 @@
         </p:blipFill>
         <p:spPr>
           <a:xfrm>
-            <a:off x="822960" y="1600200"/>
-            <a:ext cx="10543032" cy="1286250"/>
+            <a:off x="1097280" y="1783080"/>
+            <a:ext cx="9994392" cy="616321"/>
           </a:xfrm>
           <a:prstGeom prst="rect">
             <a:avLst/>
           </a:prstGeom>
           <a:ln w="12700">
             <a:solidFill>
-              <a:srgbClr val="EAE5D8"/>
+              <a:srgbClr val="D9D3C5"/>
             </a:solidFill>
           </a:ln>
           <a:effectLst/>
@@ -10762,23 +10657,23 @@
       </p:pic>
       <p:sp>
         <p:nvSpPr>
-          <p:cNvPr id="8" name="Rectangle 7"/>
+          <p:cNvPr id="8" name="Oval 7"/>
           <p:cNvSpPr/>
           <p:nvPr/>
         </p:nvSpPr>
         <p:spPr>
           <a:xfrm>
-            <a:off x="822960" y="3206489"/>
-            <a:ext cx="29260" cy="566928"/>
-          </a:xfrm>
-          <a:prstGeom prst="rect">
-            <a:avLst/>
-          </a:prstGeom>
-          <a:solidFill>
-            <a:srgbClr val="0F4E53"/>
-          </a:solidFill>
-          <a:ln>
-            <a:noFill/>
+            <a:off x="6014520" y="1732788"/>
+            <a:ext cx="929478" cy="716904"/>
+          </a:xfrm>
+          <a:prstGeom prst="ellipse">
+            <a:avLst/>
+          </a:prstGeom>
+          <a:noFill/>
+          <a:ln w="28575">
+            <a:solidFill>
+              <a:srgbClr val="0F4E53"/>
+            </a:solidFill>
           </a:ln>
           <a:effectLst/>
         </p:spPr>
@@ -10812,8 +10707,8 @@
         </p:nvSpPr>
         <p:spPr>
           <a:xfrm>
-            <a:off x="1024128" y="3179057"/>
-            <a:ext cx="5760720" cy="658368"/>
+            <a:off x="822960" y="2527416"/>
+            <a:ext cx="10543032" cy="256032"/>
           </a:xfrm>
           <a:prstGeom prst="rect">
             <a:avLst/>
@@ -10826,357 +10721,46 @@
           </a:bodyPr>
           <a:lstStyle/>
           <a:p>
-            <a:pPr algn="l">
+            <a:pPr algn="ctr">
               <a:lnSpc>
                 <a:spcPct val="100000"/>
               </a:lnSpc>
-              <a:spcAft>
-                <a:spcPts val="200"/>
-              </a:spcAft>
-            </a:pPr>
-            <a:r>
-              <a:rPr sz="1250" b="0" i="0">
-                <a:solidFill>
-                  <a:srgbClr val="191F28"/>
+            </a:pPr>
+            <a:r>
+              <a:rPr sz="950" b="0" i="0">
+                <a:solidFill>
+                  <a:srgbClr val="0F4E53"/>
                 </a:solidFill>
                 <a:latin typeface="Pretendard ExtraBold"/>
                 <a:ea typeface="Pretendard ExtraBold"/>
               </a:rPr>
-              <a:t>새 상세페이지 만들기</a:t>
-            </a:r>
-          </a:p>
-          <a:p>
-            <a:pPr algn="l">
-              <a:lnSpc>
-                <a:spcPct val="125000"/>
-              </a:lnSpc>
-            </a:pPr>
-            <a:r>
-              <a:rPr sz="1050" b="0" i="0">
-                <a:solidFill>
-                  <a:srgbClr val="4E5964"/>
-                </a:solidFill>
-                <a:latin typeface="Pretendard"/>
-                <a:ea typeface="Pretendard"/>
-              </a:rPr>
-              <a:t>제품 사진과 정보를 넣으면 상세페이지를 처음부터 만들어 줍니다.</a:t>
-            </a:r>
-          </a:p>
-        </p:txBody>
-      </p:sp>
-      <p:sp>
-        <p:nvSpPr>
-          <p:cNvPr id="10" name="Rectangle 9"/>
+              <a:t>프리캔버스 상단 메뉴 속 「검색마스터」 — 실제 화면</a:t>
+            </a:r>
+          </a:p>
+        </p:txBody>
+      </p:sp>
+      <p:sp>
+        <p:nvSpPr>
+          <p:cNvPr id="10" name="Rounded Rectangle 9"/>
           <p:cNvSpPr/>
           <p:nvPr/>
         </p:nvSpPr>
         <p:spPr>
           <a:xfrm>
-            <a:off x="822960" y="3956297"/>
-            <a:ext cx="29260" cy="566928"/>
-          </a:xfrm>
-          <a:prstGeom prst="rect">
-            <a:avLst/>
+            <a:off x="1188720" y="3291840"/>
+            <a:ext cx="4206240" cy="1371600"/>
+          </a:xfrm>
+          <a:prstGeom prst="roundRect">
+            <a:avLst>
+              <a:gd name="adj" fmla="val 10000"/>
+            </a:avLst>
           </a:prstGeom>
           <a:solidFill>
-            <a:srgbClr val="0F4E53"/>
+            <a:srgbClr val="FFFDF7"/>
           </a:solidFill>
-          <a:ln>
-            <a:noFill/>
-          </a:ln>
-          <a:effectLst/>
-        </p:spPr>
-        <p:style>
-          <a:lnRef idx="1">
-            <a:schemeClr val="accent1"/>
-          </a:lnRef>
-          <a:fillRef idx="3">
-            <a:schemeClr val="accent1"/>
-          </a:fillRef>
-          <a:effectRef idx="2">
-            <a:schemeClr val="accent1"/>
-          </a:effectRef>
-          <a:fontRef idx="minor">
-            <a:schemeClr val="lt1"/>
-          </a:fontRef>
-        </p:style>
-        <p:txBody>
-          <a:bodyPr rtlCol="0" anchor="ctr"/>
-          <a:lstStyle/>
-          <a:p>
-            <a:pPr algn="ctr"/>
-          </a:p>
-        </p:txBody>
-      </p:sp>
-      <p:sp>
-        <p:nvSpPr>
-          <p:cNvPr id="11" name="TextBox 10"/>
-          <p:cNvSpPr txBox="1"/>
-          <p:nvPr/>
-        </p:nvSpPr>
-        <p:spPr>
-          <a:xfrm>
-            <a:off x="1024128" y="3928865"/>
-            <a:ext cx="5760720" cy="658368"/>
-          </a:xfrm>
-          <a:prstGeom prst="rect">
-            <a:avLst/>
-          </a:prstGeom>
-          <a:noFill/>
-        </p:spPr>
-        <p:txBody>
-          <a:bodyPr wrap="square" lIns="0" rIns="0" tIns="0" bIns="0">
-            <a:spAutoFit/>
-          </a:bodyPr>
-          <a:lstStyle/>
-          <a:p>
-            <a:pPr algn="l">
-              <a:lnSpc>
-                <a:spcPct val="100000"/>
-              </a:lnSpc>
-              <a:spcAft>
-                <a:spcPts val="200"/>
-              </a:spcAft>
-            </a:pPr>
-            <a:r>
-              <a:rPr sz="1250" b="0" i="0">
-                <a:solidFill>
-                  <a:srgbClr val="191F28"/>
-                </a:solidFill>
-                <a:latin typeface="Pretendard ExtraBold"/>
-                <a:ea typeface="Pretendard ExtraBold"/>
-              </a:rPr>
-              <a:t>기존 상세페이지 편집</a:t>
-            </a:r>
-          </a:p>
-          <a:p>
-            <a:pPr algn="l">
-              <a:lnSpc>
-                <a:spcPct val="125000"/>
-              </a:lnSpc>
-            </a:pPr>
-            <a:r>
-              <a:rPr sz="1050" b="0" i="0">
-                <a:solidFill>
-                  <a:srgbClr val="4E5964"/>
-                </a:solidFill>
-                <a:latin typeface="Pretendard"/>
-                <a:ea typeface="Pretendard"/>
-              </a:rPr>
-              <a:t>이미 있는 상세 캡처를 올려 블록 단위로 수정합니다.</a:t>
-            </a:r>
-          </a:p>
-        </p:txBody>
-      </p:sp>
-      <p:sp>
-        <p:nvSpPr>
-          <p:cNvPr id="12" name="Rectangle 11"/>
-          <p:cNvSpPr/>
-          <p:nvPr/>
-        </p:nvSpPr>
-        <p:spPr>
-          <a:xfrm>
-            <a:off x="822960" y="4706105"/>
-            <a:ext cx="29260" cy="566928"/>
-          </a:xfrm>
-          <a:prstGeom prst="rect">
-            <a:avLst/>
-          </a:prstGeom>
-          <a:solidFill>
-            <a:srgbClr val="191F28"/>
-          </a:solidFill>
-          <a:ln>
-            <a:noFill/>
-          </a:ln>
-          <a:effectLst/>
-        </p:spPr>
-        <p:style>
-          <a:lnRef idx="1">
-            <a:schemeClr val="accent1"/>
-          </a:lnRef>
-          <a:fillRef idx="3">
-            <a:schemeClr val="accent1"/>
-          </a:fillRef>
-          <a:effectRef idx="2">
-            <a:schemeClr val="accent1"/>
-          </a:effectRef>
-          <a:fontRef idx="minor">
-            <a:schemeClr val="lt1"/>
-          </a:fontRef>
-        </p:style>
-        <p:txBody>
-          <a:bodyPr rtlCol="0" anchor="ctr"/>
-          <a:lstStyle/>
-          <a:p>
-            <a:pPr algn="ctr"/>
-          </a:p>
-        </p:txBody>
-      </p:sp>
-      <p:sp>
-        <p:nvSpPr>
-          <p:cNvPr id="13" name="TextBox 12"/>
-          <p:cNvSpPr txBox="1"/>
-          <p:nvPr/>
-        </p:nvSpPr>
-        <p:spPr>
-          <a:xfrm>
-            <a:off x="1024128" y="4678673"/>
-            <a:ext cx="5760720" cy="658368"/>
-          </a:xfrm>
-          <a:prstGeom prst="rect">
-            <a:avLst/>
-          </a:prstGeom>
-          <a:noFill/>
-        </p:spPr>
-        <p:txBody>
-          <a:bodyPr wrap="square" lIns="0" rIns="0" tIns="0" bIns="0">
-            <a:spAutoFit/>
-          </a:bodyPr>
-          <a:lstStyle/>
-          <a:p>
-            <a:pPr algn="l">
-              <a:lnSpc>
-                <a:spcPct val="100000"/>
-              </a:lnSpc>
-              <a:spcAft>
-                <a:spcPts val="200"/>
-              </a:spcAft>
-            </a:pPr>
-            <a:r>
-              <a:rPr sz="1250" b="0" i="0">
-                <a:solidFill>
-                  <a:srgbClr val="191F28"/>
-                </a:solidFill>
-                <a:latin typeface="Pretendard ExtraBold"/>
-                <a:ea typeface="Pretendard ExtraBold"/>
-              </a:rPr>
-              <a:t>1688 영상 번역</a:t>
-            </a:r>
-          </a:p>
-          <a:p>
-            <a:pPr algn="l">
-              <a:lnSpc>
-                <a:spcPct val="125000"/>
-              </a:lnSpc>
-            </a:pPr>
-            <a:r>
-              <a:rPr sz="1050" b="0" i="0">
-                <a:solidFill>
-                  <a:srgbClr val="4E5964"/>
-                </a:solidFill>
-                <a:latin typeface="Pretendard"/>
-                <a:ea typeface="Pretendard"/>
-              </a:rPr>
-              <a:t>중국 상품 영상을 한국어 자막·더빙 영상으로 바꿉니다.</a:t>
-            </a:r>
-          </a:p>
-        </p:txBody>
-      </p:sp>
-      <p:sp>
-        <p:nvSpPr>
-          <p:cNvPr id="14" name="TextBox 13"/>
-          <p:cNvSpPr txBox="1"/>
-          <p:nvPr/>
-        </p:nvSpPr>
-        <p:spPr>
-          <a:xfrm>
-            <a:off x="822960" y="5483345"/>
-            <a:ext cx="5943600" cy="594360"/>
-          </a:xfrm>
-          <a:prstGeom prst="rect">
-            <a:avLst/>
-          </a:prstGeom>
-          <a:noFill/>
-        </p:spPr>
-        <p:txBody>
-          <a:bodyPr wrap="square" lIns="0" rIns="0" tIns="0" bIns="0">
-            <a:spAutoFit/>
-          </a:bodyPr>
-          <a:lstStyle/>
-          <a:p>
-            <a:pPr algn="l">
-              <a:lnSpc>
-                <a:spcPct val="135000"/>
-              </a:lnSpc>
-            </a:pPr>
-            <a:r>
-              <a:rPr sz="1100" b="0" i="0">
-                <a:solidFill>
-                  <a:srgbClr val="2B333D"/>
-                </a:solidFill>
-                <a:latin typeface="Pretendard"/>
-                <a:ea typeface="Pretendard"/>
-              </a:rPr>
-              <a:t>결과물 종류는 일반·의류·과일채소 상세페이지에 </a:t>
-            </a:r>
-            <a:r>
-              <a:rPr sz="1100" b="0" i="0">
-                <a:solidFill>
-                  <a:srgbClr val="2B333D"/>
-                </a:solidFill>
-                <a:latin typeface="Pretendard ExtraBold"/>
-                <a:ea typeface="Pretendard ExtraBold"/>
-              </a:rPr>
-              <a:t>카드뉴스</a:t>
-            </a:r>
-            <a:r>
-              <a:rPr sz="1100" b="0" i="0">
-                <a:solidFill>
-                  <a:srgbClr val="2B333D"/>
-                </a:solidFill>
-                <a:latin typeface="Pretendard"/>
-                <a:ea typeface="Pretendard"/>
-              </a:rPr>
-              <a:t>, </a:t>
-            </a:r>
-            <a:r>
-              <a:rPr sz="1100" b="0" i="0">
-                <a:solidFill>
-                  <a:srgbClr val="2B333D"/>
-                </a:solidFill>
-                <a:latin typeface="Pretendard ExtraBold"/>
-                <a:ea typeface="Pretendard ExtraBold"/>
-              </a:rPr>
-              <a:t>상품 썸네일</a:t>
-            </a:r>
-            <a:r>
-              <a:rPr sz="1100" b="0" i="0">
-                <a:solidFill>
-                  <a:srgbClr val="2B333D"/>
-                </a:solidFill>
-                <a:latin typeface="Pretendard"/>
-                <a:ea typeface="Pretendard"/>
-              </a:rPr>
-              <a:t>까지 다섯 가지입니다.</a:t>
-            </a:r>
-          </a:p>
-        </p:txBody>
-      </p:sp>
-      <p:pic>
-        <p:nvPicPr>
-          <p:cNvPr id="15" name="Picture 14" descr="fc_types.jpg"/>
-          <p:cNvPicPr>
-            <a:picLocks noChangeAspect="1"/>
-          </p:cNvPicPr>
-          <p:nvPr/>
-        </p:nvPicPr>
-        <p:blipFill>
-          <a:blip r:embed="rId3"/>
-          <a:stretch>
-            <a:fillRect/>
-          </a:stretch>
-        </p:blipFill>
-        <p:spPr>
-          <a:xfrm>
-            <a:off x="8092440" y="3224777"/>
-            <a:ext cx="1783080" cy="2473054"/>
-          </a:xfrm>
-          <a:prstGeom prst="rect">
-            <a:avLst/>
-          </a:prstGeom>
-          <a:ln w="12700">
+          <a:ln w="9525">
             <a:solidFill>
-              <a:srgbClr val="EAE5D8"/>
+              <a:srgbClr val="D9D3C5"/>
             </a:solidFill>
           </a:ln>
           <a:effectLst/>
@@ -11188,10 +10772,368 @@
             </a:outerShdw>
           </a:effectLst>
         </p:spPr>
-      </p:pic>
-      <p:sp>
-        <p:nvSpPr>
-          <p:cNvPr id="16" name="Rounded Rectangle 15"/>
+        <p:style>
+          <a:lnRef idx="1">
+            <a:schemeClr val="accent1"/>
+          </a:lnRef>
+          <a:fillRef idx="3">
+            <a:schemeClr val="accent1"/>
+          </a:fillRef>
+          <a:effectRef idx="2">
+            <a:schemeClr val="accent1"/>
+          </a:effectRef>
+          <a:fontRef idx="minor">
+            <a:schemeClr val="lt1"/>
+          </a:fontRef>
+        </p:style>
+        <p:txBody>
+          <a:bodyPr rtlCol="0" anchor="ctr"/>
+          <a:lstStyle/>
+          <a:p>
+            <a:pPr algn="ctr"/>
+          </a:p>
+        </p:txBody>
+      </p:sp>
+      <p:sp>
+        <p:nvSpPr>
+          <p:cNvPr id="11" name="TextBox 10"/>
+          <p:cNvSpPr txBox="1"/>
+          <p:nvPr/>
+        </p:nvSpPr>
+        <p:spPr>
+          <a:xfrm>
+            <a:off x="1481328" y="3529584"/>
+            <a:ext cx="3611880" cy="960120"/>
+          </a:xfrm>
+          <a:prstGeom prst="rect">
+            <a:avLst/>
+          </a:prstGeom>
+          <a:noFill/>
+        </p:spPr>
+        <p:txBody>
+          <a:bodyPr wrap="square" lIns="0" rIns="0" tIns="0" bIns="0">
+            <a:spAutoFit/>
+          </a:bodyPr>
+          <a:lstStyle/>
+          <a:p>
+            <a:pPr algn="l">
+              <a:lnSpc>
+                <a:spcPct val="100000"/>
+              </a:lnSpc>
+              <a:spcAft>
+                <a:spcPts val="500"/>
+              </a:spcAft>
+            </a:pPr>
+            <a:r>
+              <a:rPr sz="1450" b="1" i="0">
+                <a:solidFill>
+                  <a:srgbClr val="191F28"/>
+                </a:solidFill>
+                <a:latin typeface="Noto Serif KR"/>
+                <a:ea typeface="Noto Serif KR"/>
+              </a:rPr>
+              <a:t>프리캔버스에서 작업하다가</a:t>
+            </a:r>
+          </a:p>
+          <a:p>
+            <a:pPr algn="l">
+              <a:lnSpc>
+                <a:spcPct val="130000"/>
+              </a:lnSpc>
+            </a:pPr>
+            <a:r>
+              <a:rPr sz="1100" b="0" i="0">
+                <a:solidFill>
+                  <a:srgbClr val="2B333D"/>
+                </a:solidFill>
+                <a:latin typeface="Pretendard"/>
+                <a:ea typeface="Pretendard"/>
+              </a:rPr>
+              <a:t>상세페이지를 만들다 상품명이나 키워드가 필요해지면,</a:t>
+            </a:r>
+          </a:p>
+        </p:txBody>
+      </p:sp>
+      <p:sp>
+        <p:nvSpPr>
+          <p:cNvPr id="12" name="TextBox 11"/>
+          <p:cNvSpPr txBox="1"/>
+          <p:nvPr/>
+        </p:nvSpPr>
+        <p:spPr>
+          <a:xfrm>
+            <a:off x="5577840" y="3566160"/>
+            <a:ext cx="1051560" cy="868680"/>
+          </a:xfrm>
+          <a:prstGeom prst="rect">
+            <a:avLst/>
+          </a:prstGeom>
+          <a:noFill/>
+        </p:spPr>
+        <p:txBody>
+          <a:bodyPr wrap="square" lIns="0" rIns="0" tIns="0" bIns="0">
+            <a:spAutoFit/>
+          </a:bodyPr>
+          <a:lstStyle/>
+          <a:p>
+            <a:pPr algn="ctr">
+              <a:lnSpc>
+                <a:spcPct val="100000"/>
+              </a:lnSpc>
+              <a:spcAft>
+                <a:spcPts val="300"/>
+              </a:spcAft>
+            </a:pPr>
+            <a:r>
+              <a:rPr sz="2400" b="1" i="0">
+                <a:solidFill>
+                  <a:srgbClr val="0F4E53"/>
+                </a:solidFill>
+                <a:latin typeface="Pretendard"/>
+                <a:ea typeface="Pretendard"/>
+              </a:rPr>
+              <a:t>→</a:t>
+            </a:r>
+          </a:p>
+          <a:p>
+            <a:pPr algn="ctr">
+              <a:lnSpc>
+                <a:spcPct val="100000"/>
+              </a:lnSpc>
+            </a:pPr>
+            <a:r>
+              <a:rPr sz="950" b="0" i="0">
+                <a:solidFill>
+                  <a:srgbClr val="0B3B3F"/>
+                </a:solidFill>
+                <a:latin typeface="Pretendard ExtraBold"/>
+                <a:ea typeface="Pretendard ExtraBold"/>
+              </a:rPr>
+              <a:t>버튼 한 번</a:t>
+            </a:r>
+          </a:p>
+        </p:txBody>
+      </p:sp>
+      <p:sp>
+        <p:nvSpPr>
+          <p:cNvPr id="13" name="Rounded Rectangle 12"/>
+          <p:cNvSpPr/>
+          <p:nvPr/>
+        </p:nvSpPr>
+        <p:spPr>
+          <a:xfrm>
+            <a:off x="6812280" y="3291840"/>
+            <a:ext cx="4206240" cy="1371600"/>
+          </a:xfrm>
+          <a:prstGeom prst="roundRect">
+            <a:avLst>
+              <a:gd name="adj" fmla="val 10000"/>
+            </a:avLst>
+          </a:prstGeom>
+          <a:solidFill>
+            <a:srgbClr val="F2F6F5"/>
+          </a:solidFill>
+          <a:ln w="9525">
+            <a:solidFill>
+              <a:srgbClr val="CFDEDC"/>
+            </a:solidFill>
+          </a:ln>
+          <a:effectLst/>
+          <a:effectLst>
+            <a:outerShdw blurRad="170000" dist="50000" dir="5400000" rotWithShape="0">
+              <a:srgbClr val="16241C">
+                <a:alpha val="30000"/>
+              </a:srgbClr>
+            </a:outerShdw>
+          </a:effectLst>
+        </p:spPr>
+        <p:style>
+          <a:lnRef idx="1">
+            <a:schemeClr val="accent1"/>
+          </a:lnRef>
+          <a:fillRef idx="3">
+            <a:schemeClr val="accent1"/>
+          </a:fillRef>
+          <a:effectRef idx="2">
+            <a:schemeClr val="accent1"/>
+          </a:effectRef>
+          <a:fontRef idx="minor">
+            <a:schemeClr val="lt1"/>
+          </a:fontRef>
+        </p:style>
+        <p:txBody>
+          <a:bodyPr rtlCol="0" anchor="ctr"/>
+          <a:lstStyle/>
+          <a:p>
+            <a:pPr algn="ctr"/>
+          </a:p>
+        </p:txBody>
+      </p:sp>
+      <p:sp>
+        <p:nvSpPr>
+          <p:cNvPr id="14" name="TextBox 13"/>
+          <p:cNvSpPr txBox="1"/>
+          <p:nvPr/>
+        </p:nvSpPr>
+        <p:spPr>
+          <a:xfrm>
+            <a:off x="7104888" y="3529584"/>
+            <a:ext cx="3611880" cy="960120"/>
+          </a:xfrm>
+          <a:prstGeom prst="rect">
+            <a:avLst/>
+          </a:prstGeom>
+          <a:noFill/>
+        </p:spPr>
+        <p:txBody>
+          <a:bodyPr wrap="square" lIns="0" rIns="0" tIns="0" bIns="0">
+            <a:spAutoFit/>
+          </a:bodyPr>
+          <a:lstStyle/>
+          <a:p>
+            <a:pPr algn="l">
+              <a:lnSpc>
+                <a:spcPct val="100000"/>
+              </a:lnSpc>
+              <a:spcAft>
+                <a:spcPts val="500"/>
+              </a:spcAft>
+            </a:pPr>
+            <a:r>
+              <a:rPr sz="1450" b="1" i="0">
+                <a:solidFill>
+                  <a:srgbClr val="191F28"/>
+                </a:solidFill>
+                <a:latin typeface="Noto Serif KR"/>
+                <a:ea typeface="Noto Serif KR"/>
+              </a:rPr>
+              <a:t>검색마스터가 새 탭으로</a:t>
+            </a:r>
+          </a:p>
+          <a:p>
+            <a:pPr algn="l">
+              <a:lnSpc>
+                <a:spcPct val="130000"/>
+              </a:lnSpc>
+            </a:pPr>
+            <a:r>
+              <a:rPr sz="1100" b="0" i="0">
+                <a:solidFill>
+                  <a:srgbClr val="2B333D"/>
+                </a:solidFill>
+                <a:latin typeface="Pretendard"/>
+                <a:ea typeface="Pretendard"/>
+              </a:rPr>
+              <a:t>쓰던 구글 계정 그대로 열립니다. 다시 로그인할 필요가 없습니다.</a:t>
+            </a:r>
+          </a:p>
+        </p:txBody>
+      </p:sp>
+      <p:sp>
+        <p:nvSpPr>
+          <p:cNvPr id="15" name="Rounded Rectangle 14"/>
+          <p:cNvSpPr/>
+          <p:nvPr/>
+        </p:nvSpPr>
+        <p:spPr>
+          <a:xfrm>
+            <a:off x="3063240" y="5230368"/>
+            <a:ext cx="1691640" cy="384048"/>
+          </a:xfrm>
+          <a:prstGeom prst="roundRect">
+            <a:avLst>
+              <a:gd name="adj" fmla="val 50000"/>
+            </a:avLst>
+          </a:prstGeom>
+          <a:solidFill>
+            <a:srgbClr val="FFFFFF"/>
+          </a:solidFill>
+          <a:ln w="9525">
+            <a:solidFill>
+              <a:srgbClr val="D9D3C5"/>
+            </a:solidFill>
+          </a:ln>
+          <a:effectLst/>
+        </p:spPr>
+        <p:style>
+          <a:lnRef idx="1">
+            <a:schemeClr val="accent1"/>
+          </a:lnRef>
+          <a:fillRef idx="3">
+            <a:schemeClr val="accent1"/>
+          </a:fillRef>
+          <a:effectRef idx="2">
+            <a:schemeClr val="accent1"/>
+          </a:effectRef>
+          <a:fontRef idx="minor">
+            <a:schemeClr val="lt1"/>
+          </a:fontRef>
+        </p:style>
+        <p:txBody>
+          <a:bodyPr rtlCol="0" anchor="ctr" wrap="none" lIns="0" rIns="0" tIns="0" bIns="0"/>
+          <a:lstStyle/>
+          <a:p>
+            <a:pPr algn="ctr">
+              <a:lnSpc>
+                <a:spcPct val="100000"/>
+              </a:lnSpc>
+            </a:pPr>
+            <a:r>
+              <a:rPr sz="1050" b="0" i="0">
+                <a:solidFill>
+                  <a:srgbClr val="191F28"/>
+                </a:solidFill>
+                <a:latin typeface="Pretendard SemiBold"/>
+                <a:ea typeface="Pretendard SemiBold"/>
+              </a:rPr>
+              <a:t>● 하나의 구글 계정</a:t>
+            </a:r>
+          </a:p>
+        </p:txBody>
+      </p:sp>
+      <p:sp>
+        <p:nvSpPr>
+          <p:cNvPr id="16" name="TextBox 15"/>
+          <p:cNvSpPr txBox="1"/>
+          <p:nvPr/>
+        </p:nvSpPr>
+        <p:spPr>
+          <a:xfrm>
+            <a:off x="4864608" y="5330952"/>
+            <a:ext cx="5120640" cy="274320"/>
+          </a:xfrm>
+          <a:prstGeom prst="rect">
+            <a:avLst/>
+          </a:prstGeom>
+          <a:noFill/>
+        </p:spPr>
+        <p:txBody>
+          <a:bodyPr wrap="square" lIns="0" rIns="0" tIns="0" bIns="0">
+            <a:spAutoFit/>
+          </a:bodyPr>
+          <a:lstStyle/>
+          <a:p>
+            <a:pPr algn="l">
+              <a:lnSpc>
+                <a:spcPct val="100000"/>
+              </a:lnSpc>
+            </a:pPr>
+            <a:r>
+              <a:rPr sz="1050" b="0" i="0">
+                <a:solidFill>
+                  <a:srgbClr val="4E5964"/>
+                </a:solidFill>
+                <a:latin typeface="Pretendard"/>
+                <a:ea typeface="Pretendard"/>
+              </a:rPr>
+              <a:t>으로 두 서비스를 오갑니다. 구독은 서비스별로 따로 적용됩니다.</a:t>
+            </a:r>
+          </a:p>
+        </p:txBody>
+      </p:sp>
+      <p:sp>
+        <p:nvSpPr>
+          <p:cNvPr id="17" name="Rounded Rectangle 16"/>
           <p:cNvSpPr/>
           <p:nvPr/>
         </p:nvSpPr>
@@ -11436,7 +11378,7 @@
                 <a:latin typeface="Pretendard ExtraBold"/>
                 <a:ea typeface="Pretendard ExtraBold"/>
               </a:rPr>
-              <a:t>프리캔버스 새 기능 ①</a:t>
+              <a:t>검색마스터 새 기능</a:t>
             </a:r>
           </a:p>
         </p:txBody>
@@ -11476,7 +11418,7 @@
                 <a:latin typeface="Noto Serif KR"/>
                 <a:ea typeface="Noto Serif KR"/>
               </a:rPr>
-              <a:t>상품 링크로 빠른 시작</a:t>
+              <a:t>상품 설명 입력</a:t>
             </a:r>
           </a:p>
           <a:p>
@@ -11496,7 +11438,7 @@
                 <a:latin typeface="Pretendard"/>
                 <a:ea typeface="Pretendard"/>
               </a:rPr>
-              <a:t>소싱한 상품의 주소만 붙여넣으면, 이미지와 상품 정보가 자동으로 담깁니다.</a:t>
+              <a:t>사진과 함께 상품 설명을 입력하면, 상품명이 눈에 띄게 정확해집니다.</a:t>
             </a:r>
           </a:p>
         </p:txBody>
@@ -11536,7 +11478,7 @@
                 <a:latin typeface="Pretendard"/>
                 <a:ea typeface="Pretendard"/>
               </a:rPr>
-              <a:t>🔗</a:t>
+              <a:t>✏️</a:t>
             </a:r>
           </a:p>
         </p:txBody>
@@ -11579,7 +11521,7 @@
                 <a:latin typeface="Pretendard ExtraBold"/>
                 <a:ea typeface="Pretendard ExtraBold"/>
               </a:rPr>
-              <a:t>스마트스토어·1688 링크 불러오기</a:t>
+              <a:t>실제 상품·용도 설명 입력</a:t>
             </a:r>
           </a:p>
           <a:p>
@@ -11596,7 +11538,7 @@
                 <a:latin typeface="Pretendard"/>
                 <a:ea typeface="Pretendard"/>
               </a:rPr>
-              <a:t>상품 주소를 붙여넣으면 새 창이 열려 상세 내용과 이미지를 가져옵니다. 최근 업데이트로 속도가 눈에 띄게 빨라졌습니다.</a:t>
+              <a:t>“책상 위에 놓는 무선 충전 겸용 스탠드”처럼 한 줄만 적으면, 사진만으로는 놓치기 쉬운 재질과 용도까지 상품명에 담깁니다.</a:t>
             </a:r>
           </a:p>
         </p:txBody>
@@ -11680,7 +11622,7 @@
                 <a:latin typeface="Pretendard"/>
                 <a:ea typeface="Pretendard"/>
               </a:rPr>
-              <a:t>🤖</a:t>
+              <a:t>🛍️</a:t>
             </a:r>
           </a:p>
         </p:txBody>
@@ -11723,7 +11665,7 @@
                 <a:latin typeface="Pretendard ExtraBold"/>
                 <a:ea typeface="Pretendard ExtraBold"/>
               </a:rPr>
-              <a:t>상품 아닌 이미지는 AI가 거릅니다</a:t>
+              <a:t>판매 채널별 상품명</a:t>
             </a:r>
           </a:p>
           <a:p>
@@ -11740,7 +11682,7 @@
                 <a:latin typeface="Pretendard"/>
                 <a:ea typeface="Pretendard"/>
               </a:rPr>
-              <a:t>공지·구매평·할인 배너처럼 상세에 못 쓰는 이미지를 알아서 빼고, 중국어 문구도 한국어 기준으로 정리합니다.</a:t>
+              <a:t>네이버쇼핑은 검색 노출 폭, 쿠팡은 구매 판단 키워드, 일반몰은 가독성 — 채널을 고르면 그에 맞춰 짓습니다.</a:t>
             </a:r>
           </a:p>
         </p:txBody>
@@ -11824,7 +11766,7 @@
                 <a:latin typeface="Pretendard"/>
                 <a:ea typeface="Pretendard"/>
               </a:rPr>
-              <a:t>🧩</a:t>
+              <a:t>⚡</a:t>
             </a:r>
           </a:p>
         </p:txBody>
@@ -11867,7 +11809,7 @@
                 <a:latin typeface="Pretendard ExtraBold"/>
                 <a:ea typeface="Pretendard ExtraBold"/>
               </a:rPr>
-              <a:t>확장 프로그램은 한 번만 설치</a:t>
+              <a:t>업로드·생성 화면 개선</a:t>
             </a:r>
           </a:p>
           <a:p>
@@ -11884,14 +11826,14 @@
                 <a:latin typeface="Pretendard"/>
                 <a:ea typeface="Pretendard"/>
               </a:rPr>
-              <a:t>웹스토어 버튼과 설치 안내가 화면 안에 있습니다. 처음 한 번만 설치하면 다음부터는 붙여넣기만 하면 됩니다.</a:t>
+              <a:t>사진을 올리면 바로 보이고, 생성 진행 상태도 화면에 그대로 표시됩니다.</a:t>
             </a:r>
           </a:p>
         </p:txBody>
       </p:sp>
       <p:pic>
         <p:nvPicPr>
-          <p:cNvPr id="15" name="Picture 14" descr="fc_link.jpg"/>
+          <p:cNvPr id="15" name="Picture 14" descr="sm_result.jpg"/>
           <p:cNvPicPr>
             <a:picLocks noChangeAspect="1"/>
           </p:cNvPicPr>
@@ -11905,8 +11847,8 @@
         </p:blipFill>
         <p:spPr>
           <a:xfrm>
-            <a:off x="6263640" y="1783080"/>
-            <a:ext cx="4892040" cy="2690622"/>
+            <a:off x="6263640" y="1097280"/>
+            <a:ext cx="3931920" cy="3402623"/>
           </a:xfrm>
           <a:prstGeom prst="rect">
             <a:avLst/>
@@ -11934,8 +11876,8 @@
         </p:nvSpPr>
         <p:spPr>
           <a:xfrm>
-            <a:off x="5989320" y="4583430"/>
-            <a:ext cx="5440679" cy="256032"/>
+            <a:off x="5989320" y="4609631"/>
+            <a:ext cx="4480559" cy="256032"/>
           </a:xfrm>
           <a:prstGeom prst="rect">
             <a:avLst/>
@@ -11961,14 +11903,91 @@
                 <a:latin typeface="Pretendard"/>
                 <a:ea typeface="Pretendard"/>
               </a:rPr>
-              <a:t>링크마다 “불러오기” 버튼 하나 — 가격·비상품 이미지는 자동으로 걸러집니다</a:t>
-            </a:r>
-          </a:p>
-        </p:txBody>
-      </p:sp>
-      <p:sp>
-        <p:nvSpPr>
-          <p:cNvPr id="17" name="Rounded Rectangle 16"/>
+              <a:t>사진 한 장으로 최종 제목과 AI 모델별 후보까지 — 실제 결과</a:t>
+            </a:r>
+          </a:p>
+        </p:txBody>
+      </p:sp>
+      <p:pic>
+        <p:nvPicPr>
+          <p:cNvPr id="17" name="Picture 16" descr="sm_recent.jpg"/>
+          <p:cNvPicPr>
+            <a:picLocks noChangeAspect="1"/>
+          </p:cNvPicPr>
+          <p:nvPr/>
+        </p:nvPicPr>
+        <p:blipFill>
+          <a:blip r:embed="rId3"/>
+          <a:stretch>
+            <a:fillRect/>
+          </a:stretch>
+        </p:blipFill>
+        <p:spPr>
+          <a:xfrm>
+            <a:off x="6263640" y="4957103"/>
+            <a:ext cx="3931920" cy="325039"/>
+          </a:xfrm>
+          <a:prstGeom prst="rect">
+            <a:avLst/>
+          </a:prstGeom>
+          <a:ln w="12700">
+            <a:solidFill>
+              <a:srgbClr val="EAE5D8"/>
+            </a:solidFill>
+          </a:ln>
+          <a:effectLst/>
+          <a:effectLst>
+            <a:outerShdw blurRad="170000" dist="50000" dir="5400000" rotWithShape="0">
+              <a:srgbClr val="16241C">
+                <a:alpha val="30000"/>
+              </a:srgbClr>
+            </a:outerShdw>
+          </a:effectLst>
+        </p:spPr>
+      </p:pic>
+      <p:sp>
+        <p:nvSpPr>
+          <p:cNvPr id="18" name="TextBox 17"/>
+          <p:cNvSpPr txBox="1"/>
+          <p:nvPr/>
+        </p:nvSpPr>
+        <p:spPr>
+          <a:xfrm>
+            <a:off x="5989320" y="5507702"/>
+            <a:ext cx="4480559" cy="256032"/>
+          </a:xfrm>
+          <a:prstGeom prst="rect">
+            <a:avLst/>
+          </a:prstGeom>
+          <a:noFill/>
+        </p:spPr>
+        <p:txBody>
+          <a:bodyPr wrap="square" lIns="0" rIns="0" tIns="0" bIns="0">
+            <a:spAutoFit/>
+          </a:bodyPr>
+          <a:lstStyle/>
+          <a:p>
+            <a:pPr algn="ctr">
+              <a:lnSpc>
+                <a:spcPct val="100000"/>
+              </a:lnSpc>
+            </a:pPr>
+            <a:r>
+              <a:rPr sz="900" b="0" i="0">
+                <a:solidFill>
+                  <a:srgbClr val="4E5964"/>
+                </a:solidFill>
+                <a:latin typeface="Pretendard"/>
+                <a:ea typeface="Pretendard"/>
+              </a:rPr>
+              <a:t>실제 생성 결과 — 복사해서 바로 씁니다</a:t>
+            </a:r>
+          </a:p>
+        </p:txBody>
+      </p:sp>
+      <p:sp>
+        <p:nvSpPr>
+          <p:cNvPr id="19" name="Rounded Rectangle 18"/>
           <p:cNvSpPr/>
           <p:nvPr/>
         </p:nvSpPr>
@@ -12213,7 +12232,7 @@
                 <a:latin typeface="Pretendard ExtraBold"/>
                 <a:ea typeface="Pretendard ExtraBold"/>
               </a:rPr>
-              <a:t>프리캔버스 새 기능 ②</a:t>
+              <a:t>프리캔버스 첫 화면</a:t>
             </a:r>
           </a:p>
         </p:txBody>
@@ -12226,8 +12245,8 @@
         </p:nvSpPr>
         <p:spPr>
           <a:xfrm>
-            <a:off x="822960" y="1234440"/>
-            <a:ext cx="4937760" cy="1280160"/>
+            <a:off x="822960" y="932688"/>
+            <a:ext cx="10515600" cy="566928"/>
           </a:xfrm>
           <a:prstGeom prst="rect">
             <a:avLst/>
@@ -12242,433 +12261,25 @@
           <a:p>
             <a:pPr algn="l">
               <a:lnSpc>
-                <a:spcPct val="130000"/>
-              </a:lnSpc>
-            </a:pPr>
-            <a:r>
-              <a:rPr sz="2400" b="1" i="0">
+                <a:spcPct val="100000"/>
+              </a:lnSpc>
+            </a:pPr>
+            <a:r>
+              <a:rPr sz="2300" b="1" i="0">
                 <a:solidFill>
                   <a:srgbClr val="191F28"/>
                 </a:solidFill>
                 <a:latin typeface="Noto Serif KR"/>
                 <a:ea typeface="Noto Serif KR"/>
               </a:rPr>
-              <a:t>1688 영상 번역</a:t>
-            </a:r>
-          </a:p>
-          <a:p>
-            <a:pPr algn="l">
-              <a:lnSpc>
-                <a:spcPct val="140000"/>
-              </a:lnSpc>
-              <a:spcBef>
-                <a:spcPts val="800"/>
-              </a:spcBef>
-            </a:pPr>
-            <a:r>
-              <a:rPr sz="1200" b="0" i="0">
-                <a:solidFill>
-                  <a:srgbClr val="4E5964"/>
-                </a:solidFill>
-                <a:latin typeface="Pretendard"/>
-                <a:ea typeface="Pretendard"/>
-              </a:rPr>
-              <a:t>중국어 상품 영상을 쇼츠형 한국어 영상으로 바꿔 줍니다.</a:t>
-            </a:r>
-          </a:p>
-        </p:txBody>
-      </p:sp>
-      <p:sp>
-        <p:nvSpPr>
-          <p:cNvPr id="7" name="TextBox 6"/>
-          <p:cNvSpPr txBox="1"/>
-          <p:nvPr/>
-        </p:nvSpPr>
-        <p:spPr>
-          <a:xfrm>
-            <a:off x="822960" y="2743200"/>
-            <a:ext cx="502920" cy="457200"/>
-          </a:xfrm>
-          <a:prstGeom prst="rect">
-            <a:avLst/>
-          </a:prstGeom>
-          <a:noFill/>
-        </p:spPr>
-        <p:txBody>
-          <a:bodyPr wrap="square" lIns="0" rIns="0" tIns="0" bIns="0">
-            <a:spAutoFit/>
-          </a:bodyPr>
-          <a:lstStyle/>
-          <a:p>
-            <a:pPr algn="ctr">
-              <a:lnSpc>
-                <a:spcPct val="100000"/>
-              </a:lnSpc>
-            </a:pPr>
-            <a:r>
-              <a:rPr sz="1600" b="0" i="0">
-                <a:solidFill>
-                  <a:srgbClr val="191F28"/>
-                </a:solidFill>
-                <a:latin typeface="Pretendard"/>
-                <a:ea typeface="Pretendard"/>
-              </a:rPr>
-              <a:t>🎬</a:t>
-            </a:r>
-          </a:p>
-        </p:txBody>
-      </p:sp>
-      <p:sp>
-        <p:nvSpPr>
-          <p:cNvPr id="8" name="TextBox 7"/>
-          <p:cNvSpPr txBox="1"/>
-          <p:nvPr/>
-        </p:nvSpPr>
-        <p:spPr>
-          <a:xfrm>
-            <a:off x="1389888" y="2734056"/>
-            <a:ext cx="4297680" cy="960120"/>
-          </a:xfrm>
-          <a:prstGeom prst="rect">
-            <a:avLst/>
-          </a:prstGeom>
-          <a:noFill/>
-        </p:spPr>
-        <p:txBody>
-          <a:bodyPr wrap="square" lIns="0" rIns="0" tIns="0" bIns="0">
-            <a:spAutoFit/>
-          </a:bodyPr>
-          <a:lstStyle/>
-          <a:p>
-            <a:pPr algn="l">
-              <a:lnSpc>
-                <a:spcPct val="100000"/>
-              </a:lnSpc>
-              <a:spcAft>
-                <a:spcPts val="300"/>
-              </a:spcAft>
-            </a:pPr>
-            <a:r>
-              <a:rPr sz="1200" b="0" i="0">
-                <a:solidFill>
-                  <a:srgbClr val="191F28"/>
-                </a:solidFill>
-                <a:latin typeface="Pretendard ExtraBold"/>
-                <a:ea typeface="Pretendard ExtraBold"/>
-              </a:rPr>
-              <a:t>자막을 자연스러운 한국어로</a:t>
-            </a:r>
-          </a:p>
-          <a:p>
-            <a:pPr algn="l">
-              <a:lnSpc>
-                <a:spcPct val="128000"/>
-              </a:lnSpc>
-            </a:pPr>
-            <a:r>
-              <a:rPr sz="1050" b="0" i="0">
-                <a:solidFill>
-                  <a:srgbClr val="4E5964"/>
-                </a:solidFill>
-                <a:latin typeface="Pretendard"/>
-                <a:ea typeface="Pretendard"/>
-              </a:rPr>
-              <a:t>중국어 문구를 지우고, AI가 대본을 한국어답게 다듬은 자막을 입힙니다. 번역투가 아니라 읽히는 문장입니다.</a:t>
-            </a:r>
-          </a:p>
-        </p:txBody>
-      </p:sp>
-      <p:sp>
-        <p:nvSpPr>
-          <p:cNvPr id="9" name="Rectangle 8"/>
-          <p:cNvSpPr/>
-          <p:nvPr/>
-        </p:nvSpPr>
-        <p:spPr>
-          <a:xfrm>
-            <a:off x="822960" y="3739896"/>
-            <a:ext cx="4846320" cy="10972"/>
-          </a:xfrm>
-          <a:prstGeom prst="rect">
-            <a:avLst/>
-          </a:prstGeom>
-          <a:solidFill>
-            <a:srgbClr val="EAE5D8"/>
-          </a:solidFill>
-          <a:ln>
-            <a:noFill/>
-          </a:ln>
-          <a:effectLst/>
-        </p:spPr>
-        <p:style>
-          <a:lnRef idx="1">
-            <a:schemeClr val="accent1"/>
-          </a:lnRef>
-          <a:fillRef idx="3">
-            <a:schemeClr val="accent1"/>
-          </a:fillRef>
-          <a:effectRef idx="2">
-            <a:schemeClr val="accent1"/>
-          </a:effectRef>
-          <a:fontRef idx="minor">
-            <a:schemeClr val="lt1"/>
-          </a:fontRef>
-        </p:style>
-        <p:txBody>
-          <a:bodyPr rtlCol="0" anchor="ctr"/>
-          <a:lstStyle/>
-          <a:p>
-            <a:pPr algn="ctr"/>
-          </a:p>
-        </p:txBody>
-      </p:sp>
-      <p:sp>
-        <p:nvSpPr>
-          <p:cNvPr id="10" name="TextBox 9"/>
-          <p:cNvSpPr txBox="1"/>
-          <p:nvPr/>
-        </p:nvSpPr>
-        <p:spPr>
-          <a:xfrm>
-            <a:off x="822960" y="3822191"/>
-            <a:ext cx="502920" cy="457200"/>
-          </a:xfrm>
-          <a:prstGeom prst="rect">
-            <a:avLst/>
-          </a:prstGeom>
-          <a:noFill/>
-        </p:spPr>
-        <p:txBody>
-          <a:bodyPr wrap="square" lIns="0" rIns="0" tIns="0" bIns="0">
-            <a:spAutoFit/>
-          </a:bodyPr>
-          <a:lstStyle/>
-          <a:p>
-            <a:pPr algn="ctr">
-              <a:lnSpc>
-                <a:spcPct val="100000"/>
-              </a:lnSpc>
-            </a:pPr>
-            <a:r>
-              <a:rPr sz="1600" b="0" i="0">
-                <a:solidFill>
-                  <a:srgbClr val="191F28"/>
-                </a:solidFill>
-                <a:latin typeface="Pretendard"/>
-                <a:ea typeface="Pretendard"/>
-              </a:rPr>
-              <a:t>🔊</a:t>
-            </a:r>
-          </a:p>
-        </p:txBody>
-      </p:sp>
-      <p:sp>
-        <p:nvSpPr>
-          <p:cNvPr id="11" name="TextBox 10"/>
-          <p:cNvSpPr txBox="1"/>
-          <p:nvPr/>
-        </p:nvSpPr>
-        <p:spPr>
-          <a:xfrm>
-            <a:off x="1389888" y="3813048"/>
-            <a:ext cx="4297680" cy="960120"/>
-          </a:xfrm>
-          <a:prstGeom prst="rect">
-            <a:avLst/>
-          </a:prstGeom>
-          <a:noFill/>
-        </p:spPr>
-        <p:txBody>
-          <a:bodyPr wrap="square" lIns="0" rIns="0" tIns="0" bIns="0">
-            <a:spAutoFit/>
-          </a:bodyPr>
-          <a:lstStyle/>
-          <a:p>
-            <a:pPr algn="l">
-              <a:lnSpc>
-                <a:spcPct val="100000"/>
-              </a:lnSpc>
-              <a:spcAft>
-                <a:spcPts val="300"/>
-              </a:spcAft>
-            </a:pPr>
-            <a:r>
-              <a:rPr sz="1200" b="0" i="0">
-                <a:solidFill>
-                  <a:srgbClr val="191F28"/>
-                </a:solidFill>
-                <a:latin typeface="Pretendard ExtraBold"/>
-                <a:ea typeface="Pretendard ExtraBold"/>
-              </a:rPr>
-              <a:t>한국어 더빙, 원하면 음소거</a:t>
-            </a:r>
-          </a:p>
-          <a:p>
-            <a:pPr algn="l">
-              <a:lnSpc>
-                <a:spcPct val="128000"/>
-              </a:lnSpc>
-            </a:pPr>
-            <a:r>
-              <a:rPr sz="1050" b="0" i="0">
-                <a:solidFill>
-                  <a:srgbClr val="4E5964"/>
-                </a:solidFill>
-                <a:latin typeface="Pretendard"/>
-                <a:ea typeface="Pretendard"/>
-              </a:rPr>
-              <a:t>자막에 맞춰 한국어 음성을 입히고, 음성 없이 자막만 남기는 선택도 됩니다.</a:t>
-            </a:r>
-          </a:p>
-        </p:txBody>
-      </p:sp>
-      <p:sp>
-        <p:nvSpPr>
-          <p:cNvPr id="12" name="Rectangle 11"/>
-          <p:cNvSpPr/>
-          <p:nvPr/>
-        </p:nvSpPr>
-        <p:spPr>
-          <a:xfrm>
-            <a:off x="822960" y="4818888"/>
-            <a:ext cx="4846320" cy="10972"/>
-          </a:xfrm>
-          <a:prstGeom prst="rect">
-            <a:avLst/>
-          </a:prstGeom>
-          <a:solidFill>
-            <a:srgbClr val="EAE5D8"/>
-          </a:solidFill>
-          <a:ln>
-            <a:noFill/>
-          </a:ln>
-          <a:effectLst/>
-        </p:spPr>
-        <p:style>
-          <a:lnRef idx="1">
-            <a:schemeClr val="accent1"/>
-          </a:lnRef>
-          <a:fillRef idx="3">
-            <a:schemeClr val="accent1"/>
-          </a:fillRef>
-          <a:effectRef idx="2">
-            <a:schemeClr val="accent1"/>
-          </a:effectRef>
-          <a:fontRef idx="minor">
-            <a:schemeClr val="lt1"/>
-          </a:fontRef>
-        </p:style>
-        <p:txBody>
-          <a:bodyPr rtlCol="0" anchor="ctr"/>
-          <a:lstStyle/>
-          <a:p>
-            <a:pPr algn="ctr"/>
-          </a:p>
-        </p:txBody>
-      </p:sp>
-      <p:sp>
-        <p:nvSpPr>
-          <p:cNvPr id="13" name="TextBox 12"/>
-          <p:cNvSpPr txBox="1"/>
-          <p:nvPr/>
-        </p:nvSpPr>
-        <p:spPr>
-          <a:xfrm>
-            <a:off x="822960" y="4901183"/>
-            <a:ext cx="502920" cy="457200"/>
-          </a:xfrm>
-          <a:prstGeom prst="rect">
-            <a:avLst/>
-          </a:prstGeom>
-          <a:noFill/>
-        </p:spPr>
-        <p:txBody>
-          <a:bodyPr wrap="square" lIns="0" rIns="0" tIns="0" bIns="0">
-            <a:spAutoFit/>
-          </a:bodyPr>
-          <a:lstStyle/>
-          <a:p>
-            <a:pPr algn="ctr">
-              <a:lnSpc>
-                <a:spcPct val="100000"/>
-              </a:lnSpc>
-            </a:pPr>
-            <a:r>
-              <a:rPr sz="1600" b="0" i="0">
-                <a:solidFill>
-                  <a:srgbClr val="191F28"/>
-                </a:solidFill>
-                <a:latin typeface="Pretendard"/>
-                <a:ea typeface="Pretendard"/>
-              </a:rPr>
-              <a:t>📱</a:t>
-            </a:r>
-          </a:p>
-        </p:txBody>
-      </p:sp>
-      <p:sp>
-        <p:nvSpPr>
-          <p:cNvPr id="14" name="TextBox 13"/>
-          <p:cNvSpPr txBox="1"/>
-          <p:nvPr/>
-        </p:nvSpPr>
-        <p:spPr>
-          <a:xfrm>
-            <a:off x="1389888" y="4892040"/>
-            <a:ext cx="4297680" cy="960120"/>
-          </a:xfrm>
-          <a:prstGeom prst="rect">
-            <a:avLst/>
-          </a:prstGeom>
-          <a:noFill/>
-        </p:spPr>
-        <p:txBody>
-          <a:bodyPr wrap="square" lIns="0" rIns="0" tIns="0" bIns="0">
-            <a:spAutoFit/>
-          </a:bodyPr>
-          <a:lstStyle/>
-          <a:p>
-            <a:pPr algn="l">
-              <a:lnSpc>
-                <a:spcPct val="100000"/>
-              </a:lnSpc>
-              <a:spcAft>
-                <a:spcPts val="300"/>
-              </a:spcAft>
-            </a:pPr>
-            <a:r>
-              <a:rPr sz="1200" b="0" i="0">
-                <a:solidFill>
-                  <a:srgbClr val="191F28"/>
-                </a:solidFill>
-                <a:latin typeface="Pretendard ExtraBold"/>
-                <a:ea typeface="Pretendard ExtraBold"/>
-              </a:rPr>
-              <a:t>쇼츠 템플릿으로 저장</a:t>
-            </a:r>
-          </a:p>
-          <a:p>
-            <a:pPr algn="l">
-              <a:lnSpc>
-                <a:spcPct val="128000"/>
-              </a:lnSpc>
-            </a:pPr>
-            <a:r>
-              <a:rPr sz="1050" b="0" i="0">
-                <a:solidFill>
-                  <a:srgbClr val="4E5964"/>
-                </a:solidFill>
-                <a:latin typeface="Pretendard"/>
-                <a:ea typeface="Pretendard"/>
-              </a:rPr>
-              <a:t>쇼츠 헤드라인 템플릿이 입혀진 9:16 MP4로 저장되고, SRT·VTT 자막 파일도 함께 나옵니다.</a:t>
+              <a:t>세 가지 작업 중에 골라 시작합니다.</a:t>
             </a:r>
           </a:p>
         </p:txBody>
       </p:sp>
       <p:pic>
         <p:nvPicPr>
-          <p:cNvPr id="15" name="Picture 14" descr="v1688_list.jpg"/>
+          <p:cNvPr id="7" name="Picture 6" descr="fc_modes.jpg"/>
           <p:cNvPicPr>
             <a:picLocks noChangeAspect="1"/>
           </p:cNvPicPr>
@@ -12682,8 +12293,8 @@
         </p:blipFill>
         <p:spPr>
           <a:xfrm>
-            <a:off x="6263640" y="1965960"/>
-            <a:ext cx="5029200" cy="1954682"/>
+            <a:off x="822960" y="1600200"/>
+            <a:ext cx="10543032" cy="1286250"/>
           </a:xfrm>
           <a:prstGeom prst="rect">
             <a:avLst/>
@@ -12705,14 +12316,58 @@
       </p:pic>
       <p:sp>
         <p:nvSpPr>
-          <p:cNvPr id="16" name="TextBox 15"/>
+          <p:cNvPr id="8" name="Rectangle 7"/>
+          <p:cNvSpPr/>
+          <p:nvPr/>
+        </p:nvSpPr>
+        <p:spPr>
+          <a:xfrm>
+            <a:off x="822960" y="3206489"/>
+            <a:ext cx="29260" cy="566928"/>
+          </a:xfrm>
+          <a:prstGeom prst="rect">
+            <a:avLst/>
+          </a:prstGeom>
+          <a:solidFill>
+            <a:srgbClr val="0F4E53"/>
+          </a:solidFill>
+          <a:ln>
+            <a:noFill/>
+          </a:ln>
+          <a:effectLst/>
+        </p:spPr>
+        <p:style>
+          <a:lnRef idx="1">
+            <a:schemeClr val="accent1"/>
+          </a:lnRef>
+          <a:fillRef idx="3">
+            <a:schemeClr val="accent1"/>
+          </a:fillRef>
+          <a:effectRef idx="2">
+            <a:schemeClr val="accent1"/>
+          </a:effectRef>
+          <a:fontRef idx="minor">
+            <a:schemeClr val="lt1"/>
+          </a:fontRef>
+        </p:style>
+        <p:txBody>
+          <a:bodyPr rtlCol="0" anchor="ctr"/>
+          <a:lstStyle/>
+          <a:p>
+            <a:pPr algn="ctr"/>
+          </a:p>
+        </p:txBody>
+      </p:sp>
+      <p:sp>
+        <p:nvSpPr>
+          <p:cNvPr id="9" name="TextBox 8"/>
           <p:cNvSpPr txBox="1"/>
           <p:nvPr/>
         </p:nvSpPr>
         <p:spPr>
           <a:xfrm>
-            <a:off x="5989320" y="4030370"/>
-            <a:ext cx="5577840" cy="256032"/>
+            <a:off x="1024128" y="3179057"/>
+            <a:ext cx="5760720" cy="658368"/>
           </a:xfrm>
           <a:prstGeom prst="rect">
             <a:avLst/>
@@ -12725,27 +12380,372 @@
           </a:bodyPr>
           <a:lstStyle/>
           <a:p>
-            <a:pPr algn="ctr">
+            <a:pPr algn="l">
               <a:lnSpc>
                 <a:spcPct val="100000"/>
               </a:lnSpc>
-            </a:pPr>
-            <a:r>
-              <a:rPr sz="900" b="0" i="0">
+              <a:spcAft>
+                <a:spcPts val="200"/>
+              </a:spcAft>
+            </a:pPr>
+            <a:r>
+              <a:rPr sz="1250" b="0" i="0">
+                <a:solidFill>
+                  <a:srgbClr val="191F28"/>
+                </a:solidFill>
+                <a:latin typeface="Pretendard ExtraBold"/>
+                <a:ea typeface="Pretendard ExtraBold"/>
+              </a:rPr>
+              <a:t>새 상세페이지 만들기</a:t>
+            </a:r>
+          </a:p>
+          <a:p>
+            <a:pPr algn="l">
+              <a:lnSpc>
+                <a:spcPct val="125000"/>
+              </a:lnSpc>
+            </a:pPr>
+            <a:r>
+              <a:rPr sz="1050" b="0" i="0">
                 <a:solidFill>
                   <a:srgbClr val="4E5964"/>
                 </a:solidFill>
                 <a:latin typeface="Pretendard"/>
                 <a:ea typeface="Pretendard"/>
               </a:rPr>
-              <a:t>완료된 작업 목록 — 쇼츠 템플릿·더빙 설정이 남고, MP4·SRT·VTT로 내려받습니다</a:t>
-            </a:r>
-          </a:p>
-        </p:txBody>
-      </p:sp>
-      <p:sp>
-        <p:nvSpPr>
-          <p:cNvPr id="17" name="Rounded Rectangle 16"/>
+              <a:t>제품 사진과 정보를 넣으면 상세페이지를 처음부터 만들어 줍니다.</a:t>
+            </a:r>
+          </a:p>
+        </p:txBody>
+      </p:sp>
+      <p:sp>
+        <p:nvSpPr>
+          <p:cNvPr id="10" name="Rectangle 9"/>
+          <p:cNvSpPr/>
+          <p:nvPr/>
+        </p:nvSpPr>
+        <p:spPr>
+          <a:xfrm>
+            <a:off x="822960" y="3956297"/>
+            <a:ext cx="29260" cy="566928"/>
+          </a:xfrm>
+          <a:prstGeom prst="rect">
+            <a:avLst/>
+          </a:prstGeom>
+          <a:solidFill>
+            <a:srgbClr val="0F4E53"/>
+          </a:solidFill>
+          <a:ln>
+            <a:noFill/>
+          </a:ln>
+          <a:effectLst/>
+        </p:spPr>
+        <p:style>
+          <a:lnRef idx="1">
+            <a:schemeClr val="accent1"/>
+          </a:lnRef>
+          <a:fillRef idx="3">
+            <a:schemeClr val="accent1"/>
+          </a:fillRef>
+          <a:effectRef idx="2">
+            <a:schemeClr val="accent1"/>
+          </a:effectRef>
+          <a:fontRef idx="minor">
+            <a:schemeClr val="lt1"/>
+          </a:fontRef>
+        </p:style>
+        <p:txBody>
+          <a:bodyPr rtlCol="0" anchor="ctr"/>
+          <a:lstStyle/>
+          <a:p>
+            <a:pPr algn="ctr"/>
+          </a:p>
+        </p:txBody>
+      </p:sp>
+      <p:sp>
+        <p:nvSpPr>
+          <p:cNvPr id="11" name="TextBox 10"/>
+          <p:cNvSpPr txBox="1"/>
+          <p:nvPr/>
+        </p:nvSpPr>
+        <p:spPr>
+          <a:xfrm>
+            <a:off x="1024128" y="3928865"/>
+            <a:ext cx="5760720" cy="658368"/>
+          </a:xfrm>
+          <a:prstGeom prst="rect">
+            <a:avLst/>
+          </a:prstGeom>
+          <a:noFill/>
+        </p:spPr>
+        <p:txBody>
+          <a:bodyPr wrap="square" lIns="0" rIns="0" tIns="0" bIns="0">
+            <a:spAutoFit/>
+          </a:bodyPr>
+          <a:lstStyle/>
+          <a:p>
+            <a:pPr algn="l">
+              <a:lnSpc>
+                <a:spcPct val="100000"/>
+              </a:lnSpc>
+              <a:spcAft>
+                <a:spcPts val="200"/>
+              </a:spcAft>
+            </a:pPr>
+            <a:r>
+              <a:rPr sz="1250" b="0" i="0">
+                <a:solidFill>
+                  <a:srgbClr val="191F28"/>
+                </a:solidFill>
+                <a:latin typeface="Pretendard ExtraBold"/>
+                <a:ea typeface="Pretendard ExtraBold"/>
+              </a:rPr>
+              <a:t>기존 상세페이지 편집</a:t>
+            </a:r>
+          </a:p>
+          <a:p>
+            <a:pPr algn="l">
+              <a:lnSpc>
+                <a:spcPct val="125000"/>
+              </a:lnSpc>
+            </a:pPr>
+            <a:r>
+              <a:rPr sz="1050" b="0" i="0">
+                <a:solidFill>
+                  <a:srgbClr val="4E5964"/>
+                </a:solidFill>
+                <a:latin typeface="Pretendard"/>
+                <a:ea typeface="Pretendard"/>
+              </a:rPr>
+              <a:t>이미 있는 상세 캡처를 올려 블록 단위로 수정합니다.</a:t>
+            </a:r>
+          </a:p>
+        </p:txBody>
+      </p:sp>
+      <p:sp>
+        <p:nvSpPr>
+          <p:cNvPr id="12" name="Rectangle 11"/>
+          <p:cNvSpPr/>
+          <p:nvPr/>
+        </p:nvSpPr>
+        <p:spPr>
+          <a:xfrm>
+            <a:off x="822960" y="4706105"/>
+            <a:ext cx="29260" cy="566928"/>
+          </a:xfrm>
+          <a:prstGeom prst="rect">
+            <a:avLst/>
+          </a:prstGeom>
+          <a:solidFill>
+            <a:srgbClr val="191F28"/>
+          </a:solidFill>
+          <a:ln>
+            <a:noFill/>
+          </a:ln>
+          <a:effectLst/>
+        </p:spPr>
+        <p:style>
+          <a:lnRef idx="1">
+            <a:schemeClr val="accent1"/>
+          </a:lnRef>
+          <a:fillRef idx="3">
+            <a:schemeClr val="accent1"/>
+          </a:fillRef>
+          <a:effectRef idx="2">
+            <a:schemeClr val="accent1"/>
+          </a:effectRef>
+          <a:fontRef idx="minor">
+            <a:schemeClr val="lt1"/>
+          </a:fontRef>
+        </p:style>
+        <p:txBody>
+          <a:bodyPr rtlCol="0" anchor="ctr"/>
+          <a:lstStyle/>
+          <a:p>
+            <a:pPr algn="ctr"/>
+          </a:p>
+        </p:txBody>
+      </p:sp>
+      <p:sp>
+        <p:nvSpPr>
+          <p:cNvPr id="13" name="TextBox 12"/>
+          <p:cNvSpPr txBox="1"/>
+          <p:nvPr/>
+        </p:nvSpPr>
+        <p:spPr>
+          <a:xfrm>
+            <a:off x="1024128" y="4678673"/>
+            <a:ext cx="5760720" cy="658368"/>
+          </a:xfrm>
+          <a:prstGeom prst="rect">
+            <a:avLst/>
+          </a:prstGeom>
+          <a:noFill/>
+        </p:spPr>
+        <p:txBody>
+          <a:bodyPr wrap="square" lIns="0" rIns="0" tIns="0" bIns="0">
+            <a:spAutoFit/>
+          </a:bodyPr>
+          <a:lstStyle/>
+          <a:p>
+            <a:pPr algn="l">
+              <a:lnSpc>
+                <a:spcPct val="100000"/>
+              </a:lnSpc>
+              <a:spcAft>
+                <a:spcPts val="200"/>
+              </a:spcAft>
+            </a:pPr>
+            <a:r>
+              <a:rPr sz="1250" b="0" i="0">
+                <a:solidFill>
+                  <a:srgbClr val="191F28"/>
+                </a:solidFill>
+                <a:latin typeface="Pretendard ExtraBold"/>
+                <a:ea typeface="Pretendard ExtraBold"/>
+              </a:rPr>
+              <a:t>1688 영상 번역</a:t>
+            </a:r>
+          </a:p>
+          <a:p>
+            <a:pPr algn="l">
+              <a:lnSpc>
+                <a:spcPct val="125000"/>
+              </a:lnSpc>
+            </a:pPr>
+            <a:r>
+              <a:rPr sz="1050" b="0" i="0">
+                <a:solidFill>
+                  <a:srgbClr val="4E5964"/>
+                </a:solidFill>
+                <a:latin typeface="Pretendard"/>
+                <a:ea typeface="Pretendard"/>
+              </a:rPr>
+              <a:t>중국 상품 영상을 한국어 자막·더빙 영상으로 바꿉니다.</a:t>
+            </a:r>
+          </a:p>
+        </p:txBody>
+      </p:sp>
+      <p:sp>
+        <p:nvSpPr>
+          <p:cNvPr id="14" name="TextBox 13"/>
+          <p:cNvSpPr txBox="1"/>
+          <p:nvPr/>
+        </p:nvSpPr>
+        <p:spPr>
+          <a:xfrm>
+            <a:off x="822960" y="5483345"/>
+            <a:ext cx="5943600" cy="594360"/>
+          </a:xfrm>
+          <a:prstGeom prst="rect">
+            <a:avLst/>
+          </a:prstGeom>
+          <a:noFill/>
+        </p:spPr>
+        <p:txBody>
+          <a:bodyPr wrap="square" lIns="0" rIns="0" tIns="0" bIns="0">
+            <a:spAutoFit/>
+          </a:bodyPr>
+          <a:lstStyle/>
+          <a:p>
+            <a:pPr algn="l">
+              <a:lnSpc>
+                <a:spcPct val="135000"/>
+              </a:lnSpc>
+            </a:pPr>
+            <a:r>
+              <a:rPr sz="1100" b="0" i="0">
+                <a:solidFill>
+                  <a:srgbClr val="2B333D"/>
+                </a:solidFill>
+                <a:latin typeface="Pretendard"/>
+                <a:ea typeface="Pretendard"/>
+              </a:rPr>
+              <a:t>결과물 종류는 일반·의류·과일채소 상세페이지에 </a:t>
+            </a:r>
+            <a:r>
+              <a:rPr sz="1100" b="0" i="0">
+                <a:solidFill>
+                  <a:srgbClr val="2B333D"/>
+                </a:solidFill>
+                <a:latin typeface="Pretendard ExtraBold"/>
+                <a:ea typeface="Pretendard ExtraBold"/>
+              </a:rPr>
+              <a:t>카드뉴스</a:t>
+            </a:r>
+            <a:r>
+              <a:rPr sz="1100" b="0" i="0">
+                <a:solidFill>
+                  <a:srgbClr val="2B333D"/>
+                </a:solidFill>
+                <a:latin typeface="Pretendard"/>
+                <a:ea typeface="Pretendard"/>
+              </a:rPr>
+              <a:t>, </a:t>
+            </a:r>
+            <a:r>
+              <a:rPr sz="1100" b="0" i="0">
+                <a:solidFill>
+                  <a:srgbClr val="2B333D"/>
+                </a:solidFill>
+                <a:latin typeface="Pretendard ExtraBold"/>
+                <a:ea typeface="Pretendard ExtraBold"/>
+              </a:rPr>
+              <a:t>상품 썸네일</a:t>
+            </a:r>
+            <a:r>
+              <a:rPr sz="1100" b="0" i="0">
+                <a:solidFill>
+                  <a:srgbClr val="2B333D"/>
+                </a:solidFill>
+                <a:latin typeface="Pretendard"/>
+                <a:ea typeface="Pretendard"/>
+              </a:rPr>
+              <a:t>까지 다섯 가지입니다.</a:t>
+            </a:r>
+          </a:p>
+        </p:txBody>
+      </p:sp>
+      <p:pic>
+        <p:nvPicPr>
+          <p:cNvPr id="15" name="Picture 14" descr="fc_types.jpg"/>
+          <p:cNvPicPr>
+            <a:picLocks noChangeAspect="1"/>
+          </p:cNvPicPr>
+          <p:nvPr/>
+        </p:nvPicPr>
+        <p:blipFill>
+          <a:blip r:embed="rId3"/>
+          <a:stretch>
+            <a:fillRect/>
+          </a:stretch>
+        </p:blipFill>
+        <p:spPr>
+          <a:xfrm>
+            <a:off x="8092440" y="3224777"/>
+            <a:ext cx="1783080" cy="2473054"/>
+          </a:xfrm>
+          <a:prstGeom prst="rect">
+            <a:avLst/>
+          </a:prstGeom>
+          <a:ln w="12700">
+            <a:solidFill>
+              <a:srgbClr val="EAE5D8"/>
+            </a:solidFill>
+          </a:ln>
+          <a:effectLst/>
+          <a:effectLst>
+            <a:outerShdw blurRad="170000" dist="50000" dir="5400000" rotWithShape="0">
+              <a:srgbClr val="16241C">
+                <a:alpha val="30000"/>
+              </a:srgbClr>
+            </a:outerShdw>
+          </a:effectLst>
+        </p:spPr>
+      </p:pic>
+      <p:sp>
+        <p:nvSpPr>
+          <p:cNvPr id="16" name="Rounded Rectangle 15"/>
           <p:cNvSpPr/>
           <p:nvPr/>
         </p:nvSpPr>
@@ -12990,7 +12990,7 @@
                 <a:latin typeface="Pretendard ExtraBold"/>
                 <a:ea typeface="Pretendard ExtraBold"/>
               </a:rPr>
-              <a:t>프리캔버스 새 기능 ③</a:t>
+              <a:t>프리캔버스 새 기능 ②</a:t>
             </a:r>
           </a:p>
         </p:txBody>
@@ -13767,7 +13767,7 @@
                 <a:latin typeface="Pretendard ExtraBold"/>
                 <a:ea typeface="Pretendard ExtraBold"/>
               </a:rPr>
-              <a:t>프리캔버스 새 기능 ④</a:t>
+              <a:t>프리캔버스 새 기능 ③</a:t>
             </a:r>
           </a:p>
         </p:txBody>
@@ -13807,7 +13807,7 @@
                 <a:latin typeface="Noto Serif KR"/>
                 <a:ea typeface="Noto Serif KR"/>
               </a:rPr>
-              <a:t>카드뉴스 만들기</a:t>
+              <a:t>1688 영상 번역</a:t>
             </a:r>
           </a:p>
           <a:p>
@@ -13827,7 +13827,7 @@
                 <a:latin typeface="Pretendard"/>
                 <a:ea typeface="Pretendard"/>
               </a:rPr>
-              <a:t>홍보용 카드뉴스 여러 장을 한 번에 만듭니다. 사진이 없어도 됩니다.</a:t>
+              <a:t>중국어 상품 영상을 쇼츠형 한국어 영상으로 바꿔 줍니다.</a:t>
             </a:r>
           </a:p>
         </p:txBody>
@@ -13867,7 +13867,7 @@
                 <a:latin typeface="Pretendard"/>
                 <a:ea typeface="Pretendard"/>
               </a:rPr>
-              <a:t>📰</a:t>
+              <a:t>🎬</a:t>
             </a:r>
           </a:p>
         </p:txBody>
@@ -13910,7 +13910,7 @@
                 <a:latin typeface="Pretendard ExtraBold"/>
                 <a:ea typeface="Pretendard ExtraBold"/>
               </a:rPr>
-              <a:t>내용만 적으면 여러 장이 한 번에</a:t>
+              <a:t>자막을 자연스러운 한국어로</a:t>
             </a:r>
           </a:p>
           <a:p>
@@ -13927,7 +13927,7 @@
                 <a:latin typeface="Pretendard"/>
                 <a:ea typeface="Pretendard"/>
               </a:rPr>
-              <a:t>주제와 하고 싶은 말을 적으면, 넘겨보는 카드 여러 장이 순서대로 만들어집니다.</a:t>
+              <a:t>중국어 문구를 지우고, AI가 대본을 한국어답게 다듬은 자막을 입힙니다. 번역투가 아니라 읽히는 문장입니다.</a:t>
             </a:r>
           </a:p>
         </p:txBody>
@@ -14011,7 +14011,7 @@
                 <a:latin typeface="Pretendard"/>
                 <a:ea typeface="Pretendard"/>
               </a:rPr>
-              <a:t>🎨</a:t>
+              <a:t>🔊</a:t>
             </a:r>
           </a:p>
         </p:txBody>
@@ -14054,7 +14054,7 @@
                 <a:latin typeface="Pretendard ExtraBold"/>
                 <a:ea typeface="Pretendard ExtraBold"/>
               </a:rPr>
-              <a:t>모든 장의 디자인 통일</a:t>
+              <a:t>한국어 더빙, 원하면 음소거</a:t>
             </a:r>
           </a:p>
           <a:p>
@@ -14071,7 +14071,7 @@
                 <a:latin typeface="Pretendard"/>
                 <a:ea typeface="Pretendard"/>
               </a:rPr>
-              <a:t>색·글꼴·구성을 먼저 정하고 그리기 때문에, 장마다 분위기가 달라지지 않습니다.</a:t>
+              <a:t>자막에 맞춰 한국어 음성을 입히고, 음성 없이 자막만 남기는 선택도 됩니다.</a:t>
             </a:r>
           </a:p>
         </p:txBody>
@@ -14155,7 +14155,7 @@
                 <a:latin typeface="Pretendard"/>
                 <a:ea typeface="Pretendard"/>
               </a:rPr>
-              <a:t>🛠️</a:t>
+              <a:t>📱</a:t>
             </a:r>
           </a:p>
         </p:txBody>
@@ -14198,7 +14198,7 @@
                 <a:latin typeface="Pretendard ExtraBold"/>
                 <a:ea typeface="Pretendard ExtraBold"/>
               </a:rPr>
-              <a:t>장마다 버튼 하나로 수정</a:t>
+              <a:t>쇼츠 템플릿으로 저장</a:t>
             </a:r>
           </a:p>
           <a:p>
@@ -14215,14 +14215,14 @@
                 <a:latin typeface="Pretendard"/>
                 <a:ea typeface="Pretendard"/>
               </a:rPr>
-              <a:t>상품 크게 · 여백 정리 · 고급스럽게 · 문구 짧게 · 배경만 변경 · 글자 없는 버전 — 버튼으로 바로 고칩니다.</a:t>
+              <a:t>쇼츠 헤드라인 템플릿이 입혀진 9:16 MP4로 저장되고, SRT·VTT 자막 파일도 함께 나옵니다.</a:t>
             </a:r>
           </a:p>
         </p:txBody>
       </p:sp>
       <p:pic>
         <p:nvPicPr>
-          <p:cNvPr id="15" name="Picture 14" descr="cn_grid.jpg"/>
+          <p:cNvPr id="15" name="Picture 14" descr="v1688_list.jpg"/>
           <p:cNvPicPr>
             <a:picLocks noChangeAspect="1"/>
           </p:cNvPicPr>
@@ -14236,8 +14236,8 @@
         </p:blipFill>
         <p:spPr>
           <a:xfrm>
-            <a:off x="6263640" y="2011680"/>
-            <a:ext cx="5074920" cy="2385212"/>
+            <a:off x="6263640" y="1965960"/>
+            <a:ext cx="5029200" cy="1954682"/>
           </a:xfrm>
           <a:prstGeom prst="rect">
             <a:avLst/>
@@ -14265,8 +14265,8 @@
         </p:nvSpPr>
         <p:spPr>
           <a:xfrm>
-            <a:off x="5989320" y="4506620"/>
-            <a:ext cx="5623559" cy="256032"/>
+            <a:off x="5989320" y="4030370"/>
+            <a:ext cx="5577840" cy="256032"/>
           </a:xfrm>
           <a:prstGeom prst="rect">
             <a:avLst/>
@@ -14292,7 +14292,7 @@
                 <a:latin typeface="Pretendard"/>
                 <a:ea typeface="Pretendard"/>
               </a:rPr>
-              <a:t>실제 생성 결과 — 카드마다 템플릿과 빠른 수정 버튼이 붙습니다</a:t>
+              <a:t>완료된 작업 목록 — 쇼츠 템플릿·더빙 설정이 남고, MP4·SRT·VTT로 내려받습니다</a:t>
             </a:r>
           </a:p>
         </p:txBody>
@@ -14544,7 +14544,7 @@
                 <a:latin typeface="Pretendard ExtraBold"/>
                 <a:ea typeface="Pretendard ExtraBold"/>
               </a:rPr>
-              <a:t>프리캔버스 새 기능 ⑤</a:t>
+              <a:t>프리캔버스 새 기능 ④</a:t>
             </a:r>
           </a:p>
         </p:txBody>
@@ -14584,7 +14584,7 @@
                 <a:latin typeface="Noto Serif KR"/>
                 <a:ea typeface="Noto Serif KR"/>
               </a:rPr>
-              <a:t>GIF 만들기</a:t>
+              <a:t>카드뉴스 만들기</a:t>
             </a:r>
           </a:p>
           <a:p>
@@ -14604,7 +14604,7 @@
                 <a:latin typeface="Pretendard"/>
                 <a:ea typeface="Pretendard"/>
               </a:rPr>
-              <a:t>완성된 상세 이미지를 움직이는 GIF로 만들어, 상세페이지에서 시선을 잡습니다.</a:t>
+              <a:t>홍보용 카드뉴스 여러 장을 한 번에 만듭니다. 사진이 없어도 됩니다.</a:t>
             </a:r>
           </a:p>
         </p:txBody>
@@ -14644,7 +14644,7 @@
                 <a:latin typeface="Pretendard"/>
                 <a:ea typeface="Pretendard"/>
               </a:rPr>
-              <a:t>🎞️</a:t>
+              <a:t>📰</a:t>
             </a:r>
           </a:p>
         </p:txBody>
@@ -14687,7 +14687,7 @@
                 <a:latin typeface="Pretendard ExtraBold"/>
                 <a:ea typeface="Pretendard ExtraBold"/>
               </a:rPr>
-              <a:t>텍스트 없음 · 텍스트 유지, 두 가지</a:t>
+              <a:t>내용만 적으면 여러 장이 한 번에</a:t>
             </a:r>
           </a:p>
           <a:p>
@@ -14704,7 +14704,7 @@
                 <a:latin typeface="Pretendard"/>
                 <a:ea typeface="Pretendard"/>
               </a:rPr>
-              <a:t>문구 없이 장면만 움직이는 GIF와 문구가 함께 든 GIF 중 골라 만듭니다.</a:t>
+              <a:t>주제와 하고 싶은 말을 적으면, 넘겨보는 카드 여러 장이 순서대로 만들어집니다.</a:t>
             </a:r>
           </a:p>
         </p:txBody>
@@ -14788,7 +14788,7 @@
                 <a:latin typeface="Pretendard"/>
                 <a:ea typeface="Pretendard"/>
               </a:rPr>
-              <a:t>🛒</a:t>
+              <a:t>🎨</a:t>
             </a:r>
           </a:p>
         </p:txBody>
@@ -14831,7 +14831,7 @@
                 <a:latin typeface="Pretendard ExtraBold"/>
                 <a:ea typeface="Pretendard ExtraBold"/>
               </a:rPr>
-              <a:t>상세페이지에 그대로 사용</a:t>
+              <a:t>모든 장의 디자인 통일</a:t>
             </a:r>
           </a:p>
           <a:p>
@@ -14848,7 +14848,7 @@
                 <a:latin typeface="Pretendard"/>
                 <a:ea typeface="Pretendard"/>
               </a:rPr>
-              <a:t>움직이는 이미지가 한두 장 들어가면 스크롤이 멈춥니다. 스마트스토어 상세에 바로 올릴 수 있습니다.</a:t>
+              <a:t>색·글꼴·구성을 먼저 정하고 그리기 때문에, 장마다 분위기가 달라지지 않습니다.</a:t>
             </a:r>
           </a:p>
         </p:txBody>
@@ -14932,7 +14932,7 @@
                 <a:latin typeface="Pretendard"/>
                 <a:ea typeface="Pretendard"/>
               </a:rPr>
-              <a:t>📦</a:t>
+              <a:t>🛠️</a:t>
             </a:r>
           </a:p>
         </p:txBody>
@@ -14975,7 +14975,7 @@
                 <a:latin typeface="Pretendard ExtraBold"/>
                 <a:ea typeface="Pretendard ExtraBold"/>
               </a:rPr>
-              <a:t>MP4 저장·전체저장 포함</a:t>
+              <a:t>장마다 버튼 하나로 수정</a:t>
             </a:r>
           </a:p>
           <a:p>
@@ -14992,14 +14992,14 @@
                 <a:latin typeface="Pretendard"/>
                 <a:ea typeface="Pretendard"/>
               </a:rPr>
-              <a:t>만들어진 GIF 카드를 누르면 MP4 영상으로도 저장되고, 전체저장 ZIP 안 gifs 폴더에도 함께 담깁니다.</a:t>
+              <a:t>상품 크게 · 여백 정리 · 고급스럽게 · 문구 짧게 · 배경만 변경 · 글자 없는 버전 — 버튼으로 바로 고칩니다.</a:t>
             </a:r>
           </a:p>
         </p:txBody>
       </p:sp>
       <p:pic>
         <p:nvPicPr>
-          <p:cNvPr id="15" name="Picture 14" descr="gif_top.jpg"/>
+          <p:cNvPr id="15" name="Picture 14" descr="cn_grid.jpg"/>
           <p:cNvPicPr>
             <a:picLocks noChangeAspect="1"/>
           </p:cNvPicPr>
@@ -15013,8 +15013,8 @@
         </p:blipFill>
         <p:spPr>
           <a:xfrm>
-            <a:off x="6263640" y="1965960"/>
-            <a:ext cx="5029200" cy="2625242"/>
+            <a:off x="6263640" y="2011680"/>
+            <a:ext cx="5074920" cy="2385212"/>
           </a:xfrm>
           <a:prstGeom prst="rect">
             <a:avLst/>
@@ -15042,8 +15042,8 @@
         </p:nvSpPr>
         <p:spPr>
           <a:xfrm>
-            <a:off x="5989320" y="4700930"/>
-            <a:ext cx="5577840" cy="256032"/>
+            <a:off x="5989320" y="4506620"/>
+            <a:ext cx="5623559" cy="256032"/>
           </a:xfrm>
           <a:prstGeom prst="rect">
             <a:avLst/>
@@ -15069,7 +15069,7 @@
                 <a:latin typeface="Pretendard"/>
                 <a:ea typeface="Pretendard"/>
               </a:rPr>
-              <a:t>GIF 생성 버튼 — (2/2)는 만들 수 있는 남은 횟수입니다</a:t>
+              <a:t>실제 생성 결과 — 카드마다 템플릿과 빠른 수정 버튼이 붙습니다</a:t>
             </a:r>
           </a:p>
         </p:txBody>

--- a/slides.pptx
+++ b/slides.pptx
@@ -9776,7 +9776,7 @@
                 <a:latin typeface="Pretendard ExtraBold"/>
                 <a:ea typeface="Pretendard ExtraBold"/>
               </a:rPr>
-              <a:t>프리캔버스 새 기능 ①</a:t>
+              <a:t>프리캔버스 첫 화면</a:t>
             </a:r>
           </a:p>
         </p:txBody>
@@ -9789,8 +9789,8 @@
         </p:nvSpPr>
         <p:spPr>
           <a:xfrm>
-            <a:off x="822960" y="1234440"/>
-            <a:ext cx="4937760" cy="1280160"/>
+            <a:off x="822960" y="932688"/>
+            <a:ext cx="10515600" cy="566928"/>
           </a:xfrm>
           <a:prstGeom prst="rect">
             <a:avLst/>
@@ -9805,433 +9805,25 @@
           <a:p>
             <a:pPr algn="l">
               <a:lnSpc>
-                <a:spcPct val="130000"/>
-              </a:lnSpc>
-            </a:pPr>
-            <a:r>
-              <a:rPr sz="2400" b="1" i="0">
+                <a:spcPct val="100000"/>
+              </a:lnSpc>
+            </a:pPr>
+            <a:r>
+              <a:rPr sz="2300" b="1" i="0">
                 <a:solidFill>
                   <a:srgbClr val="191F28"/>
                 </a:solidFill>
                 <a:latin typeface="Noto Serif KR"/>
                 <a:ea typeface="Noto Serif KR"/>
               </a:rPr>
-              <a:t>상품 링크로 빠른 시작</a:t>
-            </a:r>
-          </a:p>
-          <a:p>
-            <a:pPr algn="l">
-              <a:lnSpc>
-                <a:spcPct val="140000"/>
-              </a:lnSpc>
-              <a:spcBef>
-                <a:spcPts val="800"/>
-              </a:spcBef>
-            </a:pPr>
-            <a:r>
-              <a:rPr sz="1200" b="0" i="0">
-                <a:solidFill>
-                  <a:srgbClr val="4E5964"/>
-                </a:solidFill>
-                <a:latin typeface="Pretendard"/>
-                <a:ea typeface="Pretendard"/>
-              </a:rPr>
-              <a:t>소싱한 상품의 주소만 붙여넣으면, 이미지와 상품 정보가 자동으로 담깁니다.</a:t>
-            </a:r>
-          </a:p>
-        </p:txBody>
-      </p:sp>
-      <p:sp>
-        <p:nvSpPr>
-          <p:cNvPr id="7" name="TextBox 6"/>
-          <p:cNvSpPr txBox="1"/>
-          <p:nvPr/>
-        </p:nvSpPr>
-        <p:spPr>
-          <a:xfrm>
-            <a:off x="822960" y="2743200"/>
-            <a:ext cx="502920" cy="457200"/>
-          </a:xfrm>
-          <a:prstGeom prst="rect">
-            <a:avLst/>
-          </a:prstGeom>
-          <a:noFill/>
-        </p:spPr>
-        <p:txBody>
-          <a:bodyPr wrap="square" lIns="0" rIns="0" tIns="0" bIns="0">
-            <a:spAutoFit/>
-          </a:bodyPr>
-          <a:lstStyle/>
-          <a:p>
-            <a:pPr algn="ctr">
-              <a:lnSpc>
-                <a:spcPct val="100000"/>
-              </a:lnSpc>
-            </a:pPr>
-            <a:r>
-              <a:rPr sz="1600" b="0" i="0">
-                <a:solidFill>
-                  <a:srgbClr val="191F28"/>
-                </a:solidFill>
-                <a:latin typeface="Pretendard"/>
-                <a:ea typeface="Pretendard"/>
-              </a:rPr>
-              <a:t>🔗</a:t>
-            </a:r>
-          </a:p>
-        </p:txBody>
-      </p:sp>
-      <p:sp>
-        <p:nvSpPr>
-          <p:cNvPr id="8" name="TextBox 7"/>
-          <p:cNvSpPr txBox="1"/>
-          <p:nvPr/>
-        </p:nvSpPr>
-        <p:spPr>
-          <a:xfrm>
-            <a:off x="1389888" y="2734056"/>
-            <a:ext cx="4297680" cy="960120"/>
-          </a:xfrm>
-          <a:prstGeom prst="rect">
-            <a:avLst/>
-          </a:prstGeom>
-          <a:noFill/>
-        </p:spPr>
-        <p:txBody>
-          <a:bodyPr wrap="square" lIns="0" rIns="0" tIns="0" bIns="0">
-            <a:spAutoFit/>
-          </a:bodyPr>
-          <a:lstStyle/>
-          <a:p>
-            <a:pPr algn="l">
-              <a:lnSpc>
-                <a:spcPct val="100000"/>
-              </a:lnSpc>
-              <a:spcAft>
-                <a:spcPts val="300"/>
-              </a:spcAft>
-            </a:pPr>
-            <a:r>
-              <a:rPr sz="1200" b="0" i="0">
-                <a:solidFill>
-                  <a:srgbClr val="191F28"/>
-                </a:solidFill>
-                <a:latin typeface="Pretendard ExtraBold"/>
-                <a:ea typeface="Pretendard ExtraBold"/>
-              </a:rPr>
-              <a:t>스마트스토어·1688 링크 불러오기</a:t>
-            </a:r>
-          </a:p>
-          <a:p>
-            <a:pPr algn="l">
-              <a:lnSpc>
-                <a:spcPct val="128000"/>
-              </a:lnSpc>
-            </a:pPr>
-            <a:r>
-              <a:rPr sz="1050" b="0" i="0">
-                <a:solidFill>
-                  <a:srgbClr val="4E5964"/>
-                </a:solidFill>
-                <a:latin typeface="Pretendard"/>
-                <a:ea typeface="Pretendard"/>
-              </a:rPr>
-              <a:t>상품 주소를 붙여넣으면 새 창이 열려 상세 내용과 이미지를 가져옵니다. 최근 업데이트로 속도가 눈에 띄게 빨라졌습니다.</a:t>
-            </a:r>
-          </a:p>
-        </p:txBody>
-      </p:sp>
-      <p:sp>
-        <p:nvSpPr>
-          <p:cNvPr id="9" name="Rectangle 8"/>
-          <p:cNvSpPr/>
-          <p:nvPr/>
-        </p:nvSpPr>
-        <p:spPr>
-          <a:xfrm>
-            <a:off x="822960" y="3739896"/>
-            <a:ext cx="4846320" cy="10972"/>
-          </a:xfrm>
-          <a:prstGeom prst="rect">
-            <a:avLst/>
-          </a:prstGeom>
-          <a:solidFill>
-            <a:srgbClr val="EAE5D8"/>
-          </a:solidFill>
-          <a:ln>
-            <a:noFill/>
-          </a:ln>
-          <a:effectLst/>
-        </p:spPr>
-        <p:style>
-          <a:lnRef idx="1">
-            <a:schemeClr val="accent1"/>
-          </a:lnRef>
-          <a:fillRef idx="3">
-            <a:schemeClr val="accent1"/>
-          </a:fillRef>
-          <a:effectRef idx="2">
-            <a:schemeClr val="accent1"/>
-          </a:effectRef>
-          <a:fontRef idx="minor">
-            <a:schemeClr val="lt1"/>
-          </a:fontRef>
-        </p:style>
-        <p:txBody>
-          <a:bodyPr rtlCol="0" anchor="ctr"/>
-          <a:lstStyle/>
-          <a:p>
-            <a:pPr algn="ctr"/>
-          </a:p>
-        </p:txBody>
-      </p:sp>
-      <p:sp>
-        <p:nvSpPr>
-          <p:cNvPr id="10" name="TextBox 9"/>
-          <p:cNvSpPr txBox="1"/>
-          <p:nvPr/>
-        </p:nvSpPr>
-        <p:spPr>
-          <a:xfrm>
-            <a:off x="822960" y="3822191"/>
-            <a:ext cx="502920" cy="457200"/>
-          </a:xfrm>
-          <a:prstGeom prst="rect">
-            <a:avLst/>
-          </a:prstGeom>
-          <a:noFill/>
-        </p:spPr>
-        <p:txBody>
-          <a:bodyPr wrap="square" lIns="0" rIns="0" tIns="0" bIns="0">
-            <a:spAutoFit/>
-          </a:bodyPr>
-          <a:lstStyle/>
-          <a:p>
-            <a:pPr algn="ctr">
-              <a:lnSpc>
-                <a:spcPct val="100000"/>
-              </a:lnSpc>
-            </a:pPr>
-            <a:r>
-              <a:rPr sz="1600" b="0" i="0">
-                <a:solidFill>
-                  <a:srgbClr val="191F28"/>
-                </a:solidFill>
-                <a:latin typeface="Pretendard"/>
-                <a:ea typeface="Pretendard"/>
-              </a:rPr>
-              <a:t>🤖</a:t>
-            </a:r>
-          </a:p>
-        </p:txBody>
-      </p:sp>
-      <p:sp>
-        <p:nvSpPr>
-          <p:cNvPr id="11" name="TextBox 10"/>
-          <p:cNvSpPr txBox="1"/>
-          <p:nvPr/>
-        </p:nvSpPr>
-        <p:spPr>
-          <a:xfrm>
-            <a:off x="1389888" y="3813048"/>
-            <a:ext cx="4297680" cy="960120"/>
-          </a:xfrm>
-          <a:prstGeom prst="rect">
-            <a:avLst/>
-          </a:prstGeom>
-          <a:noFill/>
-        </p:spPr>
-        <p:txBody>
-          <a:bodyPr wrap="square" lIns="0" rIns="0" tIns="0" bIns="0">
-            <a:spAutoFit/>
-          </a:bodyPr>
-          <a:lstStyle/>
-          <a:p>
-            <a:pPr algn="l">
-              <a:lnSpc>
-                <a:spcPct val="100000"/>
-              </a:lnSpc>
-              <a:spcAft>
-                <a:spcPts val="300"/>
-              </a:spcAft>
-            </a:pPr>
-            <a:r>
-              <a:rPr sz="1200" b="0" i="0">
-                <a:solidFill>
-                  <a:srgbClr val="191F28"/>
-                </a:solidFill>
-                <a:latin typeface="Pretendard ExtraBold"/>
-                <a:ea typeface="Pretendard ExtraBold"/>
-              </a:rPr>
-              <a:t>상품 아닌 이미지는 AI가 거릅니다</a:t>
-            </a:r>
-          </a:p>
-          <a:p>
-            <a:pPr algn="l">
-              <a:lnSpc>
-                <a:spcPct val="128000"/>
-              </a:lnSpc>
-            </a:pPr>
-            <a:r>
-              <a:rPr sz="1050" b="0" i="0">
-                <a:solidFill>
-                  <a:srgbClr val="4E5964"/>
-                </a:solidFill>
-                <a:latin typeface="Pretendard"/>
-                <a:ea typeface="Pretendard"/>
-              </a:rPr>
-              <a:t>공지·구매평·할인 배너처럼 상세에 못 쓰는 이미지를 알아서 빼고, 중국어 문구도 한국어 기준으로 정리합니다.</a:t>
-            </a:r>
-          </a:p>
-        </p:txBody>
-      </p:sp>
-      <p:sp>
-        <p:nvSpPr>
-          <p:cNvPr id="12" name="Rectangle 11"/>
-          <p:cNvSpPr/>
-          <p:nvPr/>
-        </p:nvSpPr>
-        <p:spPr>
-          <a:xfrm>
-            <a:off x="822960" y="4818888"/>
-            <a:ext cx="4846320" cy="10972"/>
-          </a:xfrm>
-          <a:prstGeom prst="rect">
-            <a:avLst/>
-          </a:prstGeom>
-          <a:solidFill>
-            <a:srgbClr val="EAE5D8"/>
-          </a:solidFill>
-          <a:ln>
-            <a:noFill/>
-          </a:ln>
-          <a:effectLst/>
-        </p:spPr>
-        <p:style>
-          <a:lnRef idx="1">
-            <a:schemeClr val="accent1"/>
-          </a:lnRef>
-          <a:fillRef idx="3">
-            <a:schemeClr val="accent1"/>
-          </a:fillRef>
-          <a:effectRef idx="2">
-            <a:schemeClr val="accent1"/>
-          </a:effectRef>
-          <a:fontRef idx="minor">
-            <a:schemeClr val="lt1"/>
-          </a:fontRef>
-        </p:style>
-        <p:txBody>
-          <a:bodyPr rtlCol="0" anchor="ctr"/>
-          <a:lstStyle/>
-          <a:p>
-            <a:pPr algn="ctr"/>
-          </a:p>
-        </p:txBody>
-      </p:sp>
-      <p:sp>
-        <p:nvSpPr>
-          <p:cNvPr id="13" name="TextBox 12"/>
-          <p:cNvSpPr txBox="1"/>
-          <p:nvPr/>
-        </p:nvSpPr>
-        <p:spPr>
-          <a:xfrm>
-            <a:off x="822960" y="4901183"/>
-            <a:ext cx="502920" cy="457200"/>
-          </a:xfrm>
-          <a:prstGeom prst="rect">
-            <a:avLst/>
-          </a:prstGeom>
-          <a:noFill/>
-        </p:spPr>
-        <p:txBody>
-          <a:bodyPr wrap="square" lIns="0" rIns="0" tIns="0" bIns="0">
-            <a:spAutoFit/>
-          </a:bodyPr>
-          <a:lstStyle/>
-          <a:p>
-            <a:pPr algn="ctr">
-              <a:lnSpc>
-                <a:spcPct val="100000"/>
-              </a:lnSpc>
-            </a:pPr>
-            <a:r>
-              <a:rPr sz="1600" b="0" i="0">
-                <a:solidFill>
-                  <a:srgbClr val="191F28"/>
-                </a:solidFill>
-                <a:latin typeface="Pretendard"/>
-                <a:ea typeface="Pretendard"/>
-              </a:rPr>
-              <a:t>🧩</a:t>
-            </a:r>
-          </a:p>
-        </p:txBody>
-      </p:sp>
-      <p:sp>
-        <p:nvSpPr>
-          <p:cNvPr id="14" name="TextBox 13"/>
-          <p:cNvSpPr txBox="1"/>
-          <p:nvPr/>
-        </p:nvSpPr>
-        <p:spPr>
-          <a:xfrm>
-            <a:off x="1389888" y="4892040"/>
-            <a:ext cx="4297680" cy="960120"/>
-          </a:xfrm>
-          <a:prstGeom prst="rect">
-            <a:avLst/>
-          </a:prstGeom>
-          <a:noFill/>
-        </p:spPr>
-        <p:txBody>
-          <a:bodyPr wrap="square" lIns="0" rIns="0" tIns="0" bIns="0">
-            <a:spAutoFit/>
-          </a:bodyPr>
-          <a:lstStyle/>
-          <a:p>
-            <a:pPr algn="l">
-              <a:lnSpc>
-                <a:spcPct val="100000"/>
-              </a:lnSpc>
-              <a:spcAft>
-                <a:spcPts val="300"/>
-              </a:spcAft>
-            </a:pPr>
-            <a:r>
-              <a:rPr sz="1200" b="0" i="0">
-                <a:solidFill>
-                  <a:srgbClr val="191F28"/>
-                </a:solidFill>
-                <a:latin typeface="Pretendard ExtraBold"/>
-                <a:ea typeface="Pretendard ExtraBold"/>
-              </a:rPr>
-              <a:t>확장 프로그램은 한 번만 설치</a:t>
-            </a:r>
-          </a:p>
-          <a:p>
-            <a:pPr algn="l">
-              <a:lnSpc>
-                <a:spcPct val="128000"/>
-              </a:lnSpc>
-            </a:pPr>
-            <a:r>
-              <a:rPr sz="1050" b="0" i="0">
-                <a:solidFill>
-                  <a:srgbClr val="4E5964"/>
-                </a:solidFill>
-                <a:latin typeface="Pretendard"/>
-                <a:ea typeface="Pretendard"/>
-              </a:rPr>
-              <a:t>웹스토어 버튼과 설치 안내가 화면 안에 있습니다. 처음 한 번만 설치하면 다음부터는 붙여넣기만 하면 됩니다.</a:t>
+              <a:t>세 가지 작업 중에 골라 시작합니다.</a:t>
             </a:r>
           </a:p>
         </p:txBody>
       </p:sp>
       <p:pic>
         <p:nvPicPr>
-          <p:cNvPr id="15" name="Picture 14" descr="fc_link.jpg"/>
+          <p:cNvPr id="7" name="Picture 6" descr="fc_modes.jpg"/>
           <p:cNvPicPr>
             <a:picLocks noChangeAspect="1"/>
           </p:cNvPicPr>
@@ -10245,8 +9837,8 @@
         </p:blipFill>
         <p:spPr>
           <a:xfrm>
-            <a:off x="6263640" y="1783080"/>
-            <a:ext cx="4892040" cy="2690622"/>
+            <a:off x="822960" y="1600200"/>
+            <a:ext cx="10543032" cy="1286250"/>
           </a:xfrm>
           <a:prstGeom prst="rect">
             <a:avLst/>
@@ -10268,14 +9860,58 @@
       </p:pic>
       <p:sp>
         <p:nvSpPr>
-          <p:cNvPr id="16" name="TextBox 15"/>
+          <p:cNvPr id="8" name="Rectangle 7"/>
+          <p:cNvSpPr/>
+          <p:nvPr/>
+        </p:nvSpPr>
+        <p:spPr>
+          <a:xfrm>
+            <a:off x="822960" y="3206489"/>
+            <a:ext cx="29260" cy="566928"/>
+          </a:xfrm>
+          <a:prstGeom prst="rect">
+            <a:avLst/>
+          </a:prstGeom>
+          <a:solidFill>
+            <a:srgbClr val="0F4E53"/>
+          </a:solidFill>
+          <a:ln>
+            <a:noFill/>
+          </a:ln>
+          <a:effectLst/>
+        </p:spPr>
+        <p:style>
+          <a:lnRef idx="1">
+            <a:schemeClr val="accent1"/>
+          </a:lnRef>
+          <a:fillRef idx="3">
+            <a:schemeClr val="accent1"/>
+          </a:fillRef>
+          <a:effectRef idx="2">
+            <a:schemeClr val="accent1"/>
+          </a:effectRef>
+          <a:fontRef idx="minor">
+            <a:schemeClr val="lt1"/>
+          </a:fontRef>
+        </p:style>
+        <p:txBody>
+          <a:bodyPr rtlCol="0" anchor="ctr"/>
+          <a:lstStyle/>
+          <a:p>
+            <a:pPr algn="ctr"/>
+          </a:p>
+        </p:txBody>
+      </p:sp>
+      <p:sp>
+        <p:nvSpPr>
+          <p:cNvPr id="9" name="TextBox 8"/>
           <p:cNvSpPr txBox="1"/>
           <p:nvPr/>
         </p:nvSpPr>
         <p:spPr>
           <a:xfrm>
-            <a:off x="5989320" y="4583430"/>
-            <a:ext cx="5440679" cy="256032"/>
+            <a:off x="1024128" y="3179057"/>
+            <a:ext cx="5760720" cy="658368"/>
           </a:xfrm>
           <a:prstGeom prst="rect">
             <a:avLst/>
@@ -10288,27 +9924,372 @@
           </a:bodyPr>
           <a:lstStyle/>
           <a:p>
-            <a:pPr algn="ctr">
+            <a:pPr algn="l">
               <a:lnSpc>
                 <a:spcPct val="100000"/>
               </a:lnSpc>
-            </a:pPr>
-            <a:r>
-              <a:rPr sz="900" b="0" i="0">
+              <a:spcAft>
+                <a:spcPts val="200"/>
+              </a:spcAft>
+            </a:pPr>
+            <a:r>
+              <a:rPr sz="1250" b="0" i="0">
+                <a:solidFill>
+                  <a:srgbClr val="191F28"/>
+                </a:solidFill>
+                <a:latin typeface="Pretendard ExtraBold"/>
+                <a:ea typeface="Pretendard ExtraBold"/>
+              </a:rPr>
+              <a:t>새 상세페이지 만들기</a:t>
+            </a:r>
+          </a:p>
+          <a:p>
+            <a:pPr algn="l">
+              <a:lnSpc>
+                <a:spcPct val="125000"/>
+              </a:lnSpc>
+            </a:pPr>
+            <a:r>
+              <a:rPr sz="1050" b="0" i="0">
                 <a:solidFill>
                   <a:srgbClr val="4E5964"/>
                 </a:solidFill>
                 <a:latin typeface="Pretendard"/>
                 <a:ea typeface="Pretendard"/>
               </a:rPr>
-              <a:t>링크마다 “불러오기” 버튼 하나 — 가격·비상품 이미지는 자동으로 걸러집니다</a:t>
-            </a:r>
-          </a:p>
-        </p:txBody>
-      </p:sp>
-      <p:sp>
-        <p:nvSpPr>
-          <p:cNvPr id="17" name="Rounded Rectangle 16"/>
+              <a:t>제품 사진과 정보를 넣으면 상세페이지를 처음부터 만들어 줍니다.</a:t>
+            </a:r>
+          </a:p>
+        </p:txBody>
+      </p:sp>
+      <p:sp>
+        <p:nvSpPr>
+          <p:cNvPr id="10" name="Rectangle 9"/>
+          <p:cNvSpPr/>
+          <p:nvPr/>
+        </p:nvSpPr>
+        <p:spPr>
+          <a:xfrm>
+            <a:off x="822960" y="3956297"/>
+            <a:ext cx="29260" cy="566928"/>
+          </a:xfrm>
+          <a:prstGeom prst="rect">
+            <a:avLst/>
+          </a:prstGeom>
+          <a:solidFill>
+            <a:srgbClr val="0F4E53"/>
+          </a:solidFill>
+          <a:ln>
+            <a:noFill/>
+          </a:ln>
+          <a:effectLst/>
+        </p:spPr>
+        <p:style>
+          <a:lnRef idx="1">
+            <a:schemeClr val="accent1"/>
+          </a:lnRef>
+          <a:fillRef idx="3">
+            <a:schemeClr val="accent1"/>
+          </a:fillRef>
+          <a:effectRef idx="2">
+            <a:schemeClr val="accent1"/>
+          </a:effectRef>
+          <a:fontRef idx="minor">
+            <a:schemeClr val="lt1"/>
+          </a:fontRef>
+        </p:style>
+        <p:txBody>
+          <a:bodyPr rtlCol="0" anchor="ctr"/>
+          <a:lstStyle/>
+          <a:p>
+            <a:pPr algn="ctr"/>
+          </a:p>
+        </p:txBody>
+      </p:sp>
+      <p:sp>
+        <p:nvSpPr>
+          <p:cNvPr id="11" name="TextBox 10"/>
+          <p:cNvSpPr txBox="1"/>
+          <p:nvPr/>
+        </p:nvSpPr>
+        <p:spPr>
+          <a:xfrm>
+            <a:off x="1024128" y="3928865"/>
+            <a:ext cx="5760720" cy="658368"/>
+          </a:xfrm>
+          <a:prstGeom prst="rect">
+            <a:avLst/>
+          </a:prstGeom>
+          <a:noFill/>
+        </p:spPr>
+        <p:txBody>
+          <a:bodyPr wrap="square" lIns="0" rIns="0" tIns="0" bIns="0">
+            <a:spAutoFit/>
+          </a:bodyPr>
+          <a:lstStyle/>
+          <a:p>
+            <a:pPr algn="l">
+              <a:lnSpc>
+                <a:spcPct val="100000"/>
+              </a:lnSpc>
+              <a:spcAft>
+                <a:spcPts val="200"/>
+              </a:spcAft>
+            </a:pPr>
+            <a:r>
+              <a:rPr sz="1250" b="0" i="0">
+                <a:solidFill>
+                  <a:srgbClr val="191F28"/>
+                </a:solidFill>
+                <a:latin typeface="Pretendard ExtraBold"/>
+                <a:ea typeface="Pretendard ExtraBold"/>
+              </a:rPr>
+              <a:t>기존 상세페이지 편집</a:t>
+            </a:r>
+          </a:p>
+          <a:p>
+            <a:pPr algn="l">
+              <a:lnSpc>
+                <a:spcPct val="125000"/>
+              </a:lnSpc>
+            </a:pPr>
+            <a:r>
+              <a:rPr sz="1050" b="0" i="0">
+                <a:solidFill>
+                  <a:srgbClr val="4E5964"/>
+                </a:solidFill>
+                <a:latin typeface="Pretendard"/>
+                <a:ea typeface="Pretendard"/>
+              </a:rPr>
+              <a:t>이미 있는 상세 캡처를 올려 블록 단위로 수정합니다.</a:t>
+            </a:r>
+          </a:p>
+        </p:txBody>
+      </p:sp>
+      <p:sp>
+        <p:nvSpPr>
+          <p:cNvPr id="12" name="Rectangle 11"/>
+          <p:cNvSpPr/>
+          <p:nvPr/>
+        </p:nvSpPr>
+        <p:spPr>
+          <a:xfrm>
+            <a:off x="822960" y="4706105"/>
+            <a:ext cx="29260" cy="566928"/>
+          </a:xfrm>
+          <a:prstGeom prst="rect">
+            <a:avLst/>
+          </a:prstGeom>
+          <a:solidFill>
+            <a:srgbClr val="191F28"/>
+          </a:solidFill>
+          <a:ln>
+            <a:noFill/>
+          </a:ln>
+          <a:effectLst/>
+        </p:spPr>
+        <p:style>
+          <a:lnRef idx="1">
+            <a:schemeClr val="accent1"/>
+          </a:lnRef>
+          <a:fillRef idx="3">
+            <a:schemeClr val="accent1"/>
+          </a:fillRef>
+          <a:effectRef idx="2">
+            <a:schemeClr val="accent1"/>
+          </a:effectRef>
+          <a:fontRef idx="minor">
+            <a:schemeClr val="lt1"/>
+          </a:fontRef>
+        </p:style>
+        <p:txBody>
+          <a:bodyPr rtlCol="0" anchor="ctr"/>
+          <a:lstStyle/>
+          <a:p>
+            <a:pPr algn="ctr"/>
+          </a:p>
+        </p:txBody>
+      </p:sp>
+      <p:sp>
+        <p:nvSpPr>
+          <p:cNvPr id="13" name="TextBox 12"/>
+          <p:cNvSpPr txBox="1"/>
+          <p:nvPr/>
+        </p:nvSpPr>
+        <p:spPr>
+          <a:xfrm>
+            <a:off x="1024128" y="4678673"/>
+            <a:ext cx="5760720" cy="658368"/>
+          </a:xfrm>
+          <a:prstGeom prst="rect">
+            <a:avLst/>
+          </a:prstGeom>
+          <a:noFill/>
+        </p:spPr>
+        <p:txBody>
+          <a:bodyPr wrap="square" lIns="0" rIns="0" tIns="0" bIns="0">
+            <a:spAutoFit/>
+          </a:bodyPr>
+          <a:lstStyle/>
+          <a:p>
+            <a:pPr algn="l">
+              <a:lnSpc>
+                <a:spcPct val="100000"/>
+              </a:lnSpc>
+              <a:spcAft>
+                <a:spcPts val="200"/>
+              </a:spcAft>
+            </a:pPr>
+            <a:r>
+              <a:rPr sz="1250" b="0" i="0">
+                <a:solidFill>
+                  <a:srgbClr val="191F28"/>
+                </a:solidFill>
+                <a:latin typeface="Pretendard ExtraBold"/>
+                <a:ea typeface="Pretendard ExtraBold"/>
+              </a:rPr>
+              <a:t>1688 영상 번역</a:t>
+            </a:r>
+          </a:p>
+          <a:p>
+            <a:pPr algn="l">
+              <a:lnSpc>
+                <a:spcPct val="125000"/>
+              </a:lnSpc>
+            </a:pPr>
+            <a:r>
+              <a:rPr sz="1050" b="0" i="0">
+                <a:solidFill>
+                  <a:srgbClr val="4E5964"/>
+                </a:solidFill>
+                <a:latin typeface="Pretendard"/>
+                <a:ea typeface="Pretendard"/>
+              </a:rPr>
+              <a:t>중국 상품 영상을 한국어 자막·더빙 영상으로 바꿉니다.</a:t>
+            </a:r>
+          </a:p>
+        </p:txBody>
+      </p:sp>
+      <p:sp>
+        <p:nvSpPr>
+          <p:cNvPr id="14" name="TextBox 13"/>
+          <p:cNvSpPr txBox="1"/>
+          <p:nvPr/>
+        </p:nvSpPr>
+        <p:spPr>
+          <a:xfrm>
+            <a:off x="822960" y="5483345"/>
+            <a:ext cx="5943600" cy="594360"/>
+          </a:xfrm>
+          <a:prstGeom prst="rect">
+            <a:avLst/>
+          </a:prstGeom>
+          <a:noFill/>
+        </p:spPr>
+        <p:txBody>
+          <a:bodyPr wrap="square" lIns="0" rIns="0" tIns="0" bIns="0">
+            <a:spAutoFit/>
+          </a:bodyPr>
+          <a:lstStyle/>
+          <a:p>
+            <a:pPr algn="l">
+              <a:lnSpc>
+                <a:spcPct val="135000"/>
+              </a:lnSpc>
+            </a:pPr>
+            <a:r>
+              <a:rPr sz="1100" b="0" i="0">
+                <a:solidFill>
+                  <a:srgbClr val="2B333D"/>
+                </a:solidFill>
+                <a:latin typeface="Pretendard"/>
+                <a:ea typeface="Pretendard"/>
+              </a:rPr>
+              <a:t>결과물 종류는 일반·의류·과일채소 상세페이지에 </a:t>
+            </a:r>
+            <a:r>
+              <a:rPr sz="1100" b="0" i="0">
+                <a:solidFill>
+                  <a:srgbClr val="2B333D"/>
+                </a:solidFill>
+                <a:latin typeface="Pretendard ExtraBold"/>
+                <a:ea typeface="Pretendard ExtraBold"/>
+              </a:rPr>
+              <a:t>카드뉴스</a:t>
+            </a:r>
+            <a:r>
+              <a:rPr sz="1100" b="0" i="0">
+                <a:solidFill>
+                  <a:srgbClr val="2B333D"/>
+                </a:solidFill>
+                <a:latin typeface="Pretendard"/>
+                <a:ea typeface="Pretendard"/>
+              </a:rPr>
+              <a:t>, </a:t>
+            </a:r>
+            <a:r>
+              <a:rPr sz="1100" b="0" i="0">
+                <a:solidFill>
+                  <a:srgbClr val="2B333D"/>
+                </a:solidFill>
+                <a:latin typeface="Pretendard ExtraBold"/>
+                <a:ea typeface="Pretendard ExtraBold"/>
+              </a:rPr>
+              <a:t>상품 썸네일</a:t>
+            </a:r>
+            <a:r>
+              <a:rPr sz="1100" b="0" i="0">
+                <a:solidFill>
+                  <a:srgbClr val="2B333D"/>
+                </a:solidFill>
+                <a:latin typeface="Pretendard"/>
+                <a:ea typeface="Pretendard"/>
+              </a:rPr>
+              <a:t>까지 다섯 가지입니다.</a:t>
+            </a:r>
+          </a:p>
+        </p:txBody>
+      </p:sp>
+      <p:pic>
+        <p:nvPicPr>
+          <p:cNvPr id="15" name="Picture 14" descr="fc_types.jpg"/>
+          <p:cNvPicPr>
+            <a:picLocks noChangeAspect="1"/>
+          </p:cNvPicPr>
+          <p:nvPr/>
+        </p:nvPicPr>
+        <p:blipFill>
+          <a:blip r:embed="rId3"/>
+          <a:stretch>
+            <a:fillRect/>
+          </a:stretch>
+        </p:blipFill>
+        <p:spPr>
+          <a:xfrm>
+            <a:off x="8092440" y="3224777"/>
+            <a:ext cx="1783080" cy="2473054"/>
+          </a:xfrm>
+          <a:prstGeom prst="rect">
+            <a:avLst/>
+          </a:prstGeom>
+          <a:ln w="12700">
+            <a:solidFill>
+              <a:srgbClr val="EAE5D8"/>
+            </a:solidFill>
+          </a:ln>
+          <a:effectLst/>
+          <a:effectLst>
+            <a:outerShdw blurRad="170000" dist="50000" dir="5400000" rotWithShape="0">
+              <a:srgbClr val="16241C">
+                <a:alpha val="30000"/>
+              </a:srgbClr>
+            </a:outerShdw>
+          </a:effectLst>
+        </p:spPr>
+      </p:pic>
+      <p:sp>
+        <p:nvSpPr>
+          <p:cNvPr id="16" name="Rounded Rectangle 15"/>
           <p:cNvSpPr/>
           <p:nvPr/>
         </p:nvSpPr>
@@ -10553,7 +10534,7 @@
                 <a:latin typeface="Pretendard ExtraBold"/>
                 <a:ea typeface="Pretendard ExtraBold"/>
               </a:rPr>
-              <a:t>두 서비스 연결</a:t>
+              <a:t>프리캔버스 새 기능 ①</a:t>
             </a:r>
           </a:p>
         </p:txBody>
@@ -10566,8 +10547,8 @@
         </p:nvSpPr>
         <p:spPr>
           <a:xfrm>
-            <a:off x="822960" y="960120"/>
-            <a:ext cx="10515600" cy="566928"/>
+            <a:off x="822960" y="1234440"/>
+            <a:ext cx="4937760" cy="1280160"/>
           </a:xfrm>
           <a:prstGeom prst="rect">
             <a:avLst/>
@@ -10580,47 +10561,435 @@
           </a:bodyPr>
           <a:lstStyle/>
           <a:p>
-            <a:pPr algn="ctr">
-              <a:lnSpc>
-                <a:spcPct val="100000"/>
-              </a:lnSpc>
-            </a:pPr>
-            <a:r>
-              <a:rPr sz="2200" b="1" i="0">
+            <a:pPr algn="l">
+              <a:lnSpc>
+                <a:spcPct val="130000"/>
+              </a:lnSpc>
+            </a:pPr>
+            <a:r>
+              <a:rPr sz="2400" b="1" i="0">
                 <a:solidFill>
                   <a:srgbClr val="191F28"/>
                 </a:solidFill>
                 <a:latin typeface="Noto Serif KR"/>
                 <a:ea typeface="Noto Serif KR"/>
               </a:rPr>
-              <a:t>프리캔버스 상단 메뉴에서 </a:t>
-            </a:r>
-            <a:r>
-              <a:rPr sz="2200" b="1" i="0">
-                <a:solidFill>
-                  <a:srgbClr val="0F4E53"/>
-                </a:solidFill>
-                <a:latin typeface="Noto Serif KR"/>
-                <a:ea typeface="Noto Serif KR"/>
-              </a:rPr>
-              <a:t>검색마스터</a:t>
-            </a:r>
-            <a:r>
-              <a:rPr sz="2200" b="1" i="0">
+              <a:t>상품 링크로 빠른 시작</a:t>
+            </a:r>
+          </a:p>
+          <a:p>
+            <a:pPr algn="l">
+              <a:lnSpc>
+                <a:spcPct val="140000"/>
+              </a:lnSpc>
+              <a:spcBef>
+                <a:spcPts val="800"/>
+              </a:spcBef>
+            </a:pPr>
+            <a:r>
+              <a:rPr sz="1200" b="0" i="0">
+                <a:solidFill>
+                  <a:srgbClr val="4E5964"/>
+                </a:solidFill>
+                <a:latin typeface="Pretendard"/>
+                <a:ea typeface="Pretendard"/>
+              </a:rPr>
+              <a:t>소싱한 상품의 주소만 붙여넣으면, 이미지와 상품 정보가 자동으로 담깁니다.</a:t>
+            </a:r>
+          </a:p>
+        </p:txBody>
+      </p:sp>
+      <p:sp>
+        <p:nvSpPr>
+          <p:cNvPr id="7" name="TextBox 6"/>
+          <p:cNvSpPr txBox="1"/>
+          <p:nvPr/>
+        </p:nvSpPr>
+        <p:spPr>
+          <a:xfrm>
+            <a:off x="822960" y="2743200"/>
+            <a:ext cx="502920" cy="457200"/>
+          </a:xfrm>
+          <a:prstGeom prst="rect">
+            <a:avLst/>
+          </a:prstGeom>
+          <a:noFill/>
+        </p:spPr>
+        <p:txBody>
+          <a:bodyPr wrap="square" lIns="0" rIns="0" tIns="0" bIns="0">
+            <a:spAutoFit/>
+          </a:bodyPr>
+          <a:lstStyle/>
+          <a:p>
+            <a:pPr algn="ctr">
+              <a:lnSpc>
+                <a:spcPct val="100000"/>
+              </a:lnSpc>
+            </a:pPr>
+            <a:r>
+              <a:rPr sz="1600" b="0" i="0">
                 <a:solidFill>
                   <a:srgbClr val="191F28"/>
                 </a:solidFill>
-                <a:latin typeface="Noto Serif KR"/>
-                <a:ea typeface="Noto Serif KR"/>
-              </a:rPr>
-              <a:t>로 바로 이동합니다.</a:t>
+                <a:latin typeface="Pretendard"/>
+                <a:ea typeface="Pretendard"/>
+              </a:rPr>
+              <a:t>🔗</a:t>
+            </a:r>
+          </a:p>
+        </p:txBody>
+      </p:sp>
+      <p:sp>
+        <p:nvSpPr>
+          <p:cNvPr id="8" name="TextBox 7"/>
+          <p:cNvSpPr txBox="1"/>
+          <p:nvPr/>
+        </p:nvSpPr>
+        <p:spPr>
+          <a:xfrm>
+            <a:off x="1389888" y="2734056"/>
+            <a:ext cx="4297680" cy="960120"/>
+          </a:xfrm>
+          <a:prstGeom prst="rect">
+            <a:avLst/>
+          </a:prstGeom>
+          <a:noFill/>
+        </p:spPr>
+        <p:txBody>
+          <a:bodyPr wrap="square" lIns="0" rIns="0" tIns="0" bIns="0">
+            <a:spAutoFit/>
+          </a:bodyPr>
+          <a:lstStyle/>
+          <a:p>
+            <a:pPr algn="l">
+              <a:lnSpc>
+                <a:spcPct val="100000"/>
+              </a:lnSpc>
+              <a:spcAft>
+                <a:spcPts val="300"/>
+              </a:spcAft>
+            </a:pPr>
+            <a:r>
+              <a:rPr sz="1200" b="0" i="0">
+                <a:solidFill>
+                  <a:srgbClr val="191F28"/>
+                </a:solidFill>
+                <a:latin typeface="Pretendard ExtraBold"/>
+                <a:ea typeface="Pretendard ExtraBold"/>
+              </a:rPr>
+              <a:t>스마트스토어·1688 링크 불러오기</a:t>
+            </a:r>
+          </a:p>
+          <a:p>
+            <a:pPr algn="l">
+              <a:lnSpc>
+                <a:spcPct val="128000"/>
+              </a:lnSpc>
+            </a:pPr>
+            <a:r>
+              <a:rPr sz="1050" b="0" i="0">
+                <a:solidFill>
+                  <a:srgbClr val="4E5964"/>
+                </a:solidFill>
+                <a:latin typeface="Pretendard"/>
+                <a:ea typeface="Pretendard"/>
+              </a:rPr>
+              <a:t>상품 주소를 붙여넣으면 새 창이 열려 상세 내용과 이미지를 가져옵니다. 최근 업데이트로 속도가 눈에 띄게 빨라졌습니다.</a:t>
+            </a:r>
+          </a:p>
+        </p:txBody>
+      </p:sp>
+      <p:sp>
+        <p:nvSpPr>
+          <p:cNvPr id="9" name="Rectangle 8"/>
+          <p:cNvSpPr/>
+          <p:nvPr/>
+        </p:nvSpPr>
+        <p:spPr>
+          <a:xfrm>
+            <a:off x="822960" y="3739896"/>
+            <a:ext cx="4846320" cy="10972"/>
+          </a:xfrm>
+          <a:prstGeom prst="rect">
+            <a:avLst/>
+          </a:prstGeom>
+          <a:solidFill>
+            <a:srgbClr val="EAE5D8"/>
+          </a:solidFill>
+          <a:ln>
+            <a:noFill/>
+          </a:ln>
+          <a:effectLst/>
+        </p:spPr>
+        <p:style>
+          <a:lnRef idx="1">
+            <a:schemeClr val="accent1"/>
+          </a:lnRef>
+          <a:fillRef idx="3">
+            <a:schemeClr val="accent1"/>
+          </a:fillRef>
+          <a:effectRef idx="2">
+            <a:schemeClr val="accent1"/>
+          </a:effectRef>
+          <a:fontRef idx="minor">
+            <a:schemeClr val="lt1"/>
+          </a:fontRef>
+        </p:style>
+        <p:txBody>
+          <a:bodyPr rtlCol="0" anchor="ctr"/>
+          <a:lstStyle/>
+          <a:p>
+            <a:pPr algn="ctr"/>
+          </a:p>
+        </p:txBody>
+      </p:sp>
+      <p:sp>
+        <p:nvSpPr>
+          <p:cNvPr id="10" name="TextBox 9"/>
+          <p:cNvSpPr txBox="1"/>
+          <p:nvPr/>
+        </p:nvSpPr>
+        <p:spPr>
+          <a:xfrm>
+            <a:off x="822960" y="3822191"/>
+            <a:ext cx="502920" cy="457200"/>
+          </a:xfrm>
+          <a:prstGeom prst="rect">
+            <a:avLst/>
+          </a:prstGeom>
+          <a:noFill/>
+        </p:spPr>
+        <p:txBody>
+          <a:bodyPr wrap="square" lIns="0" rIns="0" tIns="0" bIns="0">
+            <a:spAutoFit/>
+          </a:bodyPr>
+          <a:lstStyle/>
+          <a:p>
+            <a:pPr algn="ctr">
+              <a:lnSpc>
+                <a:spcPct val="100000"/>
+              </a:lnSpc>
+            </a:pPr>
+            <a:r>
+              <a:rPr sz="1600" b="0" i="0">
+                <a:solidFill>
+                  <a:srgbClr val="191F28"/>
+                </a:solidFill>
+                <a:latin typeface="Pretendard"/>
+                <a:ea typeface="Pretendard"/>
+              </a:rPr>
+              <a:t>🤖</a:t>
+            </a:r>
+          </a:p>
+        </p:txBody>
+      </p:sp>
+      <p:sp>
+        <p:nvSpPr>
+          <p:cNvPr id="11" name="TextBox 10"/>
+          <p:cNvSpPr txBox="1"/>
+          <p:nvPr/>
+        </p:nvSpPr>
+        <p:spPr>
+          <a:xfrm>
+            <a:off x="1389888" y="3813048"/>
+            <a:ext cx="4297680" cy="960120"/>
+          </a:xfrm>
+          <a:prstGeom prst="rect">
+            <a:avLst/>
+          </a:prstGeom>
+          <a:noFill/>
+        </p:spPr>
+        <p:txBody>
+          <a:bodyPr wrap="square" lIns="0" rIns="0" tIns="0" bIns="0">
+            <a:spAutoFit/>
+          </a:bodyPr>
+          <a:lstStyle/>
+          <a:p>
+            <a:pPr algn="l">
+              <a:lnSpc>
+                <a:spcPct val="100000"/>
+              </a:lnSpc>
+              <a:spcAft>
+                <a:spcPts val="300"/>
+              </a:spcAft>
+            </a:pPr>
+            <a:r>
+              <a:rPr sz="1200" b="0" i="0">
+                <a:solidFill>
+                  <a:srgbClr val="191F28"/>
+                </a:solidFill>
+                <a:latin typeface="Pretendard ExtraBold"/>
+                <a:ea typeface="Pretendard ExtraBold"/>
+              </a:rPr>
+              <a:t>상품 아닌 이미지는 AI가 거릅니다</a:t>
+            </a:r>
+          </a:p>
+          <a:p>
+            <a:pPr algn="l">
+              <a:lnSpc>
+                <a:spcPct val="128000"/>
+              </a:lnSpc>
+            </a:pPr>
+            <a:r>
+              <a:rPr sz="1050" b="0" i="0">
+                <a:solidFill>
+                  <a:srgbClr val="4E5964"/>
+                </a:solidFill>
+                <a:latin typeface="Pretendard"/>
+                <a:ea typeface="Pretendard"/>
+              </a:rPr>
+              <a:t>공지·구매평·할인 배너처럼 상세에 못 쓰는 이미지를 알아서 빼고, 중국어 문구도 한국어 기준으로 정리합니다.</a:t>
+            </a:r>
+          </a:p>
+        </p:txBody>
+      </p:sp>
+      <p:sp>
+        <p:nvSpPr>
+          <p:cNvPr id="12" name="Rectangle 11"/>
+          <p:cNvSpPr/>
+          <p:nvPr/>
+        </p:nvSpPr>
+        <p:spPr>
+          <a:xfrm>
+            <a:off x="822960" y="4818888"/>
+            <a:ext cx="4846320" cy="10972"/>
+          </a:xfrm>
+          <a:prstGeom prst="rect">
+            <a:avLst/>
+          </a:prstGeom>
+          <a:solidFill>
+            <a:srgbClr val="EAE5D8"/>
+          </a:solidFill>
+          <a:ln>
+            <a:noFill/>
+          </a:ln>
+          <a:effectLst/>
+        </p:spPr>
+        <p:style>
+          <a:lnRef idx="1">
+            <a:schemeClr val="accent1"/>
+          </a:lnRef>
+          <a:fillRef idx="3">
+            <a:schemeClr val="accent1"/>
+          </a:fillRef>
+          <a:effectRef idx="2">
+            <a:schemeClr val="accent1"/>
+          </a:effectRef>
+          <a:fontRef idx="minor">
+            <a:schemeClr val="lt1"/>
+          </a:fontRef>
+        </p:style>
+        <p:txBody>
+          <a:bodyPr rtlCol="0" anchor="ctr"/>
+          <a:lstStyle/>
+          <a:p>
+            <a:pPr algn="ctr"/>
+          </a:p>
+        </p:txBody>
+      </p:sp>
+      <p:sp>
+        <p:nvSpPr>
+          <p:cNvPr id="13" name="TextBox 12"/>
+          <p:cNvSpPr txBox="1"/>
+          <p:nvPr/>
+        </p:nvSpPr>
+        <p:spPr>
+          <a:xfrm>
+            <a:off x="822960" y="4901183"/>
+            <a:ext cx="502920" cy="457200"/>
+          </a:xfrm>
+          <a:prstGeom prst="rect">
+            <a:avLst/>
+          </a:prstGeom>
+          <a:noFill/>
+        </p:spPr>
+        <p:txBody>
+          <a:bodyPr wrap="square" lIns="0" rIns="0" tIns="0" bIns="0">
+            <a:spAutoFit/>
+          </a:bodyPr>
+          <a:lstStyle/>
+          <a:p>
+            <a:pPr algn="ctr">
+              <a:lnSpc>
+                <a:spcPct val="100000"/>
+              </a:lnSpc>
+            </a:pPr>
+            <a:r>
+              <a:rPr sz="1600" b="0" i="0">
+                <a:solidFill>
+                  <a:srgbClr val="191F28"/>
+                </a:solidFill>
+                <a:latin typeface="Pretendard"/>
+                <a:ea typeface="Pretendard"/>
+              </a:rPr>
+              <a:t>🧩</a:t>
+            </a:r>
+          </a:p>
+        </p:txBody>
+      </p:sp>
+      <p:sp>
+        <p:nvSpPr>
+          <p:cNvPr id="14" name="TextBox 13"/>
+          <p:cNvSpPr txBox="1"/>
+          <p:nvPr/>
+        </p:nvSpPr>
+        <p:spPr>
+          <a:xfrm>
+            <a:off x="1389888" y="4892040"/>
+            <a:ext cx="4297680" cy="960120"/>
+          </a:xfrm>
+          <a:prstGeom prst="rect">
+            <a:avLst/>
+          </a:prstGeom>
+          <a:noFill/>
+        </p:spPr>
+        <p:txBody>
+          <a:bodyPr wrap="square" lIns="0" rIns="0" tIns="0" bIns="0">
+            <a:spAutoFit/>
+          </a:bodyPr>
+          <a:lstStyle/>
+          <a:p>
+            <a:pPr algn="l">
+              <a:lnSpc>
+                <a:spcPct val="100000"/>
+              </a:lnSpc>
+              <a:spcAft>
+                <a:spcPts val="300"/>
+              </a:spcAft>
+            </a:pPr>
+            <a:r>
+              <a:rPr sz="1200" b="0" i="0">
+                <a:solidFill>
+                  <a:srgbClr val="191F28"/>
+                </a:solidFill>
+                <a:latin typeface="Pretendard ExtraBold"/>
+                <a:ea typeface="Pretendard ExtraBold"/>
+              </a:rPr>
+              <a:t>확장 프로그램은 한 번만 설치</a:t>
+            </a:r>
+          </a:p>
+          <a:p>
+            <a:pPr algn="l">
+              <a:lnSpc>
+                <a:spcPct val="128000"/>
+              </a:lnSpc>
+            </a:pPr>
+            <a:r>
+              <a:rPr sz="1050" b="0" i="0">
+                <a:solidFill>
+                  <a:srgbClr val="4E5964"/>
+                </a:solidFill>
+                <a:latin typeface="Pretendard"/>
+                <a:ea typeface="Pretendard"/>
+              </a:rPr>
+              <a:t>웹스토어 버튼과 설치 안내가 화면 안에 있습니다. 처음 한 번만 설치하면 다음부터는 붙여넣기만 하면 됩니다.</a:t>
             </a:r>
           </a:p>
         </p:txBody>
       </p:sp>
       <p:pic>
         <p:nvPicPr>
-          <p:cNvPr id="7" name="Picture 6" descr="fc_nav.jpg"/>
+          <p:cNvPr id="15" name="Picture 14" descr="fc_link.jpg"/>
           <p:cNvPicPr>
             <a:picLocks noChangeAspect="1"/>
           </p:cNvPicPr>
@@ -10634,15 +11003,15 @@
         </p:blipFill>
         <p:spPr>
           <a:xfrm>
-            <a:off x="1097280" y="1783080"/>
-            <a:ext cx="9994392" cy="616321"/>
+            <a:off x="6263640" y="1783080"/>
+            <a:ext cx="4892040" cy="2690622"/>
           </a:xfrm>
           <a:prstGeom prst="rect">
             <a:avLst/>
           </a:prstGeom>
           <a:ln w="12700">
             <a:solidFill>
-              <a:srgbClr val="D9D3C5"/>
+              <a:srgbClr val="EAE5D8"/>
             </a:solidFill>
           </a:ln>
           <a:effectLst/>
@@ -10657,58 +11026,14 @@
       </p:pic>
       <p:sp>
         <p:nvSpPr>
-          <p:cNvPr id="8" name="Oval 7"/>
-          <p:cNvSpPr/>
-          <p:nvPr/>
-        </p:nvSpPr>
-        <p:spPr>
-          <a:xfrm>
-            <a:off x="6014520" y="1732788"/>
-            <a:ext cx="929478" cy="716904"/>
-          </a:xfrm>
-          <a:prstGeom prst="ellipse">
-            <a:avLst/>
-          </a:prstGeom>
-          <a:noFill/>
-          <a:ln w="28575">
-            <a:solidFill>
-              <a:srgbClr val="0F4E53"/>
-            </a:solidFill>
-          </a:ln>
-          <a:effectLst/>
-        </p:spPr>
-        <p:style>
-          <a:lnRef idx="1">
-            <a:schemeClr val="accent1"/>
-          </a:lnRef>
-          <a:fillRef idx="3">
-            <a:schemeClr val="accent1"/>
-          </a:fillRef>
-          <a:effectRef idx="2">
-            <a:schemeClr val="accent1"/>
-          </a:effectRef>
-          <a:fontRef idx="minor">
-            <a:schemeClr val="lt1"/>
-          </a:fontRef>
-        </p:style>
-        <p:txBody>
-          <a:bodyPr rtlCol="0" anchor="ctr"/>
-          <a:lstStyle/>
-          <a:p>
-            <a:pPr algn="ctr"/>
-          </a:p>
-        </p:txBody>
-      </p:sp>
-      <p:sp>
-        <p:nvSpPr>
-          <p:cNvPr id="9" name="TextBox 8"/>
+          <p:cNvPr id="16" name="TextBox 15"/>
           <p:cNvSpPr txBox="1"/>
           <p:nvPr/>
         </p:nvSpPr>
         <p:spPr>
           <a:xfrm>
-            <a:off x="822960" y="2527416"/>
-            <a:ext cx="10543032" cy="256032"/>
+            <a:off x="5989320" y="4583430"/>
+            <a:ext cx="5440679" cy="256032"/>
           </a:xfrm>
           <a:prstGeom prst="rect">
             <a:avLst/>
@@ -10727,406 +11052,14 @@
               </a:lnSpc>
             </a:pPr>
             <a:r>
-              <a:rPr sz="950" b="0" i="0">
-                <a:solidFill>
-                  <a:srgbClr val="0F4E53"/>
-                </a:solidFill>
-                <a:latin typeface="Pretendard ExtraBold"/>
-                <a:ea typeface="Pretendard ExtraBold"/>
-              </a:rPr>
-              <a:t>프리캔버스 상단 메뉴 속 「검색마스터」 — 실제 화면</a:t>
-            </a:r>
-          </a:p>
-        </p:txBody>
-      </p:sp>
-      <p:sp>
-        <p:nvSpPr>
-          <p:cNvPr id="10" name="Rounded Rectangle 9"/>
-          <p:cNvSpPr/>
-          <p:nvPr/>
-        </p:nvSpPr>
-        <p:spPr>
-          <a:xfrm>
-            <a:off x="1188720" y="3291840"/>
-            <a:ext cx="4206240" cy="1371600"/>
-          </a:xfrm>
-          <a:prstGeom prst="roundRect">
-            <a:avLst>
-              <a:gd name="adj" fmla="val 10000"/>
-            </a:avLst>
-          </a:prstGeom>
-          <a:solidFill>
-            <a:srgbClr val="FFFDF7"/>
-          </a:solidFill>
-          <a:ln w="9525">
-            <a:solidFill>
-              <a:srgbClr val="D9D3C5"/>
-            </a:solidFill>
-          </a:ln>
-          <a:effectLst/>
-          <a:effectLst>
-            <a:outerShdw blurRad="170000" dist="50000" dir="5400000" rotWithShape="0">
-              <a:srgbClr val="16241C">
-                <a:alpha val="30000"/>
-              </a:srgbClr>
-            </a:outerShdw>
-          </a:effectLst>
-        </p:spPr>
-        <p:style>
-          <a:lnRef idx="1">
-            <a:schemeClr val="accent1"/>
-          </a:lnRef>
-          <a:fillRef idx="3">
-            <a:schemeClr val="accent1"/>
-          </a:fillRef>
-          <a:effectRef idx="2">
-            <a:schemeClr val="accent1"/>
-          </a:effectRef>
-          <a:fontRef idx="minor">
-            <a:schemeClr val="lt1"/>
-          </a:fontRef>
-        </p:style>
-        <p:txBody>
-          <a:bodyPr rtlCol="0" anchor="ctr"/>
-          <a:lstStyle/>
-          <a:p>
-            <a:pPr algn="ctr"/>
-          </a:p>
-        </p:txBody>
-      </p:sp>
-      <p:sp>
-        <p:nvSpPr>
-          <p:cNvPr id="11" name="TextBox 10"/>
-          <p:cNvSpPr txBox="1"/>
-          <p:nvPr/>
-        </p:nvSpPr>
-        <p:spPr>
-          <a:xfrm>
-            <a:off x="1481328" y="3529584"/>
-            <a:ext cx="3611880" cy="960120"/>
-          </a:xfrm>
-          <a:prstGeom prst="rect">
-            <a:avLst/>
-          </a:prstGeom>
-          <a:noFill/>
-        </p:spPr>
-        <p:txBody>
-          <a:bodyPr wrap="square" lIns="0" rIns="0" tIns="0" bIns="0">
-            <a:spAutoFit/>
-          </a:bodyPr>
-          <a:lstStyle/>
-          <a:p>
-            <a:pPr algn="l">
-              <a:lnSpc>
-                <a:spcPct val="100000"/>
-              </a:lnSpc>
-              <a:spcAft>
-                <a:spcPts val="500"/>
-              </a:spcAft>
-            </a:pPr>
-            <a:r>
-              <a:rPr sz="1450" b="1" i="0">
-                <a:solidFill>
-                  <a:srgbClr val="191F28"/>
-                </a:solidFill>
-                <a:latin typeface="Noto Serif KR"/>
-                <a:ea typeface="Noto Serif KR"/>
-              </a:rPr>
-              <a:t>프리캔버스에서 작업하다가</a:t>
-            </a:r>
-          </a:p>
-          <a:p>
-            <a:pPr algn="l">
-              <a:lnSpc>
-                <a:spcPct val="130000"/>
-              </a:lnSpc>
-            </a:pPr>
-            <a:r>
-              <a:rPr sz="1100" b="0" i="0">
-                <a:solidFill>
-                  <a:srgbClr val="2B333D"/>
+              <a:rPr sz="900" b="0" i="0">
+                <a:solidFill>
+                  <a:srgbClr val="4E5964"/>
                 </a:solidFill>
                 <a:latin typeface="Pretendard"/>
                 <a:ea typeface="Pretendard"/>
               </a:rPr>
-              <a:t>상세페이지를 만들다 상품명이나 키워드가 필요해지면,</a:t>
-            </a:r>
-          </a:p>
-        </p:txBody>
-      </p:sp>
-      <p:sp>
-        <p:nvSpPr>
-          <p:cNvPr id="12" name="TextBox 11"/>
-          <p:cNvSpPr txBox="1"/>
-          <p:nvPr/>
-        </p:nvSpPr>
-        <p:spPr>
-          <a:xfrm>
-            <a:off x="5577840" y="3566160"/>
-            <a:ext cx="1051560" cy="868680"/>
-          </a:xfrm>
-          <a:prstGeom prst="rect">
-            <a:avLst/>
-          </a:prstGeom>
-          <a:noFill/>
-        </p:spPr>
-        <p:txBody>
-          <a:bodyPr wrap="square" lIns="0" rIns="0" tIns="0" bIns="0">
-            <a:spAutoFit/>
-          </a:bodyPr>
-          <a:lstStyle/>
-          <a:p>
-            <a:pPr algn="ctr">
-              <a:lnSpc>
-                <a:spcPct val="100000"/>
-              </a:lnSpc>
-              <a:spcAft>
-                <a:spcPts val="300"/>
-              </a:spcAft>
-            </a:pPr>
-            <a:r>
-              <a:rPr sz="2400" b="1" i="0">
-                <a:solidFill>
-                  <a:srgbClr val="0F4E53"/>
-                </a:solidFill>
-                <a:latin typeface="Pretendard"/>
-                <a:ea typeface="Pretendard"/>
-              </a:rPr>
-              <a:t>→</a:t>
-            </a:r>
-          </a:p>
-          <a:p>
-            <a:pPr algn="ctr">
-              <a:lnSpc>
-                <a:spcPct val="100000"/>
-              </a:lnSpc>
-            </a:pPr>
-            <a:r>
-              <a:rPr sz="950" b="0" i="0">
-                <a:solidFill>
-                  <a:srgbClr val="0B3B3F"/>
-                </a:solidFill>
-                <a:latin typeface="Pretendard ExtraBold"/>
-                <a:ea typeface="Pretendard ExtraBold"/>
-              </a:rPr>
-              <a:t>버튼 한 번</a:t>
-            </a:r>
-          </a:p>
-        </p:txBody>
-      </p:sp>
-      <p:sp>
-        <p:nvSpPr>
-          <p:cNvPr id="13" name="Rounded Rectangle 12"/>
-          <p:cNvSpPr/>
-          <p:nvPr/>
-        </p:nvSpPr>
-        <p:spPr>
-          <a:xfrm>
-            <a:off x="6812280" y="3291840"/>
-            <a:ext cx="4206240" cy="1371600"/>
-          </a:xfrm>
-          <a:prstGeom prst="roundRect">
-            <a:avLst>
-              <a:gd name="adj" fmla="val 10000"/>
-            </a:avLst>
-          </a:prstGeom>
-          <a:solidFill>
-            <a:srgbClr val="F2F6F5"/>
-          </a:solidFill>
-          <a:ln w="9525">
-            <a:solidFill>
-              <a:srgbClr val="CFDEDC"/>
-            </a:solidFill>
-          </a:ln>
-          <a:effectLst/>
-          <a:effectLst>
-            <a:outerShdw blurRad="170000" dist="50000" dir="5400000" rotWithShape="0">
-              <a:srgbClr val="16241C">
-                <a:alpha val="30000"/>
-              </a:srgbClr>
-            </a:outerShdw>
-          </a:effectLst>
-        </p:spPr>
-        <p:style>
-          <a:lnRef idx="1">
-            <a:schemeClr val="accent1"/>
-          </a:lnRef>
-          <a:fillRef idx="3">
-            <a:schemeClr val="accent1"/>
-          </a:fillRef>
-          <a:effectRef idx="2">
-            <a:schemeClr val="accent1"/>
-          </a:effectRef>
-          <a:fontRef idx="minor">
-            <a:schemeClr val="lt1"/>
-          </a:fontRef>
-        </p:style>
-        <p:txBody>
-          <a:bodyPr rtlCol="0" anchor="ctr"/>
-          <a:lstStyle/>
-          <a:p>
-            <a:pPr algn="ctr"/>
-          </a:p>
-        </p:txBody>
-      </p:sp>
-      <p:sp>
-        <p:nvSpPr>
-          <p:cNvPr id="14" name="TextBox 13"/>
-          <p:cNvSpPr txBox="1"/>
-          <p:nvPr/>
-        </p:nvSpPr>
-        <p:spPr>
-          <a:xfrm>
-            <a:off x="7104888" y="3529584"/>
-            <a:ext cx="3611880" cy="960120"/>
-          </a:xfrm>
-          <a:prstGeom prst="rect">
-            <a:avLst/>
-          </a:prstGeom>
-          <a:noFill/>
-        </p:spPr>
-        <p:txBody>
-          <a:bodyPr wrap="square" lIns="0" rIns="0" tIns="0" bIns="0">
-            <a:spAutoFit/>
-          </a:bodyPr>
-          <a:lstStyle/>
-          <a:p>
-            <a:pPr algn="l">
-              <a:lnSpc>
-                <a:spcPct val="100000"/>
-              </a:lnSpc>
-              <a:spcAft>
-                <a:spcPts val="500"/>
-              </a:spcAft>
-            </a:pPr>
-            <a:r>
-              <a:rPr sz="1450" b="1" i="0">
-                <a:solidFill>
-                  <a:srgbClr val="191F28"/>
-                </a:solidFill>
-                <a:latin typeface="Noto Serif KR"/>
-                <a:ea typeface="Noto Serif KR"/>
-              </a:rPr>
-              <a:t>검색마스터가 새 탭으로</a:t>
-            </a:r>
-          </a:p>
-          <a:p>
-            <a:pPr algn="l">
-              <a:lnSpc>
-                <a:spcPct val="130000"/>
-              </a:lnSpc>
-            </a:pPr>
-            <a:r>
-              <a:rPr sz="1100" b="0" i="0">
-                <a:solidFill>
-                  <a:srgbClr val="2B333D"/>
-                </a:solidFill>
-                <a:latin typeface="Pretendard"/>
-                <a:ea typeface="Pretendard"/>
-              </a:rPr>
-              <a:t>쓰던 구글 계정 그대로 열립니다. 다시 로그인할 필요가 없습니다.</a:t>
-            </a:r>
-          </a:p>
-        </p:txBody>
-      </p:sp>
-      <p:sp>
-        <p:nvSpPr>
-          <p:cNvPr id="15" name="Rounded Rectangle 14"/>
-          <p:cNvSpPr/>
-          <p:nvPr/>
-        </p:nvSpPr>
-        <p:spPr>
-          <a:xfrm>
-            <a:off x="3063240" y="5230368"/>
-            <a:ext cx="1691640" cy="384048"/>
-          </a:xfrm>
-          <a:prstGeom prst="roundRect">
-            <a:avLst>
-              <a:gd name="adj" fmla="val 50000"/>
-            </a:avLst>
-          </a:prstGeom>
-          <a:solidFill>
-            <a:srgbClr val="FFFFFF"/>
-          </a:solidFill>
-          <a:ln w="9525">
-            <a:solidFill>
-              <a:srgbClr val="D9D3C5"/>
-            </a:solidFill>
-          </a:ln>
-          <a:effectLst/>
-        </p:spPr>
-        <p:style>
-          <a:lnRef idx="1">
-            <a:schemeClr val="accent1"/>
-          </a:lnRef>
-          <a:fillRef idx="3">
-            <a:schemeClr val="accent1"/>
-          </a:fillRef>
-          <a:effectRef idx="2">
-            <a:schemeClr val="accent1"/>
-          </a:effectRef>
-          <a:fontRef idx="minor">
-            <a:schemeClr val="lt1"/>
-          </a:fontRef>
-        </p:style>
-        <p:txBody>
-          <a:bodyPr rtlCol="0" anchor="ctr" wrap="none" lIns="0" rIns="0" tIns="0" bIns="0"/>
-          <a:lstStyle/>
-          <a:p>
-            <a:pPr algn="ctr">
-              <a:lnSpc>
-                <a:spcPct val="100000"/>
-              </a:lnSpc>
-            </a:pPr>
-            <a:r>
-              <a:rPr sz="1050" b="0" i="0">
-                <a:solidFill>
-                  <a:srgbClr val="191F28"/>
-                </a:solidFill>
-                <a:latin typeface="Pretendard SemiBold"/>
-                <a:ea typeface="Pretendard SemiBold"/>
-              </a:rPr>
-              <a:t>● 하나의 구글 계정</a:t>
-            </a:r>
-          </a:p>
-        </p:txBody>
-      </p:sp>
-      <p:sp>
-        <p:nvSpPr>
-          <p:cNvPr id="16" name="TextBox 15"/>
-          <p:cNvSpPr txBox="1"/>
-          <p:nvPr/>
-        </p:nvSpPr>
-        <p:spPr>
-          <a:xfrm>
-            <a:off x="4864608" y="5330952"/>
-            <a:ext cx="5120640" cy="274320"/>
-          </a:xfrm>
-          <a:prstGeom prst="rect">
-            <a:avLst/>
-          </a:prstGeom>
-          <a:noFill/>
-        </p:spPr>
-        <p:txBody>
-          <a:bodyPr wrap="square" lIns="0" rIns="0" tIns="0" bIns="0">
-            <a:spAutoFit/>
-          </a:bodyPr>
-          <a:lstStyle/>
-          <a:p>
-            <a:pPr algn="l">
-              <a:lnSpc>
-                <a:spcPct val="100000"/>
-              </a:lnSpc>
-            </a:pPr>
-            <a:r>
-              <a:rPr sz="1050" b="0" i="0">
-                <a:solidFill>
-                  <a:srgbClr val="4E5964"/>
-                </a:solidFill>
-                <a:latin typeface="Pretendard"/>
-                <a:ea typeface="Pretendard"/>
-              </a:rPr>
-              <a:t>으로 두 서비스를 오갑니다. 구독은 서비스별로 따로 적용됩니다.</a:t>
+              <a:t>링크마다 “불러오기” 버튼 하나 — 가격·비상품 이미지는 자동으로 걸러집니다</a:t>
             </a:r>
           </a:p>
         </p:txBody>
@@ -11378,7 +11311,7 @@
                 <a:latin typeface="Pretendard ExtraBold"/>
                 <a:ea typeface="Pretendard ExtraBold"/>
               </a:rPr>
-              <a:t>검색마스터 새 기능</a:t>
+              <a:t>두 서비스 연결</a:t>
             </a:r>
           </a:p>
         </p:txBody>
@@ -11391,8 +11324,8 @@
         </p:nvSpPr>
         <p:spPr>
           <a:xfrm>
-            <a:off x="822960" y="1234440"/>
-            <a:ext cx="4937760" cy="1280160"/>
+            <a:off x="822960" y="960120"/>
+            <a:ext cx="10515600" cy="566928"/>
           </a:xfrm>
           <a:prstGeom prst="rect">
             <a:avLst/>
@@ -11405,435 +11338,47 @@
           </a:bodyPr>
           <a:lstStyle/>
           <a:p>
-            <a:pPr algn="l">
-              <a:lnSpc>
-                <a:spcPct val="130000"/>
-              </a:lnSpc>
-            </a:pPr>
-            <a:r>
-              <a:rPr sz="2400" b="1" i="0">
+            <a:pPr algn="ctr">
+              <a:lnSpc>
+                <a:spcPct val="100000"/>
+              </a:lnSpc>
+            </a:pPr>
+            <a:r>
+              <a:rPr sz="2200" b="1" i="0">
                 <a:solidFill>
                   <a:srgbClr val="191F28"/>
                 </a:solidFill>
                 <a:latin typeface="Noto Serif KR"/>
                 <a:ea typeface="Noto Serif KR"/>
               </a:rPr>
-              <a:t>상품 설명 입력</a:t>
-            </a:r>
-          </a:p>
-          <a:p>
-            <a:pPr algn="l">
-              <a:lnSpc>
-                <a:spcPct val="140000"/>
-              </a:lnSpc>
-              <a:spcBef>
-                <a:spcPts val="800"/>
-              </a:spcBef>
-            </a:pPr>
-            <a:r>
-              <a:rPr sz="1200" b="0" i="0">
-                <a:solidFill>
-                  <a:srgbClr val="4E5964"/>
-                </a:solidFill>
-                <a:latin typeface="Pretendard"/>
-                <a:ea typeface="Pretendard"/>
-              </a:rPr>
-              <a:t>사진과 함께 상품 설명을 입력하면, 상품명이 눈에 띄게 정확해집니다.</a:t>
-            </a:r>
-          </a:p>
-        </p:txBody>
-      </p:sp>
-      <p:sp>
-        <p:nvSpPr>
-          <p:cNvPr id="7" name="TextBox 6"/>
-          <p:cNvSpPr txBox="1"/>
-          <p:nvPr/>
-        </p:nvSpPr>
-        <p:spPr>
-          <a:xfrm>
-            <a:off x="822960" y="2743200"/>
-            <a:ext cx="502920" cy="457200"/>
-          </a:xfrm>
-          <a:prstGeom prst="rect">
-            <a:avLst/>
-          </a:prstGeom>
-          <a:noFill/>
-        </p:spPr>
-        <p:txBody>
-          <a:bodyPr wrap="square" lIns="0" rIns="0" tIns="0" bIns="0">
-            <a:spAutoFit/>
-          </a:bodyPr>
-          <a:lstStyle/>
-          <a:p>
-            <a:pPr algn="ctr">
-              <a:lnSpc>
-                <a:spcPct val="100000"/>
-              </a:lnSpc>
-            </a:pPr>
-            <a:r>
-              <a:rPr sz="1600" b="0" i="0">
+              <a:t>프리캔버스 상단 메뉴에서 </a:t>
+            </a:r>
+            <a:r>
+              <a:rPr sz="2200" b="1" i="0">
+                <a:solidFill>
+                  <a:srgbClr val="0F4E53"/>
+                </a:solidFill>
+                <a:latin typeface="Noto Serif KR"/>
+                <a:ea typeface="Noto Serif KR"/>
+              </a:rPr>
+              <a:t>검색마스터</a:t>
+            </a:r>
+            <a:r>
+              <a:rPr sz="2200" b="1" i="0">
                 <a:solidFill>
                   <a:srgbClr val="191F28"/>
                 </a:solidFill>
-                <a:latin typeface="Pretendard"/>
-                <a:ea typeface="Pretendard"/>
-              </a:rPr>
-              <a:t>✏️</a:t>
-            </a:r>
-          </a:p>
-        </p:txBody>
-      </p:sp>
-      <p:sp>
-        <p:nvSpPr>
-          <p:cNvPr id="8" name="TextBox 7"/>
-          <p:cNvSpPr txBox="1"/>
-          <p:nvPr/>
-        </p:nvSpPr>
-        <p:spPr>
-          <a:xfrm>
-            <a:off x="1389888" y="2734056"/>
-            <a:ext cx="4297680" cy="960120"/>
-          </a:xfrm>
-          <a:prstGeom prst="rect">
-            <a:avLst/>
-          </a:prstGeom>
-          <a:noFill/>
-        </p:spPr>
-        <p:txBody>
-          <a:bodyPr wrap="square" lIns="0" rIns="0" tIns="0" bIns="0">
-            <a:spAutoFit/>
-          </a:bodyPr>
-          <a:lstStyle/>
-          <a:p>
-            <a:pPr algn="l">
-              <a:lnSpc>
-                <a:spcPct val="100000"/>
-              </a:lnSpc>
-              <a:spcAft>
-                <a:spcPts val="300"/>
-              </a:spcAft>
-            </a:pPr>
-            <a:r>
-              <a:rPr sz="1200" b="0" i="0">
-                <a:solidFill>
-                  <a:srgbClr val="191F28"/>
-                </a:solidFill>
-                <a:latin typeface="Pretendard ExtraBold"/>
-                <a:ea typeface="Pretendard ExtraBold"/>
-              </a:rPr>
-              <a:t>실제 상품·용도 설명 입력</a:t>
-            </a:r>
-          </a:p>
-          <a:p>
-            <a:pPr algn="l">
-              <a:lnSpc>
-                <a:spcPct val="128000"/>
-              </a:lnSpc>
-            </a:pPr>
-            <a:r>
-              <a:rPr sz="1050" b="0" i="0">
-                <a:solidFill>
-                  <a:srgbClr val="4E5964"/>
-                </a:solidFill>
-                <a:latin typeface="Pretendard"/>
-                <a:ea typeface="Pretendard"/>
-              </a:rPr>
-              <a:t>“책상 위에 놓는 무선 충전 겸용 스탠드”처럼 한 줄만 적으면, 사진만으로는 놓치기 쉬운 재질과 용도까지 상품명에 담깁니다.</a:t>
-            </a:r>
-          </a:p>
-        </p:txBody>
-      </p:sp>
-      <p:sp>
-        <p:nvSpPr>
-          <p:cNvPr id="9" name="Rectangle 8"/>
-          <p:cNvSpPr/>
-          <p:nvPr/>
-        </p:nvSpPr>
-        <p:spPr>
-          <a:xfrm>
-            <a:off x="822960" y="3739896"/>
-            <a:ext cx="4846320" cy="10972"/>
-          </a:xfrm>
-          <a:prstGeom prst="rect">
-            <a:avLst/>
-          </a:prstGeom>
-          <a:solidFill>
-            <a:srgbClr val="EAE5D8"/>
-          </a:solidFill>
-          <a:ln>
-            <a:noFill/>
-          </a:ln>
-          <a:effectLst/>
-        </p:spPr>
-        <p:style>
-          <a:lnRef idx="1">
-            <a:schemeClr val="accent1"/>
-          </a:lnRef>
-          <a:fillRef idx="3">
-            <a:schemeClr val="accent1"/>
-          </a:fillRef>
-          <a:effectRef idx="2">
-            <a:schemeClr val="accent1"/>
-          </a:effectRef>
-          <a:fontRef idx="minor">
-            <a:schemeClr val="lt1"/>
-          </a:fontRef>
-        </p:style>
-        <p:txBody>
-          <a:bodyPr rtlCol="0" anchor="ctr"/>
-          <a:lstStyle/>
-          <a:p>
-            <a:pPr algn="ctr"/>
-          </a:p>
-        </p:txBody>
-      </p:sp>
-      <p:sp>
-        <p:nvSpPr>
-          <p:cNvPr id="10" name="TextBox 9"/>
-          <p:cNvSpPr txBox="1"/>
-          <p:nvPr/>
-        </p:nvSpPr>
-        <p:spPr>
-          <a:xfrm>
-            <a:off x="822960" y="3822191"/>
-            <a:ext cx="502920" cy="457200"/>
-          </a:xfrm>
-          <a:prstGeom prst="rect">
-            <a:avLst/>
-          </a:prstGeom>
-          <a:noFill/>
-        </p:spPr>
-        <p:txBody>
-          <a:bodyPr wrap="square" lIns="0" rIns="0" tIns="0" bIns="0">
-            <a:spAutoFit/>
-          </a:bodyPr>
-          <a:lstStyle/>
-          <a:p>
-            <a:pPr algn="ctr">
-              <a:lnSpc>
-                <a:spcPct val="100000"/>
-              </a:lnSpc>
-            </a:pPr>
-            <a:r>
-              <a:rPr sz="1600" b="0" i="0">
-                <a:solidFill>
-                  <a:srgbClr val="191F28"/>
-                </a:solidFill>
-                <a:latin typeface="Pretendard"/>
-                <a:ea typeface="Pretendard"/>
-              </a:rPr>
-              <a:t>🛍️</a:t>
-            </a:r>
-          </a:p>
-        </p:txBody>
-      </p:sp>
-      <p:sp>
-        <p:nvSpPr>
-          <p:cNvPr id="11" name="TextBox 10"/>
-          <p:cNvSpPr txBox="1"/>
-          <p:nvPr/>
-        </p:nvSpPr>
-        <p:spPr>
-          <a:xfrm>
-            <a:off x="1389888" y="3813048"/>
-            <a:ext cx="4297680" cy="960120"/>
-          </a:xfrm>
-          <a:prstGeom prst="rect">
-            <a:avLst/>
-          </a:prstGeom>
-          <a:noFill/>
-        </p:spPr>
-        <p:txBody>
-          <a:bodyPr wrap="square" lIns="0" rIns="0" tIns="0" bIns="0">
-            <a:spAutoFit/>
-          </a:bodyPr>
-          <a:lstStyle/>
-          <a:p>
-            <a:pPr algn="l">
-              <a:lnSpc>
-                <a:spcPct val="100000"/>
-              </a:lnSpc>
-              <a:spcAft>
-                <a:spcPts val="300"/>
-              </a:spcAft>
-            </a:pPr>
-            <a:r>
-              <a:rPr sz="1200" b="0" i="0">
-                <a:solidFill>
-                  <a:srgbClr val="191F28"/>
-                </a:solidFill>
-                <a:latin typeface="Pretendard ExtraBold"/>
-                <a:ea typeface="Pretendard ExtraBold"/>
-              </a:rPr>
-              <a:t>판매 채널별 상품명</a:t>
-            </a:r>
-          </a:p>
-          <a:p>
-            <a:pPr algn="l">
-              <a:lnSpc>
-                <a:spcPct val="128000"/>
-              </a:lnSpc>
-            </a:pPr>
-            <a:r>
-              <a:rPr sz="1050" b="0" i="0">
-                <a:solidFill>
-                  <a:srgbClr val="4E5964"/>
-                </a:solidFill>
-                <a:latin typeface="Pretendard"/>
-                <a:ea typeface="Pretendard"/>
-              </a:rPr>
-              <a:t>네이버쇼핑은 검색 노출 폭, 쿠팡은 구매 판단 키워드, 일반몰은 가독성 — 채널을 고르면 그에 맞춰 짓습니다.</a:t>
-            </a:r>
-          </a:p>
-        </p:txBody>
-      </p:sp>
-      <p:sp>
-        <p:nvSpPr>
-          <p:cNvPr id="12" name="Rectangle 11"/>
-          <p:cNvSpPr/>
-          <p:nvPr/>
-        </p:nvSpPr>
-        <p:spPr>
-          <a:xfrm>
-            <a:off x="822960" y="4818888"/>
-            <a:ext cx="4846320" cy="10972"/>
-          </a:xfrm>
-          <a:prstGeom prst="rect">
-            <a:avLst/>
-          </a:prstGeom>
-          <a:solidFill>
-            <a:srgbClr val="EAE5D8"/>
-          </a:solidFill>
-          <a:ln>
-            <a:noFill/>
-          </a:ln>
-          <a:effectLst/>
-        </p:spPr>
-        <p:style>
-          <a:lnRef idx="1">
-            <a:schemeClr val="accent1"/>
-          </a:lnRef>
-          <a:fillRef idx="3">
-            <a:schemeClr val="accent1"/>
-          </a:fillRef>
-          <a:effectRef idx="2">
-            <a:schemeClr val="accent1"/>
-          </a:effectRef>
-          <a:fontRef idx="minor">
-            <a:schemeClr val="lt1"/>
-          </a:fontRef>
-        </p:style>
-        <p:txBody>
-          <a:bodyPr rtlCol="0" anchor="ctr"/>
-          <a:lstStyle/>
-          <a:p>
-            <a:pPr algn="ctr"/>
-          </a:p>
-        </p:txBody>
-      </p:sp>
-      <p:sp>
-        <p:nvSpPr>
-          <p:cNvPr id="13" name="TextBox 12"/>
-          <p:cNvSpPr txBox="1"/>
-          <p:nvPr/>
-        </p:nvSpPr>
-        <p:spPr>
-          <a:xfrm>
-            <a:off x="822960" y="4901183"/>
-            <a:ext cx="502920" cy="457200"/>
-          </a:xfrm>
-          <a:prstGeom prst="rect">
-            <a:avLst/>
-          </a:prstGeom>
-          <a:noFill/>
-        </p:spPr>
-        <p:txBody>
-          <a:bodyPr wrap="square" lIns="0" rIns="0" tIns="0" bIns="0">
-            <a:spAutoFit/>
-          </a:bodyPr>
-          <a:lstStyle/>
-          <a:p>
-            <a:pPr algn="ctr">
-              <a:lnSpc>
-                <a:spcPct val="100000"/>
-              </a:lnSpc>
-            </a:pPr>
-            <a:r>
-              <a:rPr sz="1600" b="0" i="0">
-                <a:solidFill>
-                  <a:srgbClr val="191F28"/>
-                </a:solidFill>
-                <a:latin typeface="Pretendard"/>
-                <a:ea typeface="Pretendard"/>
-              </a:rPr>
-              <a:t>⚡</a:t>
-            </a:r>
-          </a:p>
-        </p:txBody>
-      </p:sp>
-      <p:sp>
-        <p:nvSpPr>
-          <p:cNvPr id="14" name="TextBox 13"/>
-          <p:cNvSpPr txBox="1"/>
-          <p:nvPr/>
-        </p:nvSpPr>
-        <p:spPr>
-          <a:xfrm>
-            <a:off x="1389888" y="4892040"/>
-            <a:ext cx="4297680" cy="960120"/>
-          </a:xfrm>
-          <a:prstGeom prst="rect">
-            <a:avLst/>
-          </a:prstGeom>
-          <a:noFill/>
-        </p:spPr>
-        <p:txBody>
-          <a:bodyPr wrap="square" lIns="0" rIns="0" tIns="0" bIns="0">
-            <a:spAutoFit/>
-          </a:bodyPr>
-          <a:lstStyle/>
-          <a:p>
-            <a:pPr algn="l">
-              <a:lnSpc>
-                <a:spcPct val="100000"/>
-              </a:lnSpc>
-              <a:spcAft>
-                <a:spcPts val="300"/>
-              </a:spcAft>
-            </a:pPr>
-            <a:r>
-              <a:rPr sz="1200" b="0" i="0">
-                <a:solidFill>
-                  <a:srgbClr val="191F28"/>
-                </a:solidFill>
-                <a:latin typeface="Pretendard ExtraBold"/>
-                <a:ea typeface="Pretendard ExtraBold"/>
-              </a:rPr>
-              <a:t>업로드·생성 화면 개선</a:t>
-            </a:r>
-          </a:p>
-          <a:p>
-            <a:pPr algn="l">
-              <a:lnSpc>
-                <a:spcPct val="128000"/>
-              </a:lnSpc>
-            </a:pPr>
-            <a:r>
-              <a:rPr sz="1050" b="0" i="0">
-                <a:solidFill>
-                  <a:srgbClr val="4E5964"/>
-                </a:solidFill>
-                <a:latin typeface="Pretendard"/>
-                <a:ea typeface="Pretendard"/>
-              </a:rPr>
-              <a:t>사진을 올리면 바로 보이고, 생성 진행 상태도 화면에 그대로 표시됩니다.</a:t>
+                <a:latin typeface="Noto Serif KR"/>
+                <a:ea typeface="Noto Serif KR"/>
+              </a:rPr>
+              <a:t>로 바로 이동합니다.</a:t>
             </a:r>
           </a:p>
         </p:txBody>
       </p:sp>
       <p:pic>
         <p:nvPicPr>
-          <p:cNvPr id="15" name="Picture 14" descr="sm_result.jpg"/>
+          <p:cNvPr id="7" name="Picture 6" descr="fc_nav.jpg"/>
           <p:cNvPicPr>
             <a:picLocks noChangeAspect="1"/>
           </p:cNvPicPr>
@@ -11847,15 +11392,15 @@
         </p:blipFill>
         <p:spPr>
           <a:xfrm>
-            <a:off x="6263640" y="1097280"/>
-            <a:ext cx="3931920" cy="3402623"/>
+            <a:off x="1097280" y="1783080"/>
+            <a:ext cx="9994392" cy="616321"/>
           </a:xfrm>
           <a:prstGeom prst="rect">
             <a:avLst/>
           </a:prstGeom>
           <a:ln w="12700">
             <a:solidFill>
-              <a:srgbClr val="EAE5D8"/>
+              <a:srgbClr val="D9D3C5"/>
             </a:solidFill>
           </a:ln>
           <a:effectLst/>
@@ -11870,14 +11415,58 @@
       </p:pic>
       <p:sp>
         <p:nvSpPr>
-          <p:cNvPr id="16" name="TextBox 15"/>
+          <p:cNvPr id="8" name="Oval 7"/>
+          <p:cNvSpPr/>
+          <p:nvPr/>
+        </p:nvSpPr>
+        <p:spPr>
+          <a:xfrm>
+            <a:off x="6014520" y="1732788"/>
+            <a:ext cx="929478" cy="716904"/>
+          </a:xfrm>
+          <a:prstGeom prst="ellipse">
+            <a:avLst/>
+          </a:prstGeom>
+          <a:noFill/>
+          <a:ln w="28575">
+            <a:solidFill>
+              <a:srgbClr val="0F4E53"/>
+            </a:solidFill>
+          </a:ln>
+          <a:effectLst/>
+        </p:spPr>
+        <p:style>
+          <a:lnRef idx="1">
+            <a:schemeClr val="accent1"/>
+          </a:lnRef>
+          <a:fillRef idx="3">
+            <a:schemeClr val="accent1"/>
+          </a:fillRef>
+          <a:effectRef idx="2">
+            <a:schemeClr val="accent1"/>
+          </a:effectRef>
+          <a:fontRef idx="minor">
+            <a:schemeClr val="lt1"/>
+          </a:fontRef>
+        </p:style>
+        <p:txBody>
+          <a:bodyPr rtlCol="0" anchor="ctr"/>
+          <a:lstStyle/>
+          <a:p>
+            <a:pPr algn="ctr"/>
+          </a:p>
+        </p:txBody>
+      </p:sp>
+      <p:sp>
+        <p:nvSpPr>
+          <p:cNvPr id="9" name="TextBox 8"/>
           <p:cNvSpPr txBox="1"/>
           <p:nvPr/>
         </p:nvSpPr>
         <p:spPr>
           <a:xfrm>
-            <a:off x="5989320" y="4609631"/>
-            <a:ext cx="4480559" cy="256032"/>
+            <a:off x="822960" y="2527416"/>
+            <a:ext cx="10543032" cy="256032"/>
           </a:xfrm>
           <a:prstGeom prst="rect">
             <a:avLst/>
@@ -11896,43 +11485,40 @@
               </a:lnSpc>
             </a:pPr>
             <a:r>
-              <a:rPr sz="900" b="0" i="0">
-                <a:solidFill>
-                  <a:srgbClr val="4E5964"/>
-                </a:solidFill>
-                <a:latin typeface="Pretendard"/>
-                <a:ea typeface="Pretendard"/>
-              </a:rPr>
-              <a:t>사진 한 장으로 최종 제목과 AI 모델별 후보까지 — 실제 결과</a:t>
-            </a:r>
-          </a:p>
-        </p:txBody>
-      </p:sp>
-      <p:pic>
-        <p:nvPicPr>
-          <p:cNvPr id="17" name="Picture 16" descr="sm_recent.jpg"/>
-          <p:cNvPicPr>
-            <a:picLocks noChangeAspect="1"/>
-          </p:cNvPicPr>
-          <p:nvPr/>
-        </p:nvPicPr>
-        <p:blipFill>
-          <a:blip r:embed="rId3"/>
-          <a:stretch>
-            <a:fillRect/>
-          </a:stretch>
-        </p:blipFill>
-        <p:spPr>
-          <a:xfrm>
-            <a:off x="6263640" y="4957103"/>
-            <a:ext cx="3931920" cy="325039"/>
-          </a:xfrm>
-          <a:prstGeom prst="rect">
-            <a:avLst/>
-          </a:prstGeom>
-          <a:ln w="12700">
+              <a:rPr sz="950" b="0" i="0">
+                <a:solidFill>
+                  <a:srgbClr val="0F4E53"/>
+                </a:solidFill>
+                <a:latin typeface="Pretendard ExtraBold"/>
+                <a:ea typeface="Pretendard ExtraBold"/>
+              </a:rPr>
+              <a:t>프리캔버스 상단 메뉴 속 「검색마스터」 — 실제 화면</a:t>
+            </a:r>
+          </a:p>
+        </p:txBody>
+      </p:sp>
+      <p:sp>
+        <p:nvSpPr>
+          <p:cNvPr id="10" name="Rounded Rectangle 9"/>
+          <p:cNvSpPr/>
+          <p:nvPr/>
+        </p:nvSpPr>
+        <p:spPr>
+          <a:xfrm>
+            <a:off x="1188720" y="3291840"/>
+            <a:ext cx="4206240" cy="1371600"/>
+          </a:xfrm>
+          <a:prstGeom prst="roundRect">
+            <a:avLst>
+              <a:gd name="adj" fmla="val 10000"/>
+            </a:avLst>
+          </a:prstGeom>
+          <a:solidFill>
+            <a:srgbClr val="FFFDF7"/>
+          </a:solidFill>
+          <a:ln w="9525">
             <a:solidFill>
-              <a:srgbClr val="EAE5D8"/>
+              <a:srgbClr val="D9D3C5"/>
             </a:solidFill>
           </a:ln>
           <a:effectLst/>
@@ -11944,17 +11530,38 @@
             </a:outerShdw>
           </a:effectLst>
         </p:spPr>
-      </p:pic>
-      <p:sp>
-        <p:nvSpPr>
-          <p:cNvPr id="18" name="TextBox 17"/>
+        <p:style>
+          <a:lnRef idx="1">
+            <a:schemeClr val="accent1"/>
+          </a:lnRef>
+          <a:fillRef idx="3">
+            <a:schemeClr val="accent1"/>
+          </a:fillRef>
+          <a:effectRef idx="2">
+            <a:schemeClr val="accent1"/>
+          </a:effectRef>
+          <a:fontRef idx="minor">
+            <a:schemeClr val="lt1"/>
+          </a:fontRef>
+        </p:style>
+        <p:txBody>
+          <a:bodyPr rtlCol="0" anchor="ctr"/>
+          <a:lstStyle/>
+          <a:p>
+            <a:pPr algn="ctr"/>
+          </a:p>
+        </p:txBody>
+      </p:sp>
+      <p:sp>
+        <p:nvSpPr>
+          <p:cNvPr id="11" name="TextBox 10"/>
           <p:cNvSpPr txBox="1"/>
           <p:nvPr/>
         </p:nvSpPr>
         <p:spPr>
           <a:xfrm>
-            <a:off x="5989320" y="5507702"/>
-            <a:ext cx="4480559" cy="256032"/>
+            <a:off x="1481328" y="3529584"/>
+            <a:ext cx="3611880" cy="960120"/>
           </a:xfrm>
           <a:prstGeom prst="rect">
             <a:avLst/>
@@ -11967,27 +11574,324 @@
           </a:bodyPr>
           <a:lstStyle/>
           <a:p>
-            <a:pPr algn="ctr">
+            <a:pPr algn="l">
               <a:lnSpc>
                 <a:spcPct val="100000"/>
               </a:lnSpc>
-            </a:pPr>
-            <a:r>
-              <a:rPr sz="900" b="0" i="0">
-                <a:solidFill>
-                  <a:srgbClr val="4E5964"/>
+              <a:spcAft>
+                <a:spcPts val="500"/>
+              </a:spcAft>
+            </a:pPr>
+            <a:r>
+              <a:rPr sz="1450" b="1" i="0">
+                <a:solidFill>
+                  <a:srgbClr val="191F28"/>
+                </a:solidFill>
+                <a:latin typeface="Noto Serif KR"/>
+                <a:ea typeface="Noto Serif KR"/>
+              </a:rPr>
+              <a:t>프리캔버스에서 작업하다가</a:t>
+            </a:r>
+          </a:p>
+          <a:p>
+            <a:pPr algn="l">
+              <a:lnSpc>
+                <a:spcPct val="130000"/>
+              </a:lnSpc>
+            </a:pPr>
+            <a:r>
+              <a:rPr sz="1100" b="0" i="0">
+                <a:solidFill>
+                  <a:srgbClr val="2B333D"/>
                 </a:solidFill>
                 <a:latin typeface="Pretendard"/>
                 <a:ea typeface="Pretendard"/>
               </a:rPr>
-              <a:t>실제 생성 결과 — 복사해서 바로 씁니다</a:t>
-            </a:r>
-          </a:p>
-        </p:txBody>
-      </p:sp>
-      <p:sp>
-        <p:nvSpPr>
-          <p:cNvPr id="19" name="Rounded Rectangle 18"/>
+              <a:t>상세페이지를 만들다 상품명이나 키워드가 필요해지면,</a:t>
+            </a:r>
+          </a:p>
+        </p:txBody>
+      </p:sp>
+      <p:sp>
+        <p:nvSpPr>
+          <p:cNvPr id="12" name="TextBox 11"/>
+          <p:cNvSpPr txBox="1"/>
+          <p:nvPr/>
+        </p:nvSpPr>
+        <p:spPr>
+          <a:xfrm>
+            <a:off x="5577840" y="3566160"/>
+            <a:ext cx="1051560" cy="868680"/>
+          </a:xfrm>
+          <a:prstGeom prst="rect">
+            <a:avLst/>
+          </a:prstGeom>
+          <a:noFill/>
+        </p:spPr>
+        <p:txBody>
+          <a:bodyPr wrap="square" lIns="0" rIns="0" tIns="0" bIns="0">
+            <a:spAutoFit/>
+          </a:bodyPr>
+          <a:lstStyle/>
+          <a:p>
+            <a:pPr algn="ctr">
+              <a:lnSpc>
+                <a:spcPct val="100000"/>
+              </a:lnSpc>
+              <a:spcAft>
+                <a:spcPts val="300"/>
+              </a:spcAft>
+            </a:pPr>
+            <a:r>
+              <a:rPr sz="2400" b="1" i="0">
+                <a:solidFill>
+                  <a:srgbClr val="0F4E53"/>
+                </a:solidFill>
+                <a:latin typeface="Pretendard"/>
+                <a:ea typeface="Pretendard"/>
+              </a:rPr>
+              <a:t>→</a:t>
+            </a:r>
+          </a:p>
+          <a:p>
+            <a:pPr algn="ctr">
+              <a:lnSpc>
+                <a:spcPct val="100000"/>
+              </a:lnSpc>
+            </a:pPr>
+            <a:r>
+              <a:rPr sz="950" b="0" i="0">
+                <a:solidFill>
+                  <a:srgbClr val="0B3B3F"/>
+                </a:solidFill>
+                <a:latin typeface="Pretendard ExtraBold"/>
+                <a:ea typeface="Pretendard ExtraBold"/>
+              </a:rPr>
+              <a:t>버튼 한 번</a:t>
+            </a:r>
+          </a:p>
+        </p:txBody>
+      </p:sp>
+      <p:sp>
+        <p:nvSpPr>
+          <p:cNvPr id="13" name="Rounded Rectangle 12"/>
+          <p:cNvSpPr/>
+          <p:nvPr/>
+        </p:nvSpPr>
+        <p:spPr>
+          <a:xfrm>
+            <a:off x="6812280" y="3291840"/>
+            <a:ext cx="4206240" cy="1371600"/>
+          </a:xfrm>
+          <a:prstGeom prst="roundRect">
+            <a:avLst>
+              <a:gd name="adj" fmla="val 10000"/>
+            </a:avLst>
+          </a:prstGeom>
+          <a:solidFill>
+            <a:srgbClr val="F2F6F5"/>
+          </a:solidFill>
+          <a:ln w="9525">
+            <a:solidFill>
+              <a:srgbClr val="CFDEDC"/>
+            </a:solidFill>
+          </a:ln>
+          <a:effectLst/>
+          <a:effectLst>
+            <a:outerShdw blurRad="170000" dist="50000" dir="5400000" rotWithShape="0">
+              <a:srgbClr val="16241C">
+                <a:alpha val="30000"/>
+              </a:srgbClr>
+            </a:outerShdw>
+          </a:effectLst>
+        </p:spPr>
+        <p:style>
+          <a:lnRef idx="1">
+            <a:schemeClr val="accent1"/>
+          </a:lnRef>
+          <a:fillRef idx="3">
+            <a:schemeClr val="accent1"/>
+          </a:fillRef>
+          <a:effectRef idx="2">
+            <a:schemeClr val="accent1"/>
+          </a:effectRef>
+          <a:fontRef idx="minor">
+            <a:schemeClr val="lt1"/>
+          </a:fontRef>
+        </p:style>
+        <p:txBody>
+          <a:bodyPr rtlCol="0" anchor="ctr"/>
+          <a:lstStyle/>
+          <a:p>
+            <a:pPr algn="ctr"/>
+          </a:p>
+        </p:txBody>
+      </p:sp>
+      <p:sp>
+        <p:nvSpPr>
+          <p:cNvPr id="14" name="TextBox 13"/>
+          <p:cNvSpPr txBox="1"/>
+          <p:nvPr/>
+        </p:nvSpPr>
+        <p:spPr>
+          <a:xfrm>
+            <a:off x="7104888" y="3529584"/>
+            <a:ext cx="3611880" cy="960120"/>
+          </a:xfrm>
+          <a:prstGeom prst="rect">
+            <a:avLst/>
+          </a:prstGeom>
+          <a:noFill/>
+        </p:spPr>
+        <p:txBody>
+          <a:bodyPr wrap="square" lIns="0" rIns="0" tIns="0" bIns="0">
+            <a:spAutoFit/>
+          </a:bodyPr>
+          <a:lstStyle/>
+          <a:p>
+            <a:pPr algn="l">
+              <a:lnSpc>
+                <a:spcPct val="100000"/>
+              </a:lnSpc>
+              <a:spcAft>
+                <a:spcPts val="500"/>
+              </a:spcAft>
+            </a:pPr>
+            <a:r>
+              <a:rPr sz="1450" b="1" i="0">
+                <a:solidFill>
+                  <a:srgbClr val="191F28"/>
+                </a:solidFill>
+                <a:latin typeface="Noto Serif KR"/>
+                <a:ea typeface="Noto Serif KR"/>
+              </a:rPr>
+              <a:t>검색마스터가 새 탭으로</a:t>
+            </a:r>
+          </a:p>
+          <a:p>
+            <a:pPr algn="l">
+              <a:lnSpc>
+                <a:spcPct val="130000"/>
+              </a:lnSpc>
+            </a:pPr>
+            <a:r>
+              <a:rPr sz="1100" b="0" i="0">
+                <a:solidFill>
+                  <a:srgbClr val="2B333D"/>
+                </a:solidFill>
+                <a:latin typeface="Pretendard"/>
+                <a:ea typeface="Pretendard"/>
+              </a:rPr>
+              <a:t>쓰던 구글 계정 그대로 열립니다. 다시 로그인할 필요가 없습니다.</a:t>
+            </a:r>
+          </a:p>
+        </p:txBody>
+      </p:sp>
+      <p:sp>
+        <p:nvSpPr>
+          <p:cNvPr id="15" name="Rounded Rectangle 14"/>
+          <p:cNvSpPr/>
+          <p:nvPr/>
+        </p:nvSpPr>
+        <p:spPr>
+          <a:xfrm>
+            <a:off x="3063240" y="5230368"/>
+            <a:ext cx="1691640" cy="384048"/>
+          </a:xfrm>
+          <a:prstGeom prst="roundRect">
+            <a:avLst>
+              <a:gd name="adj" fmla="val 50000"/>
+            </a:avLst>
+          </a:prstGeom>
+          <a:solidFill>
+            <a:srgbClr val="FFFFFF"/>
+          </a:solidFill>
+          <a:ln w="9525">
+            <a:solidFill>
+              <a:srgbClr val="D9D3C5"/>
+            </a:solidFill>
+          </a:ln>
+          <a:effectLst/>
+        </p:spPr>
+        <p:style>
+          <a:lnRef idx="1">
+            <a:schemeClr val="accent1"/>
+          </a:lnRef>
+          <a:fillRef idx="3">
+            <a:schemeClr val="accent1"/>
+          </a:fillRef>
+          <a:effectRef idx="2">
+            <a:schemeClr val="accent1"/>
+          </a:effectRef>
+          <a:fontRef idx="minor">
+            <a:schemeClr val="lt1"/>
+          </a:fontRef>
+        </p:style>
+        <p:txBody>
+          <a:bodyPr rtlCol="0" anchor="ctr" wrap="none" lIns="0" rIns="0" tIns="0" bIns="0"/>
+          <a:lstStyle/>
+          <a:p>
+            <a:pPr algn="ctr">
+              <a:lnSpc>
+                <a:spcPct val="100000"/>
+              </a:lnSpc>
+            </a:pPr>
+            <a:r>
+              <a:rPr sz="1050" b="0" i="0">
+                <a:solidFill>
+                  <a:srgbClr val="191F28"/>
+                </a:solidFill>
+                <a:latin typeface="Pretendard SemiBold"/>
+                <a:ea typeface="Pretendard SemiBold"/>
+              </a:rPr>
+              <a:t>● 하나의 구글 계정</a:t>
+            </a:r>
+          </a:p>
+        </p:txBody>
+      </p:sp>
+      <p:sp>
+        <p:nvSpPr>
+          <p:cNvPr id="16" name="TextBox 15"/>
+          <p:cNvSpPr txBox="1"/>
+          <p:nvPr/>
+        </p:nvSpPr>
+        <p:spPr>
+          <a:xfrm>
+            <a:off x="4864608" y="5330952"/>
+            <a:ext cx="5120640" cy="274320"/>
+          </a:xfrm>
+          <a:prstGeom prst="rect">
+            <a:avLst/>
+          </a:prstGeom>
+          <a:noFill/>
+        </p:spPr>
+        <p:txBody>
+          <a:bodyPr wrap="square" lIns="0" rIns="0" tIns="0" bIns="0">
+            <a:spAutoFit/>
+          </a:bodyPr>
+          <a:lstStyle/>
+          <a:p>
+            <a:pPr algn="l">
+              <a:lnSpc>
+                <a:spcPct val="100000"/>
+              </a:lnSpc>
+            </a:pPr>
+            <a:r>
+              <a:rPr sz="1050" b="0" i="0">
+                <a:solidFill>
+                  <a:srgbClr val="4E5964"/>
+                </a:solidFill>
+                <a:latin typeface="Pretendard"/>
+                <a:ea typeface="Pretendard"/>
+              </a:rPr>
+              <a:t>으로 두 서비스를 오갑니다. 구독은 서비스별로 따로 적용됩니다.</a:t>
+            </a:r>
+          </a:p>
+        </p:txBody>
+      </p:sp>
+      <p:sp>
+        <p:nvSpPr>
+          <p:cNvPr id="17" name="Rounded Rectangle 16"/>
           <p:cNvSpPr/>
           <p:nvPr/>
         </p:nvSpPr>
@@ -12232,7 +12136,7 @@
                 <a:latin typeface="Pretendard ExtraBold"/>
                 <a:ea typeface="Pretendard ExtraBold"/>
               </a:rPr>
-              <a:t>프리캔버스 첫 화면</a:t>
+              <a:t>검색마스터 새 기능</a:t>
             </a:r>
           </a:p>
         </p:txBody>
@@ -12245,8 +12149,8 @@
         </p:nvSpPr>
         <p:spPr>
           <a:xfrm>
-            <a:off x="822960" y="932688"/>
-            <a:ext cx="10515600" cy="566928"/>
+            <a:off x="822960" y="1234440"/>
+            <a:ext cx="4937760" cy="1280160"/>
           </a:xfrm>
           <a:prstGeom prst="rect">
             <a:avLst/>
@@ -12261,25 +12165,433 @@
           <a:p>
             <a:pPr algn="l">
               <a:lnSpc>
-                <a:spcPct val="100000"/>
-              </a:lnSpc>
-            </a:pPr>
-            <a:r>
-              <a:rPr sz="2300" b="1" i="0">
+                <a:spcPct val="130000"/>
+              </a:lnSpc>
+            </a:pPr>
+            <a:r>
+              <a:rPr sz="2400" b="1" i="0">
                 <a:solidFill>
                   <a:srgbClr val="191F28"/>
                 </a:solidFill>
                 <a:latin typeface="Noto Serif KR"/>
                 <a:ea typeface="Noto Serif KR"/>
               </a:rPr>
-              <a:t>세 가지 작업 중에 골라 시작합니다.</a:t>
+              <a:t>상품 설명 입력</a:t>
+            </a:r>
+          </a:p>
+          <a:p>
+            <a:pPr algn="l">
+              <a:lnSpc>
+                <a:spcPct val="140000"/>
+              </a:lnSpc>
+              <a:spcBef>
+                <a:spcPts val="800"/>
+              </a:spcBef>
+            </a:pPr>
+            <a:r>
+              <a:rPr sz="1200" b="0" i="0">
+                <a:solidFill>
+                  <a:srgbClr val="4E5964"/>
+                </a:solidFill>
+                <a:latin typeface="Pretendard"/>
+                <a:ea typeface="Pretendard"/>
+              </a:rPr>
+              <a:t>사진과 함께 상품 설명을 입력하면, 상품명이 눈에 띄게 정확해집니다.</a:t>
+            </a:r>
+          </a:p>
+        </p:txBody>
+      </p:sp>
+      <p:sp>
+        <p:nvSpPr>
+          <p:cNvPr id="7" name="TextBox 6"/>
+          <p:cNvSpPr txBox="1"/>
+          <p:nvPr/>
+        </p:nvSpPr>
+        <p:spPr>
+          <a:xfrm>
+            <a:off x="822960" y="2743200"/>
+            <a:ext cx="502920" cy="457200"/>
+          </a:xfrm>
+          <a:prstGeom prst="rect">
+            <a:avLst/>
+          </a:prstGeom>
+          <a:noFill/>
+        </p:spPr>
+        <p:txBody>
+          <a:bodyPr wrap="square" lIns="0" rIns="0" tIns="0" bIns="0">
+            <a:spAutoFit/>
+          </a:bodyPr>
+          <a:lstStyle/>
+          <a:p>
+            <a:pPr algn="ctr">
+              <a:lnSpc>
+                <a:spcPct val="100000"/>
+              </a:lnSpc>
+            </a:pPr>
+            <a:r>
+              <a:rPr sz="1600" b="0" i="0">
+                <a:solidFill>
+                  <a:srgbClr val="191F28"/>
+                </a:solidFill>
+                <a:latin typeface="Pretendard"/>
+                <a:ea typeface="Pretendard"/>
+              </a:rPr>
+              <a:t>✏️</a:t>
+            </a:r>
+          </a:p>
+        </p:txBody>
+      </p:sp>
+      <p:sp>
+        <p:nvSpPr>
+          <p:cNvPr id="8" name="TextBox 7"/>
+          <p:cNvSpPr txBox="1"/>
+          <p:nvPr/>
+        </p:nvSpPr>
+        <p:spPr>
+          <a:xfrm>
+            <a:off x="1389888" y="2734056"/>
+            <a:ext cx="4297680" cy="960120"/>
+          </a:xfrm>
+          <a:prstGeom prst="rect">
+            <a:avLst/>
+          </a:prstGeom>
+          <a:noFill/>
+        </p:spPr>
+        <p:txBody>
+          <a:bodyPr wrap="square" lIns="0" rIns="0" tIns="0" bIns="0">
+            <a:spAutoFit/>
+          </a:bodyPr>
+          <a:lstStyle/>
+          <a:p>
+            <a:pPr algn="l">
+              <a:lnSpc>
+                <a:spcPct val="100000"/>
+              </a:lnSpc>
+              <a:spcAft>
+                <a:spcPts val="300"/>
+              </a:spcAft>
+            </a:pPr>
+            <a:r>
+              <a:rPr sz="1200" b="0" i="0">
+                <a:solidFill>
+                  <a:srgbClr val="191F28"/>
+                </a:solidFill>
+                <a:latin typeface="Pretendard ExtraBold"/>
+                <a:ea typeface="Pretendard ExtraBold"/>
+              </a:rPr>
+              <a:t>실제 상품·용도 설명 입력</a:t>
+            </a:r>
+          </a:p>
+          <a:p>
+            <a:pPr algn="l">
+              <a:lnSpc>
+                <a:spcPct val="128000"/>
+              </a:lnSpc>
+            </a:pPr>
+            <a:r>
+              <a:rPr sz="1050" b="0" i="0">
+                <a:solidFill>
+                  <a:srgbClr val="4E5964"/>
+                </a:solidFill>
+                <a:latin typeface="Pretendard"/>
+                <a:ea typeface="Pretendard"/>
+              </a:rPr>
+              <a:t>“책상 위에 놓는 무선 충전 겸용 스탠드”처럼 한 줄만 적으면, 사진만으로는 놓치기 쉬운 재질과 용도까지 상품명에 담깁니다.</a:t>
+            </a:r>
+          </a:p>
+        </p:txBody>
+      </p:sp>
+      <p:sp>
+        <p:nvSpPr>
+          <p:cNvPr id="9" name="Rectangle 8"/>
+          <p:cNvSpPr/>
+          <p:nvPr/>
+        </p:nvSpPr>
+        <p:spPr>
+          <a:xfrm>
+            <a:off x="822960" y="3739896"/>
+            <a:ext cx="4846320" cy="10972"/>
+          </a:xfrm>
+          <a:prstGeom prst="rect">
+            <a:avLst/>
+          </a:prstGeom>
+          <a:solidFill>
+            <a:srgbClr val="EAE5D8"/>
+          </a:solidFill>
+          <a:ln>
+            <a:noFill/>
+          </a:ln>
+          <a:effectLst/>
+        </p:spPr>
+        <p:style>
+          <a:lnRef idx="1">
+            <a:schemeClr val="accent1"/>
+          </a:lnRef>
+          <a:fillRef idx="3">
+            <a:schemeClr val="accent1"/>
+          </a:fillRef>
+          <a:effectRef idx="2">
+            <a:schemeClr val="accent1"/>
+          </a:effectRef>
+          <a:fontRef idx="minor">
+            <a:schemeClr val="lt1"/>
+          </a:fontRef>
+        </p:style>
+        <p:txBody>
+          <a:bodyPr rtlCol="0" anchor="ctr"/>
+          <a:lstStyle/>
+          <a:p>
+            <a:pPr algn="ctr"/>
+          </a:p>
+        </p:txBody>
+      </p:sp>
+      <p:sp>
+        <p:nvSpPr>
+          <p:cNvPr id="10" name="TextBox 9"/>
+          <p:cNvSpPr txBox="1"/>
+          <p:nvPr/>
+        </p:nvSpPr>
+        <p:spPr>
+          <a:xfrm>
+            <a:off x="822960" y="3822191"/>
+            <a:ext cx="502920" cy="457200"/>
+          </a:xfrm>
+          <a:prstGeom prst="rect">
+            <a:avLst/>
+          </a:prstGeom>
+          <a:noFill/>
+        </p:spPr>
+        <p:txBody>
+          <a:bodyPr wrap="square" lIns="0" rIns="0" tIns="0" bIns="0">
+            <a:spAutoFit/>
+          </a:bodyPr>
+          <a:lstStyle/>
+          <a:p>
+            <a:pPr algn="ctr">
+              <a:lnSpc>
+                <a:spcPct val="100000"/>
+              </a:lnSpc>
+            </a:pPr>
+            <a:r>
+              <a:rPr sz="1600" b="0" i="0">
+                <a:solidFill>
+                  <a:srgbClr val="191F28"/>
+                </a:solidFill>
+                <a:latin typeface="Pretendard"/>
+                <a:ea typeface="Pretendard"/>
+              </a:rPr>
+              <a:t>🛍️</a:t>
+            </a:r>
+          </a:p>
+        </p:txBody>
+      </p:sp>
+      <p:sp>
+        <p:nvSpPr>
+          <p:cNvPr id="11" name="TextBox 10"/>
+          <p:cNvSpPr txBox="1"/>
+          <p:nvPr/>
+        </p:nvSpPr>
+        <p:spPr>
+          <a:xfrm>
+            <a:off x="1389888" y="3813048"/>
+            <a:ext cx="4297680" cy="960120"/>
+          </a:xfrm>
+          <a:prstGeom prst="rect">
+            <a:avLst/>
+          </a:prstGeom>
+          <a:noFill/>
+        </p:spPr>
+        <p:txBody>
+          <a:bodyPr wrap="square" lIns="0" rIns="0" tIns="0" bIns="0">
+            <a:spAutoFit/>
+          </a:bodyPr>
+          <a:lstStyle/>
+          <a:p>
+            <a:pPr algn="l">
+              <a:lnSpc>
+                <a:spcPct val="100000"/>
+              </a:lnSpc>
+              <a:spcAft>
+                <a:spcPts val="300"/>
+              </a:spcAft>
+            </a:pPr>
+            <a:r>
+              <a:rPr sz="1200" b="0" i="0">
+                <a:solidFill>
+                  <a:srgbClr val="191F28"/>
+                </a:solidFill>
+                <a:latin typeface="Pretendard ExtraBold"/>
+                <a:ea typeface="Pretendard ExtraBold"/>
+              </a:rPr>
+              <a:t>판매 채널별 상품명</a:t>
+            </a:r>
+          </a:p>
+          <a:p>
+            <a:pPr algn="l">
+              <a:lnSpc>
+                <a:spcPct val="128000"/>
+              </a:lnSpc>
+            </a:pPr>
+            <a:r>
+              <a:rPr sz="1050" b="0" i="0">
+                <a:solidFill>
+                  <a:srgbClr val="4E5964"/>
+                </a:solidFill>
+                <a:latin typeface="Pretendard"/>
+                <a:ea typeface="Pretendard"/>
+              </a:rPr>
+              <a:t>네이버쇼핑은 검색 노출 폭, 쿠팡은 구매 판단 키워드, 일반몰은 가독성 — 채널을 고르면 그에 맞춰 짓습니다.</a:t>
+            </a:r>
+          </a:p>
+        </p:txBody>
+      </p:sp>
+      <p:sp>
+        <p:nvSpPr>
+          <p:cNvPr id="12" name="Rectangle 11"/>
+          <p:cNvSpPr/>
+          <p:nvPr/>
+        </p:nvSpPr>
+        <p:spPr>
+          <a:xfrm>
+            <a:off x="822960" y="4818888"/>
+            <a:ext cx="4846320" cy="10972"/>
+          </a:xfrm>
+          <a:prstGeom prst="rect">
+            <a:avLst/>
+          </a:prstGeom>
+          <a:solidFill>
+            <a:srgbClr val="EAE5D8"/>
+          </a:solidFill>
+          <a:ln>
+            <a:noFill/>
+          </a:ln>
+          <a:effectLst/>
+        </p:spPr>
+        <p:style>
+          <a:lnRef idx="1">
+            <a:schemeClr val="accent1"/>
+          </a:lnRef>
+          <a:fillRef idx="3">
+            <a:schemeClr val="accent1"/>
+          </a:fillRef>
+          <a:effectRef idx="2">
+            <a:schemeClr val="accent1"/>
+          </a:effectRef>
+          <a:fontRef idx="minor">
+            <a:schemeClr val="lt1"/>
+          </a:fontRef>
+        </p:style>
+        <p:txBody>
+          <a:bodyPr rtlCol="0" anchor="ctr"/>
+          <a:lstStyle/>
+          <a:p>
+            <a:pPr algn="ctr"/>
+          </a:p>
+        </p:txBody>
+      </p:sp>
+      <p:sp>
+        <p:nvSpPr>
+          <p:cNvPr id="13" name="TextBox 12"/>
+          <p:cNvSpPr txBox="1"/>
+          <p:nvPr/>
+        </p:nvSpPr>
+        <p:spPr>
+          <a:xfrm>
+            <a:off x="822960" y="4901183"/>
+            <a:ext cx="502920" cy="457200"/>
+          </a:xfrm>
+          <a:prstGeom prst="rect">
+            <a:avLst/>
+          </a:prstGeom>
+          <a:noFill/>
+        </p:spPr>
+        <p:txBody>
+          <a:bodyPr wrap="square" lIns="0" rIns="0" tIns="0" bIns="0">
+            <a:spAutoFit/>
+          </a:bodyPr>
+          <a:lstStyle/>
+          <a:p>
+            <a:pPr algn="ctr">
+              <a:lnSpc>
+                <a:spcPct val="100000"/>
+              </a:lnSpc>
+            </a:pPr>
+            <a:r>
+              <a:rPr sz="1600" b="0" i="0">
+                <a:solidFill>
+                  <a:srgbClr val="191F28"/>
+                </a:solidFill>
+                <a:latin typeface="Pretendard"/>
+                <a:ea typeface="Pretendard"/>
+              </a:rPr>
+              <a:t>⚡</a:t>
+            </a:r>
+          </a:p>
+        </p:txBody>
+      </p:sp>
+      <p:sp>
+        <p:nvSpPr>
+          <p:cNvPr id="14" name="TextBox 13"/>
+          <p:cNvSpPr txBox="1"/>
+          <p:nvPr/>
+        </p:nvSpPr>
+        <p:spPr>
+          <a:xfrm>
+            <a:off x="1389888" y="4892040"/>
+            <a:ext cx="4297680" cy="960120"/>
+          </a:xfrm>
+          <a:prstGeom prst="rect">
+            <a:avLst/>
+          </a:prstGeom>
+          <a:noFill/>
+        </p:spPr>
+        <p:txBody>
+          <a:bodyPr wrap="square" lIns="0" rIns="0" tIns="0" bIns="0">
+            <a:spAutoFit/>
+          </a:bodyPr>
+          <a:lstStyle/>
+          <a:p>
+            <a:pPr algn="l">
+              <a:lnSpc>
+                <a:spcPct val="100000"/>
+              </a:lnSpc>
+              <a:spcAft>
+                <a:spcPts val="300"/>
+              </a:spcAft>
+            </a:pPr>
+            <a:r>
+              <a:rPr sz="1200" b="0" i="0">
+                <a:solidFill>
+                  <a:srgbClr val="191F28"/>
+                </a:solidFill>
+                <a:latin typeface="Pretendard ExtraBold"/>
+                <a:ea typeface="Pretendard ExtraBold"/>
+              </a:rPr>
+              <a:t>업로드·생성 화면 개선</a:t>
+            </a:r>
+          </a:p>
+          <a:p>
+            <a:pPr algn="l">
+              <a:lnSpc>
+                <a:spcPct val="128000"/>
+              </a:lnSpc>
+            </a:pPr>
+            <a:r>
+              <a:rPr sz="1050" b="0" i="0">
+                <a:solidFill>
+                  <a:srgbClr val="4E5964"/>
+                </a:solidFill>
+                <a:latin typeface="Pretendard"/>
+                <a:ea typeface="Pretendard"/>
+              </a:rPr>
+              <a:t>사진을 올리면 바로 보이고, 생성 진행 상태도 화면에 그대로 표시됩니다.</a:t>
             </a:r>
           </a:p>
         </p:txBody>
       </p:sp>
       <p:pic>
         <p:nvPicPr>
-          <p:cNvPr id="7" name="Picture 6" descr="fc_modes.jpg"/>
+          <p:cNvPr id="15" name="Picture 14" descr="sm_result.jpg"/>
           <p:cNvPicPr>
             <a:picLocks noChangeAspect="1"/>
           </p:cNvPicPr>
@@ -12293,8 +12605,8 @@
         </p:blipFill>
         <p:spPr>
           <a:xfrm>
-            <a:off x="822960" y="1600200"/>
-            <a:ext cx="10543032" cy="1286250"/>
+            <a:off x="6263640" y="1097280"/>
+            <a:ext cx="3931920" cy="3402623"/>
           </a:xfrm>
           <a:prstGeom prst="rect">
             <a:avLst/>
@@ -12316,58 +12628,14 @@
       </p:pic>
       <p:sp>
         <p:nvSpPr>
-          <p:cNvPr id="8" name="Rectangle 7"/>
-          <p:cNvSpPr/>
-          <p:nvPr/>
-        </p:nvSpPr>
-        <p:spPr>
-          <a:xfrm>
-            <a:off x="822960" y="3206489"/>
-            <a:ext cx="29260" cy="566928"/>
-          </a:xfrm>
-          <a:prstGeom prst="rect">
-            <a:avLst/>
-          </a:prstGeom>
-          <a:solidFill>
-            <a:srgbClr val="0F4E53"/>
-          </a:solidFill>
-          <a:ln>
-            <a:noFill/>
-          </a:ln>
-          <a:effectLst/>
-        </p:spPr>
-        <p:style>
-          <a:lnRef idx="1">
-            <a:schemeClr val="accent1"/>
-          </a:lnRef>
-          <a:fillRef idx="3">
-            <a:schemeClr val="accent1"/>
-          </a:fillRef>
-          <a:effectRef idx="2">
-            <a:schemeClr val="accent1"/>
-          </a:effectRef>
-          <a:fontRef idx="minor">
-            <a:schemeClr val="lt1"/>
-          </a:fontRef>
-        </p:style>
-        <p:txBody>
-          <a:bodyPr rtlCol="0" anchor="ctr"/>
-          <a:lstStyle/>
-          <a:p>
-            <a:pPr algn="ctr"/>
-          </a:p>
-        </p:txBody>
-      </p:sp>
-      <p:sp>
-        <p:nvSpPr>
-          <p:cNvPr id="9" name="TextBox 8"/>
+          <p:cNvPr id="16" name="TextBox 15"/>
           <p:cNvSpPr txBox="1"/>
           <p:nvPr/>
         </p:nvSpPr>
         <p:spPr>
           <a:xfrm>
-            <a:off x="1024128" y="3179057"/>
-            <a:ext cx="5760720" cy="658368"/>
+            <a:off x="5989320" y="4609631"/>
+            <a:ext cx="4480559" cy="256032"/>
           </a:xfrm>
           <a:prstGeom prst="rect">
             <a:avLst/>
@@ -12380,335 +12648,27 @@
           </a:bodyPr>
           <a:lstStyle/>
           <a:p>
-            <a:pPr algn="l">
+            <a:pPr algn="ctr">
               <a:lnSpc>
                 <a:spcPct val="100000"/>
               </a:lnSpc>
-              <a:spcAft>
-                <a:spcPts val="200"/>
-              </a:spcAft>
-            </a:pPr>
-            <a:r>
-              <a:rPr sz="1250" b="0" i="0">
-                <a:solidFill>
-                  <a:srgbClr val="191F28"/>
-                </a:solidFill>
-                <a:latin typeface="Pretendard ExtraBold"/>
-                <a:ea typeface="Pretendard ExtraBold"/>
-              </a:rPr>
-              <a:t>새 상세페이지 만들기</a:t>
-            </a:r>
-          </a:p>
-          <a:p>
-            <a:pPr algn="l">
-              <a:lnSpc>
-                <a:spcPct val="125000"/>
-              </a:lnSpc>
-            </a:pPr>
-            <a:r>
-              <a:rPr sz="1050" b="0" i="0">
+            </a:pPr>
+            <a:r>
+              <a:rPr sz="900" b="0" i="0">
                 <a:solidFill>
                   <a:srgbClr val="4E5964"/>
                 </a:solidFill>
                 <a:latin typeface="Pretendard"/>
                 <a:ea typeface="Pretendard"/>
               </a:rPr>
-              <a:t>제품 사진과 정보를 넣으면 상세페이지를 처음부터 만들어 줍니다.</a:t>
-            </a:r>
-          </a:p>
-        </p:txBody>
-      </p:sp>
-      <p:sp>
-        <p:nvSpPr>
-          <p:cNvPr id="10" name="Rectangle 9"/>
-          <p:cNvSpPr/>
-          <p:nvPr/>
-        </p:nvSpPr>
-        <p:spPr>
-          <a:xfrm>
-            <a:off x="822960" y="3956297"/>
-            <a:ext cx="29260" cy="566928"/>
-          </a:xfrm>
-          <a:prstGeom prst="rect">
-            <a:avLst/>
-          </a:prstGeom>
-          <a:solidFill>
-            <a:srgbClr val="0F4E53"/>
-          </a:solidFill>
-          <a:ln>
-            <a:noFill/>
-          </a:ln>
-          <a:effectLst/>
-        </p:spPr>
-        <p:style>
-          <a:lnRef idx="1">
-            <a:schemeClr val="accent1"/>
-          </a:lnRef>
-          <a:fillRef idx="3">
-            <a:schemeClr val="accent1"/>
-          </a:fillRef>
-          <a:effectRef idx="2">
-            <a:schemeClr val="accent1"/>
-          </a:effectRef>
-          <a:fontRef idx="minor">
-            <a:schemeClr val="lt1"/>
-          </a:fontRef>
-        </p:style>
-        <p:txBody>
-          <a:bodyPr rtlCol="0" anchor="ctr"/>
-          <a:lstStyle/>
-          <a:p>
-            <a:pPr algn="ctr"/>
-          </a:p>
-        </p:txBody>
-      </p:sp>
-      <p:sp>
-        <p:nvSpPr>
-          <p:cNvPr id="11" name="TextBox 10"/>
-          <p:cNvSpPr txBox="1"/>
-          <p:nvPr/>
-        </p:nvSpPr>
-        <p:spPr>
-          <a:xfrm>
-            <a:off x="1024128" y="3928865"/>
-            <a:ext cx="5760720" cy="658368"/>
-          </a:xfrm>
-          <a:prstGeom prst="rect">
-            <a:avLst/>
-          </a:prstGeom>
-          <a:noFill/>
-        </p:spPr>
-        <p:txBody>
-          <a:bodyPr wrap="square" lIns="0" rIns="0" tIns="0" bIns="0">
-            <a:spAutoFit/>
-          </a:bodyPr>
-          <a:lstStyle/>
-          <a:p>
-            <a:pPr algn="l">
-              <a:lnSpc>
-                <a:spcPct val="100000"/>
-              </a:lnSpc>
-              <a:spcAft>
-                <a:spcPts val="200"/>
-              </a:spcAft>
-            </a:pPr>
-            <a:r>
-              <a:rPr sz="1250" b="0" i="0">
-                <a:solidFill>
-                  <a:srgbClr val="191F28"/>
-                </a:solidFill>
-                <a:latin typeface="Pretendard ExtraBold"/>
-                <a:ea typeface="Pretendard ExtraBold"/>
-              </a:rPr>
-              <a:t>기존 상세페이지 편집</a:t>
-            </a:r>
-          </a:p>
-          <a:p>
-            <a:pPr algn="l">
-              <a:lnSpc>
-                <a:spcPct val="125000"/>
-              </a:lnSpc>
-            </a:pPr>
-            <a:r>
-              <a:rPr sz="1050" b="0" i="0">
-                <a:solidFill>
-                  <a:srgbClr val="4E5964"/>
-                </a:solidFill>
-                <a:latin typeface="Pretendard"/>
-                <a:ea typeface="Pretendard"/>
-              </a:rPr>
-              <a:t>이미 있는 상세 캡처를 올려 블록 단위로 수정합니다.</a:t>
-            </a:r>
-          </a:p>
-        </p:txBody>
-      </p:sp>
-      <p:sp>
-        <p:nvSpPr>
-          <p:cNvPr id="12" name="Rectangle 11"/>
-          <p:cNvSpPr/>
-          <p:nvPr/>
-        </p:nvSpPr>
-        <p:spPr>
-          <a:xfrm>
-            <a:off x="822960" y="4706105"/>
-            <a:ext cx="29260" cy="566928"/>
-          </a:xfrm>
-          <a:prstGeom prst="rect">
-            <a:avLst/>
-          </a:prstGeom>
-          <a:solidFill>
-            <a:srgbClr val="191F28"/>
-          </a:solidFill>
-          <a:ln>
-            <a:noFill/>
-          </a:ln>
-          <a:effectLst/>
-        </p:spPr>
-        <p:style>
-          <a:lnRef idx="1">
-            <a:schemeClr val="accent1"/>
-          </a:lnRef>
-          <a:fillRef idx="3">
-            <a:schemeClr val="accent1"/>
-          </a:fillRef>
-          <a:effectRef idx="2">
-            <a:schemeClr val="accent1"/>
-          </a:effectRef>
-          <a:fontRef idx="minor">
-            <a:schemeClr val="lt1"/>
-          </a:fontRef>
-        </p:style>
-        <p:txBody>
-          <a:bodyPr rtlCol="0" anchor="ctr"/>
-          <a:lstStyle/>
-          <a:p>
-            <a:pPr algn="ctr"/>
-          </a:p>
-        </p:txBody>
-      </p:sp>
-      <p:sp>
-        <p:nvSpPr>
-          <p:cNvPr id="13" name="TextBox 12"/>
-          <p:cNvSpPr txBox="1"/>
-          <p:nvPr/>
-        </p:nvSpPr>
-        <p:spPr>
-          <a:xfrm>
-            <a:off x="1024128" y="4678673"/>
-            <a:ext cx="5760720" cy="658368"/>
-          </a:xfrm>
-          <a:prstGeom prst="rect">
-            <a:avLst/>
-          </a:prstGeom>
-          <a:noFill/>
-        </p:spPr>
-        <p:txBody>
-          <a:bodyPr wrap="square" lIns="0" rIns="0" tIns="0" bIns="0">
-            <a:spAutoFit/>
-          </a:bodyPr>
-          <a:lstStyle/>
-          <a:p>
-            <a:pPr algn="l">
-              <a:lnSpc>
-                <a:spcPct val="100000"/>
-              </a:lnSpc>
-              <a:spcAft>
-                <a:spcPts val="200"/>
-              </a:spcAft>
-            </a:pPr>
-            <a:r>
-              <a:rPr sz="1250" b="0" i="0">
-                <a:solidFill>
-                  <a:srgbClr val="191F28"/>
-                </a:solidFill>
-                <a:latin typeface="Pretendard ExtraBold"/>
-                <a:ea typeface="Pretendard ExtraBold"/>
-              </a:rPr>
-              <a:t>1688 영상 번역</a:t>
-            </a:r>
-          </a:p>
-          <a:p>
-            <a:pPr algn="l">
-              <a:lnSpc>
-                <a:spcPct val="125000"/>
-              </a:lnSpc>
-            </a:pPr>
-            <a:r>
-              <a:rPr sz="1050" b="0" i="0">
-                <a:solidFill>
-                  <a:srgbClr val="4E5964"/>
-                </a:solidFill>
-                <a:latin typeface="Pretendard"/>
-                <a:ea typeface="Pretendard"/>
-              </a:rPr>
-              <a:t>중국 상품 영상을 한국어 자막·더빙 영상으로 바꿉니다.</a:t>
-            </a:r>
-          </a:p>
-        </p:txBody>
-      </p:sp>
-      <p:sp>
-        <p:nvSpPr>
-          <p:cNvPr id="14" name="TextBox 13"/>
-          <p:cNvSpPr txBox="1"/>
-          <p:nvPr/>
-        </p:nvSpPr>
-        <p:spPr>
-          <a:xfrm>
-            <a:off x="822960" y="5483345"/>
-            <a:ext cx="5943600" cy="594360"/>
-          </a:xfrm>
-          <a:prstGeom prst="rect">
-            <a:avLst/>
-          </a:prstGeom>
-          <a:noFill/>
-        </p:spPr>
-        <p:txBody>
-          <a:bodyPr wrap="square" lIns="0" rIns="0" tIns="0" bIns="0">
-            <a:spAutoFit/>
-          </a:bodyPr>
-          <a:lstStyle/>
-          <a:p>
-            <a:pPr algn="l">
-              <a:lnSpc>
-                <a:spcPct val="135000"/>
-              </a:lnSpc>
-            </a:pPr>
-            <a:r>
-              <a:rPr sz="1100" b="0" i="0">
-                <a:solidFill>
-                  <a:srgbClr val="2B333D"/>
-                </a:solidFill>
-                <a:latin typeface="Pretendard"/>
-                <a:ea typeface="Pretendard"/>
-              </a:rPr>
-              <a:t>결과물 종류는 일반·의류·과일채소 상세페이지에 </a:t>
-            </a:r>
-            <a:r>
-              <a:rPr sz="1100" b="0" i="0">
-                <a:solidFill>
-                  <a:srgbClr val="2B333D"/>
-                </a:solidFill>
-                <a:latin typeface="Pretendard ExtraBold"/>
-                <a:ea typeface="Pretendard ExtraBold"/>
-              </a:rPr>
-              <a:t>카드뉴스</a:t>
-            </a:r>
-            <a:r>
-              <a:rPr sz="1100" b="0" i="0">
-                <a:solidFill>
-                  <a:srgbClr val="2B333D"/>
-                </a:solidFill>
-                <a:latin typeface="Pretendard"/>
-                <a:ea typeface="Pretendard"/>
-              </a:rPr>
-              <a:t>, </a:t>
-            </a:r>
-            <a:r>
-              <a:rPr sz="1100" b="0" i="0">
-                <a:solidFill>
-                  <a:srgbClr val="2B333D"/>
-                </a:solidFill>
-                <a:latin typeface="Pretendard ExtraBold"/>
-                <a:ea typeface="Pretendard ExtraBold"/>
-              </a:rPr>
-              <a:t>상품 썸네일</a:t>
-            </a:r>
-            <a:r>
-              <a:rPr sz="1100" b="0" i="0">
-                <a:solidFill>
-                  <a:srgbClr val="2B333D"/>
-                </a:solidFill>
-                <a:latin typeface="Pretendard"/>
-                <a:ea typeface="Pretendard"/>
-              </a:rPr>
-              <a:t>까지 다섯 가지입니다.</a:t>
+              <a:t>사진 한 장으로 최종 제목과 AI 모델별 후보까지 — 실제 결과</a:t>
             </a:r>
           </a:p>
         </p:txBody>
       </p:sp>
       <p:pic>
         <p:nvPicPr>
-          <p:cNvPr id="15" name="Picture 14" descr="fc_types.jpg"/>
+          <p:cNvPr id="17" name="Picture 16" descr="sm_recent.jpg"/>
           <p:cNvPicPr>
             <a:picLocks noChangeAspect="1"/>
           </p:cNvPicPr>
@@ -12722,8 +12682,8 @@
         </p:blipFill>
         <p:spPr>
           <a:xfrm>
-            <a:off x="8092440" y="3224777"/>
-            <a:ext cx="1783080" cy="2473054"/>
+            <a:off x="6263640" y="4957103"/>
+            <a:ext cx="3931920" cy="325039"/>
           </a:xfrm>
           <a:prstGeom prst="rect">
             <a:avLst/>
@@ -12745,7 +12705,47 @@
       </p:pic>
       <p:sp>
         <p:nvSpPr>
-          <p:cNvPr id="16" name="Rounded Rectangle 15"/>
+          <p:cNvPr id="18" name="TextBox 17"/>
+          <p:cNvSpPr txBox="1"/>
+          <p:nvPr/>
+        </p:nvSpPr>
+        <p:spPr>
+          <a:xfrm>
+            <a:off x="5989320" y="5507702"/>
+            <a:ext cx="4480559" cy="256032"/>
+          </a:xfrm>
+          <a:prstGeom prst="rect">
+            <a:avLst/>
+          </a:prstGeom>
+          <a:noFill/>
+        </p:spPr>
+        <p:txBody>
+          <a:bodyPr wrap="square" lIns="0" rIns="0" tIns="0" bIns="0">
+            <a:spAutoFit/>
+          </a:bodyPr>
+          <a:lstStyle/>
+          <a:p>
+            <a:pPr algn="ctr">
+              <a:lnSpc>
+                <a:spcPct val="100000"/>
+              </a:lnSpc>
+            </a:pPr>
+            <a:r>
+              <a:rPr sz="900" b="0" i="0">
+                <a:solidFill>
+                  <a:srgbClr val="4E5964"/>
+                </a:solidFill>
+                <a:latin typeface="Pretendard"/>
+                <a:ea typeface="Pretendard"/>
+              </a:rPr>
+              <a:t>실제 생성 결과 — 복사해서 바로 씁니다</a:t>
+            </a:r>
+          </a:p>
+        </p:txBody>
+      </p:sp>
+      <p:sp>
+        <p:nvSpPr>
+          <p:cNvPr id="19" name="Rounded Rectangle 18"/>
           <p:cNvSpPr/>
           <p:nvPr/>
         </p:nvSpPr>

--- a/slides.pptx
+++ b/slides.pptx
@@ -12440,7 +12440,7 @@
                 <a:latin typeface="Pretendard"/>
                 <a:ea typeface="Pretendard"/>
               </a:rPr>
-              <a:t>네이버쇼핑은 검색 노출 폭, 쿠팡은 구매 판단 키워드, 일반몰은 가독성 — 채널을 고르면 그에 맞춰 짓습니다.</a:t>
+              <a:t>네이버쇼핑=노출 폭(탐색형 검색어까지 넓게) · 쿠팡=구매 판단(정체성·속성 먼저) · 일반몰=가독성(읽기 좋은 순서).</a:t>
             </a:r>
           </a:p>
         </p:txBody>
